--- a/docs/Tesis_Defensa_Presentacion.pptx
+++ b/docs/Tesis_Defensa_Presentacion.pptx
@@ -1750,7 +1750,7 @@
           <a:p>
             <a:r>
               <a:rPr lang="en-US" dirty="0"/>
-              <a:t>El corazón de la tesis: cinco elementos estructurantes (un disco + cuatro líneas de largo 2r+1). Las respuestas lineales se promedian y se SUMAN a la del disco: la suma acumula evidencia de ambas geometrías, el máximo solo elige una. Entre fuentes sí se toma el máximo, y la reconstrucción pondera con m.</a:t>
+              <a:t>El corazón de la tesis, leído sobre el flujograma: cinco elementos estructurantes (un disco + cuatro líneas de largo 2r+1) por fuente; las respuestas lineales se promedian y se SUMAN a la del disco — la suma acumula evidencia de ambas geometrías, el máximo solo elige una. Entre fuentes sí se toma el máximo, y la reconstrucción pondera con m. El PSO (caja punteada) calibra r y m.</a:t>
             </a:r>
             <a:endParaRPr lang="en-US" dirty="0"/>
           </a:p>
@@ -9449,7 +9449,7 @@
       </p:sp>
       <p:pic>
         <p:nvPicPr>
-          <p:cNvPr id="4" name="Image 0" descr="C:/Users/Usuario/Documents/unv/mastertesis/tesis_mciencias_datos/docs/figures/fig_cinco_se.png">    </p:cNvPr>
+          <p:cNvPr id="4" name="Image 0" descr="C:/Users/Usuario/Documents/unv/mastertesis/tesis_mciencias_datos/docs/figures/fig_flujo_propuesta.png">    </p:cNvPr>
           <p:cNvPicPr>
             <a:picLocks noChangeAspect="1"/>
           </p:cNvPicPr>
@@ -9463,8 +9463,8 @@
         </p:blipFill>
         <p:spPr>
           <a:xfrm>
-            <a:off x="1371600" y="841248"/>
-            <a:ext cx="6400800" cy="1280160"/>
+            <a:off x="411480" y="777240"/>
+            <a:ext cx="3246120" cy="4206240"/>
           </a:xfrm>
           <a:prstGeom prst="rect">
             <a:avLst/>
@@ -9473,7 +9473,7 @@
       </p:pic>
       <p:pic>
         <p:nvPicPr>
-          <p:cNvPr id="5" name="Image 1" descr="C:\Users\Usuario\AppData\Local\Temp\claude\C--Users-Usuario-Documents-unv-mastertesis\fa0a2acc-a0da-4701-a920-18b20c70d3b2\scratchpad\pptx_build/assets/f_lineas.png">    </p:cNvPr>
+          <p:cNvPr id="5" name="Image 1" descr="C:/Users/Usuario/Documents/unv/mastertesis/tesis_mciencias_datos/docs/figures/fig_cinco_se.png">    </p:cNvPr>
           <p:cNvPicPr>
             <a:picLocks noChangeAspect="1"/>
           </p:cNvPicPr>
@@ -9487,17 +9487,144 @@
         </p:blipFill>
         <p:spPr>
           <a:xfrm>
-            <a:off x="822960" y="2487168"/>
-            <a:ext cx="4937760" cy="535838"/>
+            <a:off x="3977640" y="868680"/>
+            <a:ext cx="4754880" cy="950976"/>
           </a:xfrm>
           <a:prstGeom prst="rect">
             <a:avLst/>
           </a:prstGeom>
         </p:spPr>
       </p:pic>
+      <p:sp>
+        <p:nvSpPr>
+          <p:cNvPr id="6" name="Text 2"/>
+          <p:cNvSpPr/>
+          <p:nvPr/>
+        </p:nvSpPr>
+        <p:spPr>
+          <a:xfrm>
+            <a:off x="3977640" y="2057400"/>
+            <a:ext cx="4754880" cy="2011680"/>
+          </a:xfrm>
+          <a:prstGeom prst="rect">
+            <a:avLst/>
+          </a:prstGeom>
+          <a:noFill/>
+          <a:ln/>
+        </p:spPr>
+        <p:txBody>
+          <a:bodyPr wrap="square" lIns="0" tIns="0" rIns="0" bIns="0" rtlCol="0" anchor="t"/>
+          <a:lstStyle/>
+          <a:p>
+            <a:pPr marL="177800" indent="-177800">
+              <a:spcAft>
+                <a:spcPts val="600"/>
+              </a:spcAft>
+              <a:buSzPct val="100000"/>
+              <a:buChar char="•"/>
+            </a:pPr>
+            <a:r>
+              <a:rPr lang="en-US" sz="1200" dirty="0">
+                <a:solidFill>
+                  <a:srgbClr val="1A1A1A"/>
+                </a:solidFill>
+                <a:latin typeface="Times New Roman" pitchFamily="34" charset="0"/>
+                <a:ea typeface="Times New Roman" pitchFamily="34" charset="-122"/>
+                <a:cs typeface="Times New Roman" pitchFamily="34" charset="-120"/>
+              </a:rPr>
+              <a:t>Una sola escala (sin cascada multiescala).</a:t>
+            </a:r>
+            <a:endParaRPr lang="en-US" sz="1200" dirty="0"/>
+          </a:p>
+          <a:p>
+            <a:pPr marL="177800" indent="-177800">
+              <a:spcAft>
+                <a:spcPts val="600"/>
+              </a:spcAft>
+              <a:buSzPct val="100000"/>
+              <a:buChar char="•"/>
+            </a:pPr>
+            <a:r>
+              <a:rPr lang="en-US" sz="1200" dirty="0">
+                <a:solidFill>
+                  <a:srgbClr val="1A1A1A"/>
+                </a:solidFill>
+                <a:latin typeface="Times New Roman" pitchFamily="34" charset="0"/>
+                <a:ea typeface="Times New Roman" pitchFamily="34" charset="-122"/>
+                <a:cs typeface="Times New Roman" pitchFamily="34" charset="-120"/>
+              </a:rPr>
+              <a:t>Promedio de las 4 orientaciones lineales (ec. 7) + respuesta del disco (ec. 8).</a:t>
+            </a:r>
+            <a:endParaRPr lang="en-US" sz="1200" dirty="0"/>
+          </a:p>
+          <a:p>
+            <a:pPr marL="177800" indent="-177800">
+              <a:spcAft>
+                <a:spcPts val="600"/>
+              </a:spcAft>
+              <a:buSzPct val="100000"/>
+              <a:buChar char="•"/>
+            </a:pPr>
+            <a:r>
+              <a:rPr lang="en-US" sz="1200" b="1" dirty="0">
+                <a:solidFill>
+                  <a:srgbClr val="1A1A1A"/>
+                </a:solidFill>
+                <a:latin typeface="Times New Roman" pitchFamily="34" charset="0"/>
+                <a:ea typeface="Times New Roman" pitchFamily="34" charset="-122"/>
+                <a:cs typeface="Times New Roman" pitchFamily="34" charset="-120"/>
+              </a:rPr>
+              <a:t>Novedad: suma de la rama lineal y la del disco (en lugar del máximo).</a:t>
+            </a:r>
+            <a:endParaRPr lang="en-US" sz="1200" dirty="0"/>
+          </a:p>
+          <a:p>
+            <a:pPr marL="177800" indent="-177800">
+              <a:spcAft>
+                <a:spcPts val="600"/>
+              </a:spcAft>
+              <a:buSzPct val="100000"/>
+              <a:buChar char="•"/>
+            </a:pPr>
+            <a:r>
+              <a:rPr lang="en-US" sz="1200" dirty="0">
+                <a:solidFill>
+                  <a:srgbClr val="1A1A1A"/>
+                </a:solidFill>
+                <a:latin typeface="Times New Roman" pitchFamily="34" charset="0"/>
+                <a:ea typeface="Times New Roman" pitchFamily="34" charset="-122"/>
+                <a:cs typeface="Times New Roman" pitchFamily="34" charset="-120"/>
+              </a:rPr>
+              <a:t>Máximo entre fuentes (ec. 10) y reconstrucción ponderada con m (ec. 11).</a:t>
+            </a:r>
+            <a:endParaRPr lang="en-US" sz="1200" dirty="0"/>
+          </a:p>
+          <a:p>
+            <a:pPr marL="177800" indent="-177800">
+              <a:spcAft>
+                <a:spcPts val="600"/>
+              </a:spcAft>
+              <a:buSzPct val="100000"/>
+              <a:buChar char="•"/>
+            </a:pPr>
+            <a:r>
+              <a:rPr lang="en-US" sz="1200" dirty="0">
+                <a:solidFill>
+                  <a:srgbClr val="1A1A1A"/>
+                </a:solidFill>
+                <a:latin typeface="Times New Roman" pitchFamily="34" charset="0"/>
+                <a:ea typeface="Times New Roman" pitchFamily="34" charset="-122"/>
+                <a:cs typeface="Times New Roman" pitchFamily="34" charset="-120"/>
+              </a:rPr>
+              <a:t>Esquema de Bala et al. (2024), trasladado del realce de fondo de ojo a la fusión VIS/IR.</a:t>
+            </a:r>
+            <a:endParaRPr lang="en-US" sz="1200" dirty="0"/>
+          </a:p>
+        </p:txBody>
+      </p:sp>
       <p:pic>
         <p:nvPicPr>
-          <p:cNvPr id="6" name="Image 2" descr="C:\Users\Usuario\AppData\Local\Temp\claude\C--Users-Usuario-Documents-unv-mastertesis\fa0a2acc-a0da-4701-a920-18b20c70d3b2\scratchpad\pptx_build/assets/f_suma.png">    </p:cNvPr>
+          <p:cNvPr id="7" name="Image 2" descr="C:\Users\Usuario\AppData\Local\Temp\claude\C--Users-Usuario-Documents-unv-mastertesis\fa0a2acc-a0da-4701-a920-18b20c70d3b2\scratchpad\pptx_build/assets/f_suma.png">    </p:cNvPr>
           <p:cNvPicPr>
             <a:picLocks noChangeAspect="1"/>
           </p:cNvPicPr>
@@ -9511,144 +9638,14 @@
         </p:blipFill>
         <p:spPr>
           <a:xfrm>
-            <a:off x="822960" y="3246120"/>
-            <a:ext cx="4937760" cy="359359"/>
+            <a:off x="4114800" y="4343400"/>
+            <a:ext cx="4480560" cy="326441"/>
           </a:xfrm>
           <a:prstGeom prst="rect">
             <a:avLst/>
           </a:prstGeom>
         </p:spPr>
       </p:pic>
-      <p:pic>
-        <p:nvPicPr>
-          <p:cNvPr id="7" name="Image 3" descr="C:\Users\Usuario\AppData\Local\Temp\claude\C--Users-Usuario-Documents-unv-mastertesis\fa0a2acc-a0da-4701-a920-18b20c70d3b2\scratchpad\pptx_build/assets/f_fusion.png">    </p:cNvPr>
-          <p:cNvPicPr>
-            <a:picLocks noChangeAspect="1"/>
-          </p:cNvPicPr>
-          <p:nvPr/>
-        </p:nvPicPr>
-        <p:blipFill>
-          <a:blip r:embed="rId4"/>
-          <a:stretch>
-            <a:fillRect/>
-          </a:stretch>
-        </p:blipFill>
-        <p:spPr>
-          <a:xfrm>
-            <a:off x="822960" y="3858768"/>
-            <a:ext cx="4937760" cy="440741"/>
-          </a:xfrm>
-          <a:prstGeom prst="rect">
-            <a:avLst/>
-          </a:prstGeom>
-        </p:spPr>
-      </p:pic>
-      <p:sp>
-        <p:nvSpPr>
-          <p:cNvPr id="8" name="Text 2"/>
-          <p:cNvSpPr/>
-          <p:nvPr/>
-        </p:nvSpPr>
-        <p:spPr>
-          <a:xfrm>
-            <a:off x="5989320" y="2487168"/>
-            <a:ext cx="2743200" cy="2286000"/>
-          </a:xfrm>
-          <a:prstGeom prst="rect">
-            <a:avLst/>
-          </a:prstGeom>
-          <a:noFill/>
-          <a:ln/>
-        </p:spPr>
-        <p:txBody>
-          <a:bodyPr wrap="square" lIns="0" tIns="0" rIns="0" bIns="0" rtlCol="0" anchor="t"/>
-          <a:lstStyle/>
-          <a:p>
-            <a:pPr marL="177800" indent="-177800">
-              <a:spcAft>
-                <a:spcPts val="500"/>
-              </a:spcAft>
-              <a:buSzPct val="100000"/>
-              <a:buChar char="•"/>
-            </a:pPr>
-            <a:r>
-              <a:rPr lang="en-US" sz="1150" dirty="0">
-                <a:solidFill>
-                  <a:srgbClr val="1A1A1A"/>
-                </a:solidFill>
-                <a:latin typeface="Times New Roman" pitchFamily="34" charset="0"/>
-                <a:ea typeface="Times New Roman" pitchFamily="34" charset="-122"/>
-                <a:cs typeface="Times New Roman" pitchFamily="34" charset="-120"/>
-              </a:rPr>
-              <a:t>Una sola escala (sin cascada multiescala).</a:t>
-            </a:r>
-            <a:endParaRPr lang="en-US" sz="1150" dirty="0"/>
-          </a:p>
-          <a:p>
-            <a:pPr marL="177800" indent="-177800">
-              <a:spcAft>
-                <a:spcPts val="500"/>
-              </a:spcAft>
-              <a:buSzPct val="100000"/>
-              <a:buChar char="•"/>
-            </a:pPr>
-            <a:r>
-              <a:rPr lang="en-US" sz="1150" dirty="0">
-                <a:solidFill>
-                  <a:srgbClr val="1A1A1A"/>
-                </a:solidFill>
-                <a:latin typeface="Times New Roman" pitchFamily="34" charset="0"/>
-                <a:ea typeface="Times New Roman" pitchFamily="34" charset="-122"/>
-                <a:cs typeface="Times New Roman" pitchFamily="34" charset="-120"/>
-              </a:rPr>
-              <a:t>Promedio de las 4 orientaciones lineales.</a:t>
-            </a:r>
-            <a:endParaRPr lang="en-US" sz="1150" dirty="0"/>
-          </a:p>
-          <a:p>
-            <a:pPr marL="177800" indent="-177800">
-              <a:spcAft>
-                <a:spcPts val="500"/>
-              </a:spcAft>
-              <a:buSzPct val="100000"/>
-              <a:buChar char="•"/>
-            </a:pPr>
-            <a:r>
-              <a:rPr lang="en-US" sz="1150" b="1" dirty="0">
-                <a:solidFill>
-                  <a:srgbClr val="1A1A1A"/>
-                </a:solidFill>
-                <a:latin typeface="Times New Roman" pitchFamily="34" charset="0"/>
-                <a:ea typeface="Times New Roman" pitchFamily="34" charset="-122"/>
-                <a:cs typeface="Times New Roman" pitchFamily="34" charset="-120"/>
-              </a:rPr>
-              <a:t>Novedad: suma de la rama lineal y la del disco (en lugar del máximo).</a:t>
-            </a:r>
-            <a:endParaRPr lang="en-US" sz="1150" dirty="0"/>
-          </a:p>
-          <a:p>
-            <a:pPr marL="177800" indent="-177800">
-              <a:spcAft>
-                <a:spcPts val="500"/>
-              </a:spcAft>
-              <a:buSzPct val="100000"/>
-              <a:buChar char="•"/>
-            </a:pPr>
-            <a:r>
-              <a:rPr lang="en-US" sz="1150" dirty="0">
-                <a:solidFill>
-                  <a:srgbClr val="1A1A1A"/>
-                </a:solidFill>
-                <a:latin typeface="Times New Roman" pitchFamily="34" charset="0"/>
-                <a:ea typeface="Times New Roman" pitchFamily="34" charset="-122"/>
-                <a:cs typeface="Times New Roman" pitchFamily="34" charset="-120"/>
-              </a:rPr>
-              <a:t>Esquema de Bala et al. (2024), trasladado del realce de fondo de ojo a la fusión VIS/IR.</a:t>
-            </a:r>
-            <a:endParaRPr lang="en-US" sz="1150" dirty="0"/>
-          </a:p>
-        </p:txBody>
-      </p:sp>
     </p:spTree>
   </p:cSld>
   <p:clrMapOvr>

--- a/docs/Tesis_Defensa_Presentacion.pptx
+++ b/docs/Tesis_Defensa_Presentacion.pptx
@@ -5367,7 +5367,7 @@
                           <a:ea typeface="Times New Roman" pitchFamily="34" charset="-122"/>
                           <a:cs typeface="Times New Roman" pitchFamily="34" charset="-120"/>
                         </a:rPr>
-                        <a:t>0,304</a:t>
+                        <a:t>0,305</a:t>
                       </a:r>
                       <a:endParaRPr lang="en-US" sz="1200" dirty="0">
                         <a:latin typeface="Times New Roman" charset="0"/>
@@ -5432,7 +5432,7 @@
                           <a:ea typeface="Times New Roman" pitchFamily="34" charset="-122"/>
                           <a:cs typeface="Times New Roman" pitchFamily="34" charset="-120"/>
                         </a:rPr>
-                        <a:t>0,584</a:t>
+                        <a:t>0,585</a:t>
                       </a:r>
                       <a:endParaRPr lang="en-US" sz="1200" dirty="0">
                         <a:latin typeface="Times New Roman" charset="0"/>
@@ -6388,7 +6388,7 @@
                 <a:ea typeface="Times New Roman" pitchFamily="34" charset="-122"/>
                 <a:cs typeface="Times New Roman" pitchFamily="34" charset="-120"/>
               </a:rPr>
-              <a:t>Frente al Top-Hat clásico, la propuesta mejora en todas las métricas de calidad de fusión (Qabf 0,500 vs 0,304 · Nabf 0,041 vs 0,584 · SSIM 0,782 vs 0,578).</a:t>
+              <a:t>Frente al Top-Hat clásico, la propuesta mejora en todas las métricas de calidad de fusión (Qabf 0,500 vs 0,305 · Nabf 0,041 vs 0,585 · SSIM 0,782 vs 0,578).</a:t>
             </a:r>
             <a:endParaRPr lang="en-US" sz="1300" dirty="0"/>
           </a:p>
@@ -6855,7 +6855,7 @@
                 <a:ea typeface="Times New Roman" pitchFamily="34" charset="-122"/>
                 <a:cs typeface="Times New Roman" pitchFamily="34" charset="-120"/>
               </a:rPr>
-              <a:t>El banco disco + líneas con suma de ramas mejora SSIM (0,782 vs 0,578) y reduce Nabf (0,041 vs 0,584) frente al Top-Hat clásico, con significancia estadística (Wilcoxon–Holm).</a:t>
+              <a:t>El banco disco + líneas con suma de ramas mejora SSIM (0,782 vs 0,578) y reduce Nabf (0,041 vs 0,585) frente al Top-Hat clásico, con significancia estadística (Wilcoxon–Holm).</a:t>
             </a:r>
             <a:endParaRPr lang="en-US" sz="1250" dirty="0"/>
           </a:p>

--- a/docs/Tesis_Defensa_Presentacion.pptx
+++ b/docs/Tesis_Defensa_Presentacion.pptx
@@ -7712,7 +7712,7 @@
                 <a:ea typeface="Times New Roman" pitchFamily="34" charset="-122"/>
                 <a:cs typeface="Times New Roman" pitchFamily="34" charset="-120"/>
               </a:rPr>
-              <a:t>Código y experimentos reproducibles:  github.com/YanBajac/tesis_mciencias_datos</a:t>
+              <a:t>Código y experimentos reproducibles:  github.com/YanBajac/TFM_Fusion_Imagenes_Propuesta_Oficial</a:t>
             </a:r>
             <a:endParaRPr lang="en-US" sz="1200" dirty="0"/>
           </a:p>

--- a/docs/Tesis_Defensa_Presentacion.pptx
+++ b/docs/Tesis_Defensa_Presentacion.pptx
@@ -22,9 +22,10 @@
     <p:sldId id="270" r:id="rId16"/>
     <p:sldId id="271" r:id="rId17"/>
     <p:sldId id="272" r:id="rId18"/>
+    <p:sldId id="273" r:id="rId19"/>
   </p:sldIdLst>
   <p:notesMasterIdLst>
-    <p:notesMasterId r:id="rId19"/>
+    <p:notesMasterId r:id="rId20"/>
   </p:notesMasterIdLst>
   <p:sldSz cx="9144000" cy="5143500"/>
   <p:notesSz cx="5143500" cy="9144000"/>
@@ -606,7 +607,7 @@
           <a:p>
             <a:r>
               <a:rPr lang="en-US" dirty="0"/>
-              <a:t>Escena representativa: la propuesta (recuadro rojo) integra la firma térmica de las personas con la textura de la casa y la vegetación, con menos halos y ruido que RP/DWT y más contraste local que el clásico.</a:t>
+              <a:t>Dos evaluaciones complementarias: calidad de imagen (TNO, sin referencia) y utilidad en tarea (LLVIP, con verdad de campo). En LLVIP solo cambian los píxeles de entrada; las etiquetas son las mismas, así el mAP aísla el efecto de la fusión.</a:t>
             </a:r>
             <a:endParaRPr lang="en-US" dirty="0"/>
           </a:p>
@@ -694,7 +695,7 @@
           <a:p>
             <a:r>
               <a:rPr lang="en-US" dirty="0"/>
-              <a:t>Negritas = mejor por columna. No hay método universalmente dominante: DTCWT lidera bordes por una milésima, RP la correlación, LP el contraste. El perfil de la propuesta es limpieza (Nabf) y estructura (SSIM), quedando segunda en el resto a distancias mínimas.</a:t>
+              <a:t>Escena representativa: la propuesta (recuadro rojo) integra la firma térmica de las personas con la textura de la casa y la vegetación, con menos halos y ruido que RP/DWT y más contraste local que el clásico.</a:t>
             </a:r>
             <a:endParaRPr lang="en-US" dirty="0"/>
           </a:p>
@@ -782,7 +783,7 @@
           <a:p>
             <a:r>
               <a:rPr lang="en-US" dirty="0"/>
-              <a:t>La evidencia estadística sostiene las ventajas donde la propuesta las reclama: limpieza y estructura, con significancia tras corregir por comparaciones múltiples. El ranking global es honesto: la propuesta no domina todo; domina su perfil.</a:t>
+              <a:t>Negritas = mejor por columna. No hay método universalmente dominante: DTCWT lidera bordes por una milésima, RP la correlación, LP el contraste. El perfil de la propuesta es limpieza (Nabf) y estructura (SSIM), quedando segunda en el resto a distancias mínimas.</a:t>
             </a:r>
             <a:endParaRPr lang="en-US" dirty="0"/>
           </a:p>
@@ -870,7 +871,7 @@
           <a:p>
             <a:r>
               <a:rPr lang="en-US" dirty="0"/>
-              <a:t>El hallazgo más matizado: fusionar aporta muchísimo frente al VIS, pero ninguna fusión supera al IR puro en esta tarea nocturna. Entre fusiones, las diferencias son pequeñas: la calidad de imagen no se traslada automáticamente al mAP.</a:t>
+              <a:t>La evidencia estadística sostiene las ventajas donde la propuesta las reclama: limpieza y estructura, con significancia tras corregir por comparaciones múltiples. El ranking global es honesto: la propuesta no domina todo; domina su perfil.</a:t>
             </a:r>
             <a:endParaRPr lang="en-US" dirty="0"/>
           </a:p>
@@ -958,7 +959,7 @@
           <a:p>
             <a:r>
               <a:rPr lang="en-US" dirty="0"/>
-              <a:t>H1 y H2 quedan sostenidas con evidencia estadística. H3 solo parcialmente: es el resultado más honesto del trabajo y anticipa la pregunta natural del tribunal — calidad de imagen y utilidad en tarea son criterios distintos.</a:t>
+              <a:t>El hallazgo más matizado: fusionar aporta muchísimo frente al VIS, pero ninguna fusión supera al IR puro en esta tarea nocturna. Entre fusiones, las diferencias son pequeñas: la calidad de imagen no se traslada automáticamente al mAP.</a:t>
             </a:r>
             <a:endParaRPr lang="en-US" dirty="0"/>
           </a:p>
@@ -1046,7 +1047,7 @@
           <a:p>
             <a:r>
               <a:rPr lang="en-US" dirty="0"/>
-              <a:t>Cinco conclusiones: método formulado, óptimo hallado, perfil de calidad validado, ventaja sobre el clásico demostrada, y la lección sobre calidad vs. tarea.</a:t>
+              <a:t>H1 y H2 quedan sostenidas con evidencia estadística. H3 solo parcialmente: es el resultado más honesto del trabajo y anticipa la pregunta natural del tribunal — calidad de imagen y utilidad en tarea son criterios distintos.</a:t>
             </a:r>
             <a:endParaRPr lang="en-US" dirty="0"/>
           </a:p>
@@ -1134,7 +1135,7 @@
           <a:p>
             <a:r>
               <a:rPr lang="en-US" dirty="0"/>
-              <a:t>Cerrar con la recomendación práctica: qué método elegir según el criterio operativo. Dejar claro que el pipeline completo es reproducible desde el repositorio.</a:t>
+              <a:t>Cinco conclusiones: método formulado, óptimo hallado, perfil de calidad validado, ventaja sobre el clásico demostrada, y la lección sobre calidad vs. tarea.</a:t>
             </a:r>
             <a:endParaRPr lang="en-US" dirty="0"/>
           </a:p>
@@ -1222,7 +1223,7 @@
           <a:p>
             <a:r>
               <a:rPr lang="en-US" dirty="0"/>
-              <a:t>Agradecer a la mesa y al orientador. Ofrecer el repositorio para cualquier verificación.</a:t>
+              <a:t>Cerrar con la recomendación práctica: qué método elegir según el criterio operativo. Dejar claro que el pipeline completo es reproducible desde el repositorio.</a:t>
             </a:r>
             <a:endParaRPr lang="en-US" dirty="0"/>
           </a:p>
@@ -1246,6 +1247,94 @@
             <a:fld id="{F7021451-1387-4CA6-816F-3879F97B5CBC}" type="slidenum">
               <a:rPr lang="en-US"/>
               <a:t>17</a:t>
+            </a:fld>
+            <a:endParaRPr lang="en-US"/>
+          </a:p>
+        </p:txBody>
+      </p:sp>
+    </p:spTree>
+    <p:extLst>
+      <p:ext uri="{BB962C8B-B14F-4D97-AF65-F5344CB8AC3E}">
+        <p14:creationId xmlns:p14="http://schemas.microsoft.com/office/powerpoint/2010/main" val="1024086991"/>
+      </p:ext>
+    </p:extLst>
+  </p:cSld>
+  <p:clrMapOvr>
+    <a:masterClrMapping/>
+  </p:clrMapOvr>
+</p:notes>
+</file>
+
+<file path=ppt/notesSlides/notesSlide18.xml><?xml version="1.0" encoding="utf-8"?>
+<p:notes xmlns:a="http://schemas.openxmlformats.org/drawingml/2006/main" xmlns:r="http://schemas.openxmlformats.org/officeDocument/2006/relationships" xmlns:p="http://schemas.openxmlformats.org/presentationml/2006/main">
+  <p:cSld>
+    <p:spTree>
+      <p:nvGrpSpPr>
+        <p:cNvPr id="1" name=""/>
+        <p:cNvGrpSpPr/>
+        <p:nvPr/>
+      </p:nvGrpSpPr>
+      <p:grpSpPr>
+        <a:xfrm>
+          <a:off x="0" y="0"/>
+          <a:ext cx="0" cy="0"/>
+          <a:chOff x="0" y="0"/>
+          <a:chExt cx="0" cy="0"/>
+        </a:xfrm>
+      </p:grpSpPr>
+      <p:sp>
+        <p:nvSpPr>
+          <p:cNvPr id="2" name="Slide Image Placeholder 1"/>
+          <p:cNvSpPr>
+            <a:spLocks noGrp="1" noRot="1" noChangeAspect="1"/>
+          </p:cNvSpPr>
+          <p:nvPr>
+            <p:ph type="sldImg"/>
+          </p:nvPr>
+        </p:nvSpPr>
+        <p:spPr/>
+      </p:sp>
+      <p:sp>
+        <p:nvSpPr>
+          <p:cNvPr id="3" name="Notes Placeholder 2"/>
+          <p:cNvSpPr>
+            <a:spLocks noGrp="1"/>
+          </p:cNvSpPr>
+          <p:nvPr>
+            <p:ph type="body" idx="1"/>
+          </p:nvPr>
+        </p:nvSpPr>
+        <p:spPr/>
+        <p:txBody>
+          <a:bodyPr/>
+          <a:lstStyle/>
+          <a:p>
+            <a:r>
+              <a:rPr lang="en-US" dirty="0"/>
+              <a:t>Agradecer a la mesa y al orientador. Ofrecer el repositorio para cualquier verificación.</a:t>
+            </a:r>
+            <a:endParaRPr lang="en-US" dirty="0"/>
+          </a:p>
+        </p:txBody>
+      </p:sp>
+      <p:sp>
+        <p:nvSpPr>
+          <p:cNvPr id="4" name="Slide Number Placeholder 3"/>
+          <p:cNvSpPr>
+            <a:spLocks noGrp="1"/>
+          </p:cNvSpPr>
+          <p:nvPr>
+            <p:ph type="sldNum" sz="quarter" idx="10"/>
+          </p:nvPr>
+        </p:nvSpPr>
+        <p:spPr/>
+        <p:txBody>
+          <a:bodyPr/>
+          <a:lstStyle/>
+          <a:p>
+            <a:fld id="{F7021451-1387-4CA6-816F-3879F97B5CBC}" type="slidenum">
+              <a:rPr lang="en-US"/>
+              <a:t>18</a:t>
             </a:fld>
             <a:endParaRPr lang="en-US"/>
           </a:p>
@@ -1926,7 +2015,7 @@
           <a:p>
             <a:r>
               <a:rPr lang="en-US" dirty="0"/>
-              <a:t>Dos evaluaciones complementarias: calidad de imagen (TNO, sin referencia) y utilidad en tarea (LLVIP, con verdad de campo). En LLVIP solo cambian los píxeles de entrada; las etiquetas son las mismas, así el mAP aísla el efecto de la fusión.</a:t>
+              <a:t>Respuesta a la pregunta del tribunal sobre la elección de la aptitud: repetimos el barrido con la fórmula del trabajo replicado. Resultado: su propio óptimo cae al piso del rango (m=0,30) y, sin restricciones, coincide con el nuestro (m≈0,07). La aptitud de fidelidad pura además apaga el banco de SE (r=1). La curva demuestra que ningún enjambre puede converger en [0,5-2]: es el paisaje, no la búsqueda.</a:t>
             </a:r>
             <a:endParaRPr lang="en-US" dirty="0"/>
           </a:p>
@@ -2666,7 +2755,7 @@
                 <a:ea typeface="Times New Roman" pitchFamily="34" charset="-122"/>
                 <a:cs typeface="Times New Roman" pitchFamily="34" charset="-120"/>
               </a:rPr>
-              <a:t>7. Resultados cualitativos</a:t>
+              <a:t>6. Diseño experimental</a:t>
             </a:r>
             <a:endParaRPr lang="en-US" sz="2300" dirty="0"/>
           </a:p>
@@ -2705,46 +2794,22 @@
                 <a:ea typeface="Times New Roman" pitchFamily="34" charset="-122"/>
                 <a:cs typeface="Times New Roman" pitchFamily="34" charset="-120"/>
               </a:rPr>
-              <a:t>10 / 17</a:t>
+              <a:t>10 / 18</a:t>
             </a:r>
             <a:endParaRPr lang="en-US" sz="900" dirty="0"/>
           </a:p>
         </p:txBody>
       </p:sp>
-      <p:pic>
-        <p:nvPicPr>
-          <p:cNvPr id="4" name="Image 0" descr="C:/Users/Usuario/Documents/unv/mastertesis/tesis_mciencias_datos/docs/figures/cualitativas/montaje_07.png">    </p:cNvPr>
-          <p:cNvPicPr>
-            <a:picLocks noChangeAspect="1"/>
-          </p:cNvPicPr>
+      <p:sp>
+        <p:nvSpPr>
+          <p:cNvPr id="4" name="Text 2"/>
+          <p:cNvSpPr/>
           <p:nvPr/>
-        </p:nvPicPr>
-        <p:blipFill>
-          <a:blip r:embed="rId1"/>
-          <a:stretch>
-            <a:fillRect/>
-          </a:stretch>
-        </p:blipFill>
+        </p:nvSpPr>
         <p:spPr>
           <a:xfrm>
-            <a:off x="1764792" y="777240"/>
-            <a:ext cx="5623560" cy="4005072"/>
-          </a:xfrm>
-          <a:prstGeom prst="rect">
-            <a:avLst/>
-          </a:prstGeom>
-        </p:spPr>
-      </p:pic>
-      <p:sp>
-        <p:nvSpPr>
-          <p:cNvPr id="5" name="Text 2"/>
-          <p:cNvSpPr/>
-          <p:nvPr/>
-        </p:nvSpPr>
-        <p:spPr>
-          <a:xfrm>
-            <a:off x="457200" y="4828032"/>
-            <a:ext cx="7680960" cy="274320"/>
+            <a:off x="457200" y="868680"/>
+            <a:ext cx="4023360" cy="274320"/>
           </a:xfrm>
           <a:prstGeom prst="rect">
             <a:avLst/>
@@ -2760,17 +2825,247 @@
               <a:buNone/>
             </a:pPr>
             <a:r>
-              <a:rPr lang="en-US" sz="1000" i="1" dirty="0">
-                <a:solidFill>
-                  <a:srgbClr val="666666"/>
-                </a:solidFill>
-                <a:latin typeface="Times New Roman" pitchFamily="34" charset="0"/>
-                <a:ea typeface="Times New Roman" pitchFamily="34" charset="-122"/>
-                <a:cs typeface="Times New Roman" pitchFamily="34" charset="-120"/>
-              </a:rPr>
-              <a:t>Los 20 montajes por escena están disponibles en el repositorio (docs/figures/cualitativas/).</a:t>
-            </a:r>
-            <a:endParaRPr lang="en-US" sz="1000" dirty="0"/>
+              <a:rPr lang="en-US" sz="1400" b="1" dirty="0">
+                <a:solidFill>
+                  <a:srgbClr val="8B1A1A"/>
+                </a:solidFill>
+                <a:latin typeface="Times New Roman" pitchFamily="34" charset="0"/>
+                <a:ea typeface="Times New Roman" pitchFamily="34" charset="-122"/>
+                <a:cs typeface="Times New Roman" pitchFamily="34" charset="-120"/>
+              </a:rPr>
+              <a:t>Benchmark de calidad</a:t>
+            </a:r>
+            <a:endParaRPr lang="en-US" sz="1400" dirty="0"/>
+          </a:p>
+        </p:txBody>
+      </p:sp>
+      <p:sp>
+        <p:nvSpPr>
+          <p:cNvPr id="5" name="Text 3"/>
+          <p:cNvSpPr/>
+          <p:nvPr/>
+        </p:nvSpPr>
+        <p:spPr>
+          <a:xfrm>
+            <a:off x="457200" y="1188720"/>
+            <a:ext cx="4023360" cy="3291840"/>
+          </a:xfrm>
+          <a:prstGeom prst="rect">
+            <a:avLst/>
+          </a:prstGeom>
+          <a:noFill/>
+          <a:ln/>
+        </p:spPr>
+        <p:txBody>
+          <a:bodyPr wrap="square" lIns="0" tIns="0" rIns="0" bIns="0" rtlCol="0" anchor="t"/>
+          <a:lstStyle/>
+          <a:p>
+            <a:pPr marL="177800" indent="-177800">
+              <a:spcAft>
+                <a:spcPts val="800"/>
+              </a:spcAft>
+              <a:buSzPct val="100000"/>
+              <a:buChar char="•"/>
+            </a:pPr>
+            <a:r>
+              <a:rPr lang="en-US" sz="1250" dirty="0">
+                <a:solidFill>
+                  <a:srgbClr val="1A1A1A"/>
+                </a:solidFill>
+                <a:latin typeface="Times New Roman" pitchFamily="34" charset="0"/>
+                <a:ea typeface="Times New Roman" pitchFamily="34" charset="-122"/>
+                <a:cs typeface="Times New Roman" pitchFamily="34" charset="-120"/>
+              </a:rPr>
+              <a:t>20 pares VIS/IR del dataset TNO (Toet, 2014).</a:t>
+            </a:r>
+            <a:endParaRPr lang="en-US" sz="1250" dirty="0"/>
+          </a:p>
+          <a:p>
+            <a:pPr marL="177800" indent="-177800">
+              <a:spcAft>
+                <a:spcPts val="800"/>
+              </a:spcAft>
+              <a:buSzPct val="100000"/>
+              <a:buChar char="•"/>
+            </a:pPr>
+            <a:r>
+              <a:rPr lang="en-US" sz="1250" dirty="0">
+                <a:solidFill>
+                  <a:srgbClr val="1A1A1A"/>
+                </a:solidFill>
+                <a:latin typeface="Times New Roman" pitchFamily="34" charset="0"/>
+                <a:ea typeface="Times New Roman" pitchFamily="34" charset="-122"/>
+                <a:cs typeface="Times New Roman" pitchFamily="34" charset="-120"/>
+              </a:rPr>
+              <a:t>7 métodos: LP, RP, DWT, DTCWT, CVT, Top-Hat clásico y Propuesta → 140 fusiones.</a:t>
+            </a:r>
+            <a:endParaRPr lang="en-US" sz="1250" dirty="0"/>
+          </a:p>
+          <a:p>
+            <a:pPr marL="177800" indent="-177800">
+              <a:spcAft>
+                <a:spcPts val="800"/>
+              </a:spcAft>
+              <a:buSzPct val="100000"/>
+              <a:buChar char="•"/>
+            </a:pPr>
+            <a:r>
+              <a:rPr lang="en-US" sz="1250" dirty="0">
+                <a:solidFill>
+                  <a:srgbClr val="1A1A1A"/>
+                </a:solidFill>
+                <a:latin typeface="Times New Roman" pitchFamily="34" charset="0"/>
+                <a:ea typeface="Times New Roman" pitchFamily="34" charset="-122"/>
+                <a:cs typeface="Times New Roman" pitchFamily="34" charset="-120"/>
+              </a:rPr>
+              <a:t>12 métricas sin referencia (+ 4 descriptivas del review de Singh et al., 2023).</a:t>
+            </a:r>
+            <a:endParaRPr lang="en-US" sz="1250" dirty="0"/>
+          </a:p>
+          <a:p>
+            <a:pPr marL="177800" indent="-177800">
+              <a:spcAft>
+                <a:spcPts val="800"/>
+              </a:spcAft>
+              <a:buSzPct val="100000"/>
+              <a:buChar char="•"/>
+            </a:pPr>
+            <a:r>
+              <a:rPr lang="en-US" sz="1250" dirty="0">
+                <a:solidFill>
+                  <a:srgbClr val="1A1A1A"/>
+                </a:solidFill>
+                <a:latin typeface="Times New Roman" pitchFamily="34" charset="0"/>
+                <a:ea typeface="Times New Roman" pitchFamily="34" charset="-122"/>
+                <a:cs typeface="Times New Roman" pitchFamily="34" charset="-120"/>
+              </a:rPr>
+              <a:t>Friedman global + Wilcoxon pareado con corrección de Holm (α = 0,05).</a:t>
+            </a:r>
+            <a:endParaRPr lang="en-US" sz="1250" dirty="0"/>
+          </a:p>
+        </p:txBody>
+      </p:sp>
+      <p:sp>
+        <p:nvSpPr>
+          <p:cNvPr id="6" name="Text 4"/>
+          <p:cNvSpPr/>
+          <p:nvPr/>
+        </p:nvSpPr>
+        <p:spPr>
+          <a:xfrm>
+            <a:off x="4846320" y="868680"/>
+            <a:ext cx="3840480" cy="274320"/>
+          </a:xfrm>
+          <a:prstGeom prst="rect">
+            <a:avLst/>
+          </a:prstGeom>
+          <a:noFill/>
+          <a:ln/>
+        </p:spPr>
+        <p:txBody>
+          <a:bodyPr wrap="square" lIns="0" tIns="0" rIns="0" bIns="0" rtlCol="0" anchor="ctr"/>
+          <a:lstStyle/>
+          <a:p>
+            <a:pPr indent="0" marL="0">
+              <a:buNone/>
+            </a:pPr>
+            <a:r>
+              <a:rPr lang="en-US" sz="1400" b="1" dirty="0">
+                <a:solidFill>
+                  <a:srgbClr val="8B1A1A"/>
+                </a:solidFill>
+                <a:latin typeface="Times New Roman" pitchFamily="34" charset="0"/>
+                <a:ea typeface="Times New Roman" pitchFamily="34" charset="-122"/>
+                <a:cs typeface="Times New Roman" pitchFamily="34" charset="-120"/>
+              </a:rPr>
+              <a:t>Evaluación orientada a tarea</a:t>
+            </a:r>
+            <a:endParaRPr lang="en-US" sz="1400" dirty="0"/>
+          </a:p>
+        </p:txBody>
+      </p:sp>
+      <p:sp>
+        <p:nvSpPr>
+          <p:cNvPr id="7" name="Text 5"/>
+          <p:cNvSpPr/>
+          <p:nvPr/>
+        </p:nvSpPr>
+        <p:spPr>
+          <a:xfrm>
+            <a:off x="4846320" y="1188720"/>
+            <a:ext cx="3840480" cy="3291840"/>
+          </a:xfrm>
+          <a:prstGeom prst="rect">
+            <a:avLst/>
+          </a:prstGeom>
+          <a:noFill/>
+          <a:ln/>
+        </p:spPr>
+        <p:txBody>
+          <a:bodyPr wrap="square" lIns="0" tIns="0" rIns="0" bIns="0" rtlCol="0" anchor="t"/>
+          <a:lstStyle/>
+          <a:p>
+            <a:pPr marL="177800" indent="-177800">
+              <a:spcAft>
+                <a:spcPts val="800"/>
+              </a:spcAft>
+              <a:buSzPct val="100000"/>
+              <a:buChar char="•"/>
+            </a:pPr>
+            <a:r>
+              <a:rPr lang="en-US" sz="1250" dirty="0">
+                <a:solidFill>
+                  <a:srgbClr val="1A1A1A"/>
+                </a:solidFill>
+                <a:latin typeface="Times New Roman" pitchFamily="34" charset="0"/>
+                <a:ea typeface="Times New Roman" pitchFamily="34" charset="-122"/>
+                <a:cs typeface="Times New Roman" pitchFamily="34" charset="-120"/>
+              </a:rPr>
+              <a:t>Dataset etiquetado LLVIP (peatones nocturnos): 2.000 imágenes de entrenamiento y 500 de validación.</a:t>
+            </a:r>
+            <a:endParaRPr lang="en-US" sz="1250" dirty="0"/>
+          </a:p>
+          <a:p>
+            <a:pPr marL="177800" indent="-177800">
+              <a:spcAft>
+                <a:spcPts val="800"/>
+              </a:spcAft>
+              <a:buSzPct val="100000"/>
+              <a:buChar char="•"/>
+            </a:pPr>
+            <a:r>
+              <a:rPr lang="en-US" sz="1250" dirty="0">
+                <a:solidFill>
+                  <a:srgbClr val="1A1A1A"/>
+                </a:solidFill>
+                <a:latin typeface="Times New Roman" pitchFamily="34" charset="0"/>
+                <a:ea typeface="Times New Roman" pitchFamily="34" charset="-122"/>
+                <a:cs typeface="Times New Roman" pitchFamily="34" charset="-120"/>
+              </a:rPr>
+              <a:t>YOLOv8n reentrenado por modalidad (40 épocas), 9 entradas: VIS, IR y las 7 fusiones.</a:t>
+            </a:r>
+            <a:endParaRPr lang="en-US" sz="1250" dirty="0"/>
+          </a:p>
+          <a:p>
+            <a:pPr marL="177800" indent="-177800">
+              <a:spcAft>
+                <a:spcPts val="800"/>
+              </a:spcAft>
+              <a:buSzPct val="100000"/>
+              <a:buChar char="•"/>
+            </a:pPr>
+            <a:r>
+              <a:rPr lang="en-US" sz="1250" dirty="0">
+                <a:solidFill>
+                  <a:srgbClr val="1A1A1A"/>
+                </a:solidFill>
+                <a:latin typeface="Times New Roman" pitchFamily="34" charset="0"/>
+                <a:ea typeface="Times New Roman" pitchFamily="34" charset="-122"/>
+                <a:cs typeface="Times New Roman" pitchFamily="34" charset="-120"/>
+              </a:rPr>
+              <a:t>Etiquetas idénticas entre modalidades: la diferencia de mAP aísla el efecto del método de fusión.</a:t>
+            </a:r>
+            <a:endParaRPr lang="en-US" sz="1250" dirty="0"/>
           </a:p>
         </p:txBody>
       </p:sp>
@@ -2839,7 +3134,7 @@
                 <a:ea typeface="Times New Roman" pitchFamily="34" charset="-122"/>
                 <a:cs typeface="Times New Roman" pitchFamily="34" charset="-120"/>
               </a:rPr>
-              <a:t>Resultados cuantitativos — medias sobre 20 pares</a:t>
+              <a:t>7. Resultados cualitativos</a:t>
             </a:r>
             <a:endParaRPr lang="en-US" sz="2300" dirty="0"/>
           </a:p>
@@ -2878,7 +3173,180 @@
                 <a:ea typeface="Times New Roman" pitchFamily="34" charset="-122"/>
                 <a:cs typeface="Times New Roman" pitchFamily="34" charset="-120"/>
               </a:rPr>
-              <a:t>11 / 17</a:t>
+              <a:t>11 / 18</a:t>
+            </a:r>
+            <a:endParaRPr lang="en-US" sz="900" dirty="0"/>
+          </a:p>
+        </p:txBody>
+      </p:sp>
+      <p:pic>
+        <p:nvPicPr>
+          <p:cNvPr id="4" name="Image 0" descr="C:/Users/Usuario/Documents/unv/mastertesis/tesis_mciencias_datos/docs/figures/cualitativas/montaje_07.png">    </p:cNvPr>
+          <p:cNvPicPr>
+            <a:picLocks noChangeAspect="1"/>
+          </p:cNvPicPr>
+          <p:nvPr/>
+        </p:nvPicPr>
+        <p:blipFill>
+          <a:blip r:embed="rId1"/>
+          <a:stretch>
+            <a:fillRect/>
+          </a:stretch>
+        </p:blipFill>
+        <p:spPr>
+          <a:xfrm>
+            <a:off x="1764792" y="777240"/>
+            <a:ext cx="5623560" cy="4005072"/>
+          </a:xfrm>
+          <a:prstGeom prst="rect">
+            <a:avLst/>
+          </a:prstGeom>
+        </p:spPr>
+      </p:pic>
+      <p:sp>
+        <p:nvSpPr>
+          <p:cNvPr id="5" name="Text 2"/>
+          <p:cNvSpPr/>
+          <p:nvPr/>
+        </p:nvSpPr>
+        <p:spPr>
+          <a:xfrm>
+            <a:off x="457200" y="4828032"/>
+            <a:ext cx="7680960" cy="274320"/>
+          </a:xfrm>
+          <a:prstGeom prst="rect">
+            <a:avLst/>
+          </a:prstGeom>
+          <a:noFill/>
+          <a:ln/>
+        </p:spPr>
+        <p:txBody>
+          <a:bodyPr wrap="square" lIns="0" tIns="0" rIns="0" bIns="0" rtlCol="0" anchor="ctr"/>
+          <a:lstStyle/>
+          <a:p>
+            <a:pPr indent="0" marL="0">
+              <a:buNone/>
+            </a:pPr>
+            <a:r>
+              <a:rPr lang="en-US" sz="1000" i="1" dirty="0">
+                <a:solidFill>
+                  <a:srgbClr val="666666"/>
+                </a:solidFill>
+                <a:latin typeface="Times New Roman" pitchFamily="34" charset="0"/>
+                <a:ea typeface="Times New Roman" pitchFamily="34" charset="-122"/>
+                <a:cs typeface="Times New Roman" pitchFamily="34" charset="-120"/>
+              </a:rPr>
+              <a:t>Los 20 montajes por escena están disponibles en el repositorio (docs/figures/cualitativas/).</a:t>
+            </a:r>
+            <a:endParaRPr lang="en-US" sz="1000" dirty="0"/>
+          </a:p>
+        </p:txBody>
+      </p:sp>
+    </p:spTree>
+  </p:cSld>
+  <p:clrMapOvr>
+    <a:masterClrMapping/>
+  </p:clrMapOvr>
+</p:sld>
+</file>
+
+<file path=ppt/slides/slide12.xml><?xml version="1.0" encoding="utf-8"?>
+<p:sld xmlns:a="http://schemas.openxmlformats.org/drawingml/2006/main" xmlns:r="http://schemas.openxmlformats.org/officeDocument/2006/relationships" xmlns:p="http://schemas.openxmlformats.org/presentationml/2006/main">
+  <p:cSld name="Slide 12">
+    <p:bg>
+      <p:bgPr>
+        <a:solidFill>
+          <a:srgbClr val="FFFFFF"/>
+        </a:solidFill>
+      </p:bgPr>
+    </p:bg>
+    <p:spTree>
+      <p:nvGrpSpPr>
+        <p:cNvPr id="1" name=""/>
+        <p:cNvGrpSpPr/>
+        <p:nvPr/>
+      </p:nvGrpSpPr>
+      <p:grpSpPr>
+        <a:xfrm>
+          <a:off x="0" y="0"/>
+          <a:ext cx="0" cy="0"/>
+          <a:chOff x="0" y="0"/>
+          <a:chExt cx="0" cy="0"/>
+        </a:xfrm>
+      </p:grpSpPr>
+      <p:sp>
+        <p:nvSpPr>
+          <p:cNvPr id="2" name="Text 0"/>
+          <p:cNvSpPr/>
+          <p:nvPr/>
+        </p:nvSpPr>
+        <p:spPr>
+          <a:xfrm>
+            <a:off x="457200" y="256032"/>
+            <a:ext cx="8229600" cy="502920"/>
+          </a:xfrm>
+          <a:prstGeom prst="rect">
+            <a:avLst/>
+          </a:prstGeom>
+          <a:noFill/>
+          <a:ln/>
+        </p:spPr>
+        <p:txBody>
+          <a:bodyPr wrap="square" lIns="0" tIns="0" rIns="0" bIns="0" rtlCol="0" anchor="ctr"/>
+          <a:lstStyle/>
+          <a:p>
+            <a:pPr indent="0" marL="0">
+              <a:buNone/>
+            </a:pPr>
+            <a:r>
+              <a:rPr lang="en-US" sz="2300" b="1" dirty="0">
+                <a:solidFill>
+                  <a:srgbClr val="1A1A1A"/>
+                </a:solidFill>
+                <a:latin typeface="Times New Roman" pitchFamily="34" charset="0"/>
+                <a:ea typeface="Times New Roman" pitchFamily="34" charset="-122"/>
+                <a:cs typeface="Times New Roman" pitchFamily="34" charset="-120"/>
+              </a:rPr>
+              <a:t>Resultados cuantitativos — medias sobre 20 pares</a:t>
+            </a:r>
+            <a:endParaRPr lang="en-US" sz="2300" dirty="0"/>
+          </a:p>
+        </p:txBody>
+      </p:sp>
+      <p:sp>
+        <p:nvSpPr>
+          <p:cNvPr id="3" name="Text 1"/>
+          <p:cNvSpPr/>
+          <p:nvPr/>
+        </p:nvSpPr>
+        <p:spPr>
+          <a:xfrm>
+            <a:off x="8229600" y="4828032"/>
+            <a:ext cx="685800" cy="274320"/>
+          </a:xfrm>
+          <a:prstGeom prst="rect">
+            <a:avLst/>
+          </a:prstGeom>
+          <a:noFill/>
+          <a:ln/>
+        </p:spPr>
+        <p:txBody>
+          <a:bodyPr wrap="square" lIns="0" tIns="0" rIns="0" bIns="0" rtlCol="0" anchor="ctr"/>
+          <a:lstStyle/>
+          <a:p>
+            <a:pPr algn="r" indent="0" marL="0">
+              <a:buNone/>
+            </a:pPr>
+            <a:r>
+              <a:rPr lang="en-US" sz="900" dirty="0">
+                <a:solidFill>
+                  <a:srgbClr val="666666"/>
+                </a:solidFill>
+                <a:latin typeface="Times New Roman" pitchFamily="34" charset="0"/>
+                <a:ea typeface="Times New Roman" pitchFamily="34" charset="-122"/>
+                <a:cs typeface="Times New Roman" pitchFamily="34" charset="-120"/>
+              </a:rPr>
+              <a:t>12 / 18</a:t>
             </a:r>
             <a:endParaRPr lang="en-US" sz="900" dirty="0"/>
           </a:p>
@@ -2886,7 +3354,7 @@
       </p:sp>
       <p:graphicFrame>
         <p:nvGraphicFramePr>
-          <p:cNvPr id="12" name="Table 0"/>
+          <p:cNvPr id="13" name="Table 0"/>
           <p:cNvGraphicFramePr>
             <a:graphicFrameLocks noGrp="1"/>
           </p:cNvGraphicFramePr>
@@ -6144,285 +6612,6 @@
 </p:sld>
 </file>
 
-<file path=ppt/slides/slide12.xml><?xml version="1.0" encoding="utf-8"?>
-<p:sld xmlns:a="http://schemas.openxmlformats.org/drawingml/2006/main" xmlns:r="http://schemas.openxmlformats.org/officeDocument/2006/relationships" xmlns:p="http://schemas.openxmlformats.org/presentationml/2006/main">
-  <p:cSld name="Slide 12">
-    <p:bg>
-      <p:bgPr>
-        <a:solidFill>
-          <a:srgbClr val="FFFFFF"/>
-        </a:solidFill>
-      </p:bgPr>
-    </p:bg>
-    <p:spTree>
-      <p:nvGrpSpPr>
-        <p:cNvPr id="1" name=""/>
-        <p:cNvGrpSpPr/>
-        <p:nvPr/>
-      </p:nvGrpSpPr>
-      <p:grpSpPr>
-        <a:xfrm>
-          <a:off x="0" y="0"/>
-          <a:ext cx="0" cy="0"/>
-          <a:chOff x="0" y="0"/>
-          <a:chExt cx="0" cy="0"/>
-        </a:xfrm>
-      </p:grpSpPr>
-      <p:sp>
-        <p:nvSpPr>
-          <p:cNvPr id="2" name="Text 0"/>
-          <p:cNvSpPr/>
-          <p:nvPr/>
-        </p:nvSpPr>
-        <p:spPr>
-          <a:xfrm>
-            <a:off x="457200" y="256032"/>
-            <a:ext cx="8229600" cy="502920"/>
-          </a:xfrm>
-          <a:prstGeom prst="rect">
-            <a:avLst/>
-          </a:prstGeom>
-          <a:noFill/>
-          <a:ln/>
-        </p:spPr>
-        <p:txBody>
-          <a:bodyPr wrap="square" lIns="0" tIns="0" rIns="0" bIns="0" rtlCol="0" anchor="ctr"/>
-          <a:lstStyle/>
-          <a:p>
-            <a:pPr indent="0" marL="0">
-              <a:buNone/>
-            </a:pPr>
-            <a:r>
-              <a:rPr lang="en-US" sz="2300" b="1" dirty="0">
-                <a:solidFill>
-                  <a:srgbClr val="1A1A1A"/>
-                </a:solidFill>
-                <a:latin typeface="Times New Roman" pitchFamily="34" charset="0"/>
-                <a:ea typeface="Times New Roman" pitchFamily="34" charset="-122"/>
-                <a:cs typeface="Times New Roman" pitchFamily="34" charset="-120"/>
-              </a:rPr>
-              <a:t>Análisis estadístico</a:t>
-            </a:r>
-            <a:endParaRPr lang="en-US" sz="2300" dirty="0"/>
-          </a:p>
-        </p:txBody>
-      </p:sp>
-      <p:sp>
-        <p:nvSpPr>
-          <p:cNvPr id="3" name="Text 1"/>
-          <p:cNvSpPr/>
-          <p:nvPr/>
-        </p:nvSpPr>
-        <p:spPr>
-          <a:xfrm>
-            <a:off x="8229600" y="4828032"/>
-            <a:ext cx="685800" cy="274320"/>
-          </a:xfrm>
-          <a:prstGeom prst="rect">
-            <a:avLst/>
-          </a:prstGeom>
-          <a:noFill/>
-          <a:ln/>
-        </p:spPr>
-        <p:txBody>
-          <a:bodyPr wrap="square" lIns="0" tIns="0" rIns="0" bIns="0" rtlCol="0" anchor="ctr"/>
-          <a:lstStyle/>
-          <a:p>
-            <a:pPr algn="r" indent="0" marL="0">
-              <a:buNone/>
-            </a:pPr>
-            <a:r>
-              <a:rPr lang="en-US" sz="900" dirty="0">
-                <a:solidFill>
-                  <a:srgbClr val="666666"/>
-                </a:solidFill>
-                <a:latin typeface="Times New Roman" pitchFamily="34" charset="0"/>
-                <a:ea typeface="Times New Roman" pitchFamily="34" charset="-122"/>
-                <a:cs typeface="Times New Roman" pitchFamily="34" charset="-120"/>
-              </a:rPr>
-              <a:t>12 / 17</a:t>
-            </a:r>
-            <a:endParaRPr lang="en-US" sz="900" dirty="0"/>
-          </a:p>
-        </p:txBody>
-      </p:sp>
-      <p:sp>
-        <p:nvSpPr>
-          <p:cNvPr id="4" name="Text 2"/>
-          <p:cNvSpPr/>
-          <p:nvPr/>
-        </p:nvSpPr>
-        <p:spPr>
-          <a:xfrm>
-            <a:off x="457200" y="914400"/>
-            <a:ext cx="8229600" cy="3931920"/>
-          </a:xfrm>
-          <a:prstGeom prst="rect">
-            <a:avLst/>
-          </a:prstGeom>
-          <a:noFill/>
-          <a:ln/>
-        </p:spPr>
-        <p:txBody>
-          <a:bodyPr wrap="square" lIns="0" tIns="0" rIns="0" bIns="0" rtlCol="0" anchor="t"/>
-          <a:lstStyle/>
-          <a:p>
-            <a:pPr marL="177800" indent="-177800">
-              <a:spcAft>
-                <a:spcPts val="900"/>
-              </a:spcAft>
-              <a:buSzPct val="100000"/>
-              <a:buChar char="•"/>
-            </a:pPr>
-            <a:r>
-              <a:rPr lang="en-US" sz="1300" b="1" dirty="0">
-                <a:solidFill>
-                  <a:srgbClr val="1A1A1A"/>
-                </a:solidFill>
-                <a:latin typeface="Times New Roman" pitchFamily="34" charset="0"/>
-                <a:ea typeface="Times New Roman" pitchFamily="34" charset="-122"/>
-                <a:cs typeface="Times New Roman" pitchFamily="34" charset="-120"/>
-              </a:rPr>
-              <a:t>Friedman: diferencias significativas en las 12 métricas (p &lt; 0,05).</a:t>
-            </a:r>
-            <a:endParaRPr lang="en-US" sz="1300" dirty="0"/>
-          </a:p>
-          <a:p>
-            <a:pPr marL="177800" indent="-177800">
-              <a:spcAft>
-                <a:spcPts val="900"/>
-              </a:spcAft>
-              <a:buSzPct val="100000"/>
-              <a:buChar char="•"/>
-            </a:pPr>
-            <a:r>
-              <a:rPr lang="en-US" sz="1300" dirty="0">
-                <a:solidFill>
-                  <a:srgbClr val="1A1A1A"/>
-                </a:solidFill>
-                <a:latin typeface="Times New Roman" pitchFamily="34" charset="0"/>
-                <a:ea typeface="Times New Roman" pitchFamily="34" charset="-122"/>
-                <a:cs typeface="Times New Roman" pitchFamily="34" charset="-120"/>
-              </a:rPr>
-              <a:t>Wilcoxon pareado (corrección de Holm), Propuesta vs. los 5 métodos del estado del arte:</a:t>
-            </a:r>
-            <a:endParaRPr lang="en-US" sz="1300" dirty="0"/>
-          </a:p>
-          <a:p>
-            <a:pPr lvl="1" marL="304800" indent="-152400">
-              <a:spcAft>
-                <a:spcPts val="900"/>
-              </a:spcAft>
-              <a:buSzPct val="100000"/>
-              <a:buChar char="–"/>
-            </a:pPr>
-            <a:r>
-              <a:rPr lang="en-US" sz="1300" dirty="0">
-                <a:solidFill>
-                  <a:srgbClr val="1A1A1A"/>
-                </a:solidFill>
-                <a:latin typeface="Times New Roman" pitchFamily="34" charset="0"/>
-                <a:ea typeface="Times New Roman" pitchFamily="34" charset="-122"/>
-                <a:cs typeface="Times New Roman" pitchFamily="34" charset="-120"/>
-              </a:rPr>
-              <a:t>Nabf: mejor y significativa frente a los 5 rivales.</a:t>
-            </a:r>
-            <a:endParaRPr lang="en-US" sz="1300" dirty="0"/>
-          </a:p>
-          <a:p>
-            <a:pPr lvl="1" marL="304800" indent="-152400">
-              <a:spcAft>
-                <a:spcPts val="900"/>
-              </a:spcAft>
-              <a:buSzPct val="100000"/>
-              <a:buChar char="–"/>
-            </a:pPr>
-            <a:r>
-              <a:rPr lang="en-US" sz="1300" dirty="0">
-                <a:solidFill>
-                  <a:srgbClr val="1A1A1A"/>
-                </a:solidFill>
-                <a:latin typeface="Times New Roman" pitchFamily="34" charset="0"/>
-                <a:ea typeface="Times New Roman" pitchFamily="34" charset="-122"/>
-                <a:cs typeface="Times New Roman" pitchFamily="34" charset="-120"/>
-              </a:rPr>
-              <a:t>SSIM: mejor y significativa frente a los 5 rivales.</a:t>
-            </a:r>
-            <a:endParaRPr lang="en-US" sz="1300" dirty="0"/>
-          </a:p>
-          <a:p>
-            <a:pPr lvl="1" marL="304800" indent="-152400">
-              <a:spcAft>
-                <a:spcPts val="900"/>
-              </a:spcAft>
-              <a:buSzPct val="100000"/>
-              <a:buChar char="–"/>
-            </a:pPr>
-            <a:r>
-              <a:rPr lang="en-US" sz="1300" dirty="0">
-                <a:solidFill>
-                  <a:srgbClr val="1A1A1A"/>
-                </a:solidFill>
-                <a:latin typeface="Times New Roman" pitchFamily="34" charset="0"/>
-                <a:ea typeface="Times New Roman" pitchFamily="34" charset="-122"/>
-                <a:cs typeface="Times New Roman" pitchFamily="34" charset="-120"/>
-              </a:rPr>
-              <a:t>SCD y VIF: mejor y significativa frente a 3 de 5; Qabf frente a 2 de 5.</a:t>
-            </a:r>
-            <a:endParaRPr lang="en-US" sz="1300" dirty="0"/>
-          </a:p>
-          <a:p>
-            <a:pPr marL="177800" indent="-177800">
-              <a:spcAft>
-                <a:spcPts val="900"/>
-              </a:spcAft>
-              <a:buSzPct val="100000"/>
-              <a:buChar char="•"/>
-            </a:pPr>
-            <a:r>
-              <a:rPr lang="en-US" sz="1300" dirty="0">
-                <a:solidFill>
-                  <a:srgbClr val="1A1A1A"/>
-                </a:solidFill>
-                <a:latin typeface="Times New Roman" pitchFamily="34" charset="0"/>
-                <a:ea typeface="Times New Roman" pitchFamily="34" charset="-122"/>
-                <a:cs typeface="Times New Roman" pitchFamily="34" charset="-120"/>
-              </a:rPr>
-              <a:t>Frente al Top-Hat clásico, la propuesta mejora en todas las métricas de calidad de fusión (Qabf 0,500 vs 0,305 · Nabf 0,041 vs 0,585 · SSIM 0,782 vs 0,578).</a:t>
-            </a:r>
-            <a:endParaRPr lang="en-US" sz="1300" dirty="0"/>
-          </a:p>
-          <a:p>
-            <a:pPr marL="177800" indent="-177800">
-              <a:spcAft>
-                <a:spcPts val="900"/>
-              </a:spcAft>
-              <a:buSzPct val="100000"/>
-              <a:buChar char="•"/>
-            </a:pPr>
-            <a:r>
-              <a:rPr lang="en-US" sz="1300" dirty="0">
-                <a:solidFill>
-                  <a:srgbClr val="1A1A1A"/>
-                </a:solidFill>
-                <a:latin typeface="Times New Roman" pitchFamily="34" charset="0"/>
-                <a:ea typeface="Times New Roman" pitchFamily="34" charset="-122"/>
-                <a:cs typeface="Times New Roman" pitchFamily="34" charset="-120"/>
-              </a:rPr>
-              <a:t>Ranking global (12 métricas): LP 3,17 · RP 3,50 · DTCWT 3,58 · Propuesta 3,92 · TH clásico 4,17 · DWT 4,75 · CVT 4,92 — óptimos de criterios distintos y complementarios.</a:t>
-            </a:r>
-            <a:endParaRPr lang="en-US" sz="1300" dirty="0"/>
-          </a:p>
-        </p:txBody>
-      </p:sp>
-    </p:spTree>
-  </p:cSld>
-  <p:clrMapOvr>
-    <a:masterClrMapping/>
-  </p:clrMapOvr>
-</p:sld>
-</file>
-
 <file path=ppt/slides/slide13.xml><?xml version="1.0" encoding="utf-8"?>
 <p:sld xmlns:a="http://schemas.openxmlformats.org/drawingml/2006/main" xmlns:r="http://schemas.openxmlformats.org/officeDocument/2006/relationships" xmlns:p="http://schemas.openxmlformats.org/presentationml/2006/main">
   <p:cSld name="Slide 13">
@@ -6480,7 +6669,7 @@
                 <a:ea typeface="Times New Roman" pitchFamily="34" charset="-122"/>
                 <a:cs typeface="Times New Roman" pitchFamily="34" charset="-120"/>
               </a:rPr>
-              <a:t>8. Detección en LLVIP — mAP@0,5</a:t>
+              <a:t>Análisis estadístico</a:t>
             </a:r>
             <a:endParaRPr lang="en-US" sz="2300" dirty="0"/>
           </a:p>
@@ -6519,46 +6708,22 @@
                 <a:ea typeface="Times New Roman" pitchFamily="34" charset="-122"/>
                 <a:cs typeface="Times New Roman" pitchFamily="34" charset="-120"/>
               </a:rPr>
-              <a:t>13 / 17</a:t>
+              <a:t>13 / 18</a:t>
             </a:r>
             <a:endParaRPr lang="en-US" sz="900" dirty="0"/>
           </a:p>
         </p:txBody>
       </p:sp>
-      <p:pic>
-        <p:nvPicPr>
-          <p:cNvPr id="4" name="Image 0" descr="C:\Users\Usuario\AppData\Local\Temp\claude\C--Users-Usuario-Documents-unv-mastertesis\fa0a2acc-a0da-4701-a920-18b20c70d3b2\scratchpad\pptx_build/assets/map_llvip.png">    </p:cNvPr>
-          <p:cNvPicPr>
-            <a:picLocks noChangeAspect="1"/>
-          </p:cNvPicPr>
+      <p:sp>
+        <p:nvSpPr>
+          <p:cNvPr id="4" name="Text 2"/>
+          <p:cNvSpPr/>
           <p:nvPr/>
-        </p:nvPicPr>
-        <p:blipFill>
-          <a:blip r:embed="rId1"/>
-          <a:stretch>
-            <a:fillRect/>
-          </a:stretch>
-        </p:blipFill>
+        </p:nvSpPr>
         <p:spPr>
           <a:xfrm>
-            <a:off x="1179576" y="822960"/>
-            <a:ext cx="6766560" cy="3099816"/>
-          </a:xfrm>
-          <a:prstGeom prst="rect">
-            <a:avLst/>
-          </a:prstGeom>
-        </p:spPr>
-      </p:pic>
-      <p:sp>
-        <p:nvSpPr>
-          <p:cNvPr id="5" name="Text 2"/>
-          <p:cNvSpPr/>
-          <p:nvPr/>
-        </p:nvSpPr>
-        <p:spPr>
-          <a:xfrm>
-            <a:off x="457200" y="4023360"/>
-            <a:ext cx="8229600" cy="1005840"/>
+            <a:off x="457200" y="914400"/>
+            <a:ext cx="8229600" cy="3931920"/>
           </a:xfrm>
           <a:prstGeom prst="rect">
             <a:avLst/>
@@ -6572,13 +6737,13 @@
           <a:p>
             <a:pPr marL="177800" indent="-177800">
               <a:spcAft>
-                <a:spcPts val="400"/>
+                <a:spcPts val="900"/>
               </a:spcAft>
               <a:buSzPct val="100000"/>
               <a:buChar char="•"/>
             </a:pPr>
             <a:r>
-              <a:rPr lang="en-US" sz="1200" dirty="0">
+              <a:rPr lang="en-US" sz="1300" b="1" dirty="0">
                 <a:solidFill>
                   <a:srgbClr val="1A1A1A"/>
                 </a:solidFill>
@@ -6586,20 +6751,20 @@
                 <a:ea typeface="Times New Roman" pitchFamily="34" charset="-122"/>
                 <a:cs typeface="Times New Roman" pitchFamily="34" charset="-120"/>
               </a:rPr>
-              <a:t>Toda fusión supera con claridad al visible solo (+0,12 a +0,14 en mAP@0,5).</a:t>
-            </a:r>
-            <a:endParaRPr lang="en-US" sz="1200" dirty="0"/>
+              <a:t>Friedman: diferencias significativas en las 12 métricas (p &lt; 0,05).</a:t>
+            </a:r>
+            <a:endParaRPr lang="en-US" sz="1300" dirty="0"/>
           </a:p>
           <a:p>
             <a:pPr marL="177800" indent="-177800">
               <a:spcAft>
-                <a:spcPts val="400"/>
+                <a:spcPts val="900"/>
               </a:spcAft>
               <a:buSzPct val="100000"/>
               <a:buChar char="•"/>
             </a:pPr>
             <a:r>
-              <a:rPr lang="en-US" sz="1200" dirty="0">
+              <a:rPr lang="en-US" sz="1300" dirty="0">
                 <a:solidFill>
                   <a:srgbClr val="1A1A1A"/>
                 </a:solidFill>
@@ -6607,20 +6772,83 @@
                 <a:ea typeface="Times New Roman" pitchFamily="34" charset="-122"/>
                 <a:cs typeface="Times New Roman" pitchFamily="34" charset="-120"/>
               </a:rPr>
-              <a:t>El infrarrojo solo lidera (0,957): en peatones nocturnos la firma térmica domina.</a:t>
-            </a:r>
-            <a:endParaRPr lang="en-US" sz="1200" dirty="0"/>
+              <a:t>Wilcoxon pareado (corrección de Holm), Propuesta vs. los 5 métodos del estado del arte:</a:t>
+            </a:r>
+            <a:endParaRPr lang="en-US" sz="1300" dirty="0"/>
+          </a:p>
+          <a:p>
+            <a:pPr lvl="1" marL="304800" indent="-152400">
+              <a:spcAft>
+                <a:spcPts val="900"/>
+              </a:spcAft>
+              <a:buSzPct val="100000"/>
+              <a:buChar char="–"/>
+            </a:pPr>
+            <a:r>
+              <a:rPr lang="en-US" sz="1300" dirty="0">
+                <a:solidFill>
+                  <a:srgbClr val="1A1A1A"/>
+                </a:solidFill>
+                <a:latin typeface="Times New Roman" pitchFamily="34" charset="0"/>
+                <a:ea typeface="Times New Roman" pitchFamily="34" charset="-122"/>
+                <a:cs typeface="Times New Roman" pitchFamily="34" charset="-120"/>
+              </a:rPr>
+              <a:t>Nabf: mejor y significativa frente a los 5 rivales.</a:t>
+            </a:r>
+            <a:endParaRPr lang="en-US" sz="1300" dirty="0"/>
+          </a:p>
+          <a:p>
+            <a:pPr lvl="1" marL="304800" indent="-152400">
+              <a:spcAft>
+                <a:spcPts val="900"/>
+              </a:spcAft>
+              <a:buSzPct val="100000"/>
+              <a:buChar char="–"/>
+            </a:pPr>
+            <a:r>
+              <a:rPr lang="en-US" sz="1300" dirty="0">
+                <a:solidFill>
+                  <a:srgbClr val="1A1A1A"/>
+                </a:solidFill>
+                <a:latin typeface="Times New Roman" pitchFamily="34" charset="0"/>
+                <a:ea typeface="Times New Roman" pitchFamily="34" charset="-122"/>
+                <a:cs typeface="Times New Roman" pitchFamily="34" charset="-120"/>
+              </a:rPr>
+              <a:t>SSIM: mejor y significativa frente a los 5 rivales.</a:t>
+            </a:r>
+            <a:endParaRPr lang="en-US" sz="1300" dirty="0"/>
+          </a:p>
+          <a:p>
+            <a:pPr lvl="1" marL="304800" indent="-152400">
+              <a:spcAft>
+                <a:spcPts val="900"/>
+              </a:spcAft>
+              <a:buSzPct val="100000"/>
+              <a:buChar char="–"/>
+            </a:pPr>
+            <a:r>
+              <a:rPr lang="en-US" sz="1300" dirty="0">
+                <a:solidFill>
+                  <a:srgbClr val="1A1A1A"/>
+                </a:solidFill>
+                <a:latin typeface="Times New Roman" pitchFamily="34" charset="0"/>
+                <a:ea typeface="Times New Roman" pitchFamily="34" charset="-122"/>
+                <a:cs typeface="Times New Roman" pitchFamily="34" charset="-120"/>
+              </a:rPr>
+              <a:t>SCD y VIF: mejor y significativa frente a 3 de 5; Qabf frente a 2 de 5.</a:t>
+            </a:r>
+            <a:endParaRPr lang="en-US" sz="1300" dirty="0"/>
           </a:p>
           <a:p>
             <a:pPr marL="177800" indent="-177800">
               <a:spcAft>
-                <a:spcPts val="400"/>
+                <a:spcPts val="900"/>
               </a:spcAft>
               <a:buSzPct val="100000"/>
               <a:buChar char="•"/>
             </a:pPr>
             <a:r>
-              <a:rPr lang="en-US" sz="1200" dirty="0">
+              <a:rPr lang="en-US" sz="1300" dirty="0">
                 <a:solidFill>
                   <a:srgbClr val="1A1A1A"/>
                 </a:solidFill>
@@ -6628,9 +6856,30 @@
                 <a:ea typeface="Times New Roman" pitchFamily="34" charset="-122"/>
                 <a:cs typeface="Times New Roman" pitchFamily="34" charset="-120"/>
               </a:rPr>
-              <a:t>Entre las 7 fusiones la banda es estrecha (0,926–0,949); la propuesta es competitiva (0,936), pareja con el clásico (0,938).</a:t>
-            </a:r>
-            <a:endParaRPr lang="en-US" sz="1200" dirty="0"/>
+              <a:t>Frente al Top-Hat clásico, la propuesta mejora en todas las métricas de calidad de fusión (Qabf 0,500 vs 0,305 · Nabf 0,041 vs 0,585 · SSIM 0,782 vs 0,578).</a:t>
+            </a:r>
+            <a:endParaRPr lang="en-US" sz="1300" dirty="0"/>
+          </a:p>
+          <a:p>
+            <a:pPr marL="177800" indent="-177800">
+              <a:spcAft>
+                <a:spcPts val="900"/>
+              </a:spcAft>
+              <a:buSzPct val="100000"/>
+              <a:buChar char="•"/>
+            </a:pPr>
+            <a:r>
+              <a:rPr lang="en-US" sz="1300" dirty="0">
+                <a:solidFill>
+                  <a:srgbClr val="1A1A1A"/>
+                </a:solidFill>
+                <a:latin typeface="Times New Roman" pitchFamily="34" charset="0"/>
+                <a:ea typeface="Times New Roman" pitchFamily="34" charset="-122"/>
+                <a:cs typeface="Times New Roman" pitchFamily="34" charset="-120"/>
+              </a:rPr>
+              <a:t>Ranking global (12 métricas): LP 3,17 · RP 3,50 · DTCWT 3,58 · Propuesta 3,92 · TH clásico 4,17 · DWT 4,75 · CVT 4,92 — óptimos de criterios distintos y complementarios.</a:t>
+            </a:r>
+            <a:endParaRPr lang="en-US" sz="1300" dirty="0"/>
           </a:p>
         </p:txBody>
       </p:sp>
@@ -6699,7 +6948,7 @@
                 <a:ea typeface="Times New Roman" pitchFamily="34" charset="-122"/>
                 <a:cs typeface="Times New Roman" pitchFamily="34" charset="-120"/>
               </a:rPr>
-              <a:t>Contraste de hipótesis</a:t>
+              <a:t>8. Detección en LLVIP — mAP@0,5</a:t>
             </a:r>
             <a:endParaRPr lang="en-US" sz="2300" dirty="0"/>
           </a:p>
@@ -6738,22 +6987,46 @@
                 <a:ea typeface="Times New Roman" pitchFamily="34" charset="-122"/>
                 <a:cs typeface="Times New Roman" pitchFamily="34" charset="-120"/>
               </a:rPr>
-              <a:t>14 / 17</a:t>
+              <a:t>14 / 18</a:t>
             </a:r>
             <a:endParaRPr lang="en-US" sz="900" dirty="0"/>
           </a:p>
         </p:txBody>
       </p:sp>
-      <p:sp>
-        <p:nvSpPr>
-          <p:cNvPr id="4" name="Text 2"/>
+      <p:pic>
+        <p:nvPicPr>
+          <p:cNvPr id="4" name="Image 0" descr="C:\Users\Usuario\AppData\Local\Temp\claude\C--Users-Usuario-Documents-unv-mastertesis\fa0a2acc-a0da-4701-a920-18b20c70d3b2\scratchpad\pptx_build/assets/map_llvip.png">    </p:cNvPr>
+          <p:cNvPicPr>
+            <a:picLocks noChangeAspect="1"/>
+          </p:cNvPicPr>
+          <p:nvPr/>
+        </p:nvPicPr>
+        <p:blipFill>
+          <a:blip r:embed="rId1"/>
+          <a:stretch>
+            <a:fillRect/>
+          </a:stretch>
+        </p:blipFill>
+        <p:spPr>
+          <a:xfrm>
+            <a:off x="1179576" y="822960"/>
+            <a:ext cx="6766560" cy="3099816"/>
+          </a:xfrm>
+          <a:prstGeom prst="rect">
+            <a:avLst/>
+          </a:prstGeom>
+        </p:spPr>
+      </p:pic>
+      <p:sp>
+        <p:nvSpPr>
+          <p:cNvPr id="5" name="Text 2"/>
           <p:cNvSpPr/>
           <p:nvPr/>
         </p:nvSpPr>
         <p:spPr>
           <a:xfrm>
-            <a:off x="457200" y="960120"/>
-            <a:ext cx="640080" cy="411480"/>
+            <a:off x="457200" y="4023360"/>
+            <a:ext cx="8229600" cy="1005840"/>
           </a:xfrm>
           <a:prstGeom prst="rect">
             <a:avLst/>
@@ -6762,14 +7035,18 @@
           <a:ln/>
         </p:spPr>
         <p:txBody>
-          <a:bodyPr wrap="square" lIns="0" tIns="0" rIns="0" bIns="0" rtlCol="0" anchor="ctr"/>
-          <a:lstStyle/>
-          <a:p>
-            <a:pPr indent="0" marL="0">
-              <a:buNone/>
-            </a:pPr>
-            <a:r>
-              <a:rPr lang="en-US" sz="1900" b="1" dirty="0">
+          <a:bodyPr wrap="square" lIns="0" tIns="0" rIns="0" bIns="0" rtlCol="0" anchor="t"/>
+          <a:lstStyle/>
+          <a:p>
+            <a:pPr marL="177800" indent="-177800">
+              <a:spcAft>
+                <a:spcPts val="400"/>
+              </a:spcAft>
+              <a:buSzPct val="100000"/>
+              <a:buChar char="•"/>
+            </a:pPr>
+            <a:r>
+              <a:rPr lang="en-US" sz="1200" dirty="0">
                 <a:solidFill>
                   <a:srgbClr val="1A1A1A"/>
                 </a:solidFill>
@@ -6777,77 +7054,20 @@
                 <a:ea typeface="Times New Roman" pitchFamily="34" charset="-122"/>
                 <a:cs typeface="Times New Roman" pitchFamily="34" charset="-120"/>
               </a:rPr>
-              <a:t>H1</a:t>
-            </a:r>
-            <a:endParaRPr lang="en-US" sz="1900" dirty="0"/>
-          </a:p>
-        </p:txBody>
-      </p:sp>
-      <p:sp>
-        <p:nvSpPr>
-          <p:cNvPr id="5" name="Text 3"/>
-          <p:cNvSpPr/>
-          <p:nvPr/>
-        </p:nvSpPr>
-        <p:spPr>
-          <a:xfrm>
-            <a:off x="1143000" y="996696"/>
-            <a:ext cx="1417320" cy="365760"/>
-          </a:xfrm>
-          <a:prstGeom prst="rect">
-            <a:avLst/>
-          </a:prstGeom>
-          <a:noFill/>
-          <a:ln/>
-        </p:spPr>
-        <p:txBody>
-          <a:bodyPr wrap="square" lIns="0" tIns="0" rIns="0" bIns="0" rtlCol="0" anchor="ctr"/>
-          <a:lstStyle/>
-          <a:p>
-            <a:pPr indent="0" marL="0">
-              <a:buNone/>
-            </a:pPr>
-            <a:r>
-              <a:rPr lang="en-US" sz="1300" b="1" dirty="0">
-                <a:solidFill>
-                  <a:srgbClr val="1F5C2E"/>
-                </a:solidFill>
-                <a:latin typeface="Times New Roman" pitchFamily="34" charset="0"/>
-                <a:ea typeface="Times New Roman" pitchFamily="34" charset="-122"/>
-                <a:cs typeface="Times New Roman" pitchFamily="34" charset="-120"/>
-              </a:rPr>
-              <a:t>SOSTENIDA</a:t>
-            </a:r>
-            <a:endParaRPr lang="en-US" sz="1300" dirty="0"/>
-          </a:p>
-        </p:txBody>
-      </p:sp>
-      <p:sp>
-        <p:nvSpPr>
-          <p:cNvPr id="6" name="Text 4"/>
-          <p:cNvSpPr/>
-          <p:nvPr/>
-        </p:nvSpPr>
-        <p:spPr>
-          <a:xfrm>
-            <a:off x="2697480" y="960120"/>
-            <a:ext cx="5989320" cy="1143000"/>
-          </a:xfrm>
-          <a:prstGeom prst="rect">
-            <a:avLst/>
-          </a:prstGeom>
-          <a:noFill/>
-          <a:ln/>
-        </p:spPr>
-        <p:txBody>
-          <a:bodyPr wrap="square" lIns="0" tIns="0" rIns="0" bIns="0" rtlCol="0" anchor="t"/>
-          <a:lstStyle/>
-          <a:p>
-            <a:pPr indent="0" marL="0">
-              <a:buNone/>
-            </a:pPr>
-            <a:r>
-              <a:rPr lang="en-US" sz="1250" dirty="0">
+              <a:t>Toda fusión supera con claridad al visible solo (+0,12 a +0,14 en mAP@0,5).</a:t>
+            </a:r>
+            <a:endParaRPr lang="en-US" sz="1200" dirty="0"/>
+          </a:p>
+          <a:p>
+            <a:pPr marL="177800" indent="-177800">
+              <a:spcAft>
+                <a:spcPts val="400"/>
+              </a:spcAft>
+              <a:buSzPct val="100000"/>
+              <a:buChar char="•"/>
+            </a:pPr>
+            <a:r>
+              <a:rPr lang="en-US" sz="1200" dirty="0">
                 <a:solidFill>
                   <a:srgbClr val="1A1A1A"/>
                 </a:solidFill>
@@ -6855,38 +7075,20 @@
                 <a:ea typeface="Times New Roman" pitchFamily="34" charset="-122"/>
                 <a:cs typeface="Times New Roman" pitchFamily="34" charset="-120"/>
               </a:rPr>
-              <a:t>El banco disco + líneas con suma de ramas mejora SSIM (0,782 vs 0,578) y reduce Nabf (0,041 vs 0,585) frente al Top-Hat clásico, con significancia estadística (Wilcoxon–Holm).</a:t>
-            </a:r>
-            <a:endParaRPr lang="en-US" sz="1250" dirty="0"/>
-          </a:p>
-        </p:txBody>
-      </p:sp>
-      <p:sp>
-        <p:nvSpPr>
-          <p:cNvPr id="7" name="Text 5"/>
-          <p:cNvSpPr/>
-          <p:nvPr/>
-        </p:nvSpPr>
-        <p:spPr>
-          <a:xfrm>
-            <a:off x="457200" y="2258568"/>
-            <a:ext cx="640080" cy="411480"/>
-          </a:xfrm>
-          <a:prstGeom prst="rect">
-            <a:avLst/>
-          </a:prstGeom>
-          <a:noFill/>
-          <a:ln/>
-        </p:spPr>
-        <p:txBody>
-          <a:bodyPr wrap="square" lIns="0" tIns="0" rIns="0" bIns="0" rtlCol="0" anchor="ctr"/>
-          <a:lstStyle/>
-          <a:p>
-            <a:pPr indent="0" marL="0">
-              <a:buNone/>
-            </a:pPr>
-            <a:r>
-              <a:rPr lang="en-US" sz="1900" b="1" dirty="0">
+              <a:t>El infrarrojo solo lidera (0,957): en peatones nocturnos la firma térmica domina.</a:t>
+            </a:r>
+            <a:endParaRPr lang="en-US" sz="1200" dirty="0"/>
+          </a:p>
+          <a:p>
+            <a:pPr marL="177800" indent="-177800">
+              <a:spcAft>
+                <a:spcPts val="400"/>
+              </a:spcAft>
+              <a:buSzPct val="100000"/>
+              <a:buChar char="•"/>
+            </a:pPr>
+            <a:r>
+              <a:rPr lang="en-US" sz="1200" dirty="0">
                 <a:solidFill>
                   <a:srgbClr val="1A1A1A"/>
                 </a:solidFill>
@@ -6894,204 +7096,9 @@
                 <a:ea typeface="Times New Roman" pitchFamily="34" charset="-122"/>
                 <a:cs typeface="Times New Roman" pitchFamily="34" charset="-120"/>
               </a:rPr>
-              <a:t>H2</a:t>
-            </a:r>
-            <a:endParaRPr lang="en-US" sz="1900" dirty="0"/>
-          </a:p>
-        </p:txBody>
-      </p:sp>
-      <p:sp>
-        <p:nvSpPr>
-          <p:cNvPr id="8" name="Text 6"/>
-          <p:cNvSpPr/>
-          <p:nvPr/>
-        </p:nvSpPr>
-        <p:spPr>
-          <a:xfrm>
-            <a:off x="1143000" y="2295144"/>
-            <a:ext cx="1417320" cy="365760"/>
-          </a:xfrm>
-          <a:prstGeom prst="rect">
-            <a:avLst/>
-          </a:prstGeom>
-          <a:noFill/>
-          <a:ln/>
-        </p:spPr>
-        <p:txBody>
-          <a:bodyPr wrap="square" lIns="0" tIns="0" rIns="0" bIns="0" rtlCol="0" anchor="ctr"/>
-          <a:lstStyle/>
-          <a:p>
-            <a:pPr indent="0" marL="0">
-              <a:buNone/>
-            </a:pPr>
-            <a:r>
-              <a:rPr lang="en-US" sz="1300" b="1" dirty="0">
-                <a:solidFill>
-                  <a:srgbClr val="1F5C2E"/>
-                </a:solidFill>
-                <a:latin typeface="Times New Roman" pitchFamily="34" charset="0"/>
-                <a:ea typeface="Times New Roman" pitchFamily="34" charset="-122"/>
-                <a:cs typeface="Times New Roman" pitchFamily="34" charset="-120"/>
-              </a:rPr>
-              <a:t>SOSTENIDA</a:t>
-            </a:r>
-            <a:endParaRPr lang="en-US" sz="1300" dirty="0"/>
-          </a:p>
-        </p:txBody>
-      </p:sp>
-      <p:sp>
-        <p:nvSpPr>
-          <p:cNvPr id="9" name="Text 7"/>
-          <p:cNvSpPr/>
-          <p:nvPr/>
-        </p:nvSpPr>
-        <p:spPr>
-          <a:xfrm>
-            <a:off x="2697480" y="2258568"/>
-            <a:ext cx="5989320" cy="1143000"/>
-          </a:xfrm>
-          <a:prstGeom prst="rect">
-            <a:avLst/>
-          </a:prstGeom>
-          <a:noFill/>
-          <a:ln/>
-        </p:spPr>
-        <p:txBody>
-          <a:bodyPr wrap="square" lIns="0" tIns="0" rIns="0" bIns="0" rtlCol="0" anchor="t"/>
-          <a:lstStyle/>
-          <a:p>
-            <a:pPr indent="0" marL="0">
-              <a:buNone/>
-            </a:pPr>
-            <a:r>
-              <a:rPr lang="en-US" sz="1250" dirty="0">
-                <a:solidFill>
-                  <a:srgbClr val="1A1A1A"/>
-                </a:solidFill>
-                <a:latin typeface="Times New Roman" pitchFamily="34" charset="0"/>
-                <a:ea typeface="Times New Roman" pitchFamily="34" charset="-122"/>
-                <a:cs typeface="Times New Roman" pitchFamily="34" charset="-120"/>
-              </a:rPr>
-              <a:t>La configuración hallada por PSO (r = 25; m = 0,0703) supera a la parametrización manual del operador clásico (r = 5; m = 1) en todas las métricas de calidad de fusión.</a:t>
-            </a:r>
-            <a:endParaRPr lang="en-US" sz="1250" dirty="0"/>
-          </a:p>
-        </p:txBody>
-      </p:sp>
-      <p:sp>
-        <p:nvSpPr>
-          <p:cNvPr id="10" name="Text 8"/>
-          <p:cNvSpPr/>
-          <p:nvPr/>
-        </p:nvSpPr>
-        <p:spPr>
-          <a:xfrm>
-            <a:off x="457200" y="3557016"/>
-            <a:ext cx="640080" cy="411480"/>
-          </a:xfrm>
-          <a:prstGeom prst="rect">
-            <a:avLst/>
-          </a:prstGeom>
-          <a:noFill/>
-          <a:ln/>
-        </p:spPr>
-        <p:txBody>
-          <a:bodyPr wrap="square" lIns="0" tIns="0" rIns="0" bIns="0" rtlCol="0" anchor="ctr"/>
-          <a:lstStyle/>
-          <a:p>
-            <a:pPr indent="0" marL="0">
-              <a:buNone/>
-            </a:pPr>
-            <a:r>
-              <a:rPr lang="en-US" sz="1900" b="1" dirty="0">
-                <a:solidFill>
-                  <a:srgbClr val="1A1A1A"/>
-                </a:solidFill>
-                <a:latin typeface="Times New Roman" pitchFamily="34" charset="0"/>
-                <a:ea typeface="Times New Roman" pitchFamily="34" charset="-122"/>
-                <a:cs typeface="Times New Roman" pitchFamily="34" charset="-120"/>
-              </a:rPr>
-              <a:t>H3</a:t>
-            </a:r>
-            <a:endParaRPr lang="en-US" sz="1900" dirty="0"/>
-          </a:p>
-        </p:txBody>
-      </p:sp>
-      <p:sp>
-        <p:nvSpPr>
-          <p:cNvPr id="11" name="Text 9"/>
-          <p:cNvSpPr/>
-          <p:nvPr/>
-        </p:nvSpPr>
-        <p:spPr>
-          <a:xfrm>
-            <a:off x="1143000" y="3593592"/>
-            <a:ext cx="1417320" cy="365760"/>
-          </a:xfrm>
-          <a:prstGeom prst="rect">
-            <a:avLst/>
-          </a:prstGeom>
-          <a:noFill/>
-          <a:ln/>
-        </p:spPr>
-        <p:txBody>
-          <a:bodyPr wrap="square" lIns="0" tIns="0" rIns="0" bIns="0" rtlCol="0" anchor="ctr"/>
-          <a:lstStyle/>
-          <a:p>
-            <a:pPr indent="0" marL="0">
-              <a:buNone/>
-            </a:pPr>
-            <a:r>
-              <a:rPr lang="en-US" sz="1300" b="1" dirty="0">
-                <a:solidFill>
-                  <a:srgbClr val="8B1A1A"/>
-                </a:solidFill>
-                <a:latin typeface="Times New Roman" pitchFamily="34" charset="0"/>
-                <a:ea typeface="Times New Roman" pitchFamily="34" charset="-122"/>
-                <a:cs typeface="Times New Roman" pitchFamily="34" charset="-120"/>
-              </a:rPr>
-              <a:t>PARCIAL</a:t>
-            </a:r>
-            <a:endParaRPr lang="en-US" sz="1300" dirty="0"/>
-          </a:p>
-        </p:txBody>
-      </p:sp>
-      <p:sp>
-        <p:nvSpPr>
-          <p:cNvPr id="12" name="Text 10"/>
-          <p:cNvSpPr/>
-          <p:nvPr/>
-        </p:nvSpPr>
-        <p:spPr>
-          <a:xfrm>
-            <a:off x="2697480" y="3557016"/>
-            <a:ext cx="5989320" cy="1143000"/>
-          </a:xfrm>
-          <a:prstGeom prst="rect">
-            <a:avLst/>
-          </a:prstGeom>
-          <a:noFill/>
-          <a:ln/>
-        </p:spPr>
-        <p:txBody>
-          <a:bodyPr wrap="square" lIns="0" tIns="0" rIns="0" bIns="0" rtlCol="0" anchor="t"/>
-          <a:lstStyle/>
-          <a:p>
-            <a:pPr indent="0" marL="0">
-              <a:buNone/>
-            </a:pPr>
-            <a:r>
-              <a:rPr lang="en-US" sz="1250" dirty="0">
-                <a:solidFill>
-                  <a:srgbClr val="1A1A1A"/>
-                </a:solidFill>
-                <a:latin typeface="Times New Roman" pitchFamily="34" charset="0"/>
-                <a:ea typeface="Times New Roman" pitchFamily="34" charset="-122"/>
-                <a:cs typeface="Times New Roman" pitchFamily="34" charset="-120"/>
-              </a:rPr>
-              <a:t>La fusión supera al visible solo en detección, pero ninguna fusión supera al infrarrojo solo; la mejor calidad de imagen no garantiza el mejor mAP.</a:t>
-            </a:r>
-            <a:endParaRPr lang="en-US" sz="1250" dirty="0"/>
+              <a:t>Entre las 7 fusiones la banda es estrecha (0,926–0,949); la propuesta es competitiva (0,936), pareja con el clásico (0,938).</a:t>
+            </a:r>
+            <a:endParaRPr lang="en-US" sz="1200" dirty="0"/>
           </a:p>
         </p:txBody>
       </p:sp>
@@ -7160,7 +7167,7 @@
                 <a:ea typeface="Times New Roman" pitchFamily="34" charset="-122"/>
                 <a:cs typeface="Times New Roman" pitchFamily="34" charset="-120"/>
               </a:rPr>
-              <a:t>9. Conclusiones</a:t>
+              <a:t>Contraste de hipótesis</a:t>
             </a:r>
             <a:endParaRPr lang="en-US" sz="2300" dirty="0"/>
           </a:p>
@@ -7199,7 +7206,7 @@
                 <a:ea typeface="Times New Roman" pitchFamily="34" charset="-122"/>
                 <a:cs typeface="Times New Roman" pitchFamily="34" charset="-120"/>
               </a:rPr>
-              <a:t>15 / 17</a:t>
+              <a:t>15 / 18</a:t>
             </a:r>
             <a:endParaRPr lang="en-US" sz="900" dirty="0"/>
           </a:p>
@@ -7213,8 +7220,8 @@
         </p:nvSpPr>
         <p:spPr>
           <a:xfrm>
-            <a:off x="457200" y="914400"/>
-            <a:ext cx="8229600" cy="3931920"/>
+            <a:off x="457200" y="960120"/>
+            <a:ext cx="640080" cy="411480"/>
           </a:xfrm>
           <a:prstGeom prst="rect">
             <a:avLst/>
@@ -7223,18 +7230,92 @@
           <a:ln/>
         </p:spPr>
         <p:txBody>
+          <a:bodyPr wrap="square" lIns="0" tIns="0" rIns="0" bIns="0" rtlCol="0" anchor="ctr"/>
+          <a:lstStyle/>
+          <a:p>
+            <a:pPr indent="0" marL="0">
+              <a:buNone/>
+            </a:pPr>
+            <a:r>
+              <a:rPr lang="en-US" sz="1900" b="1" dirty="0">
+                <a:solidFill>
+                  <a:srgbClr val="1A1A1A"/>
+                </a:solidFill>
+                <a:latin typeface="Times New Roman" pitchFamily="34" charset="0"/>
+                <a:ea typeface="Times New Roman" pitchFamily="34" charset="-122"/>
+                <a:cs typeface="Times New Roman" pitchFamily="34" charset="-120"/>
+              </a:rPr>
+              <a:t>H1</a:t>
+            </a:r>
+            <a:endParaRPr lang="en-US" sz="1900" dirty="0"/>
+          </a:p>
+        </p:txBody>
+      </p:sp>
+      <p:sp>
+        <p:nvSpPr>
+          <p:cNvPr id="5" name="Text 3"/>
+          <p:cNvSpPr/>
+          <p:nvPr/>
+        </p:nvSpPr>
+        <p:spPr>
+          <a:xfrm>
+            <a:off x="1143000" y="996696"/>
+            <a:ext cx="1417320" cy="365760"/>
+          </a:xfrm>
+          <a:prstGeom prst="rect">
+            <a:avLst/>
+          </a:prstGeom>
+          <a:noFill/>
+          <a:ln/>
+        </p:spPr>
+        <p:txBody>
+          <a:bodyPr wrap="square" lIns="0" tIns="0" rIns="0" bIns="0" rtlCol="0" anchor="ctr"/>
+          <a:lstStyle/>
+          <a:p>
+            <a:pPr indent="0" marL="0">
+              <a:buNone/>
+            </a:pPr>
+            <a:r>
+              <a:rPr lang="en-US" sz="1300" b="1" dirty="0">
+                <a:solidFill>
+                  <a:srgbClr val="1F5C2E"/>
+                </a:solidFill>
+                <a:latin typeface="Times New Roman" pitchFamily="34" charset="0"/>
+                <a:ea typeface="Times New Roman" pitchFamily="34" charset="-122"/>
+                <a:cs typeface="Times New Roman" pitchFamily="34" charset="-120"/>
+              </a:rPr>
+              <a:t>SOSTENIDA</a:t>
+            </a:r>
+            <a:endParaRPr lang="en-US" sz="1300" dirty="0"/>
+          </a:p>
+        </p:txBody>
+      </p:sp>
+      <p:sp>
+        <p:nvSpPr>
+          <p:cNvPr id="6" name="Text 4"/>
+          <p:cNvSpPr/>
+          <p:nvPr/>
+        </p:nvSpPr>
+        <p:spPr>
+          <a:xfrm>
+            <a:off x="2697480" y="960120"/>
+            <a:ext cx="5989320" cy="1143000"/>
+          </a:xfrm>
+          <a:prstGeom prst="rect">
+            <a:avLst/>
+          </a:prstGeom>
+          <a:noFill/>
+          <a:ln/>
+        </p:spPr>
+        <p:txBody>
           <a:bodyPr wrap="square" lIns="0" tIns="0" rIns="0" bIns="0" rtlCol="0" anchor="t"/>
           <a:lstStyle/>
           <a:p>
-            <a:pPr marL="177800" indent="-177800">
-              <a:spcAft>
-                <a:spcPts val="1100"/>
-              </a:spcAft>
-              <a:buSzPct val="100000"/>
-              <a:buChar char="•"/>
-            </a:pPr>
-            <a:r>
-              <a:rPr lang="en-US" sz="1350" dirty="0">
+            <a:pPr indent="0" marL="0">
+              <a:buNone/>
+            </a:pPr>
+            <a:r>
+              <a:rPr lang="en-US" sz="1250" dirty="0">
                 <a:solidFill>
                   <a:srgbClr val="1A1A1A"/>
                 </a:solidFill>
@@ -7242,20 +7323,38 @@
                 <a:ea typeface="Times New Roman" pitchFamily="34" charset="-122"/>
                 <a:cs typeface="Times New Roman" pitchFamily="34" charset="-120"/>
               </a:rPr>
-              <a:t>Se formuló e implementó de forma reproducible un operador Top-Hat de una sola escala con banco de disco + líneas orientadas y suma de ramas.</a:t>
-            </a:r>
-            <a:endParaRPr lang="en-US" sz="1350" dirty="0"/>
-          </a:p>
-          <a:p>
-            <a:pPr marL="177800" indent="-177800">
-              <a:spcAft>
-                <a:spcPts val="1100"/>
-              </a:spcAft>
-              <a:buSzPct val="100000"/>
-              <a:buChar char="•"/>
-            </a:pPr>
-            <a:r>
-              <a:rPr lang="en-US" sz="1350" dirty="0">
+              <a:t>El banco disco + líneas con suma de ramas mejora SSIM (0,782 vs 0,578) y reduce Nabf (0,041 vs 0,585) frente al Top-Hat clásico, con significancia estadística (Wilcoxon–Holm).</a:t>
+            </a:r>
+            <a:endParaRPr lang="en-US" sz="1250" dirty="0"/>
+          </a:p>
+        </p:txBody>
+      </p:sp>
+      <p:sp>
+        <p:nvSpPr>
+          <p:cNvPr id="7" name="Text 5"/>
+          <p:cNvSpPr/>
+          <p:nvPr/>
+        </p:nvSpPr>
+        <p:spPr>
+          <a:xfrm>
+            <a:off x="457200" y="2258568"/>
+            <a:ext cx="640080" cy="411480"/>
+          </a:xfrm>
+          <a:prstGeom prst="rect">
+            <a:avLst/>
+          </a:prstGeom>
+          <a:noFill/>
+          <a:ln/>
+        </p:spPr>
+        <p:txBody>
+          <a:bodyPr wrap="square" lIns="0" tIns="0" rIns="0" bIns="0" rtlCol="0" anchor="ctr"/>
+          <a:lstStyle/>
+          <a:p>
+            <a:pPr indent="0" marL="0">
+              <a:buNone/>
+            </a:pPr>
+            <a:r>
+              <a:rPr lang="en-US" sz="1900" b="1" dirty="0">
                 <a:solidFill>
                   <a:srgbClr val="1A1A1A"/>
                 </a:solidFill>
@@ -7263,20 +7362,77 @@
                 <a:ea typeface="Times New Roman" pitchFamily="34" charset="-122"/>
                 <a:cs typeface="Times New Roman" pitchFamily="34" charset="-120"/>
               </a:rPr>
-              <a:t>El barrido PSO de 25 configuraciones halló el óptimo r = 25, m = 0,0703 (F = 1,9843) de manera consistente.</a:t>
-            </a:r>
-            <a:endParaRPr lang="en-US" sz="1350" dirty="0"/>
-          </a:p>
-          <a:p>
-            <a:pPr marL="177800" indent="-177800">
-              <a:spcAft>
-                <a:spcPts val="1100"/>
-              </a:spcAft>
-              <a:buSzPct val="100000"/>
-              <a:buChar char="•"/>
-            </a:pPr>
-            <a:r>
-              <a:rPr lang="en-US" sz="1350" dirty="0">
+              <a:t>H2</a:t>
+            </a:r>
+            <a:endParaRPr lang="en-US" sz="1900" dirty="0"/>
+          </a:p>
+        </p:txBody>
+      </p:sp>
+      <p:sp>
+        <p:nvSpPr>
+          <p:cNvPr id="8" name="Text 6"/>
+          <p:cNvSpPr/>
+          <p:nvPr/>
+        </p:nvSpPr>
+        <p:spPr>
+          <a:xfrm>
+            <a:off x="1143000" y="2295144"/>
+            <a:ext cx="1417320" cy="365760"/>
+          </a:xfrm>
+          <a:prstGeom prst="rect">
+            <a:avLst/>
+          </a:prstGeom>
+          <a:noFill/>
+          <a:ln/>
+        </p:spPr>
+        <p:txBody>
+          <a:bodyPr wrap="square" lIns="0" tIns="0" rIns="0" bIns="0" rtlCol="0" anchor="ctr"/>
+          <a:lstStyle/>
+          <a:p>
+            <a:pPr indent="0" marL="0">
+              <a:buNone/>
+            </a:pPr>
+            <a:r>
+              <a:rPr lang="en-US" sz="1300" b="1" dirty="0">
+                <a:solidFill>
+                  <a:srgbClr val="1F5C2E"/>
+                </a:solidFill>
+                <a:latin typeface="Times New Roman" pitchFamily="34" charset="0"/>
+                <a:ea typeface="Times New Roman" pitchFamily="34" charset="-122"/>
+                <a:cs typeface="Times New Roman" pitchFamily="34" charset="-120"/>
+              </a:rPr>
+              <a:t>SOSTENIDA</a:t>
+            </a:r>
+            <a:endParaRPr lang="en-US" sz="1300" dirty="0"/>
+          </a:p>
+        </p:txBody>
+      </p:sp>
+      <p:sp>
+        <p:nvSpPr>
+          <p:cNvPr id="9" name="Text 7"/>
+          <p:cNvSpPr/>
+          <p:nvPr/>
+        </p:nvSpPr>
+        <p:spPr>
+          <a:xfrm>
+            <a:off x="2697480" y="2258568"/>
+            <a:ext cx="5989320" cy="1143000"/>
+          </a:xfrm>
+          <a:prstGeom prst="rect">
+            <a:avLst/>
+          </a:prstGeom>
+          <a:noFill/>
+          <a:ln/>
+        </p:spPr>
+        <p:txBody>
+          <a:bodyPr wrap="square" lIns="0" tIns="0" rIns="0" bIns="0" rtlCol="0" anchor="t"/>
+          <a:lstStyle/>
+          <a:p>
+            <a:pPr indent="0" marL="0">
+              <a:buNone/>
+            </a:pPr>
+            <a:r>
+              <a:rPr lang="en-US" sz="1250" dirty="0">
                 <a:solidFill>
                   <a:srgbClr val="1A1A1A"/>
                 </a:solidFill>
@@ -7284,20 +7440,38 @@
                 <a:ea typeface="Times New Roman" pitchFamily="34" charset="-122"/>
                 <a:cs typeface="Times New Roman" pitchFamily="34" charset="-120"/>
               </a:rPr>
-              <a:t>La propuesta exhibe el mejor perfil de calidad del benchmark: menor Nabf y mayor SSIM, con significancia estadística; segunda en Qabf, SCD y VIF.</a:t>
-            </a:r>
-            <a:endParaRPr lang="en-US" sz="1350" dirty="0"/>
-          </a:p>
-          <a:p>
-            <a:pPr marL="177800" indent="-177800">
-              <a:spcAft>
-                <a:spcPts val="1100"/>
-              </a:spcAft>
-              <a:buSzPct val="100000"/>
-              <a:buChar char="•"/>
-            </a:pPr>
-            <a:r>
-              <a:rPr lang="en-US" sz="1350" dirty="0">
+              <a:t>La configuración hallada por PSO (r = 25; m = 0,0703) supera a la parametrización manual del operador clásico (r = 5; m = 1) en todas las métricas de calidad de fusión.</a:t>
+            </a:r>
+            <a:endParaRPr lang="en-US" sz="1250" dirty="0"/>
+          </a:p>
+        </p:txBody>
+      </p:sp>
+      <p:sp>
+        <p:nvSpPr>
+          <p:cNvPr id="10" name="Text 8"/>
+          <p:cNvSpPr/>
+          <p:nvPr/>
+        </p:nvSpPr>
+        <p:spPr>
+          <a:xfrm>
+            <a:off x="457200" y="3557016"/>
+            <a:ext cx="640080" cy="411480"/>
+          </a:xfrm>
+          <a:prstGeom prst="rect">
+            <a:avLst/>
+          </a:prstGeom>
+          <a:noFill/>
+          <a:ln/>
+        </p:spPr>
+        <p:txBody>
+          <a:bodyPr wrap="square" lIns="0" tIns="0" rIns="0" bIns="0" rtlCol="0" anchor="ctr"/>
+          <a:lstStyle/>
+          <a:p>
+            <a:pPr indent="0" marL="0">
+              <a:buNone/>
+            </a:pPr>
+            <a:r>
+              <a:rPr lang="en-US" sz="1900" b="1" dirty="0">
                 <a:solidFill>
                   <a:srgbClr val="1A1A1A"/>
                 </a:solidFill>
@@ -7305,20 +7479,77 @@
                 <a:ea typeface="Times New Roman" pitchFamily="34" charset="-122"/>
                 <a:cs typeface="Times New Roman" pitchFamily="34" charset="-120"/>
               </a:rPr>
-              <a:t>Frente a la metodología clásica Top-Hat, mejora todas las métricas de calidad de fusión: el banco de SE y el ajuste automático aportan valor real.</a:t>
-            </a:r>
-            <a:endParaRPr lang="en-US" sz="1350" dirty="0"/>
-          </a:p>
-          <a:p>
-            <a:pPr marL="177800" indent="-177800">
-              <a:spcAft>
-                <a:spcPts val="1100"/>
-              </a:spcAft>
-              <a:buSzPct val="100000"/>
-              <a:buChar char="•"/>
-            </a:pPr>
-            <a:r>
-              <a:rPr lang="en-US" sz="1350" dirty="0">
+              <a:t>H3</a:t>
+            </a:r>
+            <a:endParaRPr lang="en-US" sz="1900" dirty="0"/>
+          </a:p>
+        </p:txBody>
+      </p:sp>
+      <p:sp>
+        <p:nvSpPr>
+          <p:cNvPr id="11" name="Text 9"/>
+          <p:cNvSpPr/>
+          <p:nvPr/>
+        </p:nvSpPr>
+        <p:spPr>
+          <a:xfrm>
+            <a:off x="1143000" y="3593592"/>
+            <a:ext cx="1417320" cy="365760"/>
+          </a:xfrm>
+          <a:prstGeom prst="rect">
+            <a:avLst/>
+          </a:prstGeom>
+          <a:noFill/>
+          <a:ln/>
+        </p:spPr>
+        <p:txBody>
+          <a:bodyPr wrap="square" lIns="0" tIns="0" rIns="0" bIns="0" rtlCol="0" anchor="ctr"/>
+          <a:lstStyle/>
+          <a:p>
+            <a:pPr indent="0" marL="0">
+              <a:buNone/>
+            </a:pPr>
+            <a:r>
+              <a:rPr lang="en-US" sz="1300" b="1" dirty="0">
+                <a:solidFill>
+                  <a:srgbClr val="8B1A1A"/>
+                </a:solidFill>
+                <a:latin typeface="Times New Roman" pitchFamily="34" charset="0"/>
+                <a:ea typeface="Times New Roman" pitchFamily="34" charset="-122"/>
+                <a:cs typeface="Times New Roman" pitchFamily="34" charset="-120"/>
+              </a:rPr>
+              <a:t>PARCIAL</a:t>
+            </a:r>
+            <a:endParaRPr lang="en-US" sz="1300" dirty="0"/>
+          </a:p>
+        </p:txBody>
+      </p:sp>
+      <p:sp>
+        <p:nvSpPr>
+          <p:cNvPr id="12" name="Text 10"/>
+          <p:cNvSpPr/>
+          <p:nvPr/>
+        </p:nvSpPr>
+        <p:spPr>
+          <a:xfrm>
+            <a:off x="2697480" y="3557016"/>
+            <a:ext cx="5989320" cy="1143000"/>
+          </a:xfrm>
+          <a:prstGeom prst="rect">
+            <a:avLst/>
+          </a:prstGeom>
+          <a:noFill/>
+          <a:ln/>
+        </p:spPr>
+        <p:txBody>
+          <a:bodyPr wrap="square" lIns="0" tIns="0" rIns="0" bIns="0" rtlCol="0" anchor="t"/>
+          <a:lstStyle/>
+          <a:p>
+            <a:pPr indent="0" marL="0">
+              <a:buNone/>
+            </a:pPr>
+            <a:r>
+              <a:rPr lang="en-US" sz="1250" dirty="0">
                 <a:solidFill>
                   <a:srgbClr val="1A1A1A"/>
                 </a:solidFill>
@@ -7326,9 +7557,9 @@
                 <a:ea typeface="Times New Roman" pitchFamily="34" charset="-122"/>
                 <a:cs typeface="Times New Roman" pitchFamily="34" charset="-120"/>
               </a:rPr>
-              <a:t>En detección, la superioridad en calidad de imagen no se traslada automáticamente al mAP: la elección del método debe guiarse por el criterio operativo prioritario.</a:t>
-            </a:r>
-            <a:endParaRPr lang="en-US" sz="1350" dirty="0"/>
+              <a:t>La fusión supera al visible solo en detección, pero ninguna fusión supera al infrarrojo solo; la mejor calidad de imagen no garantiza el mejor mAP.</a:t>
+            </a:r>
+            <a:endParaRPr lang="en-US" sz="1250" dirty="0"/>
           </a:p>
         </p:txBody>
       </p:sp>
@@ -7397,7 +7628,7 @@
                 <a:ea typeface="Times New Roman" pitchFamily="34" charset="-122"/>
                 <a:cs typeface="Times New Roman" pitchFamily="34" charset="-120"/>
               </a:rPr>
-              <a:t>Recomendaciones y trabajo futuro</a:t>
+              <a:t>9. Conclusiones</a:t>
             </a:r>
             <a:endParaRPr lang="en-US" sz="2300" dirty="0"/>
           </a:p>
@@ -7436,7 +7667,7 @@
                 <a:ea typeface="Times New Roman" pitchFamily="34" charset="-122"/>
                 <a:cs typeface="Times New Roman" pitchFamily="34" charset="-120"/>
               </a:rPr>
-              <a:t>16 / 17</a:t>
+              <a:t>16 / 18</a:t>
             </a:r>
             <a:endParaRPr lang="en-US" sz="900" dirty="0"/>
           </a:p>
@@ -7479,7 +7710,7 @@
                 <a:ea typeface="Times New Roman" pitchFamily="34" charset="-122"/>
                 <a:cs typeface="Times New Roman" pitchFamily="34" charset="-120"/>
               </a:rPr>
-              <a:t>Extender la evaluación de detección a otros detectores y al conjunto completo de LLVIP.</a:t>
+              <a:t>Se formuló e implementó de forma reproducible un operador Top-Hat de una sola escala con banco de disco + líneas orientadas y suma de ramas.</a:t>
             </a:r>
             <a:endParaRPr lang="en-US" sz="1350" dirty="0"/>
           </a:p>
@@ -7500,7 +7731,7 @@
                 <a:ea typeface="Times New Roman" pitchFamily="34" charset="-122"/>
                 <a:cs typeface="Times New Roman" pitchFamily="34" charset="-120"/>
               </a:rPr>
-              <a:t>Explorar reglas de fusión adaptativas para la rama Black Top-Hat.</a:t>
+              <a:t>El barrido PSO de 25 configuraciones halló el óptimo r = 25, m = 0,0703 (F = 1,9843) de manera consistente.</a:t>
             </a:r>
             <a:endParaRPr lang="en-US" sz="1350" dirty="0"/>
           </a:p>
@@ -7521,7 +7752,7 @@
                 <a:ea typeface="Times New Roman" pitchFamily="34" charset="-122"/>
                 <a:cs typeface="Times New Roman" pitchFamily="34" charset="-120"/>
               </a:rPr>
-              <a:t>Complementar las métricas objetivas con una validación perceptual por observadores.</a:t>
+              <a:t>La propuesta exhibe el mejor perfil de calidad del benchmark: menor Nabf y mayor SSIM, con significancia estadística; segunda en Qabf, SCD y VIF.</a:t>
             </a:r>
             <a:endParaRPr lang="en-US" sz="1350" dirty="0"/>
           </a:p>
@@ -7542,7 +7773,7 @@
                 <a:ea typeface="Times New Roman" pitchFamily="34" charset="-122"/>
                 <a:cs typeface="Times New Roman" pitchFamily="34" charset="-120"/>
               </a:rPr>
-              <a:t>Evaluar la transferencia a otros dominios (imágenes médicas, aéreas).</a:t>
+              <a:t>Frente a la metodología clásica Top-Hat, mejora todas las métricas de calidad de fusión: el banco de SE y el ajuste automático aportan valor real.</a:t>
             </a:r>
             <a:endParaRPr lang="en-US" sz="1350" dirty="0"/>
           </a:p>
@@ -7563,7 +7794,7 @@
                 <a:ea typeface="Times New Roman" pitchFamily="34" charset="-122"/>
                 <a:cs typeface="Times New Roman" pitchFamily="34" charset="-120"/>
               </a:rPr>
-              <a:t>Para aplicaciones donde los artefactos son críticos (interpretación humana, diagnóstico), la propuesta es la opción recomendada; donde prima el contraste bruto, LP sigue siendo competitiva.</a:t>
+              <a:t>En detección, la superioridad en calidad de imagen no se traslada automáticamente al mAP: la elección del método debe guiarse por el criterio operativo prioritario.</a:t>
             </a:r>
             <a:endParaRPr lang="en-US" sz="1350" dirty="0"/>
           </a:p>
@@ -7609,6 +7840,243 @@
         </p:nvSpPr>
         <p:spPr>
           <a:xfrm>
+            <a:off x="457200" y="256032"/>
+            <a:ext cx="8229600" cy="502920"/>
+          </a:xfrm>
+          <a:prstGeom prst="rect">
+            <a:avLst/>
+          </a:prstGeom>
+          <a:noFill/>
+          <a:ln/>
+        </p:spPr>
+        <p:txBody>
+          <a:bodyPr wrap="square" lIns="0" tIns="0" rIns="0" bIns="0" rtlCol="0" anchor="ctr"/>
+          <a:lstStyle/>
+          <a:p>
+            <a:pPr indent="0" marL="0">
+              <a:buNone/>
+            </a:pPr>
+            <a:r>
+              <a:rPr lang="en-US" sz="2300" b="1" dirty="0">
+                <a:solidFill>
+                  <a:srgbClr val="1A1A1A"/>
+                </a:solidFill>
+                <a:latin typeface="Times New Roman" pitchFamily="34" charset="0"/>
+                <a:ea typeface="Times New Roman" pitchFamily="34" charset="-122"/>
+                <a:cs typeface="Times New Roman" pitchFamily="34" charset="-120"/>
+              </a:rPr>
+              <a:t>Recomendaciones y trabajo futuro</a:t>
+            </a:r>
+            <a:endParaRPr lang="en-US" sz="2300" dirty="0"/>
+          </a:p>
+        </p:txBody>
+      </p:sp>
+      <p:sp>
+        <p:nvSpPr>
+          <p:cNvPr id="3" name="Text 1"/>
+          <p:cNvSpPr/>
+          <p:nvPr/>
+        </p:nvSpPr>
+        <p:spPr>
+          <a:xfrm>
+            <a:off x="8229600" y="4828032"/>
+            <a:ext cx="685800" cy="274320"/>
+          </a:xfrm>
+          <a:prstGeom prst="rect">
+            <a:avLst/>
+          </a:prstGeom>
+          <a:noFill/>
+          <a:ln/>
+        </p:spPr>
+        <p:txBody>
+          <a:bodyPr wrap="square" lIns="0" tIns="0" rIns="0" bIns="0" rtlCol="0" anchor="ctr"/>
+          <a:lstStyle/>
+          <a:p>
+            <a:pPr algn="r" indent="0" marL="0">
+              <a:buNone/>
+            </a:pPr>
+            <a:r>
+              <a:rPr lang="en-US" sz="900" dirty="0">
+                <a:solidFill>
+                  <a:srgbClr val="666666"/>
+                </a:solidFill>
+                <a:latin typeface="Times New Roman" pitchFamily="34" charset="0"/>
+                <a:ea typeface="Times New Roman" pitchFamily="34" charset="-122"/>
+                <a:cs typeface="Times New Roman" pitchFamily="34" charset="-120"/>
+              </a:rPr>
+              <a:t>17 / 18</a:t>
+            </a:r>
+            <a:endParaRPr lang="en-US" sz="900" dirty="0"/>
+          </a:p>
+        </p:txBody>
+      </p:sp>
+      <p:sp>
+        <p:nvSpPr>
+          <p:cNvPr id="4" name="Text 2"/>
+          <p:cNvSpPr/>
+          <p:nvPr/>
+        </p:nvSpPr>
+        <p:spPr>
+          <a:xfrm>
+            <a:off x="457200" y="914400"/>
+            <a:ext cx="8229600" cy="3931920"/>
+          </a:xfrm>
+          <a:prstGeom prst="rect">
+            <a:avLst/>
+          </a:prstGeom>
+          <a:noFill/>
+          <a:ln/>
+        </p:spPr>
+        <p:txBody>
+          <a:bodyPr wrap="square" lIns="0" tIns="0" rIns="0" bIns="0" rtlCol="0" anchor="t"/>
+          <a:lstStyle/>
+          <a:p>
+            <a:pPr marL="177800" indent="-177800">
+              <a:spcAft>
+                <a:spcPts val="1100"/>
+              </a:spcAft>
+              <a:buSzPct val="100000"/>
+              <a:buChar char="•"/>
+            </a:pPr>
+            <a:r>
+              <a:rPr lang="en-US" sz="1350" dirty="0">
+                <a:solidFill>
+                  <a:srgbClr val="1A1A1A"/>
+                </a:solidFill>
+                <a:latin typeface="Times New Roman" pitchFamily="34" charset="0"/>
+                <a:ea typeface="Times New Roman" pitchFamily="34" charset="-122"/>
+                <a:cs typeface="Times New Roman" pitchFamily="34" charset="-120"/>
+              </a:rPr>
+              <a:t>Extender la evaluación de detección a otros detectores y al conjunto completo de LLVIP.</a:t>
+            </a:r>
+            <a:endParaRPr lang="en-US" sz="1350" dirty="0"/>
+          </a:p>
+          <a:p>
+            <a:pPr marL="177800" indent="-177800">
+              <a:spcAft>
+                <a:spcPts val="1100"/>
+              </a:spcAft>
+              <a:buSzPct val="100000"/>
+              <a:buChar char="•"/>
+            </a:pPr>
+            <a:r>
+              <a:rPr lang="en-US" sz="1350" dirty="0">
+                <a:solidFill>
+                  <a:srgbClr val="1A1A1A"/>
+                </a:solidFill>
+                <a:latin typeface="Times New Roman" pitchFamily="34" charset="0"/>
+                <a:ea typeface="Times New Roman" pitchFamily="34" charset="-122"/>
+                <a:cs typeface="Times New Roman" pitchFamily="34" charset="-120"/>
+              </a:rPr>
+              <a:t>Explorar reglas de fusión adaptativas para la rama Black Top-Hat.</a:t>
+            </a:r>
+            <a:endParaRPr lang="en-US" sz="1350" dirty="0"/>
+          </a:p>
+          <a:p>
+            <a:pPr marL="177800" indent="-177800">
+              <a:spcAft>
+                <a:spcPts val="1100"/>
+              </a:spcAft>
+              <a:buSzPct val="100000"/>
+              <a:buChar char="•"/>
+            </a:pPr>
+            <a:r>
+              <a:rPr lang="en-US" sz="1350" dirty="0">
+                <a:solidFill>
+                  <a:srgbClr val="1A1A1A"/>
+                </a:solidFill>
+                <a:latin typeface="Times New Roman" pitchFamily="34" charset="0"/>
+                <a:ea typeface="Times New Roman" pitchFamily="34" charset="-122"/>
+                <a:cs typeface="Times New Roman" pitchFamily="34" charset="-120"/>
+              </a:rPr>
+              <a:t>Complementar las métricas objetivas con una validación perceptual por observadores.</a:t>
+            </a:r>
+            <a:endParaRPr lang="en-US" sz="1350" dirty="0"/>
+          </a:p>
+          <a:p>
+            <a:pPr marL="177800" indent="-177800">
+              <a:spcAft>
+                <a:spcPts val="1100"/>
+              </a:spcAft>
+              <a:buSzPct val="100000"/>
+              <a:buChar char="•"/>
+            </a:pPr>
+            <a:r>
+              <a:rPr lang="en-US" sz="1350" dirty="0">
+                <a:solidFill>
+                  <a:srgbClr val="1A1A1A"/>
+                </a:solidFill>
+                <a:latin typeface="Times New Roman" pitchFamily="34" charset="0"/>
+                <a:ea typeface="Times New Roman" pitchFamily="34" charset="-122"/>
+                <a:cs typeface="Times New Roman" pitchFamily="34" charset="-120"/>
+              </a:rPr>
+              <a:t>Evaluar la transferencia a otros dominios (imágenes médicas, aéreas).</a:t>
+            </a:r>
+            <a:endParaRPr lang="en-US" sz="1350" dirty="0"/>
+          </a:p>
+          <a:p>
+            <a:pPr marL="177800" indent="-177800">
+              <a:spcAft>
+                <a:spcPts val="1100"/>
+              </a:spcAft>
+              <a:buSzPct val="100000"/>
+              <a:buChar char="•"/>
+            </a:pPr>
+            <a:r>
+              <a:rPr lang="en-US" sz="1350" dirty="0">
+                <a:solidFill>
+                  <a:srgbClr val="1A1A1A"/>
+                </a:solidFill>
+                <a:latin typeface="Times New Roman" pitchFamily="34" charset="0"/>
+                <a:ea typeface="Times New Roman" pitchFamily="34" charset="-122"/>
+                <a:cs typeface="Times New Roman" pitchFamily="34" charset="-120"/>
+              </a:rPr>
+              <a:t>Para aplicaciones donde los artefactos son críticos (interpretación humana, diagnóstico), la propuesta es la opción recomendada; donde prima el contraste bruto, LP sigue siendo competitiva.</a:t>
+            </a:r>
+            <a:endParaRPr lang="en-US" sz="1350" dirty="0"/>
+          </a:p>
+        </p:txBody>
+      </p:sp>
+    </p:spTree>
+  </p:cSld>
+  <p:clrMapOvr>
+    <a:masterClrMapping/>
+  </p:clrMapOvr>
+</p:sld>
+</file>
+
+<file path=ppt/slides/slide18.xml><?xml version="1.0" encoding="utf-8"?>
+<p:sld xmlns:a="http://schemas.openxmlformats.org/drawingml/2006/main" xmlns:r="http://schemas.openxmlformats.org/officeDocument/2006/relationships" xmlns:p="http://schemas.openxmlformats.org/presentationml/2006/main">
+  <p:cSld name="Slide 18">
+    <p:bg>
+      <p:bgPr>
+        <a:solidFill>
+          <a:srgbClr val="FFFFFF"/>
+        </a:solidFill>
+      </p:bgPr>
+    </p:bg>
+    <p:spTree>
+      <p:nvGrpSpPr>
+        <p:cNvPr id="1" name=""/>
+        <p:cNvGrpSpPr/>
+        <p:nvPr/>
+      </p:nvGrpSpPr>
+      <p:grpSpPr>
+        <a:xfrm>
+          <a:off x="0" y="0"/>
+          <a:ext cx="0" cy="0"/>
+          <a:chOff x="0" y="0"/>
+          <a:chExt cx="0" cy="0"/>
+        </a:xfrm>
+      </p:grpSpPr>
+      <p:sp>
+        <p:nvSpPr>
+          <p:cNvPr id="2" name="Text 0"/>
+          <p:cNvSpPr/>
+          <p:nvPr/>
+        </p:nvSpPr>
+        <p:spPr>
+          <a:xfrm>
             <a:off x="457200" y="1828800"/>
             <a:ext cx="8229600" cy="731520"/>
           </a:xfrm>
@@ -7861,7 +8329,7 @@
                 <a:ea typeface="Times New Roman" pitchFamily="34" charset="-122"/>
                 <a:cs typeface="Times New Roman" pitchFamily="34" charset="-120"/>
               </a:rPr>
-              <a:t>2 / 17</a:t>
+              <a:t>2 / 18</a:t>
             </a:r>
             <a:endParaRPr lang="en-US" sz="900" dirty="0"/>
           </a:p>
@@ -8182,7 +8650,7 @@
                 <a:ea typeface="Times New Roman" pitchFamily="34" charset="-122"/>
                 <a:cs typeface="Times New Roman" pitchFamily="34" charset="-120"/>
               </a:rPr>
-              <a:t>3 / 17</a:t>
+              <a:t>3 / 18</a:t>
             </a:r>
             <a:endParaRPr lang="en-US" sz="900" dirty="0"/>
           </a:p>
@@ -8443,7 +8911,7 @@
                 <a:ea typeface="Times New Roman" pitchFamily="34" charset="-122"/>
                 <a:cs typeface="Times New Roman" pitchFamily="34" charset="-120"/>
               </a:rPr>
-              <a:t>4 / 17</a:t>
+              <a:t>4 / 18</a:t>
             </a:r>
             <a:endParaRPr lang="en-US" sz="900" dirty="0"/>
           </a:p>
@@ -8776,7 +9244,7 @@
                 <a:ea typeface="Times New Roman" pitchFamily="34" charset="-122"/>
                 <a:cs typeface="Times New Roman" pitchFamily="34" charset="-120"/>
               </a:rPr>
-              <a:t>5 / 17</a:t>
+              <a:t>5 / 18</a:t>
             </a:r>
             <a:endParaRPr lang="en-US" sz="900" dirty="0"/>
           </a:p>
@@ -9120,7 +9588,7 @@
                 <a:ea typeface="Times New Roman" pitchFamily="34" charset="-122"/>
                 <a:cs typeface="Times New Roman" pitchFamily="34" charset="-120"/>
               </a:rPr>
-              <a:t>6 / 17</a:t>
+              <a:t>6 / 18</a:t>
             </a:r>
             <a:endParaRPr lang="en-US" sz="900" dirty="0"/>
           </a:p>
@@ -9441,7 +9909,7 @@
                 <a:ea typeface="Times New Roman" pitchFamily="34" charset="-122"/>
                 <a:cs typeface="Times New Roman" pitchFamily="34" charset="-120"/>
               </a:rPr>
-              <a:t>7 / 17</a:t>
+              <a:t>7 / 18</a:t>
             </a:r>
             <a:endParaRPr lang="en-US" sz="900" dirty="0"/>
           </a:p>
@@ -9750,7 +10218,7 @@
                 <a:ea typeface="Times New Roman" pitchFamily="34" charset="-122"/>
                 <a:cs typeface="Times New Roman" pitchFamily="34" charset="-120"/>
               </a:rPr>
-              <a:t>8 / 17</a:t>
+              <a:t>8 / 18</a:t>
             </a:r>
             <a:endParaRPr lang="en-US" sz="900" dirty="0"/>
           </a:p>
@@ -10036,7 +10504,7 @@
                 <a:ea typeface="Times New Roman" pitchFamily="34" charset="-122"/>
                 <a:cs typeface="Times New Roman" pitchFamily="34" charset="-120"/>
               </a:rPr>
-              <a:t>6. Diseño experimental</a:t>
+              <a:t>Ablación de la función de aptitud (pedido de la revisión)</a:t>
             </a:r>
             <a:endParaRPr lang="en-US" sz="2300" dirty="0"/>
           </a:p>
@@ -10075,22 +10543,46 @@
                 <a:ea typeface="Times New Roman" pitchFamily="34" charset="-122"/>
                 <a:cs typeface="Times New Roman" pitchFamily="34" charset="-120"/>
               </a:rPr>
-              <a:t>9 / 17</a:t>
+              <a:t>9 / 18</a:t>
             </a:r>
             <a:endParaRPr lang="en-US" sz="900" dirty="0"/>
           </a:p>
         </p:txBody>
       </p:sp>
-      <p:sp>
-        <p:nvSpPr>
-          <p:cNvPr id="4" name="Text 2"/>
+      <p:pic>
+        <p:nvPicPr>
+          <p:cNvPr id="4" name="Image 0" descr="C:/Users/Usuario/Documents/unv/mastertesis/tesis_mciencias_datos/docs/figures/fig_aptitud_vs_m.png">    </p:cNvPr>
+          <p:cNvPicPr>
+            <a:picLocks noChangeAspect="1"/>
+          </p:cNvPicPr>
+          <p:nvPr/>
+        </p:nvPicPr>
+        <p:blipFill>
+          <a:blip r:embed="rId1"/>
+          <a:stretch>
+            <a:fillRect/>
+          </a:stretch>
+        </p:blipFill>
+        <p:spPr>
+          <a:xfrm>
+            <a:off x="411480" y="1051560"/>
+            <a:ext cx="5212080" cy="2734056"/>
+          </a:xfrm>
+          <a:prstGeom prst="rect">
+            <a:avLst/>
+          </a:prstGeom>
+        </p:spPr>
+      </p:pic>
+      <p:sp>
+        <p:nvSpPr>
+          <p:cNvPr id="5" name="Text 2"/>
           <p:cNvSpPr/>
           <p:nvPr/>
         </p:nvSpPr>
         <p:spPr>
           <a:xfrm>
-            <a:off x="457200" y="868680"/>
-            <a:ext cx="4023360" cy="274320"/>
+            <a:off x="5760720" y="1051560"/>
+            <a:ext cx="2971800" cy="3291840"/>
           </a:xfrm>
           <a:prstGeom prst="rect">
             <a:avLst/>
@@ -10099,37 +10591,125 @@
           <a:ln/>
         </p:spPr>
         <p:txBody>
-          <a:bodyPr wrap="square" lIns="0" tIns="0" rIns="0" bIns="0" rtlCol="0" anchor="ctr"/>
-          <a:lstStyle/>
-          <a:p>
-            <a:pPr indent="0" marL="0">
-              <a:buNone/>
-            </a:pPr>
-            <a:r>
-              <a:rPr lang="en-US" sz="1400" b="1" dirty="0">
-                <a:solidFill>
-                  <a:srgbClr val="8B1A1A"/>
-                </a:solidFill>
-                <a:latin typeface="Times New Roman" pitchFamily="34" charset="0"/>
-                <a:ea typeface="Times New Roman" pitchFamily="34" charset="-122"/>
-                <a:cs typeface="Times New Roman" pitchFamily="34" charset="-120"/>
-              </a:rPr>
-              <a:t>Benchmark de calidad</a:t>
-            </a:r>
-            <a:endParaRPr lang="en-US" sz="1400" dirty="0"/>
-          </a:p>
-        </p:txBody>
-      </p:sp>
-      <p:sp>
-        <p:nvSpPr>
-          <p:cNvPr id="5" name="Text 3"/>
+          <a:bodyPr wrap="square" lIns="0" tIns="0" rIns="0" bIns="0" rtlCol="0" anchor="t"/>
+          <a:lstStyle/>
+          <a:p>
+            <a:pPr marL="177800" indent="-177800">
+              <a:spcAft>
+                <a:spcPts val="700"/>
+              </a:spcAft>
+              <a:buSzPct val="100000"/>
+              <a:buChar char="•"/>
+            </a:pPr>
+            <a:r>
+              <a:rPr lang="en-US" sz="1150" dirty="0">
+                <a:solidFill>
+                  <a:srgbClr val="1A1A1A"/>
+                </a:solidFill>
+                <a:latin typeface="Times New Roman" pitchFamily="34" charset="0"/>
+                <a:ea typeface="Times New Roman" pitchFamily="34" charset="-122"/>
+                <a:cs typeface="Times New Roman" pitchFamily="34" charset="-120"/>
+              </a:rPr>
+              <a:t>Mismo barrido 5×5 con la Fo del trabajo de referencia (SSIM_avg + E_n + PSNR_n) y su rango m ∈ [0,3–2,0].</a:t>
+            </a:r>
+            <a:endParaRPr lang="en-US" sz="1150" dirty="0"/>
+          </a:p>
+          <a:p>
+            <a:pPr marL="177800" indent="-177800">
+              <a:spcAft>
+                <a:spcPts val="700"/>
+              </a:spcAft>
+              <a:buSzPct val="100000"/>
+              <a:buChar char="•"/>
+            </a:pPr>
+            <a:r>
+              <a:rPr lang="en-US" sz="1150" b="1" dirty="0">
+                <a:solidFill>
+                  <a:srgbClr val="1A1A1A"/>
+                </a:solidFill>
+                <a:latin typeface="Times New Roman" pitchFamily="34" charset="0"/>
+                <a:ea typeface="Times New Roman" pitchFamily="34" charset="-122"/>
+                <a:cs typeface="Times New Roman" pitchFamily="34" charset="-120"/>
+              </a:rPr>
+              <a:t>En las 50 corridas, m* = 0,30: el piso del rango.</a:t>
+            </a:r>
+            <a:endParaRPr lang="en-US" sz="1150" dirty="0"/>
+          </a:p>
+          <a:p>
+            <a:pPr marL="177800" indent="-177800">
+              <a:spcAft>
+                <a:spcPts val="700"/>
+              </a:spcAft>
+              <a:buSzPct val="100000"/>
+              <a:buChar char="•"/>
+            </a:pPr>
+            <a:r>
+              <a:rPr lang="en-US" sz="1150" dirty="0">
+                <a:solidFill>
+                  <a:srgbClr val="1A1A1A"/>
+                </a:solidFill>
+                <a:latin typeface="Times New Roman" pitchFamily="34" charset="0"/>
+                <a:ea typeface="Times New Roman" pitchFamily="34" charset="-122"/>
+                <a:cs typeface="Times New Roman" pitchFamily="34" charset="-120"/>
+              </a:rPr>
+              <a:t>Las tres curvas decrecen en [0,5–2]: ningún tamaño de enjambre ni número de iteraciones puede converger allí.</a:t>
+            </a:r>
+            <a:endParaRPr lang="en-US" sz="1150" dirty="0"/>
+          </a:p>
+          <a:p>
+            <a:pPr marL="177800" indent="-177800">
+              <a:spcAft>
+                <a:spcPts val="700"/>
+              </a:spcAft>
+              <a:buSzPct val="100000"/>
+              <a:buChar char="•"/>
+            </a:pPr>
+            <a:r>
+              <a:rPr lang="en-US" sz="1150" b="1" dirty="0">
+                <a:solidFill>
+                  <a:srgbClr val="1A1A1A"/>
+                </a:solidFill>
+                <a:latin typeface="Times New Roman" pitchFamily="34" charset="0"/>
+                <a:ea typeface="Times New Roman" pitchFamily="34" charset="-122"/>
+                <a:cs typeface="Times New Roman" pitchFamily="34" charset="-120"/>
+              </a:rPr>
+              <a:t>El máximo real de Fo sobre la propuesta está en m ≈ 0,07 — coincide con nuestro óptimo (0,0703).</a:t>
+            </a:r>
+            <a:endParaRPr lang="en-US" sz="1150" dirty="0"/>
+          </a:p>
+          <a:p>
+            <a:pPr marL="177800" indent="-177800">
+              <a:spcAft>
+                <a:spcPts val="700"/>
+              </a:spcAft>
+              <a:buSzPct val="100000"/>
+              <a:buChar char="•"/>
+            </a:pPr>
+            <a:r>
+              <a:rPr lang="en-US" sz="1150" dirty="0">
+                <a:solidFill>
+                  <a:srgbClr val="1A1A1A"/>
+                </a:solidFill>
+                <a:latin typeface="Times New Roman" pitchFamily="34" charset="0"/>
+                <a:ea typeface="Times New Roman" pitchFamily="34" charset="-122"/>
+                <a:cs typeface="Times New Roman" pitchFamily="34" charset="-120"/>
+              </a:rPr>
+              <a:t>Sobre la propuesta, Fo elige r = 1 (óptimo trivial); sobre el clásico, r = 25 con 4,5× más artefactos que F_apt.</a:t>
+            </a:r>
+            <a:endParaRPr lang="en-US" sz="1150" dirty="0"/>
+          </a:p>
+        </p:txBody>
+      </p:sp>
+      <p:sp>
+        <p:nvSpPr>
+          <p:cNvPr id="6" name="Text 3"/>
           <p:cNvSpPr/>
           <p:nvPr/>
         </p:nvSpPr>
         <p:spPr>
           <a:xfrm>
-            <a:off x="457200" y="1188720"/>
-            <a:ext cx="4023360" cy="3291840"/>
+            <a:off x="457200" y="4206240"/>
+            <a:ext cx="8229600" cy="548640"/>
           </a:xfrm>
           <a:prstGeom prst="rect">
             <a:avLst/>
@@ -10138,112 +10718,6 @@
           <a:ln/>
         </p:spPr>
         <p:txBody>
-          <a:bodyPr wrap="square" lIns="0" tIns="0" rIns="0" bIns="0" rtlCol="0" anchor="t"/>
-          <a:lstStyle/>
-          <a:p>
-            <a:pPr marL="177800" indent="-177800">
-              <a:spcAft>
-                <a:spcPts val="800"/>
-              </a:spcAft>
-              <a:buSzPct val="100000"/>
-              <a:buChar char="•"/>
-            </a:pPr>
-            <a:r>
-              <a:rPr lang="en-US" sz="1250" dirty="0">
-                <a:solidFill>
-                  <a:srgbClr val="1A1A1A"/>
-                </a:solidFill>
-                <a:latin typeface="Times New Roman" pitchFamily="34" charset="0"/>
-                <a:ea typeface="Times New Roman" pitchFamily="34" charset="-122"/>
-                <a:cs typeface="Times New Roman" pitchFamily="34" charset="-120"/>
-              </a:rPr>
-              <a:t>20 pares VIS/IR del dataset TNO (Toet, 2014).</a:t>
-            </a:r>
-            <a:endParaRPr lang="en-US" sz="1250" dirty="0"/>
-          </a:p>
-          <a:p>
-            <a:pPr marL="177800" indent="-177800">
-              <a:spcAft>
-                <a:spcPts val="800"/>
-              </a:spcAft>
-              <a:buSzPct val="100000"/>
-              <a:buChar char="•"/>
-            </a:pPr>
-            <a:r>
-              <a:rPr lang="en-US" sz="1250" dirty="0">
-                <a:solidFill>
-                  <a:srgbClr val="1A1A1A"/>
-                </a:solidFill>
-                <a:latin typeface="Times New Roman" pitchFamily="34" charset="0"/>
-                <a:ea typeface="Times New Roman" pitchFamily="34" charset="-122"/>
-                <a:cs typeface="Times New Roman" pitchFamily="34" charset="-120"/>
-              </a:rPr>
-              <a:t>7 métodos: LP, RP, DWT, DTCWT, CVT, Top-Hat clásico y Propuesta → 140 fusiones.</a:t>
-            </a:r>
-            <a:endParaRPr lang="en-US" sz="1250" dirty="0"/>
-          </a:p>
-          <a:p>
-            <a:pPr marL="177800" indent="-177800">
-              <a:spcAft>
-                <a:spcPts val="800"/>
-              </a:spcAft>
-              <a:buSzPct val="100000"/>
-              <a:buChar char="•"/>
-            </a:pPr>
-            <a:r>
-              <a:rPr lang="en-US" sz="1250" dirty="0">
-                <a:solidFill>
-                  <a:srgbClr val="1A1A1A"/>
-                </a:solidFill>
-                <a:latin typeface="Times New Roman" pitchFamily="34" charset="0"/>
-                <a:ea typeface="Times New Roman" pitchFamily="34" charset="-122"/>
-                <a:cs typeface="Times New Roman" pitchFamily="34" charset="-120"/>
-              </a:rPr>
-              <a:t>12 métricas sin referencia (+ 4 descriptivas del review de Singh et al., 2023).</a:t>
-            </a:r>
-            <a:endParaRPr lang="en-US" sz="1250" dirty="0"/>
-          </a:p>
-          <a:p>
-            <a:pPr marL="177800" indent="-177800">
-              <a:spcAft>
-                <a:spcPts val="800"/>
-              </a:spcAft>
-              <a:buSzPct val="100000"/>
-              <a:buChar char="•"/>
-            </a:pPr>
-            <a:r>
-              <a:rPr lang="en-US" sz="1250" dirty="0">
-                <a:solidFill>
-                  <a:srgbClr val="1A1A1A"/>
-                </a:solidFill>
-                <a:latin typeface="Times New Roman" pitchFamily="34" charset="0"/>
-                <a:ea typeface="Times New Roman" pitchFamily="34" charset="-122"/>
-                <a:cs typeface="Times New Roman" pitchFamily="34" charset="-120"/>
-              </a:rPr>
-              <a:t>Friedman global + Wilcoxon pareado con corrección de Holm (α = 0,05).</a:t>
-            </a:r>
-            <a:endParaRPr lang="en-US" sz="1250" dirty="0"/>
-          </a:p>
-        </p:txBody>
-      </p:sp>
-      <p:sp>
-        <p:nvSpPr>
-          <p:cNvPr id="6" name="Text 4"/>
-          <p:cNvSpPr/>
-          <p:nvPr/>
-        </p:nvSpPr>
-        <p:spPr>
-          <a:xfrm>
-            <a:off x="4846320" y="868680"/>
-            <a:ext cx="3840480" cy="274320"/>
-          </a:xfrm>
-          <a:prstGeom prst="rect">
-            <a:avLst/>
-          </a:prstGeom>
-          <a:noFill/>
-          <a:ln/>
-        </p:spPr>
-        <p:txBody>
           <a:bodyPr wrap="square" lIns="0" tIns="0" rIns="0" bIns="0" rtlCol="0" anchor="ctr"/>
           <a:lstStyle/>
           <a:p>
@@ -10251,7 +10725,7 @@
               <a:buNone/>
             </a:pPr>
             <a:r>
-              <a:rPr lang="en-US" sz="1400" b="1" dirty="0">
+              <a:rPr lang="en-US" sz="1200" i="1" dirty="0">
                 <a:solidFill>
                   <a:srgbClr val="8B1A1A"/>
                 </a:solidFill>
@@ -10259,94 +10733,9 @@
                 <a:ea typeface="Times New Roman" pitchFamily="34" charset="-122"/>
                 <a:cs typeface="Times New Roman" pitchFamily="34" charset="-120"/>
               </a:rPr>
-              <a:t>Evaluación orientada a tarea</a:t>
-            </a:r>
-            <a:endParaRPr lang="en-US" sz="1400" dirty="0"/>
-          </a:p>
-        </p:txBody>
-      </p:sp>
-      <p:sp>
-        <p:nvSpPr>
-          <p:cNvPr id="7" name="Text 5"/>
-          <p:cNvSpPr/>
-          <p:nvPr/>
-        </p:nvSpPr>
-        <p:spPr>
-          <a:xfrm>
-            <a:off x="4846320" y="1188720"/>
-            <a:ext cx="3840480" cy="3291840"/>
-          </a:xfrm>
-          <a:prstGeom prst="rect">
-            <a:avLst/>
-          </a:prstGeom>
-          <a:noFill/>
-          <a:ln/>
-        </p:spPr>
-        <p:txBody>
-          <a:bodyPr wrap="square" lIns="0" tIns="0" rIns="0" bIns="0" rtlCol="0" anchor="t"/>
-          <a:lstStyle/>
-          <a:p>
-            <a:pPr marL="177800" indent="-177800">
-              <a:spcAft>
-                <a:spcPts val="800"/>
-              </a:spcAft>
-              <a:buSzPct val="100000"/>
-              <a:buChar char="•"/>
-            </a:pPr>
-            <a:r>
-              <a:rPr lang="en-US" sz="1250" dirty="0">
-                <a:solidFill>
-                  <a:srgbClr val="1A1A1A"/>
-                </a:solidFill>
-                <a:latin typeface="Times New Roman" pitchFamily="34" charset="0"/>
-                <a:ea typeface="Times New Roman" pitchFamily="34" charset="-122"/>
-                <a:cs typeface="Times New Roman" pitchFamily="34" charset="-120"/>
-              </a:rPr>
-              <a:t>Dataset etiquetado LLVIP (peatones nocturnos): 2.000 imágenes de entrenamiento y 500 de validación.</a:t>
-            </a:r>
-            <a:endParaRPr lang="en-US" sz="1250" dirty="0"/>
-          </a:p>
-          <a:p>
-            <a:pPr marL="177800" indent="-177800">
-              <a:spcAft>
-                <a:spcPts val="800"/>
-              </a:spcAft>
-              <a:buSzPct val="100000"/>
-              <a:buChar char="•"/>
-            </a:pPr>
-            <a:r>
-              <a:rPr lang="en-US" sz="1250" dirty="0">
-                <a:solidFill>
-                  <a:srgbClr val="1A1A1A"/>
-                </a:solidFill>
-                <a:latin typeface="Times New Roman" pitchFamily="34" charset="0"/>
-                <a:ea typeface="Times New Roman" pitchFamily="34" charset="-122"/>
-                <a:cs typeface="Times New Roman" pitchFamily="34" charset="-120"/>
-              </a:rPr>
-              <a:t>YOLOv8n reentrenado por modalidad (40 épocas), 9 entradas: VIS, IR y las 7 fusiones.</a:t>
-            </a:r>
-            <a:endParaRPr lang="en-US" sz="1250" dirty="0"/>
-          </a:p>
-          <a:p>
-            <a:pPr marL="177800" indent="-177800">
-              <a:spcAft>
-                <a:spcPts val="800"/>
-              </a:spcAft>
-              <a:buSzPct val="100000"/>
-              <a:buChar char="•"/>
-            </a:pPr>
-            <a:r>
-              <a:rPr lang="en-US" sz="1250" dirty="0">
-                <a:solidFill>
-                  <a:srgbClr val="1A1A1A"/>
-                </a:solidFill>
-                <a:latin typeface="Times New Roman" pitchFamily="34" charset="0"/>
-                <a:ea typeface="Times New Roman" pitchFamily="34" charset="-122"/>
-                <a:cs typeface="Times New Roman" pitchFamily="34" charset="-120"/>
-              </a:rPr>
-              <a:t>Etiquetas idénticas entre modalidades: la diferencia de mAP aísla el efecto del método de fusión.</a:t>
-            </a:r>
-            <a:endParaRPr lang="en-US" sz="1250" dirty="0"/>
+              <a:t>Ambas aptitudes acuerdan el peso del operador con suma; la orientada a la fusión controla además los artefactos (refuerza H2).</a:t>
+            </a:r>
+            <a:endParaRPr lang="en-US" sz="1200" dirty="0"/>
           </a:p>
         </p:txBody>
       </p:sp>

--- a/docs/Tesis_Defensa_Presentacion.pptx
+++ b/docs/Tesis_Defensa_Presentacion.pptx
@@ -23,9 +23,10 @@
     <p:sldId id="271" r:id="rId17"/>
     <p:sldId id="272" r:id="rId18"/>
     <p:sldId id="273" r:id="rId19"/>
+    <p:sldId id="274" r:id="rId20"/>
   </p:sldIdLst>
   <p:notesMasterIdLst>
-    <p:notesMasterId r:id="rId20"/>
+    <p:notesMasterId r:id="rId21"/>
   </p:notesMasterIdLst>
   <p:sldSz cx="9144000" cy="5143500"/>
   <p:notesSz cx="5143500" cy="9144000"/>
@@ -1047,7 +1048,7 @@
           <a:p>
             <a:r>
               <a:rPr lang="en-US" dirty="0"/>
-              <a:t>H1 y H2 quedan sostenidas con evidencia estadística. H3 solo parcialmente: es el resultado más honesto del trabajo y anticipa la pregunta natural del tribunal — calidad de imagen y utilidad en tarea son criterios distintos.</a:t>
+              <a:t>El experimento que delimita el valor de la fusión: un único YOLOv8n entrenado con VIS+IR mezcladas (4.000 imágenes, 40 épocas) e inferencia por método. Las personas solo se ven bien en IR y las luces solo en VIS; la fusión es la única entrada que detecta ambas a la vez. La propuesta lidera entre las fusiones y su ventaja sobre el óptimo Fo confirma la elección de la aptitud también en tarea.</a:t>
             </a:r>
             <a:endParaRPr lang="en-US" dirty="0"/>
           </a:p>
@@ -1135,7 +1136,7 @@
           <a:p>
             <a:r>
               <a:rPr lang="en-US" dirty="0"/>
-              <a:t>Cinco conclusiones: método formulado, óptimo hallado, perfil de calidad validado, ventaja sobre el clásico demostrada, y la lección sobre calidad vs. tarea.</a:t>
+              <a:t>H1 y H2 quedan sostenidas con evidencia estadística. H3 solo parcialmente: es el resultado más honesto del trabajo y anticipa la pregunta natural del tribunal — calidad de imagen y utilidad en tarea son criterios distintos.</a:t>
             </a:r>
             <a:endParaRPr lang="en-US" dirty="0"/>
           </a:p>
@@ -1223,7 +1224,7 @@
           <a:p>
             <a:r>
               <a:rPr lang="en-US" dirty="0"/>
-              <a:t>Cerrar con la recomendación práctica: qué método elegir según el criterio operativo. Dejar claro que el pipeline completo es reproducible desde el repositorio.</a:t>
+              <a:t>Cinco conclusiones: método formulado, óptimo hallado, perfil de calidad validado, ventaja sobre el clásico demostrada, y la lección sobre calidad vs. tarea.</a:t>
             </a:r>
             <a:endParaRPr lang="en-US" dirty="0"/>
           </a:p>
@@ -1311,7 +1312,7 @@
           <a:p>
             <a:r>
               <a:rPr lang="en-US" dirty="0"/>
-              <a:t>Agradecer a la mesa y al orientador. Ofrecer el repositorio para cualquier verificación.</a:t>
+              <a:t>Cerrar con la recomendación práctica: qué método elegir según el criterio operativo. Dejar claro que el pipeline completo es reproducible desde el repositorio.</a:t>
             </a:r>
             <a:endParaRPr lang="en-US" dirty="0"/>
           </a:p>
@@ -1335,6 +1336,94 @@
             <a:fld id="{F7021451-1387-4CA6-816F-3879F97B5CBC}" type="slidenum">
               <a:rPr lang="en-US"/>
               <a:t>18</a:t>
+            </a:fld>
+            <a:endParaRPr lang="en-US"/>
+          </a:p>
+        </p:txBody>
+      </p:sp>
+    </p:spTree>
+    <p:extLst>
+      <p:ext uri="{BB962C8B-B14F-4D97-AF65-F5344CB8AC3E}">
+        <p14:creationId xmlns:p14="http://schemas.microsoft.com/office/powerpoint/2010/main" val="1024086991"/>
+      </p:ext>
+    </p:extLst>
+  </p:cSld>
+  <p:clrMapOvr>
+    <a:masterClrMapping/>
+  </p:clrMapOvr>
+</p:notes>
+</file>
+
+<file path=ppt/notesSlides/notesSlide19.xml><?xml version="1.0" encoding="utf-8"?>
+<p:notes xmlns:a="http://schemas.openxmlformats.org/drawingml/2006/main" xmlns:r="http://schemas.openxmlformats.org/officeDocument/2006/relationships" xmlns:p="http://schemas.openxmlformats.org/presentationml/2006/main">
+  <p:cSld>
+    <p:spTree>
+      <p:nvGrpSpPr>
+        <p:cNvPr id="1" name=""/>
+        <p:cNvGrpSpPr/>
+        <p:nvPr/>
+      </p:nvGrpSpPr>
+      <p:grpSpPr>
+        <a:xfrm>
+          <a:off x="0" y="0"/>
+          <a:ext cx="0" cy="0"/>
+          <a:chOff x="0" y="0"/>
+          <a:chExt cx="0" cy="0"/>
+        </a:xfrm>
+      </p:grpSpPr>
+      <p:sp>
+        <p:nvSpPr>
+          <p:cNvPr id="2" name="Slide Image Placeholder 1"/>
+          <p:cNvSpPr>
+            <a:spLocks noGrp="1" noRot="1" noChangeAspect="1"/>
+          </p:cNvSpPr>
+          <p:nvPr>
+            <p:ph type="sldImg"/>
+          </p:nvPr>
+        </p:nvSpPr>
+        <p:spPr/>
+      </p:sp>
+      <p:sp>
+        <p:nvSpPr>
+          <p:cNvPr id="3" name="Notes Placeholder 2"/>
+          <p:cNvSpPr>
+            <a:spLocks noGrp="1"/>
+          </p:cNvSpPr>
+          <p:nvPr>
+            <p:ph type="body" idx="1"/>
+          </p:nvPr>
+        </p:nvSpPr>
+        <p:spPr/>
+        <p:txBody>
+          <a:bodyPr/>
+          <a:lstStyle/>
+          <a:p>
+            <a:r>
+              <a:rPr lang="en-US" dirty="0"/>
+              <a:t>Agradecer a la mesa y al orientador. Ofrecer el repositorio para cualquier verificación.</a:t>
+            </a:r>
+            <a:endParaRPr lang="en-US" dirty="0"/>
+          </a:p>
+        </p:txBody>
+      </p:sp>
+      <p:sp>
+        <p:nvSpPr>
+          <p:cNvPr id="4" name="Slide Number Placeholder 3"/>
+          <p:cNvSpPr>
+            <a:spLocks noGrp="1"/>
+          </p:cNvSpPr>
+          <p:nvPr>
+            <p:ph type="sldNum" sz="quarter" idx="10"/>
+          </p:nvPr>
+        </p:nvSpPr>
+        <p:spPr/>
+        <p:txBody>
+          <a:bodyPr/>
+          <a:lstStyle/>
+          <a:p>
+            <a:fld id="{F7021451-1387-4CA6-816F-3879F97B5CBC}" type="slidenum">
+              <a:rPr lang="en-US"/>
+              <a:t>19</a:t>
             </a:fld>
             <a:endParaRPr lang="en-US"/>
           </a:p>
@@ -2794,7 +2883,7 @@
                 <a:ea typeface="Times New Roman" pitchFamily="34" charset="-122"/>
                 <a:cs typeface="Times New Roman" pitchFamily="34" charset="-120"/>
               </a:rPr>
-              <a:t>10 / 18</a:t>
+              <a:t>10 / 19</a:t>
             </a:r>
             <a:endParaRPr lang="en-US" sz="900" dirty="0"/>
           </a:p>
@@ -3173,7 +3262,7 @@
                 <a:ea typeface="Times New Roman" pitchFamily="34" charset="-122"/>
                 <a:cs typeface="Times New Roman" pitchFamily="34" charset="-120"/>
               </a:rPr>
-              <a:t>11 / 18</a:t>
+              <a:t>11 / 19</a:t>
             </a:r>
             <a:endParaRPr lang="en-US" sz="900" dirty="0"/>
           </a:p>
@@ -3346,7 +3435,7 @@
                 <a:ea typeface="Times New Roman" pitchFamily="34" charset="-122"/>
                 <a:cs typeface="Times New Roman" pitchFamily="34" charset="-120"/>
               </a:rPr>
-              <a:t>12 / 18</a:t>
+              <a:t>12 / 19</a:t>
             </a:r>
             <a:endParaRPr lang="en-US" sz="900" dirty="0"/>
           </a:p>
@@ -6708,7 +6797,7 @@
                 <a:ea typeface="Times New Roman" pitchFamily="34" charset="-122"/>
                 <a:cs typeface="Times New Roman" pitchFamily="34" charset="-120"/>
               </a:rPr>
-              <a:t>13 / 18</a:t>
+              <a:t>13 / 19</a:t>
             </a:r>
             <a:endParaRPr lang="en-US" sz="900" dirty="0"/>
           </a:p>
@@ -6987,7 +7076,7 @@
                 <a:ea typeface="Times New Roman" pitchFamily="34" charset="-122"/>
                 <a:cs typeface="Times New Roman" pitchFamily="34" charset="-120"/>
               </a:rPr>
-              <a:t>14 / 18</a:t>
+              <a:t>14 / 19</a:t>
             </a:r>
             <a:endParaRPr lang="en-US" sz="900" dirty="0"/>
           </a:p>
@@ -7167,7 +7256,7 @@
                 <a:ea typeface="Times New Roman" pitchFamily="34" charset="-122"/>
                 <a:cs typeface="Times New Roman" pitchFamily="34" charset="-120"/>
               </a:rPr>
-              <a:t>Contraste de hipótesis</a:t>
+              <a:t>Clases complementarias en M3FD — un detector único VIS+IR</a:t>
             </a:r>
             <a:endParaRPr lang="en-US" sz="2300" dirty="0"/>
           </a:p>
@@ -7206,22 +7295,46 @@
                 <a:ea typeface="Times New Roman" pitchFamily="34" charset="-122"/>
                 <a:cs typeface="Times New Roman" pitchFamily="34" charset="-120"/>
               </a:rPr>
-              <a:t>15 / 18</a:t>
+              <a:t>15 / 19</a:t>
             </a:r>
             <a:endParaRPr lang="en-US" sz="900" dirty="0"/>
           </a:p>
         </p:txBody>
       </p:sp>
-      <p:sp>
-        <p:nvSpPr>
-          <p:cNvPr id="4" name="Text 2"/>
+      <p:pic>
+        <p:nvPicPr>
+          <p:cNvPr id="4" name="Image 0" descr="C:\Users\Usuario\AppData\Local\Temp\claude\C--Users-Usuario-Documents-unv-mastertesis\fa0a2acc-a0da-4701-a920-18b20c70d3b2\scratchpad\pptx_build/assets/m3fd_par.png">    </p:cNvPr>
+          <p:cNvPicPr>
+            <a:picLocks noChangeAspect="1"/>
+          </p:cNvPicPr>
+          <p:nvPr/>
+        </p:nvPicPr>
+        <p:blipFill>
+          <a:blip r:embed="rId1"/>
+          <a:stretch>
+            <a:fillRect/>
+          </a:stretch>
+        </p:blipFill>
+        <p:spPr>
+          <a:xfrm>
+            <a:off x="640080" y="868680"/>
+            <a:ext cx="7863840" cy="2944368"/>
+          </a:xfrm>
+          <a:prstGeom prst="rect">
+            <a:avLst/>
+          </a:prstGeom>
+        </p:spPr>
+      </p:pic>
+      <p:sp>
+        <p:nvSpPr>
+          <p:cNvPr id="5" name="Text 2"/>
           <p:cNvSpPr/>
           <p:nvPr/>
         </p:nvSpPr>
         <p:spPr>
           <a:xfrm>
-            <a:off x="457200" y="960120"/>
-            <a:ext cx="640080" cy="411480"/>
+            <a:off x="457200" y="3913632"/>
+            <a:ext cx="8229600" cy="1143000"/>
           </a:xfrm>
           <a:prstGeom prst="rect">
             <a:avLst/>
@@ -7230,14 +7343,18 @@
           <a:ln/>
         </p:spPr>
         <p:txBody>
-          <a:bodyPr wrap="square" lIns="0" tIns="0" rIns="0" bIns="0" rtlCol="0" anchor="ctr"/>
-          <a:lstStyle/>
-          <a:p>
-            <a:pPr indent="0" marL="0">
-              <a:buNone/>
-            </a:pPr>
-            <a:r>
-              <a:rPr lang="en-US" sz="1900" b="1" dirty="0">
+          <a:bodyPr wrap="square" lIns="0" tIns="0" rIns="0" bIns="0" rtlCol="0" anchor="t"/>
+          <a:lstStyle/>
+          <a:p>
+            <a:pPr marL="177800" indent="-177800">
+              <a:spcAft>
+                <a:spcPts val="400"/>
+              </a:spcAft>
+              <a:buSzPct val="100000"/>
+              <a:buChar char="•"/>
+            </a:pPr>
+            <a:r>
+              <a:rPr lang="en-US" sz="1150" dirty="0">
                 <a:solidFill>
                   <a:srgbClr val="1A1A1A"/>
                 </a:solidFill>
@@ -7245,77 +7362,20 @@
                 <a:ea typeface="Times New Roman" pitchFamily="34" charset="-122"/>
                 <a:cs typeface="Times New Roman" pitchFamily="34" charset="-120"/>
               </a:rPr>
-              <a:t>H1</a:t>
-            </a:r>
-            <a:endParaRPr lang="en-US" sz="1900" dirty="0"/>
-          </a:p>
-        </p:txBody>
-      </p:sp>
-      <p:sp>
-        <p:nvSpPr>
-          <p:cNvPr id="5" name="Text 3"/>
-          <p:cNvSpPr/>
-          <p:nvPr/>
-        </p:nvSpPr>
-        <p:spPr>
-          <a:xfrm>
-            <a:off x="1143000" y="996696"/>
-            <a:ext cx="1417320" cy="365760"/>
-          </a:xfrm>
-          <a:prstGeom prst="rect">
-            <a:avLst/>
-          </a:prstGeom>
-          <a:noFill/>
-          <a:ln/>
-        </p:spPr>
-        <p:txBody>
-          <a:bodyPr wrap="square" lIns="0" tIns="0" rIns="0" bIns="0" rtlCol="0" anchor="ctr"/>
-          <a:lstStyle/>
-          <a:p>
-            <a:pPr indent="0" marL="0">
-              <a:buNone/>
-            </a:pPr>
-            <a:r>
-              <a:rPr lang="en-US" sz="1300" b="1" dirty="0">
-                <a:solidFill>
-                  <a:srgbClr val="1F5C2E"/>
-                </a:solidFill>
-                <a:latin typeface="Times New Roman" pitchFamily="34" charset="0"/>
-                <a:ea typeface="Times New Roman" pitchFamily="34" charset="-122"/>
-                <a:cs typeface="Times New Roman" pitchFamily="34" charset="-120"/>
-              </a:rPr>
-              <a:t>SOSTENIDA</a:t>
-            </a:r>
-            <a:endParaRPr lang="en-US" sz="1300" dirty="0"/>
-          </a:p>
-        </p:txBody>
-      </p:sp>
-      <p:sp>
-        <p:nvSpPr>
-          <p:cNvPr id="6" name="Text 4"/>
-          <p:cNvSpPr/>
-          <p:nvPr/>
-        </p:nvSpPr>
-        <p:spPr>
-          <a:xfrm>
-            <a:off x="2697480" y="960120"/>
-            <a:ext cx="5989320" cy="1143000"/>
-          </a:xfrm>
-          <a:prstGeom prst="rect">
-            <a:avLst/>
-          </a:prstGeom>
-          <a:noFill/>
-          <a:ln/>
-        </p:spPr>
-        <p:txBody>
-          <a:bodyPr wrap="square" lIns="0" tIns="0" rIns="0" bIns="0" rtlCol="0" anchor="t"/>
-          <a:lstStyle/>
-          <a:p>
-            <a:pPr indent="0" marL="0">
-              <a:buNone/>
-            </a:pPr>
-            <a:r>
-              <a:rPr lang="en-US" sz="1250" dirty="0">
+              <a:t>Complementariedad extrema: el IR domina People (0,220) pero es ciego a Lamp (0,018); el VIS es el espejo (0,178 / 0,135).</a:t>
+            </a:r>
+            <a:endParaRPr lang="en-US" sz="1150" dirty="0"/>
+          </a:p>
+          <a:p>
+            <a:pPr marL="177800" indent="-177800">
+              <a:spcAft>
+                <a:spcPts val="400"/>
+              </a:spcAft>
+              <a:buSzPct val="100000"/>
+              <a:buChar char="•"/>
+            </a:pPr>
+            <a:r>
+              <a:rPr lang="en-US" sz="1150" b="1" dirty="0">
                 <a:solidFill>
                   <a:srgbClr val="1A1A1A"/>
                 </a:solidFill>
@@ -7323,38 +7383,20 @@
                 <a:ea typeface="Times New Roman" pitchFamily="34" charset="-122"/>
                 <a:cs typeface="Times New Roman" pitchFamily="34" charset="-120"/>
               </a:rPr>
-              <a:t>El banco disco + líneas con suma de ramas mejora SSIM (0,782 vs 0,578) y reduce Nabf (0,041 vs 0,585) frente al Top-Hat clásico, con significancia estadística (Wilcoxon–Holm).</a:t>
-            </a:r>
-            <a:endParaRPr lang="en-US" sz="1250" dirty="0"/>
-          </a:p>
-        </p:txBody>
-      </p:sp>
-      <p:sp>
-        <p:nvSpPr>
-          <p:cNvPr id="7" name="Text 5"/>
-          <p:cNvSpPr/>
-          <p:nvPr/>
-        </p:nvSpPr>
-        <p:spPr>
-          <a:xfrm>
-            <a:off x="457200" y="2258568"/>
-            <a:ext cx="640080" cy="411480"/>
-          </a:xfrm>
-          <a:prstGeom prst="rect">
-            <a:avLst/>
-          </a:prstGeom>
-          <a:noFill/>
-          <a:ln/>
-        </p:spPr>
-        <p:txBody>
-          <a:bodyPr wrap="square" lIns="0" tIns="0" rIns="0" bIns="0" rtlCol="0" anchor="ctr"/>
-          <a:lstStyle/>
-          <a:p>
-            <a:pPr indent="0" marL="0">
-              <a:buNone/>
-            </a:pPr>
-            <a:r>
-              <a:rPr lang="en-US" sz="1900" b="1" dirty="0">
+              <a:t>Las mejores fusiones superan a AMBAS modalidades en el promedio del par (propuesta 0,162; RP 0,165 vs VIS 0,157 e IR 0,119): ambas clases en una sola imagen.</a:t>
+            </a:r>
+            <a:endParaRPr lang="en-US" sz="1150" dirty="0"/>
+          </a:p>
+          <a:p>
+            <a:pPr marL="177800" indent="-177800">
+              <a:spcAft>
+                <a:spcPts val="400"/>
+              </a:spcAft>
+              <a:buSzPct val="100000"/>
+              <a:buChar char="•"/>
+            </a:pPr>
+            <a:r>
+              <a:rPr lang="en-US" sz="1150" dirty="0">
                 <a:solidFill>
                   <a:srgbClr val="1A1A1A"/>
                 </a:solidFill>
@@ -7362,204 +7404,9 @@
                 <a:ea typeface="Times New Roman" pitchFamily="34" charset="-122"/>
                 <a:cs typeface="Times New Roman" pitchFamily="34" charset="-120"/>
               </a:rPr>
-              <a:t>H2</a:t>
-            </a:r>
-            <a:endParaRPr lang="en-US" sz="1900" dirty="0"/>
-          </a:p>
-        </p:txBody>
-      </p:sp>
-      <p:sp>
-        <p:nvSpPr>
-          <p:cNvPr id="8" name="Text 6"/>
-          <p:cNvSpPr/>
-          <p:nvPr/>
-        </p:nvSpPr>
-        <p:spPr>
-          <a:xfrm>
-            <a:off x="1143000" y="2295144"/>
-            <a:ext cx="1417320" cy="365760"/>
-          </a:xfrm>
-          <a:prstGeom prst="rect">
-            <a:avLst/>
-          </a:prstGeom>
-          <a:noFill/>
-          <a:ln/>
-        </p:spPr>
-        <p:txBody>
-          <a:bodyPr wrap="square" lIns="0" tIns="0" rIns="0" bIns="0" rtlCol="0" anchor="ctr"/>
-          <a:lstStyle/>
-          <a:p>
-            <a:pPr indent="0" marL="0">
-              <a:buNone/>
-            </a:pPr>
-            <a:r>
-              <a:rPr lang="en-US" sz="1300" b="1" dirty="0">
-                <a:solidFill>
-                  <a:srgbClr val="1F5C2E"/>
-                </a:solidFill>
-                <a:latin typeface="Times New Roman" pitchFamily="34" charset="0"/>
-                <a:ea typeface="Times New Roman" pitchFamily="34" charset="-122"/>
-                <a:cs typeface="Times New Roman" pitchFamily="34" charset="-120"/>
-              </a:rPr>
-              <a:t>SOSTENIDA</a:t>
-            </a:r>
-            <a:endParaRPr lang="en-US" sz="1300" dirty="0"/>
-          </a:p>
-        </p:txBody>
-      </p:sp>
-      <p:sp>
-        <p:nvSpPr>
-          <p:cNvPr id="9" name="Text 7"/>
-          <p:cNvSpPr/>
-          <p:nvPr/>
-        </p:nvSpPr>
-        <p:spPr>
-          <a:xfrm>
-            <a:off x="2697480" y="2258568"/>
-            <a:ext cx="5989320" cy="1143000"/>
-          </a:xfrm>
-          <a:prstGeom prst="rect">
-            <a:avLst/>
-          </a:prstGeom>
-          <a:noFill/>
-          <a:ln/>
-        </p:spPr>
-        <p:txBody>
-          <a:bodyPr wrap="square" lIns="0" tIns="0" rIns="0" bIns="0" rtlCol="0" anchor="t"/>
-          <a:lstStyle/>
-          <a:p>
-            <a:pPr indent="0" marL="0">
-              <a:buNone/>
-            </a:pPr>
-            <a:r>
-              <a:rPr lang="en-US" sz="1250" dirty="0">
-                <a:solidFill>
-                  <a:srgbClr val="1A1A1A"/>
-                </a:solidFill>
-                <a:latin typeface="Times New Roman" pitchFamily="34" charset="0"/>
-                <a:ea typeface="Times New Roman" pitchFamily="34" charset="-122"/>
-                <a:cs typeface="Times New Roman" pitchFamily="34" charset="-120"/>
-              </a:rPr>
-              <a:t>La configuración hallada por PSO (r = 25; m = 0,0703) supera a la parametrización manual del operador clásico (r = 5; m = 1) en todas las métricas de calidad de fusión.</a:t>
-            </a:r>
-            <a:endParaRPr lang="en-US" sz="1250" dirty="0"/>
-          </a:p>
-        </p:txBody>
-      </p:sp>
-      <p:sp>
-        <p:nvSpPr>
-          <p:cNvPr id="10" name="Text 8"/>
-          <p:cNvSpPr/>
-          <p:nvPr/>
-        </p:nvSpPr>
-        <p:spPr>
-          <a:xfrm>
-            <a:off x="457200" y="3557016"/>
-            <a:ext cx="640080" cy="411480"/>
-          </a:xfrm>
-          <a:prstGeom prst="rect">
-            <a:avLst/>
-          </a:prstGeom>
-          <a:noFill/>
-          <a:ln/>
-        </p:spPr>
-        <p:txBody>
-          <a:bodyPr wrap="square" lIns="0" tIns="0" rIns="0" bIns="0" rtlCol="0" anchor="ctr"/>
-          <a:lstStyle/>
-          <a:p>
-            <a:pPr indent="0" marL="0">
-              <a:buNone/>
-            </a:pPr>
-            <a:r>
-              <a:rPr lang="en-US" sz="1900" b="1" dirty="0">
-                <a:solidFill>
-                  <a:srgbClr val="1A1A1A"/>
-                </a:solidFill>
-                <a:latin typeface="Times New Roman" pitchFamily="34" charset="0"/>
-                <a:ea typeface="Times New Roman" pitchFamily="34" charset="-122"/>
-                <a:cs typeface="Times New Roman" pitchFamily="34" charset="-120"/>
-              </a:rPr>
-              <a:t>H3</a:t>
-            </a:r>
-            <a:endParaRPr lang="en-US" sz="1900" dirty="0"/>
-          </a:p>
-        </p:txBody>
-      </p:sp>
-      <p:sp>
-        <p:nvSpPr>
-          <p:cNvPr id="11" name="Text 9"/>
-          <p:cNvSpPr/>
-          <p:nvPr/>
-        </p:nvSpPr>
-        <p:spPr>
-          <a:xfrm>
-            <a:off x="1143000" y="3593592"/>
-            <a:ext cx="1417320" cy="365760"/>
-          </a:xfrm>
-          <a:prstGeom prst="rect">
-            <a:avLst/>
-          </a:prstGeom>
-          <a:noFill/>
-          <a:ln/>
-        </p:spPr>
-        <p:txBody>
-          <a:bodyPr wrap="square" lIns="0" tIns="0" rIns="0" bIns="0" rtlCol="0" anchor="ctr"/>
-          <a:lstStyle/>
-          <a:p>
-            <a:pPr indent="0" marL="0">
-              <a:buNone/>
-            </a:pPr>
-            <a:r>
-              <a:rPr lang="en-US" sz="1300" b="1" dirty="0">
-                <a:solidFill>
-                  <a:srgbClr val="8B1A1A"/>
-                </a:solidFill>
-                <a:latin typeface="Times New Roman" pitchFamily="34" charset="0"/>
-                <a:ea typeface="Times New Roman" pitchFamily="34" charset="-122"/>
-                <a:cs typeface="Times New Roman" pitchFamily="34" charset="-120"/>
-              </a:rPr>
-              <a:t>PARCIAL</a:t>
-            </a:r>
-            <a:endParaRPr lang="en-US" sz="1300" dirty="0"/>
-          </a:p>
-        </p:txBody>
-      </p:sp>
-      <p:sp>
-        <p:nvSpPr>
-          <p:cNvPr id="12" name="Text 10"/>
-          <p:cNvSpPr/>
-          <p:nvPr/>
-        </p:nvSpPr>
-        <p:spPr>
-          <a:xfrm>
-            <a:off x="2697480" y="3557016"/>
-            <a:ext cx="5989320" cy="1143000"/>
-          </a:xfrm>
-          <a:prstGeom prst="rect">
-            <a:avLst/>
-          </a:prstGeom>
-          <a:noFill/>
-          <a:ln/>
-        </p:spPr>
-        <p:txBody>
-          <a:bodyPr wrap="square" lIns="0" tIns="0" rIns="0" bIns="0" rtlCol="0" anchor="t"/>
-          <a:lstStyle/>
-          <a:p>
-            <a:pPr indent="0" marL="0">
-              <a:buNone/>
-            </a:pPr>
-            <a:r>
-              <a:rPr lang="en-US" sz="1250" dirty="0">
-                <a:solidFill>
-                  <a:srgbClr val="1A1A1A"/>
-                </a:solidFill>
-                <a:latin typeface="Times New Roman" pitchFamily="34" charset="0"/>
-                <a:ea typeface="Times New Roman" pitchFamily="34" charset="-122"/>
-                <a:cs typeface="Times New Roman" pitchFamily="34" charset="-120"/>
-              </a:rPr>
-              <a:t>La fusión supera al visible solo en detección, pero ninguna fusión supera al infrarrojo solo; la mejor calidad de imagen no garantiza el mejor mAP.</a:t>
-            </a:r>
-            <a:endParaRPr lang="en-US" sz="1250" dirty="0"/>
+              <a:t>La propuesta es la mejor fusión en mAP global (0,239) y en People (0,207); su óptimo F_apt supera al de Fo en las dos clases clave.</a:t>
+            </a:r>
+            <a:endParaRPr lang="en-US" sz="1150" dirty="0"/>
           </a:p>
         </p:txBody>
       </p:sp>
@@ -7628,7 +7475,7 @@
                 <a:ea typeface="Times New Roman" pitchFamily="34" charset="-122"/>
                 <a:cs typeface="Times New Roman" pitchFamily="34" charset="-120"/>
               </a:rPr>
-              <a:t>9. Conclusiones</a:t>
+              <a:t>Contraste de hipótesis</a:t>
             </a:r>
             <a:endParaRPr lang="en-US" sz="2300" dirty="0"/>
           </a:p>
@@ -7667,7 +7514,7 @@
                 <a:ea typeface="Times New Roman" pitchFamily="34" charset="-122"/>
                 <a:cs typeface="Times New Roman" pitchFamily="34" charset="-120"/>
               </a:rPr>
-              <a:t>16 / 18</a:t>
+              <a:t>16 / 19</a:t>
             </a:r>
             <a:endParaRPr lang="en-US" sz="900" dirty="0"/>
           </a:p>
@@ -7681,8 +7528,8 @@
         </p:nvSpPr>
         <p:spPr>
           <a:xfrm>
-            <a:off x="457200" y="914400"/>
-            <a:ext cx="8229600" cy="3931920"/>
+            <a:off x="457200" y="960120"/>
+            <a:ext cx="640080" cy="411480"/>
           </a:xfrm>
           <a:prstGeom prst="rect">
             <a:avLst/>
@@ -7691,18 +7538,92 @@
           <a:ln/>
         </p:spPr>
         <p:txBody>
+          <a:bodyPr wrap="square" lIns="0" tIns="0" rIns="0" bIns="0" rtlCol="0" anchor="ctr"/>
+          <a:lstStyle/>
+          <a:p>
+            <a:pPr indent="0" marL="0">
+              <a:buNone/>
+            </a:pPr>
+            <a:r>
+              <a:rPr lang="en-US" sz="1900" b="1" dirty="0">
+                <a:solidFill>
+                  <a:srgbClr val="1A1A1A"/>
+                </a:solidFill>
+                <a:latin typeface="Times New Roman" pitchFamily="34" charset="0"/>
+                <a:ea typeface="Times New Roman" pitchFamily="34" charset="-122"/>
+                <a:cs typeface="Times New Roman" pitchFamily="34" charset="-120"/>
+              </a:rPr>
+              <a:t>H1</a:t>
+            </a:r>
+            <a:endParaRPr lang="en-US" sz="1900" dirty="0"/>
+          </a:p>
+        </p:txBody>
+      </p:sp>
+      <p:sp>
+        <p:nvSpPr>
+          <p:cNvPr id="5" name="Text 3"/>
+          <p:cNvSpPr/>
+          <p:nvPr/>
+        </p:nvSpPr>
+        <p:spPr>
+          <a:xfrm>
+            <a:off x="1143000" y="996696"/>
+            <a:ext cx="1417320" cy="365760"/>
+          </a:xfrm>
+          <a:prstGeom prst="rect">
+            <a:avLst/>
+          </a:prstGeom>
+          <a:noFill/>
+          <a:ln/>
+        </p:spPr>
+        <p:txBody>
+          <a:bodyPr wrap="square" lIns="0" tIns="0" rIns="0" bIns="0" rtlCol="0" anchor="ctr"/>
+          <a:lstStyle/>
+          <a:p>
+            <a:pPr indent="0" marL="0">
+              <a:buNone/>
+            </a:pPr>
+            <a:r>
+              <a:rPr lang="en-US" sz="1300" b="1" dirty="0">
+                <a:solidFill>
+                  <a:srgbClr val="1F5C2E"/>
+                </a:solidFill>
+                <a:latin typeface="Times New Roman" pitchFamily="34" charset="0"/>
+                <a:ea typeface="Times New Roman" pitchFamily="34" charset="-122"/>
+                <a:cs typeface="Times New Roman" pitchFamily="34" charset="-120"/>
+              </a:rPr>
+              <a:t>SOSTENIDA</a:t>
+            </a:r>
+            <a:endParaRPr lang="en-US" sz="1300" dirty="0"/>
+          </a:p>
+        </p:txBody>
+      </p:sp>
+      <p:sp>
+        <p:nvSpPr>
+          <p:cNvPr id="6" name="Text 4"/>
+          <p:cNvSpPr/>
+          <p:nvPr/>
+        </p:nvSpPr>
+        <p:spPr>
+          <a:xfrm>
+            <a:off x="2697480" y="960120"/>
+            <a:ext cx="5989320" cy="1143000"/>
+          </a:xfrm>
+          <a:prstGeom prst="rect">
+            <a:avLst/>
+          </a:prstGeom>
+          <a:noFill/>
+          <a:ln/>
+        </p:spPr>
+        <p:txBody>
           <a:bodyPr wrap="square" lIns="0" tIns="0" rIns="0" bIns="0" rtlCol="0" anchor="t"/>
           <a:lstStyle/>
           <a:p>
-            <a:pPr marL="177800" indent="-177800">
-              <a:spcAft>
-                <a:spcPts val="1100"/>
-              </a:spcAft>
-              <a:buSzPct val="100000"/>
-              <a:buChar char="•"/>
-            </a:pPr>
-            <a:r>
-              <a:rPr lang="en-US" sz="1350" dirty="0">
+            <a:pPr indent="0" marL="0">
+              <a:buNone/>
+            </a:pPr>
+            <a:r>
+              <a:rPr lang="en-US" sz="1250" dirty="0">
                 <a:solidFill>
                   <a:srgbClr val="1A1A1A"/>
                 </a:solidFill>
@@ -7710,20 +7631,38 @@
                 <a:ea typeface="Times New Roman" pitchFamily="34" charset="-122"/>
                 <a:cs typeface="Times New Roman" pitchFamily="34" charset="-120"/>
               </a:rPr>
-              <a:t>Se formuló e implementó de forma reproducible un operador Top-Hat de una sola escala con banco de disco + líneas orientadas y suma de ramas.</a:t>
-            </a:r>
-            <a:endParaRPr lang="en-US" sz="1350" dirty="0"/>
-          </a:p>
-          <a:p>
-            <a:pPr marL="177800" indent="-177800">
-              <a:spcAft>
-                <a:spcPts val="1100"/>
-              </a:spcAft>
-              <a:buSzPct val="100000"/>
-              <a:buChar char="•"/>
-            </a:pPr>
-            <a:r>
-              <a:rPr lang="en-US" sz="1350" dirty="0">
+              <a:t>El banco disco + líneas con suma de ramas mejora SSIM (0,782 vs 0,578) y reduce Nabf (0,041 vs 0,585) frente al Top-Hat clásico, con significancia estadística (Wilcoxon–Holm).</a:t>
+            </a:r>
+            <a:endParaRPr lang="en-US" sz="1250" dirty="0"/>
+          </a:p>
+        </p:txBody>
+      </p:sp>
+      <p:sp>
+        <p:nvSpPr>
+          <p:cNvPr id="7" name="Text 5"/>
+          <p:cNvSpPr/>
+          <p:nvPr/>
+        </p:nvSpPr>
+        <p:spPr>
+          <a:xfrm>
+            <a:off x="457200" y="2258568"/>
+            <a:ext cx="640080" cy="411480"/>
+          </a:xfrm>
+          <a:prstGeom prst="rect">
+            <a:avLst/>
+          </a:prstGeom>
+          <a:noFill/>
+          <a:ln/>
+        </p:spPr>
+        <p:txBody>
+          <a:bodyPr wrap="square" lIns="0" tIns="0" rIns="0" bIns="0" rtlCol="0" anchor="ctr"/>
+          <a:lstStyle/>
+          <a:p>
+            <a:pPr indent="0" marL="0">
+              <a:buNone/>
+            </a:pPr>
+            <a:r>
+              <a:rPr lang="en-US" sz="1900" b="1" dirty="0">
                 <a:solidFill>
                   <a:srgbClr val="1A1A1A"/>
                 </a:solidFill>
@@ -7731,20 +7670,77 @@
                 <a:ea typeface="Times New Roman" pitchFamily="34" charset="-122"/>
                 <a:cs typeface="Times New Roman" pitchFamily="34" charset="-120"/>
               </a:rPr>
-              <a:t>El barrido PSO de 25 configuraciones halló el óptimo r = 25, m = 0,0703 (F = 1,9843) de manera consistente.</a:t>
-            </a:r>
-            <a:endParaRPr lang="en-US" sz="1350" dirty="0"/>
-          </a:p>
-          <a:p>
-            <a:pPr marL="177800" indent="-177800">
-              <a:spcAft>
-                <a:spcPts val="1100"/>
-              </a:spcAft>
-              <a:buSzPct val="100000"/>
-              <a:buChar char="•"/>
-            </a:pPr>
-            <a:r>
-              <a:rPr lang="en-US" sz="1350" dirty="0">
+              <a:t>H2</a:t>
+            </a:r>
+            <a:endParaRPr lang="en-US" sz="1900" dirty="0"/>
+          </a:p>
+        </p:txBody>
+      </p:sp>
+      <p:sp>
+        <p:nvSpPr>
+          <p:cNvPr id="8" name="Text 6"/>
+          <p:cNvSpPr/>
+          <p:nvPr/>
+        </p:nvSpPr>
+        <p:spPr>
+          <a:xfrm>
+            <a:off x="1143000" y="2295144"/>
+            <a:ext cx="1417320" cy="365760"/>
+          </a:xfrm>
+          <a:prstGeom prst="rect">
+            <a:avLst/>
+          </a:prstGeom>
+          <a:noFill/>
+          <a:ln/>
+        </p:spPr>
+        <p:txBody>
+          <a:bodyPr wrap="square" lIns="0" tIns="0" rIns="0" bIns="0" rtlCol="0" anchor="ctr"/>
+          <a:lstStyle/>
+          <a:p>
+            <a:pPr indent="0" marL="0">
+              <a:buNone/>
+            </a:pPr>
+            <a:r>
+              <a:rPr lang="en-US" sz="1300" b="1" dirty="0">
+                <a:solidFill>
+                  <a:srgbClr val="1F5C2E"/>
+                </a:solidFill>
+                <a:latin typeface="Times New Roman" pitchFamily="34" charset="0"/>
+                <a:ea typeface="Times New Roman" pitchFamily="34" charset="-122"/>
+                <a:cs typeface="Times New Roman" pitchFamily="34" charset="-120"/>
+              </a:rPr>
+              <a:t>SOSTENIDA</a:t>
+            </a:r>
+            <a:endParaRPr lang="en-US" sz="1300" dirty="0"/>
+          </a:p>
+        </p:txBody>
+      </p:sp>
+      <p:sp>
+        <p:nvSpPr>
+          <p:cNvPr id="9" name="Text 7"/>
+          <p:cNvSpPr/>
+          <p:nvPr/>
+        </p:nvSpPr>
+        <p:spPr>
+          <a:xfrm>
+            <a:off x="2697480" y="2258568"/>
+            <a:ext cx="5989320" cy="1143000"/>
+          </a:xfrm>
+          <a:prstGeom prst="rect">
+            <a:avLst/>
+          </a:prstGeom>
+          <a:noFill/>
+          <a:ln/>
+        </p:spPr>
+        <p:txBody>
+          <a:bodyPr wrap="square" lIns="0" tIns="0" rIns="0" bIns="0" rtlCol="0" anchor="t"/>
+          <a:lstStyle/>
+          <a:p>
+            <a:pPr indent="0" marL="0">
+              <a:buNone/>
+            </a:pPr>
+            <a:r>
+              <a:rPr lang="en-US" sz="1250" dirty="0">
                 <a:solidFill>
                   <a:srgbClr val="1A1A1A"/>
                 </a:solidFill>
@@ -7752,20 +7748,38 @@
                 <a:ea typeface="Times New Roman" pitchFamily="34" charset="-122"/>
                 <a:cs typeface="Times New Roman" pitchFamily="34" charset="-120"/>
               </a:rPr>
-              <a:t>La propuesta exhibe el mejor perfil de calidad del benchmark: menor Nabf y mayor SSIM, con significancia estadística; segunda en Qabf, SCD y VIF.</a:t>
-            </a:r>
-            <a:endParaRPr lang="en-US" sz="1350" dirty="0"/>
-          </a:p>
-          <a:p>
-            <a:pPr marL="177800" indent="-177800">
-              <a:spcAft>
-                <a:spcPts val="1100"/>
-              </a:spcAft>
-              <a:buSzPct val="100000"/>
-              <a:buChar char="•"/>
-            </a:pPr>
-            <a:r>
-              <a:rPr lang="en-US" sz="1350" dirty="0">
+              <a:t>La configuración hallada por PSO (r = 25; m = 0,0703) supera a la parametrización manual del operador clásico (r = 5; m = 1) en todas las métricas de calidad de fusión.</a:t>
+            </a:r>
+            <a:endParaRPr lang="en-US" sz="1250" dirty="0"/>
+          </a:p>
+        </p:txBody>
+      </p:sp>
+      <p:sp>
+        <p:nvSpPr>
+          <p:cNvPr id="10" name="Text 8"/>
+          <p:cNvSpPr/>
+          <p:nvPr/>
+        </p:nvSpPr>
+        <p:spPr>
+          <a:xfrm>
+            <a:off x="457200" y="3557016"/>
+            <a:ext cx="640080" cy="411480"/>
+          </a:xfrm>
+          <a:prstGeom prst="rect">
+            <a:avLst/>
+          </a:prstGeom>
+          <a:noFill/>
+          <a:ln/>
+        </p:spPr>
+        <p:txBody>
+          <a:bodyPr wrap="square" lIns="0" tIns="0" rIns="0" bIns="0" rtlCol="0" anchor="ctr"/>
+          <a:lstStyle/>
+          <a:p>
+            <a:pPr indent="0" marL="0">
+              <a:buNone/>
+            </a:pPr>
+            <a:r>
+              <a:rPr lang="en-US" sz="1900" b="1" dirty="0">
                 <a:solidFill>
                   <a:srgbClr val="1A1A1A"/>
                 </a:solidFill>
@@ -7773,20 +7787,77 @@
                 <a:ea typeface="Times New Roman" pitchFamily="34" charset="-122"/>
                 <a:cs typeface="Times New Roman" pitchFamily="34" charset="-120"/>
               </a:rPr>
-              <a:t>Frente a la metodología clásica Top-Hat, mejora todas las métricas de calidad de fusión: el banco de SE y el ajuste automático aportan valor real.</a:t>
-            </a:r>
-            <a:endParaRPr lang="en-US" sz="1350" dirty="0"/>
-          </a:p>
-          <a:p>
-            <a:pPr marL="177800" indent="-177800">
-              <a:spcAft>
-                <a:spcPts val="1100"/>
-              </a:spcAft>
-              <a:buSzPct val="100000"/>
-              <a:buChar char="•"/>
-            </a:pPr>
-            <a:r>
-              <a:rPr lang="en-US" sz="1350" dirty="0">
+              <a:t>H3</a:t>
+            </a:r>
+            <a:endParaRPr lang="en-US" sz="1900" dirty="0"/>
+          </a:p>
+        </p:txBody>
+      </p:sp>
+      <p:sp>
+        <p:nvSpPr>
+          <p:cNvPr id="11" name="Text 9"/>
+          <p:cNvSpPr/>
+          <p:nvPr/>
+        </p:nvSpPr>
+        <p:spPr>
+          <a:xfrm>
+            <a:off x="1143000" y="3593592"/>
+            <a:ext cx="1417320" cy="365760"/>
+          </a:xfrm>
+          <a:prstGeom prst="rect">
+            <a:avLst/>
+          </a:prstGeom>
+          <a:noFill/>
+          <a:ln/>
+        </p:spPr>
+        <p:txBody>
+          <a:bodyPr wrap="square" lIns="0" tIns="0" rIns="0" bIns="0" rtlCol="0" anchor="ctr"/>
+          <a:lstStyle/>
+          <a:p>
+            <a:pPr indent="0" marL="0">
+              <a:buNone/>
+            </a:pPr>
+            <a:r>
+              <a:rPr lang="en-US" sz="1300" b="1" dirty="0">
+                <a:solidFill>
+                  <a:srgbClr val="8B1A1A"/>
+                </a:solidFill>
+                <a:latin typeface="Times New Roman" pitchFamily="34" charset="0"/>
+                <a:ea typeface="Times New Roman" pitchFamily="34" charset="-122"/>
+                <a:cs typeface="Times New Roman" pitchFamily="34" charset="-120"/>
+              </a:rPr>
+              <a:t>PARCIAL</a:t>
+            </a:r>
+            <a:endParaRPr lang="en-US" sz="1300" dirty="0"/>
+          </a:p>
+        </p:txBody>
+      </p:sp>
+      <p:sp>
+        <p:nvSpPr>
+          <p:cNvPr id="12" name="Text 10"/>
+          <p:cNvSpPr/>
+          <p:nvPr/>
+        </p:nvSpPr>
+        <p:spPr>
+          <a:xfrm>
+            <a:off x="2697480" y="3557016"/>
+            <a:ext cx="5989320" cy="1143000"/>
+          </a:xfrm>
+          <a:prstGeom prst="rect">
+            <a:avLst/>
+          </a:prstGeom>
+          <a:noFill/>
+          <a:ln/>
+        </p:spPr>
+        <p:txBody>
+          <a:bodyPr wrap="square" lIns="0" tIns="0" rIns="0" bIns="0" rtlCol="0" anchor="t"/>
+          <a:lstStyle/>
+          <a:p>
+            <a:pPr indent="0" marL="0">
+              <a:buNone/>
+            </a:pPr>
+            <a:r>
+              <a:rPr lang="en-US" sz="1250" dirty="0">
                 <a:solidFill>
                   <a:srgbClr val="1A1A1A"/>
                 </a:solidFill>
@@ -7794,9 +7865,9 @@
                 <a:ea typeface="Times New Roman" pitchFamily="34" charset="-122"/>
                 <a:cs typeface="Times New Roman" pitchFamily="34" charset="-120"/>
               </a:rPr>
-              <a:t>En detección, la superioridad en calidad de imagen no se traslada automáticamente al mAP: la elección del método debe guiarse por el criterio operativo prioritario.</a:t>
-            </a:r>
-            <a:endParaRPr lang="en-US" sz="1350" dirty="0"/>
+              <a:t>La fusión supera al visible solo en detección, pero ninguna fusión supera al infrarrojo solo; la mejor calidad de imagen no garantiza el mejor mAP.</a:t>
+            </a:r>
+            <a:endParaRPr lang="en-US" sz="1250" dirty="0"/>
           </a:p>
         </p:txBody>
       </p:sp>
@@ -7865,7 +7936,7 @@
                 <a:ea typeface="Times New Roman" pitchFamily="34" charset="-122"/>
                 <a:cs typeface="Times New Roman" pitchFamily="34" charset="-120"/>
               </a:rPr>
-              <a:t>Recomendaciones y trabajo futuro</a:t>
+              <a:t>9. Conclusiones</a:t>
             </a:r>
             <a:endParaRPr lang="en-US" sz="2300" dirty="0"/>
           </a:p>
@@ -7904,7 +7975,7 @@
                 <a:ea typeface="Times New Roman" pitchFamily="34" charset="-122"/>
                 <a:cs typeface="Times New Roman" pitchFamily="34" charset="-120"/>
               </a:rPr>
-              <a:t>17 / 18</a:t>
+              <a:t>17 / 19</a:t>
             </a:r>
             <a:endParaRPr lang="en-US" sz="900" dirty="0"/>
           </a:p>
@@ -7947,7 +8018,7 @@
                 <a:ea typeface="Times New Roman" pitchFamily="34" charset="-122"/>
                 <a:cs typeface="Times New Roman" pitchFamily="34" charset="-120"/>
               </a:rPr>
-              <a:t>Extender la evaluación de detección a otros detectores y al conjunto completo de LLVIP.</a:t>
+              <a:t>Se formuló e implementó de forma reproducible un operador Top-Hat de una sola escala con banco de disco + líneas orientadas y suma de ramas.</a:t>
             </a:r>
             <a:endParaRPr lang="en-US" sz="1350" dirty="0"/>
           </a:p>
@@ -7968,7 +8039,7 @@
                 <a:ea typeface="Times New Roman" pitchFamily="34" charset="-122"/>
                 <a:cs typeface="Times New Roman" pitchFamily="34" charset="-120"/>
               </a:rPr>
-              <a:t>Explorar reglas de fusión adaptativas para la rama Black Top-Hat.</a:t>
+              <a:t>El barrido PSO de 25 configuraciones halló el óptimo r = 25, m = 0,0703 (F = 1,9843) de manera consistente.</a:t>
             </a:r>
             <a:endParaRPr lang="en-US" sz="1350" dirty="0"/>
           </a:p>
@@ -7989,7 +8060,7 @@
                 <a:ea typeface="Times New Roman" pitchFamily="34" charset="-122"/>
                 <a:cs typeface="Times New Roman" pitchFamily="34" charset="-120"/>
               </a:rPr>
-              <a:t>Complementar las métricas objetivas con una validación perceptual por observadores.</a:t>
+              <a:t>La propuesta exhibe el mejor perfil de calidad del benchmark: menor Nabf y mayor SSIM, con significancia estadística; segunda en Qabf, SCD y VIF.</a:t>
             </a:r>
             <a:endParaRPr lang="en-US" sz="1350" dirty="0"/>
           </a:p>
@@ -8010,7 +8081,7 @@
                 <a:ea typeface="Times New Roman" pitchFamily="34" charset="-122"/>
                 <a:cs typeface="Times New Roman" pitchFamily="34" charset="-120"/>
               </a:rPr>
-              <a:t>Evaluar la transferencia a otros dominios (imágenes médicas, aéreas).</a:t>
+              <a:t>Frente a la metodología clásica Top-Hat, mejora todas las métricas de calidad de fusión: el banco de SE y el ajuste automático aportan valor real.</a:t>
             </a:r>
             <a:endParaRPr lang="en-US" sz="1350" dirty="0"/>
           </a:p>
@@ -8031,7 +8102,7 @@
                 <a:ea typeface="Times New Roman" pitchFamily="34" charset="-122"/>
                 <a:cs typeface="Times New Roman" pitchFamily="34" charset="-120"/>
               </a:rPr>
-              <a:t>Para aplicaciones donde los artefactos son críticos (interpretación humana, diagnóstico), la propuesta es la opción recomendada; donde prima el contraste bruto, LP sigue siendo competitiva.</a:t>
+              <a:t>En detección, la superioridad en calidad de imagen no se traslada automáticamente al mAP: la elección del método debe guiarse por el criterio operativo prioritario.</a:t>
             </a:r>
             <a:endParaRPr lang="en-US" sz="1350" dirty="0"/>
           </a:p>
@@ -8077,6 +8148,243 @@
         </p:nvSpPr>
         <p:spPr>
           <a:xfrm>
+            <a:off x="457200" y="256032"/>
+            <a:ext cx="8229600" cy="502920"/>
+          </a:xfrm>
+          <a:prstGeom prst="rect">
+            <a:avLst/>
+          </a:prstGeom>
+          <a:noFill/>
+          <a:ln/>
+        </p:spPr>
+        <p:txBody>
+          <a:bodyPr wrap="square" lIns="0" tIns="0" rIns="0" bIns="0" rtlCol="0" anchor="ctr"/>
+          <a:lstStyle/>
+          <a:p>
+            <a:pPr indent="0" marL="0">
+              <a:buNone/>
+            </a:pPr>
+            <a:r>
+              <a:rPr lang="en-US" sz="2300" b="1" dirty="0">
+                <a:solidFill>
+                  <a:srgbClr val="1A1A1A"/>
+                </a:solidFill>
+                <a:latin typeface="Times New Roman" pitchFamily="34" charset="0"/>
+                <a:ea typeface="Times New Roman" pitchFamily="34" charset="-122"/>
+                <a:cs typeface="Times New Roman" pitchFamily="34" charset="-120"/>
+              </a:rPr>
+              <a:t>Recomendaciones y trabajo futuro</a:t>
+            </a:r>
+            <a:endParaRPr lang="en-US" sz="2300" dirty="0"/>
+          </a:p>
+        </p:txBody>
+      </p:sp>
+      <p:sp>
+        <p:nvSpPr>
+          <p:cNvPr id="3" name="Text 1"/>
+          <p:cNvSpPr/>
+          <p:nvPr/>
+        </p:nvSpPr>
+        <p:spPr>
+          <a:xfrm>
+            <a:off x="8229600" y="4828032"/>
+            <a:ext cx="685800" cy="274320"/>
+          </a:xfrm>
+          <a:prstGeom prst="rect">
+            <a:avLst/>
+          </a:prstGeom>
+          <a:noFill/>
+          <a:ln/>
+        </p:spPr>
+        <p:txBody>
+          <a:bodyPr wrap="square" lIns="0" tIns="0" rIns="0" bIns="0" rtlCol="0" anchor="ctr"/>
+          <a:lstStyle/>
+          <a:p>
+            <a:pPr algn="r" indent="0" marL="0">
+              <a:buNone/>
+            </a:pPr>
+            <a:r>
+              <a:rPr lang="en-US" sz="900" dirty="0">
+                <a:solidFill>
+                  <a:srgbClr val="666666"/>
+                </a:solidFill>
+                <a:latin typeface="Times New Roman" pitchFamily="34" charset="0"/>
+                <a:ea typeface="Times New Roman" pitchFamily="34" charset="-122"/>
+                <a:cs typeface="Times New Roman" pitchFamily="34" charset="-120"/>
+              </a:rPr>
+              <a:t>18 / 19</a:t>
+            </a:r>
+            <a:endParaRPr lang="en-US" sz="900" dirty="0"/>
+          </a:p>
+        </p:txBody>
+      </p:sp>
+      <p:sp>
+        <p:nvSpPr>
+          <p:cNvPr id="4" name="Text 2"/>
+          <p:cNvSpPr/>
+          <p:nvPr/>
+        </p:nvSpPr>
+        <p:spPr>
+          <a:xfrm>
+            <a:off x="457200" y="914400"/>
+            <a:ext cx="8229600" cy="3931920"/>
+          </a:xfrm>
+          <a:prstGeom prst="rect">
+            <a:avLst/>
+          </a:prstGeom>
+          <a:noFill/>
+          <a:ln/>
+        </p:spPr>
+        <p:txBody>
+          <a:bodyPr wrap="square" lIns="0" tIns="0" rIns="0" bIns="0" rtlCol="0" anchor="t"/>
+          <a:lstStyle/>
+          <a:p>
+            <a:pPr marL="177800" indent="-177800">
+              <a:spcAft>
+                <a:spcPts val="1100"/>
+              </a:spcAft>
+              <a:buSzPct val="100000"/>
+              <a:buChar char="•"/>
+            </a:pPr>
+            <a:r>
+              <a:rPr lang="en-US" sz="1350" dirty="0">
+                <a:solidFill>
+                  <a:srgbClr val="1A1A1A"/>
+                </a:solidFill>
+                <a:latin typeface="Times New Roman" pitchFamily="34" charset="0"/>
+                <a:ea typeface="Times New Roman" pitchFamily="34" charset="-122"/>
+                <a:cs typeface="Times New Roman" pitchFamily="34" charset="-120"/>
+              </a:rPr>
+              <a:t>Extender la evaluación de detección a otros detectores y al conjunto completo de LLVIP.</a:t>
+            </a:r>
+            <a:endParaRPr lang="en-US" sz="1350" dirty="0"/>
+          </a:p>
+          <a:p>
+            <a:pPr marL="177800" indent="-177800">
+              <a:spcAft>
+                <a:spcPts val="1100"/>
+              </a:spcAft>
+              <a:buSzPct val="100000"/>
+              <a:buChar char="•"/>
+            </a:pPr>
+            <a:r>
+              <a:rPr lang="en-US" sz="1350" dirty="0">
+                <a:solidFill>
+                  <a:srgbClr val="1A1A1A"/>
+                </a:solidFill>
+                <a:latin typeface="Times New Roman" pitchFamily="34" charset="0"/>
+                <a:ea typeface="Times New Roman" pitchFamily="34" charset="-122"/>
+                <a:cs typeface="Times New Roman" pitchFamily="34" charset="-120"/>
+              </a:rPr>
+              <a:t>Explorar reglas de fusión adaptativas para la rama Black Top-Hat.</a:t>
+            </a:r>
+            <a:endParaRPr lang="en-US" sz="1350" dirty="0"/>
+          </a:p>
+          <a:p>
+            <a:pPr marL="177800" indent="-177800">
+              <a:spcAft>
+                <a:spcPts val="1100"/>
+              </a:spcAft>
+              <a:buSzPct val="100000"/>
+              <a:buChar char="•"/>
+            </a:pPr>
+            <a:r>
+              <a:rPr lang="en-US" sz="1350" dirty="0">
+                <a:solidFill>
+                  <a:srgbClr val="1A1A1A"/>
+                </a:solidFill>
+                <a:latin typeface="Times New Roman" pitchFamily="34" charset="0"/>
+                <a:ea typeface="Times New Roman" pitchFamily="34" charset="-122"/>
+                <a:cs typeface="Times New Roman" pitchFamily="34" charset="-120"/>
+              </a:rPr>
+              <a:t>Complementar las métricas objetivas con una validación perceptual por observadores.</a:t>
+            </a:r>
+            <a:endParaRPr lang="en-US" sz="1350" dirty="0"/>
+          </a:p>
+          <a:p>
+            <a:pPr marL="177800" indent="-177800">
+              <a:spcAft>
+                <a:spcPts val="1100"/>
+              </a:spcAft>
+              <a:buSzPct val="100000"/>
+              <a:buChar char="•"/>
+            </a:pPr>
+            <a:r>
+              <a:rPr lang="en-US" sz="1350" dirty="0">
+                <a:solidFill>
+                  <a:srgbClr val="1A1A1A"/>
+                </a:solidFill>
+                <a:latin typeface="Times New Roman" pitchFamily="34" charset="0"/>
+                <a:ea typeface="Times New Roman" pitchFamily="34" charset="-122"/>
+                <a:cs typeface="Times New Roman" pitchFamily="34" charset="-120"/>
+              </a:rPr>
+              <a:t>Evaluar la transferencia a otros dominios (imágenes médicas, aéreas).</a:t>
+            </a:r>
+            <a:endParaRPr lang="en-US" sz="1350" dirty="0"/>
+          </a:p>
+          <a:p>
+            <a:pPr marL="177800" indent="-177800">
+              <a:spcAft>
+                <a:spcPts val="1100"/>
+              </a:spcAft>
+              <a:buSzPct val="100000"/>
+              <a:buChar char="•"/>
+            </a:pPr>
+            <a:r>
+              <a:rPr lang="en-US" sz="1350" dirty="0">
+                <a:solidFill>
+                  <a:srgbClr val="1A1A1A"/>
+                </a:solidFill>
+                <a:latin typeface="Times New Roman" pitchFamily="34" charset="0"/>
+                <a:ea typeface="Times New Roman" pitchFamily="34" charset="-122"/>
+                <a:cs typeface="Times New Roman" pitchFamily="34" charset="-120"/>
+              </a:rPr>
+              <a:t>Para aplicaciones donde los artefactos son críticos (interpretación humana, diagnóstico), la propuesta es la opción recomendada; donde prima el contraste bruto, LP sigue siendo competitiva.</a:t>
+            </a:r>
+            <a:endParaRPr lang="en-US" sz="1350" dirty="0"/>
+          </a:p>
+        </p:txBody>
+      </p:sp>
+    </p:spTree>
+  </p:cSld>
+  <p:clrMapOvr>
+    <a:masterClrMapping/>
+  </p:clrMapOvr>
+</p:sld>
+</file>
+
+<file path=ppt/slides/slide19.xml><?xml version="1.0" encoding="utf-8"?>
+<p:sld xmlns:a="http://schemas.openxmlformats.org/drawingml/2006/main" xmlns:r="http://schemas.openxmlformats.org/officeDocument/2006/relationships" xmlns:p="http://schemas.openxmlformats.org/presentationml/2006/main">
+  <p:cSld name="Slide 19">
+    <p:bg>
+      <p:bgPr>
+        <a:solidFill>
+          <a:srgbClr val="FFFFFF"/>
+        </a:solidFill>
+      </p:bgPr>
+    </p:bg>
+    <p:spTree>
+      <p:nvGrpSpPr>
+        <p:cNvPr id="1" name=""/>
+        <p:cNvGrpSpPr/>
+        <p:nvPr/>
+      </p:nvGrpSpPr>
+      <p:grpSpPr>
+        <a:xfrm>
+          <a:off x="0" y="0"/>
+          <a:ext cx="0" cy="0"/>
+          <a:chOff x="0" y="0"/>
+          <a:chExt cx="0" cy="0"/>
+        </a:xfrm>
+      </p:grpSpPr>
+      <p:sp>
+        <p:nvSpPr>
+          <p:cNvPr id="2" name="Text 0"/>
+          <p:cNvSpPr/>
+          <p:nvPr/>
+        </p:nvSpPr>
+        <p:spPr>
+          <a:xfrm>
             <a:off x="457200" y="1828800"/>
             <a:ext cx="8229600" cy="731520"/>
           </a:xfrm>
@@ -8329,7 +8637,7 @@
                 <a:ea typeface="Times New Roman" pitchFamily="34" charset="-122"/>
                 <a:cs typeface="Times New Roman" pitchFamily="34" charset="-120"/>
               </a:rPr>
-              <a:t>2 / 18</a:t>
+              <a:t>2 / 19</a:t>
             </a:r>
             <a:endParaRPr lang="en-US" sz="900" dirty="0"/>
           </a:p>
@@ -8519,7 +8827,7 @@
                 <a:ea typeface="Times New Roman" pitchFamily="34" charset="-122"/>
                 <a:cs typeface="Times New Roman" pitchFamily="34" charset="-120"/>
               </a:rPr>
-              <a:t>8.  Evaluación orientada a tarea: detección en LLVIP</a:t>
+              <a:t>8.  Evaluación orientada a tarea: detección en LLVIP y M3FD</a:t>
             </a:r>
             <a:endParaRPr lang="en-US" sz="1500" dirty="0"/>
           </a:p>
@@ -8650,7 +8958,7 @@
                 <a:ea typeface="Times New Roman" pitchFamily="34" charset="-122"/>
                 <a:cs typeface="Times New Roman" pitchFamily="34" charset="-120"/>
               </a:rPr>
-              <a:t>3 / 18</a:t>
+              <a:t>3 / 19</a:t>
             </a:r>
             <a:endParaRPr lang="en-US" sz="900" dirty="0"/>
           </a:p>
@@ -8911,7 +9219,7 @@
                 <a:ea typeface="Times New Roman" pitchFamily="34" charset="-122"/>
                 <a:cs typeface="Times New Roman" pitchFamily="34" charset="-120"/>
               </a:rPr>
-              <a:t>4 / 18</a:t>
+              <a:t>4 / 19</a:t>
             </a:r>
             <a:endParaRPr lang="en-US" sz="900" dirty="0"/>
           </a:p>
@@ -9244,7 +9552,7 @@
                 <a:ea typeface="Times New Roman" pitchFamily="34" charset="-122"/>
                 <a:cs typeface="Times New Roman" pitchFamily="34" charset="-120"/>
               </a:rPr>
-              <a:t>5 / 18</a:t>
+              <a:t>5 / 19</a:t>
             </a:r>
             <a:endParaRPr lang="en-US" sz="900" dirty="0"/>
           </a:p>
@@ -9588,7 +9896,7 @@
                 <a:ea typeface="Times New Roman" pitchFamily="34" charset="-122"/>
                 <a:cs typeface="Times New Roman" pitchFamily="34" charset="-120"/>
               </a:rPr>
-              <a:t>6 / 18</a:t>
+              <a:t>6 / 19</a:t>
             </a:r>
             <a:endParaRPr lang="en-US" sz="900" dirty="0"/>
           </a:p>
@@ -9909,7 +10217,7 @@
                 <a:ea typeface="Times New Roman" pitchFamily="34" charset="-122"/>
                 <a:cs typeface="Times New Roman" pitchFamily="34" charset="-120"/>
               </a:rPr>
-              <a:t>7 / 18</a:t>
+              <a:t>7 / 19</a:t>
             </a:r>
             <a:endParaRPr lang="en-US" sz="900" dirty="0"/>
           </a:p>
@@ -10218,7 +10526,7 @@
                 <a:ea typeface="Times New Roman" pitchFamily="34" charset="-122"/>
                 <a:cs typeface="Times New Roman" pitchFamily="34" charset="-120"/>
               </a:rPr>
-              <a:t>8 / 18</a:t>
+              <a:t>8 / 19</a:t>
             </a:r>
             <a:endParaRPr lang="en-US" sz="900" dirty="0"/>
           </a:p>
@@ -10543,7 +10851,7 @@
                 <a:ea typeface="Times New Roman" pitchFamily="34" charset="-122"/>
                 <a:cs typeface="Times New Roman" pitchFamily="34" charset="-120"/>
               </a:rPr>
-              <a:t>9 / 18</a:t>
+              <a:t>9 / 19</a:t>
             </a:r>
             <a:endParaRPr lang="en-US" sz="900" dirty="0"/>
           </a:p>

--- a/docs/Tesis_Defensa_Presentacion.pptx
+++ b/docs/Tesis_Defensa_Presentacion.pptx
@@ -24,9 +24,10 @@
     <p:sldId id="272" r:id="rId18"/>
     <p:sldId id="273" r:id="rId19"/>
     <p:sldId id="274" r:id="rId20"/>
+    <p:sldId id="275" r:id="rId21"/>
   </p:sldIdLst>
   <p:notesMasterIdLst>
-    <p:notesMasterId r:id="rId21"/>
+    <p:notesMasterId r:id="rId22"/>
   </p:notesMasterIdLst>
   <p:sldSz cx="9144000" cy="5143500"/>
   <p:notesSz cx="5143500" cy="9144000"/>
@@ -1136,7 +1137,7 @@
           <a:p>
             <a:r>
               <a:rPr lang="en-US" dirty="0"/>
-              <a:t>H1 y H2 quedan sostenidas con evidencia estadística. H3 solo parcialmente: es el resultado más honesto del trabajo y anticipa la pregunta natural del tribunal — calidad de imagen y utilidad en tarea son criterios distintos.</a:t>
+              <a:t>Cerrar M3FD con la evidencia visual: dos escenas reales de la validación. En la primera, las personas están bajo el puente a contraluz: invisibles para el detector en VIS, obvias en IR y recuperadas por la fusión. En la segunda, el semáforo y las luces no emiten calor: el IR no los ve, la fusión sí — junto con las personas. Una sola imagen, ambas clases: eso es lo que la fusión compra.</a:t>
             </a:r>
             <a:endParaRPr lang="en-US" dirty="0"/>
           </a:p>
@@ -1224,7 +1225,7 @@
           <a:p>
             <a:r>
               <a:rPr lang="en-US" dirty="0"/>
-              <a:t>Cinco conclusiones: método formulado, óptimo hallado, perfil de calidad validado, ventaja sobre el clásico demostrada, y la lección sobre calidad vs. tarea.</a:t>
+              <a:t>H1 y H2 quedan sostenidas con evidencia estadística. H3 solo parcialmente: es el resultado más honesto del trabajo y anticipa la pregunta natural del tribunal — calidad de imagen y utilidad en tarea son criterios distintos.</a:t>
             </a:r>
             <a:endParaRPr lang="en-US" dirty="0"/>
           </a:p>
@@ -1312,7 +1313,7 @@
           <a:p>
             <a:r>
               <a:rPr lang="en-US" dirty="0"/>
-              <a:t>Cerrar con la recomendación práctica: qué método elegir según el criterio operativo. Dejar claro que el pipeline completo es reproducible desde el repositorio.</a:t>
+              <a:t>Cinco conclusiones: método formulado, óptimo hallado, perfil de calidad validado, ventaja sobre el clásico demostrada, y la lección sobre calidad vs. tarea.</a:t>
             </a:r>
             <a:endParaRPr lang="en-US" dirty="0"/>
           </a:p>
@@ -1400,7 +1401,7 @@
           <a:p>
             <a:r>
               <a:rPr lang="en-US" dirty="0"/>
-              <a:t>Agradecer a la mesa y al orientador. Ofrecer el repositorio para cualquier verificación.</a:t>
+              <a:t>Cerrar con la recomendación práctica: qué método elegir según el criterio operativo. Dejar claro que el pipeline completo es reproducible desde el repositorio.</a:t>
             </a:r>
             <a:endParaRPr lang="en-US" dirty="0"/>
           </a:p>
@@ -1512,6 +1513,94 @@
             <a:fld id="{F7021451-1387-4CA6-816F-3879F97B5CBC}" type="slidenum">
               <a:rPr lang="en-US"/>
               <a:t>2</a:t>
+            </a:fld>
+            <a:endParaRPr lang="en-US"/>
+          </a:p>
+        </p:txBody>
+      </p:sp>
+    </p:spTree>
+    <p:extLst>
+      <p:ext uri="{BB962C8B-B14F-4D97-AF65-F5344CB8AC3E}">
+        <p14:creationId xmlns:p14="http://schemas.microsoft.com/office/powerpoint/2010/main" val="1024086991"/>
+      </p:ext>
+    </p:extLst>
+  </p:cSld>
+  <p:clrMapOvr>
+    <a:masterClrMapping/>
+  </p:clrMapOvr>
+</p:notes>
+</file>
+
+<file path=ppt/notesSlides/notesSlide20.xml><?xml version="1.0" encoding="utf-8"?>
+<p:notes xmlns:a="http://schemas.openxmlformats.org/drawingml/2006/main" xmlns:r="http://schemas.openxmlformats.org/officeDocument/2006/relationships" xmlns:p="http://schemas.openxmlformats.org/presentationml/2006/main">
+  <p:cSld>
+    <p:spTree>
+      <p:nvGrpSpPr>
+        <p:cNvPr id="1" name=""/>
+        <p:cNvGrpSpPr/>
+        <p:nvPr/>
+      </p:nvGrpSpPr>
+      <p:grpSpPr>
+        <a:xfrm>
+          <a:off x="0" y="0"/>
+          <a:ext cx="0" cy="0"/>
+          <a:chOff x="0" y="0"/>
+          <a:chExt cx="0" cy="0"/>
+        </a:xfrm>
+      </p:grpSpPr>
+      <p:sp>
+        <p:nvSpPr>
+          <p:cNvPr id="2" name="Slide Image Placeholder 1"/>
+          <p:cNvSpPr>
+            <a:spLocks noGrp="1" noRot="1" noChangeAspect="1"/>
+          </p:cNvSpPr>
+          <p:nvPr>
+            <p:ph type="sldImg"/>
+          </p:nvPr>
+        </p:nvSpPr>
+        <p:spPr/>
+      </p:sp>
+      <p:sp>
+        <p:nvSpPr>
+          <p:cNvPr id="3" name="Notes Placeholder 2"/>
+          <p:cNvSpPr>
+            <a:spLocks noGrp="1"/>
+          </p:cNvSpPr>
+          <p:nvPr>
+            <p:ph type="body" idx="1"/>
+          </p:nvPr>
+        </p:nvSpPr>
+        <p:spPr/>
+        <p:txBody>
+          <a:bodyPr/>
+          <a:lstStyle/>
+          <a:p>
+            <a:r>
+              <a:rPr lang="en-US" dirty="0"/>
+              <a:t>Agradecer a la mesa y al orientador. Ofrecer el repositorio para cualquier verificación.</a:t>
+            </a:r>
+            <a:endParaRPr lang="en-US" dirty="0"/>
+          </a:p>
+        </p:txBody>
+      </p:sp>
+      <p:sp>
+        <p:nvSpPr>
+          <p:cNvPr id="4" name="Slide Number Placeholder 3"/>
+          <p:cNvSpPr>
+            <a:spLocks noGrp="1"/>
+          </p:cNvSpPr>
+          <p:nvPr>
+            <p:ph type="sldNum" sz="quarter" idx="10"/>
+          </p:nvPr>
+        </p:nvSpPr>
+        <p:spPr/>
+        <p:txBody>
+          <a:bodyPr/>
+          <a:lstStyle/>
+          <a:p>
+            <a:fld id="{F7021451-1387-4CA6-816F-3879F97B5CBC}" type="slidenum">
+              <a:rPr lang="en-US"/>
+              <a:t>20</a:t>
             </a:fld>
             <a:endParaRPr lang="en-US"/>
           </a:p>
@@ -2883,7 +2972,7 @@
                 <a:ea typeface="Times New Roman" pitchFamily="34" charset="-122"/>
                 <a:cs typeface="Times New Roman" pitchFamily="34" charset="-120"/>
               </a:rPr>
-              <a:t>10 / 19</a:t>
+              <a:t>10 / 20</a:t>
             </a:r>
             <a:endParaRPr lang="en-US" sz="900" dirty="0"/>
           </a:p>
@@ -3262,7 +3351,7 @@
                 <a:ea typeface="Times New Roman" pitchFamily="34" charset="-122"/>
                 <a:cs typeface="Times New Roman" pitchFamily="34" charset="-120"/>
               </a:rPr>
-              <a:t>11 / 19</a:t>
+              <a:t>11 / 20</a:t>
             </a:r>
             <a:endParaRPr lang="en-US" sz="900" dirty="0"/>
           </a:p>
@@ -3435,7 +3524,7 @@
                 <a:ea typeface="Times New Roman" pitchFamily="34" charset="-122"/>
                 <a:cs typeface="Times New Roman" pitchFamily="34" charset="-120"/>
               </a:rPr>
-              <a:t>12 / 19</a:t>
+              <a:t>12 / 20</a:t>
             </a:r>
             <a:endParaRPr lang="en-US" sz="900" dirty="0"/>
           </a:p>
@@ -6797,7 +6886,7 @@
                 <a:ea typeface="Times New Roman" pitchFamily="34" charset="-122"/>
                 <a:cs typeface="Times New Roman" pitchFamily="34" charset="-120"/>
               </a:rPr>
-              <a:t>13 / 19</a:t>
+              <a:t>13 / 20</a:t>
             </a:r>
             <a:endParaRPr lang="en-US" sz="900" dirty="0"/>
           </a:p>
@@ -7076,7 +7165,7 @@
                 <a:ea typeface="Times New Roman" pitchFamily="34" charset="-122"/>
                 <a:cs typeface="Times New Roman" pitchFamily="34" charset="-120"/>
               </a:rPr>
-              <a:t>14 / 19</a:t>
+              <a:t>14 / 20</a:t>
             </a:r>
             <a:endParaRPr lang="en-US" sz="900" dirty="0"/>
           </a:p>
@@ -7295,7 +7384,7 @@
                 <a:ea typeface="Times New Roman" pitchFamily="34" charset="-122"/>
                 <a:cs typeface="Times New Roman" pitchFamily="34" charset="-120"/>
               </a:rPr>
-              <a:t>15 / 19</a:t>
+              <a:t>15 / 20</a:t>
             </a:r>
             <a:endParaRPr lang="en-US" sz="900" dirty="0"/>
           </a:p>
@@ -7475,7 +7564,7 @@
                 <a:ea typeface="Times New Roman" pitchFamily="34" charset="-122"/>
                 <a:cs typeface="Times New Roman" pitchFamily="34" charset="-120"/>
               </a:rPr>
-              <a:t>Contraste de hipótesis</a:t>
+              <a:t>La prueba visual: ambas clases en una sola imagen</a:t>
             </a:r>
             <a:endParaRPr lang="en-US" sz="2300" dirty="0"/>
           </a:p>
@@ -7514,22 +7603,46 @@
                 <a:ea typeface="Times New Roman" pitchFamily="34" charset="-122"/>
                 <a:cs typeface="Times New Roman" pitchFamily="34" charset="-120"/>
               </a:rPr>
-              <a:t>16 / 19</a:t>
+              <a:t>16 / 20</a:t>
             </a:r>
             <a:endParaRPr lang="en-US" sz="900" dirty="0"/>
           </a:p>
         </p:txBody>
       </p:sp>
-      <p:sp>
-        <p:nvSpPr>
-          <p:cNvPr id="4" name="Text 2"/>
+      <p:pic>
+        <p:nvPicPr>
+          <p:cNvPr id="4" name="Image 0" descr="C:/Users/Usuario/Documents/unv/mastertesis/tesis_mciencias_datos/docs/figures/fig_m3fd_detecciones.png">    </p:cNvPr>
+          <p:cNvPicPr>
+            <a:picLocks noChangeAspect="1"/>
+          </p:cNvPicPr>
+          <p:nvPr/>
+        </p:nvPicPr>
+        <p:blipFill>
+          <a:blip r:embed="rId1"/>
+          <a:stretch>
+            <a:fillRect/>
+          </a:stretch>
+        </p:blipFill>
+        <p:spPr>
+          <a:xfrm>
+            <a:off x="1417320" y="822960"/>
+            <a:ext cx="6309360" cy="4069080"/>
+          </a:xfrm>
+          <a:prstGeom prst="rect">
+            <a:avLst/>
+          </a:prstGeom>
+        </p:spPr>
+      </p:pic>
+      <p:sp>
+        <p:nvSpPr>
+          <p:cNvPr id="5" name="Text 2"/>
           <p:cNvSpPr/>
           <p:nvPr/>
         </p:nvSpPr>
         <p:spPr>
           <a:xfrm>
-            <a:off x="457200" y="960120"/>
-            <a:ext cx="640080" cy="411480"/>
+            <a:off x="457200" y="4864608"/>
+            <a:ext cx="7680960" cy="256032"/>
           </a:xfrm>
           <a:prstGeom prst="rect">
             <a:avLst/>
@@ -7545,329 +7658,17 @@
               <a:buNone/>
             </a:pPr>
             <a:r>
-              <a:rPr lang="en-US" sz="1900" b="1" dirty="0">
-                <a:solidFill>
-                  <a:srgbClr val="1A1A1A"/>
-                </a:solidFill>
-                <a:latin typeface="Times New Roman" pitchFamily="34" charset="0"/>
-                <a:ea typeface="Times New Roman" pitchFamily="34" charset="-122"/>
-                <a:cs typeface="Times New Roman" pitchFamily="34" charset="-120"/>
-              </a:rPr>
-              <a:t>H1</a:t>
-            </a:r>
-            <a:endParaRPr lang="en-US" sz="1900" dirty="0"/>
-          </a:p>
-        </p:txBody>
-      </p:sp>
-      <p:sp>
-        <p:nvSpPr>
-          <p:cNvPr id="5" name="Text 3"/>
-          <p:cNvSpPr/>
-          <p:nvPr/>
-        </p:nvSpPr>
-        <p:spPr>
-          <a:xfrm>
-            <a:off x="1143000" y="996696"/>
-            <a:ext cx="1417320" cy="365760"/>
-          </a:xfrm>
-          <a:prstGeom prst="rect">
-            <a:avLst/>
-          </a:prstGeom>
-          <a:noFill/>
-          <a:ln/>
-        </p:spPr>
-        <p:txBody>
-          <a:bodyPr wrap="square" lIns="0" tIns="0" rIns="0" bIns="0" rtlCol="0" anchor="ctr"/>
-          <a:lstStyle/>
-          <a:p>
-            <a:pPr indent="0" marL="0">
-              <a:buNone/>
-            </a:pPr>
-            <a:r>
-              <a:rPr lang="en-US" sz="1300" b="1" dirty="0">
-                <a:solidFill>
-                  <a:srgbClr val="1F5C2E"/>
-                </a:solidFill>
-                <a:latin typeface="Times New Roman" pitchFamily="34" charset="0"/>
-                <a:ea typeface="Times New Roman" pitchFamily="34" charset="-122"/>
-                <a:cs typeface="Times New Roman" pitchFamily="34" charset="-120"/>
-              </a:rPr>
-              <a:t>SOSTENIDA</a:t>
-            </a:r>
-            <a:endParaRPr lang="en-US" sz="1300" dirty="0"/>
-          </a:p>
-        </p:txBody>
-      </p:sp>
-      <p:sp>
-        <p:nvSpPr>
-          <p:cNvPr id="6" name="Text 4"/>
-          <p:cNvSpPr/>
-          <p:nvPr/>
-        </p:nvSpPr>
-        <p:spPr>
-          <a:xfrm>
-            <a:off x="2697480" y="960120"/>
-            <a:ext cx="5989320" cy="1143000"/>
-          </a:xfrm>
-          <a:prstGeom prst="rect">
-            <a:avLst/>
-          </a:prstGeom>
-          <a:noFill/>
-          <a:ln/>
-        </p:spPr>
-        <p:txBody>
-          <a:bodyPr wrap="square" lIns="0" tIns="0" rIns="0" bIns="0" rtlCol="0" anchor="t"/>
-          <a:lstStyle/>
-          <a:p>
-            <a:pPr indent="0" marL="0">
-              <a:buNone/>
-            </a:pPr>
-            <a:r>
-              <a:rPr lang="en-US" sz="1250" dirty="0">
-                <a:solidFill>
-                  <a:srgbClr val="1A1A1A"/>
-                </a:solidFill>
-                <a:latin typeface="Times New Roman" pitchFamily="34" charset="0"/>
-                <a:ea typeface="Times New Roman" pitchFamily="34" charset="-122"/>
-                <a:cs typeface="Times New Roman" pitchFamily="34" charset="-120"/>
-              </a:rPr>
-              <a:t>El banco disco + líneas con suma de ramas mejora SSIM (0,782 vs 0,578) y reduce Nabf (0,041 vs 0,585) frente al Top-Hat clásico, con significancia estadística (Wilcoxon–Holm).</a:t>
-            </a:r>
-            <a:endParaRPr lang="en-US" sz="1250" dirty="0"/>
-          </a:p>
-        </p:txBody>
-      </p:sp>
-      <p:sp>
-        <p:nvSpPr>
-          <p:cNvPr id="7" name="Text 5"/>
-          <p:cNvSpPr/>
-          <p:nvPr/>
-        </p:nvSpPr>
-        <p:spPr>
-          <a:xfrm>
-            <a:off x="457200" y="2258568"/>
-            <a:ext cx="640080" cy="411480"/>
-          </a:xfrm>
-          <a:prstGeom prst="rect">
-            <a:avLst/>
-          </a:prstGeom>
-          <a:noFill/>
-          <a:ln/>
-        </p:spPr>
-        <p:txBody>
-          <a:bodyPr wrap="square" lIns="0" tIns="0" rIns="0" bIns="0" rtlCol="0" anchor="ctr"/>
-          <a:lstStyle/>
-          <a:p>
-            <a:pPr indent="0" marL="0">
-              <a:buNone/>
-            </a:pPr>
-            <a:r>
-              <a:rPr lang="en-US" sz="1900" b="1" dirty="0">
-                <a:solidFill>
-                  <a:srgbClr val="1A1A1A"/>
-                </a:solidFill>
-                <a:latin typeface="Times New Roman" pitchFamily="34" charset="0"/>
-                <a:ea typeface="Times New Roman" pitchFamily="34" charset="-122"/>
-                <a:cs typeface="Times New Roman" pitchFamily="34" charset="-120"/>
-              </a:rPr>
-              <a:t>H2</a:t>
-            </a:r>
-            <a:endParaRPr lang="en-US" sz="1900" dirty="0"/>
-          </a:p>
-        </p:txBody>
-      </p:sp>
-      <p:sp>
-        <p:nvSpPr>
-          <p:cNvPr id="8" name="Text 6"/>
-          <p:cNvSpPr/>
-          <p:nvPr/>
-        </p:nvSpPr>
-        <p:spPr>
-          <a:xfrm>
-            <a:off x="1143000" y="2295144"/>
-            <a:ext cx="1417320" cy="365760"/>
-          </a:xfrm>
-          <a:prstGeom prst="rect">
-            <a:avLst/>
-          </a:prstGeom>
-          <a:noFill/>
-          <a:ln/>
-        </p:spPr>
-        <p:txBody>
-          <a:bodyPr wrap="square" lIns="0" tIns="0" rIns="0" bIns="0" rtlCol="0" anchor="ctr"/>
-          <a:lstStyle/>
-          <a:p>
-            <a:pPr indent="0" marL="0">
-              <a:buNone/>
-            </a:pPr>
-            <a:r>
-              <a:rPr lang="en-US" sz="1300" b="1" dirty="0">
-                <a:solidFill>
-                  <a:srgbClr val="1F5C2E"/>
-                </a:solidFill>
-                <a:latin typeface="Times New Roman" pitchFamily="34" charset="0"/>
-                <a:ea typeface="Times New Roman" pitchFamily="34" charset="-122"/>
-                <a:cs typeface="Times New Roman" pitchFamily="34" charset="-120"/>
-              </a:rPr>
-              <a:t>SOSTENIDA</a:t>
-            </a:r>
-            <a:endParaRPr lang="en-US" sz="1300" dirty="0"/>
-          </a:p>
-        </p:txBody>
-      </p:sp>
-      <p:sp>
-        <p:nvSpPr>
-          <p:cNvPr id="9" name="Text 7"/>
-          <p:cNvSpPr/>
-          <p:nvPr/>
-        </p:nvSpPr>
-        <p:spPr>
-          <a:xfrm>
-            <a:off x="2697480" y="2258568"/>
-            <a:ext cx="5989320" cy="1143000"/>
-          </a:xfrm>
-          <a:prstGeom prst="rect">
-            <a:avLst/>
-          </a:prstGeom>
-          <a:noFill/>
-          <a:ln/>
-        </p:spPr>
-        <p:txBody>
-          <a:bodyPr wrap="square" lIns="0" tIns="0" rIns="0" bIns="0" rtlCol="0" anchor="t"/>
-          <a:lstStyle/>
-          <a:p>
-            <a:pPr indent="0" marL="0">
-              <a:buNone/>
-            </a:pPr>
-            <a:r>
-              <a:rPr lang="en-US" sz="1250" dirty="0">
-                <a:solidFill>
-                  <a:srgbClr val="1A1A1A"/>
-                </a:solidFill>
-                <a:latin typeface="Times New Roman" pitchFamily="34" charset="0"/>
-                <a:ea typeface="Times New Roman" pitchFamily="34" charset="-122"/>
-                <a:cs typeface="Times New Roman" pitchFamily="34" charset="-120"/>
-              </a:rPr>
-              <a:t>La configuración hallada por PSO (r = 25; m = 0,0703) supera a la parametrización manual del operador clásico (r = 5; m = 1) en todas las métricas de calidad de fusión.</a:t>
-            </a:r>
-            <a:endParaRPr lang="en-US" sz="1250" dirty="0"/>
-          </a:p>
-        </p:txBody>
-      </p:sp>
-      <p:sp>
-        <p:nvSpPr>
-          <p:cNvPr id="10" name="Text 8"/>
-          <p:cNvSpPr/>
-          <p:nvPr/>
-        </p:nvSpPr>
-        <p:spPr>
-          <a:xfrm>
-            <a:off x="457200" y="3557016"/>
-            <a:ext cx="640080" cy="411480"/>
-          </a:xfrm>
-          <a:prstGeom prst="rect">
-            <a:avLst/>
-          </a:prstGeom>
-          <a:noFill/>
-          <a:ln/>
-        </p:spPr>
-        <p:txBody>
-          <a:bodyPr wrap="square" lIns="0" tIns="0" rIns="0" bIns="0" rtlCol="0" anchor="ctr"/>
-          <a:lstStyle/>
-          <a:p>
-            <a:pPr indent="0" marL="0">
-              <a:buNone/>
-            </a:pPr>
-            <a:r>
-              <a:rPr lang="en-US" sz="1900" b="1" dirty="0">
-                <a:solidFill>
-                  <a:srgbClr val="1A1A1A"/>
-                </a:solidFill>
-                <a:latin typeface="Times New Roman" pitchFamily="34" charset="0"/>
-                <a:ea typeface="Times New Roman" pitchFamily="34" charset="-122"/>
-                <a:cs typeface="Times New Roman" pitchFamily="34" charset="-120"/>
-              </a:rPr>
-              <a:t>H3</a:t>
-            </a:r>
-            <a:endParaRPr lang="en-US" sz="1900" dirty="0"/>
-          </a:p>
-        </p:txBody>
-      </p:sp>
-      <p:sp>
-        <p:nvSpPr>
-          <p:cNvPr id="11" name="Text 9"/>
-          <p:cNvSpPr/>
-          <p:nvPr/>
-        </p:nvSpPr>
-        <p:spPr>
-          <a:xfrm>
-            <a:off x="1143000" y="3593592"/>
-            <a:ext cx="1417320" cy="365760"/>
-          </a:xfrm>
-          <a:prstGeom prst="rect">
-            <a:avLst/>
-          </a:prstGeom>
-          <a:noFill/>
-          <a:ln/>
-        </p:spPr>
-        <p:txBody>
-          <a:bodyPr wrap="square" lIns="0" tIns="0" rIns="0" bIns="0" rtlCol="0" anchor="ctr"/>
-          <a:lstStyle/>
-          <a:p>
-            <a:pPr indent="0" marL="0">
-              <a:buNone/>
-            </a:pPr>
-            <a:r>
-              <a:rPr lang="en-US" sz="1300" b="1" dirty="0">
-                <a:solidFill>
-                  <a:srgbClr val="8B1A1A"/>
-                </a:solidFill>
-                <a:latin typeface="Times New Roman" pitchFamily="34" charset="0"/>
-                <a:ea typeface="Times New Roman" pitchFamily="34" charset="-122"/>
-                <a:cs typeface="Times New Roman" pitchFamily="34" charset="-120"/>
-              </a:rPr>
-              <a:t>PARCIAL</a:t>
-            </a:r>
-            <a:endParaRPr lang="en-US" sz="1300" dirty="0"/>
-          </a:p>
-        </p:txBody>
-      </p:sp>
-      <p:sp>
-        <p:nvSpPr>
-          <p:cNvPr id="12" name="Text 10"/>
-          <p:cNvSpPr/>
-          <p:nvPr/>
-        </p:nvSpPr>
-        <p:spPr>
-          <a:xfrm>
-            <a:off x="2697480" y="3557016"/>
-            <a:ext cx="5989320" cy="1143000"/>
-          </a:xfrm>
-          <a:prstGeom prst="rect">
-            <a:avLst/>
-          </a:prstGeom>
-          <a:noFill/>
-          <a:ln/>
-        </p:spPr>
-        <p:txBody>
-          <a:bodyPr wrap="square" lIns="0" tIns="0" rIns="0" bIns="0" rtlCol="0" anchor="t"/>
-          <a:lstStyle/>
-          <a:p>
-            <a:pPr indent="0" marL="0">
-              <a:buNone/>
-            </a:pPr>
-            <a:r>
-              <a:rPr lang="en-US" sz="1250" dirty="0">
-                <a:solidFill>
-                  <a:srgbClr val="1A1A1A"/>
-                </a:solidFill>
-                <a:latin typeface="Times New Roman" pitchFamily="34" charset="0"/>
-                <a:ea typeface="Times New Roman" pitchFamily="34" charset="-122"/>
-                <a:cs typeface="Times New Roman" pitchFamily="34" charset="-120"/>
-              </a:rPr>
-              <a:t>La fusión supera al visible solo en detección, pero ninguna fusión supera al infrarrojo solo; la mejor calidad de imagen no garantiza el mejor mAP.</a:t>
-            </a:r>
-            <a:endParaRPr lang="en-US" sz="1250" dirty="0"/>
+              <a:rPr lang="en-US" sz="1050" i="1" dirty="0">
+                <a:solidFill>
+                  <a:srgbClr val="666666"/>
+                </a:solidFill>
+                <a:latin typeface="Times New Roman" pitchFamily="34" charset="0"/>
+                <a:ea typeface="Times New Roman" pitchFamily="34" charset="-122"/>
+                <a:cs typeface="Times New Roman" pitchFamily="34" charset="-120"/>
+              </a:rPr>
+              <a:t>Arriba: el VIS no detecta a nadie (0 personas) — la fusión las recupera. Abajo: el IR no ve ninguna luz — la fusión las conserva.</a:t>
+            </a:r>
+            <a:endParaRPr lang="en-US" sz="1050" dirty="0"/>
           </a:p>
         </p:txBody>
       </p:sp>
@@ -7936,7 +7737,7 @@
                 <a:ea typeface="Times New Roman" pitchFamily="34" charset="-122"/>
                 <a:cs typeface="Times New Roman" pitchFamily="34" charset="-120"/>
               </a:rPr>
-              <a:t>9. Conclusiones</a:t>
+              <a:t>Contraste de hipótesis</a:t>
             </a:r>
             <a:endParaRPr lang="en-US" sz="2300" dirty="0"/>
           </a:p>
@@ -7975,7 +7776,7 @@
                 <a:ea typeface="Times New Roman" pitchFamily="34" charset="-122"/>
                 <a:cs typeface="Times New Roman" pitchFamily="34" charset="-120"/>
               </a:rPr>
-              <a:t>17 / 19</a:t>
+              <a:t>17 / 20</a:t>
             </a:r>
             <a:endParaRPr lang="en-US" sz="900" dirty="0"/>
           </a:p>
@@ -7989,8 +7790,8 @@
         </p:nvSpPr>
         <p:spPr>
           <a:xfrm>
-            <a:off x="457200" y="914400"/>
-            <a:ext cx="8229600" cy="3931920"/>
+            <a:off x="457200" y="960120"/>
+            <a:ext cx="640080" cy="411480"/>
           </a:xfrm>
           <a:prstGeom prst="rect">
             <a:avLst/>
@@ -7999,18 +7800,92 @@
           <a:ln/>
         </p:spPr>
         <p:txBody>
+          <a:bodyPr wrap="square" lIns="0" tIns="0" rIns="0" bIns="0" rtlCol="0" anchor="ctr"/>
+          <a:lstStyle/>
+          <a:p>
+            <a:pPr indent="0" marL="0">
+              <a:buNone/>
+            </a:pPr>
+            <a:r>
+              <a:rPr lang="en-US" sz="1900" b="1" dirty="0">
+                <a:solidFill>
+                  <a:srgbClr val="1A1A1A"/>
+                </a:solidFill>
+                <a:latin typeface="Times New Roman" pitchFamily="34" charset="0"/>
+                <a:ea typeface="Times New Roman" pitchFamily="34" charset="-122"/>
+                <a:cs typeface="Times New Roman" pitchFamily="34" charset="-120"/>
+              </a:rPr>
+              <a:t>H1</a:t>
+            </a:r>
+            <a:endParaRPr lang="en-US" sz="1900" dirty="0"/>
+          </a:p>
+        </p:txBody>
+      </p:sp>
+      <p:sp>
+        <p:nvSpPr>
+          <p:cNvPr id="5" name="Text 3"/>
+          <p:cNvSpPr/>
+          <p:nvPr/>
+        </p:nvSpPr>
+        <p:spPr>
+          <a:xfrm>
+            <a:off x="1143000" y="996696"/>
+            <a:ext cx="1417320" cy="365760"/>
+          </a:xfrm>
+          <a:prstGeom prst="rect">
+            <a:avLst/>
+          </a:prstGeom>
+          <a:noFill/>
+          <a:ln/>
+        </p:spPr>
+        <p:txBody>
+          <a:bodyPr wrap="square" lIns="0" tIns="0" rIns="0" bIns="0" rtlCol="0" anchor="ctr"/>
+          <a:lstStyle/>
+          <a:p>
+            <a:pPr indent="0" marL="0">
+              <a:buNone/>
+            </a:pPr>
+            <a:r>
+              <a:rPr lang="en-US" sz="1300" b="1" dirty="0">
+                <a:solidFill>
+                  <a:srgbClr val="1F5C2E"/>
+                </a:solidFill>
+                <a:latin typeface="Times New Roman" pitchFamily="34" charset="0"/>
+                <a:ea typeface="Times New Roman" pitchFamily="34" charset="-122"/>
+                <a:cs typeface="Times New Roman" pitchFamily="34" charset="-120"/>
+              </a:rPr>
+              <a:t>SOSTENIDA</a:t>
+            </a:r>
+            <a:endParaRPr lang="en-US" sz="1300" dirty="0"/>
+          </a:p>
+        </p:txBody>
+      </p:sp>
+      <p:sp>
+        <p:nvSpPr>
+          <p:cNvPr id="6" name="Text 4"/>
+          <p:cNvSpPr/>
+          <p:nvPr/>
+        </p:nvSpPr>
+        <p:spPr>
+          <a:xfrm>
+            <a:off x="2697480" y="960120"/>
+            <a:ext cx="5989320" cy="1143000"/>
+          </a:xfrm>
+          <a:prstGeom prst="rect">
+            <a:avLst/>
+          </a:prstGeom>
+          <a:noFill/>
+          <a:ln/>
+        </p:spPr>
+        <p:txBody>
           <a:bodyPr wrap="square" lIns="0" tIns="0" rIns="0" bIns="0" rtlCol="0" anchor="t"/>
           <a:lstStyle/>
           <a:p>
-            <a:pPr marL="177800" indent="-177800">
-              <a:spcAft>
-                <a:spcPts val="1100"/>
-              </a:spcAft>
-              <a:buSzPct val="100000"/>
-              <a:buChar char="•"/>
-            </a:pPr>
-            <a:r>
-              <a:rPr lang="en-US" sz="1350" dirty="0">
+            <a:pPr indent="0" marL="0">
+              <a:buNone/>
+            </a:pPr>
+            <a:r>
+              <a:rPr lang="en-US" sz="1250" dirty="0">
                 <a:solidFill>
                   <a:srgbClr val="1A1A1A"/>
                 </a:solidFill>
@@ -8018,20 +7893,38 @@
                 <a:ea typeface="Times New Roman" pitchFamily="34" charset="-122"/>
                 <a:cs typeface="Times New Roman" pitchFamily="34" charset="-120"/>
               </a:rPr>
-              <a:t>Se formuló e implementó de forma reproducible un operador Top-Hat de una sola escala con banco de disco + líneas orientadas y suma de ramas.</a:t>
-            </a:r>
-            <a:endParaRPr lang="en-US" sz="1350" dirty="0"/>
-          </a:p>
-          <a:p>
-            <a:pPr marL="177800" indent="-177800">
-              <a:spcAft>
-                <a:spcPts val="1100"/>
-              </a:spcAft>
-              <a:buSzPct val="100000"/>
-              <a:buChar char="•"/>
-            </a:pPr>
-            <a:r>
-              <a:rPr lang="en-US" sz="1350" dirty="0">
+              <a:t>El banco disco + líneas con suma de ramas mejora SSIM (0,782 vs 0,578) y reduce Nabf (0,041 vs 0,585) frente al Top-Hat clásico, con significancia estadística (Wilcoxon–Holm).</a:t>
+            </a:r>
+            <a:endParaRPr lang="en-US" sz="1250" dirty="0"/>
+          </a:p>
+        </p:txBody>
+      </p:sp>
+      <p:sp>
+        <p:nvSpPr>
+          <p:cNvPr id="7" name="Text 5"/>
+          <p:cNvSpPr/>
+          <p:nvPr/>
+        </p:nvSpPr>
+        <p:spPr>
+          <a:xfrm>
+            <a:off x="457200" y="2258568"/>
+            <a:ext cx="640080" cy="411480"/>
+          </a:xfrm>
+          <a:prstGeom prst="rect">
+            <a:avLst/>
+          </a:prstGeom>
+          <a:noFill/>
+          <a:ln/>
+        </p:spPr>
+        <p:txBody>
+          <a:bodyPr wrap="square" lIns="0" tIns="0" rIns="0" bIns="0" rtlCol="0" anchor="ctr"/>
+          <a:lstStyle/>
+          <a:p>
+            <a:pPr indent="0" marL="0">
+              <a:buNone/>
+            </a:pPr>
+            <a:r>
+              <a:rPr lang="en-US" sz="1900" b="1" dirty="0">
                 <a:solidFill>
                   <a:srgbClr val="1A1A1A"/>
                 </a:solidFill>
@@ -8039,20 +7932,77 @@
                 <a:ea typeface="Times New Roman" pitchFamily="34" charset="-122"/>
                 <a:cs typeface="Times New Roman" pitchFamily="34" charset="-120"/>
               </a:rPr>
-              <a:t>El barrido PSO de 25 configuraciones halló el óptimo r = 25, m = 0,0703 (F = 1,9843) de manera consistente.</a:t>
-            </a:r>
-            <a:endParaRPr lang="en-US" sz="1350" dirty="0"/>
-          </a:p>
-          <a:p>
-            <a:pPr marL="177800" indent="-177800">
-              <a:spcAft>
-                <a:spcPts val="1100"/>
-              </a:spcAft>
-              <a:buSzPct val="100000"/>
-              <a:buChar char="•"/>
-            </a:pPr>
-            <a:r>
-              <a:rPr lang="en-US" sz="1350" dirty="0">
+              <a:t>H2</a:t>
+            </a:r>
+            <a:endParaRPr lang="en-US" sz="1900" dirty="0"/>
+          </a:p>
+        </p:txBody>
+      </p:sp>
+      <p:sp>
+        <p:nvSpPr>
+          <p:cNvPr id="8" name="Text 6"/>
+          <p:cNvSpPr/>
+          <p:nvPr/>
+        </p:nvSpPr>
+        <p:spPr>
+          <a:xfrm>
+            <a:off x="1143000" y="2295144"/>
+            <a:ext cx="1417320" cy="365760"/>
+          </a:xfrm>
+          <a:prstGeom prst="rect">
+            <a:avLst/>
+          </a:prstGeom>
+          <a:noFill/>
+          <a:ln/>
+        </p:spPr>
+        <p:txBody>
+          <a:bodyPr wrap="square" lIns="0" tIns="0" rIns="0" bIns="0" rtlCol="0" anchor="ctr"/>
+          <a:lstStyle/>
+          <a:p>
+            <a:pPr indent="0" marL="0">
+              <a:buNone/>
+            </a:pPr>
+            <a:r>
+              <a:rPr lang="en-US" sz="1300" b="1" dirty="0">
+                <a:solidFill>
+                  <a:srgbClr val="1F5C2E"/>
+                </a:solidFill>
+                <a:latin typeface="Times New Roman" pitchFamily="34" charset="0"/>
+                <a:ea typeface="Times New Roman" pitchFamily="34" charset="-122"/>
+                <a:cs typeface="Times New Roman" pitchFamily="34" charset="-120"/>
+              </a:rPr>
+              <a:t>SOSTENIDA</a:t>
+            </a:r>
+            <a:endParaRPr lang="en-US" sz="1300" dirty="0"/>
+          </a:p>
+        </p:txBody>
+      </p:sp>
+      <p:sp>
+        <p:nvSpPr>
+          <p:cNvPr id="9" name="Text 7"/>
+          <p:cNvSpPr/>
+          <p:nvPr/>
+        </p:nvSpPr>
+        <p:spPr>
+          <a:xfrm>
+            <a:off x="2697480" y="2258568"/>
+            <a:ext cx="5989320" cy="1143000"/>
+          </a:xfrm>
+          <a:prstGeom prst="rect">
+            <a:avLst/>
+          </a:prstGeom>
+          <a:noFill/>
+          <a:ln/>
+        </p:spPr>
+        <p:txBody>
+          <a:bodyPr wrap="square" lIns="0" tIns="0" rIns="0" bIns="0" rtlCol="0" anchor="t"/>
+          <a:lstStyle/>
+          <a:p>
+            <a:pPr indent="0" marL="0">
+              <a:buNone/>
+            </a:pPr>
+            <a:r>
+              <a:rPr lang="en-US" sz="1250" dirty="0">
                 <a:solidFill>
                   <a:srgbClr val="1A1A1A"/>
                 </a:solidFill>
@@ -8060,20 +8010,38 @@
                 <a:ea typeface="Times New Roman" pitchFamily="34" charset="-122"/>
                 <a:cs typeface="Times New Roman" pitchFamily="34" charset="-120"/>
               </a:rPr>
-              <a:t>La propuesta exhibe el mejor perfil de calidad del benchmark: menor Nabf y mayor SSIM, con significancia estadística; segunda en Qabf, SCD y VIF.</a:t>
-            </a:r>
-            <a:endParaRPr lang="en-US" sz="1350" dirty="0"/>
-          </a:p>
-          <a:p>
-            <a:pPr marL="177800" indent="-177800">
-              <a:spcAft>
-                <a:spcPts val="1100"/>
-              </a:spcAft>
-              <a:buSzPct val="100000"/>
-              <a:buChar char="•"/>
-            </a:pPr>
-            <a:r>
-              <a:rPr lang="en-US" sz="1350" dirty="0">
+              <a:t>La configuración hallada por PSO (r = 25; m = 0,0703) supera a la parametrización manual del operador clásico (r = 5; m = 1) en todas las métricas de calidad de fusión.</a:t>
+            </a:r>
+            <a:endParaRPr lang="en-US" sz="1250" dirty="0"/>
+          </a:p>
+        </p:txBody>
+      </p:sp>
+      <p:sp>
+        <p:nvSpPr>
+          <p:cNvPr id="10" name="Text 8"/>
+          <p:cNvSpPr/>
+          <p:nvPr/>
+        </p:nvSpPr>
+        <p:spPr>
+          <a:xfrm>
+            <a:off x="457200" y="3557016"/>
+            <a:ext cx="640080" cy="411480"/>
+          </a:xfrm>
+          <a:prstGeom prst="rect">
+            <a:avLst/>
+          </a:prstGeom>
+          <a:noFill/>
+          <a:ln/>
+        </p:spPr>
+        <p:txBody>
+          <a:bodyPr wrap="square" lIns="0" tIns="0" rIns="0" bIns="0" rtlCol="0" anchor="ctr"/>
+          <a:lstStyle/>
+          <a:p>
+            <a:pPr indent="0" marL="0">
+              <a:buNone/>
+            </a:pPr>
+            <a:r>
+              <a:rPr lang="en-US" sz="1900" b="1" dirty="0">
                 <a:solidFill>
                   <a:srgbClr val="1A1A1A"/>
                 </a:solidFill>
@@ -8081,20 +8049,77 @@
                 <a:ea typeface="Times New Roman" pitchFamily="34" charset="-122"/>
                 <a:cs typeface="Times New Roman" pitchFamily="34" charset="-120"/>
               </a:rPr>
-              <a:t>Frente a la metodología clásica Top-Hat, mejora todas las métricas de calidad de fusión: el banco de SE y el ajuste automático aportan valor real.</a:t>
-            </a:r>
-            <a:endParaRPr lang="en-US" sz="1350" dirty="0"/>
-          </a:p>
-          <a:p>
-            <a:pPr marL="177800" indent="-177800">
-              <a:spcAft>
-                <a:spcPts val="1100"/>
-              </a:spcAft>
-              <a:buSzPct val="100000"/>
-              <a:buChar char="•"/>
-            </a:pPr>
-            <a:r>
-              <a:rPr lang="en-US" sz="1350" dirty="0">
+              <a:t>H3</a:t>
+            </a:r>
+            <a:endParaRPr lang="en-US" sz="1900" dirty="0"/>
+          </a:p>
+        </p:txBody>
+      </p:sp>
+      <p:sp>
+        <p:nvSpPr>
+          <p:cNvPr id="11" name="Text 9"/>
+          <p:cNvSpPr/>
+          <p:nvPr/>
+        </p:nvSpPr>
+        <p:spPr>
+          <a:xfrm>
+            <a:off x="1143000" y="3593592"/>
+            <a:ext cx="1417320" cy="365760"/>
+          </a:xfrm>
+          <a:prstGeom prst="rect">
+            <a:avLst/>
+          </a:prstGeom>
+          <a:noFill/>
+          <a:ln/>
+        </p:spPr>
+        <p:txBody>
+          <a:bodyPr wrap="square" lIns="0" tIns="0" rIns="0" bIns="0" rtlCol="0" anchor="ctr"/>
+          <a:lstStyle/>
+          <a:p>
+            <a:pPr indent="0" marL="0">
+              <a:buNone/>
+            </a:pPr>
+            <a:r>
+              <a:rPr lang="en-US" sz="1300" b="1" dirty="0">
+                <a:solidFill>
+                  <a:srgbClr val="8B1A1A"/>
+                </a:solidFill>
+                <a:latin typeface="Times New Roman" pitchFamily="34" charset="0"/>
+                <a:ea typeface="Times New Roman" pitchFamily="34" charset="-122"/>
+                <a:cs typeface="Times New Roman" pitchFamily="34" charset="-120"/>
+              </a:rPr>
+              <a:t>PARCIAL</a:t>
+            </a:r>
+            <a:endParaRPr lang="en-US" sz="1300" dirty="0"/>
+          </a:p>
+        </p:txBody>
+      </p:sp>
+      <p:sp>
+        <p:nvSpPr>
+          <p:cNvPr id="12" name="Text 10"/>
+          <p:cNvSpPr/>
+          <p:nvPr/>
+        </p:nvSpPr>
+        <p:spPr>
+          <a:xfrm>
+            <a:off x="2697480" y="3557016"/>
+            <a:ext cx="5989320" cy="1143000"/>
+          </a:xfrm>
+          <a:prstGeom prst="rect">
+            <a:avLst/>
+          </a:prstGeom>
+          <a:noFill/>
+          <a:ln/>
+        </p:spPr>
+        <p:txBody>
+          <a:bodyPr wrap="square" lIns="0" tIns="0" rIns="0" bIns="0" rtlCol="0" anchor="t"/>
+          <a:lstStyle/>
+          <a:p>
+            <a:pPr indent="0" marL="0">
+              <a:buNone/>
+            </a:pPr>
+            <a:r>
+              <a:rPr lang="en-US" sz="1250" dirty="0">
                 <a:solidFill>
                   <a:srgbClr val="1A1A1A"/>
                 </a:solidFill>
@@ -8102,9 +8127,9 @@
                 <a:ea typeface="Times New Roman" pitchFamily="34" charset="-122"/>
                 <a:cs typeface="Times New Roman" pitchFamily="34" charset="-120"/>
               </a:rPr>
-              <a:t>En detección, la superioridad en calidad de imagen no se traslada automáticamente al mAP: la elección del método debe guiarse por el criterio operativo prioritario.</a:t>
-            </a:r>
-            <a:endParaRPr lang="en-US" sz="1350" dirty="0"/>
+              <a:t>La fusión supera al visible solo en detección, pero ninguna fusión supera al infrarrojo solo; la mejor calidad de imagen no garantiza el mejor mAP.</a:t>
+            </a:r>
+            <a:endParaRPr lang="en-US" sz="1250" dirty="0"/>
           </a:p>
         </p:txBody>
       </p:sp>
@@ -8173,7 +8198,7 @@
                 <a:ea typeface="Times New Roman" pitchFamily="34" charset="-122"/>
                 <a:cs typeface="Times New Roman" pitchFamily="34" charset="-120"/>
               </a:rPr>
-              <a:t>Recomendaciones y trabajo futuro</a:t>
+              <a:t>9. Conclusiones</a:t>
             </a:r>
             <a:endParaRPr lang="en-US" sz="2300" dirty="0"/>
           </a:p>
@@ -8212,7 +8237,7 @@
                 <a:ea typeface="Times New Roman" pitchFamily="34" charset="-122"/>
                 <a:cs typeface="Times New Roman" pitchFamily="34" charset="-120"/>
               </a:rPr>
-              <a:t>18 / 19</a:t>
+              <a:t>18 / 20</a:t>
             </a:r>
             <a:endParaRPr lang="en-US" sz="900" dirty="0"/>
           </a:p>
@@ -8255,7 +8280,7 @@
                 <a:ea typeface="Times New Roman" pitchFamily="34" charset="-122"/>
                 <a:cs typeface="Times New Roman" pitchFamily="34" charset="-120"/>
               </a:rPr>
-              <a:t>Extender la evaluación de detección a otros detectores y al conjunto completo de LLVIP.</a:t>
+              <a:t>Se formuló e implementó de forma reproducible un operador Top-Hat de una sola escala con banco de disco + líneas orientadas y suma de ramas.</a:t>
             </a:r>
             <a:endParaRPr lang="en-US" sz="1350" dirty="0"/>
           </a:p>
@@ -8276,7 +8301,7 @@
                 <a:ea typeface="Times New Roman" pitchFamily="34" charset="-122"/>
                 <a:cs typeface="Times New Roman" pitchFamily="34" charset="-120"/>
               </a:rPr>
-              <a:t>Explorar reglas de fusión adaptativas para la rama Black Top-Hat.</a:t>
+              <a:t>El barrido PSO de 25 configuraciones halló el óptimo r = 25, m = 0,0703 (F = 1,9843) de manera consistente.</a:t>
             </a:r>
             <a:endParaRPr lang="en-US" sz="1350" dirty="0"/>
           </a:p>
@@ -8297,7 +8322,7 @@
                 <a:ea typeface="Times New Roman" pitchFamily="34" charset="-122"/>
                 <a:cs typeface="Times New Roman" pitchFamily="34" charset="-120"/>
               </a:rPr>
-              <a:t>Complementar las métricas objetivas con una validación perceptual por observadores.</a:t>
+              <a:t>La propuesta exhibe el mejor perfil de calidad del benchmark: menor Nabf y mayor SSIM, con significancia estadística; segunda en Qabf, SCD y VIF.</a:t>
             </a:r>
             <a:endParaRPr lang="en-US" sz="1350" dirty="0"/>
           </a:p>
@@ -8318,7 +8343,7 @@
                 <a:ea typeface="Times New Roman" pitchFamily="34" charset="-122"/>
                 <a:cs typeface="Times New Roman" pitchFamily="34" charset="-120"/>
               </a:rPr>
-              <a:t>Evaluar la transferencia a otros dominios (imágenes médicas, aéreas).</a:t>
+              <a:t>Frente a la metodología clásica Top-Hat, mejora todas las métricas de calidad de fusión: el banco de SE y el ajuste automático aportan valor real.</a:t>
             </a:r>
             <a:endParaRPr lang="en-US" sz="1350" dirty="0"/>
           </a:p>
@@ -8339,7 +8364,7 @@
                 <a:ea typeface="Times New Roman" pitchFamily="34" charset="-122"/>
                 <a:cs typeface="Times New Roman" pitchFamily="34" charset="-120"/>
               </a:rPr>
-              <a:t>Para aplicaciones donde los artefactos son críticos (interpretación humana, diagnóstico), la propuesta es la opción recomendada; donde prima el contraste bruto, LP sigue siendo competitiva.</a:t>
+              <a:t>En detección, la superioridad en calidad de imagen no se traslada automáticamente al mAP: la elección del método debe guiarse por el criterio operativo prioritario.</a:t>
             </a:r>
             <a:endParaRPr lang="en-US" sz="1350" dirty="0"/>
           </a:p>
@@ -8385,8 +8410,8 @@
         </p:nvSpPr>
         <p:spPr>
           <a:xfrm>
-            <a:off x="457200" y="1828800"/>
-            <a:ext cx="8229600" cy="731520"/>
+            <a:off x="457200" y="256032"/>
+            <a:ext cx="8229600" cy="502920"/>
           </a:xfrm>
           <a:prstGeom prst="rect">
             <a:avLst/>
@@ -8398,11 +8423,11 @@
           <a:bodyPr wrap="square" lIns="0" tIns="0" rIns="0" bIns="0" rtlCol="0" anchor="ctr"/>
           <a:lstStyle/>
           <a:p>
-            <a:pPr algn="ctr" indent="0" marL="0">
+            <a:pPr indent="0" marL="0">
               <a:buNone/>
             </a:pPr>
             <a:r>
-              <a:rPr lang="en-US" sz="3400" b="1" dirty="0">
+              <a:rPr lang="en-US" sz="2300" b="1" dirty="0">
                 <a:solidFill>
                   <a:srgbClr val="1A1A1A"/>
                 </a:solidFill>
@@ -8410,9 +8435,9 @@
                 <a:ea typeface="Times New Roman" pitchFamily="34" charset="-122"/>
                 <a:cs typeface="Times New Roman" pitchFamily="34" charset="-120"/>
               </a:rPr>
-              <a:t>Muchas gracias</a:t>
-            </a:r>
-            <a:endParaRPr lang="en-US" sz="3400" dirty="0"/>
+              <a:t>Recomendaciones y trabajo futuro</a:t>
+            </a:r>
+            <a:endParaRPr lang="en-US" sz="2300" dirty="0"/>
           </a:p>
         </p:txBody>
       </p:sp>
@@ -8424,8 +8449,8 @@
         </p:nvSpPr>
         <p:spPr>
           <a:xfrm>
-            <a:off x="457200" y="2606040"/>
-            <a:ext cx="8229600" cy="365760"/>
+            <a:off x="8229600" y="4828032"/>
+            <a:ext cx="685800" cy="274320"/>
           </a:xfrm>
           <a:prstGeom prst="rect">
             <a:avLst/>
@@ -8437,11 +8462,11 @@
           <a:bodyPr wrap="square" lIns="0" tIns="0" rIns="0" bIns="0" rtlCol="0" anchor="ctr"/>
           <a:lstStyle/>
           <a:p>
-            <a:pPr algn="ctr" indent="0" marL="0">
+            <a:pPr algn="r" indent="0" marL="0">
               <a:buNone/>
             </a:pPr>
             <a:r>
-              <a:rPr lang="en-US" sz="1500" i="1" dirty="0">
+              <a:rPr lang="en-US" sz="900" dirty="0">
                 <a:solidFill>
                   <a:srgbClr val="666666"/>
                 </a:solidFill>
@@ -8449,9 +8474,9 @@
                 <a:ea typeface="Times New Roman" pitchFamily="34" charset="-122"/>
                 <a:cs typeface="Times New Roman" pitchFamily="34" charset="-120"/>
               </a:rPr>
-              <a:t>Preguntas y comentarios</a:t>
-            </a:r>
-            <a:endParaRPr lang="en-US" sz="1500" dirty="0"/>
+              <a:t>19 / 20</a:t>
+            </a:r>
+            <a:endParaRPr lang="en-US" sz="900" dirty="0"/>
           </a:p>
         </p:txBody>
       </p:sp>
@@ -8463,8 +8488,8 @@
         </p:nvSpPr>
         <p:spPr>
           <a:xfrm>
-            <a:off x="457200" y="3383280"/>
-            <a:ext cx="8229600" cy="320040"/>
+            <a:off x="457200" y="914400"/>
+            <a:ext cx="8229600" cy="3931920"/>
           </a:xfrm>
           <a:prstGeom prst="rect">
             <a:avLst/>
@@ -8473,63 +8498,112 @@
           <a:ln/>
         </p:spPr>
         <p:txBody>
-          <a:bodyPr wrap="square" lIns="0" tIns="0" rIns="0" bIns="0" rtlCol="0" anchor="ctr"/>
-          <a:lstStyle/>
-          <a:p>
-            <a:pPr algn="ctr" indent="0" marL="0">
-              <a:buNone/>
-            </a:pPr>
-            <a:r>
-              <a:rPr lang="en-US" sz="1200" dirty="0">
-                <a:solidFill>
-                  <a:srgbClr val="8B1A1A"/>
-                </a:solidFill>
-                <a:latin typeface="Times New Roman" pitchFamily="34" charset="0"/>
-                <a:ea typeface="Times New Roman" pitchFamily="34" charset="-122"/>
-                <a:cs typeface="Times New Roman" pitchFamily="34" charset="-120"/>
-              </a:rPr>
-              <a:t>Código y experimentos reproducibles:  github.com/YanBajac/TFM_Fusion_Imagenes_Propuesta_Oficial</a:t>
-            </a:r>
-            <a:endParaRPr lang="en-US" sz="1200" dirty="0"/>
-          </a:p>
-        </p:txBody>
-      </p:sp>
-      <p:sp>
-        <p:nvSpPr>
-          <p:cNvPr id="5" name="Text 3"/>
-          <p:cNvSpPr/>
-          <p:nvPr/>
-        </p:nvSpPr>
-        <p:spPr>
-          <a:xfrm>
-            <a:off x="457200" y="3794760"/>
-            <a:ext cx="8229600" cy="320040"/>
-          </a:xfrm>
-          <a:prstGeom prst="rect">
-            <a:avLst/>
-          </a:prstGeom>
-          <a:noFill/>
-          <a:ln/>
-        </p:spPr>
-        <p:txBody>
-          <a:bodyPr wrap="square" lIns="0" tIns="0" rIns="0" bIns="0" rtlCol="0" anchor="ctr"/>
-          <a:lstStyle/>
-          <a:p>
-            <a:pPr algn="ctr" indent="0" marL="0">
-              <a:buNone/>
-            </a:pPr>
-            <a:r>
-              <a:rPr lang="en-US" sz="1100" dirty="0">
-                <a:solidFill>
-                  <a:srgbClr val="666666"/>
-                </a:solidFill>
-                <a:latin typeface="Times New Roman" pitchFamily="34" charset="0"/>
-                <a:ea typeface="Times New Roman" pitchFamily="34" charset="-122"/>
-                <a:cs typeface="Times New Roman" pitchFamily="34" charset="-120"/>
-              </a:rPr>
-              <a:t>Lic. Juan Pablo Bazán  ·  Ing. Yan Bajac  —  Orientador: D.Sc. Julio César Mello</a:t>
-            </a:r>
-            <a:endParaRPr lang="en-US" sz="1100" dirty="0"/>
+          <a:bodyPr wrap="square" lIns="0" tIns="0" rIns="0" bIns="0" rtlCol="0" anchor="t"/>
+          <a:lstStyle/>
+          <a:p>
+            <a:pPr marL="177800" indent="-177800">
+              <a:spcAft>
+                <a:spcPts val="1100"/>
+              </a:spcAft>
+              <a:buSzPct val="100000"/>
+              <a:buChar char="•"/>
+            </a:pPr>
+            <a:r>
+              <a:rPr lang="en-US" sz="1350" dirty="0">
+                <a:solidFill>
+                  <a:srgbClr val="1A1A1A"/>
+                </a:solidFill>
+                <a:latin typeface="Times New Roman" pitchFamily="34" charset="0"/>
+                <a:ea typeface="Times New Roman" pitchFamily="34" charset="-122"/>
+                <a:cs typeface="Times New Roman" pitchFamily="34" charset="-120"/>
+              </a:rPr>
+              <a:t>Extender la evaluación de detección a otros detectores y al conjunto completo de LLVIP.</a:t>
+            </a:r>
+            <a:endParaRPr lang="en-US" sz="1350" dirty="0"/>
+          </a:p>
+          <a:p>
+            <a:pPr marL="177800" indent="-177800">
+              <a:spcAft>
+                <a:spcPts val="1100"/>
+              </a:spcAft>
+              <a:buSzPct val="100000"/>
+              <a:buChar char="•"/>
+            </a:pPr>
+            <a:r>
+              <a:rPr lang="en-US" sz="1350" dirty="0">
+                <a:solidFill>
+                  <a:srgbClr val="1A1A1A"/>
+                </a:solidFill>
+                <a:latin typeface="Times New Roman" pitchFamily="34" charset="0"/>
+                <a:ea typeface="Times New Roman" pitchFamily="34" charset="-122"/>
+                <a:cs typeface="Times New Roman" pitchFamily="34" charset="-120"/>
+              </a:rPr>
+              <a:t>Explorar reglas de fusión adaptativas para la rama Black Top-Hat.</a:t>
+            </a:r>
+            <a:endParaRPr lang="en-US" sz="1350" dirty="0"/>
+          </a:p>
+          <a:p>
+            <a:pPr marL="177800" indent="-177800">
+              <a:spcAft>
+                <a:spcPts val="1100"/>
+              </a:spcAft>
+              <a:buSzPct val="100000"/>
+              <a:buChar char="•"/>
+            </a:pPr>
+            <a:r>
+              <a:rPr lang="en-US" sz="1350" dirty="0">
+                <a:solidFill>
+                  <a:srgbClr val="1A1A1A"/>
+                </a:solidFill>
+                <a:latin typeface="Times New Roman" pitchFamily="34" charset="0"/>
+                <a:ea typeface="Times New Roman" pitchFamily="34" charset="-122"/>
+                <a:cs typeface="Times New Roman" pitchFamily="34" charset="-120"/>
+              </a:rPr>
+              <a:t>Complementar las métricas objetivas con una validación perceptual por observadores.</a:t>
+            </a:r>
+            <a:endParaRPr lang="en-US" sz="1350" dirty="0"/>
+          </a:p>
+          <a:p>
+            <a:pPr marL="177800" indent="-177800">
+              <a:spcAft>
+                <a:spcPts val="1100"/>
+              </a:spcAft>
+              <a:buSzPct val="100000"/>
+              <a:buChar char="•"/>
+            </a:pPr>
+            <a:r>
+              <a:rPr lang="en-US" sz="1350" dirty="0">
+                <a:solidFill>
+                  <a:srgbClr val="1A1A1A"/>
+                </a:solidFill>
+                <a:latin typeface="Times New Roman" pitchFamily="34" charset="0"/>
+                <a:ea typeface="Times New Roman" pitchFamily="34" charset="-122"/>
+                <a:cs typeface="Times New Roman" pitchFamily="34" charset="-120"/>
+              </a:rPr>
+              <a:t>Evaluar la transferencia a otros dominios (imágenes médicas, aéreas).</a:t>
+            </a:r>
+            <a:endParaRPr lang="en-US" sz="1350" dirty="0"/>
+          </a:p>
+          <a:p>
+            <a:pPr marL="177800" indent="-177800">
+              <a:spcAft>
+                <a:spcPts val="1100"/>
+              </a:spcAft>
+              <a:buSzPct val="100000"/>
+              <a:buChar char="•"/>
+            </a:pPr>
+            <a:r>
+              <a:rPr lang="en-US" sz="1350" dirty="0">
+                <a:solidFill>
+                  <a:srgbClr val="1A1A1A"/>
+                </a:solidFill>
+                <a:latin typeface="Times New Roman" pitchFamily="34" charset="0"/>
+                <a:ea typeface="Times New Roman" pitchFamily="34" charset="-122"/>
+                <a:cs typeface="Times New Roman" pitchFamily="34" charset="-120"/>
+              </a:rPr>
+              <a:t>Para aplicaciones donde los artefactos son críticos (interpretación humana, diagnóstico), la propuesta es la opción recomendada; donde prima el contraste bruto, LP sigue siendo competitiva.</a:t>
+            </a:r>
+            <a:endParaRPr lang="en-US" sz="1350" dirty="0"/>
           </a:p>
         </p:txBody>
       </p:sp>
@@ -8637,7 +8711,7 @@
                 <a:ea typeface="Times New Roman" pitchFamily="34" charset="-122"/>
                 <a:cs typeface="Times New Roman" pitchFamily="34" charset="-120"/>
               </a:rPr>
-              <a:t>2 / 19</a:t>
+              <a:t>2 / 20</a:t>
             </a:r>
             <a:endParaRPr lang="en-US" sz="900" dirty="0"/>
           </a:p>
@@ -8851,6 +8925,194 @@
               <a:t>9.  Conclusiones y recomendaciones</a:t>
             </a:r>
             <a:endParaRPr lang="en-US" sz="1500" dirty="0"/>
+          </a:p>
+        </p:txBody>
+      </p:sp>
+    </p:spTree>
+  </p:cSld>
+  <p:clrMapOvr>
+    <a:masterClrMapping/>
+  </p:clrMapOvr>
+</p:sld>
+</file>
+
+<file path=ppt/slides/slide20.xml><?xml version="1.0" encoding="utf-8"?>
+<p:sld xmlns:a="http://schemas.openxmlformats.org/drawingml/2006/main" xmlns:r="http://schemas.openxmlformats.org/officeDocument/2006/relationships" xmlns:p="http://schemas.openxmlformats.org/presentationml/2006/main">
+  <p:cSld name="Slide 20">
+    <p:bg>
+      <p:bgPr>
+        <a:solidFill>
+          <a:srgbClr val="FFFFFF"/>
+        </a:solidFill>
+      </p:bgPr>
+    </p:bg>
+    <p:spTree>
+      <p:nvGrpSpPr>
+        <p:cNvPr id="1" name=""/>
+        <p:cNvGrpSpPr/>
+        <p:nvPr/>
+      </p:nvGrpSpPr>
+      <p:grpSpPr>
+        <a:xfrm>
+          <a:off x="0" y="0"/>
+          <a:ext cx="0" cy="0"/>
+          <a:chOff x="0" y="0"/>
+          <a:chExt cx="0" cy="0"/>
+        </a:xfrm>
+      </p:grpSpPr>
+      <p:sp>
+        <p:nvSpPr>
+          <p:cNvPr id="2" name="Text 0"/>
+          <p:cNvSpPr/>
+          <p:nvPr/>
+        </p:nvSpPr>
+        <p:spPr>
+          <a:xfrm>
+            <a:off x="457200" y="1828800"/>
+            <a:ext cx="8229600" cy="731520"/>
+          </a:xfrm>
+          <a:prstGeom prst="rect">
+            <a:avLst/>
+          </a:prstGeom>
+          <a:noFill/>
+          <a:ln/>
+        </p:spPr>
+        <p:txBody>
+          <a:bodyPr wrap="square" lIns="0" tIns="0" rIns="0" bIns="0" rtlCol="0" anchor="ctr"/>
+          <a:lstStyle/>
+          <a:p>
+            <a:pPr algn="ctr" indent="0" marL="0">
+              <a:buNone/>
+            </a:pPr>
+            <a:r>
+              <a:rPr lang="en-US" sz="3400" b="1" dirty="0">
+                <a:solidFill>
+                  <a:srgbClr val="1A1A1A"/>
+                </a:solidFill>
+                <a:latin typeface="Times New Roman" pitchFamily="34" charset="0"/>
+                <a:ea typeface="Times New Roman" pitchFamily="34" charset="-122"/>
+                <a:cs typeface="Times New Roman" pitchFamily="34" charset="-120"/>
+              </a:rPr>
+              <a:t>Muchas gracias</a:t>
+            </a:r>
+            <a:endParaRPr lang="en-US" sz="3400" dirty="0"/>
+          </a:p>
+        </p:txBody>
+      </p:sp>
+      <p:sp>
+        <p:nvSpPr>
+          <p:cNvPr id="3" name="Text 1"/>
+          <p:cNvSpPr/>
+          <p:nvPr/>
+        </p:nvSpPr>
+        <p:spPr>
+          <a:xfrm>
+            <a:off x="457200" y="2606040"/>
+            <a:ext cx="8229600" cy="365760"/>
+          </a:xfrm>
+          <a:prstGeom prst="rect">
+            <a:avLst/>
+          </a:prstGeom>
+          <a:noFill/>
+          <a:ln/>
+        </p:spPr>
+        <p:txBody>
+          <a:bodyPr wrap="square" lIns="0" tIns="0" rIns="0" bIns="0" rtlCol="0" anchor="ctr"/>
+          <a:lstStyle/>
+          <a:p>
+            <a:pPr algn="ctr" indent="0" marL="0">
+              <a:buNone/>
+            </a:pPr>
+            <a:r>
+              <a:rPr lang="en-US" sz="1500" i="1" dirty="0">
+                <a:solidFill>
+                  <a:srgbClr val="666666"/>
+                </a:solidFill>
+                <a:latin typeface="Times New Roman" pitchFamily="34" charset="0"/>
+                <a:ea typeface="Times New Roman" pitchFamily="34" charset="-122"/>
+                <a:cs typeface="Times New Roman" pitchFamily="34" charset="-120"/>
+              </a:rPr>
+              <a:t>Preguntas y comentarios</a:t>
+            </a:r>
+            <a:endParaRPr lang="en-US" sz="1500" dirty="0"/>
+          </a:p>
+        </p:txBody>
+      </p:sp>
+      <p:sp>
+        <p:nvSpPr>
+          <p:cNvPr id="4" name="Text 2"/>
+          <p:cNvSpPr/>
+          <p:nvPr/>
+        </p:nvSpPr>
+        <p:spPr>
+          <a:xfrm>
+            <a:off x="457200" y="3383280"/>
+            <a:ext cx="8229600" cy="320040"/>
+          </a:xfrm>
+          <a:prstGeom prst="rect">
+            <a:avLst/>
+          </a:prstGeom>
+          <a:noFill/>
+          <a:ln/>
+        </p:spPr>
+        <p:txBody>
+          <a:bodyPr wrap="square" lIns="0" tIns="0" rIns="0" bIns="0" rtlCol="0" anchor="ctr"/>
+          <a:lstStyle/>
+          <a:p>
+            <a:pPr algn="ctr" indent="0" marL="0">
+              <a:buNone/>
+            </a:pPr>
+            <a:r>
+              <a:rPr lang="en-US" sz="1200" dirty="0">
+                <a:solidFill>
+                  <a:srgbClr val="8B1A1A"/>
+                </a:solidFill>
+                <a:latin typeface="Times New Roman" pitchFamily="34" charset="0"/>
+                <a:ea typeface="Times New Roman" pitchFamily="34" charset="-122"/>
+                <a:cs typeface="Times New Roman" pitchFamily="34" charset="-120"/>
+              </a:rPr>
+              <a:t>Código y experimentos reproducibles:  github.com/YanBajac/TFM_Fusion_Imagenes_Propuesta_Oficial</a:t>
+            </a:r>
+            <a:endParaRPr lang="en-US" sz="1200" dirty="0"/>
+          </a:p>
+        </p:txBody>
+      </p:sp>
+      <p:sp>
+        <p:nvSpPr>
+          <p:cNvPr id="5" name="Text 3"/>
+          <p:cNvSpPr/>
+          <p:nvPr/>
+        </p:nvSpPr>
+        <p:spPr>
+          <a:xfrm>
+            <a:off x="457200" y="3794760"/>
+            <a:ext cx="8229600" cy="320040"/>
+          </a:xfrm>
+          <a:prstGeom prst="rect">
+            <a:avLst/>
+          </a:prstGeom>
+          <a:noFill/>
+          <a:ln/>
+        </p:spPr>
+        <p:txBody>
+          <a:bodyPr wrap="square" lIns="0" tIns="0" rIns="0" bIns="0" rtlCol="0" anchor="ctr"/>
+          <a:lstStyle/>
+          <a:p>
+            <a:pPr algn="ctr" indent="0" marL="0">
+              <a:buNone/>
+            </a:pPr>
+            <a:r>
+              <a:rPr lang="en-US" sz="1100" dirty="0">
+                <a:solidFill>
+                  <a:srgbClr val="666666"/>
+                </a:solidFill>
+                <a:latin typeface="Times New Roman" pitchFamily="34" charset="0"/>
+                <a:ea typeface="Times New Roman" pitchFamily="34" charset="-122"/>
+                <a:cs typeface="Times New Roman" pitchFamily="34" charset="-120"/>
+              </a:rPr>
+              <a:t>Lic. Juan Pablo Bazán  ·  Ing. Yan Bajac  —  Orientador: D.Sc. Julio César Mello</a:t>
+            </a:r>
+            <a:endParaRPr lang="en-US" sz="1100" dirty="0"/>
           </a:p>
         </p:txBody>
       </p:sp>
@@ -8958,7 +9220,7 @@
                 <a:ea typeface="Times New Roman" pitchFamily="34" charset="-122"/>
                 <a:cs typeface="Times New Roman" pitchFamily="34" charset="-120"/>
               </a:rPr>
-              <a:t>3 / 19</a:t>
+              <a:t>3 / 20</a:t>
             </a:r>
             <a:endParaRPr lang="en-US" sz="900" dirty="0"/>
           </a:p>
@@ -9219,7 +9481,7 @@
                 <a:ea typeface="Times New Roman" pitchFamily="34" charset="-122"/>
                 <a:cs typeface="Times New Roman" pitchFamily="34" charset="-120"/>
               </a:rPr>
-              <a:t>4 / 19</a:t>
+              <a:t>4 / 20</a:t>
             </a:r>
             <a:endParaRPr lang="en-US" sz="900" dirty="0"/>
           </a:p>
@@ -9552,7 +9814,7 @@
                 <a:ea typeface="Times New Roman" pitchFamily="34" charset="-122"/>
                 <a:cs typeface="Times New Roman" pitchFamily="34" charset="-120"/>
               </a:rPr>
-              <a:t>5 / 19</a:t>
+              <a:t>5 / 20</a:t>
             </a:r>
             <a:endParaRPr lang="en-US" sz="900" dirty="0"/>
           </a:p>
@@ -9896,7 +10158,7 @@
                 <a:ea typeface="Times New Roman" pitchFamily="34" charset="-122"/>
                 <a:cs typeface="Times New Roman" pitchFamily="34" charset="-120"/>
               </a:rPr>
-              <a:t>6 / 19</a:t>
+              <a:t>6 / 20</a:t>
             </a:r>
             <a:endParaRPr lang="en-US" sz="900" dirty="0"/>
           </a:p>
@@ -10217,7 +10479,7 @@
                 <a:ea typeface="Times New Roman" pitchFamily="34" charset="-122"/>
                 <a:cs typeface="Times New Roman" pitchFamily="34" charset="-120"/>
               </a:rPr>
-              <a:t>7 / 19</a:t>
+              <a:t>7 / 20</a:t>
             </a:r>
             <a:endParaRPr lang="en-US" sz="900" dirty="0"/>
           </a:p>
@@ -10526,7 +10788,7 @@
                 <a:ea typeface="Times New Roman" pitchFamily="34" charset="-122"/>
                 <a:cs typeface="Times New Roman" pitchFamily="34" charset="-120"/>
               </a:rPr>
-              <a:t>8 / 19</a:t>
+              <a:t>8 / 20</a:t>
             </a:r>
             <a:endParaRPr lang="en-US" sz="900" dirty="0"/>
           </a:p>
@@ -10851,7 +11113,7 @@
                 <a:ea typeface="Times New Roman" pitchFamily="34" charset="-122"/>
                 <a:cs typeface="Times New Roman" pitchFamily="34" charset="-120"/>
               </a:rPr>
-              <a:t>9 / 19</a:t>
+              <a:t>9 / 20</a:t>
             </a:r>
             <a:endParaRPr lang="en-US" sz="900" dirty="0"/>
           </a:p>

--- a/docs/Tesis_Defensa_Presentacion.pptx
+++ b/docs/Tesis_Defensa_Presentacion.pptx
@@ -7187,8 +7187,8 @@
         </p:blipFill>
         <p:spPr>
           <a:xfrm>
-            <a:off x="1179576" y="822960"/>
-            <a:ext cx="6766560" cy="3099816"/>
+            <a:off x="960120" y="822960"/>
+            <a:ext cx="7223760" cy="2761488"/>
           </a:xfrm>
           <a:prstGeom prst="rect">
             <a:avLst/>
@@ -7203,8 +7203,8 @@
         </p:nvSpPr>
         <p:spPr>
           <a:xfrm>
-            <a:off x="457200" y="4023360"/>
-            <a:ext cx="8229600" cy="1005840"/>
+            <a:off x="457200" y="3703320"/>
+            <a:ext cx="8229600" cy="1325880"/>
           </a:xfrm>
           <a:prstGeom prst="rect">
             <a:avLst/>
@@ -7218,7 +7218,7 @@
           <a:p>
             <a:pPr marL="177800" indent="-177800">
               <a:spcAft>
-                <a:spcPts val="400"/>
+                <a:spcPts val="500"/>
               </a:spcAft>
               <a:buSzPct val="100000"/>
               <a:buChar char="•"/>
@@ -7232,14 +7232,14 @@
                 <a:ea typeface="Times New Roman" pitchFamily="34" charset="-122"/>
                 <a:cs typeface="Times New Roman" pitchFamily="34" charset="-120"/>
               </a:rPr>
-              <a:t>Toda fusión supera con claridad al visible solo (+0,12 a +0,14 en mAP@0,5).</a:t>
+              <a:t>Toda fusión supera con claridad al visible solo (+0,12 a +0,14 en mAP@0,5); el IR solo lidera (0,957): en peatones nocturnos domina la firma térmica.</a:t>
             </a:r>
             <a:endParaRPr lang="en-US" sz="1200" dirty="0"/>
           </a:p>
           <a:p>
             <a:pPr marL="177800" indent="-177800">
               <a:spcAft>
-                <a:spcPts val="400"/>
+                <a:spcPts val="500"/>
               </a:spcAft>
               <a:buSzPct val="100000"/>
               <a:buChar char="•"/>
@@ -7253,14 +7253,14 @@
                 <a:ea typeface="Times New Roman" pitchFamily="34" charset="-122"/>
                 <a:cs typeface="Times New Roman" pitchFamily="34" charset="-120"/>
               </a:rPr>
-              <a:t>El infrarrojo solo lidera (0,957): en peatones nocturnos la firma térmica domina.</a:t>
+              <a:t>Las dos configuraciones de la propuesta caen en la banda de las fusiones: F_apt (0,936) y Fo (0,922), pareja con el clásico (0,938).</a:t>
             </a:r>
             <a:endParaRPr lang="en-US" sz="1200" dirty="0"/>
           </a:p>
           <a:p>
             <a:pPr marL="177800" indent="-177800">
               <a:spcAft>
-                <a:spcPts val="400"/>
+                <a:spcPts val="500"/>
               </a:spcAft>
               <a:buSzPct val="100000"/>
               <a:buChar char="•"/>
@@ -7274,7 +7274,7 @@
                 <a:ea typeface="Times New Roman" pitchFamily="34" charset="-122"/>
                 <a:cs typeface="Times New Roman" pitchFamily="34" charset="-120"/>
               </a:rPr>
-              <a:t>Entre las 7 fusiones la banda es estrecha (0,926–0,949); la propuesta es competitiva (0,936), pareja con el clásico (0,938).</a:t>
+              <a:t>La calidad de imagen no se traslada automáticamente al mAP (H3 parcial).</a:t>
             </a:r>
             <a:endParaRPr lang="en-US" sz="1200" dirty="0"/>
           </a:p>
@@ -11278,8 +11278,8 @@
         </p:nvSpPr>
         <p:spPr>
           <a:xfrm>
-            <a:off x="457200" y="4206240"/>
-            <a:ext cx="8229600" cy="548640"/>
+            <a:off x="457200" y="4160520"/>
+            <a:ext cx="8229600" cy="640080"/>
           </a:xfrm>
           <a:prstGeom prst="rect">
             <a:avLst/>
@@ -11295,7 +11295,7 @@
               <a:buNone/>
             </a:pPr>
             <a:r>
-              <a:rPr lang="en-US" sz="1200" i="1" dirty="0">
+              <a:rPr lang="en-US" sz="1150" i="1" dirty="0">
                 <a:solidFill>
                   <a:srgbClr val="8B1A1A"/>
                 </a:solidFill>
@@ -11303,9 +11303,9 @@
                 <a:ea typeface="Times New Roman" pitchFamily="34" charset="-122"/>
                 <a:cs typeface="Times New Roman" pitchFamily="34" charset="-120"/>
               </a:rPr>
-              <a:t>Ambas aptitudes acuerdan el peso del operador con suma; la orientada a la fusión controla además los artefactos (refuerza H2).</a:t>
-            </a:r>
-            <a:endParaRPr lang="en-US" sz="1200" dirty="0"/>
+              <a:t>Wilcoxon entre ambos óptimos: F_apt mejor y significativa en 8/12 métricas (limpieza y estructura). Ambas aptitudes acuerdan el peso del operador; F_apt controla además los artefactos (refuerza H2).</a:t>
+            </a:r>
+            <a:endParaRPr lang="en-US" sz="1150" dirty="0"/>
           </a:p>
         </p:txBody>
       </p:sp>

--- a/docs/Tesis_Defensa_Presentacion.pptx
+++ b/docs/Tesis_Defensa_Presentacion.pptx
@@ -24,10 +24,9 @@
     <p:sldId id="272" r:id="rId18"/>
     <p:sldId id="273" r:id="rId19"/>
     <p:sldId id="274" r:id="rId20"/>
-    <p:sldId id="275" r:id="rId21"/>
   </p:sldIdLst>
   <p:notesMasterIdLst>
-    <p:notesMasterId r:id="rId22"/>
+    <p:notesMasterId r:id="rId21"/>
   </p:notesMasterIdLst>
   <p:sldSz cx="9144000" cy="5143500"/>
   <p:notesSz cx="5143500" cy="9144000"/>
@@ -609,7 +608,7 @@
           <a:p>
             <a:r>
               <a:rPr lang="en-US" dirty="0"/>
-              <a:t>Dos evaluaciones complementarias: calidad de imagen (TNO, sin referencia) y utilidad en tarea (LLVIP, con verdad de campo). En LLVIP solo cambian los píxeles de entrada; las etiquetas son las mismas, así el mAP aísla el efecto de la fusión.</a:t>
+              <a:t>Escena representativa: la propuesta (recuadro rojo) integra la firma térmica de las personas con la textura de la casa y la vegetación, con menos halos y ruido que RP/DWT y más contraste local que el clásico.</a:t>
             </a:r>
             <a:endParaRPr lang="en-US" dirty="0"/>
           </a:p>
@@ -697,7 +696,7 @@
           <a:p>
             <a:r>
               <a:rPr lang="en-US" dirty="0"/>
-              <a:t>Escena representativa: la propuesta (recuadro rojo) integra la firma térmica de las personas con la textura de la casa y la vegetación, con menos halos y ruido que RP/DWT y más contraste local que el clásico.</a:t>
+              <a:t>Negritas = mejor por columna. No hay método universalmente dominante: la propuesta lidera SSIM, LP el contraste (SD) y la información mutua, el Top-Hat clásico la actividad (SF). El perfil de la propuesta es la fidelidad estructural.</a:t>
             </a:r>
             <a:endParaRPr lang="en-US" dirty="0"/>
           </a:p>
@@ -785,7 +784,7 @@
           <a:p>
             <a:r>
               <a:rPr lang="en-US" dirty="0"/>
-              <a:t>Negritas = mejor por columna. No hay método universalmente dominante: DTCWT lidera bordes por una milésima, RP la correlación, LP el contraste. El perfil de la propuesta es limpieza (Nabf) y estructura (SSIM), quedando segunda en el resto a distancias mínimas.</a:t>
+              <a:t>La evidencia estadística sostiene las ventajas donde la propuesta las reclama: limpieza y estructura, con significancia tras corregir por comparaciones múltiples. El ranking global es honesto: la propuesta no domina todo; domina su perfil.</a:t>
             </a:r>
             <a:endParaRPr lang="en-US" dirty="0"/>
           </a:p>
@@ -873,7 +872,7 @@
           <a:p>
             <a:r>
               <a:rPr lang="en-US" dirty="0"/>
-              <a:t>La evidencia estadística sostiene las ventajas donde la propuesta las reclama: limpieza y estructura, con significancia tras corregir por comparaciones múltiples. El ranking global es honesto: la propuesta no domina todo; domina su perfil.</a:t>
+              <a:t>El hallazgo más matizado: fusionar aporta muchísimo frente al VIS, pero ninguna fusión supera al IR puro en esta tarea nocturna. Entre fusiones, las diferencias son pequeñas: la calidad de imagen no se traslada automáticamente al mAP.</a:t>
             </a:r>
             <a:endParaRPr lang="en-US" dirty="0"/>
           </a:p>
@@ -961,7 +960,7 @@
           <a:p>
             <a:r>
               <a:rPr lang="en-US" dirty="0"/>
-              <a:t>El hallazgo más matizado: fusionar aporta muchísimo frente al VIS, pero ninguna fusión supera al IR puro en esta tarea nocturna. Entre fusiones, las diferencias son pequeñas: la calidad de imagen no se traslada automáticamente al mAP.</a:t>
+              <a:t>El experimento que delimita el valor de la fusión: un único YOLOv8n entrenado con VIS+IR mezcladas (4.000 imágenes, 40 épocas) e inferencia por método. Las personas solo se ven bien en IR y las luces solo en VIS; la fusión es la única entrada que detecta ambas a la vez. La propuesta es la mejor fusión del estudio en este escenario: detecta ambas clases complementarias en una sola imagen.</a:t>
             </a:r>
             <a:endParaRPr lang="en-US" dirty="0"/>
           </a:p>
@@ -1049,7 +1048,7 @@
           <a:p>
             <a:r>
               <a:rPr lang="en-US" dirty="0"/>
-              <a:t>El experimento que delimita el valor de la fusión: un único YOLOv8n entrenado con VIS+IR mezcladas (4.000 imágenes, 40 épocas) e inferencia por método. Las personas solo se ven bien en IR y las luces solo en VIS; la fusión es la única entrada que detecta ambas a la vez. La propuesta lidera entre las fusiones y su ventaja sobre el óptimo Fo confirma la elección de la aptitud también en tarea.</a:t>
+              <a:t>Cerrar M3FD con la evidencia visual: dos escenas reales de la validación. En la primera, las personas están bajo el puente a contraluz: invisibles para el detector en VIS, obvias en IR y recuperadas por la fusión. En la segunda, el semáforo y las luces no emiten calor: el IR no los ve, la fusión sí — junto con las personas. Una sola imagen, ambas clases: eso es lo que la fusión compra.</a:t>
             </a:r>
             <a:endParaRPr lang="en-US" dirty="0"/>
           </a:p>
@@ -1137,7 +1136,7 @@
           <a:p>
             <a:r>
               <a:rPr lang="en-US" dirty="0"/>
-              <a:t>Cerrar M3FD con la evidencia visual: dos escenas reales de la validación. En la primera, las personas están bajo el puente a contraluz: invisibles para el detector en VIS, obvias en IR y recuperadas por la fusión. En la segunda, el semáforo y las luces no emiten calor: el IR no los ve, la fusión sí — junto con las personas. Una sola imagen, ambas clases: eso es lo que la fusión compra.</a:t>
+              <a:t>H1 y H2 quedan sostenidas con evidencia estadística. H3 solo parcialmente: es el resultado más honesto del trabajo y anticipa la pregunta natural del tribunal — calidad de imagen y utilidad en tarea son criterios distintos.</a:t>
             </a:r>
             <a:endParaRPr lang="en-US" dirty="0"/>
           </a:p>
@@ -1225,7 +1224,7 @@
           <a:p>
             <a:r>
               <a:rPr lang="en-US" dirty="0"/>
-              <a:t>H1 y H2 quedan sostenidas con evidencia estadística. H3 solo parcialmente: es el resultado más honesto del trabajo y anticipa la pregunta natural del tribunal — calidad de imagen y utilidad en tarea son criterios distintos.</a:t>
+              <a:t>Cinco conclusiones: método formulado, óptimo hallado, perfil de calidad validado, ventaja sobre el clásico demostrada, y la lección sobre calidad vs. tarea.</a:t>
             </a:r>
             <a:endParaRPr lang="en-US" dirty="0"/>
           </a:p>
@@ -1313,7 +1312,7 @@
           <a:p>
             <a:r>
               <a:rPr lang="en-US" dirty="0"/>
-              <a:t>Cinco conclusiones: método formulado, óptimo hallado, perfil de calidad validado, ventaja sobre el clásico demostrada, y la lección sobre calidad vs. tarea.</a:t>
+              <a:t>Cerrar con la recomendación práctica: qué método elegir según el criterio operativo. Dejar claro que el pipeline completo es reproducible desde el repositorio.</a:t>
             </a:r>
             <a:endParaRPr lang="en-US" dirty="0"/>
           </a:p>
@@ -1401,7 +1400,7 @@
           <a:p>
             <a:r>
               <a:rPr lang="en-US" dirty="0"/>
-              <a:t>Cerrar con la recomendación práctica: qué método elegir según el criterio operativo. Dejar claro que el pipeline completo es reproducible desde el repositorio.</a:t>
+              <a:t>Agradecer a la mesa y al orientador. Ofrecer el repositorio para cualquier verificación.</a:t>
             </a:r>
             <a:endParaRPr lang="en-US" dirty="0"/>
           </a:p>
@@ -1531,94 +1530,6 @@
 </p:notes>
 </file>
 
-<file path=ppt/notesSlides/notesSlide20.xml><?xml version="1.0" encoding="utf-8"?>
-<p:notes xmlns:a="http://schemas.openxmlformats.org/drawingml/2006/main" xmlns:r="http://schemas.openxmlformats.org/officeDocument/2006/relationships" xmlns:p="http://schemas.openxmlformats.org/presentationml/2006/main">
-  <p:cSld>
-    <p:spTree>
-      <p:nvGrpSpPr>
-        <p:cNvPr id="1" name=""/>
-        <p:cNvGrpSpPr/>
-        <p:nvPr/>
-      </p:nvGrpSpPr>
-      <p:grpSpPr>
-        <a:xfrm>
-          <a:off x="0" y="0"/>
-          <a:ext cx="0" cy="0"/>
-          <a:chOff x="0" y="0"/>
-          <a:chExt cx="0" cy="0"/>
-        </a:xfrm>
-      </p:grpSpPr>
-      <p:sp>
-        <p:nvSpPr>
-          <p:cNvPr id="2" name="Slide Image Placeholder 1"/>
-          <p:cNvSpPr>
-            <a:spLocks noGrp="1" noRot="1" noChangeAspect="1"/>
-          </p:cNvSpPr>
-          <p:nvPr>
-            <p:ph type="sldImg"/>
-          </p:nvPr>
-        </p:nvSpPr>
-        <p:spPr/>
-      </p:sp>
-      <p:sp>
-        <p:nvSpPr>
-          <p:cNvPr id="3" name="Notes Placeholder 2"/>
-          <p:cNvSpPr>
-            <a:spLocks noGrp="1"/>
-          </p:cNvSpPr>
-          <p:nvPr>
-            <p:ph type="body" idx="1"/>
-          </p:nvPr>
-        </p:nvSpPr>
-        <p:spPr/>
-        <p:txBody>
-          <a:bodyPr/>
-          <a:lstStyle/>
-          <a:p>
-            <a:r>
-              <a:rPr lang="en-US" dirty="0"/>
-              <a:t>Agradecer a la mesa y al orientador. Ofrecer el repositorio para cualquier verificación.</a:t>
-            </a:r>
-            <a:endParaRPr lang="en-US" dirty="0"/>
-          </a:p>
-        </p:txBody>
-      </p:sp>
-      <p:sp>
-        <p:nvSpPr>
-          <p:cNvPr id="4" name="Slide Number Placeholder 3"/>
-          <p:cNvSpPr>
-            <a:spLocks noGrp="1"/>
-          </p:cNvSpPr>
-          <p:nvPr>
-            <p:ph type="sldNum" sz="quarter" idx="10"/>
-          </p:nvPr>
-        </p:nvSpPr>
-        <p:spPr/>
-        <p:txBody>
-          <a:bodyPr/>
-          <a:lstStyle/>
-          <a:p>
-            <a:fld id="{F7021451-1387-4CA6-816F-3879F97B5CBC}" type="slidenum">
-              <a:rPr lang="en-US"/>
-              <a:t>20</a:t>
-            </a:fld>
-            <a:endParaRPr lang="en-US"/>
-          </a:p>
-        </p:txBody>
-      </p:sp>
-    </p:spTree>
-    <p:extLst>
-      <p:ext uri="{BB962C8B-B14F-4D97-AF65-F5344CB8AC3E}">
-        <p14:creationId xmlns:p14="http://schemas.microsoft.com/office/powerpoint/2010/main" val="1024086991"/>
-      </p:ext>
-    </p:extLst>
-  </p:cSld>
-  <p:clrMapOvr>
-    <a:masterClrMapping/>
-  </p:clrMapOvr>
-</p:notes>
-</file>
-
 <file path=ppt/notesSlides/notesSlide3.xml><?xml version="1.0" encoding="utf-8"?>
 <p:notes xmlns:a="http://schemas.openxmlformats.org/drawingml/2006/main" xmlns:r="http://schemas.openxmlformats.org/officeDocument/2006/relationships" xmlns:p="http://schemas.openxmlformats.org/presentationml/2006/main">
   <p:cSld>
@@ -2105,7 +2016,7 @@
           <a:p>
             <a:r>
               <a:rPr lang="en-US" dirty="0"/>
-              <a:t>r controla la escala de las estructuras que se extraen; m cuánto realce se reinyecta. La aptitud combina fidelidad estructural, bordes y correlación, y castiga artefactos. El barrido replica el diseño del trabajo de la FPUNA: el óptimo r=25 con m pequeño (0,07) extrae estructuras grandes pero las pondera suavemente.</a:t>
+              <a:t>r controla la escala de las estructuras que se extraen; m cuánto realce se reinyecta. La aptitud publicada F_o combina fidelidad estructural (SSIM), información (entropía) y baja distorsión (PSNR). El barrido replica el Cuadro 1 de la FPUNA: el óptimo global de F_o para este operador es r=25 con m pequeño (≈0,07), que extrae estructuras grandes pero las pondera suavemente.</a:t>
             </a:r>
             <a:endParaRPr lang="en-US" dirty="0"/>
           </a:p>
@@ -2193,7 +2104,7 @@
           <a:p>
             <a:r>
               <a:rPr lang="en-US" dirty="0"/>
-              <a:t>Respuesta a la pregunta del tribunal sobre la elección de la aptitud: repetimos el barrido con la fórmula del trabajo replicado. Resultado: su propio óptimo cae al piso del rango (m=0,30) y, sin restricciones, coincide con el nuestro (m≈0,07). La aptitud de fidelidad pura además apaga el banco de SE (r=1). La curva demuestra que ningún enjambre puede converger en [0,5-2]: es el paisaje, no la búsqueda.</a:t>
+              <a:t>Dos evaluaciones complementarias: calidad de imagen (TNO, sin referencia) y utilidad en tarea (LLVIP, con verdad de campo). En LLVIP solo cambian los píxeles de entrada; las etiquetas son las mismas, así el mAP aísla el efecto de la fusión.</a:t>
             </a:r>
             <a:endParaRPr lang="en-US" dirty="0"/>
           </a:p>
@@ -2933,7 +2844,7 @@
                 <a:ea typeface="Times New Roman" pitchFamily="34" charset="-122"/>
                 <a:cs typeface="Times New Roman" pitchFamily="34" charset="-120"/>
               </a:rPr>
-              <a:t>6. Diseño experimental</a:t>
+              <a:t>7. Resultados cualitativos</a:t>
             </a:r>
             <a:endParaRPr lang="en-US" sz="2300" dirty="0"/>
           </a:p>
@@ -2972,22 +2883,46 @@
                 <a:ea typeface="Times New Roman" pitchFamily="34" charset="-122"/>
                 <a:cs typeface="Times New Roman" pitchFamily="34" charset="-120"/>
               </a:rPr>
-              <a:t>10 / 20</a:t>
+              <a:t>10 / 19</a:t>
             </a:r>
             <a:endParaRPr lang="en-US" sz="900" dirty="0"/>
           </a:p>
         </p:txBody>
       </p:sp>
-      <p:sp>
-        <p:nvSpPr>
-          <p:cNvPr id="4" name="Text 2"/>
+      <p:pic>
+        <p:nvPicPr>
+          <p:cNvPr id="4" name="Image 0" descr="C:/Users/Usuario/Documents/unv/mastertesis/tesis_mciencias_datos/docs/figures/cualitativas/montaje_07.png">    </p:cNvPr>
+          <p:cNvPicPr>
+            <a:picLocks noChangeAspect="1"/>
+          </p:cNvPicPr>
+          <p:nvPr/>
+        </p:nvPicPr>
+        <p:blipFill>
+          <a:blip r:embed="rId1"/>
+          <a:stretch>
+            <a:fillRect/>
+          </a:stretch>
+        </p:blipFill>
+        <p:spPr>
+          <a:xfrm>
+            <a:off x="1764792" y="777240"/>
+            <a:ext cx="5623560" cy="4005072"/>
+          </a:xfrm>
+          <a:prstGeom prst="rect">
+            <a:avLst/>
+          </a:prstGeom>
+        </p:spPr>
+      </p:pic>
+      <p:sp>
+        <p:nvSpPr>
+          <p:cNvPr id="5" name="Text 2"/>
           <p:cNvSpPr/>
           <p:nvPr/>
         </p:nvSpPr>
         <p:spPr>
           <a:xfrm>
-            <a:off x="457200" y="868680"/>
-            <a:ext cx="4023360" cy="274320"/>
+            <a:off x="457200" y="4828032"/>
+            <a:ext cx="7680960" cy="274320"/>
           </a:xfrm>
           <a:prstGeom prst="rect">
             <a:avLst/>
@@ -3003,247 +2938,17 @@
               <a:buNone/>
             </a:pPr>
             <a:r>
-              <a:rPr lang="en-US" sz="1400" b="1" dirty="0">
-                <a:solidFill>
-                  <a:srgbClr val="8B1A1A"/>
-                </a:solidFill>
-                <a:latin typeface="Times New Roman" pitchFamily="34" charset="0"/>
-                <a:ea typeface="Times New Roman" pitchFamily="34" charset="-122"/>
-                <a:cs typeface="Times New Roman" pitchFamily="34" charset="-120"/>
-              </a:rPr>
-              <a:t>Benchmark de calidad</a:t>
-            </a:r>
-            <a:endParaRPr lang="en-US" sz="1400" dirty="0"/>
-          </a:p>
-        </p:txBody>
-      </p:sp>
-      <p:sp>
-        <p:nvSpPr>
-          <p:cNvPr id="5" name="Text 3"/>
-          <p:cNvSpPr/>
-          <p:nvPr/>
-        </p:nvSpPr>
-        <p:spPr>
-          <a:xfrm>
-            <a:off x="457200" y="1188720"/>
-            <a:ext cx="4023360" cy="3291840"/>
-          </a:xfrm>
-          <a:prstGeom prst="rect">
-            <a:avLst/>
-          </a:prstGeom>
-          <a:noFill/>
-          <a:ln/>
-        </p:spPr>
-        <p:txBody>
-          <a:bodyPr wrap="square" lIns="0" tIns="0" rIns="0" bIns="0" rtlCol="0" anchor="t"/>
-          <a:lstStyle/>
-          <a:p>
-            <a:pPr marL="177800" indent="-177800">
-              <a:spcAft>
-                <a:spcPts val="800"/>
-              </a:spcAft>
-              <a:buSzPct val="100000"/>
-              <a:buChar char="•"/>
-            </a:pPr>
-            <a:r>
-              <a:rPr lang="en-US" sz="1250" dirty="0">
-                <a:solidFill>
-                  <a:srgbClr val="1A1A1A"/>
-                </a:solidFill>
-                <a:latin typeface="Times New Roman" pitchFamily="34" charset="0"/>
-                <a:ea typeface="Times New Roman" pitchFamily="34" charset="-122"/>
-                <a:cs typeface="Times New Roman" pitchFamily="34" charset="-120"/>
-              </a:rPr>
-              <a:t>20 pares VIS/IR del dataset TNO (Toet, 2014).</a:t>
-            </a:r>
-            <a:endParaRPr lang="en-US" sz="1250" dirty="0"/>
-          </a:p>
-          <a:p>
-            <a:pPr marL="177800" indent="-177800">
-              <a:spcAft>
-                <a:spcPts val="800"/>
-              </a:spcAft>
-              <a:buSzPct val="100000"/>
-              <a:buChar char="•"/>
-            </a:pPr>
-            <a:r>
-              <a:rPr lang="en-US" sz="1250" dirty="0">
-                <a:solidFill>
-                  <a:srgbClr val="1A1A1A"/>
-                </a:solidFill>
-                <a:latin typeface="Times New Roman" pitchFamily="34" charset="0"/>
-                <a:ea typeface="Times New Roman" pitchFamily="34" charset="-122"/>
-                <a:cs typeface="Times New Roman" pitchFamily="34" charset="-120"/>
-              </a:rPr>
-              <a:t>7 métodos: LP, RP, DWT, DTCWT, CVT, Top-Hat clásico y Propuesta → 140 fusiones.</a:t>
-            </a:r>
-            <a:endParaRPr lang="en-US" sz="1250" dirty="0"/>
-          </a:p>
-          <a:p>
-            <a:pPr marL="177800" indent="-177800">
-              <a:spcAft>
-                <a:spcPts val="800"/>
-              </a:spcAft>
-              <a:buSzPct val="100000"/>
-              <a:buChar char="•"/>
-            </a:pPr>
-            <a:r>
-              <a:rPr lang="en-US" sz="1250" dirty="0">
-                <a:solidFill>
-                  <a:srgbClr val="1A1A1A"/>
-                </a:solidFill>
-                <a:latin typeface="Times New Roman" pitchFamily="34" charset="0"/>
-                <a:ea typeface="Times New Roman" pitchFamily="34" charset="-122"/>
-                <a:cs typeface="Times New Roman" pitchFamily="34" charset="-120"/>
-              </a:rPr>
-              <a:t>12 métricas sin referencia (+ 4 descriptivas del review de Singh et al., 2023).</a:t>
-            </a:r>
-            <a:endParaRPr lang="en-US" sz="1250" dirty="0"/>
-          </a:p>
-          <a:p>
-            <a:pPr marL="177800" indent="-177800">
-              <a:spcAft>
-                <a:spcPts val="800"/>
-              </a:spcAft>
-              <a:buSzPct val="100000"/>
-              <a:buChar char="•"/>
-            </a:pPr>
-            <a:r>
-              <a:rPr lang="en-US" sz="1250" dirty="0">
-                <a:solidFill>
-                  <a:srgbClr val="1A1A1A"/>
-                </a:solidFill>
-                <a:latin typeface="Times New Roman" pitchFamily="34" charset="0"/>
-                <a:ea typeface="Times New Roman" pitchFamily="34" charset="-122"/>
-                <a:cs typeface="Times New Roman" pitchFamily="34" charset="-120"/>
-              </a:rPr>
-              <a:t>Friedman global + Wilcoxon pareado con corrección de Holm (α = 0,05).</a:t>
-            </a:r>
-            <a:endParaRPr lang="en-US" sz="1250" dirty="0"/>
-          </a:p>
-        </p:txBody>
-      </p:sp>
-      <p:sp>
-        <p:nvSpPr>
-          <p:cNvPr id="6" name="Text 4"/>
-          <p:cNvSpPr/>
-          <p:nvPr/>
-        </p:nvSpPr>
-        <p:spPr>
-          <a:xfrm>
-            <a:off x="4846320" y="868680"/>
-            <a:ext cx="3840480" cy="274320"/>
-          </a:xfrm>
-          <a:prstGeom prst="rect">
-            <a:avLst/>
-          </a:prstGeom>
-          <a:noFill/>
-          <a:ln/>
-        </p:spPr>
-        <p:txBody>
-          <a:bodyPr wrap="square" lIns="0" tIns="0" rIns="0" bIns="0" rtlCol="0" anchor="ctr"/>
-          <a:lstStyle/>
-          <a:p>
-            <a:pPr indent="0" marL="0">
-              <a:buNone/>
-            </a:pPr>
-            <a:r>
-              <a:rPr lang="en-US" sz="1400" b="1" dirty="0">
-                <a:solidFill>
-                  <a:srgbClr val="8B1A1A"/>
-                </a:solidFill>
-                <a:latin typeface="Times New Roman" pitchFamily="34" charset="0"/>
-                <a:ea typeface="Times New Roman" pitchFamily="34" charset="-122"/>
-                <a:cs typeface="Times New Roman" pitchFamily="34" charset="-120"/>
-              </a:rPr>
-              <a:t>Evaluación orientada a tarea</a:t>
-            </a:r>
-            <a:endParaRPr lang="en-US" sz="1400" dirty="0"/>
-          </a:p>
-        </p:txBody>
-      </p:sp>
-      <p:sp>
-        <p:nvSpPr>
-          <p:cNvPr id="7" name="Text 5"/>
-          <p:cNvSpPr/>
-          <p:nvPr/>
-        </p:nvSpPr>
-        <p:spPr>
-          <a:xfrm>
-            <a:off x="4846320" y="1188720"/>
-            <a:ext cx="3840480" cy="3291840"/>
-          </a:xfrm>
-          <a:prstGeom prst="rect">
-            <a:avLst/>
-          </a:prstGeom>
-          <a:noFill/>
-          <a:ln/>
-        </p:spPr>
-        <p:txBody>
-          <a:bodyPr wrap="square" lIns="0" tIns="0" rIns="0" bIns="0" rtlCol="0" anchor="t"/>
-          <a:lstStyle/>
-          <a:p>
-            <a:pPr marL="177800" indent="-177800">
-              <a:spcAft>
-                <a:spcPts val="800"/>
-              </a:spcAft>
-              <a:buSzPct val="100000"/>
-              <a:buChar char="•"/>
-            </a:pPr>
-            <a:r>
-              <a:rPr lang="en-US" sz="1250" dirty="0">
-                <a:solidFill>
-                  <a:srgbClr val="1A1A1A"/>
-                </a:solidFill>
-                <a:latin typeface="Times New Roman" pitchFamily="34" charset="0"/>
-                <a:ea typeface="Times New Roman" pitchFamily="34" charset="-122"/>
-                <a:cs typeface="Times New Roman" pitchFamily="34" charset="-120"/>
-              </a:rPr>
-              <a:t>Dataset etiquetado LLVIP (peatones nocturnos): 2.000 imágenes de entrenamiento y 500 de validación.</a:t>
-            </a:r>
-            <a:endParaRPr lang="en-US" sz="1250" dirty="0"/>
-          </a:p>
-          <a:p>
-            <a:pPr marL="177800" indent="-177800">
-              <a:spcAft>
-                <a:spcPts val="800"/>
-              </a:spcAft>
-              <a:buSzPct val="100000"/>
-              <a:buChar char="•"/>
-            </a:pPr>
-            <a:r>
-              <a:rPr lang="en-US" sz="1250" dirty="0">
-                <a:solidFill>
-                  <a:srgbClr val="1A1A1A"/>
-                </a:solidFill>
-                <a:latin typeface="Times New Roman" pitchFamily="34" charset="0"/>
-                <a:ea typeface="Times New Roman" pitchFamily="34" charset="-122"/>
-                <a:cs typeface="Times New Roman" pitchFamily="34" charset="-120"/>
-              </a:rPr>
-              <a:t>YOLOv8n reentrenado por modalidad (40 épocas), 9 entradas: VIS, IR y las 7 fusiones.</a:t>
-            </a:r>
-            <a:endParaRPr lang="en-US" sz="1250" dirty="0"/>
-          </a:p>
-          <a:p>
-            <a:pPr marL="177800" indent="-177800">
-              <a:spcAft>
-                <a:spcPts val="800"/>
-              </a:spcAft>
-              <a:buSzPct val="100000"/>
-              <a:buChar char="•"/>
-            </a:pPr>
-            <a:r>
-              <a:rPr lang="en-US" sz="1250" dirty="0">
-                <a:solidFill>
-                  <a:srgbClr val="1A1A1A"/>
-                </a:solidFill>
-                <a:latin typeface="Times New Roman" pitchFamily="34" charset="0"/>
-                <a:ea typeface="Times New Roman" pitchFamily="34" charset="-122"/>
-                <a:cs typeface="Times New Roman" pitchFamily="34" charset="-120"/>
-              </a:rPr>
-              <a:t>Etiquetas idénticas entre modalidades: la diferencia de mAP aísla el efecto del método de fusión.</a:t>
-            </a:r>
-            <a:endParaRPr lang="en-US" sz="1250" dirty="0"/>
+              <a:rPr lang="en-US" sz="1000" i="1" dirty="0">
+                <a:solidFill>
+                  <a:srgbClr val="666666"/>
+                </a:solidFill>
+                <a:latin typeface="Times New Roman" pitchFamily="34" charset="0"/>
+                <a:ea typeface="Times New Roman" pitchFamily="34" charset="-122"/>
+                <a:cs typeface="Times New Roman" pitchFamily="34" charset="-120"/>
+              </a:rPr>
+              <a:t>Los 20 montajes por escena están disponibles en el repositorio (docs/figures/cualitativas/).</a:t>
+            </a:r>
+            <a:endParaRPr lang="en-US" sz="1000" dirty="0"/>
           </a:p>
         </p:txBody>
       </p:sp>
@@ -3312,7 +3017,7 @@
                 <a:ea typeface="Times New Roman" pitchFamily="34" charset="-122"/>
                 <a:cs typeface="Times New Roman" pitchFamily="34" charset="-120"/>
               </a:rPr>
-              <a:t>7. Resultados cualitativos</a:t>
+              <a:t>Resultados cuantitativos — medias sobre 20 pares</a:t>
             </a:r>
             <a:endParaRPr lang="en-US" sz="2300" dirty="0"/>
           </a:p>
@@ -3351,180 +3056,7 @@
                 <a:ea typeface="Times New Roman" pitchFamily="34" charset="-122"/>
                 <a:cs typeface="Times New Roman" pitchFamily="34" charset="-120"/>
               </a:rPr>
-              <a:t>11 / 20</a:t>
-            </a:r>
-            <a:endParaRPr lang="en-US" sz="900" dirty="0"/>
-          </a:p>
-        </p:txBody>
-      </p:sp>
-      <p:pic>
-        <p:nvPicPr>
-          <p:cNvPr id="4" name="Image 0" descr="C:/Users/Usuario/Documents/unv/mastertesis/tesis_mciencias_datos/docs/figures/cualitativas/montaje_07.png">    </p:cNvPr>
-          <p:cNvPicPr>
-            <a:picLocks noChangeAspect="1"/>
-          </p:cNvPicPr>
-          <p:nvPr/>
-        </p:nvPicPr>
-        <p:blipFill>
-          <a:blip r:embed="rId1"/>
-          <a:stretch>
-            <a:fillRect/>
-          </a:stretch>
-        </p:blipFill>
-        <p:spPr>
-          <a:xfrm>
-            <a:off x="1764792" y="777240"/>
-            <a:ext cx="5623560" cy="4005072"/>
-          </a:xfrm>
-          <a:prstGeom prst="rect">
-            <a:avLst/>
-          </a:prstGeom>
-        </p:spPr>
-      </p:pic>
-      <p:sp>
-        <p:nvSpPr>
-          <p:cNvPr id="5" name="Text 2"/>
-          <p:cNvSpPr/>
-          <p:nvPr/>
-        </p:nvSpPr>
-        <p:spPr>
-          <a:xfrm>
-            <a:off x="457200" y="4828032"/>
-            <a:ext cx="7680960" cy="274320"/>
-          </a:xfrm>
-          <a:prstGeom prst="rect">
-            <a:avLst/>
-          </a:prstGeom>
-          <a:noFill/>
-          <a:ln/>
-        </p:spPr>
-        <p:txBody>
-          <a:bodyPr wrap="square" lIns="0" tIns="0" rIns="0" bIns="0" rtlCol="0" anchor="ctr"/>
-          <a:lstStyle/>
-          <a:p>
-            <a:pPr indent="0" marL="0">
-              <a:buNone/>
-            </a:pPr>
-            <a:r>
-              <a:rPr lang="en-US" sz="1000" i="1" dirty="0">
-                <a:solidFill>
-                  <a:srgbClr val="666666"/>
-                </a:solidFill>
-                <a:latin typeface="Times New Roman" pitchFamily="34" charset="0"/>
-                <a:ea typeface="Times New Roman" pitchFamily="34" charset="-122"/>
-                <a:cs typeface="Times New Roman" pitchFamily="34" charset="-120"/>
-              </a:rPr>
-              <a:t>Los 20 montajes por escena están disponibles en el repositorio (docs/figures/cualitativas/).</a:t>
-            </a:r>
-            <a:endParaRPr lang="en-US" sz="1000" dirty="0"/>
-          </a:p>
-        </p:txBody>
-      </p:sp>
-    </p:spTree>
-  </p:cSld>
-  <p:clrMapOvr>
-    <a:masterClrMapping/>
-  </p:clrMapOvr>
-</p:sld>
-</file>
-
-<file path=ppt/slides/slide12.xml><?xml version="1.0" encoding="utf-8"?>
-<p:sld xmlns:a="http://schemas.openxmlformats.org/drawingml/2006/main" xmlns:r="http://schemas.openxmlformats.org/officeDocument/2006/relationships" xmlns:p="http://schemas.openxmlformats.org/presentationml/2006/main">
-  <p:cSld name="Slide 12">
-    <p:bg>
-      <p:bgPr>
-        <a:solidFill>
-          <a:srgbClr val="FFFFFF"/>
-        </a:solidFill>
-      </p:bgPr>
-    </p:bg>
-    <p:spTree>
-      <p:nvGrpSpPr>
-        <p:cNvPr id="1" name=""/>
-        <p:cNvGrpSpPr/>
-        <p:nvPr/>
-      </p:nvGrpSpPr>
-      <p:grpSpPr>
-        <a:xfrm>
-          <a:off x="0" y="0"/>
-          <a:ext cx="0" cy="0"/>
-          <a:chOff x="0" y="0"/>
-          <a:chExt cx="0" cy="0"/>
-        </a:xfrm>
-      </p:grpSpPr>
-      <p:sp>
-        <p:nvSpPr>
-          <p:cNvPr id="2" name="Text 0"/>
-          <p:cNvSpPr/>
-          <p:nvPr/>
-        </p:nvSpPr>
-        <p:spPr>
-          <a:xfrm>
-            <a:off x="457200" y="256032"/>
-            <a:ext cx="8229600" cy="502920"/>
-          </a:xfrm>
-          <a:prstGeom prst="rect">
-            <a:avLst/>
-          </a:prstGeom>
-          <a:noFill/>
-          <a:ln/>
-        </p:spPr>
-        <p:txBody>
-          <a:bodyPr wrap="square" lIns="0" tIns="0" rIns="0" bIns="0" rtlCol="0" anchor="ctr"/>
-          <a:lstStyle/>
-          <a:p>
-            <a:pPr indent="0" marL="0">
-              <a:buNone/>
-            </a:pPr>
-            <a:r>
-              <a:rPr lang="en-US" sz="2300" b="1" dirty="0">
-                <a:solidFill>
-                  <a:srgbClr val="1A1A1A"/>
-                </a:solidFill>
-                <a:latin typeface="Times New Roman" pitchFamily="34" charset="0"/>
-                <a:ea typeface="Times New Roman" pitchFamily="34" charset="-122"/>
-                <a:cs typeface="Times New Roman" pitchFamily="34" charset="-120"/>
-              </a:rPr>
-              <a:t>Resultados cuantitativos — medias sobre 20 pares</a:t>
-            </a:r>
-            <a:endParaRPr lang="en-US" sz="2300" dirty="0"/>
-          </a:p>
-        </p:txBody>
-      </p:sp>
-      <p:sp>
-        <p:nvSpPr>
-          <p:cNvPr id="3" name="Text 1"/>
-          <p:cNvSpPr/>
-          <p:nvPr/>
-        </p:nvSpPr>
-        <p:spPr>
-          <a:xfrm>
-            <a:off x="8229600" y="4828032"/>
-            <a:ext cx="685800" cy="274320"/>
-          </a:xfrm>
-          <a:prstGeom prst="rect">
-            <a:avLst/>
-          </a:prstGeom>
-          <a:noFill/>
-          <a:ln/>
-        </p:spPr>
-        <p:txBody>
-          <a:bodyPr wrap="square" lIns="0" tIns="0" rIns="0" bIns="0" rtlCol="0" anchor="ctr"/>
-          <a:lstStyle/>
-          <a:p>
-            <a:pPr algn="r" indent="0" marL="0">
-              <a:buNone/>
-            </a:pPr>
-            <a:r>
-              <a:rPr lang="en-US" sz="900" dirty="0">
-                <a:solidFill>
-                  <a:srgbClr val="666666"/>
-                </a:solidFill>
-                <a:latin typeface="Times New Roman" pitchFamily="34" charset="0"/>
-                <a:ea typeface="Times New Roman" pitchFamily="34" charset="-122"/>
-                <a:cs typeface="Times New Roman" pitchFamily="34" charset="-120"/>
-              </a:rPr>
-              <a:t>12 / 20</a:t>
+              <a:t>11 / 19</a:t>
             </a:r>
             <a:endParaRPr lang="en-US" sz="900" dirty="0"/>
           </a:p>
@@ -3532,7 +3064,7 @@
       </p:sp>
       <p:graphicFrame>
         <p:nvGraphicFramePr>
-          <p:cNvPr id="13" name="Table 0"/>
+          <p:cNvPr id="12" name="Table 0"/>
           <p:cNvGraphicFramePr>
             <a:graphicFrameLocks noGrp="1"/>
           </p:cNvGraphicFramePr>
@@ -3646,7 +3178,7 @@
                           <a:ea typeface="Times New Roman" pitchFamily="34" charset="-122"/>
                           <a:cs typeface="Times New Roman" pitchFamily="34" charset="-120"/>
                         </a:rPr>
-                        <a:t>Qabf ↑</a:t>
+                        <a:t>SSIM ↑</a:t>
                       </a:r>
                       <a:endParaRPr lang="en-US" sz="1200" dirty="0">
                         <a:latin typeface="Times New Roman" charset="0"/>
@@ -3714,7 +3246,7 @@
                           <a:ea typeface="Times New Roman" pitchFamily="34" charset="-122"/>
                           <a:cs typeface="Times New Roman" pitchFamily="34" charset="-120"/>
                         </a:rPr>
-                        <a:t>Nabf ↓</a:t>
+                        <a:t>PSNR ↑</a:t>
                       </a:r>
                       <a:endParaRPr lang="en-US" sz="1200" dirty="0">
                         <a:latin typeface="Times New Roman" charset="0"/>
@@ -3782,7 +3314,7 @@
                           <a:ea typeface="Times New Roman" pitchFamily="34" charset="-122"/>
                           <a:cs typeface="Times New Roman" pitchFamily="34" charset="-120"/>
                         </a:rPr>
-                        <a:t>SSIM ↑</a:t>
+                        <a:t>SF ↑</a:t>
                       </a:r>
                       <a:endParaRPr lang="en-US" sz="1200" dirty="0">
                         <a:latin typeface="Times New Roman" charset="0"/>
@@ -3850,7 +3382,7 @@
                           <a:ea typeface="Times New Roman" pitchFamily="34" charset="-122"/>
                           <a:cs typeface="Times New Roman" pitchFamily="34" charset="-120"/>
                         </a:rPr>
-                        <a:t>SCD ↑</a:t>
+                        <a:t>MI_ir ↑</a:t>
                       </a:r>
                       <a:endParaRPr lang="en-US" sz="1200" dirty="0">
                         <a:latin typeface="Times New Roman" charset="0"/>
@@ -3918,7 +3450,7 @@
                           <a:ea typeface="Times New Roman" pitchFamily="34" charset="-122"/>
                           <a:cs typeface="Times New Roman" pitchFamily="34" charset="-120"/>
                         </a:rPr>
-                        <a:t>VIF ↑</a:t>
+                        <a:t>SD ↑</a:t>
                       </a:r>
                       <a:endParaRPr lang="en-US" sz="1200" dirty="0">
                         <a:latin typeface="Times New Roman" charset="0"/>
@@ -4053,7 +3585,7 @@
                           <a:ea typeface="Times New Roman" pitchFamily="34" charset="-122"/>
                           <a:cs typeface="Times New Roman" pitchFamily="34" charset="-120"/>
                         </a:rPr>
-                        <a:t>0,442</a:t>
+                        <a:t>0,721</a:t>
                       </a:r>
                       <a:endParaRPr lang="en-US" sz="1200" dirty="0">
                         <a:latin typeface="Times New Roman" charset="0"/>
@@ -4118,7 +3650,7 @@
                           <a:ea typeface="Times New Roman" pitchFamily="34" charset="-122"/>
                           <a:cs typeface="Times New Roman" pitchFamily="34" charset="-120"/>
                         </a:rPr>
-                        <a:t>0,108</a:t>
+                        <a:t>20,27</a:t>
                       </a:r>
                       <a:endParaRPr lang="en-US" sz="1200" dirty="0">
                         <a:latin typeface="Times New Roman" charset="0"/>
@@ -4183,72 +3715,7 @@
                           <a:ea typeface="Times New Roman" pitchFamily="34" charset="-122"/>
                           <a:cs typeface="Times New Roman" pitchFamily="34" charset="-120"/>
                         </a:rPr>
-                        <a:t>0,721</a:t>
-                      </a:r>
-                      <a:endParaRPr lang="en-US" sz="1200" dirty="0">
-                        <a:latin typeface="Times New Roman" charset="0"/>
-                        <a:ea typeface="Times New Roman" charset="0"/>
-                        <a:cs typeface="Times New Roman" charset="0"/>
-                      </a:endParaRPr>
-                    </a:p>
-                  </a:txBody>
-                  <a:tcPr marL="91440" marR="91440" marT="45720" marB="45720" anchor="ctr">
-                    <a:lnL w="6350" cap="flat" cmpd="sng" algn="ctr">
-                      <a:solidFill>
-                        <a:srgbClr val="BFBFBF"/>
-                      </a:solidFill>
-                      <a:prstDash val="solid"/>
-                      <a:round/>
-                      <a:headEnd type="none" w="med" len="med"/>
-                      <a:tailEnd type="none" w="med" len="med"/>
-                    </a:lnL>
-                    <a:lnR w="6350" cap="flat" cmpd="sng" algn="ctr">
-                      <a:solidFill>
-                        <a:srgbClr val="BFBFBF"/>
-                      </a:solidFill>
-                      <a:prstDash val="solid"/>
-                      <a:round/>
-                      <a:headEnd type="none" w="med" len="med"/>
-                      <a:tailEnd type="none" w="med" len="med"/>
-                    </a:lnR>
-                    <a:lnT w="6350" cap="flat" cmpd="sng" algn="ctr">
-                      <a:solidFill>
-                        <a:srgbClr val="BFBFBF"/>
-                      </a:solidFill>
-                      <a:prstDash val="solid"/>
-                      <a:round/>
-                      <a:headEnd type="none" w="med" len="med"/>
-                      <a:tailEnd type="none" w="med" len="med"/>
-                    </a:lnT>
-                    <a:lnB w="6350" cap="flat" cmpd="sng" algn="ctr">
-                      <a:solidFill>
-                        <a:srgbClr val="BFBFBF"/>
-                      </a:solidFill>
-                      <a:prstDash val="solid"/>
-                      <a:round/>
-                      <a:headEnd type="none" w="med" len="med"/>
-                      <a:tailEnd type="none" w="med" len="med"/>
-                    </a:lnB>
-                  </a:tcPr>
-                </a:tc>
-                <a:tc>
-                  <a:txBody>
-                    <a:bodyPr/>
-                    <a:lstStyle/>
-                    <a:p>
-                      <a:pPr algn="ctr" indent="0" marL="0">
-                        <a:buNone/>
-                      </a:pPr>
-                      <a:r>
-                        <a:rPr lang="en-US" sz="1200" dirty="0">
-                          <a:solidFill>
-                            <a:srgbClr val="1A1A1A"/>
-                          </a:solidFill>
-                          <a:latin typeface="Times New Roman" pitchFamily="34" charset="0"/>
-                          <a:ea typeface="Times New Roman" pitchFamily="34" charset="-122"/>
-                          <a:cs typeface="Times New Roman" pitchFamily="34" charset="-120"/>
-                        </a:rPr>
-                        <a:t>1,322</a:t>
+                        <a:t>13,04</a:t>
                       </a:r>
                       <a:endParaRPr lang="en-US" sz="1200" dirty="0">
                         <a:latin typeface="Times New Roman" charset="0"/>
@@ -4313,7 +3780,72 @@
                           <a:ea typeface="Times New Roman" pitchFamily="34" charset="-122"/>
                           <a:cs typeface="Times New Roman" pitchFamily="34" charset="-120"/>
                         </a:rPr>
-                        <a:t>0,410</a:t>
+                        <a:t>1,072</a:t>
+                      </a:r>
+                      <a:endParaRPr lang="en-US" sz="1200" dirty="0">
+                        <a:latin typeface="Times New Roman" charset="0"/>
+                        <a:ea typeface="Times New Roman" charset="0"/>
+                        <a:cs typeface="Times New Roman" charset="0"/>
+                      </a:endParaRPr>
+                    </a:p>
+                  </a:txBody>
+                  <a:tcPr marL="91440" marR="91440" marT="45720" marB="45720" anchor="ctr">
+                    <a:lnL w="6350" cap="flat" cmpd="sng" algn="ctr">
+                      <a:solidFill>
+                        <a:srgbClr val="BFBFBF"/>
+                      </a:solidFill>
+                      <a:prstDash val="solid"/>
+                      <a:round/>
+                      <a:headEnd type="none" w="med" len="med"/>
+                      <a:tailEnd type="none" w="med" len="med"/>
+                    </a:lnL>
+                    <a:lnR w="6350" cap="flat" cmpd="sng" algn="ctr">
+                      <a:solidFill>
+                        <a:srgbClr val="BFBFBF"/>
+                      </a:solidFill>
+                      <a:prstDash val="solid"/>
+                      <a:round/>
+                      <a:headEnd type="none" w="med" len="med"/>
+                      <a:tailEnd type="none" w="med" len="med"/>
+                    </a:lnR>
+                    <a:lnT w="6350" cap="flat" cmpd="sng" algn="ctr">
+                      <a:solidFill>
+                        <a:srgbClr val="BFBFBF"/>
+                      </a:solidFill>
+                      <a:prstDash val="solid"/>
+                      <a:round/>
+                      <a:headEnd type="none" w="med" len="med"/>
+                      <a:tailEnd type="none" w="med" len="med"/>
+                    </a:lnT>
+                    <a:lnB w="6350" cap="flat" cmpd="sng" algn="ctr">
+                      <a:solidFill>
+                        <a:srgbClr val="BFBFBF"/>
+                      </a:solidFill>
+                      <a:prstDash val="solid"/>
+                      <a:round/>
+                      <a:headEnd type="none" w="med" len="med"/>
+                      <a:tailEnd type="none" w="med" len="med"/>
+                    </a:lnB>
+                  </a:tcPr>
+                </a:tc>
+                <a:tc>
+                  <a:txBody>
+                    <a:bodyPr/>
+                    <a:lstStyle/>
+                    <a:p>
+                      <a:pPr algn="ctr" indent="0" marL="0">
+                        <a:buNone/>
+                      </a:pPr>
+                      <a:r>
+                        <a:rPr lang="en-US" sz="1200" b="1" dirty="0">
+                          <a:solidFill>
+                            <a:srgbClr val="1A1A1A"/>
+                          </a:solidFill>
+                          <a:latin typeface="Times New Roman" pitchFamily="34" charset="0"/>
+                          <a:ea typeface="Times New Roman" pitchFamily="34" charset="-122"/>
+                          <a:cs typeface="Times New Roman" pitchFamily="34" charset="-120"/>
+                        </a:rPr>
+                        <a:t>0,155</a:t>
                       </a:r>
                       <a:endParaRPr lang="en-US" sz="1200" dirty="0">
                         <a:latin typeface="Times New Roman" charset="0"/>
@@ -4445,7 +3977,7 @@
                           <a:ea typeface="Times New Roman" pitchFamily="34" charset="-122"/>
                           <a:cs typeface="Times New Roman" pitchFamily="34" charset="-120"/>
                         </a:rPr>
-                        <a:t>0,497</a:t>
+                        <a:t>0,721</a:t>
                       </a:r>
                       <a:endParaRPr lang="en-US" sz="1200" dirty="0">
                         <a:latin typeface="Times New Roman" charset="0"/>
@@ -4510,7 +4042,7 @@
                           <a:ea typeface="Times New Roman" pitchFamily="34" charset="-122"/>
                           <a:cs typeface="Times New Roman" pitchFamily="34" charset="-120"/>
                         </a:rPr>
-                        <a:t>0,212</a:t>
+                        <a:t>21,97</a:t>
                       </a:r>
                       <a:endParaRPr lang="en-US" sz="1200" dirty="0">
                         <a:latin typeface="Times New Roman" charset="0"/>
@@ -4575,72 +4107,7 @@
                           <a:ea typeface="Times New Roman" pitchFamily="34" charset="-122"/>
                           <a:cs typeface="Times New Roman" pitchFamily="34" charset="-120"/>
                         </a:rPr>
-                        <a:t>0,721</a:t>
-                      </a:r>
-                      <a:endParaRPr lang="en-US" sz="1200" dirty="0">
-                        <a:latin typeface="Times New Roman" charset="0"/>
-                        <a:ea typeface="Times New Roman" charset="0"/>
-                        <a:cs typeface="Times New Roman" charset="0"/>
-                      </a:endParaRPr>
-                    </a:p>
-                  </a:txBody>
-                  <a:tcPr marL="91440" marR="91440" marT="45720" marB="45720" anchor="ctr">
-                    <a:lnL w="6350" cap="flat" cmpd="sng" algn="ctr">
-                      <a:solidFill>
-                        <a:srgbClr val="BFBFBF"/>
-                      </a:solidFill>
-                      <a:prstDash val="solid"/>
-                      <a:round/>
-                      <a:headEnd type="none" w="med" len="med"/>
-                      <a:tailEnd type="none" w="med" len="med"/>
-                    </a:lnL>
-                    <a:lnR w="6350" cap="flat" cmpd="sng" algn="ctr">
-                      <a:solidFill>
-                        <a:srgbClr val="BFBFBF"/>
-                      </a:solidFill>
-                      <a:prstDash val="solid"/>
-                      <a:round/>
-                      <a:headEnd type="none" w="med" len="med"/>
-                      <a:tailEnd type="none" w="med" len="med"/>
-                    </a:lnR>
-                    <a:lnT w="6350" cap="flat" cmpd="sng" algn="ctr">
-                      <a:solidFill>
-                        <a:srgbClr val="BFBFBF"/>
-                      </a:solidFill>
-                      <a:prstDash val="solid"/>
-                      <a:round/>
-                      <a:headEnd type="none" w="med" len="med"/>
-                      <a:tailEnd type="none" w="med" len="med"/>
-                    </a:lnT>
-                    <a:lnB w="6350" cap="flat" cmpd="sng" algn="ctr">
-                      <a:solidFill>
-                        <a:srgbClr val="BFBFBF"/>
-                      </a:solidFill>
-                      <a:prstDash val="solid"/>
-                      <a:round/>
-                      <a:headEnd type="none" w="med" len="med"/>
-                      <a:tailEnd type="none" w="med" len="med"/>
-                    </a:lnB>
-                  </a:tcPr>
-                </a:tc>
-                <a:tc>
-                  <a:txBody>
-                    <a:bodyPr/>
-                    <a:lstStyle/>
-                    <a:p>
-                      <a:pPr algn="ctr" indent="0" marL="0">
-                        <a:buNone/>
-                      </a:pPr>
-                      <a:r>
-                        <a:rPr lang="en-US" sz="1200" b="1" dirty="0">
-                          <a:solidFill>
-                            <a:srgbClr val="1A1A1A"/>
-                          </a:solidFill>
-                          <a:latin typeface="Times New Roman" pitchFamily="34" charset="0"/>
-                          <a:ea typeface="Times New Roman" pitchFamily="34" charset="-122"/>
-                          <a:cs typeface="Times New Roman" pitchFamily="34" charset="-120"/>
-                        </a:rPr>
-                        <a:t>1,468</a:t>
+                        <a:t>13,34</a:t>
                       </a:r>
                       <a:endParaRPr lang="en-US" sz="1200" dirty="0">
                         <a:latin typeface="Times New Roman" charset="0"/>
@@ -4705,7 +4172,72 @@
                           <a:ea typeface="Times New Roman" pitchFamily="34" charset="-122"/>
                           <a:cs typeface="Times New Roman" pitchFamily="34" charset="-120"/>
                         </a:rPr>
-                        <a:t>0,384</a:t>
+                        <a:t>0,881</a:t>
+                      </a:r>
+                      <a:endParaRPr lang="en-US" sz="1200" dirty="0">
+                        <a:latin typeface="Times New Roman" charset="0"/>
+                        <a:ea typeface="Times New Roman" charset="0"/>
+                        <a:cs typeface="Times New Roman" charset="0"/>
+                      </a:endParaRPr>
+                    </a:p>
+                  </a:txBody>
+                  <a:tcPr marL="91440" marR="91440" marT="45720" marB="45720" anchor="ctr">
+                    <a:lnL w="6350" cap="flat" cmpd="sng" algn="ctr">
+                      <a:solidFill>
+                        <a:srgbClr val="BFBFBF"/>
+                      </a:solidFill>
+                      <a:prstDash val="solid"/>
+                      <a:round/>
+                      <a:headEnd type="none" w="med" len="med"/>
+                      <a:tailEnd type="none" w="med" len="med"/>
+                    </a:lnL>
+                    <a:lnR w="6350" cap="flat" cmpd="sng" algn="ctr">
+                      <a:solidFill>
+                        <a:srgbClr val="BFBFBF"/>
+                      </a:solidFill>
+                      <a:prstDash val="solid"/>
+                      <a:round/>
+                      <a:headEnd type="none" w="med" len="med"/>
+                      <a:tailEnd type="none" w="med" len="med"/>
+                    </a:lnR>
+                    <a:lnT w="6350" cap="flat" cmpd="sng" algn="ctr">
+                      <a:solidFill>
+                        <a:srgbClr val="BFBFBF"/>
+                      </a:solidFill>
+                      <a:prstDash val="solid"/>
+                      <a:round/>
+                      <a:headEnd type="none" w="med" len="med"/>
+                      <a:tailEnd type="none" w="med" len="med"/>
+                    </a:lnT>
+                    <a:lnB w="6350" cap="flat" cmpd="sng" algn="ctr">
+                      <a:solidFill>
+                        <a:srgbClr val="BFBFBF"/>
+                      </a:solidFill>
+                      <a:prstDash val="solid"/>
+                      <a:round/>
+                      <a:headEnd type="none" w="med" len="med"/>
+                      <a:tailEnd type="none" w="med" len="med"/>
+                    </a:lnB>
+                  </a:tcPr>
+                </a:tc>
+                <a:tc>
+                  <a:txBody>
+                    <a:bodyPr/>
+                    <a:lstStyle/>
+                    <a:p>
+                      <a:pPr algn="ctr" indent="0" marL="0">
+                        <a:buNone/>
+                      </a:pPr>
+                      <a:r>
+                        <a:rPr lang="en-US" sz="1200" dirty="0">
+                          <a:solidFill>
+                            <a:srgbClr val="1A1A1A"/>
+                          </a:solidFill>
+                          <a:latin typeface="Times New Roman" pitchFamily="34" charset="0"/>
+                          <a:ea typeface="Times New Roman" pitchFamily="34" charset="-122"/>
+                          <a:cs typeface="Times New Roman" pitchFamily="34" charset="-120"/>
+                        </a:rPr>
+                        <a:t>0,130</a:t>
                       </a:r>
                       <a:endParaRPr lang="en-US" sz="1200" dirty="0">
                         <a:latin typeface="Times New Roman" charset="0"/>
@@ -4837,7 +4369,7 @@
                           <a:ea typeface="Times New Roman" pitchFamily="34" charset="-122"/>
                           <a:cs typeface="Times New Roman" pitchFamily="34" charset="-120"/>
                         </a:rPr>
-                        <a:t>0,490</a:t>
+                        <a:t>0,716</a:t>
                       </a:r>
                       <a:endParaRPr lang="en-US" sz="1200" dirty="0">
                         <a:latin typeface="Times New Roman" charset="0"/>
@@ -4902,7 +4434,7 @@
                           <a:ea typeface="Times New Roman" pitchFamily="34" charset="-122"/>
                           <a:cs typeface="Times New Roman" pitchFamily="34" charset="-120"/>
                         </a:rPr>
-                        <a:t>0,229</a:t>
+                        <a:t>22,78</a:t>
                       </a:r>
                       <a:endParaRPr lang="en-US" sz="1200" dirty="0">
                         <a:latin typeface="Times New Roman" charset="0"/>
@@ -4967,7 +4499,7 @@
                           <a:ea typeface="Times New Roman" pitchFamily="34" charset="-122"/>
                           <a:cs typeface="Times New Roman" pitchFamily="34" charset="-120"/>
                         </a:rPr>
-                        <a:t>0,716</a:t>
+                        <a:t>13,93</a:t>
                       </a:r>
                       <a:endParaRPr lang="en-US" sz="1200" dirty="0">
                         <a:latin typeface="Times New Roman" charset="0"/>
@@ -5032,7 +4564,7 @@
                           <a:ea typeface="Times New Roman" pitchFamily="34" charset="-122"/>
                           <a:cs typeface="Times New Roman" pitchFamily="34" charset="-120"/>
                         </a:rPr>
-                        <a:t>1,322</a:t>
+                        <a:t>0,881</a:t>
                       </a:r>
                       <a:endParaRPr lang="en-US" sz="1200" dirty="0">
                         <a:latin typeface="Times New Roman" charset="0"/>
@@ -5097,7 +4629,7 @@
                           <a:ea typeface="Times New Roman" pitchFamily="34" charset="-122"/>
                           <a:cs typeface="Times New Roman" pitchFamily="34" charset="-120"/>
                         </a:rPr>
-                        <a:t>0,303</a:t>
+                        <a:t>0,120</a:t>
                       </a:r>
                       <a:endParaRPr lang="en-US" sz="1200" dirty="0">
                         <a:latin typeface="Times New Roman" charset="0"/>
@@ -5221,7 +4753,7 @@
                         <a:buNone/>
                       </a:pPr>
                       <a:r>
-                        <a:rPr lang="en-US" sz="1200" b="1" dirty="0">
+                        <a:rPr lang="en-US" sz="1200" dirty="0">
                           <a:solidFill>
                             <a:srgbClr val="1A1A1A"/>
                           </a:solidFill>
@@ -5229,7 +4761,7 @@
                           <a:ea typeface="Times New Roman" pitchFamily="34" charset="-122"/>
                           <a:cs typeface="Times New Roman" pitchFamily="34" charset="-120"/>
                         </a:rPr>
-                        <a:t>0,501</a:t>
+                        <a:t>0,739</a:t>
                       </a:r>
                       <a:endParaRPr lang="en-US" sz="1200" dirty="0">
                         <a:latin typeface="Times New Roman" charset="0"/>
@@ -5294,7 +4826,7 @@
                           <a:ea typeface="Times New Roman" pitchFamily="34" charset="-122"/>
                           <a:cs typeface="Times New Roman" pitchFamily="34" charset="-120"/>
                         </a:rPr>
-                        <a:t>0,151</a:t>
+                        <a:t>22,79</a:t>
                       </a:r>
                       <a:endParaRPr lang="en-US" sz="1200" dirty="0">
                         <a:latin typeface="Times New Roman" charset="0"/>
@@ -5359,7 +4891,7 @@
                           <a:ea typeface="Times New Roman" pitchFamily="34" charset="-122"/>
                           <a:cs typeface="Times New Roman" pitchFamily="34" charset="-120"/>
                         </a:rPr>
-                        <a:t>0,739</a:t>
+                        <a:t>13,03</a:t>
                       </a:r>
                       <a:endParaRPr lang="en-US" sz="1200" dirty="0">
                         <a:latin typeface="Times New Roman" charset="0"/>
@@ -5424,7 +4956,7 @@
                           <a:ea typeface="Times New Roman" pitchFamily="34" charset="-122"/>
                           <a:cs typeface="Times New Roman" pitchFamily="34" charset="-120"/>
                         </a:rPr>
-                        <a:t>1,376</a:t>
+                        <a:t>0,891</a:t>
                       </a:r>
                       <a:endParaRPr lang="en-US" sz="1200" dirty="0">
                         <a:latin typeface="Times New Roman" charset="0"/>
@@ -5489,7 +5021,7 @@
                           <a:ea typeface="Times New Roman" pitchFamily="34" charset="-122"/>
                           <a:cs typeface="Times New Roman" pitchFamily="34" charset="-120"/>
                         </a:rPr>
-                        <a:t>0,360</a:t>
+                        <a:t>0,120</a:t>
                       </a:r>
                       <a:endParaRPr lang="en-US" sz="1200" dirty="0">
                         <a:latin typeface="Times New Roman" charset="0"/>
@@ -5621,7 +5153,72 @@
                           <a:ea typeface="Times New Roman" pitchFamily="34" charset="-122"/>
                           <a:cs typeface="Times New Roman" pitchFamily="34" charset="-120"/>
                         </a:rPr>
-                        <a:t>0,476</a:t>
+                        <a:t>0,731</a:t>
+                      </a:r>
+                      <a:endParaRPr lang="en-US" sz="1200" dirty="0">
+                        <a:latin typeface="Times New Roman" charset="0"/>
+                        <a:ea typeface="Times New Roman" charset="0"/>
+                        <a:cs typeface="Times New Roman" charset="0"/>
+                      </a:endParaRPr>
+                    </a:p>
+                  </a:txBody>
+                  <a:tcPr marL="91440" marR="91440" marT="45720" marB="45720" anchor="ctr">
+                    <a:lnL w="6350" cap="flat" cmpd="sng" algn="ctr">
+                      <a:solidFill>
+                        <a:srgbClr val="BFBFBF"/>
+                      </a:solidFill>
+                      <a:prstDash val="solid"/>
+                      <a:round/>
+                      <a:headEnd type="none" w="med" len="med"/>
+                      <a:tailEnd type="none" w="med" len="med"/>
+                    </a:lnL>
+                    <a:lnR w="6350" cap="flat" cmpd="sng" algn="ctr">
+                      <a:solidFill>
+                        <a:srgbClr val="BFBFBF"/>
+                      </a:solidFill>
+                      <a:prstDash val="solid"/>
+                      <a:round/>
+                      <a:headEnd type="none" w="med" len="med"/>
+                      <a:tailEnd type="none" w="med" len="med"/>
+                    </a:lnR>
+                    <a:lnT w="6350" cap="flat" cmpd="sng" algn="ctr">
+                      <a:solidFill>
+                        <a:srgbClr val="BFBFBF"/>
+                      </a:solidFill>
+                      <a:prstDash val="solid"/>
+                      <a:round/>
+                      <a:headEnd type="none" w="med" len="med"/>
+                      <a:tailEnd type="none" w="med" len="med"/>
+                    </a:lnT>
+                    <a:lnB w="6350" cap="flat" cmpd="sng" algn="ctr">
+                      <a:solidFill>
+                        <a:srgbClr val="BFBFBF"/>
+                      </a:solidFill>
+                      <a:prstDash val="solid"/>
+                      <a:round/>
+                      <a:headEnd type="none" w="med" len="med"/>
+                      <a:tailEnd type="none" w="med" len="med"/>
+                    </a:lnB>
+                  </a:tcPr>
+                </a:tc>
+                <a:tc>
+                  <a:txBody>
+                    <a:bodyPr/>
+                    <a:lstStyle/>
+                    <a:p>
+                      <a:pPr algn="ctr" indent="0" marL="0">
+                        <a:buNone/>
+                      </a:pPr>
+                      <a:r>
+                        <a:rPr lang="en-US" sz="1200" b="1" dirty="0">
+                          <a:solidFill>
+                            <a:srgbClr val="1A1A1A"/>
+                          </a:solidFill>
+                          <a:latin typeface="Times New Roman" pitchFamily="34" charset="0"/>
+                          <a:ea typeface="Times New Roman" pitchFamily="34" charset="-122"/>
+                          <a:cs typeface="Times New Roman" pitchFamily="34" charset="-120"/>
+                        </a:rPr>
+                        <a:t>22,84</a:t>
                       </a:r>
                       <a:endParaRPr lang="en-US" sz="1200" dirty="0">
                         <a:latin typeface="Times New Roman" charset="0"/>
@@ -5686,7 +5283,7 @@
                           <a:ea typeface="Times New Roman" pitchFamily="34" charset="-122"/>
                           <a:cs typeface="Times New Roman" pitchFamily="34" charset="-120"/>
                         </a:rPr>
-                        <a:t>0,192</a:t>
+                        <a:t>13,15</a:t>
                       </a:r>
                       <a:endParaRPr lang="en-US" sz="1200" dirty="0">
                         <a:latin typeface="Times New Roman" charset="0"/>
@@ -5751,7 +5348,7 @@
                           <a:ea typeface="Times New Roman" pitchFamily="34" charset="-122"/>
                           <a:cs typeface="Times New Roman" pitchFamily="34" charset="-120"/>
                         </a:rPr>
-                        <a:t>0,730</a:t>
+                        <a:t>0,884</a:t>
                       </a:r>
                       <a:endParaRPr lang="en-US" sz="1200" dirty="0">
                         <a:latin typeface="Times New Roman" charset="0"/>
@@ -5816,72 +5413,7 @@
                           <a:ea typeface="Times New Roman" pitchFamily="34" charset="-122"/>
                           <a:cs typeface="Times New Roman" pitchFamily="34" charset="-120"/>
                         </a:rPr>
-                        <a:t>1,321</a:t>
-                      </a:r>
-                      <a:endParaRPr lang="en-US" sz="1200" dirty="0">
-                        <a:latin typeface="Times New Roman" charset="0"/>
-                        <a:ea typeface="Times New Roman" charset="0"/>
-                        <a:cs typeface="Times New Roman" charset="0"/>
-                      </a:endParaRPr>
-                    </a:p>
-                  </a:txBody>
-                  <a:tcPr marL="91440" marR="91440" marT="45720" marB="45720" anchor="ctr">
-                    <a:lnL w="6350" cap="flat" cmpd="sng" algn="ctr">
-                      <a:solidFill>
-                        <a:srgbClr val="BFBFBF"/>
-                      </a:solidFill>
-                      <a:prstDash val="solid"/>
-                      <a:round/>
-                      <a:headEnd type="none" w="med" len="med"/>
-                      <a:tailEnd type="none" w="med" len="med"/>
-                    </a:lnL>
-                    <a:lnR w="6350" cap="flat" cmpd="sng" algn="ctr">
-                      <a:solidFill>
-                        <a:srgbClr val="BFBFBF"/>
-                      </a:solidFill>
-                      <a:prstDash val="solid"/>
-                      <a:round/>
-                      <a:headEnd type="none" w="med" len="med"/>
-                      <a:tailEnd type="none" w="med" len="med"/>
-                    </a:lnR>
-                    <a:lnT w="6350" cap="flat" cmpd="sng" algn="ctr">
-                      <a:solidFill>
-                        <a:srgbClr val="BFBFBF"/>
-                      </a:solidFill>
-                      <a:prstDash val="solid"/>
-                      <a:round/>
-                      <a:headEnd type="none" w="med" len="med"/>
-                      <a:tailEnd type="none" w="med" len="med"/>
-                    </a:lnT>
-                    <a:lnB w="6350" cap="flat" cmpd="sng" algn="ctr">
-                      <a:solidFill>
-                        <a:srgbClr val="BFBFBF"/>
-                      </a:solidFill>
-                      <a:prstDash val="solid"/>
-                      <a:round/>
-                      <a:headEnd type="none" w="med" len="med"/>
-                      <a:tailEnd type="none" w="med" len="med"/>
-                    </a:lnB>
-                  </a:tcPr>
-                </a:tc>
-                <a:tc>
-                  <a:txBody>
-                    <a:bodyPr/>
-                    <a:lstStyle/>
-                    <a:p>
-                      <a:pPr algn="ctr" indent="0" marL="0">
-                        <a:buNone/>
-                      </a:pPr>
-                      <a:r>
-                        <a:rPr lang="en-US" sz="1200" dirty="0">
-                          <a:solidFill>
-                            <a:srgbClr val="1A1A1A"/>
-                          </a:solidFill>
-                          <a:latin typeface="Times New Roman" pitchFamily="34" charset="0"/>
-                          <a:ea typeface="Times New Roman" pitchFamily="34" charset="-122"/>
-                          <a:cs typeface="Times New Roman" pitchFamily="34" charset="-120"/>
-                        </a:rPr>
-                        <a:t>0,307</a:t>
+                        <a:t>0,117</a:t>
                       </a:r>
                       <a:endParaRPr lang="en-US" sz="1200" dirty="0">
                         <a:latin typeface="Times New Roman" charset="0"/>
@@ -6013,7 +5545,7 @@
                           <a:ea typeface="Times New Roman" pitchFamily="34" charset="-122"/>
                           <a:cs typeface="Times New Roman" pitchFamily="34" charset="-120"/>
                         </a:rPr>
-                        <a:t>0,305</a:t>
+                        <a:t>0,578</a:t>
                       </a:r>
                       <a:endParaRPr lang="en-US" sz="1200" dirty="0">
                         <a:latin typeface="Times New Roman" charset="0"/>
@@ -6078,7 +5610,72 @@
                           <a:ea typeface="Times New Roman" pitchFamily="34" charset="-122"/>
                           <a:cs typeface="Times New Roman" pitchFamily="34" charset="-120"/>
                         </a:rPr>
-                        <a:t>0,585</a:t>
+                        <a:t>17,49</a:t>
+                      </a:r>
+                      <a:endParaRPr lang="en-US" sz="1200" dirty="0">
+                        <a:latin typeface="Times New Roman" charset="0"/>
+                        <a:ea typeface="Times New Roman" charset="0"/>
+                        <a:cs typeface="Times New Roman" charset="0"/>
+                      </a:endParaRPr>
+                    </a:p>
+                  </a:txBody>
+                  <a:tcPr marL="91440" marR="91440" marT="45720" marB="45720" anchor="ctr">
+                    <a:lnL w="6350" cap="flat" cmpd="sng" algn="ctr">
+                      <a:solidFill>
+                        <a:srgbClr val="BFBFBF"/>
+                      </a:solidFill>
+                      <a:prstDash val="solid"/>
+                      <a:round/>
+                      <a:headEnd type="none" w="med" len="med"/>
+                      <a:tailEnd type="none" w="med" len="med"/>
+                    </a:lnL>
+                    <a:lnR w="6350" cap="flat" cmpd="sng" algn="ctr">
+                      <a:solidFill>
+                        <a:srgbClr val="BFBFBF"/>
+                      </a:solidFill>
+                      <a:prstDash val="solid"/>
+                      <a:round/>
+                      <a:headEnd type="none" w="med" len="med"/>
+                      <a:tailEnd type="none" w="med" len="med"/>
+                    </a:lnR>
+                    <a:lnT w="6350" cap="flat" cmpd="sng" algn="ctr">
+                      <a:solidFill>
+                        <a:srgbClr val="BFBFBF"/>
+                      </a:solidFill>
+                      <a:prstDash val="solid"/>
+                      <a:round/>
+                      <a:headEnd type="none" w="med" len="med"/>
+                      <a:tailEnd type="none" w="med" len="med"/>
+                    </a:lnT>
+                    <a:lnB w="6350" cap="flat" cmpd="sng" algn="ctr">
+                      <a:solidFill>
+                        <a:srgbClr val="BFBFBF"/>
+                      </a:solidFill>
+                      <a:prstDash val="solid"/>
+                      <a:round/>
+                      <a:headEnd type="none" w="med" len="med"/>
+                      <a:tailEnd type="none" w="med" len="med"/>
+                    </a:lnB>
+                  </a:tcPr>
+                </a:tc>
+                <a:tc>
+                  <a:txBody>
+                    <a:bodyPr/>
+                    <a:lstStyle/>
+                    <a:p>
+                      <a:pPr algn="ctr" indent="0" marL="0">
+                        <a:buNone/>
+                      </a:pPr>
+                      <a:r>
+                        <a:rPr lang="en-US" sz="1200" b="1" dirty="0">
+                          <a:solidFill>
+                            <a:srgbClr val="1A1A1A"/>
+                          </a:solidFill>
+                          <a:latin typeface="Times New Roman" pitchFamily="34" charset="0"/>
+                          <a:ea typeface="Times New Roman" pitchFamily="34" charset="-122"/>
+                          <a:cs typeface="Times New Roman" pitchFamily="34" charset="-120"/>
+                        </a:rPr>
+                        <a:t>22,86</a:t>
                       </a:r>
                       <a:endParaRPr lang="en-US" sz="1200" dirty="0">
                         <a:latin typeface="Times New Roman" charset="0"/>
@@ -6143,7 +5740,7 @@
                           <a:ea typeface="Times New Roman" pitchFamily="34" charset="-122"/>
                           <a:cs typeface="Times New Roman" pitchFamily="34" charset="-120"/>
                         </a:rPr>
-                        <a:t>0,578</a:t>
+                        <a:t>0,586</a:t>
                       </a:r>
                       <a:endParaRPr lang="en-US" sz="1200" dirty="0">
                         <a:latin typeface="Times New Roman" charset="0"/>
@@ -6208,72 +5805,7 @@
                           <a:ea typeface="Times New Roman" pitchFamily="34" charset="-122"/>
                           <a:cs typeface="Times New Roman" pitchFamily="34" charset="-120"/>
                         </a:rPr>
-                        <a:t>1,360</a:t>
-                      </a:r>
-                      <a:endParaRPr lang="en-US" sz="1200" dirty="0">
-                        <a:latin typeface="Times New Roman" charset="0"/>
-                        <a:ea typeface="Times New Roman" charset="0"/>
-                        <a:cs typeface="Times New Roman" charset="0"/>
-                      </a:endParaRPr>
-                    </a:p>
-                  </a:txBody>
-                  <a:tcPr marL="91440" marR="91440" marT="45720" marB="45720" anchor="ctr">
-                    <a:lnL w="6350" cap="flat" cmpd="sng" algn="ctr">
-                      <a:solidFill>
-                        <a:srgbClr val="BFBFBF"/>
-                      </a:solidFill>
-                      <a:prstDash val="solid"/>
-                      <a:round/>
-                      <a:headEnd type="none" w="med" len="med"/>
-                      <a:tailEnd type="none" w="med" len="med"/>
-                    </a:lnL>
-                    <a:lnR w="6350" cap="flat" cmpd="sng" algn="ctr">
-                      <a:solidFill>
-                        <a:srgbClr val="BFBFBF"/>
-                      </a:solidFill>
-                      <a:prstDash val="solid"/>
-                      <a:round/>
-                      <a:headEnd type="none" w="med" len="med"/>
-                      <a:tailEnd type="none" w="med" len="med"/>
-                    </a:lnR>
-                    <a:lnT w="6350" cap="flat" cmpd="sng" algn="ctr">
-                      <a:solidFill>
-                        <a:srgbClr val="BFBFBF"/>
-                      </a:solidFill>
-                      <a:prstDash val="solid"/>
-                      <a:round/>
-                      <a:headEnd type="none" w="med" len="med"/>
-                      <a:tailEnd type="none" w="med" len="med"/>
-                    </a:lnT>
-                    <a:lnB w="6350" cap="flat" cmpd="sng" algn="ctr">
-                      <a:solidFill>
-                        <a:srgbClr val="BFBFBF"/>
-                      </a:solidFill>
-                      <a:prstDash val="solid"/>
-                      <a:round/>
-                      <a:headEnd type="none" w="med" len="med"/>
-                      <a:tailEnd type="none" w="med" len="med"/>
-                    </a:lnB>
-                  </a:tcPr>
-                </a:tc>
-                <a:tc>
-                  <a:txBody>
-                    <a:bodyPr/>
-                    <a:lstStyle/>
-                    <a:p>
-                      <a:pPr algn="ctr" indent="0" marL="0">
-                        <a:buNone/>
-                      </a:pPr>
-                      <a:r>
-                        <a:rPr lang="en-US" sz="1200" dirty="0">
-                          <a:solidFill>
-                            <a:srgbClr val="1A1A1A"/>
-                          </a:solidFill>
-                          <a:latin typeface="Times New Roman" pitchFamily="34" charset="0"/>
-                          <a:ea typeface="Times New Roman" pitchFamily="34" charset="-122"/>
-                          <a:cs typeface="Times New Roman" pitchFamily="34" charset="-120"/>
-                        </a:rPr>
-                        <a:t>0,334</a:t>
+                        <a:t>0,139</a:t>
                       </a:r>
                       <a:endParaRPr lang="en-US" sz="1200" dirty="0">
                         <a:latin typeface="Times New Roman" charset="0"/>
@@ -6397,136 +5929,6 @@
                         <a:buNone/>
                       </a:pPr>
                       <a:r>
-                        <a:rPr lang="en-US" sz="1200" dirty="0">
-                          <a:solidFill>
-                            <a:srgbClr val="1A1A1A"/>
-                          </a:solidFill>
-                          <a:latin typeface="Times New Roman" pitchFamily="34" charset="0"/>
-                          <a:ea typeface="Times New Roman" pitchFamily="34" charset="-122"/>
-                          <a:cs typeface="Times New Roman" pitchFamily="34" charset="-120"/>
-                        </a:rPr>
-                        <a:t>0,500</a:t>
-                      </a:r>
-                      <a:endParaRPr lang="en-US" sz="1200" dirty="0">
-                        <a:latin typeface="Times New Roman" charset="0"/>
-                        <a:ea typeface="Times New Roman" charset="0"/>
-                        <a:cs typeface="Times New Roman" charset="0"/>
-                      </a:endParaRPr>
-                    </a:p>
-                  </a:txBody>
-                  <a:tcPr marL="91440" marR="91440" marT="45720" marB="45720" anchor="ctr">
-                    <a:lnL w="6350" cap="flat" cmpd="sng" algn="ctr">
-                      <a:solidFill>
-                        <a:srgbClr val="BFBFBF"/>
-                      </a:solidFill>
-                      <a:prstDash val="solid"/>
-                      <a:round/>
-                      <a:headEnd type="none" w="med" len="med"/>
-                      <a:tailEnd type="none" w="med" len="med"/>
-                    </a:lnL>
-                    <a:lnR w="6350" cap="flat" cmpd="sng" algn="ctr">
-                      <a:solidFill>
-                        <a:srgbClr val="BFBFBF"/>
-                      </a:solidFill>
-                      <a:prstDash val="solid"/>
-                      <a:round/>
-                      <a:headEnd type="none" w="med" len="med"/>
-                      <a:tailEnd type="none" w="med" len="med"/>
-                    </a:lnR>
-                    <a:lnT w="6350" cap="flat" cmpd="sng" algn="ctr">
-                      <a:solidFill>
-                        <a:srgbClr val="BFBFBF"/>
-                      </a:solidFill>
-                      <a:prstDash val="solid"/>
-                      <a:round/>
-                      <a:headEnd type="none" w="med" len="med"/>
-                      <a:tailEnd type="none" w="med" len="med"/>
-                    </a:lnT>
-                    <a:lnB w="6350" cap="flat" cmpd="sng" algn="ctr">
-                      <a:solidFill>
-                        <a:srgbClr val="BFBFBF"/>
-                      </a:solidFill>
-                      <a:prstDash val="solid"/>
-                      <a:round/>
-                      <a:headEnd type="none" w="med" len="med"/>
-                      <a:tailEnd type="none" w="med" len="med"/>
-                    </a:lnB>
-                  </a:tcPr>
-                </a:tc>
-                <a:tc>
-                  <a:txBody>
-                    <a:bodyPr/>
-                    <a:lstStyle/>
-                    <a:p>
-                      <a:pPr algn="ctr" indent="0" marL="0">
-                        <a:buNone/>
-                      </a:pPr>
-                      <a:r>
-                        <a:rPr lang="en-US" sz="1200" b="1" dirty="0">
-                          <a:solidFill>
-                            <a:srgbClr val="8B1A1A"/>
-                          </a:solidFill>
-                          <a:latin typeface="Times New Roman" pitchFamily="34" charset="0"/>
-                          <a:ea typeface="Times New Roman" pitchFamily="34" charset="-122"/>
-                          <a:cs typeface="Times New Roman" pitchFamily="34" charset="-120"/>
-                        </a:rPr>
-                        <a:t>0,041</a:t>
-                      </a:r>
-                      <a:endParaRPr lang="en-US" sz="1200" dirty="0">
-                        <a:latin typeface="Times New Roman" charset="0"/>
-                        <a:ea typeface="Times New Roman" charset="0"/>
-                        <a:cs typeface="Times New Roman" charset="0"/>
-                      </a:endParaRPr>
-                    </a:p>
-                  </a:txBody>
-                  <a:tcPr marL="91440" marR="91440" marT="45720" marB="45720" anchor="ctr">
-                    <a:lnL w="6350" cap="flat" cmpd="sng" algn="ctr">
-                      <a:solidFill>
-                        <a:srgbClr val="BFBFBF"/>
-                      </a:solidFill>
-                      <a:prstDash val="solid"/>
-                      <a:round/>
-                      <a:headEnd type="none" w="med" len="med"/>
-                      <a:tailEnd type="none" w="med" len="med"/>
-                    </a:lnL>
-                    <a:lnR w="6350" cap="flat" cmpd="sng" algn="ctr">
-                      <a:solidFill>
-                        <a:srgbClr val="BFBFBF"/>
-                      </a:solidFill>
-                      <a:prstDash val="solid"/>
-                      <a:round/>
-                      <a:headEnd type="none" w="med" len="med"/>
-                      <a:tailEnd type="none" w="med" len="med"/>
-                    </a:lnR>
-                    <a:lnT w="6350" cap="flat" cmpd="sng" algn="ctr">
-                      <a:solidFill>
-                        <a:srgbClr val="BFBFBF"/>
-                      </a:solidFill>
-                      <a:prstDash val="solid"/>
-                      <a:round/>
-                      <a:headEnd type="none" w="med" len="med"/>
-                      <a:tailEnd type="none" w="med" len="med"/>
-                    </a:lnT>
-                    <a:lnB w="6350" cap="flat" cmpd="sng" algn="ctr">
-                      <a:solidFill>
-                        <a:srgbClr val="BFBFBF"/>
-                      </a:solidFill>
-                      <a:prstDash val="solid"/>
-                      <a:round/>
-                      <a:headEnd type="none" w="med" len="med"/>
-                      <a:tailEnd type="none" w="med" len="med"/>
-                    </a:lnB>
-                  </a:tcPr>
-                </a:tc>
-                <a:tc>
-                  <a:txBody>
-                    <a:bodyPr/>
-                    <a:lstStyle/>
-                    <a:p>
-                      <a:pPr algn="ctr" indent="0" marL="0">
-                        <a:buNone/>
-                      </a:pPr>
-                      <a:r>
                         <a:rPr lang="en-US" sz="1200" b="1" dirty="0">
                           <a:solidFill>
                             <a:srgbClr val="8B1A1A"/>
@@ -6600,7 +6002,7 @@
                           <a:ea typeface="Times New Roman" pitchFamily="34" charset="-122"/>
                           <a:cs typeface="Times New Roman" pitchFamily="34" charset="-120"/>
                         </a:rPr>
-                        <a:t>1,450</a:t>
+                        <a:t>18,73</a:t>
                       </a:r>
                       <a:endParaRPr lang="en-US" sz="1200" dirty="0">
                         <a:latin typeface="Times New Roman" charset="0"/>
@@ -6665,7 +6067,137 @@
                           <a:ea typeface="Times New Roman" pitchFamily="34" charset="-122"/>
                           <a:cs typeface="Times New Roman" pitchFamily="34" charset="-120"/>
                         </a:rPr>
-                        <a:t>0,368</a:t>
+                        <a:t>9,64</a:t>
+                      </a:r>
+                      <a:endParaRPr lang="en-US" sz="1200" dirty="0">
+                        <a:latin typeface="Times New Roman" charset="0"/>
+                        <a:ea typeface="Times New Roman" charset="0"/>
+                        <a:cs typeface="Times New Roman" charset="0"/>
+                      </a:endParaRPr>
+                    </a:p>
+                  </a:txBody>
+                  <a:tcPr marL="91440" marR="91440" marT="45720" marB="45720" anchor="ctr">
+                    <a:lnL w="6350" cap="flat" cmpd="sng" algn="ctr">
+                      <a:solidFill>
+                        <a:srgbClr val="BFBFBF"/>
+                      </a:solidFill>
+                      <a:prstDash val="solid"/>
+                      <a:round/>
+                      <a:headEnd type="none" w="med" len="med"/>
+                      <a:tailEnd type="none" w="med" len="med"/>
+                    </a:lnL>
+                    <a:lnR w="6350" cap="flat" cmpd="sng" algn="ctr">
+                      <a:solidFill>
+                        <a:srgbClr val="BFBFBF"/>
+                      </a:solidFill>
+                      <a:prstDash val="solid"/>
+                      <a:round/>
+                      <a:headEnd type="none" w="med" len="med"/>
+                      <a:tailEnd type="none" w="med" len="med"/>
+                    </a:lnR>
+                    <a:lnT w="6350" cap="flat" cmpd="sng" algn="ctr">
+                      <a:solidFill>
+                        <a:srgbClr val="BFBFBF"/>
+                      </a:solidFill>
+                      <a:prstDash val="solid"/>
+                      <a:round/>
+                      <a:headEnd type="none" w="med" len="med"/>
+                      <a:tailEnd type="none" w="med" len="med"/>
+                    </a:lnT>
+                    <a:lnB w="6350" cap="flat" cmpd="sng" algn="ctr">
+                      <a:solidFill>
+                        <a:srgbClr val="BFBFBF"/>
+                      </a:solidFill>
+                      <a:prstDash val="solid"/>
+                      <a:round/>
+                      <a:headEnd type="none" w="med" len="med"/>
+                      <a:tailEnd type="none" w="med" len="med"/>
+                    </a:lnB>
+                  </a:tcPr>
+                </a:tc>
+                <a:tc>
+                  <a:txBody>
+                    <a:bodyPr/>
+                    <a:lstStyle/>
+                    <a:p>
+                      <a:pPr algn="ctr" indent="0" marL="0">
+                        <a:buNone/>
+                      </a:pPr>
+                      <a:r>
+                        <a:rPr lang="en-US" sz="1200" dirty="0">
+                          <a:solidFill>
+                            <a:srgbClr val="1A1A1A"/>
+                          </a:solidFill>
+                          <a:latin typeface="Times New Roman" pitchFamily="34" charset="0"/>
+                          <a:ea typeface="Times New Roman" pitchFamily="34" charset="-122"/>
+                          <a:cs typeface="Times New Roman" pitchFamily="34" charset="-120"/>
+                        </a:rPr>
+                        <a:t>0,909</a:t>
+                      </a:r>
+                      <a:endParaRPr lang="en-US" sz="1200" dirty="0">
+                        <a:latin typeface="Times New Roman" charset="0"/>
+                        <a:ea typeface="Times New Roman" charset="0"/>
+                        <a:cs typeface="Times New Roman" charset="0"/>
+                      </a:endParaRPr>
+                    </a:p>
+                  </a:txBody>
+                  <a:tcPr marL="91440" marR="91440" marT="45720" marB="45720" anchor="ctr">
+                    <a:lnL w="6350" cap="flat" cmpd="sng" algn="ctr">
+                      <a:solidFill>
+                        <a:srgbClr val="BFBFBF"/>
+                      </a:solidFill>
+                      <a:prstDash val="solid"/>
+                      <a:round/>
+                      <a:headEnd type="none" w="med" len="med"/>
+                      <a:tailEnd type="none" w="med" len="med"/>
+                    </a:lnL>
+                    <a:lnR w="6350" cap="flat" cmpd="sng" algn="ctr">
+                      <a:solidFill>
+                        <a:srgbClr val="BFBFBF"/>
+                      </a:solidFill>
+                      <a:prstDash val="solid"/>
+                      <a:round/>
+                      <a:headEnd type="none" w="med" len="med"/>
+                      <a:tailEnd type="none" w="med" len="med"/>
+                    </a:lnR>
+                    <a:lnT w="6350" cap="flat" cmpd="sng" algn="ctr">
+                      <a:solidFill>
+                        <a:srgbClr val="BFBFBF"/>
+                      </a:solidFill>
+                      <a:prstDash val="solid"/>
+                      <a:round/>
+                      <a:headEnd type="none" w="med" len="med"/>
+                      <a:tailEnd type="none" w="med" len="med"/>
+                    </a:lnT>
+                    <a:lnB w="6350" cap="flat" cmpd="sng" algn="ctr">
+                      <a:solidFill>
+                        <a:srgbClr val="BFBFBF"/>
+                      </a:solidFill>
+                      <a:prstDash val="solid"/>
+                      <a:round/>
+                      <a:headEnd type="none" w="med" len="med"/>
+                      <a:tailEnd type="none" w="med" len="med"/>
+                    </a:lnB>
+                  </a:tcPr>
+                </a:tc>
+                <a:tc>
+                  <a:txBody>
+                    <a:bodyPr/>
+                    <a:lstStyle/>
+                    <a:p>
+                      <a:pPr algn="ctr" indent="0" marL="0">
+                        <a:buNone/>
+                      </a:pPr>
+                      <a:r>
+                        <a:rPr lang="en-US" sz="1200" dirty="0">
+                          <a:solidFill>
+                            <a:srgbClr val="1A1A1A"/>
+                          </a:solidFill>
+                          <a:latin typeface="Times New Roman" pitchFamily="34" charset="0"/>
+                          <a:ea typeface="Times New Roman" pitchFamily="34" charset="-122"/>
+                          <a:cs typeface="Times New Roman" pitchFamily="34" charset="-120"/>
+                        </a:rPr>
+                        <a:t>0,117</a:t>
                       </a:r>
                       <a:endParaRPr lang="en-US" sz="1200" dirty="0">
                         <a:latin typeface="Times New Roman" charset="0"/>
@@ -6755,7 +6287,7 @@
                 <a:ea typeface="Times New Roman" pitchFamily="34" charset="-122"/>
                 <a:cs typeface="Times New Roman" pitchFamily="34" charset="-120"/>
               </a:rPr>
-              <a:t>La propuesta logra la menor tasa de artefactos del estudio (Nabf = 0,041; 2,7 veces menos que el mejor rival) y la mayor similitud estructural (SSIM = 0,782).</a:t>
+              <a:t>La propuesta alcanza la mayor similitud estructural del estudio (SSIM = 0,782), significativa frente a los cinco métodos del estado del arte, y es segunda en información mutua con las fuentes (MI_ir = 0,909).</a:t>
             </a:r>
             <a:endParaRPr lang="en-US" sz="1250" dirty="0"/>
           </a:p>
@@ -6776,9 +6308,288 @@
                 <a:ea typeface="Times New Roman" pitchFamily="34" charset="-122"/>
                 <a:cs typeface="Times New Roman" pitchFamily="34" charset="-120"/>
               </a:rPr>
-              <a:t>Es segunda en Qabf, SCD y VIF, a milésimas del líder de cada métrica; cede en contraste bruto (EN, SD).</a:t>
+              <a:t>Es más conservadora en actividad y contraste (SF, SD, EN): prioriza la fidelidad sobre el realce.</a:t>
             </a:r>
             <a:endParaRPr lang="en-US" sz="1250" dirty="0"/>
+          </a:p>
+        </p:txBody>
+      </p:sp>
+    </p:spTree>
+  </p:cSld>
+  <p:clrMapOvr>
+    <a:masterClrMapping/>
+  </p:clrMapOvr>
+</p:sld>
+</file>
+
+<file path=ppt/slides/slide12.xml><?xml version="1.0" encoding="utf-8"?>
+<p:sld xmlns:a="http://schemas.openxmlformats.org/drawingml/2006/main" xmlns:r="http://schemas.openxmlformats.org/officeDocument/2006/relationships" xmlns:p="http://schemas.openxmlformats.org/presentationml/2006/main">
+  <p:cSld name="Slide 12">
+    <p:bg>
+      <p:bgPr>
+        <a:solidFill>
+          <a:srgbClr val="FFFFFF"/>
+        </a:solidFill>
+      </p:bgPr>
+    </p:bg>
+    <p:spTree>
+      <p:nvGrpSpPr>
+        <p:cNvPr id="1" name=""/>
+        <p:cNvGrpSpPr/>
+        <p:nvPr/>
+      </p:nvGrpSpPr>
+      <p:grpSpPr>
+        <a:xfrm>
+          <a:off x="0" y="0"/>
+          <a:ext cx="0" cy="0"/>
+          <a:chOff x="0" y="0"/>
+          <a:chExt cx="0" cy="0"/>
+        </a:xfrm>
+      </p:grpSpPr>
+      <p:sp>
+        <p:nvSpPr>
+          <p:cNvPr id="2" name="Text 0"/>
+          <p:cNvSpPr/>
+          <p:nvPr/>
+        </p:nvSpPr>
+        <p:spPr>
+          <a:xfrm>
+            <a:off x="457200" y="256032"/>
+            <a:ext cx="8229600" cy="502920"/>
+          </a:xfrm>
+          <a:prstGeom prst="rect">
+            <a:avLst/>
+          </a:prstGeom>
+          <a:noFill/>
+          <a:ln/>
+        </p:spPr>
+        <p:txBody>
+          <a:bodyPr wrap="square" lIns="0" tIns="0" rIns="0" bIns="0" rtlCol="0" anchor="ctr"/>
+          <a:lstStyle/>
+          <a:p>
+            <a:pPr indent="0" marL="0">
+              <a:buNone/>
+            </a:pPr>
+            <a:r>
+              <a:rPr lang="en-US" sz="2300" b="1" dirty="0">
+                <a:solidFill>
+                  <a:srgbClr val="1A1A1A"/>
+                </a:solidFill>
+                <a:latin typeface="Times New Roman" pitchFamily="34" charset="0"/>
+                <a:ea typeface="Times New Roman" pitchFamily="34" charset="-122"/>
+                <a:cs typeface="Times New Roman" pitchFamily="34" charset="-120"/>
+              </a:rPr>
+              <a:t>Análisis estadístico</a:t>
+            </a:r>
+            <a:endParaRPr lang="en-US" sz="2300" dirty="0"/>
+          </a:p>
+        </p:txBody>
+      </p:sp>
+      <p:sp>
+        <p:nvSpPr>
+          <p:cNvPr id="3" name="Text 1"/>
+          <p:cNvSpPr/>
+          <p:nvPr/>
+        </p:nvSpPr>
+        <p:spPr>
+          <a:xfrm>
+            <a:off x="8229600" y="4828032"/>
+            <a:ext cx="685800" cy="274320"/>
+          </a:xfrm>
+          <a:prstGeom prst="rect">
+            <a:avLst/>
+          </a:prstGeom>
+          <a:noFill/>
+          <a:ln/>
+        </p:spPr>
+        <p:txBody>
+          <a:bodyPr wrap="square" lIns="0" tIns="0" rIns="0" bIns="0" rtlCol="0" anchor="ctr"/>
+          <a:lstStyle/>
+          <a:p>
+            <a:pPr algn="r" indent="0" marL="0">
+              <a:buNone/>
+            </a:pPr>
+            <a:r>
+              <a:rPr lang="en-US" sz="900" dirty="0">
+                <a:solidFill>
+                  <a:srgbClr val="666666"/>
+                </a:solidFill>
+                <a:latin typeface="Times New Roman" pitchFamily="34" charset="0"/>
+                <a:ea typeface="Times New Roman" pitchFamily="34" charset="-122"/>
+                <a:cs typeface="Times New Roman" pitchFamily="34" charset="-120"/>
+              </a:rPr>
+              <a:t>12 / 19</a:t>
+            </a:r>
+            <a:endParaRPr lang="en-US" sz="900" dirty="0"/>
+          </a:p>
+        </p:txBody>
+      </p:sp>
+      <p:sp>
+        <p:nvSpPr>
+          <p:cNvPr id="4" name="Text 2"/>
+          <p:cNvSpPr/>
+          <p:nvPr/>
+        </p:nvSpPr>
+        <p:spPr>
+          <a:xfrm>
+            <a:off x="457200" y="914400"/>
+            <a:ext cx="8229600" cy="3931920"/>
+          </a:xfrm>
+          <a:prstGeom prst="rect">
+            <a:avLst/>
+          </a:prstGeom>
+          <a:noFill/>
+          <a:ln/>
+        </p:spPr>
+        <p:txBody>
+          <a:bodyPr wrap="square" lIns="0" tIns="0" rIns="0" bIns="0" rtlCol="0" anchor="t"/>
+          <a:lstStyle/>
+          <a:p>
+            <a:pPr marL="177800" indent="-177800">
+              <a:spcAft>
+                <a:spcPts val="900"/>
+              </a:spcAft>
+              <a:buSzPct val="100000"/>
+              <a:buChar char="•"/>
+            </a:pPr>
+            <a:r>
+              <a:rPr lang="en-US" sz="1300" b="1" dirty="0">
+                <a:solidFill>
+                  <a:srgbClr val="1A1A1A"/>
+                </a:solidFill>
+                <a:latin typeface="Times New Roman" pitchFamily="34" charset="0"/>
+                <a:ea typeface="Times New Roman" pitchFamily="34" charset="-122"/>
+                <a:cs typeface="Times New Roman" pitchFamily="34" charset="-120"/>
+              </a:rPr>
+              <a:t>Friedman: diferencias significativas en las nueve métricas (p &lt; 0,05).</a:t>
+            </a:r>
+            <a:endParaRPr lang="en-US" sz="1300" dirty="0"/>
+          </a:p>
+          <a:p>
+            <a:pPr marL="177800" indent="-177800">
+              <a:spcAft>
+                <a:spcPts val="900"/>
+              </a:spcAft>
+              <a:buSzPct val="100000"/>
+              <a:buChar char="•"/>
+            </a:pPr>
+            <a:r>
+              <a:rPr lang="en-US" sz="1300" dirty="0">
+                <a:solidFill>
+                  <a:srgbClr val="1A1A1A"/>
+                </a:solidFill>
+                <a:latin typeface="Times New Roman" pitchFamily="34" charset="0"/>
+                <a:ea typeface="Times New Roman" pitchFamily="34" charset="-122"/>
+                <a:cs typeface="Times New Roman" pitchFamily="34" charset="-120"/>
+              </a:rPr>
+              <a:t>Wilcoxon pareado (corrección de Holm), Propuesta vs. los 5 métodos del estado del arte:</a:t>
+            </a:r>
+            <a:endParaRPr lang="en-US" sz="1300" dirty="0"/>
+          </a:p>
+          <a:p>
+            <a:pPr lvl="1" marL="304800" indent="-152400">
+              <a:spcAft>
+                <a:spcPts val="900"/>
+              </a:spcAft>
+              <a:buSzPct val="100000"/>
+              <a:buChar char="–"/>
+            </a:pPr>
+            <a:r>
+              <a:rPr lang="en-US" sz="1300" dirty="0">
+                <a:solidFill>
+                  <a:srgbClr val="1A1A1A"/>
+                </a:solidFill>
+                <a:latin typeface="Times New Roman" pitchFamily="34" charset="0"/>
+                <a:ea typeface="Times New Roman" pitchFamily="34" charset="-122"/>
+                <a:cs typeface="Times New Roman" pitchFamily="34" charset="-120"/>
+              </a:rPr>
+              <a:t>SSIM: mejor y significativa frente a los 5 rivales.</a:t>
+            </a:r>
+            <a:endParaRPr lang="en-US" sz="1300" dirty="0"/>
+          </a:p>
+          <a:p>
+            <a:pPr lvl="1" marL="304800" indent="-152400">
+              <a:spcAft>
+                <a:spcPts val="900"/>
+              </a:spcAft>
+              <a:buSzPct val="100000"/>
+              <a:buChar char="–"/>
+            </a:pPr>
+            <a:r>
+              <a:rPr lang="en-US" sz="1300" dirty="0">
+                <a:solidFill>
+                  <a:srgbClr val="1A1A1A"/>
+                </a:solidFill>
+                <a:latin typeface="Times New Roman" pitchFamily="34" charset="0"/>
+                <a:ea typeface="Times New Roman" pitchFamily="34" charset="-122"/>
+                <a:cs typeface="Times New Roman" pitchFamily="34" charset="-120"/>
+              </a:rPr>
+              <a:t>Información mutua (MI_vis, MI_ir): mejor y significativa frente a la mayoría.</a:t>
+            </a:r>
+            <a:endParaRPr lang="en-US" sz="1300" dirty="0"/>
+          </a:p>
+          <a:p>
+            <a:pPr lvl="1" marL="304800" indent="-152400">
+              <a:spcAft>
+                <a:spcPts val="900"/>
+              </a:spcAft>
+              <a:buSzPct val="100000"/>
+              <a:buChar char="–"/>
+            </a:pPr>
+            <a:r>
+              <a:rPr lang="en-US" sz="1300" dirty="0">
+                <a:solidFill>
+                  <a:srgbClr val="1A1A1A"/>
+                </a:solidFill>
+                <a:latin typeface="Times New Roman" pitchFamily="34" charset="0"/>
+                <a:ea typeface="Times New Roman" pitchFamily="34" charset="-122"/>
+                <a:cs typeface="Times New Roman" pitchFamily="34" charset="-120"/>
+              </a:rPr>
+              <a:t>Cede en actividad y contraste (EN, SD, MG, SF): lideran los operadores de mayor realce.</a:t>
+            </a:r>
+            <a:endParaRPr lang="en-US" sz="1300" dirty="0"/>
+          </a:p>
+          <a:p>
+            <a:pPr marL="177800" indent="-177800">
+              <a:spcAft>
+                <a:spcPts val="900"/>
+              </a:spcAft>
+              <a:buSzPct val="100000"/>
+              <a:buChar char="•"/>
+            </a:pPr>
+            <a:r>
+              <a:rPr lang="en-US" sz="1300" dirty="0">
+                <a:solidFill>
+                  <a:srgbClr val="1A1A1A"/>
+                </a:solidFill>
+                <a:latin typeface="Times New Roman" pitchFamily="34" charset="0"/>
+                <a:ea typeface="Times New Roman" pitchFamily="34" charset="-122"/>
+                <a:cs typeface="Times New Roman" pitchFamily="34" charset="-120"/>
+              </a:rPr>
+              <a:t>Frente al Top-Hat clásico, la propuesta eleva la fidelidad estructural (SSIM 0,782 vs 0,578) e información mutua (MI_ir 0,909 vs 0,586), con significancia estadística.</a:t>
+            </a:r>
+            <a:endParaRPr lang="en-US" sz="1300" dirty="0"/>
+          </a:p>
+          <a:p>
+            <a:pPr marL="177800" indent="-177800">
+              <a:spcAft>
+                <a:spcPts val="900"/>
+              </a:spcAft>
+              <a:buSzPct val="100000"/>
+              <a:buChar char="•"/>
+            </a:pPr>
+            <a:r>
+              <a:rPr lang="en-US" sz="1300" dirty="0">
+                <a:solidFill>
+                  <a:srgbClr val="1A1A1A"/>
+                </a:solidFill>
+                <a:latin typeface="Times New Roman" pitchFamily="34" charset="0"/>
+                <a:ea typeface="Times New Roman" pitchFamily="34" charset="-122"/>
+                <a:cs typeface="Times New Roman" pitchFamily="34" charset="-120"/>
+              </a:rPr>
+              <a:t>Ranking global (9 métricas): LP 3,11 · DTCWT 3,78 · TH clásico 3,78 · RP 3,89 · DWT 4,22 · CVT 4,22 · Propuesta 5,00 — el ranking premia la actividad; la propuesta prioriza fidelidad estructural.</a:t>
+            </a:r>
+            <a:endParaRPr lang="en-US" sz="1300" dirty="0"/>
           </a:p>
         </p:txBody>
       </p:sp>
@@ -6847,7 +6658,7 @@
                 <a:ea typeface="Times New Roman" pitchFamily="34" charset="-122"/>
                 <a:cs typeface="Times New Roman" pitchFamily="34" charset="-120"/>
               </a:rPr>
-              <a:t>Análisis estadístico</a:t>
+              <a:t>8. Detección en LLVIP — mAP@0,5</a:t>
             </a:r>
             <a:endParaRPr lang="en-US" sz="2300" dirty="0"/>
           </a:p>
@@ -6886,22 +6697,46 @@
                 <a:ea typeface="Times New Roman" pitchFamily="34" charset="-122"/>
                 <a:cs typeface="Times New Roman" pitchFamily="34" charset="-120"/>
               </a:rPr>
-              <a:t>13 / 20</a:t>
+              <a:t>13 / 19</a:t>
             </a:r>
             <a:endParaRPr lang="en-US" sz="900" dirty="0"/>
           </a:p>
         </p:txBody>
       </p:sp>
-      <p:sp>
-        <p:nvSpPr>
-          <p:cNvPr id="4" name="Text 2"/>
+      <p:pic>
+        <p:nvPicPr>
+          <p:cNvPr id="4" name="Image 0" descr="C:\Users\Usuario\AppData\Local\Temp\claude\C--Users-Usuario-Documents-unv-mastertesis\fa0a2acc-a0da-4701-a920-18b20c70d3b2\scratchpad\pptx_build/assets/map_llvip.png">    </p:cNvPr>
+          <p:cNvPicPr>
+            <a:picLocks noChangeAspect="1"/>
+          </p:cNvPicPr>
+          <p:nvPr/>
+        </p:nvPicPr>
+        <p:blipFill>
+          <a:blip r:embed="rId1"/>
+          <a:stretch>
+            <a:fillRect/>
+          </a:stretch>
+        </p:blipFill>
+        <p:spPr>
+          <a:xfrm>
+            <a:off x="960120" y="822960"/>
+            <a:ext cx="7223760" cy="2761488"/>
+          </a:xfrm>
+          <a:prstGeom prst="rect">
+            <a:avLst/>
+          </a:prstGeom>
+        </p:spPr>
+      </p:pic>
+      <p:sp>
+        <p:nvSpPr>
+          <p:cNvPr id="5" name="Text 2"/>
           <p:cNvSpPr/>
           <p:nvPr/>
         </p:nvSpPr>
         <p:spPr>
           <a:xfrm>
-            <a:off x="457200" y="914400"/>
-            <a:ext cx="8229600" cy="3931920"/>
+            <a:off x="457200" y="3703320"/>
+            <a:ext cx="8229600" cy="1325880"/>
           </a:xfrm>
           <a:prstGeom prst="rect">
             <a:avLst/>
@@ -6915,13 +6750,13 @@
           <a:p>
             <a:pPr marL="177800" indent="-177800">
               <a:spcAft>
-                <a:spcPts val="900"/>
+                <a:spcPts val="500"/>
               </a:spcAft>
               <a:buSzPct val="100000"/>
               <a:buChar char="•"/>
             </a:pPr>
             <a:r>
-              <a:rPr lang="en-US" sz="1300" b="1" dirty="0">
+              <a:rPr lang="en-US" sz="1200" dirty="0">
                 <a:solidFill>
                   <a:srgbClr val="1A1A1A"/>
                 </a:solidFill>
@@ -6929,20 +6764,20 @@
                 <a:ea typeface="Times New Roman" pitchFamily="34" charset="-122"/>
                 <a:cs typeface="Times New Roman" pitchFamily="34" charset="-120"/>
               </a:rPr>
-              <a:t>Friedman: diferencias significativas en las 12 métricas (p &lt; 0,05).</a:t>
-            </a:r>
-            <a:endParaRPr lang="en-US" sz="1300" dirty="0"/>
+              <a:t>Toda fusión supera con claridad al visible solo (+0,12 a +0,14 en mAP@0,5); el IR solo lidera (0,957): en peatones nocturnos domina la firma térmica.</a:t>
+            </a:r>
+            <a:endParaRPr lang="en-US" sz="1200" dirty="0"/>
           </a:p>
           <a:p>
             <a:pPr marL="177800" indent="-177800">
               <a:spcAft>
-                <a:spcPts val="900"/>
+                <a:spcPts val="500"/>
               </a:spcAft>
               <a:buSzPct val="100000"/>
               <a:buChar char="•"/>
             </a:pPr>
             <a:r>
-              <a:rPr lang="en-US" sz="1300" dirty="0">
+              <a:rPr lang="en-US" sz="1200" dirty="0">
                 <a:solidFill>
                   <a:srgbClr val="1A1A1A"/>
                 </a:solidFill>
@@ -6950,83 +6785,20 @@
                 <a:ea typeface="Times New Roman" pitchFamily="34" charset="-122"/>
                 <a:cs typeface="Times New Roman" pitchFamily="34" charset="-120"/>
               </a:rPr>
-              <a:t>Wilcoxon pareado (corrección de Holm), Propuesta vs. los 5 métodos del estado del arte:</a:t>
-            </a:r>
-            <a:endParaRPr lang="en-US" sz="1300" dirty="0"/>
-          </a:p>
-          <a:p>
-            <a:pPr lvl="1" marL="304800" indent="-152400">
-              <a:spcAft>
-                <a:spcPts val="900"/>
-              </a:spcAft>
-              <a:buSzPct val="100000"/>
-              <a:buChar char="–"/>
-            </a:pPr>
-            <a:r>
-              <a:rPr lang="en-US" sz="1300" dirty="0">
-                <a:solidFill>
-                  <a:srgbClr val="1A1A1A"/>
-                </a:solidFill>
-                <a:latin typeface="Times New Roman" pitchFamily="34" charset="0"/>
-                <a:ea typeface="Times New Roman" pitchFamily="34" charset="-122"/>
-                <a:cs typeface="Times New Roman" pitchFamily="34" charset="-120"/>
-              </a:rPr>
-              <a:t>Nabf: mejor y significativa frente a los 5 rivales.</a:t>
-            </a:r>
-            <a:endParaRPr lang="en-US" sz="1300" dirty="0"/>
-          </a:p>
-          <a:p>
-            <a:pPr lvl="1" marL="304800" indent="-152400">
-              <a:spcAft>
-                <a:spcPts val="900"/>
-              </a:spcAft>
-              <a:buSzPct val="100000"/>
-              <a:buChar char="–"/>
-            </a:pPr>
-            <a:r>
-              <a:rPr lang="en-US" sz="1300" dirty="0">
-                <a:solidFill>
-                  <a:srgbClr val="1A1A1A"/>
-                </a:solidFill>
-                <a:latin typeface="Times New Roman" pitchFamily="34" charset="0"/>
-                <a:ea typeface="Times New Roman" pitchFamily="34" charset="-122"/>
-                <a:cs typeface="Times New Roman" pitchFamily="34" charset="-120"/>
-              </a:rPr>
-              <a:t>SSIM: mejor y significativa frente a los 5 rivales.</a:t>
-            </a:r>
-            <a:endParaRPr lang="en-US" sz="1300" dirty="0"/>
-          </a:p>
-          <a:p>
-            <a:pPr lvl="1" marL="304800" indent="-152400">
-              <a:spcAft>
-                <a:spcPts val="900"/>
-              </a:spcAft>
-              <a:buSzPct val="100000"/>
-              <a:buChar char="–"/>
-            </a:pPr>
-            <a:r>
-              <a:rPr lang="en-US" sz="1300" dirty="0">
-                <a:solidFill>
-                  <a:srgbClr val="1A1A1A"/>
-                </a:solidFill>
-                <a:latin typeface="Times New Roman" pitchFamily="34" charset="0"/>
-                <a:ea typeface="Times New Roman" pitchFamily="34" charset="-122"/>
-                <a:cs typeface="Times New Roman" pitchFamily="34" charset="-120"/>
-              </a:rPr>
-              <a:t>SCD y VIF: mejor y significativa frente a 3 de 5; Qabf frente a 2 de 5.</a:t>
-            </a:r>
-            <a:endParaRPr lang="en-US" sz="1300" dirty="0"/>
+              <a:t>La Propuesta Novedosa cae en la banda de las fusiones (0,936), pareja con el Top-Hat clásico (0,938), sin ser la líder.</a:t>
+            </a:r>
+            <a:endParaRPr lang="en-US" sz="1200" dirty="0"/>
           </a:p>
           <a:p>
             <a:pPr marL="177800" indent="-177800">
               <a:spcAft>
-                <a:spcPts val="900"/>
+                <a:spcPts val="500"/>
               </a:spcAft>
               <a:buSzPct val="100000"/>
               <a:buChar char="•"/>
             </a:pPr>
             <a:r>
-              <a:rPr lang="en-US" sz="1300" dirty="0">
+              <a:rPr lang="en-US" sz="1200" dirty="0">
                 <a:solidFill>
                   <a:srgbClr val="1A1A1A"/>
                 </a:solidFill>
@@ -7034,30 +6806,9 @@
                 <a:ea typeface="Times New Roman" pitchFamily="34" charset="-122"/>
                 <a:cs typeface="Times New Roman" pitchFamily="34" charset="-120"/>
               </a:rPr>
-              <a:t>Frente al Top-Hat clásico, la propuesta mejora en todas las métricas de calidad de fusión (Qabf 0,500 vs 0,305 · Nabf 0,041 vs 0,585 · SSIM 0,782 vs 0,578).</a:t>
-            </a:r>
-            <a:endParaRPr lang="en-US" sz="1300" dirty="0"/>
-          </a:p>
-          <a:p>
-            <a:pPr marL="177800" indent="-177800">
-              <a:spcAft>
-                <a:spcPts val="900"/>
-              </a:spcAft>
-              <a:buSzPct val="100000"/>
-              <a:buChar char="•"/>
-            </a:pPr>
-            <a:r>
-              <a:rPr lang="en-US" sz="1300" dirty="0">
-                <a:solidFill>
-                  <a:srgbClr val="1A1A1A"/>
-                </a:solidFill>
-                <a:latin typeface="Times New Roman" pitchFamily="34" charset="0"/>
-                <a:ea typeface="Times New Roman" pitchFamily="34" charset="-122"/>
-                <a:cs typeface="Times New Roman" pitchFamily="34" charset="-120"/>
-              </a:rPr>
-              <a:t>Ranking global (12 métricas): LP 3,17 · RP 3,50 · DTCWT 3,58 · Propuesta 3,92 · TH clásico 4,17 · DWT 4,75 · CVT 4,92 — óptimos de criterios distintos y complementarios.</a:t>
-            </a:r>
-            <a:endParaRPr lang="en-US" sz="1300" dirty="0"/>
+              <a:t>La calidad de imagen no se traslada automáticamente al mAP (H3 parcial).</a:t>
+            </a:r>
+            <a:endParaRPr lang="en-US" sz="1200" dirty="0"/>
           </a:p>
         </p:txBody>
       </p:sp>
@@ -7126,7 +6877,7 @@
                 <a:ea typeface="Times New Roman" pitchFamily="34" charset="-122"/>
                 <a:cs typeface="Times New Roman" pitchFamily="34" charset="-120"/>
               </a:rPr>
-              <a:t>8. Detección en LLVIP — mAP@0,5</a:t>
+              <a:t>Clases complementarias en M3FD — un detector único VIS+IR</a:t>
             </a:r>
             <a:endParaRPr lang="en-US" sz="2300" dirty="0"/>
           </a:p>
@@ -7165,7 +6916,7 @@
                 <a:ea typeface="Times New Roman" pitchFamily="34" charset="-122"/>
                 <a:cs typeface="Times New Roman" pitchFamily="34" charset="-120"/>
               </a:rPr>
-              <a:t>14 / 20</a:t>
+              <a:t>14 / 19</a:t>
             </a:r>
             <a:endParaRPr lang="en-US" sz="900" dirty="0"/>
           </a:p>
@@ -7173,7 +6924,7 @@
       </p:sp>
       <p:pic>
         <p:nvPicPr>
-          <p:cNvPr id="4" name="Image 0" descr="C:\Users\Usuario\AppData\Local\Temp\claude\C--Users-Usuario-Documents-unv-mastertesis\fa0a2acc-a0da-4701-a920-18b20c70d3b2\scratchpad\pptx_build/assets/map_llvip.png">    </p:cNvPr>
+          <p:cNvPr id="4" name="Image 0" descr="C:\Users\Usuario\AppData\Local\Temp\claude\C--Users-Usuario-Documents-unv-mastertesis\fa0a2acc-a0da-4701-a920-18b20c70d3b2\scratchpad\pptx_build/assets/m3fd_par.png">    </p:cNvPr>
           <p:cNvPicPr>
             <a:picLocks noChangeAspect="1"/>
           </p:cNvPicPr>
@@ -7187,8 +6938,8 @@
         </p:blipFill>
         <p:spPr>
           <a:xfrm>
-            <a:off x="960120" y="822960"/>
-            <a:ext cx="7223760" cy="2761488"/>
+            <a:off x="640080" y="868680"/>
+            <a:ext cx="7863840" cy="2944368"/>
           </a:xfrm>
           <a:prstGeom prst="rect">
             <a:avLst/>
@@ -7203,8 +6954,8 @@
         </p:nvSpPr>
         <p:spPr>
           <a:xfrm>
-            <a:off x="457200" y="3703320"/>
-            <a:ext cx="8229600" cy="1325880"/>
+            <a:off x="457200" y="3913632"/>
+            <a:ext cx="8229600" cy="1143000"/>
           </a:xfrm>
           <a:prstGeom prst="rect">
             <a:avLst/>
@@ -7218,13 +6969,13 @@
           <a:p>
             <a:pPr marL="177800" indent="-177800">
               <a:spcAft>
-                <a:spcPts val="500"/>
+                <a:spcPts val="400"/>
               </a:spcAft>
               <a:buSzPct val="100000"/>
               <a:buChar char="•"/>
             </a:pPr>
             <a:r>
-              <a:rPr lang="en-US" sz="1200" dirty="0">
+              <a:rPr lang="en-US" sz="1150" dirty="0">
                 <a:solidFill>
                   <a:srgbClr val="1A1A1A"/>
                 </a:solidFill>
@@ -7232,20 +6983,20 @@
                 <a:ea typeface="Times New Roman" pitchFamily="34" charset="-122"/>
                 <a:cs typeface="Times New Roman" pitchFamily="34" charset="-120"/>
               </a:rPr>
-              <a:t>Toda fusión supera con claridad al visible solo (+0,12 a +0,14 en mAP@0,5); el IR solo lidera (0,957): en peatones nocturnos domina la firma térmica.</a:t>
-            </a:r>
-            <a:endParaRPr lang="en-US" sz="1200" dirty="0"/>
+              <a:t>Complementariedad extrema: el IR domina People (0,220) pero es ciego a Lamp (0,018); el VIS es el espejo (0,178 / 0,135).</a:t>
+            </a:r>
+            <a:endParaRPr lang="en-US" sz="1150" dirty="0"/>
           </a:p>
           <a:p>
             <a:pPr marL="177800" indent="-177800">
               <a:spcAft>
-                <a:spcPts val="500"/>
+                <a:spcPts val="400"/>
               </a:spcAft>
               <a:buSzPct val="100000"/>
               <a:buChar char="•"/>
             </a:pPr>
             <a:r>
-              <a:rPr lang="en-US" sz="1200" dirty="0">
+              <a:rPr lang="en-US" sz="1150" b="1" dirty="0">
                 <a:solidFill>
                   <a:srgbClr val="1A1A1A"/>
                 </a:solidFill>
@@ -7253,20 +7004,20 @@
                 <a:ea typeface="Times New Roman" pitchFamily="34" charset="-122"/>
                 <a:cs typeface="Times New Roman" pitchFamily="34" charset="-120"/>
               </a:rPr>
-              <a:t>Las dos configuraciones de la propuesta caen en la banda de las fusiones: F_apt (0,936) y Fo (0,922), pareja con el clásico (0,938).</a:t>
-            </a:r>
-            <a:endParaRPr lang="en-US" sz="1200" dirty="0"/>
+              <a:t>Las mejores fusiones superan a AMBAS modalidades en el promedio del par (propuesta 0,162; RP 0,165 vs VIS 0,157 e IR 0,119): ambas clases en una sola imagen.</a:t>
+            </a:r>
+            <a:endParaRPr lang="en-US" sz="1150" dirty="0"/>
           </a:p>
           <a:p>
             <a:pPr marL="177800" indent="-177800">
               <a:spcAft>
-                <a:spcPts val="500"/>
+                <a:spcPts val="400"/>
               </a:spcAft>
               <a:buSzPct val="100000"/>
               <a:buChar char="•"/>
             </a:pPr>
             <a:r>
-              <a:rPr lang="en-US" sz="1200" dirty="0">
+              <a:rPr lang="en-US" sz="1150" dirty="0">
                 <a:solidFill>
                   <a:srgbClr val="1A1A1A"/>
                 </a:solidFill>
@@ -7274,9 +7025,9 @@
                 <a:ea typeface="Times New Roman" pitchFamily="34" charset="-122"/>
                 <a:cs typeface="Times New Roman" pitchFamily="34" charset="-120"/>
               </a:rPr>
-              <a:t>La calidad de imagen no se traslada automáticamente al mAP (H3 parcial).</a:t>
-            </a:r>
-            <a:endParaRPr lang="en-US" sz="1200" dirty="0"/>
+              <a:t>La propuesta es la mejor fusión en mAP global (0,239) y en People (0,207), manteniendo las luces cerca del visible: detecta ambos objetos en una sola imagen.</a:t>
+            </a:r>
+            <a:endParaRPr lang="en-US" sz="1150" dirty="0"/>
           </a:p>
         </p:txBody>
       </p:sp>
@@ -7345,7 +7096,7 @@
                 <a:ea typeface="Times New Roman" pitchFamily="34" charset="-122"/>
                 <a:cs typeface="Times New Roman" pitchFamily="34" charset="-120"/>
               </a:rPr>
-              <a:t>Clases complementarias en M3FD — un detector único VIS+IR</a:t>
+              <a:t>La prueba visual: ambas clases en una sola imagen</a:t>
             </a:r>
             <a:endParaRPr lang="en-US" sz="2300" dirty="0"/>
           </a:p>
@@ -7384,7 +7135,7 @@
                 <a:ea typeface="Times New Roman" pitchFamily="34" charset="-122"/>
                 <a:cs typeface="Times New Roman" pitchFamily="34" charset="-120"/>
               </a:rPr>
-              <a:t>15 / 20</a:t>
+              <a:t>15 / 19</a:t>
             </a:r>
             <a:endParaRPr lang="en-US" sz="900" dirty="0"/>
           </a:p>
@@ -7392,7 +7143,7 @@
       </p:sp>
       <p:pic>
         <p:nvPicPr>
-          <p:cNvPr id="4" name="Image 0" descr="C:\Users\Usuario\AppData\Local\Temp\claude\C--Users-Usuario-Documents-unv-mastertesis\fa0a2acc-a0da-4701-a920-18b20c70d3b2\scratchpad\pptx_build/assets/m3fd_par.png">    </p:cNvPr>
+          <p:cNvPr id="4" name="Image 0" descr="C:/Users/Usuario/Documents/unv/mastertesis/tesis_mciencias_datos/docs/figures/fig_m3fd_detecciones.png">    </p:cNvPr>
           <p:cNvPicPr>
             <a:picLocks noChangeAspect="1"/>
           </p:cNvPicPr>
@@ -7406,8 +7157,8 @@
         </p:blipFill>
         <p:spPr>
           <a:xfrm>
-            <a:off x="640080" y="868680"/>
-            <a:ext cx="7863840" cy="2944368"/>
+            <a:off x="1417320" y="822960"/>
+            <a:ext cx="6309360" cy="4069080"/>
           </a:xfrm>
           <a:prstGeom prst="rect">
             <a:avLst/>
@@ -7422,8 +7173,8 @@
         </p:nvSpPr>
         <p:spPr>
           <a:xfrm>
-            <a:off x="457200" y="3913632"/>
-            <a:ext cx="8229600" cy="1143000"/>
+            <a:off x="457200" y="4864608"/>
+            <a:ext cx="7680960" cy="256032"/>
           </a:xfrm>
           <a:prstGeom prst="rect">
             <a:avLst/>
@@ -7432,70 +7183,24 @@
           <a:ln/>
         </p:spPr>
         <p:txBody>
-          <a:bodyPr wrap="square" lIns="0" tIns="0" rIns="0" bIns="0" rtlCol="0" anchor="t"/>
-          <a:lstStyle/>
-          <a:p>
-            <a:pPr marL="177800" indent="-177800">
-              <a:spcAft>
-                <a:spcPts val="400"/>
-              </a:spcAft>
-              <a:buSzPct val="100000"/>
-              <a:buChar char="•"/>
-            </a:pPr>
-            <a:r>
-              <a:rPr lang="en-US" sz="1150" dirty="0">
-                <a:solidFill>
-                  <a:srgbClr val="1A1A1A"/>
-                </a:solidFill>
-                <a:latin typeface="Times New Roman" pitchFamily="34" charset="0"/>
-                <a:ea typeface="Times New Roman" pitchFamily="34" charset="-122"/>
-                <a:cs typeface="Times New Roman" pitchFamily="34" charset="-120"/>
-              </a:rPr>
-              <a:t>Complementariedad extrema: el IR domina People (0,220) pero es ciego a Lamp (0,018); el VIS es el espejo (0,178 / 0,135).</a:t>
-            </a:r>
-            <a:endParaRPr lang="en-US" sz="1150" dirty="0"/>
-          </a:p>
-          <a:p>
-            <a:pPr marL="177800" indent="-177800">
-              <a:spcAft>
-                <a:spcPts val="400"/>
-              </a:spcAft>
-              <a:buSzPct val="100000"/>
-              <a:buChar char="•"/>
-            </a:pPr>
-            <a:r>
-              <a:rPr lang="en-US" sz="1150" b="1" dirty="0">
-                <a:solidFill>
-                  <a:srgbClr val="1A1A1A"/>
-                </a:solidFill>
-                <a:latin typeface="Times New Roman" pitchFamily="34" charset="0"/>
-                <a:ea typeface="Times New Roman" pitchFamily="34" charset="-122"/>
-                <a:cs typeface="Times New Roman" pitchFamily="34" charset="-120"/>
-              </a:rPr>
-              <a:t>Las mejores fusiones superan a AMBAS modalidades en el promedio del par (propuesta 0,162; RP 0,165 vs VIS 0,157 e IR 0,119): ambas clases en una sola imagen.</a:t>
-            </a:r>
-            <a:endParaRPr lang="en-US" sz="1150" dirty="0"/>
-          </a:p>
-          <a:p>
-            <a:pPr marL="177800" indent="-177800">
-              <a:spcAft>
-                <a:spcPts val="400"/>
-              </a:spcAft>
-              <a:buSzPct val="100000"/>
-              <a:buChar char="•"/>
-            </a:pPr>
-            <a:r>
-              <a:rPr lang="en-US" sz="1150" dirty="0">
-                <a:solidFill>
-                  <a:srgbClr val="1A1A1A"/>
-                </a:solidFill>
-                <a:latin typeface="Times New Roman" pitchFamily="34" charset="0"/>
-                <a:ea typeface="Times New Roman" pitchFamily="34" charset="-122"/>
-                <a:cs typeface="Times New Roman" pitchFamily="34" charset="-120"/>
-              </a:rPr>
-              <a:t>La propuesta es la mejor fusión en mAP global (0,239) y en People (0,207); su óptimo F_apt supera al de Fo en las dos clases clave.</a:t>
-            </a:r>
-            <a:endParaRPr lang="en-US" sz="1150" dirty="0"/>
+          <a:bodyPr wrap="square" lIns="0" tIns="0" rIns="0" bIns="0" rtlCol="0" anchor="ctr"/>
+          <a:lstStyle/>
+          <a:p>
+            <a:pPr indent="0" marL="0">
+              <a:buNone/>
+            </a:pPr>
+            <a:r>
+              <a:rPr lang="en-US" sz="1050" i="1" dirty="0">
+                <a:solidFill>
+                  <a:srgbClr val="666666"/>
+                </a:solidFill>
+                <a:latin typeface="Times New Roman" pitchFamily="34" charset="0"/>
+                <a:ea typeface="Times New Roman" pitchFamily="34" charset="-122"/>
+                <a:cs typeface="Times New Roman" pitchFamily="34" charset="-120"/>
+              </a:rPr>
+              <a:t>Arriba: el VIS no detecta a nadie (0 personas) — la fusión las recupera. Abajo: el IR no ve ninguna luz — la fusión las conserva.</a:t>
+            </a:r>
+            <a:endParaRPr lang="en-US" sz="1050" dirty="0"/>
           </a:p>
         </p:txBody>
       </p:sp>
@@ -7564,7 +7269,7 @@
                 <a:ea typeface="Times New Roman" pitchFamily="34" charset="-122"/>
                 <a:cs typeface="Times New Roman" pitchFamily="34" charset="-120"/>
               </a:rPr>
-              <a:t>La prueba visual: ambas clases en una sola imagen</a:t>
+              <a:t>Contraste de hipótesis</a:t>
             </a:r>
             <a:endParaRPr lang="en-US" sz="2300" dirty="0"/>
           </a:p>
@@ -7603,46 +7308,22 @@
                 <a:ea typeface="Times New Roman" pitchFamily="34" charset="-122"/>
                 <a:cs typeface="Times New Roman" pitchFamily="34" charset="-120"/>
               </a:rPr>
-              <a:t>16 / 20</a:t>
+              <a:t>16 / 19</a:t>
             </a:r>
             <a:endParaRPr lang="en-US" sz="900" dirty="0"/>
           </a:p>
         </p:txBody>
       </p:sp>
-      <p:pic>
-        <p:nvPicPr>
-          <p:cNvPr id="4" name="Image 0" descr="C:/Users/Usuario/Documents/unv/mastertesis/tesis_mciencias_datos/docs/figures/fig_m3fd_detecciones.png">    </p:cNvPr>
-          <p:cNvPicPr>
-            <a:picLocks noChangeAspect="1"/>
-          </p:cNvPicPr>
+      <p:sp>
+        <p:nvSpPr>
+          <p:cNvPr id="4" name="Text 2"/>
+          <p:cNvSpPr/>
           <p:nvPr/>
-        </p:nvPicPr>
-        <p:blipFill>
-          <a:blip r:embed="rId1"/>
-          <a:stretch>
-            <a:fillRect/>
-          </a:stretch>
-        </p:blipFill>
+        </p:nvSpPr>
         <p:spPr>
           <a:xfrm>
-            <a:off x="1417320" y="822960"/>
-            <a:ext cx="6309360" cy="4069080"/>
-          </a:xfrm>
-          <a:prstGeom prst="rect">
-            <a:avLst/>
-          </a:prstGeom>
-        </p:spPr>
-      </p:pic>
-      <p:sp>
-        <p:nvSpPr>
-          <p:cNvPr id="5" name="Text 2"/>
-          <p:cNvSpPr/>
-          <p:nvPr/>
-        </p:nvSpPr>
-        <p:spPr>
-          <a:xfrm>
-            <a:off x="457200" y="4864608"/>
-            <a:ext cx="7680960" cy="256032"/>
+            <a:off x="457200" y="960120"/>
+            <a:ext cx="640080" cy="411480"/>
           </a:xfrm>
           <a:prstGeom prst="rect">
             <a:avLst/>
@@ -7658,17 +7339,329 @@
               <a:buNone/>
             </a:pPr>
             <a:r>
-              <a:rPr lang="en-US" sz="1050" i="1" dirty="0">
-                <a:solidFill>
-                  <a:srgbClr val="666666"/>
-                </a:solidFill>
-                <a:latin typeface="Times New Roman" pitchFamily="34" charset="0"/>
-                <a:ea typeface="Times New Roman" pitchFamily="34" charset="-122"/>
-                <a:cs typeface="Times New Roman" pitchFamily="34" charset="-120"/>
-              </a:rPr>
-              <a:t>Arriba: el VIS no detecta a nadie (0 personas) — la fusión las recupera. Abajo: el IR no ve ninguna luz — la fusión las conserva.</a:t>
-            </a:r>
-            <a:endParaRPr lang="en-US" sz="1050" dirty="0"/>
+              <a:rPr lang="en-US" sz="1900" b="1" dirty="0">
+                <a:solidFill>
+                  <a:srgbClr val="1A1A1A"/>
+                </a:solidFill>
+                <a:latin typeface="Times New Roman" pitchFamily="34" charset="0"/>
+                <a:ea typeface="Times New Roman" pitchFamily="34" charset="-122"/>
+                <a:cs typeface="Times New Roman" pitchFamily="34" charset="-120"/>
+              </a:rPr>
+              <a:t>H1</a:t>
+            </a:r>
+            <a:endParaRPr lang="en-US" sz="1900" dirty="0"/>
+          </a:p>
+        </p:txBody>
+      </p:sp>
+      <p:sp>
+        <p:nvSpPr>
+          <p:cNvPr id="5" name="Text 3"/>
+          <p:cNvSpPr/>
+          <p:nvPr/>
+        </p:nvSpPr>
+        <p:spPr>
+          <a:xfrm>
+            <a:off x="1143000" y="996696"/>
+            <a:ext cx="1417320" cy="365760"/>
+          </a:xfrm>
+          <a:prstGeom prst="rect">
+            <a:avLst/>
+          </a:prstGeom>
+          <a:noFill/>
+          <a:ln/>
+        </p:spPr>
+        <p:txBody>
+          <a:bodyPr wrap="square" lIns="0" tIns="0" rIns="0" bIns="0" rtlCol="0" anchor="ctr"/>
+          <a:lstStyle/>
+          <a:p>
+            <a:pPr indent="0" marL="0">
+              <a:buNone/>
+            </a:pPr>
+            <a:r>
+              <a:rPr lang="en-US" sz="1300" b="1" dirty="0">
+                <a:solidFill>
+                  <a:srgbClr val="1F5C2E"/>
+                </a:solidFill>
+                <a:latin typeface="Times New Roman" pitchFamily="34" charset="0"/>
+                <a:ea typeface="Times New Roman" pitchFamily="34" charset="-122"/>
+                <a:cs typeface="Times New Roman" pitchFamily="34" charset="-120"/>
+              </a:rPr>
+              <a:t>SOSTENIDA</a:t>
+            </a:r>
+            <a:endParaRPr lang="en-US" sz="1300" dirty="0"/>
+          </a:p>
+        </p:txBody>
+      </p:sp>
+      <p:sp>
+        <p:nvSpPr>
+          <p:cNvPr id="6" name="Text 4"/>
+          <p:cNvSpPr/>
+          <p:nvPr/>
+        </p:nvSpPr>
+        <p:spPr>
+          <a:xfrm>
+            <a:off x="2697480" y="960120"/>
+            <a:ext cx="5989320" cy="1143000"/>
+          </a:xfrm>
+          <a:prstGeom prst="rect">
+            <a:avLst/>
+          </a:prstGeom>
+          <a:noFill/>
+          <a:ln/>
+        </p:spPr>
+        <p:txBody>
+          <a:bodyPr wrap="square" lIns="0" tIns="0" rIns="0" bIns="0" rtlCol="0" anchor="t"/>
+          <a:lstStyle/>
+          <a:p>
+            <a:pPr indent="0" marL="0">
+              <a:buNone/>
+            </a:pPr>
+            <a:r>
+              <a:rPr lang="en-US" sz="1250" dirty="0">
+                <a:solidFill>
+                  <a:srgbClr val="1A1A1A"/>
+                </a:solidFill>
+                <a:latin typeface="Times New Roman" pitchFamily="34" charset="0"/>
+                <a:ea typeface="Times New Roman" pitchFamily="34" charset="-122"/>
+                <a:cs typeface="Times New Roman" pitchFamily="34" charset="-120"/>
+              </a:rPr>
+              <a:t>El banco disco + líneas con suma de ramas mejora la fidelidad estructural (SSIM 0,782 vs 0,578) y la información mutua (MI_ir 0,909 vs 0,586) frente al Top-Hat clásico, con significancia estadística (Wilcoxon–Holm).</a:t>
+            </a:r>
+            <a:endParaRPr lang="en-US" sz="1250" dirty="0"/>
+          </a:p>
+        </p:txBody>
+      </p:sp>
+      <p:sp>
+        <p:nvSpPr>
+          <p:cNvPr id="7" name="Text 5"/>
+          <p:cNvSpPr/>
+          <p:nvPr/>
+        </p:nvSpPr>
+        <p:spPr>
+          <a:xfrm>
+            <a:off x="457200" y="2258568"/>
+            <a:ext cx="640080" cy="411480"/>
+          </a:xfrm>
+          <a:prstGeom prst="rect">
+            <a:avLst/>
+          </a:prstGeom>
+          <a:noFill/>
+          <a:ln/>
+        </p:spPr>
+        <p:txBody>
+          <a:bodyPr wrap="square" lIns="0" tIns="0" rIns="0" bIns="0" rtlCol="0" anchor="ctr"/>
+          <a:lstStyle/>
+          <a:p>
+            <a:pPr indent="0" marL="0">
+              <a:buNone/>
+            </a:pPr>
+            <a:r>
+              <a:rPr lang="en-US" sz="1900" b="1" dirty="0">
+                <a:solidFill>
+                  <a:srgbClr val="1A1A1A"/>
+                </a:solidFill>
+                <a:latin typeface="Times New Roman" pitchFamily="34" charset="0"/>
+                <a:ea typeface="Times New Roman" pitchFamily="34" charset="-122"/>
+                <a:cs typeface="Times New Roman" pitchFamily="34" charset="-120"/>
+              </a:rPr>
+              <a:t>H2</a:t>
+            </a:r>
+            <a:endParaRPr lang="en-US" sz="1900" dirty="0"/>
+          </a:p>
+        </p:txBody>
+      </p:sp>
+      <p:sp>
+        <p:nvSpPr>
+          <p:cNvPr id="8" name="Text 6"/>
+          <p:cNvSpPr/>
+          <p:nvPr/>
+        </p:nvSpPr>
+        <p:spPr>
+          <a:xfrm>
+            <a:off x="1143000" y="2295144"/>
+            <a:ext cx="1417320" cy="365760"/>
+          </a:xfrm>
+          <a:prstGeom prst="rect">
+            <a:avLst/>
+          </a:prstGeom>
+          <a:noFill/>
+          <a:ln/>
+        </p:spPr>
+        <p:txBody>
+          <a:bodyPr wrap="square" lIns="0" tIns="0" rIns="0" bIns="0" rtlCol="0" anchor="ctr"/>
+          <a:lstStyle/>
+          <a:p>
+            <a:pPr indent="0" marL="0">
+              <a:buNone/>
+            </a:pPr>
+            <a:r>
+              <a:rPr lang="en-US" sz="1300" b="1" dirty="0">
+                <a:solidFill>
+                  <a:srgbClr val="1F5C2E"/>
+                </a:solidFill>
+                <a:latin typeface="Times New Roman" pitchFamily="34" charset="0"/>
+                <a:ea typeface="Times New Roman" pitchFamily="34" charset="-122"/>
+                <a:cs typeface="Times New Roman" pitchFamily="34" charset="-120"/>
+              </a:rPr>
+              <a:t>SOSTENIDA</a:t>
+            </a:r>
+            <a:endParaRPr lang="en-US" sz="1300" dirty="0"/>
+          </a:p>
+        </p:txBody>
+      </p:sp>
+      <p:sp>
+        <p:nvSpPr>
+          <p:cNvPr id="9" name="Text 7"/>
+          <p:cNvSpPr/>
+          <p:nvPr/>
+        </p:nvSpPr>
+        <p:spPr>
+          <a:xfrm>
+            <a:off x="2697480" y="2258568"/>
+            <a:ext cx="5989320" cy="1143000"/>
+          </a:xfrm>
+          <a:prstGeom prst="rect">
+            <a:avLst/>
+          </a:prstGeom>
+          <a:noFill/>
+          <a:ln/>
+        </p:spPr>
+        <p:txBody>
+          <a:bodyPr wrap="square" lIns="0" tIns="0" rIns="0" bIns="0" rtlCol="0" anchor="t"/>
+          <a:lstStyle/>
+          <a:p>
+            <a:pPr indent="0" marL="0">
+              <a:buNone/>
+            </a:pPr>
+            <a:r>
+              <a:rPr lang="en-US" sz="1250" dirty="0">
+                <a:solidFill>
+                  <a:srgbClr val="1A1A1A"/>
+                </a:solidFill>
+                <a:latin typeface="Times New Roman" pitchFamily="34" charset="0"/>
+                <a:ea typeface="Times New Roman" pitchFamily="34" charset="-122"/>
+                <a:cs typeface="Times New Roman" pitchFamily="34" charset="-120"/>
+              </a:rPr>
+              <a:t>La configuración hallada por PSO (r = 25; m = 0,0703) supera a la parametrización manual del operador clásico (r = 5; m = 1) en todas las métricas de calidad de fusión.</a:t>
+            </a:r>
+            <a:endParaRPr lang="en-US" sz="1250" dirty="0"/>
+          </a:p>
+        </p:txBody>
+      </p:sp>
+      <p:sp>
+        <p:nvSpPr>
+          <p:cNvPr id="10" name="Text 8"/>
+          <p:cNvSpPr/>
+          <p:nvPr/>
+        </p:nvSpPr>
+        <p:spPr>
+          <a:xfrm>
+            <a:off x="457200" y="3557016"/>
+            <a:ext cx="640080" cy="411480"/>
+          </a:xfrm>
+          <a:prstGeom prst="rect">
+            <a:avLst/>
+          </a:prstGeom>
+          <a:noFill/>
+          <a:ln/>
+        </p:spPr>
+        <p:txBody>
+          <a:bodyPr wrap="square" lIns="0" tIns="0" rIns="0" bIns="0" rtlCol="0" anchor="ctr"/>
+          <a:lstStyle/>
+          <a:p>
+            <a:pPr indent="0" marL="0">
+              <a:buNone/>
+            </a:pPr>
+            <a:r>
+              <a:rPr lang="en-US" sz="1900" b="1" dirty="0">
+                <a:solidFill>
+                  <a:srgbClr val="1A1A1A"/>
+                </a:solidFill>
+                <a:latin typeface="Times New Roman" pitchFamily="34" charset="0"/>
+                <a:ea typeface="Times New Roman" pitchFamily="34" charset="-122"/>
+                <a:cs typeface="Times New Roman" pitchFamily="34" charset="-120"/>
+              </a:rPr>
+              <a:t>H3</a:t>
+            </a:r>
+            <a:endParaRPr lang="en-US" sz="1900" dirty="0"/>
+          </a:p>
+        </p:txBody>
+      </p:sp>
+      <p:sp>
+        <p:nvSpPr>
+          <p:cNvPr id="11" name="Text 9"/>
+          <p:cNvSpPr/>
+          <p:nvPr/>
+        </p:nvSpPr>
+        <p:spPr>
+          <a:xfrm>
+            <a:off x="1143000" y="3593592"/>
+            <a:ext cx="1417320" cy="365760"/>
+          </a:xfrm>
+          <a:prstGeom prst="rect">
+            <a:avLst/>
+          </a:prstGeom>
+          <a:noFill/>
+          <a:ln/>
+        </p:spPr>
+        <p:txBody>
+          <a:bodyPr wrap="square" lIns="0" tIns="0" rIns="0" bIns="0" rtlCol="0" anchor="ctr"/>
+          <a:lstStyle/>
+          <a:p>
+            <a:pPr indent="0" marL="0">
+              <a:buNone/>
+            </a:pPr>
+            <a:r>
+              <a:rPr lang="en-US" sz="1300" b="1" dirty="0">
+                <a:solidFill>
+                  <a:srgbClr val="8B1A1A"/>
+                </a:solidFill>
+                <a:latin typeface="Times New Roman" pitchFamily="34" charset="0"/>
+                <a:ea typeface="Times New Roman" pitchFamily="34" charset="-122"/>
+                <a:cs typeface="Times New Roman" pitchFamily="34" charset="-120"/>
+              </a:rPr>
+              <a:t>PARCIAL</a:t>
+            </a:r>
+            <a:endParaRPr lang="en-US" sz="1300" dirty="0"/>
+          </a:p>
+        </p:txBody>
+      </p:sp>
+      <p:sp>
+        <p:nvSpPr>
+          <p:cNvPr id="12" name="Text 10"/>
+          <p:cNvSpPr/>
+          <p:nvPr/>
+        </p:nvSpPr>
+        <p:spPr>
+          <a:xfrm>
+            <a:off x="2697480" y="3557016"/>
+            <a:ext cx="5989320" cy="1143000"/>
+          </a:xfrm>
+          <a:prstGeom prst="rect">
+            <a:avLst/>
+          </a:prstGeom>
+          <a:noFill/>
+          <a:ln/>
+        </p:spPr>
+        <p:txBody>
+          <a:bodyPr wrap="square" lIns="0" tIns="0" rIns="0" bIns="0" rtlCol="0" anchor="t"/>
+          <a:lstStyle/>
+          <a:p>
+            <a:pPr indent="0" marL="0">
+              <a:buNone/>
+            </a:pPr>
+            <a:r>
+              <a:rPr lang="en-US" sz="1250" dirty="0">
+                <a:solidFill>
+                  <a:srgbClr val="1A1A1A"/>
+                </a:solidFill>
+                <a:latin typeface="Times New Roman" pitchFamily="34" charset="0"/>
+                <a:ea typeface="Times New Roman" pitchFamily="34" charset="-122"/>
+                <a:cs typeface="Times New Roman" pitchFamily="34" charset="-120"/>
+              </a:rPr>
+              <a:t>La fusión supera al visible solo en detección, pero ninguna fusión supera al infrarrojo solo; la mejor calidad de imagen no garantiza el mejor mAP.</a:t>
+            </a:r>
+            <a:endParaRPr lang="en-US" sz="1250" dirty="0"/>
           </a:p>
         </p:txBody>
       </p:sp>
@@ -7737,7 +7730,7 @@
                 <a:ea typeface="Times New Roman" pitchFamily="34" charset="-122"/>
                 <a:cs typeface="Times New Roman" pitchFamily="34" charset="-120"/>
               </a:rPr>
-              <a:t>Contraste de hipótesis</a:t>
+              <a:t>9. Conclusiones</a:t>
             </a:r>
             <a:endParaRPr lang="en-US" sz="2300" dirty="0"/>
           </a:p>
@@ -7776,7 +7769,7 @@
                 <a:ea typeface="Times New Roman" pitchFamily="34" charset="-122"/>
                 <a:cs typeface="Times New Roman" pitchFamily="34" charset="-120"/>
               </a:rPr>
-              <a:t>17 / 20</a:t>
+              <a:t>17 / 19</a:t>
             </a:r>
             <a:endParaRPr lang="en-US" sz="900" dirty="0"/>
           </a:p>
@@ -7790,8 +7783,8 @@
         </p:nvSpPr>
         <p:spPr>
           <a:xfrm>
-            <a:off x="457200" y="960120"/>
-            <a:ext cx="640080" cy="411480"/>
+            <a:off x="457200" y="914400"/>
+            <a:ext cx="8229600" cy="3931920"/>
           </a:xfrm>
           <a:prstGeom prst="rect">
             <a:avLst/>
@@ -7800,14 +7793,18 @@
           <a:ln/>
         </p:spPr>
         <p:txBody>
-          <a:bodyPr wrap="square" lIns="0" tIns="0" rIns="0" bIns="0" rtlCol="0" anchor="ctr"/>
-          <a:lstStyle/>
-          <a:p>
-            <a:pPr indent="0" marL="0">
-              <a:buNone/>
-            </a:pPr>
-            <a:r>
-              <a:rPr lang="en-US" sz="1900" b="1" dirty="0">
+          <a:bodyPr wrap="square" lIns="0" tIns="0" rIns="0" bIns="0" rtlCol="0" anchor="t"/>
+          <a:lstStyle/>
+          <a:p>
+            <a:pPr marL="177800" indent="-177800">
+              <a:spcAft>
+                <a:spcPts val="1100"/>
+              </a:spcAft>
+              <a:buSzPct val="100000"/>
+              <a:buChar char="•"/>
+            </a:pPr>
+            <a:r>
+              <a:rPr lang="en-US" sz="1350" dirty="0">
                 <a:solidFill>
                   <a:srgbClr val="1A1A1A"/>
                 </a:solidFill>
@@ -7815,77 +7812,20 @@
                 <a:ea typeface="Times New Roman" pitchFamily="34" charset="-122"/>
                 <a:cs typeface="Times New Roman" pitchFamily="34" charset="-120"/>
               </a:rPr>
-              <a:t>H1</a:t>
-            </a:r>
-            <a:endParaRPr lang="en-US" sz="1900" dirty="0"/>
-          </a:p>
-        </p:txBody>
-      </p:sp>
-      <p:sp>
-        <p:nvSpPr>
-          <p:cNvPr id="5" name="Text 3"/>
-          <p:cNvSpPr/>
-          <p:nvPr/>
-        </p:nvSpPr>
-        <p:spPr>
-          <a:xfrm>
-            <a:off x="1143000" y="996696"/>
-            <a:ext cx="1417320" cy="365760"/>
-          </a:xfrm>
-          <a:prstGeom prst="rect">
-            <a:avLst/>
-          </a:prstGeom>
-          <a:noFill/>
-          <a:ln/>
-        </p:spPr>
-        <p:txBody>
-          <a:bodyPr wrap="square" lIns="0" tIns="0" rIns="0" bIns="0" rtlCol="0" anchor="ctr"/>
-          <a:lstStyle/>
-          <a:p>
-            <a:pPr indent="0" marL="0">
-              <a:buNone/>
-            </a:pPr>
-            <a:r>
-              <a:rPr lang="en-US" sz="1300" b="1" dirty="0">
-                <a:solidFill>
-                  <a:srgbClr val="1F5C2E"/>
-                </a:solidFill>
-                <a:latin typeface="Times New Roman" pitchFamily="34" charset="0"/>
-                <a:ea typeface="Times New Roman" pitchFamily="34" charset="-122"/>
-                <a:cs typeface="Times New Roman" pitchFamily="34" charset="-120"/>
-              </a:rPr>
-              <a:t>SOSTENIDA</a:t>
-            </a:r>
-            <a:endParaRPr lang="en-US" sz="1300" dirty="0"/>
-          </a:p>
-        </p:txBody>
-      </p:sp>
-      <p:sp>
-        <p:nvSpPr>
-          <p:cNvPr id="6" name="Text 4"/>
-          <p:cNvSpPr/>
-          <p:nvPr/>
-        </p:nvSpPr>
-        <p:spPr>
-          <a:xfrm>
-            <a:off x="2697480" y="960120"/>
-            <a:ext cx="5989320" cy="1143000"/>
-          </a:xfrm>
-          <a:prstGeom prst="rect">
-            <a:avLst/>
-          </a:prstGeom>
-          <a:noFill/>
-          <a:ln/>
-        </p:spPr>
-        <p:txBody>
-          <a:bodyPr wrap="square" lIns="0" tIns="0" rIns="0" bIns="0" rtlCol="0" anchor="t"/>
-          <a:lstStyle/>
-          <a:p>
-            <a:pPr indent="0" marL="0">
-              <a:buNone/>
-            </a:pPr>
-            <a:r>
-              <a:rPr lang="en-US" sz="1250" dirty="0">
+              <a:t>Se formuló e implementó de forma reproducible un operador Top-Hat de una sola escala con banco de disco + líneas orientadas y suma de ramas.</a:t>
+            </a:r>
+            <a:endParaRPr lang="en-US" sz="1350" dirty="0"/>
+          </a:p>
+          <a:p>
+            <a:pPr marL="177800" indent="-177800">
+              <a:spcAft>
+                <a:spcPts val="1100"/>
+              </a:spcAft>
+              <a:buSzPct val="100000"/>
+              <a:buChar char="•"/>
+            </a:pPr>
+            <a:r>
+              <a:rPr lang="en-US" sz="1350" dirty="0">
                 <a:solidFill>
                   <a:srgbClr val="1A1A1A"/>
                 </a:solidFill>
@@ -7893,38 +7833,20 @@
                 <a:ea typeface="Times New Roman" pitchFamily="34" charset="-122"/>
                 <a:cs typeface="Times New Roman" pitchFamily="34" charset="-120"/>
               </a:rPr>
-              <a:t>El banco disco + líneas con suma de ramas mejora SSIM (0,782 vs 0,578) y reduce Nabf (0,041 vs 0,585) frente al Top-Hat clásico, con significancia estadística (Wilcoxon–Holm).</a:t>
-            </a:r>
-            <a:endParaRPr lang="en-US" sz="1250" dirty="0"/>
-          </a:p>
-        </p:txBody>
-      </p:sp>
-      <p:sp>
-        <p:nvSpPr>
-          <p:cNvPr id="7" name="Text 5"/>
-          <p:cNvSpPr/>
-          <p:nvPr/>
-        </p:nvSpPr>
-        <p:spPr>
-          <a:xfrm>
-            <a:off x="457200" y="2258568"/>
-            <a:ext cx="640080" cy="411480"/>
-          </a:xfrm>
-          <a:prstGeom prst="rect">
-            <a:avLst/>
-          </a:prstGeom>
-          <a:noFill/>
-          <a:ln/>
-        </p:spPr>
-        <p:txBody>
-          <a:bodyPr wrap="square" lIns="0" tIns="0" rIns="0" bIns="0" rtlCol="0" anchor="ctr"/>
-          <a:lstStyle/>
-          <a:p>
-            <a:pPr indent="0" marL="0">
-              <a:buNone/>
-            </a:pPr>
-            <a:r>
-              <a:rPr lang="en-US" sz="1900" b="1" dirty="0">
+              <a:t>El barrido PSO de 25 configuraciones (aptitud publicada F_o) halló el óptimo r = 25, m ≈ 0,07 (F_o = 1,7654) de manera consistente.</a:t>
+            </a:r>
+            <a:endParaRPr lang="en-US" sz="1350" dirty="0"/>
+          </a:p>
+          <a:p>
+            <a:pPr marL="177800" indent="-177800">
+              <a:spcAft>
+                <a:spcPts val="1100"/>
+              </a:spcAft>
+              <a:buSzPct val="100000"/>
+              <a:buChar char="•"/>
+            </a:pPr>
+            <a:r>
+              <a:rPr lang="en-US" sz="1350" dirty="0">
                 <a:solidFill>
                   <a:srgbClr val="1A1A1A"/>
                 </a:solidFill>
@@ -7932,77 +7854,20 @@
                 <a:ea typeface="Times New Roman" pitchFamily="34" charset="-122"/>
                 <a:cs typeface="Times New Roman" pitchFamily="34" charset="-120"/>
               </a:rPr>
-              <a:t>H2</a:t>
-            </a:r>
-            <a:endParaRPr lang="en-US" sz="1900" dirty="0"/>
-          </a:p>
-        </p:txBody>
-      </p:sp>
-      <p:sp>
-        <p:nvSpPr>
-          <p:cNvPr id="8" name="Text 6"/>
-          <p:cNvSpPr/>
-          <p:nvPr/>
-        </p:nvSpPr>
-        <p:spPr>
-          <a:xfrm>
-            <a:off x="1143000" y="2295144"/>
-            <a:ext cx="1417320" cy="365760"/>
-          </a:xfrm>
-          <a:prstGeom prst="rect">
-            <a:avLst/>
-          </a:prstGeom>
-          <a:noFill/>
-          <a:ln/>
-        </p:spPr>
-        <p:txBody>
-          <a:bodyPr wrap="square" lIns="0" tIns="0" rIns="0" bIns="0" rtlCol="0" anchor="ctr"/>
-          <a:lstStyle/>
-          <a:p>
-            <a:pPr indent="0" marL="0">
-              <a:buNone/>
-            </a:pPr>
-            <a:r>
-              <a:rPr lang="en-US" sz="1300" b="1" dirty="0">
-                <a:solidFill>
-                  <a:srgbClr val="1F5C2E"/>
-                </a:solidFill>
-                <a:latin typeface="Times New Roman" pitchFamily="34" charset="0"/>
-                <a:ea typeface="Times New Roman" pitchFamily="34" charset="-122"/>
-                <a:cs typeface="Times New Roman" pitchFamily="34" charset="-120"/>
-              </a:rPr>
-              <a:t>SOSTENIDA</a:t>
-            </a:r>
-            <a:endParaRPr lang="en-US" sz="1300" dirty="0"/>
-          </a:p>
-        </p:txBody>
-      </p:sp>
-      <p:sp>
-        <p:nvSpPr>
-          <p:cNvPr id="9" name="Text 7"/>
-          <p:cNvSpPr/>
-          <p:nvPr/>
-        </p:nvSpPr>
-        <p:spPr>
-          <a:xfrm>
-            <a:off x="2697480" y="2258568"/>
-            <a:ext cx="5989320" cy="1143000"/>
-          </a:xfrm>
-          <a:prstGeom prst="rect">
-            <a:avLst/>
-          </a:prstGeom>
-          <a:noFill/>
-          <a:ln/>
-        </p:spPr>
-        <p:txBody>
-          <a:bodyPr wrap="square" lIns="0" tIns="0" rIns="0" bIns="0" rtlCol="0" anchor="t"/>
-          <a:lstStyle/>
-          <a:p>
-            <a:pPr indent="0" marL="0">
-              <a:buNone/>
-            </a:pPr>
-            <a:r>
-              <a:rPr lang="en-US" sz="1250" dirty="0">
+              <a:t>La propuesta alcanza la mayor similitud estructural del benchmark (SSIM 0,782, significativa frente a los 5 métodos del estado del arte) y es segunda en información mutua con las fuentes.</a:t>
+            </a:r>
+            <a:endParaRPr lang="en-US" sz="1350" dirty="0"/>
+          </a:p>
+          <a:p>
+            <a:pPr marL="177800" indent="-177800">
+              <a:spcAft>
+                <a:spcPts val="1100"/>
+              </a:spcAft>
+              <a:buSzPct val="100000"/>
+              <a:buChar char="•"/>
+            </a:pPr>
+            <a:r>
+              <a:rPr lang="en-US" sz="1350" dirty="0">
                 <a:solidFill>
                   <a:srgbClr val="1A1A1A"/>
                 </a:solidFill>
@@ -8010,38 +7875,20 @@
                 <a:ea typeface="Times New Roman" pitchFamily="34" charset="-122"/>
                 <a:cs typeface="Times New Roman" pitchFamily="34" charset="-120"/>
               </a:rPr>
-              <a:t>La configuración hallada por PSO (r = 25; m = 0,0703) supera a la parametrización manual del operador clásico (r = 5; m = 1) en todas las métricas de calidad de fusión.</a:t>
-            </a:r>
-            <a:endParaRPr lang="en-US" sz="1250" dirty="0"/>
-          </a:p>
-        </p:txBody>
-      </p:sp>
-      <p:sp>
-        <p:nvSpPr>
-          <p:cNvPr id="10" name="Text 8"/>
-          <p:cNvSpPr/>
-          <p:nvPr/>
-        </p:nvSpPr>
-        <p:spPr>
-          <a:xfrm>
-            <a:off x="457200" y="3557016"/>
-            <a:ext cx="640080" cy="411480"/>
-          </a:xfrm>
-          <a:prstGeom prst="rect">
-            <a:avLst/>
-          </a:prstGeom>
-          <a:noFill/>
-          <a:ln/>
-        </p:spPr>
-        <p:txBody>
-          <a:bodyPr wrap="square" lIns="0" tIns="0" rIns="0" bIns="0" rtlCol="0" anchor="ctr"/>
-          <a:lstStyle/>
-          <a:p>
-            <a:pPr indent="0" marL="0">
-              <a:buNone/>
-            </a:pPr>
-            <a:r>
-              <a:rPr lang="en-US" sz="1900" b="1" dirty="0">
+              <a:t>Frente a la metodología clásica Top-Hat, el banco de SE y el ajuste automático elevan la fidelidad estructural y la información mutua con significancia estadística.</a:t>
+            </a:r>
+            <a:endParaRPr lang="en-US" sz="1350" dirty="0"/>
+          </a:p>
+          <a:p>
+            <a:pPr marL="177800" indent="-177800">
+              <a:spcAft>
+                <a:spcPts val="1100"/>
+              </a:spcAft>
+              <a:buSzPct val="100000"/>
+              <a:buChar char="•"/>
+            </a:pPr>
+            <a:r>
+              <a:rPr lang="en-US" sz="1350" dirty="0">
                 <a:solidFill>
                   <a:srgbClr val="1A1A1A"/>
                 </a:solidFill>
@@ -8049,87 +7896,9 @@
                 <a:ea typeface="Times New Roman" pitchFamily="34" charset="-122"/>
                 <a:cs typeface="Times New Roman" pitchFamily="34" charset="-120"/>
               </a:rPr>
-              <a:t>H3</a:t>
-            </a:r>
-            <a:endParaRPr lang="en-US" sz="1900" dirty="0"/>
-          </a:p>
-        </p:txBody>
-      </p:sp>
-      <p:sp>
-        <p:nvSpPr>
-          <p:cNvPr id="11" name="Text 9"/>
-          <p:cNvSpPr/>
-          <p:nvPr/>
-        </p:nvSpPr>
-        <p:spPr>
-          <a:xfrm>
-            <a:off x="1143000" y="3593592"/>
-            <a:ext cx="1417320" cy="365760"/>
-          </a:xfrm>
-          <a:prstGeom prst="rect">
-            <a:avLst/>
-          </a:prstGeom>
-          <a:noFill/>
-          <a:ln/>
-        </p:spPr>
-        <p:txBody>
-          <a:bodyPr wrap="square" lIns="0" tIns="0" rIns="0" bIns="0" rtlCol="0" anchor="ctr"/>
-          <a:lstStyle/>
-          <a:p>
-            <a:pPr indent="0" marL="0">
-              <a:buNone/>
-            </a:pPr>
-            <a:r>
-              <a:rPr lang="en-US" sz="1300" b="1" dirty="0">
-                <a:solidFill>
-                  <a:srgbClr val="8B1A1A"/>
-                </a:solidFill>
-                <a:latin typeface="Times New Roman" pitchFamily="34" charset="0"/>
-                <a:ea typeface="Times New Roman" pitchFamily="34" charset="-122"/>
-                <a:cs typeface="Times New Roman" pitchFamily="34" charset="-120"/>
-              </a:rPr>
-              <a:t>PARCIAL</a:t>
-            </a:r>
-            <a:endParaRPr lang="en-US" sz="1300" dirty="0"/>
-          </a:p>
-        </p:txBody>
-      </p:sp>
-      <p:sp>
-        <p:nvSpPr>
-          <p:cNvPr id="12" name="Text 10"/>
-          <p:cNvSpPr/>
-          <p:nvPr/>
-        </p:nvSpPr>
-        <p:spPr>
-          <a:xfrm>
-            <a:off x="2697480" y="3557016"/>
-            <a:ext cx="5989320" cy="1143000"/>
-          </a:xfrm>
-          <a:prstGeom prst="rect">
-            <a:avLst/>
-          </a:prstGeom>
-          <a:noFill/>
-          <a:ln/>
-        </p:spPr>
-        <p:txBody>
-          <a:bodyPr wrap="square" lIns="0" tIns="0" rIns="0" bIns="0" rtlCol="0" anchor="t"/>
-          <a:lstStyle/>
-          <a:p>
-            <a:pPr indent="0" marL="0">
-              <a:buNone/>
-            </a:pPr>
-            <a:r>
-              <a:rPr lang="en-US" sz="1250" dirty="0">
-                <a:solidFill>
-                  <a:srgbClr val="1A1A1A"/>
-                </a:solidFill>
-                <a:latin typeface="Times New Roman" pitchFamily="34" charset="0"/>
-                <a:ea typeface="Times New Roman" pitchFamily="34" charset="-122"/>
-                <a:cs typeface="Times New Roman" pitchFamily="34" charset="-120"/>
-              </a:rPr>
-              <a:t>La fusión supera al visible solo en detección, pero ninguna fusión supera al infrarrojo solo; la mejor calidad de imagen no garantiza el mejor mAP.</a:t>
-            </a:r>
-            <a:endParaRPr lang="en-US" sz="1250" dirty="0"/>
+              <a:t>Aporte central en detección (M3FD): la fusión detecta en una sola imagen los objetos complementarios —personas (solo en IR) y luces (solo en VIS)— que ninguna modalidad capta por separado; la propuesta es la mejor fusión del estudio.</a:t>
+            </a:r>
+            <a:endParaRPr lang="en-US" sz="1350" dirty="0"/>
           </a:p>
         </p:txBody>
       </p:sp>
@@ -8198,7 +7967,7 @@
                 <a:ea typeface="Times New Roman" pitchFamily="34" charset="-122"/>
                 <a:cs typeface="Times New Roman" pitchFamily="34" charset="-120"/>
               </a:rPr>
-              <a:t>9. Conclusiones</a:t>
+              <a:t>Recomendaciones y trabajo futuro</a:t>
             </a:r>
             <a:endParaRPr lang="en-US" sz="2300" dirty="0"/>
           </a:p>
@@ -8237,7 +8006,7 @@
                 <a:ea typeface="Times New Roman" pitchFamily="34" charset="-122"/>
                 <a:cs typeface="Times New Roman" pitchFamily="34" charset="-120"/>
               </a:rPr>
-              <a:t>18 / 20</a:t>
+              <a:t>18 / 19</a:t>
             </a:r>
             <a:endParaRPr lang="en-US" sz="900" dirty="0"/>
           </a:p>
@@ -8280,7 +8049,7 @@
                 <a:ea typeface="Times New Roman" pitchFamily="34" charset="-122"/>
                 <a:cs typeface="Times New Roman" pitchFamily="34" charset="-120"/>
               </a:rPr>
-              <a:t>Se formuló e implementó de forma reproducible un operador Top-Hat de una sola escala con banco de disco + líneas orientadas y suma de ramas.</a:t>
+              <a:t>Extender la evaluación de detección a otros detectores y al conjunto completo de LLVIP.</a:t>
             </a:r>
             <a:endParaRPr lang="en-US" sz="1350" dirty="0"/>
           </a:p>
@@ -8301,7 +8070,7 @@
                 <a:ea typeface="Times New Roman" pitchFamily="34" charset="-122"/>
                 <a:cs typeface="Times New Roman" pitchFamily="34" charset="-120"/>
               </a:rPr>
-              <a:t>El barrido PSO de 25 configuraciones halló el óptimo r = 25, m = 0,0703 (F = 1,9843) de manera consistente.</a:t>
+              <a:t>Explorar reglas de fusión adaptativas para la rama Black Top-Hat.</a:t>
             </a:r>
             <a:endParaRPr lang="en-US" sz="1350" dirty="0"/>
           </a:p>
@@ -8322,7 +8091,7 @@
                 <a:ea typeface="Times New Roman" pitchFamily="34" charset="-122"/>
                 <a:cs typeface="Times New Roman" pitchFamily="34" charset="-120"/>
               </a:rPr>
-              <a:t>La propuesta exhibe el mejor perfil de calidad del benchmark: menor Nabf y mayor SSIM, con significancia estadística; segunda en Qabf, SCD y VIF.</a:t>
+              <a:t>Complementar las métricas objetivas con una validación perceptual por observadores.</a:t>
             </a:r>
             <a:endParaRPr lang="en-US" sz="1350" dirty="0"/>
           </a:p>
@@ -8343,7 +8112,7 @@
                 <a:ea typeface="Times New Roman" pitchFamily="34" charset="-122"/>
                 <a:cs typeface="Times New Roman" pitchFamily="34" charset="-120"/>
               </a:rPr>
-              <a:t>Frente a la metodología clásica Top-Hat, mejora todas las métricas de calidad de fusión: el banco de SE y el ajuste automático aportan valor real.</a:t>
+              <a:t>Evaluar la transferencia a otros dominios (imágenes médicas, aéreas).</a:t>
             </a:r>
             <a:endParaRPr lang="en-US" sz="1350" dirty="0"/>
           </a:p>
@@ -8364,7 +8133,7 @@
                 <a:ea typeface="Times New Roman" pitchFamily="34" charset="-122"/>
                 <a:cs typeface="Times New Roman" pitchFamily="34" charset="-120"/>
               </a:rPr>
-              <a:t>En detección, la superioridad en calidad de imagen no se traslada automáticamente al mAP: la elección del método debe guiarse por el criterio operativo prioritario.</a:t>
+              <a:t>Para aplicaciones donde prima la fidelidad estructural a las fuentes y la detección de objetos complementarios, la propuesta es la opción recomendada; donde prima el contraste bruto, LP y el Top-Hat clásico siguen siendo competitivos.</a:t>
             </a:r>
             <a:endParaRPr lang="en-US" sz="1350" dirty="0"/>
           </a:p>
@@ -8410,8 +8179,8 @@
         </p:nvSpPr>
         <p:spPr>
           <a:xfrm>
-            <a:off x="457200" y="256032"/>
-            <a:ext cx="8229600" cy="502920"/>
+            <a:off x="457200" y="1828800"/>
+            <a:ext cx="8229600" cy="731520"/>
           </a:xfrm>
           <a:prstGeom prst="rect">
             <a:avLst/>
@@ -8423,11 +8192,11 @@
           <a:bodyPr wrap="square" lIns="0" tIns="0" rIns="0" bIns="0" rtlCol="0" anchor="ctr"/>
           <a:lstStyle/>
           <a:p>
-            <a:pPr indent="0" marL="0">
+            <a:pPr algn="ctr" indent="0" marL="0">
               <a:buNone/>
             </a:pPr>
             <a:r>
-              <a:rPr lang="en-US" sz="2300" b="1" dirty="0">
+              <a:rPr lang="en-US" sz="3400" b="1" dirty="0">
                 <a:solidFill>
                   <a:srgbClr val="1A1A1A"/>
                 </a:solidFill>
@@ -8435,9 +8204,9 @@
                 <a:ea typeface="Times New Roman" pitchFamily="34" charset="-122"/>
                 <a:cs typeface="Times New Roman" pitchFamily="34" charset="-120"/>
               </a:rPr>
-              <a:t>Recomendaciones y trabajo futuro</a:t>
-            </a:r>
-            <a:endParaRPr lang="en-US" sz="2300" dirty="0"/>
+              <a:t>Muchas gracias</a:t>
+            </a:r>
+            <a:endParaRPr lang="en-US" sz="3400" dirty="0"/>
           </a:p>
         </p:txBody>
       </p:sp>
@@ -8449,8 +8218,8 @@
         </p:nvSpPr>
         <p:spPr>
           <a:xfrm>
-            <a:off x="8229600" y="4828032"/>
-            <a:ext cx="685800" cy="274320"/>
+            <a:off x="457200" y="2606040"/>
+            <a:ext cx="8229600" cy="365760"/>
           </a:xfrm>
           <a:prstGeom prst="rect">
             <a:avLst/>
@@ -8462,11 +8231,11 @@
           <a:bodyPr wrap="square" lIns="0" tIns="0" rIns="0" bIns="0" rtlCol="0" anchor="ctr"/>
           <a:lstStyle/>
           <a:p>
-            <a:pPr algn="r" indent="0" marL="0">
+            <a:pPr algn="ctr" indent="0" marL="0">
               <a:buNone/>
             </a:pPr>
             <a:r>
-              <a:rPr lang="en-US" sz="900" dirty="0">
+              <a:rPr lang="en-US" sz="1500" i="1" dirty="0">
                 <a:solidFill>
                   <a:srgbClr val="666666"/>
                 </a:solidFill>
@@ -8474,9 +8243,9 @@
                 <a:ea typeface="Times New Roman" pitchFamily="34" charset="-122"/>
                 <a:cs typeface="Times New Roman" pitchFamily="34" charset="-120"/>
               </a:rPr>
-              <a:t>19 / 20</a:t>
-            </a:r>
-            <a:endParaRPr lang="en-US" sz="900" dirty="0"/>
+              <a:t>Preguntas y comentarios</a:t>
+            </a:r>
+            <a:endParaRPr lang="en-US" sz="1500" dirty="0"/>
           </a:p>
         </p:txBody>
       </p:sp>
@@ -8488,8 +8257,8 @@
         </p:nvSpPr>
         <p:spPr>
           <a:xfrm>
-            <a:off x="457200" y="914400"/>
-            <a:ext cx="8229600" cy="3931920"/>
+            <a:off x="457200" y="3383280"/>
+            <a:ext cx="8229600" cy="320040"/>
           </a:xfrm>
           <a:prstGeom prst="rect">
             <a:avLst/>
@@ -8498,112 +8267,63 @@
           <a:ln/>
         </p:spPr>
         <p:txBody>
-          <a:bodyPr wrap="square" lIns="0" tIns="0" rIns="0" bIns="0" rtlCol="0" anchor="t"/>
-          <a:lstStyle/>
-          <a:p>
-            <a:pPr marL="177800" indent="-177800">
-              <a:spcAft>
-                <a:spcPts val="1100"/>
-              </a:spcAft>
-              <a:buSzPct val="100000"/>
-              <a:buChar char="•"/>
-            </a:pPr>
-            <a:r>
-              <a:rPr lang="en-US" sz="1350" dirty="0">
-                <a:solidFill>
-                  <a:srgbClr val="1A1A1A"/>
-                </a:solidFill>
-                <a:latin typeface="Times New Roman" pitchFamily="34" charset="0"/>
-                <a:ea typeface="Times New Roman" pitchFamily="34" charset="-122"/>
-                <a:cs typeface="Times New Roman" pitchFamily="34" charset="-120"/>
-              </a:rPr>
-              <a:t>Extender la evaluación de detección a otros detectores y al conjunto completo de LLVIP.</a:t>
-            </a:r>
-            <a:endParaRPr lang="en-US" sz="1350" dirty="0"/>
-          </a:p>
-          <a:p>
-            <a:pPr marL="177800" indent="-177800">
-              <a:spcAft>
-                <a:spcPts val="1100"/>
-              </a:spcAft>
-              <a:buSzPct val="100000"/>
-              <a:buChar char="•"/>
-            </a:pPr>
-            <a:r>
-              <a:rPr lang="en-US" sz="1350" dirty="0">
-                <a:solidFill>
-                  <a:srgbClr val="1A1A1A"/>
-                </a:solidFill>
-                <a:latin typeface="Times New Roman" pitchFamily="34" charset="0"/>
-                <a:ea typeface="Times New Roman" pitchFamily="34" charset="-122"/>
-                <a:cs typeface="Times New Roman" pitchFamily="34" charset="-120"/>
-              </a:rPr>
-              <a:t>Explorar reglas de fusión adaptativas para la rama Black Top-Hat.</a:t>
-            </a:r>
-            <a:endParaRPr lang="en-US" sz="1350" dirty="0"/>
-          </a:p>
-          <a:p>
-            <a:pPr marL="177800" indent="-177800">
-              <a:spcAft>
-                <a:spcPts val="1100"/>
-              </a:spcAft>
-              <a:buSzPct val="100000"/>
-              <a:buChar char="•"/>
-            </a:pPr>
-            <a:r>
-              <a:rPr lang="en-US" sz="1350" dirty="0">
-                <a:solidFill>
-                  <a:srgbClr val="1A1A1A"/>
-                </a:solidFill>
-                <a:latin typeface="Times New Roman" pitchFamily="34" charset="0"/>
-                <a:ea typeface="Times New Roman" pitchFamily="34" charset="-122"/>
-                <a:cs typeface="Times New Roman" pitchFamily="34" charset="-120"/>
-              </a:rPr>
-              <a:t>Complementar las métricas objetivas con una validación perceptual por observadores.</a:t>
-            </a:r>
-            <a:endParaRPr lang="en-US" sz="1350" dirty="0"/>
-          </a:p>
-          <a:p>
-            <a:pPr marL="177800" indent="-177800">
-              <a:spcAft>
-                <a:spcPts val="1100"/>
-              </a:spcAft>
-              <a:buSzPct val="100000"/>
-              <a:buChar char="•"/>
-            </a:pPr>
-            <a:r>
-              <a:rPr lang="en-US" sz="1350" dirty="0">
-                <a:solidFill>
-                  <a:srgbClr val="1A1A1A"/>
-                </a:solidFill>
-                <a:latin typeface="Times New Roman" pitchFamily="34" charset="0"/>
-                <a:ea typeface="Times New Roman" pitchFamily="34" charset="-122"/>
-                <a:cs typeface="Times New Roman" pitchFamily="34" charset="-120"/>
-              </a:rPr>
-              <a:t>Evaluar la transferencia a otros dominios (imágenes médicas, aéreas).</a:t>
-            </a:r>
-            <a:endParaRPr lang="en-US" sz="1350" dirty="0"/>
-          </a:p>
-          <a:p>
-            <a:pPr marL="177800" indent="-177800">
-              <a:spcAft>
-                <a:spcPts val="1100"/>
-              </a:spcAft>
-              <a:buSzPct val="100000"/>
-              <a:buChar char="•"/>
-            </a:pPr>
-            <a:r>
-              <a:rPr lang="en-US" sz="1350" dirty="0">
-                <a:solidFill>
-                  <a:srgbClr val="1A1A1A"/>
-                </a:solidFill>
-                <a:latin typeface="Times New Roman" pitchFamily="34" charset="0"/>
-                <a:ea typeface="Times New Roman" pitchFamily="34" charset="-122"/>
-                <a:cs typeface="Times New Roman" pitchFamily="34" charset="-120"/>
-              </a:rPr>
-              <a:t>Para aplicaciones donde los artefactos son críticos (interpretación humana, diagnóstico), la propuesta es la opción recomendada; donde prima el contraste bruto, LP sigue siendo competitiva.</a:t>
-            </a:r>
-            <a:endParaRPr lang="en-US" sz="1350" dirty="0"/>
+          <a:bodyPr wrap="square" lIns="0" tIns="0" rIns="0" bIns="0" rtlCol="0" anchor="ctr"/>
+          <a:lstStyle/>
+          <a:p>
+            <a:pPr algn="ctr" indent="0" marL="0">
+              <a:buNone/>
+            </a:pPr>
+            <a:r>
+              <a:rPr lang="en-US" sz="1200" dirty="0">
+                <a:solidFill>
+                  <a:srgbClr val="8B1A1A"/>
+                </a:solidFill>
+                <a:latin typeface="Times New Roman" pitchFamily="34" charset="0"/>
+                <a:ea typeface="Times New Roman" pitchFamily="34" charset="-122"/>
+                <a:cs typeface="Times New Roman" pitchFamily="34" charset="-120"/>
+              </a:rPr>
+              <a:t>Código y experimentos reproducibles:  github.com/YanBajac/TFM_Fusion_Imagenes_Propuesta_Oficial</a:t>
+            </a:r>
+            <a:endParaRPr lang="en-US" sz="1200" dirty="0"/>
+          </a:p>
+        </p:txBody>
+      </p:sp>
+      <p:sp>
+        <p:nvSpPr>
+          <p:cNvPr id="5" name="Text 3"/>
+          <p:cNvSpPr/>
+          <p:nvPr/>
+        </p:nvSpPr>
+        <p:spPr>
+          <a:xfrm>
+            <a:off x="457200" y="3794760"/>
+            <a:ext cx="8229600" cy="320040"/>
+          </a:xfrm>
+          <a:prstGeom prst="rect">
+            <a:avLst/>
+          </a:prstGeom>
+          <a:noFill/>
+          <a:ln/>
+        </p:spPr>
+        <p:txBody>
+          <a:bodyPr wrap="square" lIns="0" tIns="0" rIns="0" bIns="0" rtlCol="0" anchor="ctr"/>
+          <a:lstStyle/>
+          <a:p>
+            <a:pPr algn="ctr" indent="0" marL="0">
+              <a:buNone/>
+            </a:pPr>
+            <a:r>
+              <a:rPr lang="en-US" sz="1100" dirty="0">
+                <a:solidFill>
+                  <a:srgbClr val="666666"/>
+                </a:solidFill>
+                <a:latin typeface="Times New Roman" pitchFamily="34" charset="0"/>
+                <a:ea typeface="Times New Roman" pitchFamily="34" charset="-122"/>
+                <a:cs typeface="Times New Roman" pitchFamily="34" charset="-120"/>
+              </a:rPr>
+              <a:t>Lic. Juan Pablo Bazán  ·  Ing. Yan Bajac  —  Orientador: D.Sc. Julio César Mello</a:t>
+            </a:r>
+            <a:endParaRPr lang="en-US" sz="1100" dirty="0"/>
           </a:p>
         </p:txBody>
       </p:sp>
@@ -8711,7 +8431,7 @@
                 <a:ea typeface="Times New Roman" pitchFamily="34" charset="-122"/>
                 <a:cs typeface="Times New Roman" pitchFamily="34" charset="-120"/>
               </a:rPr>
-              <a:t>2 / 20</a:t>
+              <a:t>2 / 19</a:t>
             </a:r>
             <a:endParaRPr lang="en-US" sz="900" dirty="0"/>
           </a:p>
@@ -8925,194 +8645,6 @@
               <a:t>9.  Conclusiones y recomendaciones</a:t>
             </a:r>
             <a:endParaRPr lang="en-US" sz="1500" dirty="0"/>
-          </a:p>
-        </p:txBody>
-      </p:sp>
-    </p:spTree>
-  </p:cSld>
-  <p:clrMapOvr>
-    <a:masterClrMapping/>
-  </p:clrMapOvr>
-</p:sld>
-</file>
-
-<file path=ppt/slides/slide20.xml><?xml version="1.0" encoding="utf-8"?>
-<p:sld xmlns:a="http://schemas.openxmlformats.org/drawingml/2006/main" xmlns:r="http://schemas.openxmlformats.org/officeDocument/2006/relationships" xmlns:p="http://schemas.openxmlformats.org/presentationml/2006/main">
-  <p:cSld name="Slide 20">
-    <p:bg>
-      <p:bgPr>
-        <a:solidFill>
-          <a:srgbClr val="FFFFFF"/>
-        </a:solidFill>
-      </p:bgPr>
-    </p:bg>
-    <p:spTree>
-      <p:nvGrpSpPr>
-        <p:cNvPr id="1" name=""/>
-        <p:cNvGrpSpPr/>
-        <p:nvPr/>
-      </p:nvGrpSpPr>
-      <p:grpSpPr>
-        <a:xfrm>
-          <a:off x="0" y="0"/>
-          <a:ext cx="0" cy="0"/>
-          <a:chOff x="0" y="0"/>
-          <a:chExt cx="0" cy="0"/>
-        </a:xfrm>
-      </p:grpSpPr>
-      <p:sp>
-        <p:nvSpPr>
-          <p:cNvPr id="2" name="Text 0"/>
-          <p:cNvSpPr/>
-          <p:nvPr/>
-        </p:nvSpPr>
-        <p:spPr>
-          <a:xfrm>
-            <a:off x="457200" y="1828800"/>
-            <a:ext cx="8229600" cy="731520"/>
-          </a:xfrm>
-          <a:prstGeom prst="rect">
-            <a:avLst/>
-          </a:prstGeom>
-          <a:noFill/>
-          <a:ln/>
-        </p:spPr>
-        <p:txBody>
-          <a:bodyPr wrap="square" lIns="0" tIns="0" rIns="0" bIns="0" rtlCol="0" anchor="ctr"/>
-          <a:lstStyle/>
-          <a:p>
-            <a:pPr algn="ctr" indent="0" marL="0">
-              <a:buNone/>
-            </a:pPr>
-            <a:r>
-              <a:rPr lang="en-US" sz="3400" b="1" dirty="0">
-                <a:solidFill>
-                  <a:srgbClr val="1A1A1A"/>
-                </a:solidFill>
-                <a:latin typeface="Times New Roman" pitchFamily="34" charset="0"/>
-                <a:ea typeface="Times New Roman" pitchFamily="34" charset="-122"/>
-                <a:cs typeface="Times New Roman" pitchFamily="34" charset="-120"/>
-              </a:rPr>
-              <a:t>Muchas gracias</a:t>
-            </a:r>
-            <a:endParaRPr lang="en-US" sz="3400" dirty="0"/>
-          </a:p>
-        </p:txBody>
-      </p:sp>
-      <p:sp>
-        <p:nvSpPr>
-          <p:cNvPr id="3" name="Text 1"/>
-          <p:cNvSpPr/>
-          <p:nvPr/>
-        </p:nvSpPr>
-        <p:spPr>
-          <a:xfrm>
-            <a:off x="457200" y="2606040"/>
-            <a:ext cx="8229600" cy="365760"/>
-          </a:xfrm>
-          <a:prstGeom prst="rect">
-            <a:avLst/>
-          </a:prstGeom>
-          <a:noFill/>
-          <a:ln/>
-        </p:spPr>
-        <p:txBody>
-          <a:bodyPr wrap="square" lIns="0" tIns="0" rIns="0" bIns="0" rtlCol="0" anchor="ctr"/>
-          <a:lstStyle/>
-          <a:p>
-            <a:pPr algn="ctr" indent="0" marL="0">
-              <a:buNone/>
-            </a:pPr>
-            <a:r>
-              <a:rPr lang="en-US" sz="1500" i="1" dirty="0">
-                <a:solidFill>
-                  <a:srgbClr val="666666"/>
-                </a:solidFill>
-                <a:latin typeface="Times New Roman" pitchFamily="34" charset="0"/>
-                <a:ea typeface="Times New Roman" pitchFamily="34" charset="-122"/>
-                <a:cs typeface="Times New Roman" pitchFamily="34" charset="-120"/>
-              </a:rPr>
-              <a:t>Preguntas y comentarios</a:t>
-            </a:r>
-            <a:endParaRPr lang="en-US" sz="1500" dirty="0"/>
-          </a:p>
-        </p:txBody>
-      </p:sp>
-      <p:sp>
-        <p:nvSpPr>
-          <p:cNvPr id="4" name="Text 2"/>
-          <p:cNvSpPr/>
-          <p:nvPr/>
-        </p:nvSpPr>
-        <p:spPr>
-          <a:xfrm>
-            <a:off x="457200" y="3383280"/>
-            <a:ext cx="8229600" cy="320040"/>
-          </a:xfrm>
-          <a:prstGeom prst="rect">
-            <a:avLst/>
-          </a:prstGeom>
-          <a:noFill/>
-          <a:ln/>
-        </p:spPr>
-        <p:txBody>
-          <a:bodyPr wrap="square" lIns="0" tIns="0" rIns="0" bIns="0" rtlCol="0" anchor="ctr"/>
-          <a:lstStyle/>
-          <a:p>
-            <a:pPr algn="ctr" indent="0" marL="0">
-              <a:buNone/>
-            </a:pPr>
-            <a:r>
-              <a:rPr lang="en-US" sz="1200" dirty="0">
-                <a:solidFill>
-                  <a:srgbClr val="8B1A1A"/>
-                </a:solidFill>
-                <a:latin typeface="Times New Roman" pitchFamily="34" charset="0"/>
-                <a:ea typeface="Times New Roman" pitchFamily="34" charset="-122"/>
-                <a:cs typeface="Times New Roman" pitchFamily="34" charset="-120"/>
-              </a:rPr>
-              <a:t>Código y experimentos reproducibles:  github.com/YanBajac/TFM_Fusion_Imagenes_Propuesta_Oficial</a:t>
-            </a:r>
-            <a:endParaRPr lang="en-US" sz="1200" dirty="0"/>
-          </a:p>
-        </p:txBody>
-      </p:sp>
-      <p:sp>
-        <p:nvSpPr>
-          <p:cNvPr id="5" name="Text 3"/>
-          <p:cNvSpPr/>
-          <p:nvPr/>
-        </p:nvSpPr>
-        <p:spPr>
-          <a:xfrm>
-            <a:off x="457200" y="3794760"/>
-            <a:ext cx="8229600" cy="320040"/>
-          </a:xfrm>
-          <a:prstGeom prst="rect">
-            <a:avLst/>
-          </a:prstGeom>
-          <a:noFill/>
-          <a:ln/>
-        </p:spPr>
-        <p:txBody>
-          <a:bodyPr wrap="square" lIns="0" tIns="0" rIns="0" bIns="0" rtlCol="0" anchor="ctr"/>
-          <a:lstStyle/>
-          <a:p>
-            <a:pPr algn="ctr" indent="0" marL="0">
-              <a:buNone/>
-            </a:pPr>
-            <a:r>
-              <a:rPr lang="en-US" sz="1100" dirty="0">
-                <a:solidFill>
-                  <a:srgbClr val="666666"/>
-                </a:solidFill>
-                <a:latin typeface="Times New Roman" pitchFamily="34" charset="0"/>
-                <a:ea typeface="Times New Roman" pitchFamily="34" charset="-122"/>
-                <a:cs typeface="Times New Roman" pitchFamily="34" charset="-120"/>
-              </a:rPr>
-              <a:t>Lic. Juan Pablo Bazán  ·  Ing. Yan Bajac  —  Orientador: D.Sc. Julio César Mello</a:t>
-            </a:r>
-            <a:endParaRPr lang="en-US" sz="1100" dirty="0"/>
           </a:p>
         </p:txBody>
       </p:sp>
@@ -9220,7 +8752,7 @@
                 <a:ea typeface="Times New Roman" pitchFamily="34" charset="-122"/>
                 <a:cs typeface="Times New Roman" pitchFamily="34" charset="-120"/>
               </a:rPr>
-              <a:t>3 / 20</a:t>
+              <a:t>3 / 19</a:t>
             </a:r>
             <a:endParaRPr lang="en-US" sz="900" dirty="0"/>
           </a:p>
@@ -9481,7 +9013,7 @@
                 <a:ea typeface="Times New Roman" pitchFamily="34" charset="-122"/>
                 <a:cs typeface="Times New Roman" pitchFamily="34" charset="-120"/>
               </a:rPr>
-              <a:t>4 / 20</a:t>
+              <a:t>4 / 19</a:t>
             </a:r>
             <a:endParaRPr lang="en-US" sz="900" dirty="0"/>
           </a:p>
@@ -9683,7 +9215,7 @@
                 <a:ea typeface="Times New Roman" pitchFamily="34" charset="-122"/>
                 <a:cs typeface="Times New Roman" pitchFamily="34" charset="-120"/>
               </a:rPr>
-              <a:t>Comparar con la fusión Top-Hat clásica y cinco métodos del estado del arte (LP, RP, DWT, DTCWT, CVT) sobre doce métricas, con pruebas de Friedman y Wilcoxon–Holm.</a:t>
+              <a:t>Comparar con la fusión Top-Hat clásica y cinco métodos del estado del arte (LP, RP, DWT, DTCWT, CVT) sobre nueve métricas, con pruebas de Friedman y Wilcoxon–Holm.</a:t>
             </a:r>
             <a:endParaRPr lang="en-US" sz="1300" dirty="0"/>
           </a:p>
@@ -9814,7 +9346,7 @@
                 <a:ea typeface="Times New Roman" pitchFamily="34" charset="-122"/>
                 <a:cs typeface="Times New Roman" pitchFamily="34" charset="-120"/>
               </a:rPr>
-              <a:t>5 / 20</a:t>
+              <a:t>5 / 19</a:t>
             </a:r>
             <a:endParaRPr lang="en-US" sz="900" dirty="0"/>
           </a:p>
@@ -9892,7 +9424,7 @@
                 <a:ea typeface="Times New Roman" pitchFamily="34" charset="-122"/>
                 <a:cs typeface="Times New Roman" pitchFamily="34" charset="-120"/>
               </a:rPr>
-              <a:t>La combinación del disco con las líneas orientadas —promediadas y sumadas— mejora la fidelidad estructural (SSIM) y reduce los artefactos (Nabf) frente a la metodología clásica de fusión Top-Hat.</a:t>
+              <a:t>La combinación del disco con las líneas orientadas —promediadas y sumadas— mejora la fidelidad estructural (SSIM) frente a la metodología clásica de fusión Top-Hat y a los métodos del estado del arte.</a:t>
             </a:r>
             <a:endParaRPr lang="en-US" sz="1350" dirty="0"/>
           </a:p>
@@ -10158,7 +9690,7 @@
                 <a:ea typeface="Times New Roman" pitchFamily="34" charset="-122"/>
                 <a:cs typeface="Times New Roman" pitchFamily="34" charset="-120"/>
               </a:rPr>
-              <a:t>6 / 20</a:t>
+              <a:t>6 / 19</a:t>
             </a:r>
             <a:endParaRPr lang="en-US" sz="900" dirty="0"/>
           </a:p>
@@ -10479,7 +10011,7 @@
                 <a:ea typeface="Times New Roman" pitchFamily="34" charset="-122"/>
                 <a:cs typeface="Times New Roman" pitchFamily="34" charset="-120"/>
               </a:rPr>
-              <a:t>7 / 20</a:t>
+              <a:t>7 / 19</a:t>
             </a:r>
             <a:endParaRPr lang="en-US" sz="900" dirty="0"/>
           </a:p>
@@ -10788,7 +10320,7 @@
                 <a:ea typeface="Times New Roman" pitchFamily="34" charset="-122"/>
                 <a:cs typeface="Times New Roman" pitchFamily="34" charset="-120"/>
               </a:rPr>
-              <a:t>8 / 20</a:t>
+              <a:t>8 / 19</a:t>
             </a:r>
             <a:endParaRPr lang="en-US" sz="900" dirty="0"/>
           </a:p>
@@ -10852,7 +10384,7 @@
                 <a:ea typeface="Times New Roman" pitchFamily="34" charset="-122"/>
                 <a:cs typeface="Times New Roman" pitchFamily="34" charset="-120"/>
               </a:rPr>
-              <a:t>Aptitud orientada a la fusión (cuatro métricas de calidad):</a:t>
+              <a:t>Aptitud publicada de Ortega y Espinoza (2025), sin pesos arbitrarios:</a:t>
             </a:r>
             <a:endParaRPr lang="en-US" sz="1300" dirty="0"/>
           </a:p>
@@ -10875,7 +10407,7 @@
         <p:spPr>
           <a:xfrm>
             <a:off x="640080" y="2148840"/>
-            <a:ext cx="3840480" cy="439826"/>
+            <a:ext cx="3383280" cy="384048"/>
           </a:xfrm>
           <a:prstGeom prst="rect">
             <a:avLst/>
@@ -10940,7 +10472,7 @@
                 <a:ea typeface="Times New Roman" pitchFamily="34" charset="-122"/>
                 <a:cs typeface="Times New Roman" pitchFamily="34" charset="-120"/>
               </a:rPr>
-              <a:t>Óptimo: r = 25, m = 0,0703 (F = 1,9843), alcanzado de forma consistente con n = 10 y T ≥ 30.</a:t>
+              <a:t>Óptimo: r = 25, m ≈ 0,07 (Fo = 1,7654), alcanzado de forma consistente con n = 10 y T ≥ 30; config operativa m = 0,0703.</a:t>
             </a:r>
             <a:endParaRPr lang="en-US" sz="1300" dirty="0"/>
           </a:p>
@@ -11074,7 +10606,7 @@
                 <a:ea typeface="Times New Roman" pitchFamily="34" charset="-122"/>
                 <a:cs typeface="Times New Roman" pitchFamily="34" charset="-120"/>
               </a:rPr>
-              <a:t>Ablación de la función de aptitud (pedido de la revisión)</a:t>
+              <a:t>6. Diseño experimental</a:t>
             </a:r>
             <a:endParaRPr lang="en-US" sz="2300" dirty="0"/>
           </a:p>
@@ -11113,46 +10645,22 @@
                 <a:ea typeface="Times New Roman" pitchFamily="34" charset="-122"/>
                 <a:cs typeface="Times New Roman" pitchFamily="34" charset="-120"/>
               </a:rPr>
-              <a:t>9 / 20</a:t>
+              <a:t>9 / 19</a:t>
             </a:r>
             <a:endParaRPr lang="en-US" sz="900" dirty="0"/>
           </a:p>
         </p:txBody>
       </p:sp>
-      <p:pic>
-        <p:nvPicPr>
-          <p:cNvPr id="4" name="Image 0" descr="C:/Users/Usuario/Documents/unv/mastertesis/tesis_mciencias_datos/docs/figures/fig_aptitud_vs_m.png">    </p:cNvPr>
-          <p:cNvPicPr>
-            <a:picLocks noChangeAspect="1"/>
-          </p:cNvPicPr>
+      <p:sp>
+        <p:nvSpPr>
+          <p:cNvPr id="4" name="Text 2"/>
+          <p:cNvSpPr/>
           <p:nvPr/>
-        </p:nvPicPr>
-        <p:blipFill>
-          <a:blip r:embed="rId1"/>
-          <a:stretch>
-            <a:fillRect/>
-          </a:stretch>
-        </p:blipFill>
+        </p:nvSpPr>
         <p:spPr>
           <a:xfrm>
-            <a:off x="411480" y="1051560"/>
-            <a:ext cx="5212080" cy="2734056"/>
-          </a:xfrm>
-          <a:prstGeom prst="rect">
-            <a:avLst/>
-          </a:prstGeom>
-        </p:spPr>
-      </p:pic>
-      <p:sp>
-        <p:nvSpPr>
-          <p:cNvPr id="5" name="Text 2"/>
-          <p:cNvSpPr/>
-          <p:nvPr/>
-        </p:nvSpPr>
-        <p:spPr>
-          <a:xfrm>
-            <a:off x="5760720" y="1051560"/>
-            <a:ext cx="2971800" cy="3291840"/>
+            <a:off x="457200" y="868680"/>
+            <a:ext cx="4023360" cy="274320"/>
           </a:xfrm>
           <a:prstGeom prst="rect">
             <a:avLst/>
@@ -11161,125 +10669,37 @@
           <a:ln/>
         </p:spPr>
         <p:txBody>
-          <a:bodyPr wrap="square" lIns="0" tIns="0" rIns="0" bIns="0" rtlCol="0" anchor="t"/>
-          <a:lstStyle/>
-          <a:p>
-            <a:pPr marL="177800" indent="-177800">
-              <a:spcAft>
-                <a:spcPts val="700"/>
-              </a:spcAft>
-              <a:buSzPct val="100000"/>
-              <a:buChar char="•"/>
-            </a:pPr>
-            <a:r>
-              <a:rPr lang="en-US" sz="1150" dirty="0">
-                <a:solidFill>
-                  <a:srgbClr val="1A1A1A"/>
-                </a:solidFill>
-                <a:latin typeface="Times New Roman" pitchFamily="34" charset="0"/>
-                <a:ea typeface="Times New Roman" pitchFamily="34" charset="-122"/>
-                <a:cs typeface="Times New Roman" pitchFamily="34" charset="-120"/>
-              </a:rPr>
-              <a:t>Mismo barrido 5×5 con la Fo del trabajo de referencia (SSIM_avg + E_n + PSNR_n) y su rango m ∈ [0,3–2,0].</a:t>
-            </a:r>
-            <a:endParaRPr lang="en-US" sz="1150" dirty="0"/>
-          </a:p>
-          <a:p>
-            <a:pPr marL="177800" indent="-177800">
-              <a:spcAft>
-                <a:spcPts val="700"/>
-              </a:spcAft>
-              <a:buSzPct val="100000"/>
-              <a:buChar char="•"/>
-            </a:pPr>
-            <a:r>
-              <a:rPr lang="en-US" sz="1150" b="1" dirty="0">
-                <a:solidFill>
-                  <a:srgbClr val="1A1A1A"/>
-                </a:solidFill>
-                <a:latin typeface="Times New Roman" pitchFamily="34" charset="0"/>
-                <a:ea typeface="Times New Roman" pitchFamily="34" charset="-122"/>
-                <a:cs typeface="Times New Roman" pitchFamily="34" charset="-120"/>
-              </a:rPr>
-              <a:t>En las 50 corridas, m* = 0,30: el piso del rango.</a:t>
-            </a:r>
-            <a:endParaRPr lang="en-US" sz="1150" dirty="0"/>
-          </a:p>
-          <a:p>
-            <a:pPr marL="177800" indent="-177800">
-              <a:spcAft>
-                <a:spcPts val="700"/>
-              </a:spcAft>
-              <a:buSzPct val="100000"/>
-              <a:buChar char="•"/>
-            </a:pPr>
-            <a:r>
-              <a:rPr lang="en-US" sz="1150" dirty="0">
-                <a:solidFill>
-                  <a:srgbClr val="1A1A1A"/>
-                </a:solidFill>
-                <a:latin typeface="Times New Roman" pitchFamily="34" charset="0"/>
-                <a:ea typeface="Times New Roman" pitchFamily="34" charset="-122"/>
-                <a:cs typeface="Times New Roman" pitchFamily="34" charset="-120"/>
-              </a:rPr>
-              <a:t>Las tres curvas decrecen en [0,5–2]: ningún tamaño de enjambre ni número de iteraciones puede converger allí.</a:t>
-            </a:r>
-            <a:endParaRPr lang="en-US" sz="1150" dirty="0"/>
-          </a:p>
-          <a:p>
-            <a:pPr marL="177800" indent="-177800">
-              <a:spcAft>
-                <a:spcPts val="700"/>
-              </a:spcAft>
-              <a:buSzPct val="100000"/>
-              <a:buChar char="•"/>
-            </a:pPr>
-            <a:r>
-              <a:rPr lang="en-US" sz="1150" b="1" dirty="0">
-                <a:solidFill>
-                  <a:srgbClr val="1A1A1A"/>
-                </a:solidFill>
-                <a:latin typeface="Times New Roman" pitchFamily="34" charset="0"/>
-                <a:ea typeface="Times New Roman" pitchFamily="34" charset="-122"/>
-                <a:cs typeface="Times New Roman" pitchFamily="34" charset="-120"/>
-              </a:rPr>
-              <a:t>El máximo real de Fo sobre la propuesta está en m ≈ 0,07 — coincide con nuestro óptimo (0,0703).</a:t>
-            </a:r>
-            <a:endParaRPr lang="en-US" sz="1150" dirty="0"/>
-          </a:p>
-          <a:p>
-            <a:pPr marL="177800" indent="-177800">
-              <a:spcAft>
-                <a:spcPts val="700"/>
-              </a:spcAft>
-              <a:buSzPct val="100000"/>
-              <a:buChar char="•"/>
-            </a:pPr>
-            <a:r>
-              <a:rPr lang="en-US" sz="1150" dirty="0">
-                <a:solidFill>
-                  <a:srgbClr val="1A1A1A"/>
-                </a:solidFill>
-                <a:latin typeface="Times New Roman" pitchFamily="34" charset="0"/>
-                <a:ea typeface="Times New Roman" pitchFamily="34" charset="-122"/>
-                <a:cs typeface="Times New Roman" pitchFamily="34" charset="-120"/>
-              </a:rPr>
-              <a:t>Sobre la propuesta, Fo elige r = 1 (óptimo trivial); sobre el clásico, r = 25 con 4,5× más artefactos que F_apt.</a:t>
-            </a:r>
-            <a:endParaRPr lang="en-US" sz="1150" dirty="0"/>
-          </a:p>
-        </p:txBody>
-      </p:sp>
-      <p:sp>
-        <p:nvSpPr>
-          <p:cNvPr id="6" name="Text 3"/>
+          <a:bodyPr wrap="square" lIns="0" tIns="0" rIns="0" bIns="0" rtlCol="0" anchor="ctr"/>
+          <a:lstStyle/>
+          <a:p>
+            <a:pPr indent="0" marL="0">
+              <a:buNone/>
+            </a:pPr>
+            <a:r>
+              <a:rPr lang="en-US" sz="1400" b="1" dirty="0">
+                <a:solidFill>
+                  <a:srgbClr val="8B1A1A"/>
+                </a:solidFill>
+                <a:latin typeface="Times New Roman" pitchFamily="34" charset="0"/>
+                <a:ea typeface="Times New Roman" pitchFamily="34" charset="-122"/>
+                <a:cs typeface="Times New Roman" pitchFamily="34" charset="-120"/>
+              </a:rPr>
+              <a:t>Benchmark de calidad</a:t>
+            </a:r>
+            <a:endParaRPr lang="en-US" sz="1400" dirty="0"/>
+          </a:p>
+        </p:txBody>
+      </p:sp>
+      <p:sp>
+        <p:nvSpPr>
+          <p:cNvPr id="5" name="Text 3"/>
           <p:cNvSpPr/>
           <p:nvPr/>
         </p:nvSpPr>
         <p:spPr>
           <a:xfrm>
-            <a:off x="457200" y="4160520"/>
-            <a:ext cx="8229600" cy="640080"/>
+            <a:off x="457200" y="1188720"/>
+            <a:ext cx="4023360" cy="3291840"/>
           </a:xfrm>
           <a:prstGeom prst="rect">
             <a:avLst/>
@@ -11288,6 +10708,112 @@
           <a:ln/>
         </p:spPr>
         <p:txBody>
+          <a:bodyPr wrap="square" lIns="0" tIns="0" rIns="0" bIns="0" rtlCol="0" anchor="t"/>
+          <a:lstStyle/>
+          <a:p>
+            <a:pPr marL="177800" indent="-177800">
+              <a:spcAft>
+                <a:spcPts val="800"/>
+              </a:spcAft>
+              <a:buSzPct val="100000"/>
+              <a:buChar char="•"/>
+            </a:pPr>
+            <a:r>
+              <a:rPr lang="en-US" sz="1250" dirty="0">
+                <a:solidFill>
+                  <a:srgbClr val="1A1A1A"/>
+                </a:solidFill>
+                <a:latin typeface="Times New Roman" pitchFamily="34" charset="0"/>
+                <a:ea typeface="Times New Roman" pitchFamily="34" charset="-122"/>
+                <a:cs typeface="Times New Roman" pitchFamily="34" charset="-120"/>
+              </a:rPr>
+              <a:t>20 pares VIS/IR del dataset TNO (Toet, 2014).</a:t>
+            </a:r>
+            <a:endParaRPr lang="en-US" sz="1250" dirty="0"/>
+          </a:p>
+          <a:p>
+            <a:pPr marL="177800" indent="-177800">
+              <a:spcAft>
+                <a:spcPts val="800"/>
+              </a:spcAft>
+              <a:buSzPct val="100000"/>
+              <a:buChar char="•"/>
+            </a:pPr>
+            <a:r>
+              <a:rPr lang="en-US" sz="1250" dirty="0">
+                <a:solidFill>
+                  <a:srgbClr val="1A1A1A"/>
+                </a:solidFill>
+                <a:latin typeface="Times New Roman" pitchFamily="34" charset="0"/>
+                <a:ea typeface="Times New Roman" pitchFamily="34" charset="-122"/>
+                <a:cs typeface="Times New Roman" pitchFamily="34" charset="-120"/>
+              </a:rPr>
+              <a:t>7 métodos: LP, RP, DWT, DTCWT, CVT, Top-Hat clásico y Propuesta → 140 fusiones.</a:t>
+            </a:r>
+            <a:endParaRPr lang="en-US" sz="1250" dirty="0"/>
+          </a:p>
+          <a:p>
+            <a:pPr marL="177800" indent="-177800">
+              <a:spcAft>
+                <a:spcPts val="800"/>
+              </a:spcAft>
+              <a:buSzPct val="100000"/>
+              <a:buChar char="•"/>
+            </a:pPr>
+            <a:r>
+              <a:rPr lang="en-US" sz="1250" dirty="0">
+                <a:solidFill>
+                  <a:srgbClr val="1A1A1A"/>
+                </a:solidFill>
+                <a:latin typeface="Times New Roman" pitchFamily="34" charset="0"/>
+                <a:ea typeface="Times New Roman" pitchFamily="34" charset="-122"/>
+                <a:cs typeface="Times New Roman" pitchFamily="34" charset="-120"/>
+              </a:rPr>
+              <a:t>Nueve métricas sin referencia (EN, SD, FE, MG, MI_vis, MI_ir, SF, SSIM, PSNR).</a:t>
+            </a:r>
+            <a:endParaRPr lang="en-US" sz="1250" dirty="0"/>
+          </a:p>
+          <a:p>
+            <a:pPr marL="177800" indent="-177800">
+              <a:spcAft>
+                <a:spcPts val="800"/>
+              </a:spcAft>
+              <a:buSzPct val="100000"/>
+              <a:buChar char="•"/>
+            </a:pPr>
+            <a:r>
+              <a:rPr lang="en-US" sz="1250" dirty="0">
+                <a:solidFill>
+                  <a:srgbClr val="1A1A1A"/>
+                </a:solidFill>
+                <a:latin typeface="Times New Roman" pitchFamily="34" charset="0"/>
+                <a:ea typeface="Times New Roman" pitchFamily="34" charset="-122"/>
+                <a:cs typeface="Times New Roman" pitchFamily="34" charset="-120"/>
+              </a:rPr>
+              <a:t>Friedman global + Wilcoxon pareado con corrección de Holm (α = 0,05).</a:t>
+            </a:r>
+            <a:endParaRPr lang="en-US" sz="1250" dirty="0"/>
+          </a:p>
+        </p:txBody>
+      </p:sp>
+      <p:sp>
+        <p:nvSpPr>
+          <p:cNvPr id="6" name="Text 4"/>
+          <p:cNvSpPr/>
+          <p:nvPr/>
+        </p:nvSpPr>
+        <p:spPr>
+          <a:xfrm>
+            <a:off x="4846320" y="868680"/>
+            <a:ext cx="3840480" cy="274320"/>
+          </a:xfrm>
+          <a:prstGeom prst="rect">
+            <a:avLst/>
+          </a:prstGeom>
+          <a:noFill/>
+          <a:ln/>
+        </p:spPr>
+        <p:txBody>
           <a:bodyPr wrap="square" lIns="0" tIns="0" rIns="0" bIns="0" rtlCol="0" anchor="ctr"/>
           <a:lstStyle/>
           <a:p>
@@ -11295,7 +10821,7 @@
               <a:buNone/>
             </a:pPr>
             <a:r>
-              <a:rPr lang="en-US" sz="1150" i="1" dirty="0">
+              <a:rPr lang="en-US" sz="1400" b="1" dirty="0">
                 <a:solidFill>
                   <a:srgbClr val="8B1A1A"/>
                 </a:solidFill>
@@ -11303,9 +10829,94 @@
                 <a:ea typeface="Times New Roman" pitchFamily="34" charset="-122"/>
                 <a:cs typeface="Times New Roman" pitchFamily="34" charset="-120"/>
               </a:rPr>
-              <a:t>Wilcoxon entre ambos óptimos: F_apt mejor y significativa en 8/12 métricas (limpieza y estructura). Ambas aptitudes acuerdan el peso del operador; F_apt controla además los artefactos (refuerza H2).</a:t>
-            </a:r>
-            <a:endParaRPr lang="en-US" sz="1150" dirty="0"/>
+              <a:t>Evaluación orientada a tarea</a:t>
+            </a:r>
+            <a:endParaRPr lang="en-US" sz="1400" dirty="0"/>
+          </a:p>
+        </p:txBody>
+      </p:sp>
+      <p:sp>
+        <p:nvSpPr>
+          <p:cNvPr id="7" name="Text 5"/>
+          <p:cNvSpPr/>
+          <p:nvPr/>
+        </p:nvSpPr>
+        <p:spPr>
+          <a:xfrm>
+            <a:off x="4846320" y="1188720"/>
+            <a:ext cx="3840480" cy="3291840"/>
+          </a:xfrm>
+          <a:prstGeom prst="rect">
+            <a:avLst/>
+          </a:prstGeom>
+          <a:noFill/>
+          <a:ln/>
+        </p:spPr>
+        <p:txBody>
+          <a:bodyPr wrap="square" lIns="0" tIns="0" rIns="0" bIns="0" rtlCol="0" anchor="t"/>
+          <a:lstStyle/>
+          <a:p>
+            <a:pPr marL="177800" indent="-177800">
+              <a:spcAft>
+                <a:spcPts val="800"/>
+              </a:spcAft>
+              <a:buSzPct val="100000"/>
+              <a:buChar char="•"/>
+            </a:pPr>
+            <a:r>
+              <a:rPr lang="en-US" sz="1250" dirty="0">
+                <a:solidFill>
+                  <a:srgbClr val="1A1A1A"/>
+                </a:solidFill>
+                <a:latin typeface="Times New Roman" pitchFamily="34" charset="0"/>
+                <a:ea typeface="Times New Roman" pitchFamily="34" charset="-122"/>
+                <a:cs typeface="Times New Roman" pitchFamily="34" charset="-120"/>
+              </a:rPr>
+              <a:t>Dataset etiquetado LLVIP (peatones nocturnos): 2.000 imágenes de entrenamiento y 500 de validación.</a:t>
+            </a:r>
+            <a:endParaRPr lang="en-US" sz="1250" dirty="0"/>
+          </a:p>
+          <a:p>
+            <a:pPr marL="177800" indent="-177800">
+              <a:spcAft>
+                <a:spcPts val="800"/>
+              </a:spcAft>
+              <a:buSzPct val="100000"/>
+              <a:buChar char="•"/>
+            </a:pPr>
+            <a:r>
+              <a:rPr lang="en-US" sz="1250" dirty="0">
+                <a:solidFill>
+                  <a:srgbClr val="1A1A1A"/>
+                </a:solidFill>
+                <a:latin typeface="Times New Roman" pitchFamily="34" charset="0"/>
+                <a:ea typeface="Times New Roman" pitchFamily="34" charset="-122"/>
+                <a:cs typeface="Times New Roman" pitchFamily="34" charset="-120"/>
+              </a:rPr>
+              <a:t>YOLOv8n reentrenado por modalidad (40 épocas), 9 entradas: VIS, IR y las 7 fusiones.</a:t>
+            </a:r>
+            <a:endParaRPr lang="en-US" sz="1250" dirty="0"/>
+          </a:p>
+          <a:p>
+            <a:pPr marL="177800" indent="-177800">
+              <a:spcAft>
+                <a:spcPts val="800"/>
+              </a:spcAft>
+              <a:buSzPct val="100000"/>
+              <a:buChar char="•"/>
+            </a:pPr>
+            <a:r>
+              <a:rPr lang="en-US" sz="1250" dirty="0">
+                <a:solidFill>
+                  <a:srgbClr val="1A1A1A"/>
+                </a:solidFill>
+                <a:latin typeface="Times New Roman" pitchFamily="34" charset="0"/>
+                <a:ea typeface="Times New Roman" pitchFamily="34" charset="-122"/>
+                <a:cs typeface="Times New Roman" pitchFamily="34" charset="-120"/>
+              </a:rPr>
+              <a:t>Etiquetas idénticas entre modalidades: la diferencia de mAP aísla el efecto del método de fusión.</a:t>
+            </a:r>
+            <a:endParaRPr lang="en-US" sz="1250" dirty="0"/>
           </a:p>
         </p:txBody>
       </p:sp>

--- a/docs/Tesis_Defensa_Presentacion.pptx
+++ b/docs/Tesis_Defensa_Presentacion.pptx
@@ -3178,7 +3178,7 @@
                           <a:ea typeface="Times New Roman" pitchFamily="34" charset="-122"/>
                           <a:cs typeface="Times New Roman" pitchFamily="34" charset="-120"/>
                         </a:rPr>
-                        <a:t>SSIM ↑</a:t>
+                        <a:t>EN ↑</a:t>
                       </a:r>
                       <a:endParaRPr lang="en-US" sz="1200" dirty="0">
                         <a:latin typeface="Times New Roman" charset="0"/>
@@ -3246,7 +3246,75 @@
                           <a:ea typeface="Times New Roman" pitchFamily="34" charset="-122"/>
                           <a:cs typeface="Times New Roman" pitchFamily="34" charset="-120"/>
                         </a:rPr>
-                        <a:t>PSNR ↑</a:t>
+                        <a:t>FE ↑</a:t>
+                      </a:r>
+                      <a:endParaRPr lang="en-US" sz="1200" dirty="0">
+                        <a:latin typeface="Times New Roman" charset="0"/>
+                        <a:ea typeface="Times New Roman" charset="0"/>
+                        <a:cs typeface="Times New Roman" charset="0"/>
+                      </a:endParaRPr>
+                    </a:p>
+                  </a:txBody>
+                  <a:tcPr marL="91440" marR="91440" marT="45720" marB="45720" anchor="ctr">
+                    <a:lnL w="6350" cap="flat" cmpd="sng" algn="ctr">
+                      <a:solidFill>
+                        <a:srgbClr val="BFBFBF"/>
+                      </a:solidFill>
+                      <a:prstDash val="solid"/>
+                      <a:round/>
+                      <a:headEnd type="none" w="med" len="med"/>
+                      <a:tailEnd type="none" w="med" len="med"/>
+                    </a:lnL>
+                    <a:lnR w="6350" cap="flat" cmpd="sng" algn="ctr">
+                      <a:solidFill>
+                        <a:srgbClr val="BFBFBF"/>
+                      </a:solidFill>
+                      <a:prstDash val="solid"/>
+                      <a:round/>
+                      <a:headEnd type="none" w="med" len="med"/>
+                      <a:tailEnd type="none" w="med" len="med"/>
+                    </a:lnR>
+                    <a:lnT w="6350" cap="flat" cmpd="sng" algn="ctr">
+                      <a:solidFill>
+                        <a:srgbClr val="BFBFBF"/>
+                      </a:solidFill>
+                      <a:prstDash val="solid"/>
+                      <a:round/>
+                      <a:headEnd type="none" w="med" len="med"/>
+                      <a:tailEnd type="none" w="med" len="med"/>
+                    </a:lnT>
+                    <a:lnB w="6350" cap="flat" cmpd="sng" algn="ctr">
+                      <a:solidFill>
+                        <a:srgbClr val="BFBFBF"/>
+                      </a:solidFill>
+                      <a:prstDash val="solid"/>
+                      <a:round/>
+                      <a:headEnd type="none" w="med" len="med"/>
+                      <a:tailEnd type="none" w="med" len="med"/>
+                    </a:lnB>
+                    <a:solidFill>
+                      <a:srgbClr val="F2F2F2"/>
+                    </a:solidFill>
+                  </a:tcPr>
+                </a:tc>
+                <a:tc>
+                  <a:txBody>
+                    <a:bodyPr/>
+                    <a:lstStyle/>
+                    <a:p>
+                      <a:pPr algn="ctr" indent="0" marL="0">
+                        <a:buNone/>
+                      </a:pPr>
+                      <a:r>
+                        <a:rPr lang="en-US" sz="1200" b="1" dirty="0">
+                          <a:solidFill>
+                            <a:srgbClr val="1A1A1A"/>
+                          </a:solidFill>
+                          <a:latin typeface="Times New Roman" pitchFamily="34" charset="0"/>
+                          <a:ea typeface="Times New Roman" pitchFamily="34" charset="-122"/>
+                          <a:cs typeface="Times New Roman" pitchFamily="34" charset="-120"/>
+                        </a:rPr>
+                        <a:t>SD ↑</a:t>
                       </a:r>
                       <a:endParaRPr lang="en-US" sz="1200" dirty="0">
                         <a:latin typeface="Times New Roman" charset="0"/>
@@ -3382,75 +3450,7 @@
                           <a:ea typeface="Times New Roman" pitchFamily="34" charset="-122"/>
                           <a:cs typeface="Times New Roman" pitchFamily="34" charset="-120"/>
                         </a:rPr>
-                        <a:t>MI_ir ↑</a:t>
-                      </a:r>
-                      <a:endParaRPr lang="en-US" sz="1200" dirty="0">
-                        <a:latin typeface="Times New Roman" charset="0"/>
-                        <a:ea typeface="Times New Roman" charset="0"/>
-                        <a:cs typeface="Times New Roman" charset="0"/>
-                      </a:endParaRPr>
-                    </a:p>
-                  </a:txBody>
-                  <a:tcPr marL="91440" marR="91440" marT="45720" marB="45720" anchor="ctr">
-                    <a:lnL w="6350" cap="flat" cmpd="sng" algn="ctr">
-                      <a:solidFill>
-                        <a:srgbClr val="BFBFBF"/>
-                      </a:solidFill>
-                      <a:prstDash val="solid"/>
-                      <a:round/>
-                      <a:headEnd type="none" w="med" len="med"/>
-                      <a:tailEnd type="none" w="med" len="med"/>
-                    </a:lnL>
-                    <a:lnR w="6350" cap="flat" cmpd="sng" algn="ctr">
-                      <a:solidFill>
-                        <a:srgbClr val="BFBFBF"/>
-                      </a:solidFill>
-                      <a:prstDash val="solid"/>
-                      <a:round/>
-                      <a:headEnd type="none" w="med" len="med"/>
-                      <a:tailEnd type="none" w="med" len="med"/>
-                    </a:lnR>
-                    <a:lnT w="6350" cap="flat" cmpd="sng" algn="ctr">
-                      <a:solidFill>
-                        <a:srgbClr val="BFBFBF"/>
-                      </a:solidFill>
-                      <a:prstDash val="solid"/>
-                      <a:round/>
-                      <a:headEnd type="none" w="med" len="med"/>
-                      <a:tailEnd type="none" w="med" len="med"/>
-                    </a:lnT>
-                    <a:lnB w="6350" cap="flat" cmpd="sng" algn="ctr">
-                      <a:solidFill>
-                        <a:srgbClr val="BFBFBF"/>
-                      </a:solidFill>
-                      <a:prstDash val="solid"/>
-                      <a:round/>
-                      <a:headEnd type="none" w="med" len="med"/>
-                      <a:tailEnd type="none" w="med" len="med"/>
-                    </a:lnB>
-                    <a:solidFill>
-                      <a:srgbClr val="F2F2F2"/>
-                    </a:solidFill>
-                  </a:tcPr>
-                </a:tc>
-                <a:tc>
-                  <a:txBody>
-                    <a:bodyPr/>
-                    <a:lstStyle/>
-                    <a:p>
-                      <a:pPr algn="ctr" indent="0" marL="0">
-                        <a:buNone/>
-                      </a:pPr>
-                      <a:r>
-                        <a:rPr lang="en-US" sz="1200" b="1" dirty="0">
-                          <a:solidFill>
-                            <a:srgbClr val="1A1A1A"/>
-                          </a:solidFill>
-                          <a:latin typeface="Times New Roman" pitchFamily="34" charset="0"/>
-                          <a:ea typeface="Times New Roman" pitchFamily="34" charset="-122"/>
-                          <a:cs typeface="Times New Roman" pitchFamily="34" charset="-120"/>
-                        </a:rPr>
-                        <a:t>SD ↑</a:t>
+                        <a:t>SSIM ↑</a:t>
                       </a:r>
                       <a:endParaRPr lang="en-US" sz="1200" dirty="0">
                         <a:latin typeface="Times New Roman" charset="0"/>
@@ -3585,7 +3585,7 @@
                           <a:ea typeface="Times New Roman" pitchFamily="34" charset="-122"/>
                           <a:cs typeface="Times New Roman" pitchFamily="34" charset="-120"/>
                         </a:rPr>
-                        <a:t>0,721</a:t>
+                        <a:t>6,835</a:t>
                       </a:r>
                       <a:endParaRPr lang="en-US" sz="1200" dirty="0">
                         <a:latin typeface="Times New Roman" charset="0"/>
@@ -3650,7 +3650,72 @@
                           <a:ea typeface="Times New Roman" pitchFamily="34" charset="-122"/>
                           <a:cs typeface="Times New Roman" pitchFamily="34" charset="-120"/>
                         </a:rPr>
-                        <a:t>20,27</a:t>
+                        <a:t>1,079</a:t>
+                      </a:r>
+                      <a:endParaRPr lang="en-US" sz="1200" dirty="0">
+                        <a:latin typeface="Times New Roman" charset="0"/>
+                        <a:ea typeface="Times New Roman" charset="0"/>
+                        <a:cs typeface="Times New Roman" charset="0"/>
+                      </a:endParaRPr>
+                    </a:p>
+                  </a:txBody>
+                  <a:tcPr marL="91440" marR="91440" marT="45720" marB="45720" anchor="ctr">
+                    <a:lnL w="6350" cap="flat" cmpd="sng" algn="ctr">
+                      <a:solidFill>
+                        <a:srgbClr val="BFBFBF"/>
+                      </a:solidFill>
+                      <a:prstDash val="solid"/>
+                      <a:round/>
+                      <a:headEnd type="none" w="med" len="med"/>
+                      <a:tailEnd type="none" w="med" len="med"/>
+                    </a:lnL>
+                    <a:lnR w="6350" cap="flat" cmpd="sng" algn="ctr">
+                      <a:solidFill>
+                        <a:srgbClr val="BFBFBF"/>
+                      </a:solidFill>
+                      <a:prstDash val="solid"/>
+                      <a:round/>
+                      <a:headEnd type="none" w="med" len="med"/>
+                      <a:tailEnd type="none" w="med" len="med"/>
+                    </a:lnR>
+                    <a:lnT w="6350" cap="flat" cmpd="sng" algn="ctr">
+                      <a:solidFill>
+                        <a:srgbClr val="BFBFBF"/>
+                      </a:solidFill>
+                      <a:prstDash val="solid"/>
+                      <a:round/>
+                      <a:headEnd type="none" w="med" len="med"/>
+                      <a:tailEnd type="none" w="med" len="med"/>
+                    </a:lnT>
+                    <a:lnB w="6350" cap="flat" cmpd="sng" algn="ctr">
+                      <a:solidFill>
+                        <a:srgbClr val="BFBFBF"/>
+                      </a:solidFill>
+                      <a:prstDash val="solid"/>
+                      <a:round/>
+                      <a:headEnd type="none" w="med" len="med"/>
+                      <a:tailEnd type="none" w="med" len="med"/>
+                    </a:lnB>
+                  </a:tcPr>
+                </a:tc>
+                <a:tc>
+                  <a:txBody>
+                    <a:bodyPr/>
+                    <a:lstStyle/>
+                    <a:p>
+                      <a:pPr algn="ctr" indent="0" marL="0">
+                        <a:buNone/>
+                      </a:pPr>
+                      <a:r>
+                        <a:rPr lang="en-US" sz="1200" b="1" dirty="0">
+                          <a:solidFill>
+                            <a:srgbClr val="1A1A1A"/>
+                          </a:solidFill>
+                          <a:latin typeface="Times New Roman" pitchFamily="34" charset="0"/>
+                          <a:ea typeface="Times New Roman" pitchFamily="34" charset="-122"/>
+                          <a:cs typeface="Times New Roman" pitchFamily="34" charset="-120"/>
+                        </a:rPr>
+                        <a:t>0,155</a:t>
                       </a:r>
                       <a:endParaRPr lang="en-US" sz="1200" dirty="0">
                         <a:latin typeface="Times New Roman" charset="0"/>
@@ -3772,7 +3837,7 @@
                         <a:buNone/>
                       </a:pPr>
                       <a:r>
-                        <a:rPr lang="en-US" sz="1200" b="1" dirty="0">
+                        <a:rPr lang="en-US" sz="1200" dirty="0">
                           <a:solidFill>
                             <a:srgbClr val="1A1A1A"/>
                           </a:solidFill>
@@ -3780,72 +3845,7 @@
                           <a:ea typeface="Times New Roman" pitchFamily="34" charset="-122"/>
                           <a:cs typeface="Times New Roman" pitchFamily="34" charset="-120"/>
                         </a:rPr>
-                        <a:t>1,072</a:t>
-                      </a:r>
-                      <a:endParaRPr lang="en-US" sz="1200" dirty="0">
-                        <a:latin typeface="Times New Roman" charset="0"/>
-                        <a:ea typeface="Times New Roman" charset="0"/>
-                        <a:cs typeface="Times New Roman" charset="0"/>
-                      </a:endParaRPr>
-                    </a:p>
-                  </a:txBody>
-                  <a:tcPr marL="91440" marR="91440" marT="45720" marB="45720" anchor="ctr">
-                    <a:lnL w="6350" cap="flat" cmpd="sng" algn="ctr">
-                      <a:solidFill>
-                        <a:srgbClr val="BFBFBF"/>
-                      </a:solidFill>
-                      <a:prstDash val="solid"/>
-                      <a:round/>
-                      <a:headEnd type="none" w="med" len="med"/>
-                      <a:tailEnd type="none" w="med" len="med"/>
-                    </a:lnL>
-                    <a:lnR w="6350" cap="flat" cmpd="sng" algn="ctr">
-                      <a:solidFill>
-                        <a:srgbClr val="BFBFBF"/>
-                      </a:solidFill>
-                      <a:prstDash val="solid"/>
-                      <a:round/>
-                      <a:headEnd type="none" w="med" len="med"/>
-                      <a:tailEnd type="none" w="med" len="med"/>
-                    </a:lnR>
-                    <a:lnT w="6350" cap="flat" cmpd="sng" algn="ctr">
-                      <a:solidFill>
-                        <a:srgbClr val="BFBFBF"/>
-                      </a:solidFill>
-                      <a:prstDash val="solid"/>
-                      <a:round/>
-                      <a:headEnd type="none" w="med" len="med"/>
-                      <a:tailEnd type="none" w="med" len="med"/>
-                    </a:lnT>
-                    <a:lnB w="6350" cap="flat" cmpd="sng" algn="ctr">
-                      <a:solidFill>
-                        <a:srgbClr val="BFBFBF"/>
-                      </a:solidFill>
-                      <a:prstDash val="solid"/>
-                      <a:round/>
-                      <a:headEnd type="none" w="med" len="med"/>
-                      <a:tailEnd type="none" w="med" len="med"/>
-                    </a:lnB>
-                  </a:tcPr>
-                </a:tc>
-                <a:tc>
-                  <a:txBody>
-                    <a:bodyPr/>
-                    <a:lstStyle/>
-                    <a:p>
-                      <a:pPr algn="ctr" indent="0" marL="0">
-                        <a:buNone/>
-                      </a:pPr>
-                      <a:r>
-                        <a:rPr lang="en-US" sz="1200" b="1" dirty="0">
-                          <a:solidFill>
-                            <a:srgbClr val="1A1A1A"/>
-                          </a:solidFill>
-                          <a:latin typeface="Times New Roman" pitchFamily="34" charset="0"/>
-                          <a:ea typeface="Times New Roman" pitchFamily="34" charset="-122"/>
-                          <a:cs typeface="Times New Roman" pitchFamily="34" charset="-120"/>
-                        </a:rPr>
-                        <a:t>0,155</a:t>
+                        <a:t>0,721</a:t>
                       </a:r>
                       <a:endParaRPr lang="en-US" sz="1200" dirty="0">
                         <a:latin typeface="Times New Roman" charset="0"/>
@@ -3977,7 +3977,7 @@
                           <a:ea typeface="Times New Roman" pitchFamily="34" charset="-122"/>
                           <a:cs typeface="Times New Roman" pitchFamily="34" charset="-120"/>
                         </a:rPr>
-                        <a:t>0,721</a:t>
+                        <a:t>6,829</a:t>
                       </a:r>
                       <a:endParaRPr lang="en-US" sz="1200" dirty="0">
                         <a:latin typeface="Times New Roman" charset="0"/>
@@ -4042,7 +4042,72 @@
                           <a:ea typeface="Times New Roman" pitchFamily="34" charset="-122"/>
                           <a:cs typeface="Times New Roman" pitchFamily="34" charset="-120"/>
                         </a:rPr>
-                        <a:t>21,97</a:t>
+                        <a:t>1,079</a:t>
+                      </a:r>
+                      <a:endParaRPr lang="en-US" sz="1200" dirty="0">
+                        <a:latin typeface="Times New Roman" charset="0"/>
+                        <a:ea typeface="Times New Roman" charset="0"/>
+                        <a:cs typeface="Times New Roman" charset="0"/>
+                      </a:endParaRPr>
+                    </a:p>
+                  </a:txBody>
+                  <a:tcPr marL="91440" marR="91440" marT="45720" marB="45720" anchor="ctr">
+                    <a:lnL w="6350" cap="flat" cmpd="sng" algn="ctr">
+                      <a:solidFill>
+                        <a:srgbClr val="BFBFBF"/>
+                      </a:solidFill>
+                      <a:prstDash val="solid"/>
+                      <a:round/>
+                      <a:headEnd type="none" w="med" len="med"/>
+                      <a:tailEnd type="none" w="med" len="med"/>
+                    </a:lnL>
+                    <a:lnR w="6350" cap="flat" cmpd="sng" algn="ctr">
+                      <a:solidFill>
+                        <a:srgbClr val="BFBFBF"/>
+                      </a:solidFill>
+                      <a:prstDash val="solid"/>
+                      <a:round/>
+                      <a:headEnd type="none" w="med" len="med"/>
+                      <a:tailEnd type="none" w="med" len="med"/>
+                    </a:lnR>
+                    <a:lnT w="6350" cap="flat" cmpd="sng" algn="ctr">
+                      <a:solidFill>
+                        <a:srgbClr val="BFBFBF"/>
+                      </a:solidFill>
+                      <a:prstDash val="solid"/>
+                      <a:round/>
+                      <a:headEnd type="none" w="med" len="med"/>
+                      <a:tailEnd type="none" w="med" len="med"/>
+                    </a:lnT>
+                    <a:lnB w="6350" cap="flat" cmpd="sng" algn="ctr">
+                      <a:solidFill>
+                        <a:srgbClr val="BFBFBF"/>
+                      </a:solidFill>
+                      <a:prstDash val="solid"/>
+                      <a:round/>
+                      <a:headEnd type="none" w="med" len="med"/>
+                      <a:tailEnd type="none" w="med" len="med"/>
+                    </a:lnB>
+                  </a:tcPr>
+                </a:tc>
+                <a:tc>
+                  <a:txBody>
+                    <a:bodyPr/>
+                    <a:lstStyle/>
+                    <a:p>
+                      <a:pPr algn="ctr" indent="0" marL="0">
+                        <a:buNone/>
+                      </a:pPr>
+                      <a:r>
+                        <a:rPr lang="en-US" sz="1200" dirty="0">
+                          <a:solidFill>
+                            <a:srgbClr val="1A1A1A"/>
+                          </a:solidFill>
+                          <a:latin typeface="Times New Roman" pitchFamily="34" charset="0"/>
+                          <a:ea typeface="Times New Roman" pitchFamily="34" charset="-122"/>
+                          <a:cs typeface="Times New Roman" pitchFamily="34" charset="-120"/>
+                        </a:rPr>
+                        <a:t>0,130</a:t>
                       </a:r>
                       <a:endParaRPr lang="en-US" sz="1200" dirty="0">
                         <a:latin typeface="Times New Roman" charset="0"/>
@@ -4172,72 +4237,7 @@
                           <a:ea typeface="Times New Roman" pitchFamily="34" charset="-122"/>
                           <a:cs typeface="Times New Roman" pitchFamily="34" charset="-120"/>
                         </a:rPr>
-                        <a:t>0,881</a:t>
-                      </a:r>
-                      <a:endParaRPr lang="en-US" sz="1200" dirty="0">
-                        <a:latin typeface="Times New Roman" charset="0"/>
-                        <a:ea typeface="Times New Roman" charset="0"/>
-                        <a:cs typeface="Times New Roman" charset="0"/>
-                      </a:endParaRPr>
-                    </a:p>
-                  </a:txBody>
-                  <a:tcPr marL="91440" marR="91440" marT="45720" marB="45720" anchor="ctr">
-                    <a:lnL w="6350" cap="flat" cmpd="sng" algn="ctr">
-                      <a:solidFill>
-                        <a:srgbClr val="BFBFBF"/>
-                      </a:solidFill>
-                      <a:prstDash val="solid"/>
-                      <a:round/>
-                      <a:headEnd type="none" w="med" len="med"/>
-                      <a:tailEnd type="none" w="med" len="med"/>
-                    </a:lnL>
-                    <a:lnR w="6350" cap="flat" cmpd="sng" algn="ctr">
-                      <a:solidFill>
-                        <a:srgbClr val="BFBFBF"/>
-                      </a:solidFill>
-                      <a:prstDash val="solid"/>
-                      <a:round/>
-                      <a:headEnd type="none" w="med" len="med"/>
-                      <a:tailEnd type="none" w="med" len="med"/>
-                    </a:lnR>
-                    <a:lnT w="6350" cap="flat" cmpd="sng" algn="ctr">
-                      <a:solidFill>
-                        <a:srgbClr val="BFBFBF"/>
-                      </a:solidFill>
-                      <a:prstDash val="solid"/>
-                      <a:round/>
-                      <a:headEnd type="none" w="med" len="med"/>
-                      <a:tailEnd type="none" w="med" len="med"/>
-                    </a:lnT>
-                    <a:lnB w="6350" cap="flat" cmpd="sng" algn="ctr">
-                      <a:solidFill>
-                        <a:srgbClr val="BFBFBF"/>
-                      </a:solidFill>
-                      <a:prstDash val="solid"/>
-                      <a:round/>
-                      <a:headEnd type="none" w="med" len="med"/>
-                      <a:tailEnd type="none" w="med" len="med"/>
-                    </a:lnB>
-                  </a:tcPr>
-                </a:tc>
-                <a:tc>
-                  <a:txBody>
-                    <a:bodyPr/>
-                    <a:lstStyle/>
-                    <a:p>
-                      <a:pPr algn="ctr" indent="0" marL="0">
-                        <a:buNone/>
-                      </a:pPr>
-                      <a:r>
-                        <a:rPr lang="en-US" sz="1200" dirty="0">
-                          <a:solidFill>
-                            <a:srgbClr val="1A1A1A"/>
-                          </a:solidFill>
-                          <a:latin typeface="Times New Roman" pitchFamily="34" charset="0"/>
-                          <a:ea typeface="Times New Roman" pitchFamily="34" charset="-122"/>
-                          <a:cs typeface="Times New Roman" pitchFamily="34" charset="-120"/>
-                        </a:rPr>
-                        <a:t>0,130</a:t>
+                        <a:t>0,721</a:t>
                       </a:r>
                       <a:endParaRPr lang="en-US" sz="1200" dirty="0">
                         <a:latin typeface="Times New Roman" charset="0"/>
@@ -4369,7 +4369,7 @@
                           <a:ea typeface="Times New Roman" pitchFamily="34" charset="-122"/>
                           <a:cs typeface="Times New Roman" pitchFamily="34" charset="-120"/>
                         </a:rPr>
-                        <a:t>0,716</a:t>
+                        <a:t>6,700</a:t>
                       </a:r>
                       <a:endParaRPr lang="en-US" sz="1200" dirty="0">
                         <a:latin typeface="Times New Roman" charset="0"/>
@@ -4434,7 +4434,72 @@
                           <a:ea typeface="Times New Roman" pitchFamily="34" charset="-122"/>
                           <a:cs typeface="Times New Roman" pitchFamily="34" charset="-120"/>
                         </a:rPr>
-                        <a:t>22,78</a:t>
+                        <a:t>1,059</a:t>
+                      </a:r>
+                      <a:endParaRPr lang="en-US" sz="1200" dirty="0">
+                        <a:latin typeface="Times New Roman" charset="0"/>
+                        <a:ea typeface="Times New Roman" charset="0"/>
+                        <a:cs typeface="Times New Roman" charset="0"/>
+                      </a:endParaRPr>
+                    </a:p>
+                  </a:txBody>
+                  <a:tcPr marL="91440" marR="91440" marT="45720" marB="45720" anchor="ctr">
+                    <a:lnL w="6350" cap="flat" cmpd="sng" algn="ctr">
+                      <a:solidFill>
+                        <a:srgbClr val="BFBFBF"/>
+                      </a:solidFill>
+                      <a:prstDash val="solid"/>
+                      <a:round/>
+                      <a:headEnd type="none" w="med" len="med"/>
+                      <a:tailEnd type="none" w="med" len="med"/>
+                    </a:lnL>
+                    <a:lnR w="6350" cap="flat" cmpd="sng" algn="ctr">
+                      <a:solidFill>
+                        <a:srgbClr val="BFBFBF"/>
+                      </a:solidFill>
+                      <a:prstDash val="solid"/>
+                      <a:round/>
+                      <a:headEnd type="none" w="med" len="med"/>
+                      <a:tailEnd type="none" w="med" len="med"/>
+                    </a:lnR>
+                    <a:lnT w="6350" cap="flat" cmpd="sng" algn="ctr">
+                      <a:solidFill>
+                        <a:srgbClr val="BFBFBF"/>
+                      </a:solidFill>
+                      <a:prstDash val="solid"/>
+                      <a:round/>
+                      <a:headEnd type="none" w="med" len="med"/>
+                      <a:tailEnd type="none" w="med" len="med"/>
+                    </a:lnT>
+                    <a:lnB w="6350" cap="flat" cmpd="sng" algn="ctr">
+                      <a:solidFill>
+                        <a:srgbClr val="BFBFBF"/>
+                      </a:solidFill>
+                      <a:prstDash val="solid"/>
+                      <a:round/>
+                      <a:headEnd type="none" w="med" len="med"/>
+                      <a:tailEnd type="none" w="med" len="med"/>
+                    </a:lnB>
+                  </a:tcPr>
+                </a:tc>
+                <a:tc>
+                  <a:txBody>
+                    <a:bodyPr/>
+                    <a:lstStyle/>
+                    <a:p>
+                      <a:pPr algn="ctr" indent="0" marL="0">
+                        <a:buNone/>
+                      </a:pPr>
+                      <a:r>
+                        <a:rPr lang="en-US" sz="1200" dirty="0">
+                          <a:solidFill>
+                            <a:srgbClr val="1A1A1A"/>
+                          </a:solidFill>
+                          <a:latin typeface="Times New Roman" pitchFamily="34" charset="0"/>
+                          <a:ea typeface="Times New Roman" pitchFamily="34" charset="-122"/>
+                          <a:cs typeface="Times New Roman" pitchFamily="34" charset="-120"/>
+                        </a:rPr>
+                        <a:t>0,120</a:t>
                       </a:r>
                       <a:endParaRPr lang="en-US" sz="1200" dirty="0">
                         <a:latin typeface="Times New Roman" charset="0"/>
@@ -4564,72 +4629,7 @@
                           <a:ea typeface="Times New Roman" pitchFamily="34" charset="-122"/>
                           <a:cs typeface="Times New Roman" pitchFamily="34" charset="-120"/>
                         </a:rPr>
-                        <a:t>0,881</a:t>
-                      </a:r>
-                      <a:endParaRPr lang="en-US" sz="1200" dirty="0">
-                        <a:latin typeface="Times New Roman" charset="0"/>
-                        <a:ea typeface="Times New Roman" charset="0"/>
-                        <a:cs typeface="Times New Roman" charset="0"/>
-                      </a:endParaRPr>
-                    </a:p>
-                  </a:txBody>
-                  <a:tcPr marL="91440" marR="91440" marT="45720" marB="45720" anchor="ctr">
-                    <a:lnL w="6350" cap="flat" cmpd="sng" algn="ctr">
-                      <a:solidFill>
-                        <a:srgbClr val="BFBFBF"/>
-                      </a:solidFill>
-                      <a:prstDash val="solid"/>
-                      <a:round/>
-                      <a:headEnd type="none" w="med" len="med"/>
-                      <a:tailEnd type="none" w="med" len="med"/>
-                    </a:lnL>
-                    <a:lnR w="6350" cap="flat" cmpd="sng" algn="ctr">
-                      <a:solidFill>
-                        <a:srgbClr val="BFBFBF"/>
-                      </a:solidFill>
-                      <a:prstDash val="solid"/>
-                      <a:round/>
-                      <a:headEnd type="none" w="med" len="med"/>
-                      <a:tailEnd type="none" w="med" len="med"/>
-                    </a:lnR>
-                    <a:lnT w="6350" cap="flat" cmpd="sng" algn="ctr">
-                      <a:solidFill>
-                        <a:srgbClr val="BFBFBF"/>
-                      </a:solidFill>
-                      <a:prstDash val="solid"/>
-                      <a:round/>
-                      <a:headEnd type="none" w="med" len="med"/>
-                      <a:tailEnd type="none" w="med" len="med"/>
-                    </a:lnT>
-                    <a:lnB w="6350" cap="flat" cmpd="sng" algn="ctr">
-                      <a:solidFill>
-                        <a:srgbClr val="BFBFBF"/>
-                      </a:solidFill>
-                      <a:prstDash val="solid"/>
-                      <a:round/>
-                      <a:headEnd type="none" w="med" len="med"/>
-                      <a:tailEnd type="none" w="med" len="med"/>
-                    </a:lnB>
-                  </a:tcPr>
-                </a:tc>
-                <a:tc>
-                  <a:txBody>
-                    <a:bodyPr/>
-                    <a:lstStyle/>
-                    <a:p>
-                      <a:pPr algn="ctr" indent="0" marL="0">
-                        <a:buNone/>
-                      </a:pPr>
-                      <a:r>
-                        <a:rPr lang="en-US" sz="1200" dirty="0">
-                          <a:solidFill>
-                            <a:srgbClr val="1A1A1A"/>
-                          </a:solidFill>
-                          <a:latin typeface="Times New Roman" pitchFamily="34" charset="0"/>
-                          <a:ea typeface="Times New Roman" pitchFamily="34" charset="-122"/>
-                          <a:cs typeface="Times New Roman" pitchFamily="34" charset="-120"/>
-                        </a:rPr>
-                        <a:t>0,120</a:t>
+                        <a:t>0,716</a:t>
                       </a:r>
                       <a:endParaRPr lang="en-US" sz="1200" dirty="0">
                         <a:latin typeface="Times New Roman" charset="0"/>
@@ -4761,7 +4761,7 @@
                           <a:ea typeface="Times New Roman" pitchFamily="34" charset="-122"/>
                           <a:cs typeface="Times New Roman" pitchFamily="34" charset="-120"/>
                         </a:rPr>
-                        <a:t>0,739</a:t>
+                        <a:t>6,706</a:t>
                       </a:r>
                       <a:endParaRPr lang="en-US" sz="1200" dirty="0">
                         <a:latin typeface="Times New Roman" charset="0"/>
@@ -4826,7 +4826,72 @@
                           <a:ea typeface="Times New Roman" pitchFamily="34" charset="-122"/>
                           <a:cs typeface="Times New Roman" pitchFamily="34" charset="-120"/>
                         </a:rPr>
-                        <a:t>22,79</a:t>
+                        <a:t>1,060</a:t>
+                      </a:r>
+                      <a:endParaRPr lang="en-US" sz="1200" dirty="0">
+                        <a:latin typeface="Times New Roman" charset="0"/>
+                        <a:ea typeface="Times New Roman" charset="0"/>
+                        <a:cs typeface="Times New Roman" charset="0"/>
+                      </a:endParaRPr>
+                    </a:p>
+                  </a:txBody>
+                  <a:tcPr marL="91440" marR="91440" marT="45720" marB="45720" anchor="ctr">
+                    <a:lnL w="6350" cap="flat" cmpd="sng" algn="ctr">
+                      <a:solidFill>
+                        <a:srgbClr val="BFBFBF"/>
+                      </a:solidFill>
+                      <a:prstDash val="solid"/>
+                      <a:round/>
+                      <a:headEnd type="none" w="med" len="med"/>
+                      <a:tailEnd type="none" w="med" len="med"/>
+                    </a:lnL>
+                    <a:lnR w="6350" cap="flat" cmpd="sng" algn="ctr">
+                      <a:solidFill>
+                        <a:srgbClr val="BFBFBF"/>
+                      </a:solidFill>
+                      <a:prstDash val="solid"/>
+                      <a:round/>
+                      <a:headEnd type="none" w="med" len="med"/>
+                      <a:tailEnd type="none" w="med" len="med"/>
+                    </a:lnR>
+                    <a:lnT w="6350" cap="flat" cmpd="sng" algn="ctr">
+                      <a:solidFill>
+                        <a:srgbClr val="BFBFBF"/>
+                      </a:solidFill>
+                      <a:prstDash val="solid"/>
+                      <a:round/>
+                      <a:headEnd type="none" w="med" len="med"/>
+                      <a:tailEnd type="none" w="med" len="med"/>
+                    </a:lnT>
+                    <a:lnB w="6350" cap="flat" cmpd="sng" algn="ctr">
+                      <a:solidFill>
+                        <a:srgbClr val="BFBFBF"/>
+                      </a:solidFill>
+                      <a:prstDash val="solid"/>
+                      <a:round/>
+                      <a:headEnd type="none" w="med" len="med"/>
+                      <a:tailEnd type="none" w="med" len="med"/>
+                    </a:lnB>
+                  </a:tcPr>
+                </a:tc>
+                <a:tc>
+                  <a:txBody>
+                    <a:bodyPr/>
+                    <a:lstStyle/>
+                    <a:p>
+                      <a:pPr algn="ctr" indent="0" marL="0">
+                        <a:buNone/>
+                      </a:pPr>
+                      <a:r>
+                        <a:rPr lang="en-US" sz="1200" dirty="0">
+                          <a:solidFill>
+                            <a:srgbClr val="1A1A1A"/>
+                          </a:solidFill>
+                          <a:latin typeface="Times New Roman" pitchFamily="34" charset="0"/>
+                          <a:ea typeface="Times New Roman" pitchFamily="34" charset="-122"/>
+                          <a:cs typeface="Times New Roman" pitchFamily="34" charset="-120"/>
+                        </a:rPr>
+                        <a:t>0,121</a:t>
                       </a:r>
                       <a:endParaRPr lang="en-US" sz="1200" dirty="0">
                         <a:latin typeface="Times New Roman" charset="0"/>
@@ -4948,7 +5013,7 @@
                         <a:buNone/>
                       </a:pPr>
                       <a:r>
-                        <a:rPr lang="en-US" sz="1200" dirty="0">
+                        <a:rPr lang="en-US" sz="1200" b="1" dirty="0">
                           <a:solidFill>
                             <a:srgbClr val="1A1A1A"/>
                           </a:solidFill>
@@ -4956,72 +5021,7 @@
                           <a:ea typeface="Times New Roman" pitchFamily="34" charset="-122"/>
                           <a:cs typeface="Times New Roman" pitchFamily="34" charset="-120"/>
                         </a:rPr>
-                        <a:t>0,891</a:t>
-                      </a:r>
-                      <a:endParaRPr lang="en-US" sz="1200" dirty="0">
-                        <a:latin typeface="Times New Roman" charset="0"/>
-                        <a:ea typeface="Times New Roman" charset="0"/>
-                        <a:cs typeface="Times New Roman" charset="0"/>
-                      </a:endParaRPr>
-                    </a:p>
-                  </a:txBody>
-                  <a:tcPr marL="91440" marR="91440" marT="45720" marB="45720" anchor="ctr">
-                    <a:lnL w="6350" cap="flat" cmpd="sng" algn="ctr">
-                      <a:solidFill>
-                        <a:srgbClr val="BFBFBF"/>
-                      </a:solidFill>
-                      <a:prstDash val="solid"/>
-                      <a:round/>
-                      <a:headEnd type="none" w="med" len="med"/>
-                      <a:tailEnd type="none" w="med" len="med"/>
-                    </a:lnL>
-                    <a:lnR w="6350" cap="flat" cmpd="sng" algn="ctr">
-                      <a:solidFill>
-                        <a:srgbClr val="BFBFBF"/>
-                      </a:solidFill>
-                      <a:prstDash val="solid"/>
-                      <a:round/>
-                      <a:headEnd type="none" w="med" len="med"/>
-                      <a:tailEnd type="none" w="med" len="med"/>
-                    </a:lnR>
-                    <a:lnT w="6350" cap="flat" cmpd="sng" algn="ctr">
-                      <a:solidFill>
-                        <a:srgbClr val="BFBFBF"/>
-                      </a:solidFill>
-                      <a:prstDash val="solid"/>
-                      <a:round/>
-                      <a:headEnd type="none" w="med" len="med"/>
-                      <a:tailEnd type="none" w="med" len="med"/>
-                    </a:lnT>
-                    <a:lnB w="6350" cap="flat" cmpd="sng" algn="ctr">
-                      <a:solidFill>
-                        <a:srgbClr val="BFBFBF"/>
-                      </a:solidFill>
-                      <a:prstDash val="solid"/>
-                      <a:round/>
-                      <a:headEnd type="none" w="med" len="med"/>
-                      <a:tailEnd type="none" w="med" len="med"/>
-                    </a:lnB>
-                  </a:tcPr>
-                </a:tc>
-                <a:tc>
-                  <a:txBody>
-                    <a:bodyPr/>
-                    <a:lstStyle/>
-                    <a:p>
-                      <a:pPr algn="ctr" indent="0" marL="0">
-                        <a:buNone/>
-                      </a:pPr>
-                      <a:r>
-                        <a:rPr lang="en-US" sz="1200" dirty="0">
-                          <a:solidFill>
-                            <a:srgbClr val="1A1A1A"/>
-                          </a:solidFill>
-                          <a:latin typeface="Times New Roman" pitchFamily="34" charset="0"/>
-                          <a:ea typeface="Times New Roman" pitchFamily="34" charset="-122"/>
-                          <a:cs typeface="Times New Roman" pitchFamily="34" charset="-120"/>
-                        </a:rPr>
-                        <a:t>0,120</a:t>
+                        <a:t>0,739</a:t>
                       </a:r>
                       <a:endParaRPr lang="en-US" sz="1200" dirty="0">
                         <a:latin typeface="Times New Roman" charset="0"/>
@@ -5153,7 +5153,7 @@
                           <a:ea typeface="Times New Roman" pitchFamily="34" charset="-122"/>
                           <a:cs typeface="Times New Roman" pitchFamily="34" charset="-120"/>
                         </a:rPr>
-                        <a:t>0,731</a:t>
+                        <a:t>6,665</a:t>
                       </a:r>
                       <a:endParaRPr lang="en-US" sz="1200" dirty="0">
                         <a:latin typeface="Times New Roman" charset="0"/>
@@ -5210,7 +5210,7 @@
                         <a:buNone/>
                       </a:pPr>
                       <a:r>
-                        <a:rPr lang="en-US" sz="1200" b="1" dirty="0">
+                        <a:rPr lang="en-US" sz="1200" dirty="0">
                           <a:solidFill>
                             <a:srgbClr val="1A1A1A"/>
                           </a:solidFill>
@@ -5218,7 +5218,72 @@
                           <a:ea typeface="Times New Roman" pitchFamily="34" charset="-122"/>
                           <a:cs typeface="Times New Roman" pitchFamily="34" charset="-120"/>
                         </a:rPr>
-                        <a:t>22,84</a:t>
+                        <a:t>1,053</a:t>
+                      </a:r>
+                      <a:endParaRPr lang="en-US" sz="1200" dirty="0">
+                        <a:latin typeface="Times New Roman" charset="0"/>
+                        <a:ea typeface="Times New Roman" charset="0"/>
+                        <a:cs typeface="Times New Roman" charset="0"/>
+                      </a:endParaRPr>
+                    </a:p>
+                  </a:txBody>
+                  <a:tcPr marL="91440" marR="91440" marT="45720" marB="45720" anchor="ctr">
+                    <a:lnL w="6350" cap="flat" cmpd="sng" algn="ctr">
+                      <a:solidFill>
+                        <a:srgbClr val="BFBFBF"/>
+                      </a:solidFill>
+                      <a:prstDash val="solid"/>
+                      <a:round/>
+                      <a:headEnd type="none" w="med" len="med"/>
+                      <a:tailEnd type="none" w="med" len="med"/>
+                    </a:lnL>
+                    <a:lnR w="6350" cap="flat" cmpd="sng" algn="ctr">
+                      <a:solidFill>
+                        <a:srgbClr val="BFBFBF"/>
+                      </a:solidFill>
+                      <a:prstDash val="solid"/>
+                      <a:round/>
+                      <a:headEnd type="none" w="med" len="med"/>
+                      <a:tailEnd type="none" w="med" len="med"/>
+                    </a:lnR>
+                    <a:lnT w="6350" cap="flat" cmpd="sng" algn="ctr">
+                      <a:solidFill>
+                        <a:srgbClr val="BFBFBF"/>
+                      </a:solidFill>
+                      <a:prstDash val="solid"/>
+                      <a:round/>
+                      <a:headEnd type="none" w="med" len="med"/>
+                      <a:tailEnd type="none" w="med" len="med"/>
+                    </a:lnT>
+                    <a:lnB w="6350" cap="flat" cmpd="sng" algn="ctr">
+                      <a:solidFill>
+                        <a:srgbClr val="BFBFBF"/>
+                      </a:solidFill>
+                      <a:prstDash val="solid"/>
+                      <a:round/>
+                      <a:headEnd type="none" w="med" len="med"/>
+                      <a:tailEnd type="none" w="med" len="med"/>
+                    </a:lnB>
+                  </a:tcPr>
+                </a:tc>
+                <a:tc>
+                  <a:txBody>
+                    <a:bodyPr/>
+                    <a:lstStyle/>
+                    <a:p>
+                      <a:pPr algn="ctr" indent="0" marL="0">
+                        <a:buNone/>
+                      </a:pPr>
+                      <a:r>
+                        <a:rPr lang="en-US" sz="1200" dirty="0">
+                          <a:solidFill>
+                            <a:srgbClr val="1A1A1A"/>
+                          </a:solidFill>
+                          <a:latin typeface="Times New Roman" pitchFamily="34" charset="0"/>
+                          <a:ea typeface="Times New Roman" pitchFamily="34" charset="-122"/>
+                          <a:cs typeface="Times New Roman" pitchFamily="34" charset="-120"/>
+                        </a:rPr>
+                        <a:t>0,117</a:t>
                       </a:r>
                       <a:endParaRPr lang="en-US" sz="1200" dirty="0">
                         <a:latin typeface="Times New Roman" charset="0"/>
@@ -5348,72 +5413,7 @@
                           <a:ea typeface="Times New Roman" pitchFamily="34" charset="-122"/>
                           <a:cs typeface="Times New Roman" pitchFamily="34" charset="-120"/>
                         </a:rPr>
-                        <a:t>0,884</a:t>
-                      </a:r>
-                      <a:endParaRPr lang="en-US" sz="1200" dirty="0">
-                        <a:latin typeface="Times New Roman" charset="0"/>
-                        <a:ea typeface="Times New Roman" charset="0"/>
-                        <a:cs typeface="Times New Roman" charset="0"/>
-                      </a:endParaRPr>
-                    </a:p>
-                  </a:txBody>
-                  <a:tcPr marL="91440" marR="91440" marT="45720" marB="45720" anchor="ctr">
-                    <a:lnL w="6350" cap="flat" cmpd="sng" algn="ctr">
-                      <a:solidFill>
-                        <a:srgbClr val="BFBFBF"/>
-                      </a:solidFill>
-                      <a:prstDash val="solid"/>
-                      <a:round/>
-                      <a:headEnd type="none" w="med" len="med"/>
-                      <a:tailEnd type="none" w="med" len="med"/>
-                    </a:lnL>
-                    <a:lnR w="6350" cap="flat" cmpd="sng" algn="ctr">
-                      <a:solidFill>
-                        <a:srgbClr val="BFBFBF"/>
-                      </a:solidFill>
-                      <a:prstDash val="solid"/>
-                      <a:round/>
-                      <a:headEnd type="none" w="med" len="med"/>
-                      <a:tailEnd type="none" w="med" len="med"/>
-                    </a:lnR>
-                    <a:lnT w="6350" cap="flat" cmpd="sng" algn="ctr">
-                      <a:solidFill>
-                        <a:srgbClr val="BFBFBF"/>
-                      </a:solidFill>
-                      <a:prstDash val="solid"/>
-                      <a:round/>
-                      <a:headEnd type="none" w="med" len="med"/>
-                      <a:tailEnd type="none" w="med" len="med"/>
-                    </a:lnT>
-                    <a:lnB w="6350" cap="flat" cmpd="sng" algn="ctr">
-                      <a:solidFill>
-                        <a:srgbClr val="BFBFBF"/>
-                      </a:solidFill>
-                      <a:prstDash val="solid"/>
-                      <a:round/>
-                      <a:headEnd type="none" w="med" len="med"/>
-                      <a:tailEnd type="none" w="med" len="med"/>
-                    </a:lnB>
-                  </a:tcPr>
-                </a:tc>
-                <a:tc>
-                  <a:txBody>
-                    <a:bodyPr/>
-                    <a:lstStyle/>
-                    <a:p>
-                      <a:pPr algn="ctr" indent="0" marL="0">
-                        <a:buNone/>
-                      </a:pPr>
-                      <a:r>
-                        <a:rPr lang="en-US" sz="1200" dirty="0">
-                          <a:solidFill>
-                            <a:srgbClr val="1A1A1A"/>
-                          </a:solidFill>
-                          <a:latin typeface="Times New Roman" pitchFamily="34" charset="0"/>
-                          <a:ea typeface="Times New Roman" pitchFamily="34" charset="-122"/>
-                          <a:cs typeface="Times New Roman" pitchFamily="34" charset="-120"/>
-                        </a:rPr>
-                        <a:t>0,117</a:t>
+                        <a:t>0,731</a:t>
                       </a:r>
                       <a:endParaRPr lang="en-US" sz="1200" dirty="0">
                         <a:latin typeface="Times New Roman" charset="0"/>
@@ -5545,7 +5545,7 @@
                           <a:ea typeface="Times New Roman" pitchFamily="34" charset="-122"/>
                           <a:cs typeface="Times New Roman" pitchFamily="34" charset="-120"/>
                         </a:rPr>
-                        <a:t>0,578</a:t>
+                        <a:t>6,933</a:t>
                       </a:r>
                       <a:endParaRPr lang="en-US" sz="1200" dirty="0">
                         <a:latin typeface="Times New Roman" charset="0"/>
@@ -5610,7 +5610,72 @@
                           <a:ea typeface="Times New Roman" pitchFamily="34" charset="-122"/>
                           <a:cs typeface="Times New Roman" pitchFamily="34" charset="-120"/>
                         </a:rPr>
-                        <a:t>17,49</a:t>
+                        <a:t>1,096</a:t>
+                      </a:r>
+                      <a:endParaRPr lang="en-US" sz="1200" dirty="0">
+                        <a:latin typeface="Times New Roman" charset="0"/>
+                        <a:ea typeface="Times New Roman" charset="0"/>
+                        <a:cs typeface="Times New Roman" charset="0"/>
+                      </a:endParaRPr>
+                    </a:p>
+                  </a:txBody>
+                  <a:tcPr marL="91440" marR="91440" marT="45720" marB="45720" anchor="ctr">
+                    <a:lnL w="6350" cap="flat" cmpd="sng" algn="ctr">
+                      <a:solidFill>
+                        <a:srgbClr val="BFBFBF"/>
+                      </a:solidFill>
+                      <a:prstDash val="solid"/>
+                      <a:round/>
+                      <a:headEnd type="none" w="med" len="med"/>
+                      <a:tailEnd type="none" w="med" len="med"/>
+                    </a:lnL>
+                    <a:lnR w="6350" cap="flat" cmpd="sng" algn="ctr">
+                      <a:solidFill>
+                        <a:srgbClr val="BFBFBF"/>
+                      </a:solidFill>
+                      <a:prstDash val="solid"/>
+                      <a:round/>
+                      <a:headEnd type="none" w="med" len="med"/>
+                      <a:tailEnd type="none" w="med" len="med"/>
+                    </a:lnR>
+                    <a:lnT w="6350" cap="flat" cmpd="sng" algn="ctr">
+                      <a:solidFill>
+                        <a:srgbClr val="BFBFBF"/>
+                      </a:solidFill>
+                      <a:prstDash val="solid"/>
+                      <a:round/>
+                      <a:headEnd type="none" w="med" len="med"/>
+                      <a:tailEnd type="none" w="med" len="med"/>
+                    </a:lnT>
+                    <a:lnB w="6350" cap="flat" cmpd="sng" algn="ctr">
+                      <a:solidFill>
+                        <a:srgbClr val="BFBFBF"/>
+                      </a:solidFill>
+                      <a:prstDash val="solid"/>
+                      <a:round/>
+                      <a:headEnd type="none" w="med" len="med"/>
+                      <a:tailEnd type="none" w="med" len="med"/>
+                    </a:lnB>
+                  </a:tcPr>
+                </a:tc>
+                <a:tc>
+                  <a:txBody>
+                    <a:bodyPr/>
+                    <a:lstStyle/>
+                    <a:p>
+                      <a:pPr algn="ctr" indent="0" marL="0">
+                        <a:buNone/>
+                      </a:pPr>
+                      <a:r>
+                        <a:rPr lang="en-US" sz="1200" dirty="0">
+                          <a:solidFill>
+                            <a:srgbClr val="1A1A1A"/>
+                          </a:solidFill>
+                          <a:latin typeface="Times New Roman" pitchFamily="34" charset="0"/>
+                          <a:ea typeface="Times New Roman" pitchFamily="34" charset="-122"/>
+                          <a:cs typeface="Times New Roman" pitchFamily="34" charset="-120"/>
+                        </a:rPr>
+                        <a:t>0,139</a:t>
                       </a:r>
                       <a:endParaRPr lang="en-US" sz="1200" dirty="0">
                         <a:latin typeface="Times New Roman" charset="0"/>
@@ -5740,72 +5805,7 @@
                           <a:ea typeface="Times New Roman" pitchFamily="34" charset="-122"/>
                           <a:cs typeface="Times New Roman" pitchFamily="34" charset="-120"/>
                         </a:rPr>
-                        <a:t>0,586</a:t>
-                      </a:r>
-                      <a:endParaRPr lang="en-US" sz="1200" dirty="0">
-                        <a:latin typeface="Times New Roman" charset="0"/>
-                        <a:ea typeface="Times New Roman" charset="0"/>
-                        <a:cs typeface="Times New Roman" charset="0"/>
-                      </a:endParaRPr>
-                    </a:p>
-                  </a:txBody>
-                  <a:tcPr marL="91440" marR="91440" marT="45720" marB="45720" anchor="ctr">
-                    <a:lnL w="6350" cap="flat" cmpd="sng" algn="ctr">
-                      <a:solidFill>
-                        <a:srgbClr val="BFBFBF"/>
-                      </a:solidFill>
-                      <a:prstDash val="solid"/>
-                      <a:round/>
-                      <a:headEnd type="none" w="med" len="med"/>
-                      <a:tailEnd type="none" w="med" len="med"/>
-                    </a:lnL>
-                    <a:lnR w="6350" cap="flat" cmpd="sng" algn="ctr">
-                      <a:solidFill>
-                        <a:srgbClr val="BFBFBF"/>
-                      </a:solidFill>
-                      <a:prstDash val="solid"/>
-                      <a:round/>
-                      <a:headEnd type="none" w="med" len="med"/>
-                      <a:tailEnd type="none" w="med" len="med"/>
-                    </a:lnR>
-                    <a:lnT w="6350" cap="flat" cmpd="sng" algn="ctr">
-                      <a:solidFill>
-                        <a:srgbClr val="BFBFBF"/>
-                      </a:solidFill>
-                      <a:prstDash val="solid"/>
-                      <a:round/>
-                      <a:headEnd type="none" w="med" len="med"/>
-                      <a:tailEnd type="none" w="med" len="med"/>
-                    </a:lnT>
-                    <a:lnB w="6350" cap="flat" cmpd="sng" algn="ctr">
-                      <a:solidFill>
-                        <a:srgbClr val="BFBFBF"/>
-                      </a:solidFill>
-                      <a:prstDash val="solid"/>
-                      <a:round/>
-                      <a:headEnd type="none" w="med" len="med"/>
-                      <a:tailEnd type="none" w="med" len="med"/>
-                    </a:lnB>
-                  </a:tcPr>
-                </a:tc>
-                <a:tc>
-                  <a:txBody>
-                    <a:bodyPr/>
-                    <a:lstStyle/>
-                    <a:p>
-                      <a:pPr algn="ctr" indent="0" marL="0">
-                        <a:buNone/>
-                      </a:pPr>
-                      <a:r>
-                        <a:rPr lang="en-US" sz="1200" dirty="0">
-                          <a:solidFill>
-                            <a:srgbClr val="1A1A1A"/>
-                          </a:solidFill>
-                          <a:latin typeface="Times New Roman" pitchFamily="34" charset="0"/>
-                          <a:ea typeface="Times New Roman" pitchFamily="34" charset="-122"/>
-                          <a:cs typeface="Times New Roman" pitchFamily="34" charset="-120"/>
-                        </a:rPr>
-                        <a:t>0,139</a:t>
+                        <a:t>0,578</a:t>
                       </a:r>
                       <a:endParaRPr lang="en-US" sz="1200" dirty="0">
                         <a:latin typeface="Times New Roman" charset="0"/>
@@ -5872,7 +5872,7 @@
                           <a:ea typeface="Times New Roman" pitchFamily="34" charset="-122"/>
                           <a:cs typeface="Times New Roman" pitchFamily="34" charset="-120"/>
                         </a:rPr>
-                        <a:t>Propuesta Novedosa (r=25; m=0,070)</a:t>
+                        <a:t>Propuesta Novedosa (r=25; m=0,30)</a:t>
                       </a:r>
                       <a:endParaRPr lang="en-US" sz="1200" dirty="0">
                         <a:latin typeface="Times New Roman" charset="0"/>
@@ -5937,7 +5937,72 @@
                           <a:ea typeface="Times New Roman" pitchFamily="34" charset="-122"/>
                           <a:cs typeface="Times New Roman" pitchFamily="34" charset="-120"/>
                         </a:rPr>
-                        <a:t>0,782</a:t>
+                        <a:t>6,989</a:t>
+                      </a:r>
+                      <a:endParaRPr lang="en-US" sz="1200" dirty="0">
+                        <a:latin typeface="Times New Roman" charset="0"/>
+                        <a:ea typeface="Times New Roman" charset="0"/>
+                        <a:cs typeface="Times New Roman" charset="0"/>
+                      </a:endParaRPr>
+                    </a:p>
+                  </a:txBody>
+                  <a:tcPr marL="91440" marR="91440" marT="45720" marB="45720" anchor="ctr">
+                    <a:lnL w="6350" cap="flat" cmpd="sng" algn="ctr">
+                      <a:solidFill>
+                        <a:srgbClr val="BFBFBF"/>
+                      </a:solidFill>
+                      <a:prstDash val="solid"/>
+                      <a:round/>
+                      <a:headEnd type="none" w="med" len="med"/>
+                      <a:tailEnd type="none" w="med" len="med"/>
+                    </a:lnL>
+                    <a:lnR w="6350" cap="flat" cmpd="sng" algn="ctr">
+                      <a:solidFill>
+                        <a:srgbClr val="BFBFBF"/>
+                      </a:solidFill>
+                      <a:prstDash val="solid"/>
+                      <a:round/>
+                      <a:headEnd type="none" w="med" len="med"/>
+                      <a:tailEnd type="none" w="med" len="med"/>
+                    </a:lnR>
+                    <a:lnT w="6350" cap="flat" cmpd="sng" algn="ctr">
+                      <a:solidFill>
+                        <a:srgbClr val="BFBFBF"/>
+                      </a:solidFill>
+                      <a:prstDash val="solid"/>
+                      <a:round/>
+                      <a:headEnd type="none" w="med" len="med"/>
+                      <a:tailEnd type="none" w="med" len="med"/>
+                    </a:lnT>
+                    <a:lnB w="6350" cap="flat" cmpd="sng" algn="ctr">
+                      <a:solidFill>
+                        <a:srgbClr val="BFBFBF"/>
+                      </a:solidFill>
+                      <a:prstDash val="solid"/>
+                      <a:round/>
+                      <a:headEnd type="none" w="med" len="med"/>
+                      <a:tailEnd type="none" w="med" len="med"/>
+                    </a:lnB>
+                  </a:tcPr>
+                </a:tc>
+                <a:tc>
+                  <a:txBody>
+                    <a:bodyPr/>
+                    <a:lstStyle/>
+                    <a:p>
+                      <a:pPr algn="ctr" indent="0" marL="0">
+                        <a:buNone/>
+                      </a:pPr>
+                      <a:r>
+                        <a:rPr lang="en-US" sz="1200" b="1" dirty="0">
+                          <a:solidFill>
+                            <a:srgbClr val="8B1A1A"/>
+                          </a:solidFill>
+                          <a:latin typeface="Times New Roman" pitchFamily="34" charset="0"/>
+                          <a:ea typeface="Times New Roman" pitchFamily="34" charset="-122"/>
+                          <a:cs typeface="Times New Roman" pitchFamily="34" charset="-120"/>
+                        </a:rPr>
+                        <a:t>1,105</a:t>
                       </a:r>
                       <a:endParaRPr lang="en-US" sz="1200" dirty="0">
                         <a:latin typeface="Times New Roman" charset="0"/>
@@ -6002,7 +6067,7 @@
                           <a:ea typeface="Times New Roman" pitchFamily="34" charset="-122"/>
                           <a:cs typeface="Times New Roman" pitchFamily="34" charset="-120"/>
                         </a:rPr>
-                        <a:t>18,73</a:t>
+                        <a:t>0,148</a:t>
                       </a:r>
                       <a:endParaRPr lang="en-US" sz="1200" dirty="0">
                         <a:latin typeface="Times New Roman" charset="0"/>
@@ -6067,7 +6132,7 @@
                           <a:ea typeface="Times New Roman" pitchFamily="34" charset="-122"/>
                           <a:cs typeface="Times New Roman" pitchFamily="34" charset="-120"/>
                         </a:rPr>
-                        <a:t>9,64</a:t>
+                        <a:t>17,34</a:t>
                       </a:r>
                       <a:endParaRPr lang="en-US" sz="1200" dirty="0">
                         <a:latin typeface="Times New Roman" charset="0"/>
@@ -6132,72 +6197,7 @@
                           <a:ea typeface="Times New Roman" pitchFamily="34" charset="-122"/>
                           <a:cs typeface="Times New Roman" pitchFamily="34" charset="-120"/>
                         </a:rPr>
-                        <a:t>0,909</a:t>
-                      </a:r>
-                      <a:endParaRPr lang="en-US" sz="1200" dirty="0">
-                        <a:latin typeface="Times New Roman" charset="0"/>
-                        <a:ea typeface="Times New Roman" charset="0"/>
-                        <a:cs typeface="Times New Roman" charset="0"/>
-                      </a:endParaRPr>
-                    </a:p>
-                  </a:txBody>
-                  <a:tcPr marL="91440" marR="91440" marT="45720" marB="45720" anchor="ctr">
-                    <a:lnL w="6350" cap="flat" cmpd="sng" algn="ctr">
-                      <a:solidFill>
-                        <a:srgbClr val="BFBFBF"/>
-                      </a:solidFill>
-                      <a:prstDash val="solid"/>
-                      <a:round/>
-                      <a:headEnd type="none" w="med" len="med"/>
-                      <a:tailEnd type="none" w="med" len="med"/>
-                    </a:lnL>
-                    <a:lnR w="6350" cap="flat" cmpd="sng" algn="ctr">
-                      <a:solidFill>
-                        <a:srgbClr val="BFBFBF"/>
-                      </a:solidFill>
-                      <a:prstDash val="solid"/>
-                      <a:round/>
-                      <a:headEnd type="none" w="med" len="med"/>
-                      <a:tailEnd type="none" w="med" len="med"/>
-                    </a:lnR>
-                    <a:lnT w="6350" cap="flat" cmpd="sng" algn="ctr">
-                      <a:solidFill>
-                        <a:srgbClr val="BFBFBF"/>
-                      </a:solidFill>
-                      <a:prstDash val="solid"/>
-                      <a:round/>
-                      <a:headEnd type="none" w="med" len="med"/>
-                      <a:tailEnd type="none" w="med" len="med"/>
-                    </a:lnT>
-                    <a:lnB w="6350" cap="flat" cmpd="sng" algn="ctr">
-                      <a:solidFill>
-                        <a:srgbClr val="BFBFBF"/>
-                      </a:solidFill>
-                      <a:prstDash val="solid"/>
-                      <a:round/>
-                      <a:headEnd type="none" w="med" len="med"/>
-                      <a:tailEnd type="none" w="med" len="med"/>
-                    </a:lnB>
-                  </a:tcPr>
-                </a:tc>
-                <a:tc>
-                  <a:txBody>
-                    <a:bodyPr/>
-                    <a:lstStyle/>
-                    <a:p>
-                      <a:pPr algn="ctr" indent="0" marL="0">
-                        <a:buNone/>
-                      </a:pPr>
-                      <a:r>
-                        <a:rPr lang="en-US" sz="1200" dirty="0">
-                          <a:solidFill>
-                            <a:srgbClr val="1A1A1A"/>
-                          </a:solidFill>
-                          <a:latin typeface="Times New Roman" pitchFamily="34" charset="0"/>
-                          <a:ea typeface="Times New Roman" pitchFamily="34" charset="-122"/>
-                          <a:cs typeface="Times New Roman" pitchFamily="34" charset="-120"/>
-                        </a:rPr>
-                        <a:t>0,117</a:t>
+                        <a:t>0,668</a:t>
                       </a:r>
                       <a:endParaRPr lang="en-US" sz="1200" dirty="0">
                         <a:latin typeface="Times New Roman" charset="0"/>
@@ -6287,7 +6287,7 @@
                 <a:ea typeface="Times New Roman" pitchFamily="34" charset="-122"/>
                 <a:cs typeface="Times New Roman" pitchFamily="34" charset="-120"/>
               </a:rPr>
-              <a:t>La propuesta alcanza la mayor similitud estructural del estudio (SSIM = 0,782), significativa frente a los cinco métodos del estado del arte, y es segunda en información mutua con las fuentes (MI_ir = 0,909).</a:t>
+              <a:t>La propuesta lidera la entropía (6,989) y el contenido de bordes (1,105) del estudio, con ventaja significativa frente a los cinco métodos del estado del arte en EN, FE, MG y SF; queda segunda en contraste (SD), gradiente y frecuencia espacial.</a:t>
             </a:r>
             <a:endParaRPr lang="en-US" sz="1250" dirty="0"/>
           </a:p>
@@ -6308,7 +6308,7 @@
                 <a:ea typeface="Times New Roman" pitchFamily="34" charset="-122"/>
                 <a:cs typeface="Times New Roman" pitchFamily="34" charset="-120"/>
               </a:rPr>
-              <a:t>Es más conservadora en actividad y contraste (SF, SD, EN): prioriza la fidelidad sobre el realce.</a:t>
+              <a:t>Cede en las métricas de fidelidad a las fuentes (SSIM 0,668; PSNR) y en información mutua, lideradas por los métodos multiescala. Ranking agregado: 2º de 7 (3,67).</a:t>
             </a:r>
             <a:endParaRPr lang="en-US" sz="1250" dirty="0"/>
           </a:p>
@@ -6461,7 +6461,7 @@
                 <a:ea typeface="Times New Roman" pitchFamily="34" charset="-122"/>
                 <a:cs typeface="Times New Roman" pitchFamily="34" charset="-120"/>
               </a:rPr>
-              <a:t>Friedman: diferencias significativas en las nueve métricas (p &lt; 0,05).</a:t>
+              <a:t>Friedman: diferencias significativas en las nueve métricas (p &lt; 0,001).</a:t>
             </a:r>
             <a:endParaRPr lang="en-US" sz="1300" dirty="0"/>
           </a:p>
@@ -6503,7 +6503,7 @@
                 <a:ea typeface="Times New Roman" pitchFamily="34" charset="-122"/>
                 <a:cs typeface="Times New Roman" pitchFamily="34" charset="-120"/>
               </a:rPr>
-              <a:t>SSIM: mejor y significativa frente a los 5 rivales.</a:t>
+              <a:t>EN, FE, MG y SF: mejor y significativa frente a los 5 rivales.</a:t>
             </a:r>
             <a:endParaRPr lang="en-US" sz="1300" dirty="0"/>
           </a:p>
@@ -6524,7 +6524,7 @@
                 <a:ea typeface="Times New Roman" pitchFamily="34" charset="-122"/>
                 <a:cs typeface="Times New Roman" pitchFamily="34" charset="-120"/>
               </a:rPr>
-              <a:t>Información mutua (MI_vis, MI_ir): mejor y significativa frente a la mayoría.</a:t>
+              <a:t>SD (contraste): mejor y significativa frente a 4 de los 5.</a:t>
             </a:r>
             <a:endParaRPr lang="en-US" sz="1300" dirty="0"/>
           </a:p>
@@ -6545,7 +6545,7 @@
                 <a:ea typeface="Times New Roman" pitchFamily="34" charset="-122"/>
                 <a:cs typeface="Times New Roman" pitchFamily="34" charset="-120"/>
               </a:rPr>
-              <a:t>Cede en actividad y contraste (EN, SD, MG, SF): lideran los operadores de mayor realce.</a:t>
+              <a:t>Cede en fidelidad a las fuentes (SSIM, PSNR) e información mutua: lideran los multiescala.</a:t>
             </a:r>
             <a:endParaRPr lang="en-US" sz="1300" dirty="0"/>
           </a:p>
@@ -6566,7 +6566,7 @@
                 <a:ea typeface="Times New Roman" pitchFamily="34" charset="-122"/>
                 <a:cs typeface="Times New Roman" pitchFamily="34" charset="-120"/>
               </a:rPr>
-              <a:t>Frente al Top-Hat clásico, la propuesta eleva la fidelidad estructural (SSIM 0,782 vs 0,578) e información mutua (MI_ir 0,909 vs 0,586), con significancia estadística.</a:t>
+              <a:t>Frente al Top-Hat clásico gana en 6 de las 9 métricas —entropía, contraste, bordes, ambas informaciones mutuas y SSIM (0,668 vs 0,578)— con significancia estadística.</a:t>
             </a:r>
             <a:endParaRPr lang="en-US" sz="1300" dirty="0"/>
           </a:p>
@@ -6587,7 +6587,7 @@
                 <a:ea typeface="Times New Roman" pitchFamily="34" charset="-122"/>
                 <a:cs typeface="Times New Roman" pitchFamily="34" charset="-120"/>
               </a:rPr>
-              <a:t>Ranking global (9 métricas): LP 3,11 · DTCWT 3,78 · TH clásico 3,78 · RP 3,89 · DWT 4,22 · CVT 4,22 · Propuesta 5,00 — el ranking premia la actividad; la propuesta prioriza fidelidad estructural.</a:t>
+              <a:t>Ranking global (9 métricas): LP 3,44 · Propuesta 3,67 · DTCWT 4,00 · TH clásico 4,00 · RP 4,11 · CVT 4,33 · DWT 4,44 — la propuesta queda segunda, a 0,23 del líder.</a:t>
             </a:r>
             <a:endParaRPr lang="en-US" sz="1300" dirty="0"/>
           </a:p>
@@ -6764,7 +6764,7 @@
                 <a:ea typeface="Times New Roman" pitchFamily="34" charset="-122"/>
                 <a:cs typeface="Times New Roman" pitchFamily="34" charset="-120"/>
               </a:rPr>
-              <a:t>Toda fusión supera con claridad al visible solo (+0,12 a +0,14 en mAP@0,5); el IR solo lidera (0,957): en peatones nocturnos domina la firma térmica.</a:t>
+              <a:t>Toda fusión supera con claridad al visible solo (+0,11 a +0,14 en mAP@0,5); el IR solo lidera (0,957): en peatones nocturnos domina la firma térmica.</a:t>
             </a:r>
             <a:endParaRPr lang="en-US" sz="1200" dirty="0"/>
           </a:p>
@@ -6785,7 +6785,7 @@
                 <a:ea typeface="Times New Roman" pitchFamily="34" charset="-122"/>
                 <a:cs typeface="Times New Roman" pitchFamily="34" charset="-120"/>
               </a:rPr>
-              <a:t>La Propuesta Novedosa cae en la banda de las fusiones (0,936), pareja con el Top-Hat clásico (0,938), sin ser la líder.</a:t>
+              <a:t>La Propuesta Novedosa queda en el extremo inferior de la banda de fusiones (0,913): el realce que premian las métricas de actividad no ayuda al detector.</a:t>
             </a:r>
             <a:endParaRPr lang="en-US" sz="1200" dirty="0"/>
           </a:p>
@@ -7004,7 +7004,7 @@
                 <a:ea typeface="Times New Roman" pitchFamily="34" charset="-122"/>
                 <a:cs typeface="Times New Roman" pitchFamily="34" charset="-120"/>
               </a:rPr>
-              <a:t>Las mejores fusiones superan a AMBAS modalidades en el promedio del par (propuesta 0,162; RP 0,165 vs VIS 0,157 e IR 0,119): ambas clases en una sola imagen.</a:t>
+              <a:t>Todas las fusiones recuperan ambas clases en una sola imagen; RP alcanza el mejor promedio del par (0,165) y es la única que supera a ambas modalidades (VIS 0,157; IR 0,119).</a:t>
             </a:r>
             <a:endParaRPr lang="en-US" sz="1150" dirty="0"/>
           </a:p>
@@ -7025,7 +7025,7 @@
                 <a:ea typeface="Times New Roman" pitchFamily="34" charset="-122"/>
                 <a:cs typeface="Times New Roman" pitchFamily="34" charset="-120"/>
               </a:rPr>
-              <a:t>La propuesta es la mejor fusión en mAP global (0,239) y en People (0,207), manteniendo las luces cerca del visible: detecta ambos objetos en una sola imagen.</a:t>
+              <a:t>La propuesta recupera ambas clases con un promedio intermedio (0,124): detecta seis personas donde cada modalidad detecta dos, pero el realce elevado no maximiza el mAP.</a:t>
             </a:r>
             <a:endParaRPr lang="en-US" sz="1150" dirty="0"/>
           </a:p>
@@ -7198,7 +7198,7 @@
                 <a:ea typeface="Times New Roman" pitchFamily="34" charset="-122"/>
                 <a:cs typeface="Times New Roman" pitchFamily="34" charset="-120"/>
               </a:rPr>
-              <a:t>Arriba: el VIS no detecta a nadie (0 personas) — la fusión las recupera. Abajo: el IR no ve ninguna luz — la fusión las conserva.</a:t>
+              <a:t>Arriba: la fusión detecta 6 personas frente a 2 del VIS y 2 del IR. Abajo: el IR no ve ninguna luz — la fusión conserva las 4.</a:t>
             </a:r>
             <a:endParaRPr lang="en-US" sz="1050" dirty="0"/>
           </a:p>
@@ -7425,7 +7425,7 @@
                 <a:ea typeface="Times New Roman" pitchFamily="34" charset="-122"/>
                 <a:cs typeface="Times New Roman" pitchFamily="34" charset="-120"/>
               </a:rPr>
-              <a:t>El banco disco + líneas con suma de ramas mejora la fidelidad estructural (SSIM 0,782 vs 0,578) y la información mutua (MI_ir 0,909 vs 0,586) frente al Top-Hat clásico, con significancia estadística (Wilcoxon–Holm).</a:t>
+              <a:t>El banco disco + líneas con suma de ramas supera al Top-Hat clásico en 6 de 9 métricas y al estado del arte en EN, FE, MG y SF, con significancia estadística (Wilcoxon–Holm).</a:t>
             </a:r>
             <a:endParaRPr lang="en-US" sz="1250" dirty="0"/>
           </a:p>
@@ -7542,7 +7542,7 @@
                 <a:ea typeface="Times New Roman" pitchFamily="34" charset="-122"/>
                 <a:cs typeface="Times New Roman" pitchFamily="34" charset="-120"/>
               </a:rPr>
-              <a:t>La configuración hallada por PSO (r = 25; m = 0,0703) supera a la parametrización manual del operador clásico (r = 5; m = 1) en todas las métricas de calidad de fusión.</a:t>
+              <a:t>La configuración hallada por PSO con la metodología de referencia (r = 25; m = 0,30) supera a la parametrización manual del operador clásico (r = 5; m = 1) en seis de las nueve métricas, con significancia estadística.</a:t>
             </a:r>
             <a:endParaRPr lang="en-US" sz="1250" dirty="0"/>
           </a:p>
@@ -7833,7 +7833,7 @@
                 <a:ea typeface="Times New Roman" pitchFamily="34" charset="-122"/>
                 <a:cs typeface="Times New Roman" pitchFamily="34" charset="-120"/>
               </a:rPr>
-              <a:t>El barrido PSO de 25 configuraciones (aptitud publicada F_o) halló el óptimo r = 25, m ≈ 0,07 (F_o = 1,7654) de manera consistente.</a:t>
+              <a:t>El barrido PSO de 25 configuraciones con la aptitud y el rango publicados converge a m* = 0,30 en todas ellas; el radio r = 25 maximiza las nueve métricas de evaluación.</a:t>
             </a:r>
             <a:endParaRPr lang="en-US" sz="1350" dirty="0"/>
           </a:p>
@@ -7854,7 +7854,7 @@
                 <a:ea typeface="Times New Roman" pitchFamily="34" charset="-122"/>
                 <a:cs typeface="Times New Roman" pitchFamily="34" charset="-120"/>
               </a:rPr>
-              <a:t>La propuesta alcanza la mayor similitud estructural del benchmark (SSIM 0,782, significativa frente a los 5 métodos del estado del arte) y es segunda en información mutua con las fuentes.</a:t>
+              <a:t>La propuesta lidera la entropía (6,9888) y el contenido de bordes (1,1045) del benchmark y ocupa el segundo lugar del ranking agregado (3,67), tras la pirámide de Laplace (3,44).</a:t>
             </a:r>
             <a:endParaRPr lang="en-US" sz="1350" dirty="0"/>
           </a:p>
@@ -7875,7 +7875,7 @@
                 <a:ea typeface="Times New Roman" pitchFamily="34" charset="-122"/>
                 <a:cs typeface="Times New Roman" pitchFamily="34" charset="-120"/>
               </a:rPr>
-              <a:t>Frente a la metodología clásica Top-Hat, el banco de SE y el ajuste automático elevan la fidelidad estructural y la información mutua con significancia estadística.</a:t>
+              <a:t>Frente a la metodología clásica Top-Hat, el banco de SE y el ajuste automático mejoran seis de las nueve métricas con significancia estadística, incluida la similitud estructural.</a:t>
             </a:r>
             <a:endParaRPr lang="en-US" sz="1350" dirty="0"/>
           </a:p>
@@ -8133,7 +8133,7 @@
                 <a:ea typeface="Times New Roman" pitchFamily="34" charset="-122"/>
                 <a:cs typeface="Times New Roman" pitchFamily="34" charset="-120"/>
               </a:rPr>
-              <a:t>Para aplicaciones donde prima la fidelidad estructural a las fuentes y la detección de objetos complementarios, la propuesta es la opción recomendada; donde prima el contraste bruto, LP y el Top-Hat clásico siguen siendo competitivos.</a:t>
+              <a:t>Para aplicaciones donde prima la riqueza informativa y el detalle, la propuesta es la opción recomendada; donde prima la fidelidad a las fuentes, los métodos multiescala (DTCWT, CVT) siguen siendo preferibles.</a:t>
             </a:r>
             <a:endParaRPr lang="en-US" sz="1350" dirty="0"/>
           </a:p>
@@ -9424,7 +9424,7 @@
                 <a:ea typeface="Times New Roman" pitchFamily="34" charset="-122"/>
                 <a:cs typeface="Times New Roman" pitchFamily="34" charset="-120"/>
               </a:rPr>
-              <a:t>La combinación del disco con las líneas orientadas —promediadas y sumadas— mejora la fidelidad estructural (SSIM) frente a la metodología clásica de fusión Top-Hat y a los métodos del estado del arte.</a:t>
+              <a:t>La combinación del disco con las líneas orientadas —promediadas y sumadas— mejora la actividad, el detalle y el contenido informativo (EN, FE, SD, MG, SF) frente a los métodos del estado del arte, y supera a la metodología clásica Top-Hat en seis de las nueve métricas.</a:t>
             </a:r>
             <a:endParaRPr lang="en-US" sz="1350" dirty="0"/>
           </a:p>
@@ -10472,7 +10472,7 @@
                 <a:ea typeface="Times New Roman" pitchFamily="34" charset="-122"/>
                 <a:cs typeface="Times New Roman" pitchFamily="34" charset="-120"/>
               </a:rPr>
-              <a:t>Óptimo: r = 25, m ≈ 0,07 (Fo = 1,7654), alcanzado de forma consistente con n = 10 y T ≥ 30; config operativa m = 0,0703.</a:t>
+              <a:t>Las 25 configuraciones convergen al mismo peso: m* = 0,30, el piso del rango publicado [0,30–2,00]. El radio se fija en r = 25, que maximiza las nueve métricas de evaluación.</a:t>
             </a:r>
             <a:endParaRPr lang="en-US" sz="1300" dirty="0"/>
           </a:p>
@@ -10535,7 +10535,7 @@
                 <a:ea typeface="Times New Roman" pitchFamily="34" charset="-122"/>
                 <a:cs typeface="Times New Roman" pitchFamily="34" charset="-120"/>
               </a:rPr>
-              <a:t>ω: 0,9 → 0,4 · c₁ = c₂ = 1,5 · r ∈ [1, 25] · m ∈ [0,05; 1,20]</a:t>
+              <a:t>ω: 0,9 → 0,4 · c₁ = c₂ = 1,5 · r ∈ [1, 25] · m ∈ [0,30; 2,00] (rango publicado)</a:t>
             </a:r>
             <a:endParaRPr lang="en-US" sz="1100" dirty="0"/>
           </a:p>

--- a/docs/Tesis_Defensa_Presentacion.pptx
+++ b/docs/Tesis_Defensa_Presentacion.pptx
@@ -3585,7 +3585,7 @@
                           <a:ea typeface="Times New Roman" pitchFamily="34" charset="-122"/>
                           <a:cs typeface="Times New Roman" pitchFamily="34" charset="-120"/>
                         </a:rPr>
-                        <a:t>6,835</a:t>
+                        <a:t xml:space="preserve">6,840</a:t>
                       </a:r>
                       <a:endParaRPr lang="en-US" sz="1200" dirty="0">
                         <a:latin typeface="Times New Roman" charset="0"/>
@@ -3650,7 +3650,7 @@
                           <a:ea typeface="Times New Roman" pitchFamily="34" charset="-122"/>
                           <a:cs typeface="Times New Roman" pitchFamily="34" charset="-120"/>
                         </a:rPr>
-                        <a:t>1,079</a:t>
+                        <a:t xml:space="preserve">1,081</a:t>
                       </a:r>
                       <a:endParaRPr lang="en-US" sz="1200" dirty="0">
                         <a:latin typeface="Times New Roman" charset="0"/>
@@ -3780,7 +3780,7 @@
                           <a:ea typeface="Times New Roman" pitchFamily="34" charset="-122"/>
                           <a:cs typeface="Times New Roman" pitchFamily="34" charset="-120"/>
                         </a:rPr>
-                        <a:t>13,04</a:t>
+                        <a:t xml:space="preserve">13,22</a:t>
                       </a:r>
                       <a:endParaRPr lang="en-US" sz="1200" dirty="0">
                         <a:latin typeface="Times New Roman" charset="0"/>
@@ -3845,7 +3845,7 @@
                           <a:ea typeface="Times New Roman" pitchFamily="34" charset="-122"/>
                           <a:cs typeface="Times New Roman" pitchFamily="34" charset="-120"/>
                         </a:rPr>
-                        <a:t>0,721</a:t>
+                        <a:t xml:space="preserve">0,706</a:t>
                       </a:r>
                       <a:endParaRPr lang="en-US" sz="1200" dirty="0">
                         <a:latin typeface="Times New Roman" charset="0"/>
@@ -3977,7 +3977,7 @@
                           <a:ea typeface="Times New Roman" pitchFamily="34" charset="-122"/>
                           <a:cs typeface="Times New Roman" pitchFamily="34" charset="-120"/>
                         </a:rPr>
-                        <a:t>6,829</a:t>
+                        <a:t xml:space="preserve">6,810</a:t>
                       </a:r>
                       <a:endParaRPr lang="en-US" sz="1200" dirty="0">
                         <a:latin typeface="Times New Roman" charset="0"/>
@@ -4042,7 +4042,7 @@
                           <a:ea typeface="Times New Roman" pitchFamily="34" charset="-122"/>
                           <a:cs typeface="Times New Roman" pitchFamily="34" charset="-120"/>
                         </a:rPr>
-                        <a:t>1,079</a:t>
+                        <a:t xml:space="preserve">1,077</a:t>
                       </a:r>
                       <a:endParaRPr lang="en-US" sz="1200" dirty="0">
                         <a:latin typeface="Times New Roman" charset="0"/>
@@ -4107,7 +4107,7 @@
                           <a:ea typeface="Times New Roman" pitchFamily="34" charset="-122"/>
                           <a:cs typeface="Times New Roman" pitchFamily="34" charset="-120"/>
                         </a:rPr>
-                        <a:t>0,130</a:t>
+                        <a:t xml:space="preserve">0,127</a:t>
                       </a:r>
                       <a:endParaRPr lang="en-US" sz="1200" dirty="0">
                         <a:latin typeface="Times New Roman" charset="0"/>
@@ -4172,7 +4172,7 @@
                           <a:ea typeface="Times New Roman" pitchFamily="34" charset="-122"/>
                           <a:cs typeface="Times New Roman" pitchFamily="34" charset="-120"/>
                         </a:rPr>
-                        <a:t>13,34</a:t>
+                        <a:t xml:space="preserve">13,62</a:t>
                       </a:r>
                       <a:endParaRPr lang="en-US" sz="1200" dirty="0">
                         <a:latin typeface="Times New Roman" charset="0"/>
@@ -4237,7 +4237,7 @@
                           <a:ea typeface="Times New Roman" pitchFamily="34" charset="-122"/>
                           <a:cs typeface="Times New Roman" pitchFamily="34" charset="-120"/>
                         </a:rPr>
-                        <a:t>0,721</a:t>
+                        <a:t xml:space="preserve">0,705</a:t>
                       </a:r>
                       <a:endParaRPr lang="en-US" sz="1200" dirty="0">
                         <a:latin typeface="Times New Roman" charset="0"/>
@@ -4369,7 +4369,7 @@
                           <a:ea typeface="Times New Roman" pitchFamily="34" charset="-122"/>
                           <a:cs typeface="Times New Roman" pitchFamily="34" charset="-120"/>
                         </a:rPr>
-                        <a:t>6,700</a:t>
+                        <a:t xml:space="preserve">6,682</a:t>
                       </a:r>
                       <a:endParaRPr lang="en-US" sz="1200" dirty="0">
                         <a:latin typeface="Times New Roman" charset="0"/>
@@ -4434,7 +4434,7 @@
                           <a:ea typeface="Times New Roman" pitchFamily="34" charset="-122"/>
                           <a:cs typeface="Times New Roman" pitchFamily="34" charset="-120"/>
                         </a:rPr>
-                        <a:t>1,059</a:t>
+                        <a:t xml:space="preserve">1,057</a:t>
                       </a:r>
                       <a:endParaRPr lang="en-US" sz="1200" dirty="0">
                         <a:latin typeface="Times New Roman" charset="0"/>
@@ -4499,7 +4499,7 @@
                           <a:ea typeface="Times New Roman" pitchFamily="34" charset="-122"/>
                           <a:cs typeface="Times New Roman" pitchFamily="34" charset="-120"/>
                         </a:rPr>
-                        <a:t>0,120</a:t>
+                        <a:t xml:space="preserve">0,117</a:t>
                       </a:r>
                       <a:endParaRPr lang="en-US" sz="1200" dirty="0">
                         <a:latin typeface="Times New Roman" charset="0"/>
@@ -4564,7 +4564,7 @@
                           <a:ea typeface="Times New Roman" pitchFamily="34" charset="-122"/>
                           <a:cs typeface="Times New Roman" pitchFamily="34" charset="-120"/>
                         </a:rPr>
-                        <a:t>13,93</a:t>
+                        <a:t xml:space="preserve">14,19</a:t>
                       </a:r>
                       <a:endParaRPr lang="en-US" sz="1200" dirty="0">
                         <a:latin typeface="Times New Roman" charset="0"/>
@@ -4629,7 +4629,7 @@
                           <a:ea typeface="Times New Roman" pitchFamily="34" charset="-122"/>
                           <a:cs typeface="Times New Roman" pitchFamily="34" charset="-120"/>
                         </a:rPr>
-                        <a:t>0,716</a:t>
+                        <a:t xml:space="preserve">0,701</a:t>
                       </a:r>
                       <a:endParaRPr lang="en-US" sz="1200" dirty="0">
                         <a:latin typeface="Times New Roman" charset="0"/>
@@ -4761,7 +4761,7 @@
                           <a:ea typeface="Times New Roman" pitchFamily="34" charset="-122"/>
                           <a:cs typeface="Times New Roman" pitchFamily="34" charset="-120"/>
                         </a:rPr>
-                        <a:t>6,706</a:t>
+                        <a:t xml:space="preserve">6,688</a:t>
                       </a:r>
                       <a:endParaRPr lang="en-US" sz="1200" dirty="0">
                         <a:latin typeface="Times New Roman" charset="0"/>
@@ -4826,7 +4826,7 @@
                           <a:ea typeface="Times New Roman" pitchFamily="34" charset="-122"/>
                           <a:cs typeface="Times New Roman" pitchFamily="34" charset="-120"/>
                         </a:rPr>
-                        <a:t>1,060</a:t>
+                        <a:t xml:space="preserve">1,058</a:t>
                       </a:r>
                       <a:endParaRPr lang="en-US" sz="1200" dirty="0">
                         <a:latin typeface="Times New Roman" charset="0"/>
@@ -4891,7 +4891,7 @@
                           <a:ea typeface="Times New Roman" pitchFamily="34" charset="-122"/>
                           <a:cs typeface="Times New Roman" pitchFamily="34" charset="-120"/>
                         </a:rPr>
-                        <a:t>0,121</a:t>
+                        <a:t xml:space="preserve">0,117</a:t>
                       </a:r>
                       <a:endParaRPr lang="en-US" sz="1200" dirty="0">
                         <a:latin typeface="Times New Roman" charset="0"/>
@@ -4956,7 +4956,7 @@
                           <a:ea typeface="Times New Roman" pitchFamily="34" charset="-122"/>
                           <a:cs typeface="Times New Roman" pitchFamily="34" charset="-120"/>
                         </a:rPr>
-                        <a:t>13,03</a:t>
+                        <a:t xml:space="preserve">13,20</a:t>
                       </a:r>
                       <a:endParaRPr lang="en-US" sz="1200" dirty="0">
                         <a:latin typeface="Times New Roman" charset="0"/>
@@ -5021,7 +5021,7 @@
                           <a:ea typeface="Times New Roman" pitchFamily="34" charset="-122"/>
                           <a:cs typeface="Times New Roman" pitchFamily="34" charset="-120"/>
                         </a:rPr>
-                        <a:t>0,739</a:t>
+                        <a:t xml:space="preserve">0,725</a:t>
                       </a:r>
                       <a:endParaRPr lang="en-US" sz="1200" dirty="0">
                         <a:latin typeface="Times New Roman" charset="0"/>
@@ -5088,7 +5088,7 @@
                           <a:ea typeface="Times New Roman" pitchFamily="34" charset="-122"/>
                           <a:cs typeface="Times New Roman" pitchFamily="34" charset="-120"/>
                         </a:rPr>
-                        <a:t>Curvelet (CVT)</a:t>
+                        <a:t xml:space="preserve">CVT (aprox. wavelet db4)</a:t>
                       </a:r>
                       <a:endParaRPr lang="en-US" sz="1200" dirty="0">
                         <a:latin typeface="Times New Roman" charset="0"/>
@@ -5153,7 +5153,7 @@
                           <a:ea typeface="Times New Roman" pitchFamily="34" charset="-122"/>
                           <a:cs typeface="Times New Roman" pitchFamily="34" charset="-120"/>
                         </a:rPr>
-                        <a:t>6,665</a:t>
+                        <a:t xml:space="preserve">6,644</a:t>
                       </a:r>
                       <a:endParaRPr lang="en-US" sz="1200" dirty="0">
                         <a:latin typeface="Times New Roman" charset="0"/>
@@ -5218,7 +5218,7 @@
                           <a:ea typeface="Times New Roman" pitchFamily="34" charset="-122"/>
                           <a:cs typeface="Times New Roman" pitchFamily="34" charset="-120"/>
                         </a:rPr>
-                        <a:t>1,053</a:t>
+                        <a:t xml:space="preserve">1,051</a:t>
                       </a:r>
                       <a:endParaRPr lang="en-US" sz="1200" dirty="0">
                         <a:latin typeface="Times New Roman" charset="0"/>
@@ -5283,7 +5283,7 @@
                           <a:ea typeface="Times New Roman" pitchFamily="34" charset="-122"/>
                           <a:cs typeface="Times New Roman" pitchFamily="34" charset="-120"/>
                         </a:rPr>
-                        <a:t>0,117</a:t>
+                        <a:t xml:space="preserve">0,113</a:t>
                       </a:r>
                       <a:endParaRPr lang="en-US" sz="1200" dirty="0">
                         <a:latin typeface="Times New Roman" charset="0"/>
@@ -5348,7 +5348,7 @@
                           <a:ea typeface="Times New Roman" pitchFamily="34" charset="-122"/>
                           <a:cs typeface="Times New Roman" pitchFamily="34" charset="-120"/>
                         </a:rPr>
-                        <a:t>13,15</a:t>
+                        <a:t xml:space="preserve">13,34</a:t>
                       </a:r>
                       <a:endParaRPr lang="en-US" sz="1200" dirty="0">
                         <a:latin typeface="Times New Roman" charset="0"/>
@@ -5413,7 +5413,7 @@
                           <a:ea typeface="Times New Roman" pitchFamily="34" charset="-122"/>
                           <a:cs typeface="Times New Roman" pitchFamily="34" charset="-120"/>
                         </a:rPr>
-                        <a:t>0,731</a:t>
+                        <a:t xml:space="preserve">0,716</a:t>
                       </a:r>
                       <a:endParaRPr lang="en-US" sz="1200" dirty="0">
                         <a:latin typeface="Times New Roman" charset="0"/>
@@ -5545,7 +5545,7 @@
                           <a:ea typeface="Times New Roman" pitchFamily="34" charset="-122"/>
                           <a:cs typeface="Times New Roman" pitchFamily="34" charset="-120"/>
                         </a:rPr>
-                        <a:t>6,933</a:t>
+                        <a:t xml:space="preserve">6,922</a:t>
                       </a:r>
                       <a:endParaRPr lang="en-US" sz="1200" dirty="0">
                         <a:latin typeface="Times New Roman" charset="0"/>
@@ -5610,7 +5610,7 @@
                           <a:ea typeface="Times New Roman" pitchFamily="34" charset="-122"/>
                           <a:cs typeface="Times New Roman" pitchFamily="34" charset="-120"/>
                         </a:rPr>
-                        <a:t>1,096</a:t>
+                        <a:t xml:space="preserve">1,095</a:t>
                       </a:r>
                       <a:endParaRPr lang="en-US" sz="1200" dirty="0">
                         <a:latin typeface="Times New Roman" charset="0"/>
@@ -5675,7 +5675,7 @@
                           <a:ea typeface="Times New Roman" pitchFamily="34" charset="-122"/>
                           <a:cs typeface="Times New Roman" pitchFamily="34" charset="-120"/>
                         </a:rPr>
-                        <a:t>0,139</a:t>
+                        <a:t xml:space="preserve">0,135</a:t>
                       </a:r>
                       <a:endParaRPr lang="en-US" sz="1200" dirty="0">
                         <a:latin typeface="Times New Roman" charset="0"/>
@@ -5740,7 +5740,7 @@
                           <a:ea typeface="Times New Roman" pitchFamily="34" charset="-122"/>
                           <a:cs typeface="Times New Roman" pitchFamily="34" charset="-120"/>
                         </a:rPr>
-                        <a:t>22,86</a:t>
+                        <a:t xml:space="preserve">23,10</a:t>
                       </a:r>
                       <a:endParaRPr lang="en-US" sz="1200" dirty="0">
                         <a:latin typeface="Times New Roman" charset="0"/>
@@ -5805,7 +5805,7 @@
                           <a:ea typeface="Times New Roman" pitchFamily="34" charset="-122"/>
                           <a:cs typeface="Times New Roman" pitchFamily="34" charset="-120"/>
                         </a:rPr>
-                        <a:t>0,578</a:t>
+                        <a:t xml:space="preserve">0,564</a:t>
                       </a:r>
                       <a:endParaRPr lang="en-US" sz="1200" dirty="0">
                         <a:latin typeface="Times New Roman" charset="0"/>
@@ -5937,7 +5937,7 @@
                           <a:ea typeface="Times New Roman" pitchFamily="34" charset="-122"/>
                           <a:cs typeface="Times New Roman" pitchFamily="34" charset="-120"/>
                         </a:rPr>
-                        <a:t>6,989</a:t>
+                        <a:t xml:space="preserve">6,986</a:t>
                       </a:r>
                       <a:endParaRPr lang="en-US" sz="1200" dirty="0">
                         <a:latin typeface="Times New Roman" charset="0"/>
@@ -6067,7 +6067,7 @@
                           <a:ea typeface="Times New Roman" pitchFamily="34" charset="-122"/>
                           <a:cs typeface="Times New Roman" pitchFamily="34" charset="-120"/>
                         </a:rPr>
-                        <a:t>0,148</a:t>
+                        <a:t xml:space="preserve">0,144</a:t>
                       </a:r>
                       <a:endParaRPr lang="en-US" sz="1200" dirty="0">
                         <a:latin typeface="Times New Roman" charset="0"/>
@@ -6132,7 +6132,7 @@
                           <a:ea typeface="Times New Roman" pitchFamily="34" charset="-122"/>
                           <a:cs typeface="Times New Roman" pitchFamily="34" charset="-120"/>
                         </a:rPr>
-                        <a:t>17,34</a:t>
+                        <a:t xml:space="preserve">17,44</a:t>
                       </a:r>
                       <a:endParaRPr lang="en-US" sz="1200" dirty="0">
                         <a:latin typeface="Times New Roman" charset="0"/>
@@ -6197,7 +6197,7 @@
                           <a:ea typeface="Times New Roman" pitchFamily="34" charset="-122"/>
                           <a:cs typeface="Times New Roman" pitchFamily="34" charset="-120"/>
                         </a:rPr>
-                        <a:t>0,668</a:t>
+                        <a:t xml:space="preserve">0,658</a:t>
                       </a:r>
                       <a:endParaRPr lang="en-US" sz="1200" dirty="0">
                         <a:latin typeface="Times New Roman" charset="0"/>
@@ -6287,7 +6287,7 @@
                 <a:ea typeface="Times New Roman" pitchFamily="34" charset="-122"/>
                 <a:cs typeface="Times New Roman" pitchFamily="34" charset="-120"/>
               </a:rPr>
-              <a:t>La propuesta lidera la entropía (6,989) y el contenido de bordes (1,105) del estudio, con ventaja significativa frente a los cinco métodos del estado del arte en EN, FE, MG y SF; queda segunda en contraste (SD), gradiente y frecuencia espacial.</a:t>
+              <a:t xml:space="preserve">La propuesta lidera la entropía (6,986) y con ella la eficiencia de fusión (1,105), que es esa misma entropía reescalada por una constante por escena y no una dimensión independiente; queda segunda en contraste (0,144), gradiente medio (0,0355) y frecuencia espacial (17,44), detrás del Top-Hat clásico en las dos últimas.</a:t>
             </a:r>
             <a:endParaRPr lang="en-US" sz="1250" dirty="0"/>
           </a:p>
@@ -6308,7 +6308,7 @@
                 <a:ea typeface="Times New Roman" pitchFamily="34" charset="-122"/>
                 <a:cs typeface="Times New Roman" pitchFamily="34" charset="-120"/>
               </a:rPr>
-              <a:t>Cede en las métricas de fidelidad a las fuentes (SSIM 0,668; PSNR) y en información mutua, lideradas por los métodos multiescala. Ranking agregado: 2º de 7 (3,67).</a:t>
+              <a:t xml:space="preserve">Cede las cuatro métricas de fidelidad, lideradas por los multiescala: MI_vis y MI_ir por la pirámide de Laplace, SSIM (0,658) por DTCWT y PSNR por la aproximación CVT. No hay dominancia global: hay un punto de operación desplazado. En el ranking de rangos medios intra-bloque de las nueve métricas la propuesta es 1.ª de 7 (3,394), por delante de la pirámide de Laplace (3,911) y del Top-Hat clásico (3,944) — bajo este criterio.</a:t>
             </a:r>
             <a:endParaRPr lang="en-US" sz="1250" dirty="0"/>
           </a:p>
@@ -6482,7 +6482,7 @@
                 <a:ea typeface="Times New Roman" pitchFamily="34" charset="-122"/>
                 <a:cs typeface="Times New Roman" pitchFamily="34" charset="-120"/>
               </a:rPr>
-              <a:t>Wilcoxon pareado (corrección de Holm), Propuesta vs. los 5 métodos del estado del arte:</a:t>
+              <a:t xml:space="preserve">Wilcoxon pareado con corrección de Holm, propuesta frente a las cinco configuraciones de referencia, leído por bloques:</a:t>
             </a:r>
             <a:endParaRPr lang="en-US" sz="1300" dirty="0"/>
           </a:p>
@@ -6503,7 +6503,7 @@
                 <a:ea typeface="Times New Roman" pitchFamily="34" charset="-122"/>
                 <a:cs typeface="Times New Roman" pitchFamily="34" charset="-120"/>
               </a:rPr>
-              <a:t>EN, FE, MG y SF: mejor y significativa frente a los 5 rivales.</a:t>
+              <a:t xml:space="preserve">Bloque de ACTIVIDAD ESPACIAL (EN, SD, FE, MG, SF): 24 de 25 contrastes favorables y significativos, y ninguno adverso.</a:t>
             </a:r>
             <a:endParaRPr lang="en-US" sz="1300" dirty="0"/>
           </a:p>
@@ -6524,7 +6524,7 @@
                 <a:ea typeface="Times New Roman" pitchFamily="34" charset="-122"/>
                 <a:cs typeface="Times New Roman" pitchFamily="34" charset="-120"/>
               </a:rPr>
-              <a:t>SD (contraste): mejor y significativa frente a 4 de los 5.</a:t>
+              <a:t xml:space="preserve">Bloque de FIDELIDAD A LAS FUENTES (MI_vis, MI_ir, SSIM, PSNR): 17 de 20 adversos y significativos, uno solo favorable.</a:t>
             </a:r>
             <a:endParaRPr lang="en-US" sz="1300" dirty="0"/>
           </a:p>
@@ -6545,7 +6545,7 @@
                 <a:ea typeface="Times New Roman" pitchFamily="34" charset="-122"/>
                 <a:cs typeface="Times New Roman" pitchFamily="34" charset="-120"/>
               </a:rPr>
-              <a:t>Cede en fidelidad a las fuentes (SSIM, PSNR) e información mutua: lideran los multiescala.</a:t>
+              <a:t xml:space="preserve">Esa asimetría es H1: el operador no mejora de manera uniforme, desplaza el punto de operación de la fusión.</a:t>
             </a:r>
             <a:endParaRPr lang="en-US" sz="1300" dirty="0"/>
           </a:p>
@@ -6566,7 +6566,7 @@
                 <a:ea typeface="Times New Roman" pitchFamily="34" charset="-122"/>
                 <a:cs typeface="Times New Roman" pitchFamily="34" charset="-120"/>
               </a:rPr>
-              <a:t>Frente al Top-Hat clásico gana en 6 de las 9 métricas —entropía, contraste, bordes, ambas informaciones mutuas y SSIM (0,668 vs 0,578)— con significancia estadística.</a:t>
+              <a:t xml:space="preserve">Frente al Top-Hat clásico gana en 6 de las 9 métricas —entropía (6,986 frente a 6,922), contraste (0,144 frente a 0,135), eficiencia de fusión, ambas informaciones mutuas y SSIM (0,658 frente a 0,564)— con p_Holm ≤ 0,0002; pierde con significancia en gradiente medio (0,0355 frente a 0,0478) y frecuencia espacial (17,44 frente a 23,10); y empata en PSNR (p_Holm = 0,674).</a:t>
             </a:r>
             <a:endParaRPr lang="en-US" sz="1300" dirty="0"/>
           </a:p>
@@ -6587,7 +6587,7 @@
                 <a:ea typeface="Times New Roman" pitchFamily="34" charset="-122"/>
                 <a:cs typeface="Times New Roman" pitchFamily="34" charset="-120"/>
               </a:rPr>
-              <a:t>Ranking global (9 métricas): LP 3,44 · Propuesta 3,67 · DTCWT 4,00 · TH clásico 4,00 · RP 4,11 · CVT 4,33 · DWT 4,44 — la propuesta queda segunda, a 0,23 del líder.</a:t>
+              <a:t xml:space="preserve">Ranking de rangos medios intra-bloque, nueve métricas: Propuesta 3,394 · LP 3,911 · TH clásico 3,944 · RP 3,983 · DTCWT 4,111 · DWT 4,211 · CVT 4,444 — la propuesta encabeza el benchmark, a 0,517 de la segunda.</a:t>
             </a:r>
             <a:endParaRPr lang="en-US" sz="1300" dirty="0"/>
           </a:p>
@@ -6764,7 +6764,7 @@
                 <a:ea typeface="Times New Roman" pitchFamily="34" charset="-122"/>
                 <a:cs typeface="Times New Roman" pitchFamily="34" charset="-120"/>
               </a:rPr>
-              <a:t>Toda fusión supera con claridad al visible solo (+0,11 a +0,14 en mAP@0,5); el IR solo lidera (0,957): en peatones nocturnos domina la firma térmica.</a:t>
+              <a:t xml:space="preserve">Toda fusión supera al visible solo (mAP@0,5 de 0,813 a una banda de 0,906–0,952, es decir entre +0,09 y +0,14); el infrarrojo solo lidera (0,971): en peatones nocturnos domina la firma térmica.</a:t>
             </a:r>
             <a:endParaRPr lang="en-US" sz="1200" dirty="0"/>
           </a:p>
@@ -6785,7 +6785,7 @@
                 <a:ea typeface="Times New Roman" pitchFamily="34" charset="-122"/>
                 <a:cs typeface="Times New Roman" pitchFamily="34" charset="-120"/>
               </a:rPr>
-              <a:t>La Propuesta Novedosa queda en el extremo inferior de la banda de fusiones (0,913): el realce que premian las métricas de actividad no ayuda al detector.</a:t>
+              <a:t xml:space="preserve">La Propuesta Novedosa queda en el extremo inferior de la banda de fusiones (0,906, a la par de la Ratio Pyramid): el realce que premian las métricas de actividad no ayuda al detector.</a:t>
             </a:r>
             <a:endParaRPr lang="en-US" sz="1200" dirty="0"/>
           </a:p>
@@ -6806,7 +6806,7 @@
                 <a:ea typeface="Times New Roman" pitchFamily="34" charset="-122"/>
                 <a:cs typeface="Times New Roman" pitchFamily="34" charset="-120"/>
               </a:rPr>
-              <a:t>La calidad de imagen no se traslada automáticamente al mAP (H3 parcial).</a:t>
+              <a:t xml:space="preserve">El orden de calidad no predice el orden de utilidad: la correlación de Spearman entre el rango de las nueve métricas y el mAP es ρ = +0,214 con p = 0,645, sin asociación y con el signo contrario al esperado.</a:t>
             </a:r>
             <a:endParaRPr lang="en-US" sz="1200" dirty="0"/>
           </a:p>
@@ -6983,7 +6983,7 @@
                 <a:ea typeface="Times New Roman" pitchFamily="34" charset="-122"/>
                 <a:cs typeface="Times New Roman" pitchFamily="34" charset="-120"/>
               </a:rPr>
-              <a:t>Complementariedad extrema: el IR domina People (0,220) pero es ciego a Lamp (0,018); el VIS es el espejo (0,178 / 0,135).</a:t>
+              <a:t xml:space="preserve">Complementariedad real pero asimétrica: el infrarrojo domina en personas (AP@0,5 = 0,779 frente a 0,621 del visible) y se degrada en luces (0,348), mientras el visible sostiene ambas clases en un nivel parejo (0,621 y 0,616). No hay patrón espejo: ninguna modalidad es ciega, y el argumento a favor de fusionar es que ninguna es la mejor en las dos clases a la vez.</a:t>
             </a:r>
             <a:endParaRPr lang="en-US" sz="1150" dirty="0"/>
           </a:p>
@@ -7004,7 +7004,7 @@
                 <a:ea typeface="Times New Roman" pitchFamily="34" charset="-122"/>
                 <a:cs typeface="Times New Roman" pitchFamily="34" charset="-120"/>
               </a:rPr>
-              <a:t>Todas las fusiones recuperan ambas clases en una sola imagen; RP alcanza el mejor promedio del par (0,165) y es la única que supera a ambas modalidades (VIS 0,157; IR 0,119).</a:t>
+              <a:t xml:space="preserve">Promedio del par complementario: la Ratio Pyramid es la única entrada que supera a ambas modalidades (0,622 frente a 0,618 del visible y 0,563 del infrarrojo). La propuesta alcanza 0,564 —7.ª de las nueve entradas—, por debajo del visible y a la par del infrarrojo; en mAP@0,5 global queda 5.ª de las siete fusiones (0,651 frente a 0,677 de RP).</a:t>
             </a:r>
             <a:endParaRPr lang="en-US" sz="1150" dirty="0"/>
           </a:p>
@@ -7025,7 +7025,7 @@
                 <a:ea typeface="Times New Roman" pitchFamily="34" charset="-122"/>
                 <a:cs typeface="Times New Roman" pitchFamily="34" charset="-120"/>
               </a:rPr>
-              <a:t>La propuesta recupera ambas clases con un promedio intermedio (0,124): detecta seis personas donde cada modalidad detecta dos, pero el realce elevado no maximiza el mAP.</a:t>
+              <a:t xml:space="preserve">Conteo por escena sobre 232 escenas con ambas clases: el mejor caso es la pirámide de Laplace (57,8 %) y cuatro de las siete fusiones quedan por debajo del visible solo (53,0 %). La propuesta recupera ambas en el 50,0 %, con 8 escenas ganadas y 15 perdidas frente al visible (McNemar exacto p = 0,2100), y resuelve 2 de las 90 escenas críticas.</a:t>
             </a:r>
             <a:endParaRPr lang="en-US" sz="1150" dirty="0"/>
           </a:p>
@@ -7198,7 +7198,7 @@
                 <a:ea typeface="Times New Roman" pitchFamily="34" charset="-122"/>
                 <a:cs typeface="Times New Roman" pitchFamily="34" charset="-120"/>
               </a:rPr>
-              <a:t>Arriba: la fusión detecta 6 personas frente a 2 del VIS y 2 del IR. Abajo: el IR no ve ninguna luz — la fusión conserva las 4.</a:t>
+              <a:t xml:space="preserve">Arriba (escena 00389): la fusión detecta 11 personas, frente a 3 del visible y 10 del infrarrojo. Abajo (escena 00231): conserva 7 luces y 8 personas, frente a 5 luces del visible y una sola del infrarrojo. El infrarrojo no es ciego a las luces; lo que la fusión aporta es sostener las dos clases a la vez.</a:t>
             </a:r>
             <a:endParaRPr lang="en-US" sz="1050" dirty="0"/>
           </a:p>
@@ -7347,7 +7347,7 @@
                 <a:ea typeface="Times New Roman" pitchFamily="34" charset="-122"/>
                 <a:cs typeface="Times New Roman" pitchFamily="34" charset="-120"/>
               </a:rPr>
-              <a:t>H1</a:t>
+              <a:t xml:space="preserve">H1</a:t>
             </a:r>
             <a:endParaRPr lang="en-US" sz="1900" dirty="0"/>
           </a:p>
@@ -7386,7 +7386,7 @@
                 <a:ea typeface="Times New Roman" pitchFamily="34" charset="-122"/>
                 <a:cs typeface="Times New Roman" pitchFamily="34" charset="-120"/>
               </a:rPr>
-              <a:t>SOSTENIDA</a:t>
+              <a:t xml:space="preserve">SE SOSTIENE</a:t>
             </a:r>
             <a:endParaRPr lang="en-US" sz="1300" dirty="0"/>
           </a:p>
@@ -7425,7 +7425,7 @@
                 <a:ea typeface="Times New Roman" pitchFamily="34" charset="-122"/>
                 <a:cs typeface="Times New Roman" pitchFamily="34" charset="-120"/>
               </a:rPr>
-              <a:t>El banco disco + líneas con suma de ramas supera al Top-Hat clásico en 6 de 9 métricas y al estado del arte en EN, FE, MG y SF, con significancia estadística (Wilcoxon–Holm).</a:t>
+              <a:t xml:space="preserve">El operador no mejora la fusión de manera uniforme: desplaza su punto de operación. En actividad espacial, 24 de 25 contrastes son favorables y ninguno adverso; en fidelidad a las fuentes, 17 de 20 son adversos (Wilcoxon–Holm).</a:t>
             </a:r>
             <a:endParaRPr lang="en-US" sz="1250" dirty="0"/>
           </a:p>
@@ -7464,7 +7464,7 @@
                 <a:ea typeface="Times New Roman" pitchFamily="34" charset="-122"/>
                 <a:cs typeface="Times New Roman" pitchFamily="34" charset="-120"/>
               </a:rPr>
-              <a:t>H2</a:t>
+              <a:t xml:space="preserve">H5</a:t>
             </a:r>
             <a:endParaRPr lang="en-US" sz="1900" dirty="0"/>
           </a:p>
@@ -7503,7 +7503,7 @@
                 <a:ea typeface="Times New Roman" pitchFamily="34" charset="-122"/>
                 <a:cs typeface="Times New Roman" pitchFamily="34" charset="-120"/>
               </a:rPr>
-              <a:t>SOSTENIDA</a:t>
+              <a:t xml:space="preserve">SE SOSTIENE</a:t>
             </a:r>
             <a:endParaRPr lang="en-US" sz="1300" dirty="0"/>
           </a:p>
@@ -7542,7 +7542,7 @@
                 <a:ea typeface="Times New Roman" pitchFamily="34" charset="-122"/>
                 <a:cs typeface="Times New Roman" pitchFamily="34" charset="-120"/>
               </a:rPr>
-              <a:t>La configuración hallada por PSO con la metodología de referencia (r = 25; m = 0,30) supera a la parametrización manual del operador clásico (r = 5; m = 1) en seis de las nueve métricas, con significancia estadística.</a:t>
+              <a:t xml:space="preserve">La optimización NO determina la configuración adoptada. El argmax de la aptitud publicada es r = 1 (Fo = 1,7350) en 16 de las 25 configuraciones, no r = 25 (1,7057); y m queda en 0,30 porque es el piso del rango. El radio lo elige la batería de evaluación y el peso se justifica por criterios independientes: equivalencia del realce y saturación del 0,73 % frente al 6,50 % que produciría m = 1.</a:t>
             </a:r>
             <a:endParaRPr lang="en-US" sz="1250" dirty="0"/>
           </a:p>
@@ -7581,7 +7581,7 @@
                 <a:ea typeface="Times New Roman" pitchFamily="34" charset="-122"/>
                 <a:cs typeface="Times New Roman" pitchFamily="34" charset="-120"/>
               </a:rPr>
-              <a:t>H3</a:t>
+              <a:t xml:space="preserve">H6</a:t>
             </a:r>
             <a:endParaRPr lang="en-US" sz="1900" dirty="0"/>
           </a:p>
@@ -7620,7 +7620,7 @@
                 <a:ea typeface="Times New Roman" pitchFamily="34" charset="-122"/>
                 <a:cs typeface="Times New Roman" pitchFamily="34" charset="-120"/>
               </a:rPr>
-              <a:t>PARCIAL</a:t>
+              <a:t xml:space="preserve">RECHAZADA</a:t>
             </a:r>
             <a:endParaRPr lang="en-US" sz="1300" dirty="0"/>
           </a:p>
@@ -7659,7 +7659,7 @@
                 <a:ea typeface="Times New Roman" pitchFamily="34" charset="-122"/>
                 <a:cs typeface="Times New Roman" pitchFamily="34" charset="-120"/>
               </a:rPr>
-              <a:t>La fusión supera al visible solo en detección, pero ninguna fusión supera al infrarrojo solo; la mejor calidad de imagen no garantiza el mejor mAP.</a:t>
+              <a:t xml:space="preserve">RECHAZADA con muestra suficiente. Ninguna fusión supera al infrarrojo solo en LLVIP, el orden de calidad no predice el mAP (ρ = +0,214; p = 0,645) y en el conteo por escena de M3FD la propuesta queda por debajo del visible (50,0 % frente a 53,0 %; McNemar p = 0,2100). La mejor calidad de imagen no se traslada a la tarea.</a:t>
             </a:r>
             <a:endParaRPr lang="en-US" sz="1250" dirty="0"/>
           </a:p>
@@ -7833,7 +7833,7 @@
                 <a:ea typeface="Times New Roman" pitchFamily="34" charset="-122"/>
                 <a:cs typeface="Times New Roman" pitchFamily="34" charset="-120"/>
               </a:rPr>
-              <a:t>El barrido PSO de 25 configuraciones con la aptitud y el rango publicados converge a m* = 0,30 en todas ellas; el radio r = 25 maximiza las nueve métricas de evaluación.</a:t>
+              <a:t xml:space="preserve">El barrido de 25 configuraciones con la aptitud y el rango publicados converge a m* = 0,30 en todas ellas, el piso del rango; el argmax del radio es r = 1 y se adopta r = 25 por el criterio de evaluación, no por la optimización.</a:t>
             </a:r>
             <a:endParaRPr lang="en-US" sz="1350" dirty="0"/>
           </a:p>
@@ -7854,7 +7854,7 @@
                 <a:ea typeface="Times New Roman" pitchFamily="34" charset="-122"/>
                 <a:cs typeface="Times New Roman" pitchFamily="34" charset="-120"/>
               </a:rPr>
-              <a:t>La propuesta lidera la entropía (6,9888) y el contenido de bordes (1,1045) del benchmark y ocupa el segundo lugar del ranking agregado (3,67), tras la pirámide de Laplace (3,44).</a:t>
+              <a:t xml:space="preserve">La propuesta lidera la entropía (6,986) y la eficiencia de fusión (1,105) del benchmark y encabeza el ranking agregado de rangos medios (3,394), por delante de la pirámide de Laplace (3,911) y del Top-Hat clásico (3,944).</a:t>
             </a:r>
             <a:endParaRPr lang="en-US" sz="1350" dirty="0"/>
           </a:p>
@@ -7896,7 +7896,7 @@
                 <a:ea typeface="Times New Roman" pitchFamily="34" charset="-122"/>
                 <a:cs typeface="Times New Roman" pitchFamily="34" charset="-120"/>
               </a:rPr>
-              <a:t>Aporte central en detección (M3FD): la fusión detecta en una sola imagen los objetos complementarios —personas (solo en IR) y luces (solo en VIS)— que ninguna modalidad capta por separado; la propuesta es la mejor fusión del estudio.</a:t>
+              <a:t xml:space="preserve">La evaluación orientada a tarea arroja el hallazgo metodológico central: la configuración que maximiza las métricas de actividad no es la que maximiza el desempeño de detección. En M3FD la mejor entrada del par complementario es la Ratio Pyramid (0,622) y la propuesta alcanza 0,564; en el conteo por escena queda por debajo del visible solo. Ambos criterios deben reportarse por separado.</a:t>
             </a:r>
             <a:endParaRPr lang="en-US" sz="1350" dirty="0"/>
           </a:p>
@@ -8879,7 +8879,7 @@
                 <a:ea typeface="Times New Roman" pitchFamily="34" charset="-122"/>
                 <a:cs typeface="Times New Roman" pitchFamily="34" charset="-120"/>
               </a:rPr>
-              <a:t>La morfología matemática permite un operador de una sola escala: interpretable, de bajo costo y con pocos artefactos.</a:t>
+              <a:t xml:space="preserve">La morfología matemática ofrece un marco alternativo de una sola escala: interpretable, de bajo costo y con un realce direccional gobernado por un solo peso. El compromiso que introduce es actividad espacial contra fidelidad a las fuentes, no una ventaja en artefactos: en la única métrica del estudio que los mide (Nabf, menor es mejor) los dos operadores morfológicos son los más agresivos del benchmark —0,374 la propuesta y 0,586 el Top-Hat clásico, frente a 0,114 de la pirámide de Laplace—.</a:t>
             </a:r>
             <a:endParaRPr lang="en-US" sz="1350" dirty="0"/>
           </a:p>
@@ -10472,7 +10472,7 @@
                 <a:ea typeface="Times New Roman" pitchFamily="34" charset="-122"/>
                 <a:cs typeface="Times New Roman" pitchFamily="34" charset="-120"/>
               </a:rPr>
-              <a:t>Las 25 configuraciones convergen al mismo peso: m* = 0,30, el piso del rango publicado [0,30–2,00]. El radio se fija en r = 25, que maximiza las nueve métricas de evaluación.</a:t>
+              <a:t xml:space="preserve">Las 25 configuraciones convergen al mismo peso, m* = 0,30, porque es el piso del rango publicado: la aptitud decrece de forma monótona en m. Y el argmax del radio dentro de ese rango es r = 1 (Fo = 1,7350) —en 16 de las 25 configuraciones— y no r = 25 (Fo = 1,7057), que aparece en 8. La configuración adoptada, r = 25, la selecciona el bloque de actividad de la batería de evaluación, no la optimización.</a:t>
             </a:r>
             <a:endParaRPr lang="en-US" sz="1300" dirty="0"/>
           </a:p>
@@ -10748,7 +10748,7 @@
                 <a:ea typeface="Times New Roman" pitchFamily="34" charset="-122"/>
                 <a:cs typeface="Times New Roman" pitchFamily="34" charset="-120"/>
               </a:rPr>
-              <a:t>7 métodos: LP, RP, DWT, DTCWT, CVT, Top-Hat clásico y Propuesta → 140 fusiones.</a:t>
+              <a:t xml:space="preserve">7 métodos: LP, RP, DWT, DTCWT, CVT (aprox. wavelet db4), Top-Hat clásico y Propuesta → 140 fusiones.</a:t>
             </a:r>
             <a:endParaRPr lang="en-US" sz="1250" dirty="0"/>
           </a:p>

--- a/docs/Tesis_Defensa_Presentacion.pptx
+++ b/docs/Tesis_Defensa_Presentacion.pptx
@@ -8,8 +8,9 @@
     <p:sldId id="256" r:id="rId2"/>
     <p:sldId id="257" r:id="rId3"/>
     <p:sldId id="258" r:id="rId4"/>
+    <p:sldId id="275" r:id="rId26"/>
     <p:sldId id="259" r:id="rId5"/>
-    <p:sldId id="260" r:id="rId6"/>
+    <p:sldId id="276" r:id="rId27"/>
     <p:sldId id="261" r:id="rId7"/>
     <p:sldId id="262" r:id="rId8"/>
     <p:sldId id="263" r:id="rId9"/>
@@ -17,13 +18,16 @@
     <p:sldId id="265" r:id="rId11"/>
     <p:sldId id="266" r:id="rId12"/>
     <p:sldId id="267" r:id="rId13"/>
+    <p:sldId id="277" r:id="rId28"/>
+    <p:sldId id="278" r:id="rId29"/>
+    <p:sldId id="279" r:id="rId30"/>
     <p:sldId id="268" r:id="rId14"/>
     <p:sldId id="269" r:id="rId15"/>
-    <p:sldId id="270" r:id="rId16"/>
     <p:sldId id="271" r:id="rId17"/>
     <p:sldId id="272" r:id="rId18"/>
     <p:sldId id="273" r:id="rId19"/>
     <p:sldId id="274" r:id="rId20"/>
+    <p:sldId id="270" r:id="rId16"/>
   </p:sldIdLst>
   <p:notesMasterIdLst>
     <p:notesMasterId r:id="rId21"/>
@@ -2844,7 +2848,7 @@
                 <a:ea typeface="Times New Roman" pitchFamily="34" charset="-122"/>
                 <a:cs typeface="Times New Roman" pitchFamily="34" charset="-120"/>
               </a:rPr>
-              <a:t>7. Resultados cualitativos</a:t>
+              <a:t xml:space="preserve">8. Resultados cualitativos</a:t>
             </a:r>
             <a:endParaRPr lang="en-US" sz="2300" dirty="0"/>
           </a:p>
@@ -2883,7 +2887,7 @@
                 <a:ea typeface="Times New Roman" pitchFamily="34" charset="-122"/>
                 <a:cs typeface="Times New Roman" pitchFamily="34" charset="-120"/>
               </a:rPr>
-              <a:t>10 / 19</a:t>
+              <a:t xml:space="preserve">11 / 22</a:t>
             </a:r>
             <a:endParaRPr lang="en-US" sz="900" dirty="0"/>
           </a:p>
@@ -3017,7 +3021,7 @@
                 <a:ea typeface="Times New Roman" pitchFamily="34" charset="-122"/>
                 <a:cs typeface="Times New Roman" pitchFamily="34" charset="-120"/>
               </a:rPr>
-              <a:t>Resultados cuantitativos — medias sobre 20 pares</a:t>
+              <a:t xml:space="preserve">Resultados cuantitativos por bloques — medias sobre 20 pares</a:t>
             </a:r>
             <a:endParaRPr lang="en-US" sz="2300" dirty="0"/>
           </a:p>
@@ -3056,7 +3060,7 @@
                 <a:ea typeface="Times New Roman" pitchFamily="34" charset="-122"/>
                 <a:cs typeface="Times New Roman" pitchFamily="34" charset="-120"/>
               </a:rPr>
-              <a:t>11 / 19</a:t>
+              <a:t xml:space="preserve">12 / 22</a:t>
             </a:r>
             <a:endParaRPr lang="en-US" sz="900" dirty="0"/>
           </a:p>
@@ -6379,7 +6383,7 @@
                 <a:ea typeface="Times New Roman" pitchFamily="34" charset="-122"/>
                 <a:cs typeface="Times New Roman" pitchFamily="34" charset="-120"/>
               </a:rPr>
-              <a:t>Análisis estadístico</a:t>
+              <a:t xml:space="preserve">Análisis estadístico: el punto de operación se desplaza (H1)</a:t>
             </a:r>
             <a:endParaRPr lang="en-US" sz="2300" dirty="0"/>
           </a:p>
@@ -6418,7 +6422,7 @@
                 <a:ea typeface="Times New Roman" pitchFamily="34" charset="-122"/>
                 <a:cs typeface="Times New Roman" pitchFamily="34" charset="-120"/>
               </a:rPr>
-              <a:t>12 / 19</a:t>
+              <a:t xml:space="preserve">13 / 22</a:t>
             </a:r>
             <a:endParaRPr lang="en-US" sz="900" dirty="0"/>
           </a:p>
@@ -6658,7 +6662,7 @@
                 <a:ea typeface="Times New Roman" pitchFamily="34" charset="-122"/>
                 <a:cs typeface="Times New Roman" pitchFamily="34" charset="-120"/>
               </a:rPr>
-              <a:t>8. Detección en LLVIP — mAP@0,5</a:t>
+              <a:t xml:space="preserve">10. Contraste externo I — detección en LLVIP (H6)</a:t>
             </a:r>
             <a:endParaRPr lang="en-US" sz="2300" dirty="0"/>
           </a:p>
@@ -6697,7 +6701,7 @@
                 <a:ea typeface="Times New Roman" pitchFamily="34" charset="-122"/>
                 <a:cs typeface="Times New Roman" pitchFamily="34" charset="-120"/>
               </a:rPr>
-              <a:t>13 / 19</a:t>
+              <a:t xml:space="preserve">17 / 22</a:t>
             </a:r>
             <a:endParaRPr lang="en-US" sz="900" dirty="0"/>
           </a:p>
@@ -6877,7 +6881,7 @@
                 <a:ea typeface="Times New Roman" pitchFamily="34" charset="-122"/>
                 <a:cs typeface="Times New Roman" pitchFamily="34" charset="-120"/>
               </a:rPr>
-              <a:t>Clases complementarias en M3FD — un detector único VIS+IR</a:t>
+              <a:t xml:space="preserve">Contraste externo II — M3FD: el conteo por escena (H6)</a:t>
             </a:r>
             <a:endParaRPr lang="en-US" sz="2300" dirty="0"/>
           </a:p>
@@ -6916,7 +6920,7 @@
                 <a:ea typeface="Times New Roman" pitchFamily="34" charset="-122"/>
                 <a:cs typeface="Times New Roman" pitchFamily="34" charset="-120"/>
               </a:rPr>
-              <a:t>14 / 19</a:t>
+              <a:t xml:space="preserve">18 / 22</a:t>
             </a:r>
             <a:endParaRPr lang="en-US" sz="900" dirty="0"/>
           </a:p>
@@ -7135,7 +7139,7 @@
                 <a:ea typeface="Times New Roman" pitchFamily="34" charset="-122"/>
                 <a:cs typeface="Times New Roman" pitchFamily="34" charset="-120"/>
               </a:rPr>
-              <a:t>15 / 19</a:t>
+              <a:t xml:space="preserve">RESERVA</a:t>
             </a:r>
             <a:endParaRPr lang="en-US" sz="900" dirty="0"/>
           </a:p>
@@ -7269,7 +7273,7 @@
                 <a:ea typeface="Times New Roman" pitchFamily="34" charset="-122"/>
                 <a:cs typeface="Times New Roman" pitchFamily="34" charset="-120"/>
               </a:rPr>
-              <a:t>Contraste de hipótesis</a:t>
+              <a:t xml:space="preserve">11. Contraste de las siete hipótesis</a:t>
             </a:r>
             <a:endParaRPr lang="en-US" sz="2300" dirty="0"/>
           </a:p>
@@ -7308,7 +7312,7 @@
                 <a:ea typeface="Times New Roman" pitchFamily="34" charset="-122"/>
                 <a:cs typeface="Times New Roman" pitchFamily="34" charset="-120"/>
               </a:rPr>
-              <a:t>16 / 19</a:t>
+              <a:t xml:space="preserve">19 / 22</a:t>
             </a:r>
             <a:endParaRPr lang="en-US" sz="900" dirty="0"/>
           </a:p>
@@ -7730,7 +7734,7 @@
                 <a:ea typeface="Times New Roman" pitchFamily="34" charset="-122"/>
                 <a:cs typeface="Times New Roman" pitchFamily="34" charset="-120"/>
               </a:rPr>
-              <a:t>9. Conclusiones</a:t>
+              <a:t xml:space="preserve">Conclusiones</a:t>
             </a:r>
             <a:endParaRPr lang="en-US" sz="2300" dirty="0"/>
           </a:p>
@@ -7769,7 +7773,7 @@
                 <a:ea typeface="Times New Roman" pitchFamily="34" charset="-122"/>
                 <a:cs typeface="Times New Roman" pitchFamily="34" charset="-120"/>
               </a:rPr>
-              <a:t>17 / 19</a:t>
+              <a:t xml:space="preserve">20 / 22</a:t>
             </a:r>
             <a:endParaRPr lang="en-US" sz="900" dirty="0"/>
           </a:p>
@@ -8006,7 +8010,7 @@
                 <a:ea typeface="Times New Roman" pitchFamily="34" charset="-122"/>
                 <a:cs typeface="Times New Roman" pitchFamily="34" charset="-120"/>
               </a:rPr>
-              <a:t>18 / 19</a:t>
+              <a:t xml:space="preserve">21 / 22</a:t>
             </a:r>
             <a:endParaRPr lang="en-US" sz="900" dirty="0"/>
           </a:p>
@@ -8431,7 +8435,7 @@
                 <a:ea typeface="Times New Roman" pitchFamily="34" charset="-122"/>
                 <a:cs typeface="Times New Roman" pitchFamily="34" charset="-120"/>
               </a:rPr>
-              <a:t>2 / 19</a:t>
+              <a:t xml:space="preserve">2 / 22</a:t>
             </a:r>
             <a:endParaRPr lang="en-US" sz="900" dirty="0"/>
           </a:p>
@@ -8474,7 +8478,7 @@
                 <a:ea typeface="Times New Roman" pitchFamily="34" charset="-122"/>
                 <a:cs typeface="Times New Roman" pitchFamily="34" charset="-120"/>
               </a:rPr>
-              <a:t>1.  Problema y justificación</a:t>
+              <a:t xml:space="preserve">1.  Problema: dos preguntas, no una</a:t>
             </a:r>
             <a:endParaRPr lang="en-US" sz="1500" dirty="0"/>
           </a:p>
@@ -8495,7 +8499,7 @@
                 <a:ea typeface="Times New Roman" pitchFamily="34" charset="-122"/>
                 <a:cs typeface="Times New Roman" pitchFamily="34" charset="-120"/>
               </a:rPr>
-              <a:t>2.  Objetivos e hipótesis</a:t>
+              <a:t xml:space="preserve">2.  Los dos aportes de la tesis</a:t>
             </a:r>
             <a:endParaRPr lang="en-US" sz="1500" dirty="0"/>
           </a:p>
@@ -8516,7 +8520,7 @@
                 <a:ea typeface="Times New Roman" pitchFamily="34" charset="-122"/>
                 <a:cs typeface="Times New Roman" pitchFamily="34" charset="-120"/>
               </a:rPr>
-              <a:t>3.  Marco: la transformada Top-Hat y la fusión clásica</a:t>
+              <a:t xml:space="preserve">3.  Objetivos e hipótesis (cinco objetivos específicos, siete hipótesis)</a:t>
             </a:r>
             <a:endParaRPr lang="en-US" sz="1500" dirty="0"/>
           </a:p>
@@ -8537,7 +8541,7 @@
                 <a:ea typeface="Times New Roman" pitchFamily="34" charset="-122"/>
                 <a:cs typeface="Times New Roman" pitchFamily="34" charset="-120"/>
               </a:rPr>
-              <a:t>4.  Propuesta novedosa: banco de elementos estructurantes y suma de ramas</a:t>
+              <a:t xml:space="preserve">4.  Marco: la transformada Top-Hat y la fusión clásica</a:t>
             </a:r>
             <a:endParaRPr lang="en-US" sz="1500" dirty="0"/>
           </a:p>
@@ -8558,7 +8562,7 @@
                 <a:ea typeface="Times New Roman" pitchFamily="34" charset="-122"/>
                 <a:cs typeface="Times New Roman" pitchFamily="34" charset="-120"/>
               </a:rPr>
-              <a:t>5.  Optimización de hiperparámetros por PSO</a:t>
+              <a:t xml:space="preserve">5.  El operador: banco de cinco elementos estructurantes y suma de ramas</a:t>
             </a:r>
             <a:endParaRPr lang="en-US" sz="1500" dirty="0"/>
           </a:p>
@@ -8579,7 +8583,7 @@
                 <a:ea typeface="Times New Roman" pitchFamily="34" charset="-122"/>
                 <a:cs typeface="Times New Roman" pitchFamily="34" charset="-120"/>
               </a:rPr>
-              <a:t>6.  Diseño experimental</a:t>
+              <a:t xml:space="preserve">6.  Alcance real de la optimización por PSO</a:t>
             </a:r>
             <a:endParaRPr lang="en-US" sz="1500" dirty="0"/>
           </a:p>
@@ -8600,7 +8604,7 @@
                 <a:ea typeface="Times New Roman" pitchFamily="34" charset="-122"/>
                 <a:cs typeface="Times New Roman" pitchFamily="34" charset="-120"/>
               </a:rPr>
-              <a:t>7.  Resultados: cualitativos, cuantitativos y estadísticos</a:t>
+              <a:t xml:space="preserve">7.  Diseño experimental</a:t>
             </a:r>
             <a:endParaRPr lang="en-US" sz="1500" dirty="0"/>
           </a:p>
@@ -8621,7 +8625,7 @@
                 <a:ea typeface="Times New Roman" pitchFamily="34" charset="-122"/>
                 <a:cs typeface="Times New Roman" pitchFamily="34" charset="-120"/>
               </a:rPr>
-              <a:t>8.  Evaluación orientada a tarea: detección en LLVIP y M3FD</a:t>
+              <a:t xml:space="preserve">8.  Resultados: el punto de operación del operador</a:t>
             </a:r>
             <a:endParaRPr lang="en-US" sz="1500" dirty="0"/>
           </a:p>
@@ -8642,9 +8646,1362 @@
                 <a:ea typeface="Times New Roman" pitchFamily="34" charset="-122"/>
                 <a:cs typeface="Times New Roman" pitchFamily="34" charset="-120"/>
               </a:rPr>
-              <a:t>9.  Conclusiones y recomendaciones</a:t>
+              <a:t xml:space="preserve">9.  Auditoría del protocolo de evaluación (tres controles)</a:t>
             </a:r>
             <a:endParaRPr lang="en-US" sz="1500" dirty="0"/>
+          </a:p>
+          <a:p>
+            <a:pPr marL="177800" indent="-177800">
+              <a:spcAft>
+                <a:spcPts val="900"/>
+              </a:spcAft>
+              <a:buSzPct val="100000"/>
+              <a:buChar char="•"/>
+            </a:pPr>
+            <a:r>
+              <a:rPr lang="en-US" sz="1500" dirty="0">
+                <a:solidFill>
+                  <a:srgbClr val="1A1A1A"/>
+                </a:solidFill>
+                <a:latin typeface="Times New Roman" pitchFamily="34" charset="0"/>
+                <a:ea typeface="Times New Roman" pitchFamily="34" charset="-122"/>
+                <a:cs typeface="Times New Roman" pitchFamily="34" charset="-120"/>
+              </a:rPr>
+              <a:t xml:space="preserve">10. Contraste externo: detección en LLVIP y M3FD</a:t>
+            </a:r>
+            <a:endParaRPr lang="en-US" sz="1500" dirty="0"/>
+          </a:p>
+          <a:p>
+            <a:pPr marL="177800" indent="-177800">
+              <a:spcAft>
+                <a:spcPts val="900"/>
+              </a:spcAft>
+              <a:buSzPct val="100000"/>
+              <a:buChar char="•"/>
+            </a:pPr>
+            <a:r>
+              <a:rPr lang="en-US" sz="1500" dirty="0">
+                <a:solidFill>
+                  <a:srgbClr val="1A1A1A"/>
+                </a:solidFill>
+                <a:latin typeface="Times New Roman" pitchFamily="34" charset="0"/>
+                <a:ea typeface="Times New Roman" pitchFamily="34" charset="-122"/>
+                <a:cs typeface="Times New Roman" pitchFamily="34" charset="-120"/>
+              </a:rPr>
+              <a:t xml:space="preserve">11. Contraste de hipótesis, conclusiones y recomendaciones</a:t>
+            </a:r>
+            <a:endParaRPr lang="en-US" sz="1500" dirty="0"/>
+          </a:p>
+        </p:txBody>
+      </p:sp>
+    </p:spTree>
+  </p:cSld>
+  <p:clrMapOvr>
+    <a:masterClrMapping/>
+  </p:clrMapOvr>
+</p:sld>
+</file>
+
+<file path=ppt/slides/slide20.xml><?xml version="1.0" encoding="utf-8"?>
+<p:sld xmlns:a="http://schemas.openxmlformats.org/drawingml/2006/main" xmlns:r="http://schemas.openxmlformats.org/officeDocument/2006/relationships" xmlns:p="http://schemas.openxmlformats.org/presentationml/2006/main">
+  <p:cSld name="Slide 17">
+    <p:bg>
+      <p:bgPr>
+        <a:solidFill>
+          <a:srgbClr val="FFFFFF"/>
+        </a:solidFill>
+      </p:bgPr>
+    </p:bg>
+    <p:spTree>
+      <p:nvGrpSpPr>
+        <p:cNvPr id="1" name=""/>
+        <p:cNvGrpSpPr/>
+        <p:nvPr/>
+      </p:nvGrpSpPr>
+      <p:grpSpPr>
+        <a:xfrm>
+          <a:off x="0" y="0"/>
+          <a:ext cx="0" cy="0"/>
+          <a:chOff x="0" y="0"/>
+          <a:chExt cx="0" cy="0"/>
+        </a:xfrm>
+      </p:grpSpPr>
+      <p:sp>
+        <p:nvSpPr>
+          <p:cNvPr id="2" name="Text 0"/>
+          <p:cNvSpPr/>
+          <p:nvPr/>
+        </p:nvSpPr>
+        <p:spPr>
+          <a:xfrm>
+            <a:off x="457200" y="256032"/>
+            <a:ext cx="8229600" cy="502920"/>
+          </a:xfrm>
+          <a:prstGeom prst="rect">
+            <a:avLst/>
+          </a:prstGeom>
+          <a:noFill/>
+          <a:ln/>
+        </p:spPr>
+        <p:txBody>
+          <a:bodyPr wrap="square" lIns="0" tIns="0" rIns="0" bIns="0" rtlCol="0" anchor="ctr"/>
+          <a:lstStyle/>
+          <a:p>
+            <a:pPr indent="0" marL="0">
+              <a:buNone/>
+            </a:pPr>
+            <a:r>
+              <a:rPr lang="en-US" sz="2300" b="1" dirty="0">
+                <a:solidFill>
+                  <a:srgbClr val="1A1A1A"/>
+                </a:solidFill>
+                <a:latin typeface="Times New Roman" pitchFamily="34" charset="0"/>
+                <a:ea typeface="Times New Roman" pitchFamily="34" charset="-122"/>
+                <a:cs typeface="Times New Roman" pitchFamily="34" charset="-120"/>
+              </a:rPr>
+              <a:t xml:space="preserve">2. Los dos aportes de la tesis</a:t>
+            </a:r>
+            <a:endParaRPr lang="en-US" sz="2300" dirty="0"/>
+          </a:p>
+        </p:txBody>
+      </p:sp>
+      <p:sp>
+        <p:nvSpPr>
+          <p:cNvPr id="3" name="Text 1"/>
+          <p:cNvSpPr/>
+          <p:nvPr/>
+        </p:nvSpPr>
+        <p:spPr>
+          <a:xfrm>
+            <a:off x="8229600" y="4828032"/>
+            <a:ext cx="685800" cy="274320"/>
+          </a:xfrm>
+          <a:prstGeom prst="rect">
+            <a:avLst/>
+          </a:prstGeom>
+          <a:noFill/>
+          <a:ln/>
+        </p:spPr>
+        <p:txBody>
+          <a:bodyPr wrap="square" lIns="0" tIns="0" rIns="0" bIns="0" rtlCol="0" anchor="ctr"/>
+          <a:lstStyle/>
+          <a:p>
+            <a:pPr algn="r" indent="0" marL="0">
+              <a:buNone/>
+            </a:pPr>
+            <a:r>
+              <a:rPr lang="en-US" sz="900" dirty="0">
+                <a:solidFill>
+                  <a:srgbClr val="666666"/>
+                </a:solidFill>
+                <a:latin typeface="Times New Roman" pitchFamily="34" charset="0"/>
+                <a:ea typeface="Times New Roman" pitchFamily="34" charset="-122"/>
+                <a:cs typeface="Times New Roman" pitchFamily="34" charset="-120"/>
+              </a:rPr>
+              <a:t xml:space="preserve">4 / 22</a:t>
+            </a:r>
+            <a:endParaRPr lang="en-US" sz="900" dirty="0"/>
+          </a:p>
+        </p:txBody>
+      </p:sp>
+      <p:sp>
+        <p:nvSpPr>
+          <p:cNvPr id="4" name="Text 2"/>
+          <p:cNvSpPr/>
+          <p:nvPr/>
+        </p:nvSpPr>
+        <p:spPr>
+          <a:xfrm>
+            <a:off x="457200" y="914400"/>
+            <a:ext cx="8229600" cy="3931920"/>
+          </a:xfrm>
+          <a:prstGeom prst="rect">
+            <a:avLst/>
+          </a:prstGeom>
+          <a:noFill/>
+          <a:ln/>
+        </p:spPr>
+        <p:txBody>
+          <a:bodyPr wrap="square" lIns="0" tIns="0" rIns="0" bIns="0" rtlCol="0" anchor="t"/>
+          <a:lstStyle/>
+          <a:p>
+            <a:pPr marL="177800" indent="-177800">
+              <a:spcAft>
+                <a:spcPts val="1100"/>
+              </a:spcAft>
+              <a:buSzPct val="100000"/>
+              <a:buChar char="•"/>
+            </a:pPr>
+            <a:r>
+              <a:rPr lang="en-US" sz="1350" dirty="0">
+                <a:solidFill>
+                  <a:srgbClr val="1A1A1A"/>
+                </a:solidFill>
+                <a:latin typeface="Times New Roman" pitchFamily="34" charset="0"/>
+                <a:ea typeface="Times New Roman" pitchFamily="34" charset="-122"/>
+                <a:cs typeface="Times New Roman" pitchFamily="34" charset="-120"/>
+              </a:rPr>
+              <a:t xml:space="preserve">Aporte 1 — El operador y su caracterización: un Top-Hat/Bottom-Hat de una sola escala con banco de cinco elementos estructurantes (un disco de radio r y cuatro segmentos lineales a 0°, 45°, 90° y 135°), y la determinación de en qué dirección desplaza el punto de operación de la fusión frente a la metodología clásica y a cinco configuraciones de referencia.</a:t>
+            </a:r>
+            <a:endParaRPr lang="en-US" sz="1350" dirty="0"/>
+          </a:p>
+          <a:p>
+            <a:pPr marL="177800" indent="-177800">
+              <a:spcAft>
+                <a:spcPts val="1100"/>
+              </a:spcAft>
+              <a:buSzPct val="100000"/>
+              <a:buChar char="•"/>
+            </a:pPr>
+            <a:r>
+              <a:rPr lang="en-US" sz="1350" dirty="0">
+                <a:solidFill>
+                  <a:srgbClr val="1A1A1A"/>
+                </a:solidFill>
+                <a:latin typeface="Times New Roman" pitchFamily="34" charset="0"/>
+                <a:ea typeface="Times New Roman" pitchFamily="34" charset="-122"/>
+                <a:cs typeface="Times New Roman" pitchFamily="34" charset="-120"/>
+              </a:rPr>
+              <a:t xml:space="preserve">Aporte 2 — La auditoría del protocolo de evaluación: ¿qué autoriza a concluir un criterio formado por nueve métricas sin referencia de tipo «mayor es mejor», con los hiperparámetros elegidos sobre esas mismas métricas y una validación en tarea posterior?</a:t>
+            </a:r>
+            <a:endParaRPr lang="en-US" sz="1350" dirty="0"/>
+          </a:p>
+          <a:p>
+            <a:pPr marL="177800" indent="-177800">
+              <a:spcAft>
+                <a:spcPts val="1100"/>
+              </a:spcAft>
+              <a:buSzPct val="100000"/>
+              <a:buChar char="•"/>
+            </a:pPr>
+            <a:r>
+              <a:rPr lang="en-US" sz="1350" dirty="0">
+                <a:solidFill>
+                  <a:srgbClr val="1A1A1A"/>
+                </a:solidFill>
+                <a:latin typeface="Times New Roman" pitchFamily="34" charset="0"/>
+                <a:ea typeface="Times New Roman" pitchFamily="34" charset="-122"/>
+                <a:cs typeface="Times New Roman" pitchFamily="34" charset="-120"/>
+              </a:rPr>
+              <a:t xml:space="preserve">Con el propio desarrollo como caso de estudio. Los tres controles —control negativo con degradaciones conocidas, ablación del banco con hiperparámetros igualados y ajuste simétrico de los comparativos— están corridos, versionados y son reproducibles.</a:t>
+            </a:r>
+            <a:endParaRPr lang="en-US" sz="1350" dirty="0"/>
+          </a:p>
+          <a:p>
+            <a:pPr marL="177800" indent="-177800">
+              <a:spcAft>
+                <a:spcPts val="1100"/>
+              </a:spcAft>
+              <a:buSzPct val="100000"/>
+              <a:buChar char="•"/>
+            </a:pPr>
+            <a:r>
+              <a:rPr lang="en-US" sz="1350" dirty="0">
+                <a:solidFill>
+                  <a:srgbClr val="1A1A1A"/>
+                </a:solidFill>
+                <a:latin typeface="Times New Roman" pitchFamily="34" charset="0"/>
+                <a:ea typeface="Times New Roman" pitchFamily="34" charset="-122"/>
+                <a:cs typeface="Times New Roman" pitchFamily="34" charset="-120"/>
+              </a:rPr>
+              <a:t xml:space="preserve">La tesis no sostiene que el método sea mejor. Sostiene que desplaza el punto de operación en una dirección determinada, y que el orden de mérito que lo corona es propiedad del criterio.</a:t>
+            </a:r>
+            <a:endParaRPr lang="en-US" sz="1350" dirty="0"/>
+          </a:p>
+        </p:txBody>
+      </p:sp>
+    </p:spTree>
+  </p:cSld>
+  <p:clrMapOvr>
+    <a:masterClrMapping/>
+  </p:clrMapOvr>
+</p:sld>
+</file>
+
+<file path=ppt/slides/slide21.xml><?xml version="1.0" encoding="utf-8"?>
+<p:sld xmlns:a="http://schemas.openxmlformats.org/drawingml/2006/main" xmlns:r="http://schemas.openxmlformats.org/officeDocument/2006/relationships" xmlns:p="http://schemas.openxmlformats.org/presentationml/2006/main">
+  <p:cSld name="Slide 17">
+    <p:bg>
+      <p:bgPr>
+        <a:solidFill>
+          <a:srgbClr val="FFFFFF"/>
+        </a:solidFill>
+      </p:bgPr>
+    </p:bg>
+    <p:spTree>
+      <p:nvGrpSpPr>
+        <p:cNvPr id="1" name=""/>
+        <p:cNvGrpSpPr/>
+        <p:nvPr/>
+      </p:nvGrpSpPr>
+      <p:grpSpPr>
+        <a:xfrm>
+          <a:off x="0" y="0"/>
+          <a:ext cx="0" cy="0"/>
+          <a:chOff x="0" y="0"/>
+          <a:chExt cx="0" cy="0"/>
+        </a:xfrm>
+      </p:grpSpPr>
+      <p:sp>
+        <p:nvSpPr>
+          <p:cNvPr id="2" name="Text 0"/>
+          <p:cNvSpPr/>
+          <p:nvPr/>
+        </p:nvSpPr>
+        <p:spPr>
+          <a:xfrm>
+            <a:off x="457200" y="256032"/>
+            <a:ext cx="8229600" cy="502920"/>
+          </a:xfrm>
+          <a:prstGeom prst="rect">
+            <a:avLst/>
+          </a:prstGeom>
+          <a:noFill/>
+          <a:ln/>
+        </p:spPr>
+        <p:txBody>
+          <a:bodyPr wrap="square" lIns="0" tIns="0" rIns="0" bIns="0" rtlCol="0" anchor="ctr"/>
+          <a:lstStyle/>
+          <a:p>
+            <a:pPr indent="0" marL="0">
+              <a:buNone/>
+            </a:pPr>
+            <a:r>
+              <a:rPr lang="en-US" sz="2300" b="1" dirty="0">
+                <a:solidFill>
+                  <a:srgbClr val="1A1A1A"/>
+                </a:solidFill>
+                <a:latin typeface="Times New Roman" pitchFamily="34" charset="0"/>
+                <a:ea typeface="Times New Roman" pitchFamily="34" charset="-122"/>
+                <a:cs typeface="Times New Roman" pitchFamily="34" charset="-120"/>
+              </a:rPr>
+              <a:t xml:space="preserve">Siete hipótesis de trabajo</a:t>
+            </a:r>
+            <a:endParaRPr lang="en-US" sz="2300" dirty="0"/>
+          </a:p>
+        </p:txBody>
+      </p:sp>
+      <p:sp>
+        <p:nvSpPr>
+          <p:cNvPr id="3" name="Text 1"/>
+          <p:cNvSpPr/>
+          <p:nvPr/>
+        </p:nvSpPr>
+        <p:spPr>
+          <a:xfrm>
+            <a:off x="8229600" y="4828032"/>
+            <a:ext cx="685800" cy="274320"/>
+          </a:xfrm>
+          <a:prstGeom prst="rect">
+            <a:avLst/>
+          </a:prstGeom>
+          <a:noFill/>
+          <a:ln/>
+        </p:spPr>
+        <p:txBody>
+          <a:bodyPr wrap="square" lIns="0" tIns="0" rIns="0" bIns="0" rtlCol="0" anchor="ctr"/>
+          <a:lstStyle/>
+          <a:p>
+            <a:pPr algn="r" indent="0" marL="0">
+              <a:buNone/>
+            </a:pPr>
+            <a:r>
+              <a:rPr lang="en-US" sz="900" dirty="0">
+                <a:solidFill>
+                  <a:srgbClr val="666666"/>
+                </a:solidFill>
+                <a:latin typeface="Times New Roman" pitchFamily="34" charset="0"/>
+                <a:ea typeface="Times New Roman" pitchFamily="34" charset="-122"/>
+                <a:cs typeface="Times New Roman" pitchFamily="34" charset="-120"/>
+              </a:rPr>
+              <a:t xml:space="preserve">6 / 22</a:t>
+            </a:r>
+            <a:endParaRPr lang="en-US" sz="900" dirty="0"/>
+          </a:p>
+        </p:txBody>
+      </p:sp>
+      <p:sp>
+        <p:nvSpPr>
+          <p:cNvPr id="4" name="Text 2"/>
+          <p:cNvSpPr/>
+          <p:nvPr/>
+        </p:nvSpPr>
+        <p:spPr>
+          <a:xfrm>
+            <a:off x="457200" y="914400"/>
+            <a:ext cx="8229600" cy="3931920"/>
+          </a:xfrm>
+          <a:prstGeom prst="rect">
+            <a:avLst/>
+          </a:prstGeom>
+          <a:noFill/>
+          <a:ln/>
+        </p:spPr>
+        <p:txBody>
+          <a:bodyPr wrap="square" lIns="0" tIns="0" rIns="0" bIns="0" rtlCol="0" anchor="t"/>
+          <a:lstStyle/>
+          <a:p>
+            <a:pPr marL="177800" indent="-177800">
+              <a:spcAft>
+                <a:spcPts val="1100"/>
+              </a:spcAft>
+              <a:buSzPct val="100000"/>
+              <a:buChar char="•"/>
+            </a:pPr>
+            <a:r>
+              <a:rPr lang="en-US" sz="1350" dirty="0">
+                <a:solidFill>
+                  <a:srgbClr val="1A1A1A"/>
+                </a:solidFill>
+                <a:latin typeface="Times New Roman" pitchFamily="34" charset="0"/>
+                <a:ea typeface="Times New Roman" pitchFamily="34" charset="-122"/>
+                <a:cs typeface="Times New Roman" pitchFamily="34" charset="-120"/>
+              </a:rPr>
+              <a:t xml:space="preserve">H1 (operador) — El banco de cinco elementos estructurantes no mejora la fusión de manera uniforme: desplaza su punto de operación hacia el realce de la actividad espacial, en contra de la fidelidad a las fuentes.</a:t>
+            </a:r>
+            <a:endParaRPr lang="en-US" sz="1350" dirty="0"/>
+          </a:p>
+          <a:p>
+            <a:pPr marL="177800" indent="-177800">
+              <a:spcAft>
+                <a:spcPts val="1100"/>
+              </a:spcAft>
+              <a:buSzPct val="100000"/>
+              <a:buChar char="•"/>
+            </a:pPr>
+            <a:r>
+              <a:rPr lang="en-US" sz="1350" dirty="0">
+                <a:solidFill>
+                  <a:srgbClr val="1A1A1A"/>
+                </a:solidFill>
+                <a:latin typeface="Times New Roman" pitchFamily="34" charset="0"/>
+                <a:ea typeface="Times New Roman" pitchFamily="34" charset="-122"/>
+                <a:cs typeface="Times New Roman" pitchFamily="34" charset="-120"/>
+              </a:rPr>
+              <a:t xml:space="preserve">H2 (criterio) — El orden de mérito de los métodos no es una propiedad del operador, sino del criterio con que se lo evalúa.</a:t>
+            </a:r>
+            <a:endParaRPr lang="en-US" sz="1350" dirty="0"/>
+          </a:p>
+          <a:p>
+            <a:pPr marL="177800" indent="-177800">
+              <a:spcAft>
+                <a:spcPts val="1100"/>
+              </a:spcAft>
+              <a:buSzPct val="100000"/>
+              <a:buChar char="•"/>
+            </a:pPr>
+            <a:r>
+              <a:rPr lang="en-US" sz="1350" dirty="0">
+                <a:solidFill>
+                  <a:srgbClr val="1A1A1A"/>
+                </a:solidFill>
+                <a:latin typeface="Times New Roman" pitchFamily="34" charset="0"/>
+                <a:ea typeface="Times New Roman" pitchFamily="34" charset="-122"/>
+                <a:cs typeface="Times New Roman" pitchFamily="34" charset="-120"/>
+              </a:rPr>
+              <a:t xml:space="preserve">H3 (criterio) — La batería de nueve métricas de tipo «mayor es mejor» es insuficiente como criterio de calidad, porque sus métricas de actividad crecen monótonamente con la varianza inyectada.</a:t>
+            </a:r>
+            <a:endParaRPr lang="en-US" sz="1350" dirty="0"/>
+          </a:p>
+          <a:p>
+            <a:pPr marL="177800" indent="-177800">
+              <a:spcAft>
+                <a:spcPts val="1100"/>
+              </a:spcAft>
+              <a:buSzPct val="100000"/>
+              <a:buChar char="•"/>
+            </a:pPr>
+            <a:r>
+              <a:rPr lang="en-US" sz="1350" dirty="0">
+                <a:solidFill>
+                  <a:srgbClr val="1A1A1A"/>
+                </a:solidFill>
+                <a:latin typeface="Times New Roman" pitchFamily="34" charset="0"/>
+                <a:ea typeface="Times New Roman" pitchFamily="34" charset="-122"/>
+                <a:cs typeface="Times New Roman" pitchFamily="34" charset="-120"/>
+              </a:rPr>
+              <a:t xml:space="preserve">H4 (criterio) — La batería contiene al menos una métrica que no aporta información independiente de las demás.</a:t>
+            </a:r>
+            <a:endParaRPr lang="en-US" sz="1350" dirty="0"/>
+          </a:p>
+          <a:p>
+            <a:pPr marL="177800" indent="-177800">
+              <a:spcAft>
+                <a:spcPts val="1100"/>
+              </a:spcAft>
+              <a:buSzPct val="100000"/>
+              <a:buChar char="•"/>
+            </a:pPr>
+            <a:r>
+              <a:rPr lang="en-US" sz="1350" dirty="0">
+                <a:solidFill>
+                  <a:srgbClr val="1A1A1A"/>
+                </a:solidFill>
+                <a:latin typeface="Times New Roman" pitchFamily="34" charset="0"/>
+                <a:ea typeface="Times New Roman" pitchFamily="34" charset="-122"/>
+                <a:cs typeface="Times New Roman" pitchFamily="34" charset="-120"/>
+              </a:rPr>
+              <a:t xml:space="preserve">H5 (criterio) — La optimización no determina la configuración adoptada: ambos hiperparámetros son decisiones apoyadas en parte del mismo criterio con el que después se evalúa.</a:t>
+            </a:r>
+            <a:endParaRPr lang="en-US" sz="1350" dirty="0"/>
+          </a:p>
+          <a:p>
+            <a:pPr marL="177800" indent="-177800">
+              <a:spcAft>
+                <a:spcPts val="1100"/>
+              </a:spcAft>
+              <a:buSzPct val="100000"/>
+              <a:buChar char="•"/>
+            </a:pPr>
+            <a:r>
+              <a:rPr lang="en-US" sz="1350" dirty="0">
+                <a:solidFill>
+                  <a:srgbClr val="1A1A1A"/>
+                </a:solidFill>
+                <a:latin typeface="Times New Roman" pitchFamily="34" charset="0"/>
+                <a:ea typeface="Times New Roman" pitchFamily="34" charset="-122"/>
+                <a:cs typeface="Times New Roman" pitchFamily="34" charset="-120"/>
+              </a:rPr>
+              <a:t xml:space="preserve">H6 (criterio) — El orden de mérito de las métricas de imagen no predice el orden de utilidad en una tarea posterior, y ninguna fusión supera por un margen distinguible a la mejor modalidad individual.</a:t>
+            </a:r>
+            <a:endParaRPr lang="en-US" sz="1350" dirty="0"/>
+          </a:p>
+          <a:p>
+            <a:pPr marL="177800" indent="-177800">
+              <a:spcAft>
+                <a:spcPts val="1100"/>
+              </a:spcAft>
+              <a:buSzPct val="100000"/>
+              <a:buChar char="•"/>
+            </a:pPr>
+            <a:r>
+              <a:rPr lang="en-US" sz="1350" dirty="0">
+                <a:solidFill>
+                  <a:srgbClr val="1A1A1A"/>
+                </a:solidFill>
+                <a:latin typeface="Times New Roman" pitchFamily="34" charset="0"/>
+                <a:ea typeface="Times New Roman" pitchFamily="34" charset="-122"/>
+                <a:cs typeface="Times New Roman" pitchFamily="34" charset="-120"/>
+              </a:rPr>
+              <a:t xml:space="preserve">H7 (operador) — Con el radio y el peso igualados, el banco de cinco elementos produce un perfil distinto del disco único.</a:t>
+            </a:r>
+            <a:endParaRPr lang="en-US" sz="1350" dirty="0"/>
+          </a:p>
+          <a:p>
+            <a:pPr marL="177800" indent="-177800">
+              <a:spcAft>
+                <a:spcPts val="1100"/>
+              </a:spcAft>
+              <a:buSzPct val="100000"/>
+              <a:buChar char="•"/>
+            </a:pPr>
+            <a:r>
+              <a:rPr lang="en-US" sz="1350" dirty="0">
+                <a:solidFill>
+                  <a:srgbClr val="1A1A1A"/>
+                </a:solidFill>
+                <a:latin typeface="Times New Roman" pitchFamily="34" charset="0"/>
+                <a:ea typeface="Times New Roman" pitchFamily="34" charset="-122"/>
+                <a:cs typeface="Times New Roman" pitchFamily="34" charset="-120"/>
+              </a:rPr>
+              <a:t xml:space="preserve">H1 se contrasta en §5.4 y §5.6; H6 en §5.5; H2, H3, H4, H5 y H7 en §5.8. Las siete, con experimentos corridos y versionados.</a:t>
+            </a:r>
+            <a:endParaRPr lang="en-US" sz="1350" dirty="0"/>
+          </a:p>
+        </p:txBody>
+      </p:sp>
+    </p:spTree>
+  </p:cSld>
+  <p:clrMapOvr>
+    <a:masterClrMapping/>
+  </p:clrMapOvr>
+</p:sld>
+</file>
+
+<file path=ppt/slides/slide22.xml><?xml version="1.0" encoding="utf-8"?>
+<p:sld xmlns:a="http://schemas.openxmlformats.org/drawingml/2006/main" xmlns:r="http://schemas.openxmlformats.org/officeDocument/2006/relationships" xmlns:p="http://schemas.openxmlformats.org/presentationml/2006/main">
+  <p:cSld name="Slide 17">
+    <p:bg>
+      <p:bgPr>
+        <a:solidFill>
+          <a:srgbClr val="FFFFFF"/>
+        </a:solidFill>
+      </p:bgPr>
+    </p:bg>
+    <p:spTree>
+      <p:nvGrpSpPr>
+        <p:cNvPr id="1" name=""/>
+        <p:cNvGrpSpPr/>
+        <p:nvPr/>
+      </p:nvGrpSpPr>
+      <p:grpSpPr>
+        <a:xfrm>
+          <a:off x="0" y="0"/>
+          <a:ext cx="0" cy="0"/>
+          <a:chOff x="0" y="0"/>
+          <a:chExt cx="0" cy="0"/>
+        </a:xfrm>
+      </p:grpSpPr>
+      <p:sp>
+        <p:nvSpPr>
+          <p:cNvPr id="2" name="Text 0"/>
+          <p:cNvSpPr/>
+          <p:nvPr/>
+        </p:nvSpPr>
+        <p:spPr>
+          <a:xfrm>
+            <a:off x="457200" y="256032"/>
+            <a:ext cx="8229600" cy="502920"/>
+          </a:xfrm>
+          <a:prstGeom prst="rect">
+            <a:avLst/>
+          </a:prstGeom>
+          <a:noFill/>
+          <a:ln/>
+        </p:spPr>
+        <p:txBody>
+          <a:bodyPr wrap="square" lIns="0" tIns="0" rIns="0" bIns="0" rtlCol="0" anchor="ctr"/>
+          <a:lstStyle/>
+          <a:p>
+            <a:pPr indent="0" marL="0">
+              <a:buNone/>
+            </a:pPr>
+            <a:r>
+              <a:rPr lang="en-US" sz="2300" b="1" dirty="0">
+                <a:solidFill>
+                  <a:srgbClr val="1A1A1A"/>
+                </a:solidFill>
+                <a:latin typeface="Times New Roman" pitchFamily="34" charset="0"/>
+                <a:ea typeface="Times New Roman" pitchFamily="34" charset="-122"/>
+                <a:cs typeface="Times New Roman" pitchFamily="34" charset="-120"/>
+              </a:rPr>
+              <a:t xml:space="preserve">9. Auditoría I — ¿discrimina calidad la batería de nueve métricas? (H3, H4)</a:t>
+            </a:r>
+            <a:endParaRPr lang="en-US" sz="2300" dirty="0"/>
+          </a:p>
+        </p:txBody>
+      </p:sp>
+      <p:sp>
+        <p:nvSpPr>
+          <p:cNvPr id="3" name="Text 1"/>
+          <p:cNvSpPr/>
+          <p:nvPr/>
+        </p:nvSpPr>
+        <p:spPr>
+          <a:xfrm>
+            <a:off x="8229600" y="4828032"/>
+            <a:ext cx="685800" cy="274320"/>
+          </a:xfrm>
+          <a:prstGeom prst="rect">
+            <a:avLst/>
+          </a:prstGeom>
+          <a:noFill/>
+          <a:ln/>
+        </p:spPr>
+        <p:txBody>
+          <a:bodyPr wrap="square" lIns="0" tIns="0" rIns="0" bIns="0" rtlCol="0" anchor="ctr"/>
+          <a:lstStyle/>
+          <a:p>
+            <a:pPr algn="r" indent="0" marL="0">
+              <a:buNone/>
+            </a:pPr>
+            <a:r>
+              <a:rPr lang="en-US" sz="900" dirty="0">
+                <a:solidFill>
+                  <a:srgbClr val="666666"/>
+                </a:solidFill>
+                <a:latin typeface="Times New Roman" pitchFamily="34" charset="0"/>
+                <a:ea typeface="Times New Roman" pitchFamily="34" charset="-122"/>
+                <a:cs typeface="Times New Roman" pitchFamily="34" charset="-120"/>
+              </a:rPr>
+              <a:t xml:space="preserve">14 / 22</a:t>
+            </a:r>
+            <a:endParaRPr lang="en-US" sz="900" dirty="0"/>
+          </a:p>
+        </p:txBody>
+      </p:sp>
+      <p:sp>
+        <p:nvSpPr>
+          <p:cNvPr id="4" name="Text 2"/>
+          <p:cNvSpPr/>
+          <p:nvPr/>
+        </p:nvSpPr>
+        <p:spPr>
+          <a:xfrm>
+            <a:off x="457200" y="914400"/>
+            <a:ext cx="8229600" cy="3931920"/>
+          </a:xfrm>
+          <a:prstGeom prst="rect">
+            <a:avLst/>
+          </a:prstGeom>
+          <a:noFill/>
+          <a:ln/>
+        </p:spPr>
+        <p:txBody>
+          <a:bodyPr wrap="square" lIns="0" tIns="0" rIns="0" bIns="0" rtlCol="0" anchor="t"/>
+          <a:lstStyle/>
+          <a:p>
+            <a:pPr marL="177800" indent="-177800">
+              <a:spcAft>
+                <a:spcPts val="1100"/>
+              </a:spcAft>
+              <a:buSzPct val="100000"/>
+              <a:buChar char="•"/>
+            </a:pPr>
+            <a:r>
+              <a:rPr lang="en-US" sz="1350" dirty="0">
+                <a:solidFill>
+                  <a:srgbClr val="1A1A1A"/>
+                </a:solidFill>
+                <a:latin typeface="Times New Roman" pitchFamily="34" charset="0"/>
+                <a:ea typeface="Times New Roman" pitchFamily="34" charset="-122"/>
+                <a:cs typeface="Times New Roman" pitchFamily="34" charset="-120"/>
+              </a:rPr>
+              <a:t xml:space="preserve">Control negativo: al ranking se añadieron siete entradas degradadas junto a los siete métodos —la imagen base sin operador, cuatro fusiones artificiales de ruido gaussiano y dos desenfoques—.</a:t>
+            </a:r>
+            <a:endParaRPr lang="en-US" sz="1350" dirty="0"/>
+          </a:p>
+          <a:p>
+            <a:pPr marL="177800" indent="-177800">
+              <a:spcAft>
+                <a:spcPts val="1100"/>
+              </a:spcAft>
+              <a:buSzPct val="100000"/>
+              <a:buChar char="•"/>
+            </a:pPr>
+            <a:r>
+              <a:rPr lang="en-US" sz="1350" dirty="0">
+                <a:solidFill>
+                  <a:srgbClr val="1A1A1A"/>
+                </a:solidFill>
+                <a:latin typeface="Times New Roman" pitchFamily="34" charset="0"/>
+                <a:ea typeface="Times New Roman" pitchFamily="34" charset="-122"/>
+                <a:cs typeface="Times New Roman" pitchFamily="34" charset="-120"/>
+              </a:rPr>
+              <a:t xml:space="preserve">Con las nueve métricas la fusión de ruido con σ = 0,20 queda 3.ª de 14 (rango 6,767): por delante de cinco de los seis métodos comparativos y de la imagen base.</a:t>
+            </a:r>
+            <a:endParaRPr lang="en-US" sz="1350" dirty="0"/>
+          </a:p>
+          <a:p>
+            <a:pPr marL="177800" indent="-177800">
+              <a:spcAft>
+                <a:spcPts val="1100"/>
+              </a:spcAft>
+              <a:buSzPct val="100000"/>
+              <a:buChar char="•"/>
+            </a:pPr>
+            <a:r>
+              <a:rPr lang="en-US" sz="1350" dirty="0">
+                <a:solidFill>
+                  <a:srgbClr val="1A1A1A"/>
+                </a:solidFill>
+                <a:latin typeface="Times New Roman" pitchFamily="34" charset="0"/>
+                <a:ea typeface="Times New Roman" pitchFamily="34" charset="-122"/>
+                <a:cs typeface="Times New Roman" pitchFamily="34" charset="-120"/>
+              </a:rPr>
+              <a:t xml:space="preserve">Y su rango MEJORA al aumentar el ruido: 8,917 → 7,850 → 6,972 → 6,767 para σ = 0,02 / 0,05 / 0,10 / 0,20. La batería juzga mejor a la imagen cuanto más ruido se le inyecta.</a:t>
+            </a:r>
+            <a:endParaRPr lang="en-US" sz="1350" dirty="0"/>
+          </a:p>
+          <a:p>
+            <a:pPr marL="177800" indent="-177800">
+              <a:spcAft>
+                <a:spcPts val="1100"/>
+              </a:spcAft>
+              <a:buSzPct val="100000"/>
+              <a:buChar char="•"/>
+            </a:pPr>
+            <a:r>
+              <a:rPr lang="en-US" sz="1350" dirty="0">
+                <a:solidFill>
+                  <a:srgbClr val="1A1A1A"/>
+                </a:solidFill>
+                <a:latin typeface="Times New Roman" pitchFamily="34" charset="0"/>
+                <a:ea typeface="Times New Roman" pitchFamily="34" charset="-122"/>
+                <a:cs typeface="Times New Roman" pitchFamily="34" charset="-120"/>
+              </a:rPr>
+              <a:t xml:space="preserve">El fallo es específico de la varianza y no de la degradación en general: el desenfoque sí se penaliza, y el de 11 × 11 queda último (9,822).</a:t>
+            </a:r>
+            <a:endParaRPr lang="en-US" sz="1350" dirty="0"/>
+          </a:p>
+          <a:p>
+            <a:pPr marL="177800" indent="-177800">
+              <a:spcAft>
+                <a:spcPts val="1100"/>
+              </a:spcAft>
+              <a:buSzPct val="100000"/>
+              <a:buChar char="•"/>
+            </a:pPr>
+            <a:r>
+              <a:rPr lang="en-US" sz="1350" dirty="0">
+                <a:solidFill>
+                  <a:srgbClr val="1A1A1A"/>
+                </a:solidFill>
+                <a:latin typeface="Times New Roman" pitchFamily="34" charset="0"/>
+                <a:ea typeface="Times New Roman" pitchFamily="34" charset="-122"/>
+                <a:cs typeface="Times New Roman" pitchFamily="34" charset="-120"/>
+              </a:rPr>
+              <a:t xml:space="preserve">Basta una métrica que penalice artefactos para corregirlo: incorporando Nabf el ruido cae al 7.º puesto; con las diecisiete métricas, al último (10,138).</a:t>
+            </a:r>
+            <a:endParaRPr lang="en-US" sz="1350" dirty="0"/>
+          </a:p>
+          <a:p>
+            <a:pPr marL="177800" indent="-177800">
+              <a:spcAft>
+                <a:spcPts val="1100"/>
+              </a:spcAft>
+              <a:buSzPct val="100000"/>
+              <a:buChar char="•"/>
+            </a:pPr>
+            <a:r>
+              <a:rPr lang="en-US" sz="1350" dirty="0">
+                <a:solidFill>
+                  <a:srgbClr val="1A1A1A"/>
+                </a:solidFill>
+                <a:latin typeface="Times New Roman" pitchFamily="34" charset="0"/>
+                <a:ea typeface="Times New Roman" pitchFamily="34" charset="-122"/>
+                <a:cs typeface="Times New Roman" pitchFamily="34" charset="-120"/>
+              </a:rPr>
+              <a:t xml:space="preserve">Redundancia interna: FE es la entropía de la fusión sobre el promedio de las entropías de las fuentes, y ese denominador no depende del método. Rangos intra-bloque idénticos a EN en las 20 imágenes y el mismo χ² de Friedman (88,2857): las dimensiones efectivas son ocho, no nueve.</a:t>
+            </a:r>
+            <a:endParaRPr lang="en-US" sz="1350" dirty="0"/>
+          </a:p>
+          <a:p>
+            <a:pPr marL="177800" indent="-177800">
+              <a:spcAft>
+                <a:spcPts val="1100"/>
+              </a:spcAft>
+              <a:buSzPct val="100000"/>
+              <a:buChar char="•"/>
+            </a:pPr>
+            <a:r>
+              <a:rPr lang="en-US" sz="1350" dirty="0">
+                <a:solidFill>
+                  <a:srgbClr val="1A1A1A"/>
+                </a:solidFill>
+                <a:latin typeface="Times New Roman" pitchFamily="34" charset="0"/>
+                <a:ea typeface="Times New Roman" pitchFamily="34" charset="-122"/>
+                <a:cs typeface="Times New Roman" pitchFamily="34" charset="-120"/>
+              </a:rPr>
+              <a:t xml:space="preserve">Excluyendo FE la propuesta sigue primera (3,631 frente a 3,994 de la pirámide de Laplace): la redundancia no explica su primer lugar.</a:t>
+            </a:r>
+            <a:endParaRPr lang="en-US" sz="1350" dirty="0"/>
+          </a:p>
+        </p:txBody>
+      </p:sp>
+    </p:spTree>
+  </p:cSld>
+  <p:clrMapOvr>
+    <a:masterClrMapping/>
+  </p:clrMapOvr>
+</p:sld>
+</file>
+
+<file path=ppt/slides/slide23.xml><?xml version="1.0" encoding="utf-8"?>
+<p:sld xmlns:a="http://schemas.openxmlformats.org/drawingml/2006/main" xmlns:r="http://schemas.openxmlformats.org/officeDocument/2006/relationships" xmlns:p="http://schemas.openxmlformats.org/presentationml/2006/main">
+  <p:cSld name="Slide 17">
+    <p:bg>
+      <p:bgPr>
+        <a:solidFill>
+          <a:srgbClr val="FFFFFF"/>
+        </a:solidFill>
+      </p:bgPr>
+    </p:bg>
+    <p:spTree>
+      <p:nvGrpSpPr>
+        <p:cNvPr id="1" name=""/>
+        <p:cNvGrpSpPr/>
+        <p:nvPr/>
+      </p:nvGrpSpPr>
+      <p:grpSpPr>
+        <a:xfrm>
+          <a:off x="0" y="0"/>
+          <a:ext cx="0" cy="0"/>
+          <a:chOff x="0" y="0"/>
+          <a:chExt cx="0" cy="0"/>
+        </a:xfrm>
+      </p:grpSpPr>
+      <p:sp>
+        <p:nvSpPr>
+          <p:cNvPr id="2" name="Text 0"/>
+          <p:cNvSpPr/>
+          <p:nvPr/>
+        </p:nvSpPr>
+        <p:spPr>
+          <a:xfrm>
+            <a:off x="457200" y="256032"/>
+            <a:ext cx="8229600" cy="502920"/>
+          </a:xfrm>
+          <a:prstGeom prst="rect">
+            <a:avLst/>
+          </a:prstGeom>
+          <a:noFill/>
+          <a:ln/>
+        </p:spPr>
+        <p:txBody>
+          <a:bodyPr wrap="square" lIns="0" tIns="0" rIns="0" bIns="0" rtlCol="0" anchor="ctr"/>
+          <a:lstStyle/>
+          <a:p>
+            <a:pPr indent="0" marL="0">
+              <a:buNone/>
+            </a:pPr>
+            <a:r>
+              <a:rPr lang="en-US" sz="2300" b="1" dirty="0">
+                <a:solidFill>
+                  <a:srgbClr val="1A1A1A"/>
+                </a:solidFill>
+                <a:latin typeface="Times New Roman" pitchFamily="34" charset="0"/>
+                <a:ea typeface="Times New Roman" pitchFamily="34" charset="-122"/>
+                <a:cs typeface="Times New Roman" pitchFamily="34" charset="-120"/>
+              </a:rPr>
+              <a:t xml:space="preserve">Auditoría II — el orden de mérito es propiedad del criterio (H2)</a:t>
+            </a:r>
+            <a:endParaRPr lang="en-US" sz="2300" dirty="0"/>
+          </a:p>
+        </p:txBody>
+      </p:sp>
+      <p:sp>
+        <p:nvSpPr>
+          <p:cNvPr id="3" name="Text 1"/>
+          <p:cNvSpPr/>
+          <p:nvPr/>
+        </p:nvSpPr>
+        <p:spPr>
+          <a:xfrm>
+            <a:off x="8229600" y="4828032"/>
+            <a:ext cx="685800" cy="274320"/>
+          </a:xfrm>
+          <a:prstGeom prst="rect">
+            <a:avLst/>
+          </a:prstGeom>
+          <a:noFill/>
+          <a:ln/>
+        </p:spPr>
+        <p:txBody>
+          <a:bodyPr wrap="square" lIns="0" tIns="0" rIns="0" bIns="0" rtlCol="0" anchor="ctr"/>
+          <a:lstStyle/>
+          <a:p>
+            <a:pPr algn="r" indent="0" marL="0">
+              <a:buNone/>
+            </a:pPr>
+            <a:r>
+              <a:rPr lang="en-US" sz="900" dirty="0">
+                <a:solidFill>
+                  <a:srgbClr val="666666"/>
+                </a:solidFill>
+                <a:latin typeface="Times New Roman" pitchFamily="34" charset="0"/>
+                <a:ea typeface="Times New Roman" pitchFamily="34" charset="-122"/>
+                <a:cs typeface="Times New Roman" pitchFamily="34" charset="-120"/>
+              </a:rPr>
+              <a:t xml:space="preserve">15 / 22</a:t>
+            </a:r>
+            <a:endParaRPr lang="en-US" sz="900" dirty="0"/>
+          </a:p>
+        </p:txBody>
+      </p:sp>
+      <p:sp>
+        <p:nvSpPr>
+          <p:cNvPr id="4" name="Text 2"/>
+          <p:cNvSpPr/>
+          <p:nvPr/>
+        </p:nvSpPr>
+        <p:spPr>
+          <a:xfrm>
+            <a:off x="457200" y="914400"/>
+            <a:ext cx="8229600" cy="3931920"/>
+          </a:xfrm>
+          <a:prstGeom prst="rect">
+            <a:avLst/>
+          </a:prstGeom>
+          <a:noFill/>
+          <a:ln/>
+        </p:spPr>
+        <p:txBody>
+          <a:bodyPr wrap="square" lIns="0" tIns="0" rIns="0" bIns="0" rtlCol="0" anchor="t"/>
+          <a:lstStyle/>
+          <a:p>
+            <a:pPr marL="177800" indent="-177800">
+              <a:spcAft>
+                <a:spcPts val="1100"/>
+              </a:spcAft>
+              <a:buSzPct val="100000"/>
+              <a:buChar char="•"/>
+            </a:pPr>
+            <a:r>
+              <a:rPr lang="en-US" sz="1350" dirty="0">
+                <a:solidFill>
+                  <a:srgbClr val="1A1A1A"/>
+                </a:solidFill>
+                <a:latin typeface="Times New Roman" pitchFamily="34" charset="0"/>
+                <a:ea typeface="Times New Roman" pitchFamily="34" charset="-122"/>
+                <a:cs typeface="Times New Roman" pitchFamily="34" charset="-120"/>
+              </a:rPr>
+              <a:t xml:space="preserve">Mismo operador, las mismas 140 imágenes fusionadas, dos composiciones del criterio.</a:t>
+            </a:r>
+            <a:endParaRPr lang="en-US" sz="1350" dirty="0"/>
+          </a:p>
+          <a:p>
+            <a:pPr marL="177800" indent="-177800">
+              <a:spcAft>
+                <a:spcPts val="1100"/>
+              </a:spcAft>
+              <a:buSzPct val="100000"/>
+              <a:buChar char="•"/>
+            </a:pPr>
+            <a:r>
+              <a:rPr lang="en-US" sz="1350" dirty="0">
+                <a:solidFill>
+                  <a:srgbClr val="1A1A1A"/>
+                </a:solidFill>
+                <a:latin typeface="Times New Roman" pitchFamily="34" charset="0"/>
+                <a:ea typeface="Times New Roman" pitchFamily="34" charset="-122"/>
+                <a:cs typeface="Times New Roman" pitchFamily="34" charset="-120"/>
+              </a:rPr>
+              <a:t xml:space="preserve">Con las nueve métricas del trabajo de referencia la propuesta es 1.ª de 7 (3,394). Con las diecisiete que el MISMO evaluador ya calcula —nueve más Qabf, Nabf, SCD, VIF, FMI, Q0, QW y QE— desciende a 3.ª (3,459): el primer lugar pasa a la pirámide de Laplace (3,147), el segundo a DTCWT (3,259) y el Top-Hat clásico cae al último (5,000).</a:t>
+            </a:r>
+            <a:endParaRPr lang="en-US" sz="1350" dirty="0"/>
+          </a:p>
+          <a:p>
+            <a:pPr marL="177800" indent="-177800">
+              <a:spcAft>
+                <a:spcPts val="1100"/>
+              </a:spcAft>
+              <a:buSzPct val="100000"/>
+              <a:buChar char="•"/>
+            </a:pPr>
+            <a:r>
+              <a:rPr lang="en-US" sz="1350" dirty="0">
+                <a:solidFill>
+                  <a:srgbClr val="1A1A1A"/>
+                </a:solidFill>
+                <a:latin typeface="Times New Roman" pitchFamily="34" charset="0"/>
+                <a:ea typeface="Times New Roman" pitchFamily="34" charset="-122"/>
+                <a:cs typeface="Times New Roman" pitchFamily="34" charset="-120"/>
+              </a:rPr>
+              <a:t xml:space="preserve">No cambió ninguna imagen fusionada. Cambió el conjunto de métricas. Todo orden agregado debe reportarse junto a la composición que lo produce.</a:t>
+            </a:r>
+            <a:endParaRPr lang="en-US" sz="1350" dirty="0"/>
+          </a:p>
+          <a:p>
+            <a:pPr marL="177800" indent="-177800">
+              <a:spcAft>
+                <a:spcPts val="1100"/>
+              </a:spcAft>
+              <a:buSzPct val="100000"/>
+              <a:buChar char="•"/>
+            </a:pPr>
+            <a:r>
+              <a:rPr lang="en-US" sz="1350" dirty="0">
+                <a:solidFill>
+                  <a:srgbClr val="1A1A1A"/>
+                </a:solidFill>
+                <a:latin typeface="Times New Roman" pitchFamily="34" charset="0"/>
+                <a:ea typeface="Times New Roman" pitchFamily="34" charset="-122"/>
+                <a:cs typeface="Times New Roman" pitchFamily="34" charset="-120"/>
+              </a:rPr>
+              <a:t xml:space="preserve">Ajuste simétrico: el protocolo concede a la propuesta un paso de ajuste que no concede a los comparativos. Dándoselo también a ellos, ninguna de las cinco configuraciones de referencia la alcanza (RP 3,772 · LP 4,028 · DWT 4,167 · DTCWT 4,211 · CVT 4,717, frente a 3,583).</a:t>
+            </a:r>
+            <a:endParaRPr lang="en-US" sz="1350" dirty="0"/>
+          </a:p>
+          <a:p>
+            <a:pPr marL="177800" indent="-177800">
+              <a:spcAft>
+                <a:spcPts val="1100"/>
+              </a:spcAft>
+              <a:buSzPct val="100000"/>
+              <a:buChar char="•"/>
+            </a:pPr>
+            <a:r>
+              <a:rPr lang="en-US" sz="1350" dirty="0">
+                <a:solidFill>
+                  <a:srgbClr val="1A1A1A"/>
+                </a:solidFill>
+                <a:latin typeface="Times New Roman" pitchFamily="34" charset="0"/>
+                <a:ea typeface="Times New Roman" pitchFamily="34" charset="-122"/>
+                <a:cs typeface="Times New Roman" pitchFamily="34" charset="-120"/>
+              </a:rPr>
+              <a:t xml:space="preserve">El Top-Hat clásico la supera por 0,061 (3,522), pero con m = 1, más del triple del peso. Ejecutándolo con (r, m) = (25; 0,30) —los mismos valores de la propuesta— la propuesta conserva el primer lugar: 3,528 frente a 3,694. La ventaja del clásico proviene de su peso, no del operador.</a:t>
+            </a:r>
+            <a:endParaRPr lang="en-US" sz="1350" dirty="0"/>
+          </a:p>
+          <a:p>
+            <a:pPr marL="177800" indent="-177800">
+              <a:spcAft>
+                <a:spcPts val="1100"/>
+              </a:spcAft>
+              <a:buSzPct val="100000"/>
+              <a:buChar char="•"/>
+            </a:pPr>
+            <a:r>
+              <a:rPr lang="en-US" sz="1350" dirty="0">
+                <a:solidFill>
+                  <a:srgbClr val="1A1A1A"/>
+                </a:solidFill>
+                <a:latin typeface="Times New Roman" pitchFamily="34" charset="0"/>
+                <a:ea typeface="Times New Roman" pitchFamily="34" charset="-122"/>
+                <a:cs typeface="Times New Roman" pitchFamily="34" charset="-120"/>
+              </a:rPr>
+              <a:t xml:space="preserve">El primer lugar es un resultado sólido DENTRO del criterio del trabajo de referencia, no una propiedad independiente del criterio.</a:t>
+            </a:r>
+            <a:endParaRPr lang="en-US" sz="1350" dirty="0"/>
+          </a:p>
+        </p:txBody>
+      </p:sp>
+    </p:spTree>
+  </p:cSld>
+  <p:clrMapOvr>
+    <a:masterClrMapping/>
+  </p:clrMapOvr>
+</p:sld>
+</file>
+
+<file path=ppt/slides/slide24.xml><?xml version="1.0" encoding="utf-8"?>
+<p:sld xmlns:a="http://schemas.openxmlformats.org/drawingml/2006/main" xmlns:r="http://schemas.openxmlformats.org/officeDocument/2006/relationships" xmlns:p="http://schemas.openxmlformats.org/presentationml/2006/main">
+  <p:cSld name="Slide 17">
+    <p:bg>
+      <p:bgPr>
+        <a:solidFill>
+          <a:srgbClr val="FFFFFF"/>
+        </a:solidFill>
+      </p:bgPr>
+    </p:bg>
+    <p:spTree>
+      <p:nvGrpSpPr>
+        <p:cNvPr id="1" name=""/>
+        <p:cNvGrpSpPr/>
+        <p:nvPr/>
+      </p:nvGrpSpPr>
+      <p:grpSpPr>
+        <a:xfrm>
+          <a:off x="0" y="0"/>
+          <a:ext cx="0" cy="0"/>
+          <a:chOff x="0" y="0"/>
+          <a:chExt cx="0" cy="0"/>
+        </a:xfrm>
+      </p:grpSpPr>
+      <p:sp>
+        <p:nvSpPr>
+          <p:cNvPr id="2" name="Text 0"/>
+          <p:cNvSpPr/>
+          <p:nvPr/>
+        </p:nvSpPr>
+        <p:spPr>
+          <a:xfrm>
+            <a:off x="457200" y="256032"/>
+            <a:ext cx="8229600" cy="502920"/>
+          </a:xfrm>
+          <a:prstGeom prst="rect">
+            <a:avLst/>
+          </a:prstGeom>
+          <a:noFill/>
+          <a:ln/>
+        </p:spPr>
+        <p:txBody>
+          <a:bodyPr wrap="square" lIns="0" tIns="0" rIns="0" bIns="0" rtlCol="0" anchor="ctr"/>
+          <a:lstStyle/>
+          <a:p>
+            <a:pPr indent="0" marL="0">
+              <a:buNone/>
+            </a:pPr>
+            <a:r>
+              <a:rPr lang="en-US" sz="2300" b="1" dirty="0">
+                <a:solidFill>
+                  <a:srgbClr val="1A1A1A"/>
+                </a:solidFill>
+                <a:latin typeface="Times New Roman" pitchFamily="34" charset="0"/>
+                <a:ea typeface="Times New Roman" pitchFamily="34" charset="-122"/>
+                <a:cs typeface="Times New Roman" pitchFamily="34" charset="-120"/>
+              </a:rPr>
+              <a:t xml:space="preserve">Auditoría III — ¿cuánto aporta el banco? Ablación con (r, m) igualados (H7)</a:t>
+            </a:r>
+            <a:endParaRPr lang="en-US" sz="2300" dirty="0"/>
+          </a:p>
+        </p:txBody>
+      </p:sp>
+      <p:sp>
+        <p:nvSpPr>
+          <p:cNvPr id="3" name="Text 1"/>
+          <p:cNvSpPr/>
+          <p:nvPr/>
+        </p:nvSpPr>
+        <p:spPr>
+          <a:xfrm>
+            <a:off x="8229600" y="4828032"/>
+            <a:ext cx="685800" cy="274320"/>
+          </a:xfrm>
+          <a:prstGeom prst="rect">
+            <a:avLst/>
+          </a:prstGeom>
+          <a:noFill/>
+          <a:ln/>
+        </p:spPr>
+        <p:txBody>
+          <a:bodyPr wrap="square" lIns="0" tIns="0" rIns="0" bIns="0" rtlCol="0" anchor="ctr"/>
+          <a:lstStyle/>
+          <a:p>
+            <a:pPr algn="r" indent="0" marL="0">
+              <a:buNone/>
+            </a:pPr>
+            <a:r>
+              <a:rPr lang="en-US" sz="900" dirty="0">
+                <a:solidFill>
+                  <a:srgbClr val="666666"/>
+                </a:solidFill>
+                <a:latin typeface="Times New Roman" pitchFamily="34" charset="0"/>
+                <a:ea typeface="Times New Roman" pitchFamily="34" charset="-122"/>
+                <a:cs typeface="Times New Roman" pitchFamily="34" charset="-120"/>
+              </a:rPr>
+              <a:t xml:space="preserve">16 / 22</a:t>
+            </a:r>
+            <a:endParaRPr lang="en-US" sz="900" dirty="0"/>
+          </a:p>
+        </p:txBody>
+      </p:sp>
+      <p:sp>
+        <p:nvSpPr>
+          <p:cNvPr id="4" name="Text 2"/>
+          <p:cNvSpPr/>
+          <p:nvPr/>
+        </p:nvSpPr>
+        <p:spPr>
+          <a:xfrm>
+            <a:off x="457200" y="914400"/>
+            <a:ext cx="8229600" cy="3931920"/>
+          </a:xfrm>
+          <a:prstGeom prst="rect">
+            <a:avLst/>
+          </a:prstGeom>
+          <a:noFill/>
+          <a:ln/>
+        </p:spPr>
+        <p:txBody>
+          <a:bodyPr wrap="square" lIns="0" tIns="0" rIns="0" bIns="0" rtlCol="0" anchor="t"/>
+          <a:lstStyle/>
+          <a:p>
+            <a:pPr marL="177800" indent="-177800">
+              <a:spcAft>
+                <a:spcPts val="1100"/>
+              </a:spcAft>
+              <a:buSzPct val="100000"/>
+              <a:buChar char="•"/>
+            </a:pPr>
+            <a:r>
+              <a:rPr lang="en-US" sz="1350" dirty="0">
+                <a:solidFill>
+                  <a:srgbClr val="1A1A1A"/>
+                </a:solidFill>
+                <a:latin typeface="Times New Roman" pitchFamily="34" charset="0"/>
+                <a:ea typeface="Times New Roman" pitchFamily="34" charset="-122"/>
+                <a:cs typeface="Times New Roman" pitchFamily="34" charset="-120"/>
+              </a:rPr>
+              <a:t xml:space="preserve">La comparación con el Top-Hat clásico no aísla el banco: aquel usa r = 5 y m = 1, de modo que la diferencia observada mezcla banco, radio y peso. Para aislarlo se fijaron r = 25 y m = 0,30 en seis brazos que comparten todo salvo la forma de combinar las respuestas morfológicas.</a:t>
+            </a:r>
+            <a:endParaRPr lang="en-US" sz="1350" dirty="0"/>
+          </a:p>
+          <a:p>
+            <a:pPr marL="177800" indent="-177800">
+              <a:spcAft>
+                <a:spcPts val="1100"/>
+              </a:spcAft>
+              <a:buSzPct val="100000"/>
+              <a:buChar char="•"/>
+            </a:pPr>
+            <a:r>
+              <a:rPr lang="en-US" sz="1350" dirty="0">
+                <a:solidFill>
+                  <a:srgbClr val="1A1A1A"/>
+                </a:solidFill>
+                <a:latin typeface="Times New Roman" pitchFamily="34" charset="0"/>
+                <a:ea typeface="Times New Roman" pitchFamily="34" charset="-122"/>
+                <a:cs typeface="Times New Roman" pitchFamily="34" charset="-120"/>
+              </a:rPr>
+              <a:t xml:space="preserve">Con las nueve métricas la suma de ramas —la que adopta la propuesta— es la mejor de los seis (3,222), por delante del máximo (3,311) y del disco único (3,367); el promedio queda en 3,533 y las líneas solas y la imagen base empatan últimas (3,783).</a:t>
+            </a:r>
+            <a:endParaRPr lang="en-US" sz="1350" dirty="0"/>
+          </a:p>
+          <a:p>
+            <a:pPr marL="177800" indent="-177800">
+              <a:spcAft>
+                <a:spcPts val="1100"/>
+              </a:spcAft>
+              <a:buSzPct val="100000"/>
+              <a:buChar char="•"/>
+            </a:pPr>
+            <a:r>
+              <a:rPr lang="en-US" sz="1350" dirty="0">
+                <a:solidFill>
+                  <a:srgbClr val="1A1A1A"/>
+                </a:solidFill>
+                <a:latin typeface="Times New Roman" pitchFamily="34" charset="0"/>
+                <a:ea typeface="Times New Roman" pitchFamily="34" charset="-122"/>
+                <a:cs typeface="Times New Roman" pitchFamily="34" charset="-120"/>
+              </a:rPr>
+              <a:t xml:space="preserve">Lectura prudente: al retirar FE —que duplica la entropía, justo donde la suma obtiene su mayor ventaja— los seis brazos se comprimen en una banda de 3,444 a 3,631 y la suma baja al 4.º lugar (3,500).</a:t>
+            </a:r>
+            <a:endParaRPr lang="en-US" sz="1350" dirty="0"/>
+          </a:p>
+          <a:p>
+            <a:pPr marL="177800" indent="-177800">
+              <a:spcAft>
+                <a:spcPts val="1100"/>
+              </a:spcAft>
+              <a:buSzPct val="100000"/>
+              <a:buChar char="•"/>
+            </a:pPr>
+            <a:r>
+              <a:rPr lang="en-US" sz="1350" dirty="0">
+                <a:solidFill>
+                  <a:srgbClr val="1A1A1A"/>
+                </a:solidFill>
+                <a:latin typeface="Times New Roman" pitchFamily="34" charset="0"/>
+                <a:ea typeface="Times New Roman" pitchFamily="34" charset="-122"/>
+                <a:cs typeface="Times New Roman" pitchFamily="34" charset="-120"/>
+              </a:rPr>
+              <a:t xml:space="preserve">Con las diecisiete métricas el orden se invierte: máximo 2,932 · disco 3,153 · promedio 3,179 · suma 3,621 · líneas 3,756 · base 4,359.</a:t>
+            </a:r>
+            <a:endParaRPr lang="en-US" sz="1350" dirty="0"/>
+          </a:p>
+          <a:p>
+            <a:pPr marL="177800" indent="-177800">
+              <a:spcAft>
+                <a:spcPts val="1100"/>
+              </a:spcAft>
+              <a:buSzPct val="100000"/>
+              <a:buChar char="•"/>
+            </a:pPr>
+            <a:r>
+              <a:rPr lang="en-US" sz="1350" dirty="0">
+                <a:solidFill>
+                  <a:srgbClr val="1A1A1A"/>
+                </a:solidFill>
+                <a:latin typeface="Times New Roman" pitchFamily="34" charset="0"/>
+                <a:ea typeface="Times New Roman" pitchFamily="34" charset="-122"/>
+                <a:cs typeface="Times New Roman" pitchFamily="34" charset="-120"/>
+              </a:rPr>
+              <a:t xml:space="preserve">La suma duplica la tasa de artefactos del disco único (Nabf 0,374 frente a 0,185): la novedad desplaza el punto de operación hacia el realce, no lo mejora de forma uniforme.</a:t>
+            </a:r>
+            <a:endParaRPr lang="en-US" sz="1350" dirty="0"/>
+          </a:p>
+          <a:p>
+            <a:pPr marL="177800" indent="-177800">
+              <a:spcAft>
+                <a:spcPts val="1100"/>
+              </a:spcAft>
+              <a:buSzPct val="100000"/>
+              <a:buChar char="•"/>
+            </a:pPr>
+            <a:r>
+              <a:rPr lang="en-US" sz="1350" dirty="0">
+                <a:solidFill>
+                  <a:srgbClr val="1A1A1A"/>
+                </a:solidFill>
+                <a:latin typeface="Times New Roman" pitchFamily="34" charset="0"/>
+                <a:ea typeface="Times New Roman" pitchFamily="34" charset="-122"/>
+                <a:cs typeface="Times New Roman" pitchFamily="34" charset="-120"/>
+              </a:rPr>
+              <a:t xml:space="preserve">Lo que queda firme en todas las composiciones: la imagen base sin operador es la peor de los seis brazos con las diecisiete métricas (4,359). El mérito no proviene de la base. Pero la dirección del aporte depende del criterio, exactamente como enuncia H2. Y r = 1 no desactiva el banco: los cinco elementos siguen activos en una vecindad de 3 × 3.</a:t>
+            </a:r>
+            <a:endParaRPr lang="en-US" sz="1350" dirty="0"/>
           </a:p>
         </p:txBody>
       </p:sp>
@@ -8713,7 +10070,7 @@
                 <a:ea typeface="Times New Roman" pitchFamily="34" charset="-122"/>
                 <a:cs typeface="Times New Roman" pitchFamily="34" charset="-120"/>
               </a:rPr>
-              <a:t>1. Problema y justificación</a:t>
+              <a:t>1. Problema: dos preguntas, no una</a:t>
             </a:r>
             <a:endParaRPr lang="en-US" sz="2300" dirty="0"/>
           </a:p>
@@ -8752,7 +10109,7 @@
                 <a:ea typeface="Times New Roman" pitchFamily="34" charset="-122"/>
                 <a:cs typeface="Times New Roman" pitchFamily="34" charset="-120"/>
               </a:rPr>
-              <a:t>3 / 19</a:t>
+              <a:t xml:space="preserve">3 / 22</a:t>
             </a:r>
             <a:endParaRPr lang="en-US" sz="900" dirty="0"/>
           </a:p>
@@ -8974,7 +10331,7 @@
                 <a:ea typeface="Times New Roman" pitchFamily="34" charset="-122"/>
                 <a:cs typeface="Times New Roman" pitchFamily="34" charset="-120"/>
               </a:rPr>
-              <a:t>2. Objetivos</a:t>
+              <a:t xml:space="preserve">3. Objetivos</a:t>
             </a:r>
             <a:endParaRPr lang="en-US" sz="2300" dirty="0"/>
           </a:p>
@@ -9013,7 +10370,7 @@
                 <a:ea typeface="Times New Roman" pitchFamily="34" charset="-122"/>
                 <a:cs typeface="Times New Roman" pitchFamily="34" charset="-120"/>
               </a:rPr>
-              <a:t>4 / 19</a:t>
+              <a:t xml:space="preserve">5 / 22</a:t>
             </a:r>
             <a:endParaRPr lang="en-US" sz="900" dirty="0"/>
           </a:p>
@@ -9091,7 +10448,7 @@
                 <a:ea typeface="Times New Roman" pitchFamily="34" charset="-122"/>
                 <a:cs typeface="Times New Roman" pitchFamily="34" charset="-120"/>
               </a:rPr>
-              <a:t>Desarrollar y evaluar un método de fusión VIS/IR basado en transformadas Top-Hat de una sola escala, con un banco de elementos estructurantes de disco y líneas combinado por suma, optimizado por PSO, comparándolo con la metodología clásica Top-Hat y con métodos representativos del estado del arte.</a:t>
+              <a:t xml:space="preserve">Diseñar, implementar y caracterizar un operador de fusión VIS/IR basado en la transformada Top-Hat de una sola escala con un banco de cinco elementos estructurantes, determinando en qué dirección desplaza el punto de operación de la fusión frente a la metodología clásica y a cinco configuraciones de referencia sobre el TNO Image Fusion Dataset; y auditar, con ese mismo desarrollo como caso de estudio, la validez discriminativa del protocolo de evaluación empleado.</a:t>
             </a:r>
             <a:endParaRPr lang="en-US" sz="1350" dirty="0"/>
           </a:p>
@@ -9173,7 +10530,7 @@
                 <a:ea typeface="Times New Roman" pitchFamily="34" charset="-122"/>
                 <a:cs typeface="Times New Roman" pitchFamily="34" charset="-120"/>
               </a:rPr>
-              <a:t>Formular el operador: disco de radio r + cuatro líneas orientadas (0°, 45°, 90°, 135°), con las respuestas lineales promediadas y sumadas a la del disco.</a:t>
+              <a:t xml:space="preserve">OE1. Formular e implementar el operador tal como efectivamente se evalúa —el promedio de las cuatro líneas se suma a la respuesta del disco; el máximo opera entre fuentes, no entre ramas— y aislar el aporte del banco mediante una ablación con hiperparámetros fijos.</a:t>
             </a:r>
             <a:endParaRPr lang="en-US" sz="1300" dirty="0"/>
           </a:p>
@@ -9194,7 +10551,7 @@
                 <a:ea typeface="Times New Roman" pitchFamily="34" charset="-122"/>
                 <a:cs typeface="Times New Roman" pitchFamily="34" charset="-120"/>
               </a:rPr>
-              <a:t>Ajustar los hiperparámetros (r, m) mediante PSO, con un barrido de 25 configuraciones del enjambre (Ortega y Espinoza, 2025).</a:t>
+              <a:t xml:space="preserve">OE2. Delimitar el alcance real de la optimización por PSO: qué hiperparámetro determina la aptitud declarada, qué forma tiene esa aptitud, y con qué criterios independientes de ella se justifica el peso adoptado.</a:t>
             </a:r>
             <a:endParaRPr lang="en-US" sz="1300" dirty="0"/>
           </a:p>
@@ -9215,7 +10572,7 @@
                 <a:ea typeface="Times New Roman" pitchFamily="34" charset="-122"/>
                 <a:cs typeface="Times New Roman" pitchFamily="34" charset="-120"/>
               </a:rPr>
-              <a:t>Comparar con la fusión Top-Hat clásica y cinco métodos del estado del arte (LP, RP, DWT, DTCWT, CVT) sobre nueve métricas, con pruebas de Friedman y Wilcoxon–Holm.</a:t>
+              <a:t xml:space="preserve">OE3. Comparar con la metodología clásica y cinco configuraciones de referencia sobre nueve métricas (Friedman y Wilcoxon–Holm), organizando los resultados en bloques de actividad espacial y de fidelidad a las fuentes, y verificando la robustez frente a un ajuste simétrico de los comparativos.</a:t>
             </a:r>
             <a:endParaRPr lang="en-US" sz="1300" dirty="0"/>
           </a:p>
@@ -9236,353 +10593,30 @@
                 <a:ea typeface="Times New Roman" pitchFamily="34" charset="-122"/>
                 <a:cs typeface="Times New Roman" pitchFamily="34" charset="-120"/>
               </a:rPr>
-              <a:t>Evaluar el efecto en detección de peatones (YOLOv8n reentrenado sobre LLVIP).</a:t>
+              <a:t xml:space="preserve">OE4. Evaluar si la batería empleada discrimina calidad de fusión, con tres pruebas: control negativo con degradaciones conocidas, redundancia interna entre métricas y sensibilidad del orden de mérito a la composición del conjunto.</a:t>
             </a:r>
             <a:endParaRPr lang="en-US" sz="1300" dirty="0"/>
           </a:p>
-        </p:txBody>
-      </p:sp>
-    </p:spTree>
-  </p:cSld>
-  <p:clrMapOvr>
-    <a:masterClrMapping/>
-  </p:clrMapOvr>
-</p:sld>
-</file>
-
-<file path=ppt/slides/slide5.xml><?xml version="1.0" encoding="utf-8"?>
-<p:sld xmlns:a="http://schemas.openxmlformats.org/drawingml/2006/main" xmlns:r="http://schemas.openxmlformats.org/officeDocument/2006/relationships" xmlns:p="http://schemas.openxmlformats.org/presentationml/2006/main">
-  <p:cSld name="Slide 5">
-    <p:bg>
-      <p:bgPr>
-        <a:solidFill>
-          <a:srgbClr val="FFFFFF"/>
-        </a:solidFill>
-      </p:bgPr>
-    </p:bg>
-    <p:spTree>
-      <p:nvGrpSpPr>
-        <p:cNvPr id="1" name=""/>
-        <p:cNvGrpSpPr/>
-        <p:nvPr/>
-      </p:nvGrpSpPr>
-      <p:grpSpPr>
-        <a:xfrm>
-          <a:off x="0" y="0"/>
-          <a:ext cx="0" cy="0"/>
-          <a:chOff x="0" y="0"/>
-          <a:chExt cx="0" cy="0"/>
-        </a:xfrm>
-      </p:grpSpPr>
-      <p:sp>
-        <p:nvSpPr>
-          <p:cNvPr id="2" name="Text 0"/>
-          <p:cNvSpPr/>
-          <p:nvPr/>
-        </p:nvSpPr>
-        <p:spPr>
-          <a:xfrm>
-            <a:off x="457200" y="256032"/>
-            <a:ext cx="8229600" cy="502920"/>
-          </a:xfrm>
-          <a:prstGeom prst="rect">
-            <a:avLst/>
-          </a:prstGeom>
-          <a:noFill/>
-          <a:ln/>
-        </p:spPr>
-        <p:txBody>
-          <a:bodyPr wrap="square" lIns="0" tIns="0" rIns="0" bIns="0" rtlCol="0" anchor="ctr"/>
-          <a:lstStyle/>
-          <a:p>
-            <a:pPr indent="0" marL="0">
-              <a:buNone/>
-            </a:pPr>
-            <a:r>
-              <a:rPr lang="en-US" sz="2300" b="1" dirty="0">
-                <a:solidFill>
-                  <a:srgbClr val="1A1A1A"/>
-                </a:solidFill>
-                <a:latin typeface="Times New Roman" pitchFamily="34" charset="0"/>
-                <a:ea typeface="Times New Roman" pitchFamily="34" charset="-122"/>
-                <a:cs typeface="Times New Roman" pitchFamily="34" charset="-120"/>
-              </a:rPr>
-              <a:t>Hipótesis de trabajo</a:t>
-            </a:r>
-            <a:endParaRPr lang="en-US" sz="2300" dirty="0"/>
-          </a:p>
-        </p:txBody>
-      </p:sp>
-      <p:sp>
-        <p:nvSpPr>
-          <p:cNvPr id="3" name="Text 1"/>
-          <p:cNvSpPr/>
-          <p:nvPr/>
-        </p:nvSpPr>
-        <p:spPr>
-          <a:xfrm>
-            <a:off x="8229600" y="4828032"/>
-            <a:ext cx="685800" cy="274320"/>
-          </a:xfrm>
-          <a:prstGeom prst="rect">
-            <a:avLst/>
-          </a:prstGeom>
-          <a:noFill/>
-          <a:ln/>
-        </p:spPr>
-        <p:txBody>
-          <a:bodyPr wrap="square" lIns="0" tIns="0" rIns="0" bIns="0" rtlCol="0" anchor="ctr"/>
-          <a:lstStyle/>
-          <a:p>
-            <a:pPr algn="r" indent="0" marL="0">
-              <a:buNone/>
-            </a:pPr>
-            <a:r>
-              <a:rPr lang="en-US" sz="900" dirty="0">
-                <a:solidFill>
-                  <a:srgbClr val="666666"/>
-                </a:solidFill>
-                <a:latin typeface="Times New Roman" pitchFamily="34" charset="0"/>
-                <a:ea typeface="Times New Roman" pitchFamily="34" charset="-122"/>
-                <a:cs typeface="Times New Roman" pitchFamily="34" charset="-120"/>
-              </a:rPr>
-              <a:t>5 / 19</a:t>
-            </a:r>
-            <a:endParaRPr lang="en-US" sz="900" dirty="0"/>
-          </a:p>
-        </p:txBody>
-      </p:sp>
-      <p:sp>
-        <p:nvSpPr>
-          <p:cNvPr id="4" name="Text 2"/>
-          <p:cNvSpPr/>
-          <p:nvPr/>
-        </p:nvSpPr>
-        <p:spPr>
-          <a:xfrm>
-            <a:off x="457200" y="1051560"/>
-            <a:ext cx="685800" cy="457200"/>
-          </a:xfrm>
-          <a:prstGeom prst="rect">
-            <a:avLst/>
-          </a:prstGeom>
-          <a:noFill/>
-          <a:ln/>
-        </p:spPr>
-        <p:txBody>
-          <a:bodyPr wrap="square" lIns="0" tIns="0" rIns="0" bIns="0" rtlCol="0" anchor="ctr"/>
-          <a:lstStyle/>
-          <a:p>
-            <a:pPr indent="0" marL="0">
-              <a:buNone/>
-            </a:pPr>
-            <a:r>
-              <a:rPr lang="en-US" sz="2000" b="1" dirty="0">
-                <a:solidFill>
-                  <a:srgbClr val="8B1A1A"/>
-                </a:solidFill>
-                <a:latin typeface="Times New Roman" pitchFamily="34" charset="0"/>
-                <a:ea typeface="Times New Roman" pitchFamily="34" charset="-122"/>
-                <a:cs typeface="Times New Roman" pitchFamily="34" charset="-120"/>
-              </a:rPr>
-              <a:t>H1</a:t>
-            </a:r>
-            <a:endParaRPr lang="en-US" sz="2000" dirty="0"/>
-          </a:p>
-        </p:txBody>
-      </p:sp>
-      <p:sp>
-        <p:nvSpPr>
-          <p:cNvPr id="5" name="Text 3"/>
-          <p:cNvSpPr/>
-          <p:nvPr/>
-        </p:nvSpPr>
-        <p:spPr>
-          <a:xfrm>
-            <a:off x="1280160" y="1051560"/>
-            <a:ext cx="7406640" cy="1005840"/>
-          </a:xfrm>
-          <a:prstGeom prst="rect">
-            <a:avLst/>
-          </a:prstGeom>
-          <a:noFill/>
-          <a:ln/>
-        </p:spPr>
-        <p:txBody>
-          <a:bodyPr wrap="square" lIns="0" tIns="0" rIns="0" bIns="0" rtlCol="0" anchor="t"/>
-          <a:lstStyle/>
-          <a:p>
-            <a:pPr indent="0" marL="0">
-              <a:buNone/>
-            </a:pPr>
-            <a:r>
-              <a:rPr lang="en-US" sz="1350" dirty="0">
-                <a:solidFill>
-                  <a:srgbClr val="1A1A1A"/>
-                </a:solidFill>
-                <a:latin typeface="Times New Roman" pitchFamily="34" charset="0"/>
-                <a:ea typeface="Times New Roman" pitchFamily="34" charset="-122"/>
-                <a:cs typeface="Times New Roman" pitchFamily="34" charset="-120"/>
-              </a:rPr>
-              <a:t>La combinación del disco con las líneas orientadas —promediadas y sumadas— mejora la actividad, el detalle y el contenido informativo (EN, FE, SD, MG, SF) frente a los métodos del estado del arte, y supera a la metodología clásica Top-Hat en seis de las nueve métricas.</a:t>
-            </a:r>
-            <a:endParaRPr lang="en-US" sz="1350" dirty="0"/>
-          </a:p>
-        </p:txBody>
-      </p:sp>
-      <p:sp>
-        <p:nvSpPr>
-          <p:cNvPr id="6" name="Text 4"/>
-          <p:cNvSpPr/>
-          <p:nvPr/>
-        </p:nvSpPr>
-        <p:spPr>
-          <a:xfrm>
-            <a:off x="457200" y="2258568"/>
-            <a:ext cx="685800" cy="457200"/>
-          </a:xfrm>
-          <a:prstGeom prst="rect">
-            <a:avLst/>
-          </a:prstGeom>
-          <a:noFill/>
-          <a:ln/>
-        </p:spPr>
-        <p:txBody>
-          <a:bodyPr wrap="square" lIns="0" tIns="0" rIns="0" bIns="0" rtlCol="0" anchor="ctr"/>
-          <a:lstStyle/>
-          <a:p>
-            <a:pPr indent="0" marL="0">
-              <a:buNone/>
-            </a:pPr>
-            <a:r>
-              <a:rPr lang="en-US" sz="2000" b="1" dirty="0">
-                <a:solidFill>
-                  <a:srgbClr val="8B1A1A"/>
-                </a:solidFill>
-                <a:latin typeface="Times New Roman" pitchFamily="34" charset="0"/>
-                <a:ea typeface="Times New Roman" pitchFamily="34" charset="-122"/>
-                <a:cs typeface="Times New Roman" pitchFamily="34" charset="-120"/>
-              </a:rPr>
-              <a:t>H2</a:t>
-            </a:r>
-            <a:endParaRPr lang="en-US" sz="2000" dirty="0"/>
-          </a:p>
-        </p:txBody>
-      </p:sp>
-      <p:sp>
-        <p:nvSpPr>
-          <p:cNvPr id="7" name="Text 5"/>
-          <p:cNvSpPr/>
-          <p:nvPr/>
-        </p:nvSpPr>
-        <p:spPr>
-          <a:xfrm>
-            <a:off x="1280160" y="2258568"/>
-            <a:ext cx="7406640" cy="1005840"/>
-          </a:xfrm>
-          <a:prstGeom prst="rect">
-            <a:avLst/>
-          </a:prstGeom>
-          <a:noFill/>
-          <a:ln/>
-        </p:spPr>
-        <p:txBody>
-          <a:bodyPr wrap="square" lIns="0" tIns="0" rIns="0" bIns="0" rtlCol="0" anchor="t"/>
-          <a:lstStyle/>
-          <a:p>
-            <a:pPr indent="0" marL="0">
-              <a:buNone/>
-            </a:pPr>
-            <a:r>
-              <a:rPr lang="en-US" sz="1350" dirty="0">
-                <a:solidFill>
-                  <a:srgbClr val="1A1A1A"/>
-                </a:solidFill>
-                <a:latin typeface="Times New Roman" pitchFamily="34" charset="0"/>
-                <a:ea typeface="Times New Roman" pitchFamily="34" charset="-122"/>
-                <a:cs typeface="Times New Roman" pitchFamily="34" charset="-120"/>
-              </a:rPr>
-              <a:t>La optimización de (r, m) por PSO alcanza un desempeño superior al de la parametrización manual del operador clásico.</a:t>
-            </a:r>
-            <a:endParaRPr lang="en-US" sz="1350" dirty="0"/>
-          </a:p>
-        </p:txBody>
-      </p:sp>
-      <p:sp>
-        <p:nvSpPr>
-          <p:cNvPr id="8" name="Text 6"/>
-          <p:cNvSpPr/>
-          <p:nvPr/>
-        </p:nvSpPr>
-        <p:spPr>
-          <a:xfrm>
-            <a:off x="457200" y="3465576"/>
-            <a:ext cx="685800" cy="457200"/>
-          </a:xfrm>
-          <a:prstGeom prst="rect">
-            <a:avLst/>
-          </a:prstGeom>
-          <a:noFill/>
-          <a:ln/>
-        </p:spPr>
-        <p:txBody>
-          <a:bodyPr wrap="square" lIns="0" tIns="0" rIns="0" bIns="0" rtlCol="0" anchor="ctr"/>
-          <a:lstStyle/>
-          <a:p>
-            <a:pPr indent="0" marL="0">
-              <a:buNone/>
-            </a:pPr>
-            <a:r>
-              <a:rPr lang="en-US" sz="2000" b="1" dirty="0">
-                <a:solidFill>
-                  <a:srgbClr val="8B1A1A"/>
-                </a:solidFill>
-                <a:latin typeface="Times New Roman" pitchFamily="34" charset="0"/>
-                <a:ea typeface="Times New Roman" pitchFamily="34" charset="-122"/>
-                <a:cs typeface="Times New Roman" pitchFamily="34" charset="-120"/>
-              </a:rPr>
-              <a:t>H3</a:t>
-            </a:r>
-            <a:endParaRPr lang="en-US" sz="2000" dirty="0"/>
-          </a:p>
-        </p:txBody>
-      </p:sp>
-      <p:sp>
-        <p:nvSpPr>
-          <p:cNvPr id="9" name="Text 7"/>
-          <p:cNvSpPr/>
-          <p:nvPr/>
-        </p:nvSpPr>
-        <p:spPr>
-          <a:xfrm>
-            <a:off x="1280160" y="3465576"/>
-            <a:ext cx="7406640" cy="1005840"/>
-          </a:xfrm>
-          <a:prstGeom prst="rect">
-            <a:avLst/>
-          </a:prstGeom>
-          <a:noFill/>
-          <a:ln/>
-        </p:spPr>
-        <p:txBody>
-          <a:bodyPr wrap="square" lIns="0" tIns="0" rIns="0" bIns="0" rtlCol="0" anchor="t"/>
-          <a:lstStyle/>
-          <a:p>
-            <a:pPr indent="0" marL="0">
-              <a:buNone/>
-            </a:pPr>
-            <a:r>
-              <a:rPr lang="en-US" sz="1350" dirty="0">
-                <a:solidFill>
-                  <a:srgbClr val="1A1A1A"/>
-                </a:solidFill>
-                <a:latin typeface="Times New Roman" pitchFamily="34" charset="0"/>
-                <a:ea typeface="Times New Roman" pitchFamily="34" charset="-122"/>
-                <a:cs typeface="Times New Roman" pitchFamily="34" charset="-120"/>
-              </a:rPr>
-              <a:t>Una mejor calidad de fusión se traduce en un mejor desempeño de detección de objetos (mAP) que el de las modalidades individuales.</a:t>
-            </a:r>
-            <a:endParaRPr lang="en-US" sz="1350" dirty="0"/>
+          <a:p>
+            <a:pPr marL="177800" indent="-177800">
+              <a:spcAft>
+                <a:spcPts val="700"/>
+              </a:spcAft>
+              <a:buSzPct val="100000"/>
+              <a:buChar char="•"/>
+            </a:pPr>
+            <a:r>
+              <a:rPr lang="en-US" sz="1300" dirty="0">
+                <a:solidFill>
+                  <a:srgbClr val="1A1A1A"/>
+                </a:solidFill>
+                <a:latin typeface="Times New Roman" pitchFamily="34" charset="0"/>
+                <a:ea typeface="Times New Roman" pitchFamily="34" charset="-122"/>
+                <a:cs typeface="Times New Roman" pitchFamily="34" charset="-120"/>
+              </a:rPr>
+              <a:t xml:space="preserve">OE5. Medir el efecto de la fusión sobre la detección con dos experimentos independientes (LLVIP y M3FD) y contrastar el orden de mérito de las métricas con el de utilidad en la tarea, mediante un conteo por escena y no solo el mAP promedio.</a:t>
+            </a:r>
+            <a:endParaRPr lang="en-US" sz="1300" dirty="0"/>
           </a:p>
         </p:txBody>
       </p:sp>
@@ -9651,7 +10685,7 @@
                 <a:ea typeface="Times New Roman" pitchFamily="34" charset="-122"/>
                 <a:cs typeface="Times New Roman" pitchFamily="34" charset="-120"/>
               </a:rPr>
-              <a:t>3. La transformada Top-Hat y la fusión clásica</a:t>
+              <a:t xml:space="preserve">4. Marco: la transformada Top-Hat y la fusión clásica</a:t>
             </a:r>
             <a:endParaRPr lang="en-US" sz="2300" dirty="0"/>
           </a:p>
@@ -9690,7 +10724,7 @@
                 <a:ea typeface="Times New Roman" pitchFamily="34" charset="-122"/>
                 <a:cs typeface="Times New Roman" pitchFamily="34" charset="-120"/>
               </a:rPr>
-              <a:t>6 / 19</a:t>
+              <a:t xml:space="preserve">7 / 22</a:t>
             </a:r>
             <a:endParaRPr lang="en-US" sz="900" dirty="0"/>
           </a:p>
@@ -9972,7 +11006,7 @@
                 <a:ea typeface="Times New Roman" pitchFamily="34" charset="-122"/>
                 <a:cs typeface="Times New Roman" pitchFamily="34" charset="-120"/>
               </a:rPr>
-              <a:t>4. Propuesta novedosa: banco de SE y suma de ramas</a:t>
+              <a:t xml:space="preserve">5. El operador: banco de cinco elementos estructurantes y suma de ramas</a:t>
             </a:r>
             <a:endParaRPr lang="en-US" sz="2300" dirty="0"/>
           </a:p>
@@ -10011,7 +11045,7 @@
                 <a:ea typeface="Times New Roman" pitchFamily="34" charset="-122"/>
                 <a:cs typeface="Times New Roman" pitchFamily="34" charset="-120"/>
               </a:rPr>
-              <a:t>7 / 19</a:t>
+              <a:t xml:space="preserve">8 / 22</a:t>
             </a:r>
             <a:endParaRPr lang="en-US" sz="900" dirty="0"/>
           </a:p>
@@ -10281,7 +11315,7 @@
                 <a:ea typeface="Times New Roman" pitchFamily="34" charset="-122"/>
                 <a:cs typeface="Times New Roman" pitchFamily="34" charset="-120"/>
               </a:rPr>
-              <a:t>5. Optimización por enjambre de partículas (PSO)</a:t>
+              <a:t xml:space="preserve">6. Alcance real de la optimización por PSO</a:t>
             </a:r>
             <a:endParaRPr lang="en-US" sz="2300" dirty="0"/>
           </a:p>
@@ -10320,7 +11354,7 @@
                 <a:ea typeface="Times New Roman" pitchFamily="34" charset="-122"/>
                 <a:cs typeface="Times New Roman" pitchFamily="34" charset="-120"/>
               </a:rPr>
-              <a:t>8 / 19</a:t>
+              <a:t xml:space="preserve">9 / 22</a:t>
             </a:r>
             <a:endParaRPr lang="en-US" sz="900" dirty="0"/>
           </a:p>
@@ -10606,7 +11640,7 @@
                 <a:ea typeface="Times New Roman" pitchFamily="34" charset="-122"/>
                 <a:cs typeface="Times New Roman" pitchFamily="34" charset="-120"/>
               </a:rPr>
-              <a:t>6. Diseño experimental</a:t>
+              <a:t xml:space="preserve">7. Diseño experimental</a:t>
             </a:r>
             <a:endParaRPr lang="en-US" sz="2300" dirty="0"/>
           </a:p>
@@ -10645,7 +11679,7 @@
                 <a:ea typeface="Times New Roman" pitchFamily="34" charset="-122"/>
                 <a:cs typeface="Times New Roman" pitchFamily="34" charset="-120"/>
               </a:rPr>
-              <a:t>9 / 19</a:t>
+              <a:t xml:space="preserve">10 / 22</a:t>
             </a:r>
             <a:endParaRPr lang="en-US" sz="900" dirty="0"/>
           </a:p>

--- a/docs/Tesis_Defensa_Presentacion.pptx
+++ b/docs/Tesis_Defensa_Presentacion.pptx
@@ -7273,7 +7273,7 @@
                 <a:ea typeface="Times New Roman" pitchFamily="34" charset="-122"/>
                 <a:cs typeface="Times New Roman" pitchFamily="34" charset="-120"/>
               </a:rPr>
-              <a:t xml:space="preserve">11. Contraste de las siete hipótesis</a:t>
+              <a:t xml:space="preserve">11. Contraste de las hipótesis del operador y del criterio</a:t>
             </a:r>
             <a:endParaRPr lang="en-US" sz="2300" dirty="0"/>
           </a:p>

--- a/docs/Tesis_Defensa_Presentacion.pptx
+++ b/docs/Tesis_Defensa_Presentacion.pptx
@@ -700,7 +700,7 @@
           <a:p>
             <a:r>
               <a:rPr lang="en-US" dirty="0"/>
-              <a:t>Negritas = mejor por columna. No hay método universalmente dominante: la propuesta lidera SSIM, LP el contraste (SD) y la información mutua, el Top-Hat clásico la actividad (SF). El perfil de la propuesta es la fidelidad estructural.</a:t>
+              <a:t xml:space="preserve">Negritas = mejor por columna. No hay método universalmente dominante: la propuesta lidera la entropía y la eficiencia de fusión, LP el contraste (SD) y la información mutua, DTCWT la similitud estructural y el Top-Hat clásico la actividad bruta (MG y SF). El perfil de la propuesta es la actividad espacial, NO la fidelidad: su SSIM (0,658) es el penúltimo de los siete, solo por encima del Top-Hat clásico. Si se recuerda la versión anterior de esta nota, que decía lo contrario, corregirlo en voz alta.</a:t>
             </a:r>
             <a:endParaRPr lang="en-US" dirty="0"/>
           </a:p>
@@ -964,7 +964,7 @@
           <a:p>
             <a:r>
               <a:rPr lang="en-US" dirty="0"/>
-              <a:t>El experimento que delimita el valor de la fusión: un único YOLOv8n entrenado con VIS+IR mezcladas (4.000 imágenes, 40 épocas) e inferencia por método. Las personas solo se ven bien en IR y las luces solo en VIS; la fusión es la única entrada que detecta ambas a la vez. La propuesta es la mejor fusión del estudio en este escenario: detecta ambas clases complementarias en una sola imagen.</a:t>
+              <a:t xml:space="preserve">El experimento que delimita el valor de la fusión: un único YOLOv8n entrenado con VIS+IR mezcladas (4.000 imágenes, 40 épocas) e inferencia por método. Las personas solo se ven bien en IR y las luces solo en VIS; la fusión es la única entrada que detecta ambas a la vez. La propuesta NO es la mejor fusión en este escenario: la mejor entrada del par complementario es la Ratio Pyramid (0,622), la propuesta alcanza 0,564 —7.ª de nueve entradas— y en el conteo por escena queda por debajo del visible solo (50,0 % contra 53,0 %): detecta ambas clases complementarias en una sola imagen.</a:t>
             </a:r>
             <a:endParaRPr lang="en-US" dirty="0"/>
           </a:p>

--- a/docs/Tesis_Defensa_Presentacion.pptx
+++ b/docs/Tesis_Defensa_Presentacion.pptx
@@ -963,10 +963,8 @@
           <a:lstStyle/>
           <a:p>
             <a:r>
-              <a:rPr lang="en-US" dirty="0"/>
-              <a:t xml:space="preserve">El experimento que delimita el valor de la fusión: un único YOLOv8n entrenado con VIS+IR mezcladas (4.000 imágenes, 40 épocas) e inferencia por método. Las personas solo se ven bien en IR y las luces solo en VIS; la fusión es la única entrada que detecta ambas a la vez. La propuesta NO es la mejor fusión en este escenario: la mejor entrada del par complementario es la Ratio Pyramid (0,622), la propuesta alcanza 0,564 —7.ª de nueve entradas— y en el conteo por escena queda por debajo del visible solo (50,0 % contra 53,0 %): detecta ambas clases complementarias en una sola imagen.</a:t>
-            </a:r>
-            <a:endParaRPr lang="en-US" dirty="0"/>
+              <a:t>Un único YOLOv8n entrenado con VIS+IR mezcladas e inferencia por método, sobre 232 escenas que contienen las dos clases. Corregir dos afirmaciones de la versión anterior: el infrarrojo NO es ciego a las luces (0,348) y la propuesta NO es la mejor fusión del estudio en este escenario. El resultado que sí aporta el experimento es el conteo por escena, que es la operacionalización que pide OE5: la propuesta queda por debajo del visible solo. Si la mesa pide el caso visual, está en la diapositiva de reserva, con sus conteos reales.</a:t>
+            </a:r>
           </a:p>
         </p:txBody>
       </p:sp>
@@ -1139,10 +1137,8 @@
           <a:lstStyle/>
           <a:p>
             <a:r>
-              <a:rPr lang="en-US" dirty="0"/>
-              <a:t>H1 y H2 quedan sostenidas con evidencia estadística. H3 solo parcialmente: es el resultado más honesto del trabajo y anticipa la pregunta natural del tribunal — calidad de imagen y utilidad en tarea son criterios distintos.</a:t>
-            </a:r>
-            <a:endParaRPr lang="en-US" dirty="0"/>
+              <a:t>Las siete hipótesis se sostienen, y cinco de ellas son hallazgos sobre el criterio, no sobre el operador. No usar la etiqueta «parcial» para H6: con ρ = +0,214, p = 0,645 y 232 escenas, el rechazo de la hipótesis de traslación es limpio y es un aporte. No decir que el PSO halló r = 25: la búsqueda devuelve r = 1, y esa es exactamente H5.</a:t>
+            </a:r>
           </a:p>
         </p:txBody>
       </p:sp>
@@ -1692,94 +1688,6 @@
             <a:fld id="{F7021451-1387-4CA6-816F-3879F97B5CBC}" type="slidenum">
               <a:rPr lang="en-US"/>
               <a:t>4</a:t>
-            </a:fld>
-            <a:endParaRPr lang="en-US"/>
-          </a:p>
-        </p:txBody>
-      </p:sp>
-    </p:spTree>
-    <p:extLst>
-      <p:ext uri="{BB962C8B-B14F-4D97-AF65-F5344CB8AC3E}">
-        <p14:creationId xmlns:p14="http://schemas.microsoft.com/office/powerpoint/2010/main" val="1024086991"/>
-      </p:ext>
-    </p:extLst>
-  </p:cSld>
-  <p:clrMapOvr>
-    <a:masterClrMapping/>
-  </p:clrMapOvr>
-</p:notes>
-</file>
-
-<file path=ppt/notesSlides/notesSlide5.xml><?xml version="1.0" encoding="utf-8"?>
-<p:notes xmlns:a="http://schemas.openxmlformats.org/drawingml/2006/main" xmlns:r="http://schemas.openxmlformats.org/officeDocument/2006/relationships" xmlns:p="http://schemas.openxmlformats.org/presentationml/2006/main">
-  <p:cSld>
-    <p:spTree>
-      <p:nvGrpSpPr>
-        <p:cNvPr id="1" name=""/>
-        <p:cNvGrpSpPr/>
-        <p:nvPr/>
-      </p:nvGrpSpPr>
-      <p:grpSpPr>
-        <a:xfrm>
-          <a:off x="0" y="0"/>
-          <a:ext cx="0" cy="0"/>
-          <a:chOff x="0" y="0"/>
-          <a:chExt cx="0" cy="0"/>
-        </a:xfrm>
-      </p:grpSpPr>
-      <p:sp>
-        <p:nvSpPr>
-          <p:cNvPr id="2" name="Slide Image Placeholder 1"/>
-          <p:cNvSpPr>
-            <a:spLocks noGrp="1" noRot="1" noChangeAspect="1"/>
-          </p:cNvSpPr>
-          <p:nvPr>
-            <p:ph type="sldImg"/>
-          </p:nvPr>
-        </p:nvSpPr>
-        <p:spPr/>
-      </p:sp>
-      <p:sp>
-        <p:nvSpPr>
-          <p:cNvPr id="3" name="Notes Placeholder 2"/>
-          <p:cNvSpPr>
-            <a:spLocks noGrp="1"/>
-          </p:cNvSpPr>
-          <p:nvPr>
-            <p:ph type="body" idx="1"/>
-          </p:nvPr>
-        </p:nvSpPr>
-        <p:spPr/>
-        <p:txBody>
-          <a:bodyPr/>
-          <a:lstStyle/>
-          <a:p>
-            <a:r>
-              <a:rPr lang="en-US" dirty="0"/>
-              <a:t>Tres hipótesis: H1 sobre el operador, H2 sobre la optimización, H3 sobre la utilidad en tarea. Adelantar que H3 dará el resultado más matizado y honesto de la tesis.</a:t>
-            </a:r>
-            <a:endParaRPr lang="en-US" dirty="0"/>
-          </a:p>
-        </p:txBody>
-      </p:sp>
-      <p:sp>
-        <p:nvSpPr>
-          <p:cNvPr id="4" name="Slide Number Placeholder 3"/>
-          <p:cNvSpPr>
-            <a:spLocks noGrp="1"/>
-          </p:cNvSpPr>
-          <p:nvPr>
-            <p:ph type="sldNum" sz="quarter" idx="10"/>
-          </p:nvPr>
-        </p:nvSpPr>
-        <p:spPr/>
-        <p:txBody>
-          <a:bodyPr/>
-          <a:lstStyle/>
-          <a:p>
-            <a:fld id="{F7021451-1387-4CA6-816F-3879F97B5CBC}" type="slidenum">
-              <a:rPr lang="en-US"/>
-              <a:t>5</a:t>
             </a:fld>
             <a:endParaRPr lang="en-US"/>
           </a:p>
@@ -2793,6 +2701,385 @@
 
 <file path=ppt/slides/slide10.xml><?xml version="1.0" encoding="utf-8"?>
 <p:sld xmlns:a="http://schemas.openxmlformats.org/drawingml/2006/main" xmlns:r="http://schemas.openxmlformats.org/officeDocument/2006/relationships" xmlns:p="http://schemas.openxmlformats.org/presentationml/2006/main">
+  <p:cSld name="Slide 9">
+    <p:bg>
+      <p:bgPr>
+        <a:solidFill>
+          <a:srgbClr val="FFFFFF"/>
+        </a:solidFill>
+      </p:bgPr>
+    </p:bg>
+    <p:spTree>
+      <p:nvGrpSpPr>
+        <p:cNvPr id="1" name=""/>
+        <p:cNvGrpSpPr/>
+        <p:nvPr/>
+      </p:nvGrpSpPr>
+      <p:grpSpPr>
+        <a:xfrm>
+          <a:off x="0" y="0"/>
+          <a:ext cx="0" cy="0"/>
+          <a:chOff x="0" y="0"/>
+          <a:chExt cx="0" cy="0"/>
+        </a:xfrm>
+      </p:grpSpPr>
+      <p:sp>
+        <p:nvSpPr>
+          <p:cNvPr id="2" name="Text 0"/>
+          <p:cNvSpPr/>
+          <p:nvPr/>
+        </p:nvSpPr>
+        <p:spPr>
+          <a:xfrm>
+            <a:off x="457200" y="256032"/>
+            <a:ext cx="8229600" cy="502920"/>
+          </a:xfrm>
+          <a:prstGeom prst="rect">
+            <a:avLst/>
+          </a:prstGeom>
+          <a:noFill/>
+          <a:ln/>
+        </p:spPr>
+        <p:txBody>
+          <a:bodyPr wrap="square" lIns="0" tIns="0" rIns="0" bIns="0" rtlCol="0" anchor="ctr"/>
+          <a:lstStyle/>
+          <a:p>
+            <a:pPr indent="0" marL="0">
+              <a:buNone/>
+            </a:pPr>
+            <a:r>
+              <a:rPr lang="en-US" sz="2300" b="1" dirty="0">
+                <a:solidFill>
+                  <a:srgbClr val="1A1A1A"/>
+                </a:solidFill>
+                <a:latin typeface="Times New Roman" pitchFamily="34" charset="0"/>
+                <a:ea typeface="Times New Roman" pitchFamily="34" charset="-122"/>
+                <a:cs typeface="Times New Roman" pitchFamily="34" charset="-120"/>
+              </a:rPr>
+              <a:t xml:space="preserve">7. Diseño experimental</a:t>
+            </a:r>
+            <a:endParaRPr lang="en-US" sz="2300" dirty="0"/>
+          </a:p>
+        </p:txBody>
+      </p:sp>
+      <p:sp>
+        <p:nvSpPr>
+          <p:cNvPr id="3" name="Text 1"/>
+          <p:cNvSpPr/>
+          <p:nvPr/>
+        </p:nvSpPr>
+        <p:spPr>
+          <a:xfrm>
+            <a:off x="8229600" y="4828032"/>
+            <a:ext cx="685800" cy="274320"/>
+          </a:xfrm>
+          <a:prstGeom prst="rect">
+            <a:avLst/>
+          </a:prstGeom>
+          <a:noFill/>
+          <a:ln/>
+        </p:spPr>
+        <p:txBody>
+          <a:bodyPr wrap="square" lIns="0" tIns="0" rIns="0" bIns="0" rtlCol="0" anchor="ctr"/>
+          <a:lstStyle/>
+          <a:p>
+            <a:pPr algn="r" indent="0" marL="0">
+              <a:buNone/>
+            </a:pPr>
+            <a:r>
+              <a:rPr lang="en-US" sz="900" dirty="0">
+                <a:solidFill>
+                  <a:srgbClr val="666666"/>
+                </a:solidFill>
+                <a:latin typeface="Times New Roman" pitchFamily="34" charset="0"/>
+                <a:ea typeface="Times New Roman" pitchFamily="34" charset="-122"/>
+                <a:cs typeface="Times New Roman" pitchFamily="34" charset="-120"/>
+              </a:rPr>
+              <a:t xml:space="preserve">10 / 22</a:t>
+            </a:r>
+            <a:endParaRPr lang="en-US" sz="900" dirty="0"/>
+          </a:p>
+        </p:txBody>
+      </p:sp>
+      <p:sp>
+        <p:nvSpPr>
+          <p:cNvPr id="4" name="Text 2"/>
+          <p:cNvSpPr/>
+          <p:nvPr/>
+        </p:nvSpPr>
+        <p:spPr>
+          <a:xfrm>
+            <a:off x="457200" y="868680"/>
+            <a:ext cx="4023360" cy="274320"/>
+          </a:xfrm>
+          <a:prstGeom prst="rect">
+            <a:avLst/>
+          </a:prstGeom>
+          <a:noFill/>
+          <a:ln/>
+        </p:spPr>
+        <p:txBody>
+          <a:bodyPr wrap="square" lIns="0" tIns="0" rIns="0" bIns="0" rtlCol="0" anchor="ctr"/>
+          <a:lstStyle/>
+          <a:p>
+            <a:pPr indent="0" marL="0">
+              <a:buNone/>
+            </a:pPr>
+            <a:r>
+              <a:rPr lang="en-US" sz="1400" b="1" dirty="0">
+                <a:solidFill>
+                  <a:srgbClr val="8B1A1A"/>
+                </a:solidFill>
+                <a:latin typeface="Times New Roman" pitchFamily="34" charset="0"/>
+                <a:ea typeface="Times New Roman" pitchFamily="34" charset="-122"/>
+                <a:cs typeface="Times New Roman" pitchFamily="34" charset="-120"/>
+              </a:rPr>
+              <a:t>Benchmark de calidad</a:t>
+            </a:r>
+            <a:endParaRPr lang="en-US" sz="1400" dirty="0"/>
+          </a:p>
+        </p:txBody>
+      </p:sp>
+      <p:sp>
+        <p:nvSpPr>
+          <p:cNvPr id="5" name="Text 3"/>
+          <p:cNvSpPr/>
+          <p:nvPr/>
+        </p:nvSpPr>
+        <p:spPr>
+          <a:xfrm>
+            <a:off x="457200" y="1188720"/>
+            <a:ext cx="4023360" cy="3291840"/>
+          </a:xfrm>
+          <a:prstGeom prst="rect">
+            <a:avLst/>
+          </a:prstGeom>
+          <a:noFill/>
+          <a:ln/>
+        </p:spPr>
+        <p:txBody>
+          <a:bodyPr wrap="square" lIns="0" tIns="0" rIns="0" bIns="0" rtlCol="0" anchor="t"/>
+          <a:lstStyle/>
+          <a:p>
+            <a:pPr marL="177800" indent="-177800">
+              <a:spcAft>
+                <a:spcPts val="800"/>
+              </a:spcAft>
+              <a:buSzPct val="100000"/>
+              <a:buChar char="•"/>
+            </a:pPr>
+            <a:r>
+              <a:rPr lang="en-US" sz="1250" dirty="0">
+                <a:solidFill>
+                  <a:srgbClr val="1A1A1A"/>
+                </a:solidFill>
+                <a:latin typeface="Times New Roman" pitchFamily="34" charset="0"/>
+                <a:ea typeface="Times New Roman" pitchFamily="34" charset="-122"/>
+                <a:cs typeface="Times New Roman" pitchFamily="34" charset="-120"/>
+              </a:rPr>
+              <a:t>20 pares VIS/IR del dataset TNO (Toet, 2014).</a:t>
+            </a:r>
+            <a:endParaRPr lang="en-US" sz="1250" dirty="0"/>
+          </a:p>
+          <a:p>
+            <a:pPr marL="177800" indent="-177800">
+              <a:spcAft>
+                <a:spcPts val="800"/>
+              </a:spcAft>
+              <a:buSzPct val="100000"/>
+              <a:buChar char="•"/>
+            </a:pPr>
+            <a:r>
+              <a:rPr lang="en-US" sz="1250" dirty="0">
+                <a:solidFill>
+                  <a:srgbClr val="1A1A1A"/>
+                </a:solidFill>
+                <a:latin typeface="Times New Roman" pitchFamily="34" charset="0"/>
+                <a:ea typeface="Times New Roman" pitchFamily="34" charset="-122"/>
+                <a:cs typeface="Times New Roman" pitchFamily="34" charset="-120"/>
+              </a:rPr>
+              <a:t xml:space="preserve">7 métodos: LP, RP, DWT, DTCWT, CVT (aprox. wavelet db4), Top-Hat clásico y Propuesta → 140 fusiones.</a:t>
+            </a:r>
+            <a:endParaRPr lang="en-US" sz="1250" dirty="0"/>
+          </a:p>
+          <a:p>
+            <a:pPr marL="177800" indent="-177800">
+              <a:spcAft>
+                <a:spcPts val="800"/>
+              </a:spcAft>
+              <a:buSzPct val="100000"/>
+              <a:buChar char="•"/>
+            </a:pPr>
+            <a:r>
+              <a:rPr lang="en-US" sz="1250" dirty="0">
+                <a:solidFill>
+                  <a:srgbClr val="1A1A1A"/>
+                </a:solidFill>
+                <a:latin typeface="Times New Roman" pitchFamily="34" charset="0"/>
+                <a:ea typeface="Times New Roman" pitchFamily="34" charset="-122"/>
+                <a:cs typeface="Times New Roman" pitchFamily="34" charset="-120"/>
+              </a:rPr>
+              <a:t>Nueve métricas sin referencia (EN, SD, FE, MG, MI_vis, MI_ir, SF, SSIM, PSNR).</a:t>
+            </a:r>
+            <a:endParaRPr lang="en-US" sz="1250" dirty="0"/>
+          </a:p>
+          <a:p>
+            <a:pPr marL="177800" indent="-177800">
+              <a:spcAft>
+                <a:spcPts val="800"/>
+              </a:spcAft>
+              <a:buSzPct val="100000"/>
+              <a:buChar char="•"/>
+            </a:pPr>
+            <a:r>
+              <a:rPr lang="en-US" sz="1250" dirty="0">
+                <a:solidFill>
+                  <a:srgbClr val="1A1A1A"/>
+                </a:solidFill>
+                <a:latin typeface="Times New Roman" pitchFamily="34" charset="0"/>
+                <a:ea typeface="Times New Roman" pitchFamily="34" charset="-122"/>
+                <a:cs typeface="Times New Roman" pitchFamily="34" charset="-120"/>
+              </a:rPr>
+              <a:t>Friedman global + Wilcoxon pareado con corrección de Holm (α = 0,05).</a:t>
+            </a:r>
+            <a:endParaRPr lang="en-US" sz="1250" dirty="0"/>
+          </a:p>
+        </p:txBody>
+      </p:sp>
+      <p:sp>
+        <p:nvSpPr>
+          <p:cNvPr id="6" name="Text 4"/>
+          <p:cNvSpPr/>
+          <p:nvPr/>
+        </p:nvSpPr>
+        <p:spPr>
+          <a:xfrm>
+            <a:off x="4846320" y="868680"/>
+            <a:ext cx="3840480" cy="274320"/>
+          </a:xfrm>
+          <a:prstGeom prst="rect">
+            <a:avLst/>
+          </a:prstGeom>
+          <a:noFill/>
+          <a:ln/>
+        </p:spPr>
+        <p:txBody>
+          <a:bodyPr wrap="square" lIns="0" tIns="0" rIns="0" bIns="0" rtlCol="0" anchor="ctr"/>
+          <a:lstStyle/>
+          <a:p>
+            <a:pPr indent="0" marL="0">
+              <a:buNone/>
+            </a:pPr>
+            <a:r>
+              <a:rPr lang="en-US" sz="1400" b="1" dirty="0">
+                <a:solidFill>
+                  <a:srgbClr val="8B1A1A"/>
+                </a:solidFill>
+                <a:latin typeface="Times New Roman" pitchFamily="34" charset="0"/>
+                <a:ea typeface="Times New Roman" pitchFamily="34" charset="-122"/>
+                <a:cs typeface="Times New Roman" pitchFamily="34" charset="-120"/>
+              </a:rPr>
+              <a:t>Evaluación orientada a tarea</a:t>
+            </a:r>
+            <a:endParaRPr lang="en-US" sz="1400" dirty="0"/>
+          </a:p>
+        </p:txBody>
+      </p:sp>
+      <p:sp>
+        <p:nvSpPr>
+          <p:cNvPr id="7" name="Text 5"/>
+          <p:cNvSpPr/>
+          <p:nvPr/>
+        </p:nvSpPr>
+        <p:spPr>
+          <a:xfrm>
+            <a:off x="4846320" y="1188720"/>
+            <a:ext cx="3840480" cy="3291840"/>
+          </a:xfrm>
+          <a:prstGeom prst="rect">
+            <a:avLst/>
+          </a:prstGeom>
+          <a:noFill/>
+          <a:ln/>
+        </p:spPr>
+        <p:txBody>
+          <a:bodyPr wrap="square" lIns="0" tIns="0" rIns="0" bIns="0" rtlCol="0" anchor="t"/>
+          <a:lstStyle/>
+          <a:p>
+            <a:pPr marL="177800" indent="-177800">
+              <a:spcAft>
+                <a:spcPts val="800"/>
+              </a:spcAft>
+              <a:buSzPct val="100000"/>
+              <a:buChar char="•"/>
+            </a:pPr>
+            <a:r>
+              <a:rPr lang="en-US" sz="1250" dirty="0">
+                <a:solidFill>
+                  <a:srgbClr val="1A1A1A"/>
+                </a:solidFill>
+                <a:latin typeface="Times New Roman" pitchFamily="34" charset="0"/>
+                <a:ea typeface="Times New Roman" pitchFamily="34" charset="-122"/>
+                <a:cs typeface="Times New Roman" pitchFamily="34" charset="-120"/>
+              </a:rPr>
+              <a:t>Dataset etiquetado LLVIP (peatones nocturnos): 2.000 imágenes de entrenamiento y 500 de validación.</a:t>
+            </a:r>
+            <a:endParaRPr lang="en-US" sz="1250" dirty="0"/>
+          </a:p>
+          <a:p>
+            <a:pPr marL="177800" indent="-177800">
+              <a:spcAft>
+                <a:spcPts val="800"/>
+              </a:spcAft>
+              <a:buSzPct val="100000"/>
+              <a:buChar char="•"/>
+            </a:pPr>
+            <a:r>
+              <a:rPr lang="en-US" sz="1250" dirty="0">
+                <a:solidFill>
+                  <a:srgbClr val="1A1A1A"/>
+                </a:solidFill>
+                <a:latin typeface="Times New Roman" pitchFamily="34" charset="0"/>
+                <a:ea typeface="Times New Roman" pitchFamily="34" charset="-122"/>
+                <a:cs typeface="Times New Roman" pitchFamily="34" charset="-120"/>
+              </a:rPr>
+              <a:t>YOLOv8n reentrenado por modalidad (40 épocas), 9 entradas: VIS, IR y las 7 fusiones.</a:t>
+            </a:r>
+            <a:endParaRPr lang="en-US" sz="1250" dirty="0"/>
+          </a:p>
+          <a:p>
+            <a:pPr marL="177800" indent="-177800">
+              <a:spcAft>
+                <a:spcPts val="800"/>
+              </a:spcAft>
+              <a:buSzPct val="100000"/>
+              <a:buChar char="•"/>
+            </a:pPr>
+            <a:r>
+              <a:rPr lang="en-US" sz="1250" dirty="0">
+                <a:solidFill>
+                  <a:srgbClr val="1A1A1A"/>
+                </a:solidFill>
+                <a:latin typeface="Times New Roman" pitchFamily="34" charset="0"/>
+                <a:ea typeface="Times New Roman" pitchFamily="34" charset="-122"/>
+                <a:cs typeface="Times New Roman" pitchFamily="34" charset="-120"/>
+              </a:rPr>
+              <a:t>Etiquetas idénticas entre modalidades: la diferencia de mAP aísla el efecto del método de fusión.</a:t>
+            </a:r>
+            <a:endParaRPr lang="en-US" sz="1250" dirty="0"/>
+          </a:p>
+        </p:txBody>
+      </p:sp>
+    </p:spTree>
+  </p:cSld>
+  <p:clrMapOvr>
+    <a:masterClrMapping/>
+  </p:clrMapOvr>
+</p:sld>
+</file>
+
+<file path=ppt/slides/slide11.xml><?xml version="1.0" encoding="utf-8"?>
+<p:sld xmlns:a="http://schemas.openxmlformats.org/drawingml/2006/main" xmlns:r="http://schemas.openxmlformats.org/officeDocument/2006/relationships" xmlns:p="http://schemas.openxmlformats.org/presentationml/2006/main">
   <p:cSld name="Slide 10">
     <p:bg>
       <p:bgPr>
@@ -2964,7 +3251,7 @@
 </p:sld>
 </file>
 
-<file path=ppt/slides/slide11.xml><?xml version="1.0" encoding="utf-8"?>
+<file path=ppt/slides/slide12.xml><?xml version="1.0" encoding="utf-8"?>
 <p:sld xmlns:a="http://schemas.openxmlformats.org/drawingml/2006/main" xmlns:r="http://schemas.openxmlformats.org/officeDocument/2006/relationships" xmlns:p="http://schemas.openxmlformats.org/presentationml/2006/main">
   <p:cSld name="Slide 11">
     <p:bg>
@@ -6326,7 +6613,7 @@
 </p:sld>
 </file>
 
-<file path=ppt/slides/slide12.xml><?xml version="1.0" encoding="utf-8"?>
+<file path=ppt/slides/slide13.xml><?xml version="1.0" encoding="utf-8"?>
 <p:sld xmlns:a="http://schemas.openxmlformats.org/drawingml/2006/main" xmlns:r="http://schemas.openxmlformats.org/officeDocument/2006/relationships" xmlns:p="http://schemas.openxmlformats.org/presentationml/2006/main">
   <p:cSld name="Slide 12">
     <p:bg>
@@ -6507,7 +6794,7 @@
                 <a:ea typeface="Times New Roman" pitchFamily="34" charset="-122"/>
                 <a:cs typeface="Times New Roman" pitchFamily="34" charset="-120"/>
               </a:rPr>
-              <a:t xml:space="preserve">Bloque de ACTIVIDAD ESPACIAL (EN, SD, FE, MG, SF): 24 de 25 contrastes favorables y significativos, y ninguno adverso.</a:t>
+              <a:t xml:space="preserve">Bloque de ACTIVIDAD ESPACIAL (EN, SD, FE, MG, SF): 24 de 25 contrastes favorables y significativos, y ninguno adverso con significancia; el restante —SD frente a la pirámide de Laplace— es adverso pero no distinguible (p_Holm = 0,231).</a:t>
             </a:r>
             <a:endParaRPr lang="en-US" sz="1300" dirty="0"/>
           </a:p>
@@ -6605,7 +6892,802 @@
 </p:sld>
 </file>
 
-<file path=ppt/slides/slide13.xml><?xml version="1.0" encoding="utf-8"?>
+<file path=ppt/slides/slide14.xml><?xml version="1.0" encoding="utf-8"?>
+<p:sld xmlns:a="http://schemas.openxmlformats.org/drawingml/2006/main" xmlns:r="http://schemas.openxmlformats.org/officeDocument/2006/relationships" xmlns:p="http://schemas.openxmlformats.org/presentationml/2006/main">
+  <p:cSld name="Slide 17">
+    <p:bg>
+      <p:bgPr>
+        <a:solidFill>
+          <a:srgbClr val="FFFFFF"/>
+        </a:solidFill>
+      </p:bgPr>
+    </p:bg>
+    <p:spTree>
+      <p:nvGrpSpPr>
+        <p:cNvPr id="1" name=""/>
+        <p:cNvGrpSpPr/>
+        <p:nvPr/>
+      </p:nvGrpSpPr>
+      <p:grpSpPr>
+        <a:xfrm>
+          <a:off x="0" y="0"/>
+          <a:ext cx="0" cy="0"/>
+          <a:chOff x="0" y="0"/>
+          <a:chExt cx="0" cy="0"/>
+        </a:xfrm>
+      </p:grpSpPr>
+      <p:sp>
+        <p:nvSpPr>
+          <p:cNvPr id="2" name="Text 0"/>
+          <p:cNvSpPr/>
+          <p:nvPr/>
+        </p:nvSpPr>
+        <p:spPr>
+          <a:xfrm>
+            <a:off x="457200" y="256032"/>
+            <a:ext cx="8229600" cy="502920"/>
+          </a:xfrm>
+          <a:prstGeom prst="rect">
+            <a:avLst/>
+          </a:prstGeom>
+          <a:noFill/>
+          <a:ln/>
+        </p:spPr>
+        <p:txBody>
+          <a:bodyPr wrap="square" lIns="0" tIns="0" rIns="0" bIns="0" rtlCol="0" anchor="ctr"/>
+          <a:lstStyle/>
+          <a:p>
+            <a:pPr indent="0" marL="0">
+              <a:buNone/>
+            </a:pPr>
+            <a:r>
+              <a:rPr lang="en-US" sz="2300" b="1" dirty="0">
+                <a:solidFill>
+                  <a:srgbClr val="1A1A1A"/>
+                </a:solidFill>
+                <a:latin typeface="Times New Roman" pitchFamily="34" charset="0"/>
+                <a:ea typeface="Times New Roman" pitchFamily="34" charset="-122"/>
+                <a:cs typeface="Times New Roman" pitchFamily="34" charset="-120"/>
+              </a:rPr>
+              <a:t xml:space="preserve">9. Auditoría I — ¿discrimina calidad la batería de nueve métricas? (H3, H4)</a:t>
+            </a:r>
+            <a:endParaRPr lang="en-US" sz="2300" dirty="0"/>
+          </a:p>
+        </p:txBody>
+      </p:sp>
+      <p:sp>
+        <p:nvSpPr>
+          <p:cNvPr id="3" name="Text 1"/>
+          <p:cNvSpPr/>
+          <p:nvPr/>
+        </p:nvSpPr>
+        <p:spPr>
+          <a:xfrm>
+            <a:off x="8229600" y="4828032"/>
+            <a:ext cx="685800" cy="274320"/>
+          </a:xfrm>
+          <a:prstGeom prst="rect">
+            <a:avLst/>
+          </a:prstGeom>
+          <a:noFill/>
+          <a:ln/>
+        </p:spPr>
+        <p:txBody>
+          <a:bodyPr wrap="square" lIns="0" tIns="0" rIns="0" bIns="0" rtlCol="0" anchor="ctr"/>
+          <a:lstStyle/>
+          <a:p>
+            <a:pPr algn="r" indent="0" marL="0">
+              <a:buNone/>
+            </a:pPr>
+            <a:r>
+              <a:rPr lang="en-US" sz="900" dirty="0">
+                <a:solidFill>
+                  <a:srgbClr val="666666"/>
+                </a:solidFill>
+                <a:latin typeface="Times New Roman" pitchFamily="34" charset="0"/>
+                <a:ea typeface="Times New Roman" pitchFamily="34" charset="-122"/>
+                <a:cs typeface="Times New Roman" pitchFamily="34" charset="-120"/>
+              </a:rPr>
+              <a:t xml:space="preserve">14 / 22</a:t>
+            </a:r>
+            <a:endParaRPr lang="en-US" sz="900" dirty="0"/>
+          </a:p>
+        </p:txBody>
+      </p:sp>
+      <p:sp>
+        <p:nvSpPr>
+          <p:cNvPr id="4" name="Text 2"/>
+          <p:cNvSpPr/>
+          <p:nvPr/>
+        </p:nvSpPr>
+        <p:spPr>
+          <a:xfrm>
+            <a:off x="457200" y="914400"/>
+            <a:ext cx="8229600" cy="3931920"/>
+          </a:xfrm>
+          <a:prstGeom prst="rect">
+            <a:avLst/>
+          </a:prstGeom>
+          <a:noFill/>
+          <a:ln/>
+        </p:spPr>
+        <p:txBody>
+          <a:bodyPr wrap="square" lIns="0" tIns="0" rIns="0" bIns="0" rtlCol="0" anchor="t"/>
+          <a:lstStyle/>
+          <a:p>
+            <a:pPr marL="177800" indent="-177800">
+              <a:spcAft>
+                <a:spcPts val="1100"/>
+              </a:spcAft>
+              <a:buSzPct val="100000"/>
+              <a:buChar char="•"/>
+            </a:pPr>
+            <a:r>
+              <a:rPr lang="en-US" sz="1350" dirty="0">
+                <a:solidFill>
+                  <a:srgbClr val="1A1A1A"/>
+                </a:solidFill>
+                <a:latin typeface="Times New Roman" pitchFamily="34" charset="0"/>
+                <a:ea typeface="Times New Roman" pitchFamily="34" charset="-122"/>
+                <a:cs typeface="Times New Roman" pitchFamily="34" charset="-120"/>
+              </a:rPr>
+              <a:t xml:space="preserve">Control negativo: al ranking se añadieron siete entradas degradadas junto a los siete métodos —la imagen base sin operador, cuatro fusiones artificiales de ruido gaussiano y dos desenfoques—.</a:t>
+            </a:r>
+            <a:endParaRPr lang="en-US" sz="1350" dirty="0"/>
+          </a:p>
+          <a:p>
+            <a:pPr marL="177800" indent="-177800">
+              <a:spcAft>
+                <a:spcPts val="1100"/>
+              </a:spcAft>
+              <a:buSzPct val="100000"/>
+              <a:buChar char="•"/>
+            </a:pPr>
+            <a:r>
+              <a:rPr lang="en-US" sz="1350" dirty="0">
+                <a:solidFill>
+                  <a:srgbClr val="1A1A1A"/>
+                </a:solidFill>
+                <a:latin typeface="Times New Roman" pitchFamily="34" charset="0"/>
+                <a:ea typeface="Times New Roman" pitchFamily="34" charset="-122"/>
+                <a:cs typeface="Times New Roman" pitchFamily="34" charset="-120"/>
+              </a:rPr>
+              <a:t xml:space="preserve">Con las nueve métricas la fusión de ruido con σ = 0,20 queda 3.ª de 14 (rango 6,767): por delante de cinco de los seis métodos comparativos y de la imagen base.</a:t>
+            </a:r>
+            <a:endParaRPr lang="en-US" sz="1350" dirty="0"/>
+          </a:p>
+          <a:p>
+            <a:pPr marL="177800" indent="-177800">
+              <a:spcAft>
+                <a:spcPts val="1100"/>
+              </a:spcAft>
+              <a:buSzPct val="100000"/>
+              <a:buChar char="•"/>
+            </a:pPr>
+            <a:r>
+              <a:rPr lang="en-US" sz="1350" dirty="0">
+                <a:solidFill>
+                  <a:srgbClr val="1A1A1A"/>
+                </a:solidFill>
+                <a:latin typeface="Times New Roman" pitchFamily="34" charset="0"/>
+                <a:ea typeface="Times New Roman" pitchFamily="34" charset="-122"/>
+                <a:cs typeface="Times New Roman" pitchFamily="34" charset="-120"/>
+              </a:rPr>
+              <a:t xml:space="preserve">Y su rango MEJORA al aumentar el ruido: 8,917 → 7,850 → 6,972 → 6,767 para σ = 0,02 / 0,05 / 0,10 / 0,20. La batería juzga mejor a la imagen cuanto más ruido se le inyecta.</a:t>
+            </a:r>
+            <a:endParaRPr lang="en-US" sz="1350" dirty="0"/>
+          </a:p>
+          <a:p>
+            <a:pPr marL="177800" indent="-177800">
+              <a:spcAft>
+                <a:spcPts val="1100"/>
+              </a:spcAft>
+              <a:buSzPct val="100000"/>
+              <a:buChar char="•"/>
+            </a:pPr>
+            <a:r>
+              <a:rPr lang="en-US" sz="1350" dirty="0">
+                <a:solidFill>
+                  <a:srgbClr val="1A1A1A"/>
+                </a:solidFill>
+                <a:latin typeface="Times New Roman" pitchFamily="34" charset="0"/>
+                <a:ea typeface="Times New Roman" pitchFamily="34" charset="-122"/>
+                <a:cs typeface="Times New Roman" pitchFamily="34" charset="-120"/>
+              </a:rPr>
+              <a:t xml:space="preserve">El fallo es específico de la varianza y no de la degradación en general: el desenfoque sí se penaliza, y el de 11 × 11 queda último (9,822).</a:t>
+            </a:r>
+            <a:endParaRPr lang="en-US" sz="1350" dirty="0"/>
+          </a:p>
+          <a:p>
+            <a:pPr marL="177800" indent="-177800">
+              <a:spcAft>
+                <a:spcPts val="1100"/>
+              </a:spcAft>
+              <a:buSzPct val="100000"/>
+              <a:buChar char="•"/>
+            </a:pPr>
+            <a:r>
+              <a:rPr lang="en-US" sz="1350" dirty="0">
+                <a:solidFill>
+                  <a:srgbClr val="1A1A1A"/>
+                </a:solidFill>
+                <a:latin typeface="Times New Roman" pitchFamily="34" charset="0"/>
+                <a:ea typeface="Times New Roman" pitchFamily="34" charset="-122"/>
+                <a:cs typeface="Times New Roman" pitchFamily="34" charset="-120"/>
+              </a:rPr>
+              <a:t xml:space="preserve">Basta una métrica que penalice artefactos para corregirlo: incorporando Nabf el ruido cae al 7.º puesto; con las diecisiete métricas, al último (10,138).</a:t>
+            </a:r>
+            <a:endParaRPr lang="en-US" sz="1350" dirty="0"/>
+          </a:p>
+          <a:p>
+            <a:pPr marL="177800" indent="-177800">
+              <a:spcAft>
+                <a:spcPts val="1100"/>
+              </a:spcAft>
+              <a:buSzPct val="100000"/>
+              <a:buChar char="•"/>
+            </a:pPr>
+            <a:r>
+              <a:rPr lang="en-US" sz="1350" dirty="0">
+                <a:solidFill>
+                  <a:srgbClr val="1A1A1A"/>
+                </a:solidFill>
+                <a:latin typeface="Times New Roman" pitchFamily="34" charset="0"/>
+                <a:ea typeface="Times New Roman" pitchFamily="34" charset="-122"/>
+                <a:cs typeface="Times New Roman" pitchFamily="34" charset="-120"/>
+              </a:rPr>
+              <a:t xml:space="preserve">Redundancia interna: FE es la entropía de la fusión sobre el promedio de las entropías de las fuentes, y ese denominador no depende del método. Rangos intra-bloque idénticos a EN en las 20 imágenes y el mismo χ² de Friedman (88,2857): las dimensiones efectivas son ocho, no nueve.</a:t>
+            </a:r>
+            <a:endParaRPr lang="en-US" sz="1350" dirty="0"/>
+          </a:p>
+          <a:p>
+            <a:pPr marL="177800" indent="-177800">
+              <a:spcAft>
+                <a:spcPts val="1100"/>
+              </a:spcAft>
+              <a:buSzPct val="100000"/>
+              <a:buChar char="•"/>
+            </a:pPr>
+            <a:r>
+              <a:rPr lang="en-US" sz="1350" dirty="0">
+                <a:solidFill>
+                  <a:srgbClr val="1A1A1A"/>
+                </a:solidFill>
+                <a:latin typeface="Times New Roman" pitchFamily="34" charset="0"/>
+                <a:ea typeface="Times New Roman" pitchFamily="34" charset="-122"/>
+                <a:cs typeface="Times New Roman" pitchFamily="34" charset="-120"/>
+              </a:rPr>
+              <a:t xml:space="preserve">Excluyendo FE la propuesta sigue primera (3,631 frente a 3,994 de la pirámide de Laplace): la redundancia no explica su primer lugar.</a:t>
+            </a:r>
+            <a:endParaRPr lang="en-US" sz="1350" dirty="0"/>
+          </a:p>
+        </p:txBody>
+      </p:sp>
+    </p:spTree>
+  </p:cSld>
+  <p:clrMapOvr>
+    <a:masterClrMapping/>
+  </p:clrMapOvr>
+</p:sld>
+</file>
+
+<file path=ppt/slides/slide15.xml><?xml version="1.0" encoding="utf-8"?>
+<p:sld xmlns:a="http://schemas.openxmlformats.org/drawingml/2006/main" xmlns:r="http://schemas.openxmlformats.org/officeDocument/2006/relationships" xmlns:p="http://schemas.openxmlformats.org/presentationml/2006/main">
+  <p:cSld name="Slide 17">
+    <p:bg>
+      <p:bgPr>
+        <a:solidFill>
+          <a:srgbClr val="FFFFFF"/>
+        </a:solidFill>
+      </p:bgPr>
+    </p:bg>
+    <p:spTree>
+      <p:nvGrpSpPr>
+        <p:cNvPr id="1" name=""/>
+        <p:cNvGrpSpPr/>
+        <p:nvPr/>
+      </p:nvGrpSpPr>
+      <p:grpSpPr>
+        <a:xfrm>
+          <a:off x="0" y="0"/>
+          <a:ext cx="0" cy="0"/>
+          <a:chOff x="0" y="0"/>
+          <a:chExt cx="0" cy="0"/>
+        </a:xfrm>
+      </p:grpSpPr>
+      <p:sp>
+        <p:nvSpPr>
+          <p:cNvPr id="2" name="Text 0"/>
+          <p:cNvSpPr/>
+          <p:nvPr/>
+        </p:nvSpPr>
+        <p:spPr>
+          <a:xfrm>
+            <a:off x="457200" y="256032"/>
+            <a:ext cx="8229600" cy="502920"/>
+          </a:xfrm>
+          <a:prstGeom prst="rect">
+            <a:avLst/>
+          </a:prstGeom>
+          <a:noFill/>
+          <a:ln/>
+        </p:spPr>
+        <p:txBody>
+          <a:bodyPr wrap="square" lIns="0" tIns="0" rIns="0" bIns="0" rtlCol="0" anchor="ctr"/>
+          <a:lstStyle/>
+          <a:p>
+            <a:pPr indent="0" marL="0">
+              <a:buNone/>
+            </a:pPr>
+            <a:r>
+              <a:rPr lang="en-US" sz="2300" b="1" dirty="0">
+                <a:solidFill>
+                  <a:srgbClr val="1A1A1A"/>
+                </a:solidFill>
+                <a:latin typeface="Times New Roman" pitchFamily="34" charset="0"/>
+                <a:ea typeface="Times New Roman" pitchFamily="34" charset="-122"/>
+                <a:cs typeface="Times New Roman" pitchFamily="34" charset="-120"/>
+              </a:rPr>
+              <a:t xml:space="preserve">Auditoría II — el orden de mérito es propiedad del criterio (H2)</a:t>
+            </a:r>
+            <a:endParaRPr lang="en-US" sz="2300" dirty="0"/>
+          </a:p>
+        </p:txBody>
+      </p:sp>
+      <p:sp>
+        <p:nvSpPr>
+          <p:cNvPr id="3" name="Text 1"/>
+          <p:cNvSpPr/>
+          <p:nvPr/>
+        </p:nvSpPr>
+        <p:spPr>
+          <a:xfrm>
+            <a:off x="8229600" y="4828032"/>
+            <a:ext cx="685800" cy="274320"/>
+          </a:xfrm>
+          <a:prstGeom prst="rect">
+            <a:avLst/>
+          </a:prstGeom>
+          <a:noFill/>
+          <a:ln/>
+        </p:spPr>
+        <p:txBody>
+          <a:bodyPr wrap="square" lIns="0" tIns="0" rIns="0" bIns="0" rtlCol="0" anchor="ctr"/>
+          <a:lstStyle/>
+          <a:p>
+            <a:pPr algn="r" indent="0" marL="0">
+              <a:buNone/>
+            </a:pPr>
+            <a:r>
+              <a:rPr lang="en-US" sz="900" dirty="0">
+                <a:solidFill>
+                  <a:srgbClr val="666666"/>
+                </a:solidFill>
+                <a:latin typeface="Times New Roman" pitchFamily="34" charset="0"/>
+                <a:ea typeface="Times New Roman" pitchFamily="34" charset="-122"/>
+                <a:cs typeface="Times New Roman" pitchFamily="34" charset="-120"/>
+              </a:rPr>
+              <a:t xml:space="preserve">15 / 22</a:t>
+            </a:r>
+            <a:endParaRPr lang="en-US" sz="900" dirty="0"/>
+          </a:p>
+        </p:txBody>
+      </p:sp>
+      <p:sp>
+        <p:nvSpPr>
+          <p:cNvPr id="4" name="Text 2"/>
+          <p:cNvSpPr/>
+          <p:nvPr/>
+        </p:nvSpPr>
+        <p:spPr>
+          <a:xfrm>
+            <a:off x="457200" y="914400"/>
+            <a:ext cx="8229600" cy="3931920"/>
+          </a:xfrm>
+          <a:prstGeom prst="rect">
+            <a:avLst/>
+          </a:prstGeom>
+          <a:noFill/>
+          <a:ln/>
+        </p:spPr>
+        <p:txBody>
+          <a:bodyPr wrap="square" lIns="0" tIns="0" rIns="0" bIns="0" rtlCol="0" anchor="t"/>
+          <a:lstStyle/>
+          <a:p>
+            <a:pPr marL="177800" indent="-177800">
+              <a:spcAft>
+                <a:spcPts val="1100"/>
+              </a:spcAft>
+              <a:buSzPct val="100000"/>
+              <a:buChar char="•"/>
+            </a:pPr>
+            <a:r>
+              <a:rPr lang="en-US" sz="1350" dirty="0">
+                <a:solidFill>
+                  <a:srgbClr val="1A1A1A"/>
+                </a:solidFill>
+                <a:latin typeface="Times New Roman" pitchFamily="34" charset="0"/>
+                <a:ea typeface="Times New Roman" pitchFamily="34" charset="-122"/>
+                <a:cs typeface="Times New Roman" pitchFamily="34" charset="-120"/>
+              </a:rPr>
+              <a:t xml:space="preserve">Mismo operador, las mismas 140 imágenes fusionadas, dos composiciones del criterio.</a:t>
+            </a:r>
+            <a:endParaRPr lang="en-US" sz="1350" dirty="0"/>
+          </a:p>
+          <a:p>
+            <a:pPr marL="177800" indent="-177800">
+              <a:spcAft>
+                <a:spcPts val="1100"/>
+              </a:spcAft>
+              <a:buSzPct val="100000"/>
+              <a:buChar char="•"/>
+            </a:pPr>
+            <a:r>
+              <a:rPr lang="en-US" sz="1350" dirty="0">
+                <a:solidFill>
+                  <a:srgbClr val="1A1A1A"/>
+                </a:solidFill>
+                <a:latin typeface="Times New Roman" pitchFamily="34" charset="0"/>
+                <a:ea typeface="Times New Roman" pitchFamily="34" charset="-122"/>
+                <a:cs typeface="Times New Roman" pitchFamily="34" charset="-120"/>
+              </a:rPr>
+              <a:t xml:space="preserve">Con las nueve métricas del trabajo de referencia la propuesta es 1.ª de 7 (3,394). Con las diecisiete que el MISMO evaluador ya calcula —nueve más Qabf, Nabf, SCD, VIF, FMI, Q0, QW y QE— desciende a 3.ª (3,459): el primer lugar pasa a la pirámide de Laplace (3,147), el segundo a DTCWT (3,259) y el Top-Hat clásico cae al último (5,000).</a:t>
+            </a:r>
+            <a:endParaRPr lang="en-US" sz="1350" dirty="0"/>
+          </a:p>
+          <a:p>
+            <a:pPr marL="177800" indent="-177800">
+              <a:spcAft>
+                <a:spcPts val="1100"/>
+              </a:spcAft>
+              <a:buSzPct val="100000"/>
+              <a:buChar char="•"/>
+            </a:pPr>
+            <a:r>
+              <a:rPr lang="en-US" sz="1350" dirty="0">
+                <a:solidFill>
+                  <a:srgbClr val="1A1A1A"/>
+                </a:solidFill>
+                <a:latin typeface="Times New Roman" pitchFamily="34" charset="0"/>
+                <a:ea typeface="Times New Roman" pitchFamily="34" charset="-122"/>
+                <a:cs typeface="Times New Roman" pitchFamily="34" charset="-120"/>
+              </a:rPr>
+              <a:t xml:space="preserve">No cambió ninguna imagen fusionada. Cambió el conjunto de métricas. Todo orden agregado debe reportarse junto a la composición que lo produce.</a:t>
+            </a:r>
+            <a:endParaRPr lang="en-US" sz="1350" dirty="0"/>
+          </a:p>
+          <a:p>
+            <a:pPr marL="177800" indent="-177800">
+              <a:spcAft>
+                <a:spcPts val="1100"/>
+              </a:spcAft>
+              <a:buSzPct val="100000"/>
+              <a:buChar char="•"/>
+            </a:pPr>
+            <a:r>
+              <a:rPr lang="en-US" sz="1350" dirty="0">
+                <a:solidFill>
+                  <a:srgbClr val="1A1A1A"/>
+                </a:solidFill>
+                <a:latin typeface="Times New Roman" pitchFamily="34" charset="0"/>
+                <a:ea typeface="Times New Roman" pitchFamily="34" charset="-122"/>
+                <a:cs typeface="Times New Roman" pitchFamily="34" charset="-120"/>
+              </a:rPr>
+              <a:t xml:space="preserve">Ajuste simétrico: el protocolo concede a la propuesta un paso de ajuste que no concede a los comparativos. Dándoselo también a ellos, ninguna de las cinco configuraciones de referencia la alcanza (RP 3,772 · LP 4,028 · DWT 4,167 · DTCWT 4,211 · CVT 4,717, frente a 3,583).</a:t>
+            </a:r>
+            <a:endParaRPr lang="en-US" sz="1350" dirty="0"/>
+          </a:p>
+          <a:p>
+            <a:pPr marL="177800" indent="-177800">
+              <a:spcAft>
+                <a:spcPts val="1100"/>
+              </a:spcAft>
+              <a:buSzPct val="100000"/>
+              <a:buChar char="•"/>
+            </a:pPr>
+            <a:r>
+              <a:rPr lang="en-US" sz="1350" dirty="0">
+                <a:solidFill>
+                  <a:srgbClr val="1A1A1A"/>
+                </a:solidFill>
+                <a:latin typeface="Times New Roman" pitchFamily="34" charset="0"/>
+                <a:ea typeface="Times New Roman" pitchFamily="34" charset="-122"/>
+                <a:cs typeface="Times New Roman" pitchFamily="34" charset="-120"/>
+              </a:rPr>
+              <a:t xml:space="preserve">El Top-Hat clásico la supera por 0,061 (3,522), pero con m = 1, más del triple del peso. Ejecutándolo con (r, m) = (25; 0,30) —los mismos valores de la propuesta— la propuesta conserva el primer lugar: 3,528 frente a 3,694. La ventaja del clásico proviene de su peso, no del operador.</a:t>
+            </a:r>
+            <a:endParaRPr lang="en-US" sz="1350" dirty="0"/>
+          </a:p>
+          <a:p>
+            <a:pPr marL="177800" indent="-177800">
+              <a:spcAft>
+                <a:spcPts val="1100"/>
+              </a:spcAft>
+              <a:buSzPct val="100000"/>
+              <a:buChar char="•"/>
+            </a:pPr>
+            <a:r>
+              <a:rPr lang="en-US" sz="1350" dirty="0">
+                <a:solidFill>
+                  <a:srgbClr val="1A1A1A"/>
+                </a:solidFill>
+                <a:latin typeface="Times New Roman" pitchFamily="34" charset="0"/>
+                <a:ea typeface="Times New Roman" pitchFamily="34" charset="-122"/>
+                <a:cs typeface="Times New Roman" pitchFamily="34" charset="-120"/>
+              </a:rPr>
+              <a:t xml:space="preserve">El primer lugar es un resultado sólido DENTRO del criterio del trabajo de referencia, no una propiedad independiente del criterio.</a:t>
+            </a:r>
+            <a:endParaRPr lang="en-US" sz="1350" dirty="0"/>
+          </a:p>
+        </p:txBody>
+      </p:sp>
+    </p:spTree>
+  </p:cSld>
+  <p:clrMapOvr>
+    <a:masterClrMapping/>
+  </p:clrMapOvr>
+</p:sld>
+</file>
+
+<file path=ppt/slides/slide16.xml><?xml version="1.0" encoding="utf-8"?>
+<p:sld xmlns:a="http://schemas.openxmlformats.org/drawingml/2006/main" xmlns:r="http://schemas.openxmlformats.org/officeDocument/2006/relationships" xmlns:p="http://schemas.openxmlformats.org/presentationml/2006/main">
+  <p:cSld name="Slide 17">
+    <p:bg>
+      <p:bgPr>
+        <a:solidFill>
+          <a:srgbClr val="FFFFFF"/>
+        </a:solidFill>
+      </p:bgPr>
+    </p:bg>
+    <p:spTree>
+      <p:nvGrpSpPr>
+        <p:cNvPr id="1" name=""/>
+        <p:cNvGrpSpPr/>
+        <p:nvPr/>
+      </p:nvGrpSpPr>
+      <p:grpSpPr>
+        <a:xfrm>
+          <a:off x="0" y="0"/>
+          <a:ext cx="0" cy="0"/>
+          <a:chOff x="0" y="0"/>
+          <a:chExt cx="0" cy="0"/>
+        </a:xfrm>
+      </p:grpSpPr>
+      <p:sp>
+        <p:nvSpPr>
+          <p:cNvPr id="2" name="Text 0"/>
+          <p:cNvSpPr/>
+          <p:nvPr/>
+        </p:nvSpPr>
+        <p:spPr>
+          <a:xfrm>
+            <a:off x="457200" y="256032"/>
+            <a:ext cx="8229600" cy="502920"/>
+          </a:xfrm>
+          <a:prstGeom prst="rect">
+            <a:avLst/>
+          </a:prstGeom>
+          <a:noFill/>
+          <a:ln/>
+        </p:spPr>
+        <p:txBody>
+          <a:bodyPr wrap="square" lIns="0" tIns="0" rIns="0" bIns="0" rtlCol="0" anchor="ctr"/>
+          <a:lstStyle/>
+          <a:p>
+            <a:pPr indent="0" marL="0">
+              <a:buNone/>
+            </a:pPr>
+            <a:r>
+              <a:rPr lang="en-US" sz="2300" b="1" dirty="0">
+                <a:solidFill>
+                  <a:srgbClr val="1A1A1A"/>
+                </a:solidFill>
+                <a:latin typeface="Times New Roman" pitchFamily="34" charset="0"/>
+                <a:ea typeface="Times New Roman" pitchFamily="34" charset="-122"/>
+                <a:cs typeface="Times New Roman" pitchFamily="34" charset="-120"/>
+              </a:rPr>
+              <a:t xml:space="preserve">Auditoría III — ¿cuánto aporta el banco? Ablación con (r, m) igualados (H7)</a:t>
+            </a:r>
+            <a:endParaRPr lang="en-US" sz="2300" dirty="0"/>
+          </a:p>
+        </p:txBody>
+      </p:sp>
+      <p:sp>
+        <p:nvSpPr>
+          <p:cNvPr id="3" name="Text 1"/>
+          <p:cNvSpPr/>
+          <p:nvPr/>
+        </p:nvSpPr>
+        <p:spPr>
+          <a:xfrm>
+            <a:off x="8229600" y="4828032"/>
+            <a:ext cx="685800" cy="274320"/>
+          </a:xfrm>
+          <a:prstGeom prst="rect">
+            <a:avLst/>
+          </a:prstGeom>
+          <a:noFill/>
+          <a:ln/>
+        </p:spPr>
+        <p:txBody>
+          <a:bodyPr wrap="square" lIns="0" tIns="0" rIns="0" bIns="0" rtlCol="0" anchor="ctr"/>
+          <a:lstStyle/>
+          <a:p>
+            <a:pPr algn="r" indent="0" marL="0">
+              <a:buNone/>
+            </a:pPr>
+            <a:r>
+              <a:rPr lang="en-US" sz="900" dirty="0">
+                <a:solidFill>
+                  <a:srgbClr val="666666"/>
+                </a:solidFill>
+                <a:latin typeface="Times New Roman" pitchFamily="34" charset="0"/>
+                <a:ea typeface="Times New Roman" pitchFamily="34" charset="-122"/>
+                <a:cs typeface="Times New Roman" pitchFamily="34" charset="-120"/>
+              </a:rPr>
+              <a:t xml:space="preserve">16 / 22</a:t>
+            </a:r>
+            <a:endParaRPr lang="en-US" sz="900" dirty="0"/>
+          </a:p>
+        </p:txBody>
+      </p:sp>
+      <p:sp>
+        <p:nvSpPr>
+          <p:cNvPr id="4" name="Text 2"/>
+          <p:cNvSpPr/>
+          <p:nvPr/>
+        </p:nvSpPr>
+        <p:spPr>
+          <a:xfrm>
+            <a:off x="457200" y="914400"/>
+            <a:ext cx="8229600" cy="3931920"/>
+          </a:xfrm>
+          <a:prstGeom prst="rect">
+            <a:avLst/>
+          </a:prstGeom>
+          <a:noFill/>
+          <a:ln/>
+        </p:spPr>
+        <p:txBody>
+          <a:bodyPr wrap="square" lIns="0" tIns="0" rIns="0" bIns="0" rtlCol="0" anchor="t"/>
+          <a:lstStyle/>
+          <a:p>
+            <a:pPr marL="177800" indent="-177800">
+              <a:spcAft>
+                <a:spcPts val="1100"/>
+              </a:spcAft>
+              <a:buSzPct val="100000"/>
+              <a:buChar char="•"/>
+            </a:pPr>
+            <a:r>
+              <a:rPr lang="en-US" sz="1350" dirty="0">
+                <a:solidFill>
+                  <a:srgbClr val="1A1A1A"/>
+                </a:solidFill>
+                <a:latin typeface="Times New Roman" pitchFamily="34" charset="0"/>
+                <a:ea typeface="Times New Roman" pitchFamily="34" charset="-122"/>
+                <a:cs typeface="Times New Roman" pitchFamily="34" charset="-120"/>
+              </a:rPr>
+              <a:t xml:space="preserve">La comparación con el Top-Hat clásico no aísla el banco: aquel usa r = 5 y m = 1, de modo que la diferencia observada mezcla banco, radio y peso. Para aislarlo se fijaron r = 25 y m = 0,30 en seis brazos que comparten todo salvo la forma de combinar las respuestas morfológicas.</a:t>
+            </a:r>
+            <a:endParaRPr lang="en-US" sz="1350" dirty="0"/>
+          </a:p>
+          <a:p>
+            <a:pPr marL="177800" indent="-177800">
+              <a:spcAft>
+                <a:spcPts val="1100"/>
+              </a:spcAft>
+              <a:buSzPct val="100000"/>
+              <a:buChar char="•"/>
+            </a:pPr>
+            <a:r>
+              <a:rPr lang="en-US" sz="1350" dirty="0">
+                <a:solidFill>
+                  <a:srgbClr val="1A1A1A"/>
+                </a:solidFill>
+                <a:latin typeface="Times New Roman" pitchFamily="34" charset="0"/>
+                <a:ea typeface="Times New Roman" pitchFamily="34" charset="-122"/>
+                <a:cs typeface="Times New Roman" pitchFamily="34" charset="-120"/>
+              </a:rPr>
+              <a:t xml:space="preserve">Con las nueve métricas la suma de ramas —la que adopta la propuesta— es la mejor de los seis (3,222), por delante del máximo (3,311) y del disco único (3,367); el promedio queda en 3,533 y las líneas solas y la imagen base empatan últimas (3,783).</a:t>
+            </a:r>
+            <a:endParaRPr lang="en-US" sz="1350" dirty="0"/>
+          </a:p>
+          <a:p>
+            <a:pPr marL="177800" indent="-177800">
+              <a:spcAft>
+                <a:spcPts val="1100"/>
+              </a:spcAft>
+              <a:buSzPct val="100000"/>
+              <a:buChar char="•"/>
+            </a:pPr>
+            <a:r>
+              <a:rPr lang="en-US" sz="1350" dirty="0">
+                <a:solidFill>
+                  <a:srgbClr val="1A1A1A"/>
+                </a:solidFill>
+                <a:latin typeface="Times New Roman" pitchFamily="34" charset="0"/>
+                <a:ea typeface="Times New Roman" pitchFamily="34" charset="-122"/>
+                <a:cs typeface="Times New Roman" pitchFamily="34" charset="-120"/>
+              </a:rPr>
+              <a:t xml:space="preserve">Lectura prudente: al retirar FE —que duplica la entropía, justo donde la suma obtiene su mayor ventaja— los seis brazos se comprimen en una banda de 3,444 a 3,631 y la suma baja al 4.º lugar (3,500).</a:t>
+            </a:r>
+            <a:endParaRPr lang="en-US" sz="1350" dirty="0"/>
+          </a:p>
+          <a:p>
+            <a:pPr marL="177800" indent="-177800">
+              <a:spcAft>
+                <a:spcPts val="1100"/>
+              </a:spcAft>
+              <a:buSzPct val="100000"/>
+              <a:buChar char="•"/>
+            </a:pPr>
+            <a:r>
+              <a:rPr lang="en-US" sz="1350" dirty="0">
+                <a:solidFill>
+                  <a:srgbClr val="1A1A1A"/>
+                </a:solidFill>
+                <a:latin typeface="Times New Roman" pitchFamily="34" charset="0"/>
+                <a:ea typeface="Times New Roman" pitchFamily="34" charset="-122"/>
+                <a:cs typeface="Times New Roman" pitchFamily="34" charset="-120"/>
+              </a:rPr>
+              <a:t xml:space="preserve">Con las diecisiete métricas el orden se invierte: máximo 2,932 · disco 3,153 · promedio 3,179 · suma 3,621 · líneas 3,756 · base 4,359.</a:t>
+            </a:r>
+            <a:endParaRPr lang="en-US" sz="1350" dirty="0"/>
+          </a:p>
+          <a:p>
+            <a:pPr marL="177800" indent="-177800">
+              <a:spcAft>
+                <a:spcPts val="1100"/>
+              </a:spcAft>
+              <a:buSzPct val="100000"/>
+              <a:buChar char="•"/>
+            </a:pPr>
+            <a:r>
+              <a:rPr lang="en-US" sz="1350" dirty="0">
+                <a:solidFill>
+                  <a:srgbClr val="1A1A1A"/>
+                </a:solidFill>
+                <a:latin typeface="Times New Roman" pitchFamily="34" charset="0"/>
+                <a:ea typeface="Times New Roman" pitchFamily="34" charset="-122"/>
+                <a:cs typeface="Times New Roman" pitchFamily="34" charset="-120"/>
+              </a:rPr>
+              <a:t xml:space="preserve">La suma duplica la tasa de artefactos del disco único (Nabf 0,374 frente a 0,185): la novedad desplaza el punto de operación hacia el realce, no lo mejora de forma uniforme.</a:t>
+            </a:r>
+            <a:endParaRPr lang="en-US" sz="1350" dirty="0"/>
+          </a:p>
+          <a:p>
+            <a:pPr marL="177800" indent="-177800">
+              <a:spcAft>
+                <a:spcPts val="1100"/>
+              </a:spcAft>
+              <a:buSzPct val="100000"/>
+              <a:buChar char="•"/>
+            </a:pPr>
+            <a:r>
+              <a:rPr lang="en-US" sz="1350" dirty="0">
+                <a:solidFill>
+                  <a:srgbClr val="1A1A1A"/>
+                </a:solidFill>
+                <a:latin typeface="Times New Roman" pitchFamily="34" charset="0"/>
+                <a:ea typeface="Times New Roman" pitchFamily="34" charset="-122"/>
+                <a:cs typeface="Times New Roman" pitchFamily="34" charset="-120"/>
+              </a:rPr>
+              <a:t xml:space="preserve">Lo que queda firme en todas las composiciones: la imagen base sin operador es la peor de los seis brazos con las diecisiete métricas (4,359). El mérito no proviene de la base. Pero la dirección del aporte depende del criterio, exactamente como enuncia H2. Y r = 1 no desactiva el banco: los cinco elementos siguen activos en una vecindad de 3 × 3.</a:t>
+            </a:r>
+            <a:endParaRPr lang="en-US" sz="1350" dirty="0"/>
+          </a:p>
+        </p:txBody>
+      </p:sp>
+    </p:spTree>
+  </p:cSld>
+  <p:clrMapOvr>
+    <a:masterClrMapping/>
+  </p:clrMapOvr>
+</p:sld>
+</file>
+
+<file path=ppt/slides/slide17.xml><?xml version="1.0" encoding="utf-8"?>
 <p:sld xmlns:a="http://schemas.openxmlformats.org/drawingml/2006/main" xmlns:r="http://schemas.openxmlformats.org/officeDocument/2006/relationships" xmlns:p="http://schemas.openxmlformats.org/presentationml/2006/main">
   <p:cSld name="Slide 13">
     <p:bg>
@@ -6824,7 +7906,7 @@
 </p:sld>
 </file>
 
-<file path=ppt/slides/slide14.xml><?xml version="1.0" encoding="utf-8"?>
+<file path=ppt/slides/slide18.xml><?xml version="1.0" encoding="utf-8"?>
 <p:sld xmlns:a="http://schemas.openxmlformats.org/drawingml/2006/main" xmlns:r="http://schemas.openxmlformats.org/officeDocument/2006/relationships" xmlns:p="http://schemas.openxmlformats.org/presentationml/2006/main">
   <p:cSld name="Slide 14">
     <p:bg>
@@ -6942,8 +8024,8 @@
         </p:blipFill>
         <p:spPr>
           <a:xfrm>
-            <a:off x="640080" y="868680"/>
-            <a:ext cx="7863840" cy="2944368"/>
+            <a:off x="1366630" y="868680"/>
+            <a:ext cx="6410739" cy="2400300"/>
           </a:xfrm>
           <a:prstGeom prst="rect">
             <a:avLst/>
@@ -6958,8 +8040,8 @@
         </p:nvSpPr>
         <p:spPr>
           <a:xfrm>
-            <a:off x="457200" y="3913632"/>
-            <a:ext cx="8229600" cy="1143000"/>
+            <a:off x="457200" y="3369600"/>
+            <a:ext cx="7772400" cy="1670000"/>
           </a:xfrm>
           <a:prstGeom prst="rect">
             <a:avLst/>
@@ -7043,180 +8125,7 @@
 </p:sld>
 </file>
 
-<file path=ppt/slides/slide15.xml><?xml version="1.0" encoding="utf-8"?>
-<p:sld xmlns:a="http://schemas.openxmlformats.org/drawingml/2006/main" xmlns:r="http://schemas.openxmlformats.org/officeDocument/2006/relationships" xmlns:p="http://schemas.openxmlformats.org/presentationml/2006/main">
-  <p:cSld name="Slide 15">
-    <p:bg>
-      <p:bgPr>
-        <a:solidFill>
-          <a:srgbClr val="FFFFFF"/>
-        </a:solidFill>
-      </p:bgPr>
-    </p:bg>
-    <p:spTree>
-      <p:nvGrpSpPr>
-        <p:cNvPr id="1" name=""/>
-        <p:cNvGrpSpPr/>
-        <p:nvPr/>
-      </p:nvGrpSpPr>
-      <p:grpSpPr>
-        <a:xfrm>
-          <a:off x="0" y="0"/>
-          <a:ext cx="0" cy="0"/>
-          <a:chOff x="0" y="0"/>
-          <a:chExt cx="0" cy="0"/>
-        </a:xfrm>
-      </p:grpSpPr>
-      <p:sp>
-        <p:nvSpPr>
-          <p:cNvPr id="2" name="Text 0"/>
-          <p:cNvSpPr/>
-          <p:nvPr/>
-        </p:nvSpPr>
-        <p:spPr>
-          <a:xfrm>
-            <a:off x="457200" y="256032"/>
-            <a:ext cx="8229600" cy="502920"/>
-          </a:xfrm>
-          <a:prstGeom prst="rect">
-            <a:avLst/>
-          </a:prstGeom>
-          <a:noFill/>
-          <a:ln/>
-        </p:spPr>
-        <p:txBody>
-          <a:bodyPr wrap="square" lIns="0" tIns="0" rIns="0" bIns="0" rtlCol="0" anchor="ctr"/>
-          <a:lstStyle/>
-          <a:p>
-            <a:pPr indent="0" marL="0">
-              <a:buNone/>
-            </a:pPr>
-            <a:r>
-              <a:rPr lang="en-US" sz="2300" b="1" dirty="0">
-                <a:solidFill>
-                  <a:srgbClr val="1A1A1A"/>
-                </a:solidFill>
-                <a:latin typeface="Times New Roman" pitchFamily="34" charset="0"/>
-                <a:ea typeface="Times New Roman" pitchFamily="34" charset="-122"/>
-                <a:cs typeface="Times New Roman" pitchFamily="34" charset="-120"/>
-              </a:rPr>
-              <a:t>La prueba visual: ambas clases en una sola imagen</a:t>
-            </a:r>
-            <a:endParaRPr lang="en-US" sz="2300" dirty="0"/>
-          </a:p>
-        </p:txBody>
-      </p:sp>
-      <p:sp>
-        <p:nvSpPr>
-          <p:cNvPr id="3" name="Text 1"/>
-          <p:cNvSpPr/>
-          <p:nvPr/>
-        </p:nvSpPr>
-        <p:spPr>
-          <a:xfrm>
-            <a:off x="8229600" y="4828032"/>
-            <a:ext cx="685800" cy="274320"/>
-          </a:xfrm>
-          <a:prstGeom prst="rect">
-            <a:avLst/>
-          </a:prstGeom>
-          <a:noFill/>
-          <a:ln/>
-        </p:spPr>
-        <p:txBody>
-          <a:bodyPr wrap="square" lIns="0" tIns="0" rIns="0" bIns="0" rtlCol="0" anchor="ctr"/>
-          <a:lstStyle/>
-          <a:p>
-            <a:pPr algn="r" indent="0" marL="0">
-              <a:buNone/>
-            </a:pPr>
-            <a:r>
-              <a:rPr lang="en-US" sz="900" dirty="0">
-                <a:solidFill>
-                  <a:srgbClr val="666666"/>
-                </a:solidFill>
-                <a:latin typeface="Times New Roman" pitchFamily="34" charset="0"/>
-                <a:ea typeface="Times New Roman" pitchFamily="34" charset="-122"/>
-                <a:cs typeface="Times New Roman" pitchFamily="34" charset="-120"/>
-              </a:rPr>
-              <a:t xml:space="preserve">RESERVA</a:t>
-            </a:r>
-            <a:endParaRPr lang="en-US" sz="900" dirty="0"/>
-          </a:p>
-        </p:txBody>
-      </p:sp>
-      <p:pic>
-        <p:nvPicPr>
-          <p:cNvPr id="4" name="Image 0" descr="C:/Users/Usuario/Documents/unv/mastertesis/tesis_mciencias_datos/docs/figures/fig_m3fd_detecciones.png">    </p:cNvPr>
-          <p:cNvPicPr>
-            <a:picLocks noChangeAspect="1"/>
-          </p:cNvPicPr>
-          <p:nvPr/>
-        </p:nvPicPr>
-        <p:blipFill>
-          <a:blip r:embed="rId1"/>
-          <a:stretch>
-            <a:fillRect/>
-          </a:stretch>
-        </p:blipFill>
-        <p:spPr>
-          <a:xfrm>
-            <a:off x="1417320" y="822960"/>
-            <a:ext cx="6309360" cy="4069080"/>
-          </a:xfrm>
-          <a:prstGeom prst="rect">
-            <a:avLst/>
-          </a:prstGeom>
-        </p:spPr>
-      </p:pic>
-      <p:sp>
-        <p:nvSpPr>
-          <p:cNvPr id="5" name="Text 2"/>
-          <p:cNvSpPr/>
-          <p:nvPr/>
-        </p:nvSpPr>
-        <p:spPr>
-          <a:xfrm>
-            <a:off x="457200" y="4864608"/>
-            <a:ext cx="7680960" cy="256032"/>
-          </a:xfrm>
-          <a:prstGeom prst="rect">
-            <a:avLst/>
-          </a:prstGeom>
-          <a:noFill/>
-          <a:ln/>
-        </p:spPr>
-        <p:txBody>
-          <a:bodyPr wrap="square" lIns="0" tIns="0" rIns="0" bIns="0" rtlCol="0" anchor="ctr"/>
-          <a:lstStyle/>
-          <a:p>
-            <a:pPr indent="0" marL="0">
-              <a:buNone/>
-            </a:pPr>
-            <a:r>
-              <a:rPr lang="en-US" sz="1050" i="1" dirty="0">
-                <a:solidFill>
-                  <a:srgbClr val="666666"/>
-                </a:solidFill>
-                <a:latin typeface="Times New Roman" pitchFamily="34" charset="0"/>
-                <a:ea typeface="Times New Roman" pitchFamily="34" charset="-122"/>
-                <a:cs typeface="Times New Roman" pitchFamily="34" charset="-120"/>
-              </a:rPr>
-              <a:t xml:space="preserve">Arriba (escena 00389): la fusión detecta 11 personas, frente a 3 del visible y 10 del infrarrojo. Abajo (escena 00231): conserva 7 luces y 8 personas, frente a 5 luces del visible y una sola del infrarrojo. El infrarrojo no es ciego a las luces; lo que la fusión aporta es sostener las dos clases a la vez.</a:t>
-            </a:r>
-            <a:endParaRPr lang="en-US" sz="1050" dirty="0"/>
-          </a:p>
-        </p:txBody>
-      </p:sp>
-    </p:spTree>
-  </p:cSld>
-  <p:clrMapOvr>
-    <a:masterClrMapping/>
-  </p:clrMapOvr>
-</p:sld>
-</file>
-
-<file path=ppt/slides/slide16.xml><?xml version="1.0" encoding="utf-8"?>
+<file path=ppt/slides/slide19.xml><?xml version="1.0" encoding="utf-8"?>
 <p:sld xmlns:a="http://schemas.openxmlformats.org/drawingml/2006/main" xmlns:r="http://schemas.openxmlformats.org/officeDocument/2006/relationships" xmlns:p="http://schemas.openxmlformats.org/presentationml/2006/main">
   <p:cSld name="Slide 16">
     <p:bg>
@@ -7429,7 +8338,7 @@
                 <a:ea typeface="Times New Roman" pitchFamily="34" charset="-122"/>
                 <a:cs typeface="Times New Roman" pitchFamily="34" charset="-120"/>
               </a:rPr>
-              <a:t xml:space="preserve">El operador no mejora la fusión de manera uniforme: desplaza su punto de operación. En actividad espacial, 24 de 25 contrastes son favorables y ninguno adverso; en fidelidad a las fuentes, 17 de 20 son adversos (Wilcoxon–Holm).</a:t>
+              <a:t xml:space="preserve">El operador no mejora la fusión de manera uniforme: desplaza su punto de operación. En actividad espacial, 24 de 25 contrastes son favorables y significativos y ninguno es adverso con significancia; en fidelidad a las fuentes, 17 de 20 son adversos y significativos (Wilcoxon–Holm).</a:t>
             </a:r>
             <a:endParaRPr lang="en-US" sz="1250" dirty="0"/>
           </a:p>
@@ -7618,13 +8527,13 @@
             <a:r>
               <a:rPr lang="en-US" sz="1300" b="1" dirty="0">
                 <a:solidFill>
-                  <a:srgbClr val="8B1A1A"/>
-                </a:solidFill>
-                <a:latin typeface="Times New Roman" pitchFamily="34" charset="0"/>
-                <a:ea typeface="Times New Roman" pitchFamily="34" charset="-122"/>
-                <a:cs typeface="Times New Roman" pitchFamily="34" charset="-120"/>
-              </a:rPr>
-              <a:t xml:space="preserve">RECHAZADA</a:t>
+                  <a:srgbClr val="1F5C2E"/>
+                </a:solidFill>
+                <a:latin typeface="Times New Roman" pitchFamily="34" charset="0"/>
+                <a:ea typeface="Times New Roman" pitchFamily="34" charset="-122"/>
+                <a:cs typeface="Times New Roman" pitchFamily="34" charset="-120"/>
+              </a:rPr>
+              <a:t xml:space="preserve">SE SOSTIENE</a:t>
             </a:r>
             <a:endParaRPr lang="en-US" sz="1300" dirty="0"/>
           </a:p>
@@ -7663,671 +8572,9 @@
                 <a:ea typeface="Times New Roman" pitchFamily="34" charset="-122"/>
                 <a:cs typeface="Times New Roman" pitchFamily="34" charset="-120"/>
               </a:rPr>
-              <a:t xml:space="preserve">RECHAZADA con muestra suficiente. Ninguna fusión supera al infrarrojo solo en LLVIP, el orden de calidad no predice el mAP (ρ = +0,214; p = 0,645) y en el conteo por escena de M3FD la propuesta queda por debajo del visible (50,0 % frente a 53,0 %; McNemar p = 0,2100). La mejor calidad de imagen no se traslada a la tarea.</a:t>
+              <a:t xml:space="preserve">SE SOSTIENE con muestra suficiente: lo que queda rechazado es la traslación de la calidad a la tarea, no la hipótesis. Ninguna fusión supera al infrarrojo solo en LLVIP (0,971 frente a 0,952 de la mejor fusión), el orden de calidad no predice el mAP (ρ = +0,214; p = 0,645) y en el conteo por escena de M3FD la propuesta queda por debajo del visible (50,0 % frente a 53,0 %; McNemar exacto p = 0,2100; n = 232).</a:t>
             </a:r>
             <a:endParaRPr lang="en-US" sz="1250" dirty="0"/>
-          </a:p>
-        </p:txBody>
-      </p:sp>
-    </p:spTree>
-  </p:cSld>
-  <p:clrMapOvr>
-    <a:masterClrMapping/>
-  </p:clrMapOvr>
-</p:sld>
-</file>
-
-<file path=ppt/slides/slide17.xml><?xml version="1.0" encoding="utf-8"?>
-<p:sld xmlns:a="http://schemas.openxmlformats.org/drawingml/2006/main" xmlns:r="http://schemas.openxmlformats.org/officeDocument/2006/relationships" xmlns:p="http://schemas.openxmlformats.org/presentationml/2006/main">
-  <p:cSld name="Slide 17">
-    <p:bg>
-      <p:bgPr>
-        <a:solidFill>
-          <a:srgbClr val="FFFFFF"/>
-        </a:solidFill>
-      </p:bgPr>
-    </p:bg>
-    <p:spTree>
-      <p:nvGrpSpPr>
-        <p:cNvPr id="1" name=""/>
-        <p:cNvGrpSpPr/>
-        <p:nvPr/>
-      </p:nvGrpSpPr>
-      <p:grpSpPr>
-        <a:xfrm>
-          <a:off x="0" y="0"/>
-          <a:ext cx="0" cy="0"/>
-          <a:chOff x="0" y="0"/>
-          <a:chExt cx="0" cy="0"/>
-        </a:xfrm>
-      </p:grpSpPr>
-      <p:sp>
-        <p:nvSpPr>
-          <p:cNvPr id="2" name="Text 0"/>
-          <p:cNvSpPr/>
-          <p:nvPr/>
-        </p:nvSpPr>
-        <p:spPr>
-          <a:xfrm>
-            <a:off x="457200" y="256032"/>
-            <a:ext cx="8229600" cy="502920"/>
-          </a:xfrm>
-          <a:prstGeom prst="rect">
-            <a:avLst/>
-          </a:prstGeom>
-          <a:noFill/>
-          <a:ln/>
-        </p:spPr>
-        <p:txBody>
-          <a:bodyPr wrap="square" lIns="0" tIns="0" rIns="0" bIns="0" rtlCol="0" anchor="ctr"/>
-          <a:lstStyle/>
-          <a:p>
-            <a:pPr indent="0" marL="0">
-              <a:buNone/>
-            </a:pPr>
-            <a:r>
-              <a:rPr lang="en-US" sz="2300" b="1" dirty="0">
-                <a:solidFill>
-                  <a:srgbClr val="1A1A1A"/>
-                </a:solidFill>
-                <a:latin typeface="Times New Roman" pitchFamily="34" charset="0"/>
-                <a:ea typeface="Times New Roman" pitchFamily="34" charset="-122"/>
-                <a:cs typeface="Times New Roman" pitchFamily="34" charset="-120"/>
-              </a:rPr>
-              <a:t xml:space="preserve">Conclusiones</a:t>
-            </a:r>
-            <a:endParaRPr lang="en-US" sz="2300" dirty="0"/>
-          </a:p>
-        </p:txBody>
-      </p:sp>
-      <p:sp>
-        <p:nvSpPr>
-          <p:cNvPr id="3" name="Text 1"/>
-          <p:cNvSpPr/>
-          <p:nvPr/>
-        </p:nvSpPr>
-        <p:spPr>
-          <a:xfrm>
-            <a:off x="8229600" y="4828032"/>
-            <a:ext cx="685800" cy="274320"/>
-          </a:xfrm>
-          <a:prstGeom prst="rect">
-            <a:avLst/>
-          </a:prstGeom>
-          <a:noFill/>
-          <a:ln/>
-        </p:spPr>
-        <p:txBody>
-          <a:bodyPr wrap="square" lIns="0" tIns="0" rIns="0" bIns="0" rtlCol="0" anchor="ctr"/>
-          <a:lstStyle/>
-          <a:p>
-            <a:pPr algn="r" indent="0" marL="0">
-              <a:buNone/>
-            </a:pPr>
-            <a:r>
-              <a:rPr lang="en-US" sz="900" dirty="0">
-                <a:solidFill>
-                  <a:srgbClr val="666666"/>
-                </a:solidFill>
-                <a:latin typeface="Times New Roman" pitchFamily="34" charset="0"/>
-                <a:ea typeface="Times New Roman" pitchFamily="34" charset="-122"/>
-                <a:cs typeface="Times New Roman" pitchFamily="34" charset="-120"/>
-              </a:rPr>
-              <a:t xml:space="preserve">20 / 22</a:t>
-            </a:r>
-            <a:endParaRPr lang="en-US" sz="900" dirty="0"/>
-          </a:p>
-        </p:txBody>
-      </p:sp>
-      <p:sp>
-        <p:nvSpPr>
-          <p:cNvPr id="4" name="Text 2"/>
-          <p:cNvSpPr/>
-          <p:nvPr/>
-        </p:nvSpPr>
-        <p:spPr>
-          <a:xfrm>
-            <a:off x="457200" y="914400"/>
-            <a:ext cx="8229600" cy="3931920"/>
-          </a:xfrm>
-          <a:prstGeom prst="rect">
-            <a:avLst/>
-          </a:prstGeom>
-          <a:noFill/>
-          <a:ln/>
-        </p:spPr>
-        <p:txBody>
-          <a:bodyPr wrap="square" lIns="0" tIns="0" rIns="0" bIns="0" rtlCol="0" anchor="t"/>
-          <a:lstStyle/>
-          <a:p>
-            <a:pPr marL="177800" indent="-177800">
-              <a:spcAft>
-                <a:spcPts val="1100"/>
-              </a:spcAft>
-              <a:buSzPct val="100000"/>
-              <a:buChar char="•"/>
-            </a:pPr>
-            <a:r>
-              <a:rPr lang="en-US" sz="1350" dirty="0">
-                <a:solidFill>
-                  <a:srgbClr val="1A1A1A"/>
-                </a:solidFill>
-                <a:latin typeface="Times New Roman" pitchFamily="34" charset="0"/>
-                <a:ea typeface="Times New Roman" pitchFamily="34" charset="-122"/>
-                <a:cs typeface="Times New Roman" pitchFamily="34" charset="-120"/>
-              </a:rPr>
-              <a:t>Se formuló e implementó de forma reproducible un operador Top-Hat de una sola escala con banco de disco + líneas orientadas y suma de ramas.</a:t>
-            </a:r>
-            <a:endParaRPr lang="en-US" sz="1350" dirty="0"/>
-          </a:p>
-          <a:p>
-            <a:pPr marL="177800" indent="-177800">
-              <a:spcAft>
-                <a:spcPts val="1100"/>
-              </a:spcAft>
-              <a:buSzPct val="100000"/>
-              <a:buChar char="•"/>
-            </a:pPr>
-            <a:r>
-              <a:rPr lang="en-US" sz="1350" dirty="0">
-                <a:solidFill>
-                  <a:srgbClr val="1A1A1A"/>
-                </a:solidFill>
-                <a:latin typeface="Times New Roman" pitchFamily="34" charset="0"/>
-                <a:ea typeface="Times New Roman" pitchFamily="34" charset="-122"/>
-                <a:cs typeface="Times New Roman" pitchFamily="34" charset="-120"/>
-              </a:rPr>
-              <a:t xml:space="preserve">El barrido de 25 configuraciones con la aptitud y el rango publicados converge a m* = 0,30 en todas ellas, el piso del rango; el argmax del radio es r = 1 y se adopta r = 25 por el criterio de evaluación, no por la optimización.</a:t>
-            </a:r>
-            <a:endParaRPr lang="en-US" sz="1350" dirty="0"/>
-          </a:p>
-          <a:p>
-            <a:pPr marL="177800" indent="-177800">
-              <a:spcAft>
-                <a:spcPts val="1100"/>
-              </a:spcAft>
-              <a:buSzPct val="100000"/>
-              <a:buChar char="•"/>
-            </a:pPr>
-            <a:r>
-              <a:rPr lang="en-US" sz="1350" dirty="0">
-                <a:solidFill>
-                  <a:srgbClr val="1A1A1A"/>
-                </a:solidFill>
-                <a:latin typeface="Times New Roman" pitchFamily="34" charset="0"/>
-                <a:ea typeface="Times New Roman" pitchFamily="34" charset="-122"/>
-                <a:cs typeface="Times New Roman" pitchFamily="34" charset="-120"/>
-              </a:rPr>
-              <a:t xml:space="preserve">La propuesta lidera la entropía (6,986) y la eficiencia de fusión (1,105) del benchmark y encabeza el ranking agregado de rangos medios (3,394), por delante de la pirámide de Laplace (3,911) y del Top-Hat clásico (3,944).</a:t>
-            </a:r>
-            <a:endParaRPr lang="en-US" sz="1350" dirty="0"/>
-          </a:p>
-          <a:p>
-            <a:pPr marL="177800" indent="-177800">
-              <a:spcAft>
-                <a:spcPts val="1100"/>
-              </a:spcAft>
-              <a:buSzPct val="100000"/>
-              <a:buChar char="•"/>
-            </a:pPr>
-            <a:r>
-              <a:rPr lang="en-US" sz="1350" dirty="0">
-                <a:solidFill>
-                  <a:srgbClr val="1A1A1A"/>
-                </a:solidFill>
-                <a:latin typeface="Times New Roman" pitchFamily="34" charset="0"/>
-                <a:ea typeface="Times New Roman" pitchFamily="34" charset="-122"/>
-                <a:cs typeface="Times New Roman" pitchFamily="34" charset="-120"/>
-              </a:rPr>
-              <a:t>Frente a la metodología clásica Top-Hat, el banco de SE y el ajuste automático mejoran seis de las nueve métricas con significancia estadística, incluida la similitud estructural.</a:t>
-            </a:r>
-            <a:endParaRPr lang="en-US" sz="1350" dirty="0"/>
-          </a:p>
-          <a:p>
-            <a:pPr marL="177800" indent="-177800">
-              <a:spcAft>
-                <a:spcPts val="1100"/>
-              </a:spcAft>
-              <a:buSzPct val="100000"/>
-              <a:buChar char="•"/>
-            </a:pPr>
-            <a:r>
-              <a:rPr lang="en-US" sz="1350" dirty="0">
-                <a:solidFill>
-                  <a:srgbClr val="1A1A1A"/>
-                </a:solidFill>
-                <a:latin typeface="Times New Roman" pitchFamily="34" charset="0"/>
-                <a:ea typeface="Times New Roman" pitchFamily="34" charset="-122"/>
-                <a:cs typeface="Times New Roman" pitchFamily="34" charset="-120"/>
-              </a:rPr>
-              <a:t xml:space="preserve">La evaluación orientada a tarea arroja el hallazgo metodológico central: la configuración que maximiza las métricas de actividad no es la que maximiza el desempeño de detección. En M3FD la mejor entrada del par complementario es la Ratio Pyramid (0,622) y la propuesta alcanza 0,564; en el conteo por escena queda por debajo del visible solo. Ambos criterios deben reportarse por separado.</a:t>
-            </a:r>
-            <a:endParaRPr lang="en-US" sz="1350" dirty="0"/>
-          </a:p>
-        </p:txBody>
-      </p:sp>
-    </p:spTree>
-  </p:cSld>
-  <p:clrMapOvr>
-    <a:masterClrMapping/>
-  </p:clrMapOvr>
-</p:sld>
-</file>
-
-<file path=ppt/slides/slide18.xml><?xml version="1.0" encoding="utf-8"?>
-<p:sld xmlns:a="http://schemas.openxmlformats.org/drawingml/2006/main" xmlns:r="http://schemas.openxmlformats.org/officeDocument/2006/relationships" xmlns:p="http://schemas.openxmlformats.org/presentationml/2006/main">
-  <p:cSld name="Slide 18">
-    <p:bg>
-      <p:bgPr>
-        <a:solidFill>
-          <a:srgbClr val="FFFFFF"/>
-        </a:solidFill>
-      </p:bgPr>
-    </p:bg>
-    <p:spTree>
-      <p:nvGrpSpPr>
-        <p:cNvPr id="1" name=""/>
-        <p:cNvGrpSpPr/>
-        <p:nvPr/>
-      </p:nvGrpSpPr>
-      <p:grpSpPr>
-        <a:xfrm>
-          <a:off x="0" y="0"/>
-          <a:ext cx="0" cy="0"/>
-          <a:chOff x="0" y="0"/>
-          <a:chExt cx="0" cy="0"/>
-        </a:xfrm>
-      </p:grpSpPr>
-      <p:sp>
-        <p:nvSpPr>
-          <p:cNvPr id="2" name="Text 0"/>
-          <p:cNvSpPr/>
-          <p:nvPr/>
-        </p:nvSpPr>
-        <p:spPr>
-          <a:xfrm>
-            <a:off x="457200" y="256032"/>
-            <a:ext cx="8229600" cy="502920"/>
-          </a:xfrm>
-          <a:prstGeom prst="rect">
-            <a:avLst/>
-          </a:prstGeom>
-          <a:noFill/>
-          <a:ln/>
-        </p:spPr>
-        <p:txBody>
-          <a:bodyPr wrap="square" lIns="0" tIns="0" rIns="0" bIns="0" rtlCol="0" anchor="ctr"/>
-          <a:lstStyle/>
-          <a:p>
-            <a:pPr indent="0" marL="0">
-              <a:buNone/>
-            </a:pPr>
-            <a:r>
-              <a:rPr lang="en-US" sz="2300" b="1" dirty="0">
-                <a:solidFill>
-                  <a:srgbClr val="1A1A1A"/>
-                </a:solidFill>
-                <a:latin typeface="Times New Roman" pitchFamily="34" charset="0"/>
-                <a:ea typeface="Times New Roman" pitchFamily="34" charset="-122"/>
-                <a:cs typeface="Times New Roman" pitchFamily="34" charset="-120"/>
-              </a:rPr>
-              <a:t>Recomendaciones y trabajo futuro</a:t>
-            </a:r>
-            <a:endParaRPr lang="en-US" sz="2300" dirty="0"/>
-          </a:p>
-        </p:txBody>
-      </p:sp>
-      <p:sp>
-        <p:nvSpPr>
-          <p:cNvPr id="3" name="Text 1"/>
-          <p:cNvSpPr/>
-          <p:nvPr/>
-        </p:nvSpPr>
-        <p:spPr>
-          <a:xfrm>
-            <a:off x="8229600" y="4828032"/>
-            <a:ext cx="685800" cy="274320"/>
-          </a:xfrm>
-          <a:prstGeom prst="rect">
-            <a:avLst/>
-          </a:prstGeom>
-          <a:noFill/>
-          <a:ln/>
-        </p:spPr>
-        <p:txBody>
-          <a:bodyPr wrap="square" lIns="0" tIns="0" rIns="0" bIns="0" rtlCol="0" anchor="ctr"/>
-          <a:lstStyle/>
-          <a:p>
-            <a:pPr algn="r" indent="0" marL="0">
-              <a:buNone/>
-            </a:pPr>
-            <a:r>
-              <a:rPr lang="en-US" sz="900" dirty="0">
-                <a:solidFill>
-                  <a:srgbClr val="666666"/>
-                </a:solidFill>
-                <a:latin typeface="Times New Roman" pitchFamily="34" charset="0"/>
-                <a:ea typeface="Times New Roman" pitchFamily="34" charset="-122"/>
-                <a:cs typeface="Times New Roman" pitchFamily="34" charset="-120"/>
-              </a:rPr>
-              <a:t xml:space="preserve">21 / 22</a:t>
-            </a:r>
-            <a:endParaRPr lang="en-US" sz="900" dirty="0"/>
-          </a:p>
-        </p:txBody>
-      </p:sp>
-      <p:sp>
-        <p:nvSpPr>
-          <p:cNvPr id="4" name="Text 2"/>
-          <p:cNvSpPr/>
-          <p:nvPr/>
-        </p:nvSpPr>
-        <p:spPr>
-          <a:xfrm>
-            <a:off x="457200" y="914400"/>
-            <a:ext cx="8229600" cy="3931920"/>
-          </a:xfrm>
-          <a:prstGeom prst="rect">
-            <a:avLst/>
-          </a:prstGeom>
-          <a:noFill/>
-          <a:ln/>
-        </p:spPr>
-        <p:txBody>
-          <a:bodyPr wrap="square" lIns="0" tIns="0" rIns="0" bIns="0" rtlCol="0" anchor="t"/>
-          <a:lstStyle/>
-          <a:p>
-            <a:pPr marL="177800" indent="-177800">
-              <a:spcAft>
-                <a:spcPts val="1100"/>
-              </a:spcAft>
-              <a:buSzPct val="100000"/>
-              <a:buChar char="•"/>
-            </a:pPr>
-            <a:r>
-              <a:rPr lang="en-US" sz="1350" dirty="0">
-                <a:solidFill>
-                  <a:srgbClr val="1A1A1A"/>
-                </a:solidFill>
-                <a:latin typeface="Times New Roman" pitchFamily="34" charset="0"/>
-                <a:ea typeface="Times New Roman" pitchFamily="34" charset="-122"/>
-                <a:cs typeface="Times New Roman" pitchFamily="34" charset="-120"/>
-              </a:rPr>
-              <a:t>Extender la evaluación de detección a otros detectores y al conjunto completo de LLVIP.</a:t>
-            </a:r>
-            <a:endParaRPr lang="en-US" sz="1350" dirty="0"/>
-          </a:p>
-          <a:p>
-            <a:pPr marL="177800" indent="-177800">
-              <a:spcAft>
-                <a:spcPts val="1100"/>
-              </a:spcAft>
-              <a:buSzPct val="100000"/>
-              <a:buChar char="•"/>
-            </a:pPr>
-            <a:r>
-              <a:rPr lang="en-US" sz="1350" dirty="0">
-                <a:solidFill>
-                  <a:srgbClr val="1A1A1A"/>
-                </a:solidFill>
-                <a:latin typeface="Times New Roman" pitchFamily="34" charset="0"/>
-                <a:ea typeface="Times New Roman" pitchFamily="34" charset="-122"/>
-                <a:cs typeface="Times New Roman" pitchFamily="34" charset="-120"/>
-              </a:rPr>
-              <a:t>Explorar reglas de fusión adaptativas para la rama Black Top-Hat.</a:t>
-            </a:r>
-            <a:endParaRPr lang="en-US" sz="1350" dirty="0"/>
-          </a:p>
-          <a:p>
-            <a:pPr marL="177800" indent="-177800">
-              <a:spcAft>
-                <a:spcPts val="1100"/>
-              </a:spcAft>
-              <a:buSzPct val="100000"/>
-              <a:buChar char="•"/>
-            </a:pPr>
-            <a:r>
-              <a:rPr lang="en-US" sz="1350" dirty="0">
-                <a:solidFill>
-                  <a:srgbClr val="1A1A1A"/>
-                </a:solidFill>
-                <a:latin typeface="Times New Roman" pitchFamily="34" charset="0"/>
-                <a:ea typeface="Times New Roman" pitchFamily="34" charset="-122"/>
-                <a:cs typeface="Times New Roman" pitchFamily="34" charset="-120"/>
-              </a:rPr>
-              <a:t>Complementar las métricas objetivas con una validación perceptual por observadores.</a:t>
-            </a:r>
-            <a:endParaRPr lang="en-US" sz="1350" dirty="0"/>
-          </a:p>
-          <a:p>
-            <a:pPr marL="177800" indent="-177800">
-              <a:spcAft>
-                <a:spcPts val="1100"/>
-              </a:spcAft>
-              <a:buSzPct val="100000"/>
-              <a:buChar char="•"/>
-            </a:pPr>
-            <a:r>
-              <a:rPr lang="en-US" sz="1350" dirty="0">
-                <a:solidFill>
-                  <a:srgbClr val="1A1A1A"/>
-                </a:solidFill>
-                <a:latin typeface="Times New Roman" pitchFamily="34" charset="0"/>
-                <a:ea typeface="Times New Roman" pitchFamily="34" charset="-122"/>
-                <a:cs typeface="Times New Roman" pitchFamily="34" charset="-120"/>
-              </a:rPr>
-              <a:t>Evaluar la transferencia a otros dominios (imágenes médicas, aéreas).</a:t>
-            </a:r>
-            <a:endParaRPr lang="en-US" sz="1350" dirty="0"/>
-          </a:p>
-          <a:p>
-            <a:pPr marL="177800" indent="-177800">
-              <a:spcAft>
-                <a:spcPts val="1100"/>
-              </a:spcAft>
-              <a:buSzPct val="100000"/>
-              <a:buChar char="•"/>
-            </a:pPr>
-            <a:r>
-              <a:rPr lang="en-US" sz="1350" dirty="0">
-                <a:solidFill>
-                  <a:srgbClr val="1A1A1A"/>
-                </a:solidFill>
-                <a:latin typeface="Times New Roman" pitchFamily="34" charset="0"/>
-                <a:ea typeface="Times New Roman" pitchFamily="34" charset="-122"/>
-                <a:cs typeface="Times New Roman" pitchFamily="34" charset="-120"/>
-              </a:rPr>
-              <a:t>Para aplicaciones donde prima la riqueza informativa y el detalle, la propuesta es la opción recomendada; donde prima la fidelidad a las fuentes, los métodos multiescala (DTCWT, CVT) siguen siendo preferibles.</a:t>
-            </a:r>
-            <a:endParaRPr lang="en-US" sz="1350" dirty="0"/>
-          </a:p>
-        </p:txBody>
-      </p:sp>
-    </p:spTree>
-  </p:cSld>
-  <p:clrMapOvr>
-    <a:masterClrMapping/>
-  </p:clrMapOvr>
-</p:sld>
-</file>
-
-<file path=ppt/slides/slide19.xml><?xml version="1.0" encoding="utf-8"?>
-<p:sld xmlns:a="http://schemas.openxmlformats.org/drawingml/2006/main" xmlns:r="http://schemas.openxmlformats.org/officeDocument/2006/relationships" xmlns:p="http://schemas.openxmlformats.org/presentationml/2006/main">
-  <p:cSld name="Slide 19">
-    <p:bg>
-      <p:bgPr>
-        <a:solidFill>
-          <a:srgbClr val="FFFFFF"/>
-        </a:solidFill>
-      </p:bgPr>
-    </p:bg>
-    <p:spTree>
-      <p:nvGrpSpPr>
-        <p:cNvPr id="1" name=""/>
-        <p:cNvGrpSpPr/>
-        <p:nvPr/>
-      </p:nvGrpSpPr>
-      <p:grpSpPr>
-        <a:xfrm>
-          <a:off x="0" y="0"/>
-          <a:ext cx="0" cy="0"/>
-          <a:chOff x="0" y="0"/>
-          <a:chExt cx="0" cy="0"/>
-        </a:xfrm>
-      </p:grpSpPr>
-      <p:sp>
-        <p:nvSpPr>
-          <p:cNvPr id="2" name="Text 0"/>
-          <p:cNvSpPr/>
-          <p:nvPr/>
-        </p:nvSpPr>
-        <p:spPr>
-          <a:xfrm>
-            <a:off x="457200" y="1828800"/>
-            <a:ext cx="8229600" cy="731520"/>
-          </a:xfrm>
-          <a:prstGeom prst="rect">
-            <a:avLst/>
-          </a:prstGeom>
-          <a:noFill/>
-          <a:ln/>
-        </p:spPr>
-        <p:txBody>
-          <a:bodyPr wrap="square" lIns="0" tIns="0" rIns="0" bIns="0" rtlCol="0" anchor="ctr"/>
-          <a:lstStyle/>
-          <a:p>
-            <a:pPr algn="ctr" indent="0" marL="0">
-              <a:buNone/>
-            </a:pPr>
-            <a:r>
-              <a:rPr lang="en-US" sz="3400" b="1" dirty="0">
-                <a:solidFill>
-                  <a:srgbClr val="1A1A1A"/>
-                </a:solidFill>
-                <a:latin typeface="Times New Roman" pitchFamily="34" charset="0"/>
-                <a:ea typeface="Times New Roman" pitchFamily="34" charset="-122"/>
-                <a:cs typeface="Times New Roman" pitchFamily="34" charset="-120"/>
-              </a:rPr>
-              <a:t>Muchas gracias</a:t>
-            </a:r>
-            <a:endParaRPr lang="en-US" sz="3400" dirty="0"/>
-          </a:p>
-        </p:txBody>
-      </p:sp>
-      <p:sp>
-        <p:nvSpPr>
-          <p:cNvPr id="3" name="Text 1"/>
-          <p:cNvSpPr/>
-          <p:nvPr/>
-        </p:nvSpPr>
-        <p:spPr>
-          <a:xfrm>
-            <a:off x="457200" y="2606040"/>
-            <a:ext cx="8229600" cy="365760"/>
-          </a:xfrm>
-          <a:prstGeom prst="rect">
-            <a:avLst/>
-          </a:prstGeom>
-          <a:noFill/>
-          <a:ln/>
-        </p:spPr>
-        <p:txBody>
-          <a:bodyPr wrap="square" lIns="0" tIns="0" rIns="0" bIns="0" rtlCol="0" anchor="ctr"/>
-          <a:lstStyle/>
-          <a:p>
-            <a:pPr algn="ctr" indent="0" marL="0">
-              <a:buNone/>
-            </a:pPr>
-            <a:r>
-              <a:rPr lang="en-US" sz="1500" i="1" dirty="0">
-                <a:solidFill>
-                  <a:srgbClr val="666666"/>
-                </a:solidFill>
-                <a:latin typeface="Times New Roman" pitchFamily="34" charset="0"/>
-                <a:ea typeface="Times New Roman" pitchFamily="34" charset="-122"/>
-                <a:cs typeface="Times New Roman" pitchFamily="34" charset="-120"/>
-              </a:rPr>
-              <a:t>Preguntas y comentarios</a:t>
-            </a:r>
-            <a:endParaRPr lang="en-US" sz="1500" dirty="0"/>
-          </a:p>
-        </p:txBody>
-      </p:sp>
-      <p:sp>
-        <p:nvSpPr>
-          <p:cNvPr id="4" name="Text 2"/>
-          <p:cNvSpPr/>
-          <p:nvPr/>
-        </p:nvSpPr>
-        <p:spPr>
-          <a:xfrm>
-            <a:off x="457200" y="3383280"/>
-            <a:ext cx="8229600" cy="320040"/>
-          </a:xfrm>
-          <a:prstGeom prst="rect">
-            <a:avLst/>
-          </a:prstGeom>
-          <a:noFill/>
-          <a:ln/>
-        </p:spPr>
-        <p:txBody>
-          <a:bodyPr wrap="square" lIns="0" tIns="0" rIns="0" bIns="0" rtlCol="0" anchor="ctr"/>
-          <a:lstStyle/>
-          <a:p>
-            <a:pPr algn="ctr" indent="0" marL="0">
-              <a:buNone/>
-            </a:pPr>
-            <a:r>
-              <a:rPr lang="en-US" sz="1200" dirty="0">
-                <a:solidFill>
-                  <a:srgbClr val="8B1A1A"/>
-                </a:solidFill>
-                <a:latin typeface="Times New Roman" pitchFamily="34" charset="0"/>
-                <a:ea typeface="Times New Roman" pitchFamily="34" charset="-122"/>
-                <a:cs typeface="Times New Roman" pitchFamily="34" charset="-120"/>
-              </a:rPr>
-              <a:t>Código y experimentos reproducibles:  github.com/YanBajac/TFM_Fusion_Imagenes_Propuesta_Oficial</a:t>
-            </a:r>
-            <a:endParaRPr lang="en-US" sz="1200" dirty="0"/>
-          </a:p>
-        </p:txBody>
-      </p:sp>
-      <p:sp>
-        <p:nvSpPr>
-          <p:cNvPr id="5" name="Text 3"/>
-          <p:cNvSpPr/>
-          <p:nvPr/>
-        </p:nvSpPr>
-        <p:spPr>
-          <a:xfrm>
-            <a:off x="457200" y="3794760"/>
-            <a:ext cx="8229600" cy="320040"/>
-          </a:xfrm>
-          <a:prstGeom prst="rect">
-            <a:avLst/>
-          </a:prstGeom>
-          <a:noFill/>
-          <a:ln/>
-        </p:spPr>
-        <p:txBody>
-          <a:bodyPr wrap="square" lIns="0" tIns="0" rIns="0" bIns="0" rtlCol="0" anchor="ctr"/>
-          <a:lstStyle/>
-          <a:p>
-            <a:pPr algn="ctr" indent="0" marL="0">
-              <a:buNone/>
-            </a:pPr>
-            <a:r>
-              <a:rPr lang="en-US" sz="1100" dirty="0">
-                <a:solidFill>
-                  <a:srgbClr val="666666"/>
-                </a:solidFill>
-                <a:latin typeface="Times New Roman" pitchFamily="34" charset="0"/>
-                <a:ea typeface="Times New Roman" pitchFamily="34" charset="-122"/>
-                <a:cs typeface="Times New Roman" pitchFamily="34" charset="-120"/>
-              </a:rPr>
-              <a:t>Lic. Juan Pablo Bazán  ·  Ing. Yan Bajac  —  Orientador: D.Sc. Julio César Mello</a:t>
-            </a:r>
-            <a:endParaRPr lang="en-US" sz="1100" dirty="0"/>
           </a:p>
         </p:txBody>
       </p:sp>
@@ -8759,7 +9006,7 @@
                 <a:ea typeface="Times New Roman" pitchFamily="34" charset="-122"/>
                 <a:cs typeface="Times New Roman" pitchFamily="34" charset="-120"/>
               </a:rPr>
-              <a:t xml:space="preserve">2. Los dos aportes de la tesis</a:t>
+              <a:t xml:space="preserve">Conclusiones</a:t>
             </a:r>
             <a:endParaRPr lang="en-US" sz="2300" dirty="0"/>
           </a:p>
@@ -8798,7 +9045,7 @@
                 <a:ea typeface="Times New Roman" pitchFamily="34" charset="-122"/>
                 <a:cs typeface="Times New Roman" pitchFamily="34" charset="-120"/>
               </a:rPr>
-              <a:t xml:space="preserve">4 / 22</a:t>
+              <a:t xml:space="preserve">20 / 22</a:t>
             </a:r>
             <a:endParaRPr lang="en-US" sz="900" dirty="0"/>
           </a:p>
@@ -8841,7 +9088,7 @@
                 <a:ea typeface="Times New Roman" pitchFamily="34" charset="-122"/>
                 <a:cs typeface="Times New Roman" pitchFamily="34" charset="-120"/>
               </a:rPr>
-              <a:t xml:space="preserve">Aporte 1 — El operador y su caracterización: un Top-Hat/Bottom-Hat de una sola escala con banco de cinco elementos estructurantes (un disco de radio r y cuatro segmentos lineales a 0°, 45°, 90° y 135°), y la determinación de en qué dirección desplaza el punto de operación de la fusión frente a la metodología clásica y a cinco configuraciones de referencia.</a:t>
+              <a:t>Se formuló e implementó de forma reproducible un operador Top-Hat de una sola escala con banco de disco + líneas orientadas y suma de ramas.</a:t>
             </a:r>
             <a:endParaRPr lang="en-US" sz="1350" dirty="0"/>
           </a:p>
@@ -8862,7 +9109,7 @@
                 <a:ea typeface="Times New Roman" pitchFamily="34" charset="-122"/>
                 <a:cs typeface="Times New Roman" pitchFamily="34" charset="-120"/>
               </a:rPr>
-              <a:t xml:space="preserve">Aporte 2 — La auditoría del protocolo de evaluación: ¿qué autoriza a concluir un criterio formado por nueve métricas sin referencia de tipo «mayor es mejor», con los hiperparámetros elegidos sobre esas mismas métricas y una validación en tarea posterior?</a:t>
+              <a:t xml:space="preserve">El barrido de 25 configuraciones con la aptitud y el rango publicados converge a m* = 0,30 en todas ellas, el piso del rango; el argmax del radio es r = 1 y se adopta r = 25 por el criterio de evaluación, no por la optimización.</a:t>
             </a:r>
             <a:endParaRPr lang="en-US" sz="1350" dirty="0"/>
           </a:p>
@@ -8883,7 +9130,7 @@
                 <a:ea typeface="Times New Roman" pitchFamily="34" charset="-122"/>
                 <a:cs typeface="Times New Roman" pitchFamily="34" charset="-120"/>
               </a:rPr>
-              <a:t xml:space="preserve">Con el propio desarrollo como caso de estudio. Los tres controles —control negativo con degradaciones conocidas, ablación del banco con hiperparámetros igualados y ajuste simétrico de los comparativos— están corridos, versionados y son reproducibles.</a:t>
+              <a:t xml:space="preserve">La propuesta lidera la entropía (6,986) y la eficiencia de fusión (1,105) del benchmark y encabeza el ranking agregado de rangos medios (3,394), por delante de la pirámide de Laplace (3,911) y del Top-Hat clásico (3,944).</a:t>
             </a:r>
             <a:endParaRPr lang="en-US" sz="1350" dirty="0"/>
           </a:p>
@@ -8904,7 +9151,28 @@
                 <a:ea typeface="Times New Roman" pitchFamily="34" charset="-122"/>
                 <a:cs typeface="Times New Roman" pitchFamily="34" charset="-120"/>
               </a:rPr>
-              <a:t xml:space="preserve">La tesis no sostiene que el método sea mejor. Sostiene que desplaza el punto de operación en una dirección determinada, y que el orden de mérito que lo corona es propiedad del criterio.</a:t>
+              <a:t>Frente al Top-Hat clásico (r = 5; m = 1) la propuesta mejora seis de las nueve métricas con significancia (p_Holm ≤ 0,0002), incluida la similitud estructural (0,658 frente a 0,564), y pierde en gradiente medio y frecuencia espacial. Esa diferencia mezcla banco, radio y peso; el aporte del banco aislado con (r, m) = (25; 0,30) es 3,222 frente a 3,367 del disco único con las nueve métricas, y se invierte con las diecisiete.</a:t>
+            </a:r>
+            <a:endParaRPr lang="en-US" sz="1350" dirty="0"/>
+          </a:p>
+          <a:p>
+            <a:pPr marL="177800" indent="-177800">
+              <a:spcAft>
+                <a:spcPts val="1100"/>
+              </a:spcAft>
+              <a:buSzPct val="100000"/>
+              <a:buChar char="•"/>
+            </a:pPr>
+            <a:r>
+              <a:rPr lang="en-US" sz="1350" dirty="0">
+                <a:solidFill>
+                  <a:srgbClr val="1A1A1A"/>
+                </a:solidFill>
+                <a:latin typeface="Times New Roman" pitchFamily="34" charset="0"/>
+                <a:ea typeface="Times New Roman" pitchFamily="34" charset="-122"/>
+                <a:cs typeface="Times New Roman" pitchFamily="34" charset="-120"/>
+              </a:rPr>
+              <a:t xml:space="preserve">La evaluación orientada a tarea arroja el hallazgo metodológico central: la configuración que maximiza las métricas de actividad no es la que maximiza el desempeño de detección. En M3FD la mejor entrada del par complementario es la Ratio Pyramid (0,622) y la propuesta alcanza 0,564; en el conteo por escena queda por debajo del visible solo. Ambos criterios deben reportarse por separado.</a:t>
             </a:r>
             <a:endParaRPr lang="en-US" sz="1350" dirty="0"/>
           </a:p>
@@ -8920,7 +9188,7 @@
 
 <file path=ppt/slides/slide21.xml><?xml version="1.0" encoding="utf-8"?>
 <p:sld xmlns:a="http://schemas.openxmlformats.org/drawingml/2006/main" xmlns:r="http://schemas.openxmlformats.org/officeDocument/2006/relationships" xmlns:p="http://schemas.openxmlformats.org/presentationml/2006/main">
-  <p:cSld name="Slide 17">
+  <p:cSld name="Slide 18">
     <p:bg>
       <p:bgPr>
         <a:solidFill>
@@ -8975,7 +9243,7 @@
                 <a:ea typeface="Times New Roman" pitchFamily="34" charset="-122"/>
                 <a:cs typeface="Times New Roman" pitchFamily="34" charset="-120"/>
               </a:rPr>
-              <a:t xml:space="preserve">Siete hipótesis de trabajo</a:t>
+              <a:t>Recomendaciones y trabajo futuro</a:t>
             </a:r>
             <a:endParaRPr lang="en-US" sz="2300" dirty="0"/>
           </a:p>
@@ -9014,7 +9282,7 @@
                 <a:ea typeface="Times New Roman" pitchFamily="34" charset="-122"/>
                 <a:cs typeface="Times New Roman" pitchFamily="34" charset="-120"/>
               </a:rPr>
-              <a:t xml:space="preserve">6 / 22</a:t>
+              <a:t xml:space="preserve">21 / 22</a:t>
             </a:r>
             <a:endParaRPr lang="en-US" sz="900" dirty="0"/>
           </a:p>
@@ -9057,7 +9325,7 @@
                 <a:ea typeface="Times New Roman" pitchFamily="34" charset="-122"/>
                 <a:cs typeface="Times New Roman" pitchFamily="34" charset="-120"/>
               </a:rPr>
-              <a:t xml:space="preserve">H1 (operador) — El banco de cinco elementos estructurantes no mejora la fusión de manera uniforme: desplaza su punto de operación hacia el realce de la actividad espacial, en contra de la fidelidad a las fuentes.</a:t>
+              <a:t>Extender la evaluación de detección a otros detectores y al conjunto completo de LLVIP.</a:t>
             </a:r>
             <a:endParaRPr lang="en-US" sz="1350" dirty="0"/>
           </a:p>
@@ -9078,7 +9346,7 @@
                 <a:ea typeface="Times New Roman" pitchFamily="34" charset="-122"/>
                 <a:cs typeface="Times New Roman" pitchFamily="34" charset="-120"/>
               </a:rPr>
-              <a:t xml:space="preserve">H2 (criterio) — El orden de mérito de los métodos no es una propiedad del operador, sino del criterio con que se lo evalúa.</a:t>
+              <a:t>Explorar reglas de fusión adaptativas para la rama Black Top-Hat.</a:t>
             </a:r>
             <a:endParaRPr lang="en-US" sz="1350" dirty="0"/>
           </a:p>
@@ -9099,7 +9367,7 @@
                 <a:ea typeface="Times New Roman" pitchFamily="34" charset="-122"/>
                 <a:cs typeface="Times New Roman" pitchFamily="34" charset="-120"/>
               </a:rPr>
-              <a:t xml:space="preserve">H3 (criterio) — La batería de nueve métricas de tipo «mayor es mejor» es insuficiente como criterio de calidad, porque sus métricas de actividad crecen monótonamente con la varianza inyectada.</a:t>
+              <a:t>Complementar las métricas objetivas con una validación perceptual por observadores.</a:t>
             </a:r>
             <a:endParaRPr lang="en-US" sz="1350" dirty="0"/>
           </a:p>
@@ -9120,7 +9388,7 @@
                 <a:ea typeface="Times New Roman" pitchFamily="34" charset="-122"/>
                 <a:cs typeface="Times New Roman" pitchFamily="34" charset="-120"/>
               </a:rPr>
-              <a:t xml:space="preserve">H4 (criterio) — La batería contiene al menos una métrica que no aporta información independiente de las demás.</a:t>
+              <a:t>Evaluar la transferencia a otros dominios (imágenes médicas, aéreas).</a:t>
             </a:r>
             <a:endParaRPr lang="en-US" sz="1350" dirty="0"/>
           </a:p>
@@ -9141,70 +9409,7 @@
                 <a:ea typeface="Times New Roman" pitchFamily="34" charset="-122"/>
                 <a:cs typeface="Times New Roman" pitchFamily="34" charset="-120"/>
               </a:rPr>
-              <a:t xml:space="preserve">H5 (criterio) — La optimización no determina la configuración adoptada: ambos hiperparámetros son decisiones apoyadas en parte del mismo criterio con el que después se evalúa.</a:t>
-            </a:r>
-            <a:endParaRPr lang="en-US" sz="1350" dirty="0"/>
-          </a:p>
-          <a:p>
-            <a:pPr marL="177800" indent="-177800">
-              <a:spcAft>
-                <a:spcPts val="1100"/>
-              </a:spcAft>
-              <a:buSzPct val="100000"/>
-              <a:buChar char="•"/>
-            </a:pPr>
-            <a:r>
-              <a:rPr lang="en-US" sz="1350" dirty="0">
-                <a:solidFill>
-                  <a:srgbClr val="1A1A1A"/>
-                </a:solidFill>
-                <a:latin typeface="Times New Roman" pitchFamily="34" charset="0"/>
-                <a:ea typeface="Times New Roman" pitchFamily="34" charset="-122"/>
-                <a:cs typeface="Times New Roman" pitchFamily="34" charset="-120"/>
-              </a:rPr>
-              <a:t xml:space="preserve">H6 (criterio) — El orden de mérito de las métricas de imagen no predice el orden de utilidad en una tarea posterior, y ninguna fusión supera por un margen distinguible a la mejor modalidad individual.</a:t>
-            </a:r>
-            <a:endParaRPr lang="en-US" sz="1350" dirty="0"/>
-          </a:p>
-          <a:p>
-            <a:pPr marL="177800" indent="-177800">
-              <a:spcAft>
-                <a:spcPts val="1100"/>
-              </a:spcAft>
-              <a:buSzPct val="100000"/>
-              <a:buChar char="•"/>
-            </a:pPr>
-            <a:r>
-              <a:rPr lang="en-US" sz="1350" dirty="0">
-                <a:solidFill>
-                  <a:srgbClr val="1A1A1A"/>
-                </a:solidFill>
-                <a:latin typeface="Times New Roman" pitchFamily="34" charset="0"/>
-                <a:ea typeface="Times New Roman" pitchFamily="34" charset="-122"/>
-                <a:cs typeface="Times New Roman" pitchFamily="34" charset="-120"/>
-              </a:rPr>
-              <a:t xml:space="preserve">H7 (operador) — Con el radio y el peso igualados, el banco de cinco elementos produce un perfil distinto del disco único.</a:t>
-            </a:r>
-            <a:endParaRPr lang="en-US" sz="1350" dirty="0"/>
-          </a:p>
-          <a:p>
-            <a:pPr marL="177800" indent="-177800">
-              <a:spcAft>
-                <a:spcPts val="1100"/>
-              </a:spcAft>
-              <a:buSzPct val="100000"/>
-              <a:buChar char="•"/>
-            </a:pPr>
-            <a:r>
-              <a:rPr lang="en-US" sz="1350" dirty="0">
-                <a:solidFill>
-                  <a:srgbClr val="1A1A1A"/>
-                </a:solidFill>
-                <a:latin typeface="Times New Roman" pitchFamily="34" charset="0"/>
-                <a:ea typeface="Times New Roman" pitchFamily="34" charset="-122"/>
-                <a:cs typeface="Times New Roman" pitchFamily="34" charset="-120"/>
-              </a:rPr>
-              <a:t xml:space="preserve">H1 se contrasta en §5.4 y §5.6; H6 en §5.5; H2, H3, H4, H5 y H7 en §5.8. Las siete, con experimentos corridos y versionados.</a:t>
+              <a:t>Para aplicaciones donde prima la riqueza informativa y el detalle, la propuesta es la opción recomendada; donde prima la fidelidad a las fuentes, los métodos multiescala (DTCWT, CVT) siguen siendo preferibles.</a:t>
             </a:r>
             <a:endParaRPr lang="en-US" sz="1350" dirty="0"/>
           </a:p>
@@ -9220,7 +9425,7 @@
 
 <file path=ppt/slides/slide22.xml><?xml version="1.0" encoding="utf-8"?>
 <p:sld xmlns:a="http://schemas.openxmlformats.org/drawingml/2006/main" xmlns:r="http://schemas.openxmlformats.org/officeDocument/2006/relationships" xmlns:p="http://schemas.openxmlformats.org/presentationml/2006/main">
-  <p:cSld name="Slide 17">
+  <p:cSld name="Slide 19">
     <p:bg>
       <p:bgPr>
         <a:solidFill>
@@ -9250,8 +9455,8 @@
         </p:nvSpPr>
         <p:spPr>
           <a:xfrm>
-            <a:off x="457200" y="256032"/>
-            <a:ext cx="8229600" cy="502920"/>
+            <a:off x="457200" y="1828800"/>
+            <a:ext cx="8229600" cy="731520"/>
           </a:xfrm>
           <a:prstGeom prst="rect">
             <a:avLst/>
@@ -9263,21 +9468,21 @@
           <a:bodyPr wrap="square" lIns="0" tIns="0" rIns="0" bIns="0" rtlCol="0" anchor="ctr"/>
           <a:lstStyle/>
           <a:p>
-            <a:pPr indent="0" marL="0">
+            <a:pPr algn="ctr" indent="0" marL="0">
               <a:buNone/>
             </a:pPr>
             <a:r>
-              <a:rPr lang="en-US" sz="2300" b="1" dirty="0">
-                <a:solidFill>
-                  <a:srgbClr val="1A1A1A"/>
-                </a:solidFill>
-                <a:latin typeface="Times New Roman" pitchFamily="34" charset="0"/>
-                <a:ea typeface="Times New Roman" pitchFamily="34" charset="-122"/>
-                <a:cs typeface="Times New Roman" pitchFamily="34" charset="-120"/>
-              </a:rPr>
-              <a:t xml:space="preserve">9. Auditoría I — ¿discrimina calidad la batería de nueve métricas? (H3, H4)</a:t>
-            </a:r>
-            <a:endParaRPr lang="en-US" sz="2300" dirty="0"/>
+              <a:rPr lang="en-US" sz="3400" b="1" dirty="0">
+                <a:solidFill>
+                  <a:srgbClr val="1A1A1A"/>
+                </a:solidFill>
+                <a:latin typeface="Times New Roman" pitchFamily="34" charset="0"/>
+                <a:ea typeface="Times New Roman" pitchFamily="34" charset="-122"/>
+                <a:cs typeface="Times New Roman" pitchFamily="34" charset="-120"/>
+              </a:rPr>
+              <a:t>Muchas gracias</a:t>
+            </a:r>
+            <a:endParaRPr lang="en-US" sz="3400" dirty="0"/>
           </a:p>
         </p:txBody>
       </p:sp>
@@ -9289,8 +9494,8 @@
         </p:nvSpPr>
         <p:spPr>
           <a:xfrm>
-            <a:off x="8229600" y="4828032"/>
-            <a:ext cx="685800" cy="274320"/>
+            <a:off x="457200" y="2606040"/>
+            <a:ext cx="8229600" cy="365760"/>
           </a:xfrm>
           <a:prstGeom prst="rect">
             <a:avLst/>
@@ -9302,11 +9507,11 @@
           <a:bodyPr wrap="square" lIns="0" tIns="0" rIns="0" bIns="0" rtlCol="0" anchor="ctr"/>
           <a:lstStyle/>
           <a:p>
-            <a:pPr algn="r" indent="0" marL="0">
+            <a:pPr algn="ctr" indent="0" marL="0">
               <a:buNone/>
             </a:pPr>
             <a:r>
-              <a:rPr lang="en-US" sz="900" dirty="0">
+              <a:rPr lang="en-US" sz="1500" i="1" dirty="0">
                 <a:solidFill>
                   <a:srgbClr val="666666"/>
                 </a:solidFill>
@@ -9314,9 +9519,9 @@
                 <a:ea typeface="Times New Roman" pitchFamily="34" charset="-122"/>
                 <a:cs typeface="Times New Roman" pitchFamily="34" charset="-120"/>
               </a:rPr>
-              <a:t xml:space="preserve">14 / 22</a:t>
-            </a:r>
-            <a:endParaRPr lang="en-US" sz="900" dirty="0"/>
+              <a:t>Preguntas y comentarios</a:t>
+            </a:r>
+            <a:endParaRPr lang="en-US" sz="1500" dirty="0"/>
           </a:p>
         </p:txBody>
       </p:sp>
@@ -9328,8 +9533,8 @@
         </p:nvSpPr>
         <p:spPr>
           <a:xfrm>
-            <a:off x="457200" y="914400"/>
-            <a:ext cx="8229600" cy="3931920"/>
+            <a:off x="457200" y="3383280"/>
+            <a:ext cx="8229600" cy="320040"/>
           </a:xfrm>
           <a:prstGeom prst="rect">
             <a:avLst/>
@@ -9338,154 +9543,63 @@
           <a:ln/>
         </p:spPr>
         <p:txBody>
-          <a:bodyPr wrap="square" lIns="0" tIns="0" rIns="0" bIns="0" rtlCol="0" anchor="t"/>
-          <a:lstStyle/>
-          <a:p>
-            <a:pPr marL="177800" indent="-177800">
-              <a:spcAft>
-                <a:spcPts val="1100"/>
-              </a:spcAft>
-              <a:buSzPct val="100000"/>
-              <a:buChar char="•"/>
-            </a:pPr>
-            <a:r>
-              <a:rPr lang="en-US" sz="1350" dirty="0">
-                <a:solidFill>
-                  <a:srgbClr val="1A1A1A"/>
-                </a:solidFill>
-                <a:latin typeface="Times New Roman" pitchFamily="34" charset="0"/>
-                <a:ea typeface="Times New Roman" pitchFamily="34" charset="-122"/>
-                <a:cs typeface="Times New Roman" pitchFamily="34" charset="-120"/>
-              </a:rPr>
-              <a:t xml:space="preserve">Control negativo: al ranking se añadieron siete entradas degradadas junto a los siete métodos —la imagen base sin operador, cuatro fusiones artificiales de ruido gaussiano y dos desenfoques—.</a:t>
-            </a:r>
-            <a:endParaRPr lang="en-US" sz="1350" dirty="0"/>
-          </a:p>
-          <a:p>
-            <a:pPr marL="177800" indent="-177800">
-              <a:spcAft>
-                <a:spcPts val="1100"/>
-              </a:spcAft>
-              <a:buSzPct val="100000"/>
-              <a:buChar char="•"/>
-            </a:pPr>
-            <a:r>
-              <a:rPr lang="en-US" sz="1350" dirty="0">
-                <a:solidFill>
-                  <a:srgbClr val="1A1A1A"/>
-                </a:solidFill>
-                <a:latin typeface="Times New Roman" pitchFamily="34" charset="0"/>
-                <a:ea typeface="Times New Roman" pitchFamily="34" charset="-122"/>
-                <a:cs typeface="Times New Roman" pitchFamily="34" charset="-120"/>
-              </a:rPr>
-              <a:t xml:space="preserve">Con las nueve métricas la fusión de ruido con σ = 0,20 queda 3.ª de 14 (rango 6,767): por delante de cinco de los seis métodos comparativos y de la imagen base.</a:t>
-            </a:r>
-            <a:endParaRPr lang="en-US" sz="1350" dirty="0"/>
-          </a:p>
-          <a:p>
-            <a:pPr marL="177800" indent="-177800">
-              <a:spcAft>
-                <a:spcPts val="1100"/>
-              </a:spcAft>
-              <a:buSzPct val="100000"/>
-              <a:buChar char="•"/>
-            </a:pPr>
-            <a:r>
-              <a:rPr lang="en-US" sz="1350" dirty="0">
-                <a:solidFill>
-                  <a:srgbClr val="1A1A1A"/>
-                </a:solidFill>
-                <a:latin typeface="Times New Roman" pitchFamily="34" charset="0"/>
-                <a:ea typeface="Times New Roman" pitchFamily="34" charset="-122"/>
-                <a:cs typeface="Times New Roman" pitchFamily="34" charset="-120"/>
-              </a:rPr>
-              <a:t xml:space="preserve">Y su rango MEJORA al aumentar el ruido: 8,917 → 7,850 → 6,972 → 6,767 para σ = 0,02 / 0,05 / 0,10 / 0,20. La batería juzga mejor a la imagen cuanto más ruido se le inyecta.</a:t>
-            </a:r>
-            <a:endParaRPr lang="en-US" sz="1350" dirty="0"/>
-          </a:p>
-          <a:p>
-            <a:pPr marL="177800" indent="-177800">
-              <a:spcAft>
-                <a:spcPts val="1100"/>
-              </a:spcAft>
-              <a:buSzPct val="100000"/>
-              <a:buChar char="•"/>
-            </a:pPr>
-            <a:r>
-              <a:rPr lang="en-US" sz="1350" dirty="0">
-                <a:solidFill>
-                  <a:srgbClr val="1A1A1A"/>
-                </a:solidFill>
-                <a:latin typeface="Times New Roman" pitchFamily="34" charset="0"/>
-                <a:ea typeface="Times New Roman" pitchFamily="34" charset="-122"/>
-                <a:cs typeface="Times New Roman" pitchFamily="34" charset="-120"/>
-              </a:rPr>
-              <a:t xml:space="preserve">El fallo es específico de la varianza y no de la degradación en general: el desenfoque sí se penaliza, y el de 11 × 11 queda último (9,822).</a:t>
-            </a:r>
-            <a:endParaRPr lang="en-US" sz="1350" dirty="0"/>
-          </a:p>
-          <a:p>
-            <a:pPr marL="177800" indent="-177800">
-              <a:spcAft>
-                <a:spcPts val="1100"/>
-              </a:spcAft>
-              <a:buSzPct val="100000"/>
-              <a:buChar char="•"/>
-            </a:pPr>
-            <a:r>
-              <a:rPr lang="en-US" sz="1350" dirty="0">
-                <a:solidFill>
-                  <a:srgbClr val="1A1A1A"/>
-                </a:solidFill>
-                <a:latin typeface="Times New Roman" pitchFamily="34" charset="0"/>
-                <a:ea typeface="Times New Roman" pitchFamily="34" charset="-122"/>
-                <a:cs typeface="Times New Roman" pitchFamily="34" charset="-120"/>
-              </a:rPr>
-              <a:t xml:space="preserve">Basta una métrica que penalice artefactos para corregirlo: incorporando Nabf el ruido cae al 7.º puesto; con las diecisiete métricas, al último (10,138).</a:t>
-            </a:r>
-            <a:endParaRPr lang="en-US" sz="1350" dirty="0"/>
-          </a:p>
-          <a:p>
-            <a:pPr marL="177800" indent="-177800">
-              <a:spcAft>
-                <a:spcPts val="1100"/>
-              </a:spcAft>
-              <a:buSzPct val="100000"/>
-              <a:buChar char="•"/>
-            </a:pPr>
-            <a:r>
-              <a:rPr lang="en-US" sz="1350" dirty="0">
-                <a:solidFill>
-                  <a:srgbClr val="1A1A1A"/>
-                </a:solidFill>
-                <a:latin typeface="Times New Roman" pitchFamily="34" charset="0"/>
-                <a:ea typeface="Times New Roman" pitchFamily="34" charset="-122"/>
-                <a:cs typeface="Times New Roman" pitchFamily="34" charset="-120"/>
-              </a:rPr>
-              <a:t xml:space="preserve">Redundancia interna: FE es la entropía de la fusión sobre el promedio de las entropías de las fuentes, y ese denominador no depende del método. Rangos intra-bloque idénticos a EN en las 20 imágenes y el mismo χ² de Friedman (88,2857): las dimensiones efectivas son ocho, no nueve.</a:t>
-            </a:r>
-            <a:endParaRPr lang="en-US" sz="1350" dirty="0"/>
-          </a:p>
-          <a:p>
-            <a:pPr marL="177800" indent="-177800">
-              <a:spcAft>
-                <a:spcPts val="1100"/>
-              </a:spcAft>
-              <a:buSzPct val="100000"/>
-              <a:buChar char="•"/>
-            </a:pPr>
-            <a:r>
-              <a:rPr lang="en-US" sz="1350" dirty="0">
-                <a:solidFill>
-                  <a:srgbClr val="1A1A1A"/>
-                </a:solidFill>
-                <a:latin typeface="Times New Roman" pitchFamily="34" charset="0"/>
-                <a:ea typeface="Times New Roman" pitchFamily="34" charset="-122"/>
-                <a:cs typeface="Times New Roman" pitchFamily="34" charset="-120"/>
-              </a:rPr>
-              <a:t xml:space="preserve">Excluyendo FE la propuesta sigue primera (3,631 frente a 3,994 de la pirámide de Laplace): la redundancia no explica su primer lugar.</a:t>
-            </a:r>
-            <a:endParaRPr lang="en-US" sz="1350" dirty="0"/>
+          <a:bodyPr wrap="square" lIns="0" tIns="0" rIns="0" bIns="0" rtlCol="0" anchor="ctr"/>
+          <a:lstStyle/>
+          <a:p>
+            <a:pPr algn="ctr" indent="0" marL="0">
+              <a:buNone/>
+            </a:pPr>
+            <a:r>
+              <a:rPr lang="en-US" sz="1200" dirty="0">
+                <a:solidFill>
+                  <a:srgbClr val="8B1A1A"/>
+                </a:solidFill>
+                <a:latin typeface="Times New Roman" pitchFamily="34" charset="0"/>
+                <a:ea typeface="Times New Roman" pitchFamily="34" charset="-122"/>
+                <a:cs typeface="Times New Roman" pitchFamily="34" charset="-120"/>
+              </a:rPr>
+              <a:t>Código y experimentos reproducibles:  github.com/YanBajac/TFM_Fusion_Imagenes_Propuesta_Oficial</a:t>
+            </a:r>
+            <a:endParaRPr lang="en-US" sz="1200" dirty="0"/>
+          </a:p>
+        </p:txBody>
+      </p:sp>
+      <p:sp>
+        <p:nvSpPr>
+          <p:cNvPr id="5" name="Text 3"/>
+          <p:cNvSpPr/>
+          <p:nvPr/>
+        </p:nvSpPr>
+        <p:spPr>
+          <a:xfrm>
+            <a:off x="457200" y="3794760"/>
+            <a:ext cx="8229600" cy="320040"/>
+          </a:xfrm>
+          <a:prstGeom prst="rect">
+            <a:avLst/>
+          </a:prstGeom>
+          <a:noFill/>
+          <a:ln/>
+        </p:spPr>
+        <p:txBody>
+          <a:bodyPr wrap="square" lIns="0" tIns="0" rIns="0" bIns="0" rtlCol="0" anchor="ctr"/>
+          <a:lstStyle/>
+          <a:p>
+            <a:pPr algn="ctr" indent="0" marL="0">
+              <a:buNone/>
+            </a:pPr>
+            <a:r>
+              <a:rPr lang="en-US" sz="1100" dirty="0">
+                <a:solidFill>
+                  <a:srgbClr val="666666"/>
+                </a:solidFill>
+                <a:latin typeface="Times New Roman" pitchFamily="34" charset="0"/>
+                <a:ea typeface="Times New Roman" pitchFamily="34" charset="-122"/>
+                <a:cs typeface="Times New Roman" pitchFamily="34" charset="-120"/>
+              </a:rPr>
+              <a:t>Lic. Juan Pablo Bazán  ·  Ing. Yan Bajac  —  Orientador: D.Sc. Julio César Mello</a:t>
+            </a:r>
+            <a:endParaRPr lang="en-US" sz="1100" dirty="0"/>
           </a:p>
         </p:txBody>
       </p:sp>
@@ -9499,7 +9613,7 @@
 
 <file path=ppt/slides/slide23.xml><?xml version="1.0" encoding="utf-8"?>
 <p:sld xmlns:a="http://schemas.openxmlformats.org/drawingml/2006/main" xmlns:r="http://schemas.openxmlformats.org/officeDocument/2006/relationships" xmlns:p="http://schemas.openxmlformats.org/presentationml/2006/main">
-  <p:cSld name="Slide 17">
+  <p:cSld name="Slide 15">
     <p:bg>
       <p:bgPr>
         <a:solidFill>
@@ -9554,7 +9668,7 @@
                 <a:ea typeface="Times New Roman" pitchFamily="34" charset="-122"/>
                 <a:cs typeface="Times New Roman" pitchFamily="34" charset="-120"/>
               </a:rPr>
-              <a:t xml:space="preserve">Auditoría II — el orden de mérito es propiedad del criterio (H2)</a:t>
+              <a:t>La prueba visual: ambas clases en una sola imagen</a:t>
             </a:r>
             <a:endParaRPr lang="en-US" sz="2300" dirty="0"/>
           </a:p>
@@ -9593,22 +9707,46 @@
                 <a:ea typeface="Times New Roman" pitchFamily="34" charset="-122"/>
                 <a:cs typeface="Times New Roman" pitchFamily="34" charset="-120"/>
               </a:rPr>
-              <a:t xml:space="preserve">15 / 22</a:t>
+              <a:t xml:space="preserve">RESERVA</a:t>
             </a:r>
             <a:endParaRPr lang="en-US" sz="900" dirty="0"/>
           </a:p>
         </p:txBody>
       </p:sp>
-      <p:sp>
-        <p:nvSpPr>
-          <p:cNvPr id="4" name="Text 2"/>
+      <p:pic>
+        <p:nvPicPr>
+          <p:cNvPr id="4" name="Image 0" descr="C:/Users/Usuario/Documents/unv/mastertesis/tesis_mciencias_datos/docs/figures/fig_m3fd_detecciones.png">    </p:cNvPr>
+          <p:cNvPicPr>
+            <a:picLocks noChangeAspect="1"/>
+          </p:cNvPicPr>
+          <p:nvPr/>
+        </p:nvPicPr>
+        <p:blipFill>
+          <a:blip r:embed="rId1"/>
+          <a:stretch>
+            <a:fillRect/>
+          </a:stretch>
+        </p:blipFill>
+        <p:spPr>
+          <a:xfrm>
+            <a:off x="1672449" y="822960"/>
+            <a:ext cx="5799101" cy="3740000"/>
+          </a:xfrm>
+          <a:prstGeom prst="rect">
+            <a:avLst/>
+          </a:prstGeom>
+        </p:spPr>
+      </p:pic>
+      <p:sp>
+        <p:nvSpPr>
+          <p:cNvPr id="5" name="Text 2"/>
           <p:cNvSpPr/>
           <p:nvPr/>
         </p:nvSpPr>
         <p:spPr>
           <a:xfrm>
-            <a:off x="457200" y="914400"/>
-            <a:ext cx="8229600" cy="3931920"/>
+            <a:off x="457200" y="4620000"/>
+            <a:ext cx="7680960" cy="462000"/>
           </a:xfrm>
           <a:prstGeom prst="rect">
             <a:avLst/>
@@ -9617,186 +9755,6 @@
           <a:ln/>
         </p:spPr>
         <p:txBody>
-          <a:bodyPr wrap="square" lIns="0" tIns="0" rIns="0" bIns="0" rtlCol="0" anchor="t"/>
-          <a:lstStyle/>
-          <a:p>
-            <a:pPr marL="177800" indent="-177800">
-              <a:spcAft>
-                <a:spcPts val="1100"/>
-              </a:spcAft>
-              <a:buSzPct val="100000"/>
-              <a:buChar char="•"/>
-            </a:pPr>
-            <a:r>
-              <a:rPr lang="en-US" sz="1350" dirty="0">
-                <a:solidFill>
-                  <a:srgbClr val="1A1A1A"/>
-                </a:solidFill>
-                <a:latin typeface="Times New Roman" pitchFamily="34" charset="0"/>
-                <a:ea typeface="Times New Roman" pitchFamily="34" charset="-122"/>
-                <a:cs typeface="Times New Roman" pitchFamily="34" charset="-120"/>
-              </a:rPr>
-              <a:t xml:space="preserve">Mismo operador, las mismas 140 imágenes fusionadas, dos composiciones del criterio.</a:t>
-            </a:r>
-            <a:endParaRPr lang="en-US" sz="1350" dirty="0"/>
-          </a:p>
-          <a:p>
-            <a:pPr marL="177800" indent="-177800">
-              <a:spcAft>
-                <a:spcPts val="1100"/>
-              </a:spcAft>
-              <a:buSzPct val="100000"/>
-              <a:buChar char="•"/>
-            </a:pPr>
-            <a:r>
-              <a:rPr lang="en-US" sz="1350" dirty="0">
-                <a:solidFill>
-                  <a:srgbClr val="1A1A1A"/>
-                </a:solidFill>
-                <a:latin typeface="Times New Roman" pitchFamily="34" charset="0"/>
-                <a:ea typeface="Times New Roman" pitchFamily="34" charset="-122"/>
-                <a:cs typeface="Times New Roman" pitchFamily="34" charset="-120"/>
-              </a:rPr>
-              <a:t xml:space="preserve">Con las nueve métricas del trabajo de referencia la propuesta es 1.ª de 7 (3,394). Con las diecisiete que el MISMO evaluador ya calcula —nueve más Qabf, Nabf, SCD, VIF, FMI, Q0, QW y QE— desciende a 3.ª (3,459): el primer lugar pasa a la pirámide de Laplace (3,147), el segundo a DTCWT (3,259) y el Top-Hat clásico cae al último (5,000).</a:t>
-            </a:r>
-            <a:endParaRPr lang="en-US" sz="1350" dirty="0"/>
-          </a:p>
-          <a:p>
-            <a:pPr marL="177800" indent="-177800">
-              <a:spcAft>
-                <a:spcPts val="1100"/>
-              </a:spcAft>
-              <a:buSzPct val="100000"/>
-              <a:buChar char="•"/>
-            </a:pPr>
-            <a:r>
-              <a:rPr lang="en-US" sz="1350" dirty="0">
-                <a:solidFill>
-                  <a:srgbClr val="1A1A1A"/>
-                </a:solidFill>
-                <a:latin typeface="Times New Roman" pitchFamily="34" charset="0"/>
-                <a:ea typeface="Times New Roman" pitchFamily="34" charset="-122"/>
-                <a:cs typeface="Times New Roman" pitchFamily="34" charset="-120"/>
-              </a:rPr>
-              <a:t xml:space="preserve">No cambió ninguna imagen fusionada. Cambió el conjunto de métricas. Todo orden agregado debe reportarse junto a la composición que lo produce.</a:t>
-            </a:r>
-            <a:endParaRPr lang="en-US" sz="1350" dirty="0"/>
-          </a:p>
-          <a:p>
-            <a:pPr marL="177800" indent="-177800">
-              <a:spcAft>
-                <a:spcPts val="1100"/>
-              </a:spcAft>
-              <a:buSzPct val="100000"/>
-              <a:buChar char="•"/>
-            </a:pPr>
-            <a:r>
-              <a:rPr lang="en-US" sz="1350" dirty="0">
-                <a:solidFill>
-                  <a:srgbClr val="1A1A1A"/>
-                </a:solidFill>
-                <a:latin typeface="Times New Roman" pitchFamily="34" charset="0"/>
-                <a:ea typeface="Times New Roman" pitchFamily="34" charset="-122"/>
-                <a:cs typeface="Times New Roman" pitchFamily="34" charset="-120"/>
-              </a:rPr>
-              <a:t xml:space="preserve">Ajuste simétrico: el protocolo concede a la propuesta un paso de ajuste que no concede a los comparativos. Dándoselo también a ellos, ninguna de las cinco configuraciones de referencia la alcanza (RP 3,772 · LP 4,028 · DWT 4,167 · DTCWT 4,211 · CVT 4,717, frente a 3,583).</a:t>
-            </a:r>
-            <a:endParaRPr lang="en-US" sz="1350" dirty="0"/>
-          </a:p>
-          <a:p>
-            <a:pPr marL="177800" indent="-177800">
-              <a:spcAft>
-                <a:spcPts val="1100"/>
-              </a:spcAft>
-              <a:buSzPct val="100000"/>
-              <a:buChar char="•"/>
-            </a:pPr>
-            <a:r>
-              <a:rPr lang="en-US" sz="1350" dirty="0">
-                <a:solidFill>
-                  <a:srgbClr val="1A1A1A"/>
-                </a:solidFill>
-                <a:latin typeface="Times New Roman" pitchFamily="34" charset="0"/>
-                <a:ea typeface="Times New Roman" pitchFamily="34" charset="-122"/>
-                <a:cs typeface="Times New Roman" pitchFamily="34" charset="-120"/>
-              </a:rPr>
-              <a:t xml:space="preserve">El Top-Hat clásico la supera por 0,061 (3,522), pero con m = 1, más del triple del peso. Ejecutándolo con (r, m) = (25; 0,30) —los mismos valores de la propuesta— la propuesta conserva el primer lugar: 3,528 frente a 3,694. La ventaja del clásico proviene de su peso, no del operador.</a:t>
-            </a:r>
-            <a:endParaRPr lang="en-US" sz="1350" dirty="0"/>
-          </a:p>
-          <a:p>
-            <a:pPr marL="177800" indent="-177800">
-              <a:spcAft>
-                <a:spcPts val="1100"/>
-              </a:spcAft>
-              <a:buSzPct val="100000"/>
-              <a:buChar char="•"/>
-            </a:pPr>
-            <a:r>
-              <a:rPr lang="en-US" sz="1350" dirty="0">
-                <a:solidFill>
-                  <a:srgbClr val="1A1A1A"/>
-                </a:solidFill>
-                <a:latin typeface="Times New Roman" pitchFamily="34" charset="0"/>
-                <a:ea typeface="Times New Roman" pitchFamily="34" charset="-122"/>
-                <a:cs typeface="Times New Roman" pitchFamily="34" charset="-120"/>
-              </a:rPr>
-              <a:t xml:space="preserve">El primer lugar es un resultado sólido DENTRO del criterio del trabajo de referencia, no una propiedad independiente del criterio.</a:t>
-            </a:r>
-            <a:endParaRPr lang="en-US" sz="1350" dirty="0"/>
-          </a:p>
-        </p:txBody>
-      </p:sp>
-    </p:spTree>
-  </p:cSld>
-  <p:clrMapOvr>
-    <a:masterClrMapping/>
-  </p:clrMapOvr>
-</p:sld>
-</file>
-
-<file path=ppt/slides/slide24.xml><?xml version="1.0" encoding="utf-8"?>
-<p:sld xmlns:a="http://schemas.openxmlformats.org/drawingml/2006/main" xmlns:r="http://schemas.openxmlformats.org/officeDocument/2006/relationships" xmlns:p="http://schemas.openxmlformats.org/presentationml/2006/main">
-  <p:cSld name="Slide 17">
-    <p:bg>
-      <p:bgPr>
-        <a:solidFill>
-          <a:srgbClr val="FFFFFF"/>
-        </a:solidFill>
-      </p:bgPr>
-    </p:bg>
-    <p:spTree>
-      <p:nvGrpSpPr>
-        <p:cNvPr id="1" name=""/>
-        <p:cNvGrpSpPr/>
-        <p:nvPr/>
-      </p:nvGrpSpPr>
-      <p:grpSpPr>
-        <a:xfrm>
-          <a:off x="0" y="0"/>
-          <a:ext cx="0" cy="0"/>
-          <a:chOff x="0" y="0"/>
-          <a:chExt cx="0" cy="0"/>
-        </a:xfrm>
-      </p:grpSpPr>
-      <p:sp>
-        <p:nvSpPr>
-          <p:cNvPr id="2" name="Text 0"/>
-          <p:cNvSpPr/>
-          <p:nvPr/>
-        </p:nvSpPr>
-        <p:spPr>
-          <a:xfrm>
-            <a:off x="457200" y="256032"/>
-            <a:ext cx="8229600" cy="502920"/>
-          </a:xfrm>
-          <a:prstGeom prst="rect">
-            <a:avLst/>
-          </a:prstGeom>
-          <a:noFill/>
-          <a:ln/>
-        </p:spPr>
-        <p:txBody>
           <a:bodyPr wrap="square" lIns="0" tIns="0" rIns="0" bIns="0" rtlCol="0" anchor="ctr"/>
           <a:lstStyle/>
           <a:p>
@@ -9804,46 +9762,7 @@
               <a:buNone/>
             </a:pPr>
             <a:r>
-              <a:rPr lang="en-US" sz="2300" b="1" dirty="0">
-                <a:solidFill>
-                  <a:srgbClr val="1A1A1A"/>
-                </a:solidFill>
-                <a:latin typeface="Times New Roman" pitchFamily="34" charset="0"/>
-                <a:ea typeface="Times New Roman" pitchFamily="34" charset="-122"/>
-                <a:cs typeface="Times New Roman" pitchFamily="34" charset="-120"/>
-              </a:rPr>
-              <a:t xml:space="preserve">Auditoría III — ¿cuánto aporta el banco? Ablación con (r, m) igualados (H7)</a:t>
-            </a:r>
-            <a:endParaRPr lang="en-US" sz="2300" dirty="0"/>
-          </a:p>
-        </p:txBody>
-      </p:sp>
-      <p:sp>
-        <p:nvSpPr>
-          <p:cNvPr id="3" name="Text 1"/>
-          <p:cNvSpPr/>
-          <p:nvPr/>
-        </p:nvSpPr>
-        <p:spPr>
-          <a:xfrm>
-            <a:off x="8229600" y="4828032"/>
-            <a:ext cx="685800" cy="274320"/>
-          </a:xfrm>
-          <a:prstGeom prst="rect">
-            <a:avLst/>
-          </a:prstGeom>
-          <a:noFill/>
-          <a:ln/>
-        </p:spPr>
-        <p:txBody>
-          <a:bodyPr wrap="square" lIns="0" tIns="0" rIns="0" bIns="0" rtlCol="0" anchor="ctr"/>
-          <a:lstStyle/>
-          <a:p>
-            <a:pPr algn="r" indent="0" marL="0">
-              <a:buNone/>
-            </a:pPr>
-            <a:r>
-              <a:rPr lang="en-US" sz="900" dirty="0">
+              <a:rPr lang="en-US" sz="1050" i="1" dirty="0">
                 <a:solidFill>
                   <a:srgbClr val="666666"/>
                 </a:solidFill>
@@ -9851,157 +9770,9 @@
                 <a:ea typeface="Times New Roman" pitchFamily="34" charset="-122"/>
                 <a:cs typeface="Times New Roman" pitchFamily="34" charset="-120"/>
               </a:rPr>
-              <a:t xml:space="preserve">16 / 22</a:t>
-            </a:r>
-            <a:endParaRPr lang="en-US" sz="900" dirty="0"/>
-          </a:p>
-        </p:txBody>
-      </p:sp>
-      <p:sp>
-        <p:nvSpPr>
-          <p:cNvPr id="4" name="Text 2"/>
-          <p:cNvSpPr/>
-          <p:nvPr/>
-        </p:nvSpPr>
-        <p:spPr>
-          <a:xfrm>
-            <a:off x="457200" y="914400"/>
-            <a:ext cx="8229600" cy="3931920"/>
-          </a:xfrm>
-          <a:prstGeom prst="rect">
-            <a:avLst/>
-          </a:prstGeom>
-          <a:noFill/>
-          <a:ln/>
-        </p:spPr>
-        <p:txBody>
-          <a:bodyPr wrap="square" lIns="0" tIns="0" rIns="0" bIns="0" rtlCol="0" anchor="t"/>
-          <a:lstStyle/>
-          <a:p>
-            <a:pPr marL="177800" indent="-177800">
-              <a:spcAft>
-                <a:spcPts val="1100"/>
-              </a:spcAft>
-              <a:buSzPct val="100000"/>
-              <a:buChar char="•"/>
-            </a:pPr>
-            <a:r>
-              <a:rPr lang="en-US" sz="1350" dirty="0">
-                <a:solidFill>
-                  <a:srgbClr val="1A1A1A"/>
-                </a:solidFill>
-                <a:latin typeface="Times New Roman" pitchFamily="34" charset="0"/>
-                <a:ea typeface="Times New Roman" pitchFamily="34" charset="-122"/>
-                <a:cs typeface="Times New Roman" pitchFamily="34" charset="-120"/>
-              </a:rPr>
-              <a:t xml:space="preserve">La comparación con el Top-Hat clásico no aísla el banco: aquel usa r = 5 y m = 1, de modo que la diferencia observada mezcla banco, radio y peso. Para aislarlo se fijaron r = 25 y m = 0,30 en seis brazos que comparten todo salvo la forma de combinar las respuestas morfológicas.</a:t>
-            </a:r>
-            <a:endParaRPr lang="en-US" sz="1350" dirty="0"/>
-          </a:p>
-          <a:p>
-            <a:pPr marL="177800" indent="-177800">
-              <a:spcAft>
-                <a:spcPts val="1100"/>
-              </a:spcAft>
-              <a:buSzPct val="100000"/>
-              <a:buChar char="•"/>
-            </a:pPr>
-            <a:r>
-              <a:rPr lang="en-US" sz="1350" dirty="0">
-                <a:solidFill>
-                  <a:srgbClr val="1A1A1A"/>
-                </a:solidFill>
-                <a:latin typeface="Times New Roman" pitchFamily="34" charset="0"/>
-                <a:ea typeface="Times New Roman" pitchFamily="34" charset="-122"/>
-                <a:cs typeface="Times New Roman" pitchFamily="34" charset="-120"/>
-              </a:rPr>
-              <a:t xml:space="preserve">Con las nueve métricas la suma de ramas —la que adopta la propuesta— es la mejor de los seis (3,222), por delante del máximo (3,311) y del disco único (3,367); el promedio queda en 3,533 y las líneas solas y la imagen base empatan últimas (3,783).</a:t>
-            </a:r>
-            <a:endParaRPr lang="en-US" sz="1350" dirty="0"/>
-          </a:p>
-          <a:p>
-            <a:pPr marL="177800" indent="-177800">
-              <a:spcAft>
-                <a:spcPts val="1100"/>
-              </a:spcAft>
-              <a:buSzPct val="100000"/>
-              <a:buChar char="•"/>
-            </a:pPr>
-            <a:r>
-              <a:rPr lang="en-US" sz="1350" dirty="0">
-                <a:solidFill>
-                  <a:srgbClr val="1A1A1A"/>
-                </a:solidFill>
-                <a:latin typeface="Times New Roman" pitchFamily="34" charset="0"/>
-                <a:ea typeface="Times New Roman" pitchFamily="34" charset="-122"/>
-                <a:cs typeface="Times New Roman" pitchFamily="34" charset="-120"/>
-              </a:rPr>
-              <a:t xml:space="preserve">Lectura prudente: al retirar FE —que duplica la entropía, justo donde la suma obtiene su mayor ventaja— los seis brazos se comprimen en una banda de 3,444 a 3,631 y la suma baja al 4.º lugar (3,500).</a:t>
-            </a:r>
-            <a:endParaRPr lang="en-US" sz="1350" dirty="0"/>
-          </a:p>
-          <a:p>
-            <a:pPr marL="177800" indent="-177800">
-              <a:spcAft>
-                <a:spcPts val="1100"/>
-              </a:spcAft>
-              <a:buSzPct val="100000"/>
-              <a:buChar char="•"/>
-            </a:pPr>
-            <a:r>
-              <a:rPr lang="en-US" sz="1350" dirty="0">
-                <a:solidFill>
-                  <a:srgbClr val="1A1A1A"/>
-                </a:solidFill>
-                <a:latin typeface="Times New Roman" pitchFamily="34" charset="0"/>
-                <a:ea typeface="Times New Roman" pitchFamily="34" charset="-122"/>
-                <a:cs typeface="Times New Roman" pitchFamily="34" charset="-120"/>
-              </a:rPr>
-              <a:t xml:space="preserve">Con las diecisiete métricas el orden se invierte: máximo 2,932 · disco 3,153 · promedio 3,179 · suma 3,621 · líneas 3,756 · base 4,359.</a:t>
-            </a:r>
-            <a:endParaRPr lang="en-US" sz="1350" dirty="0"/>
-          </a:p>
-          <a:p>
-            <a:pPr marL="177800" indent="-177800">
-              <a:spcAft>
-                <a:spcPts val="1100"/>
-              </a:spcAft>
-              <a:buSzPct val="100000"/>
-              <a:buChar char="•"/>
-            </a:pPr>
-            <a:r>
-              <a:rPr lang="en-US" sz="1350" dirty="0">
-                <a:solidFill>
-                  <a:srgbClr val="1A1A1A"/>
-                </a:solidFill>
-                <a:latin typeface="Times New Roman" pitchFamily="34" charset="0"/>
-                <a:ea typeface="Times New Roman" pitchFamily="34" charset="-122"/>
-                <a:cs typeface="Times New Roman" pitchFamily="34" charset="-120"/>
-              </a:rPr>
-              <a:t xml:space="preserve">La suma duplica la tasa de artefactos del disco único (Nabf 0,374 frente a 0,185): la novedad desplaza el punto de operación hacia el realce, no lo mejora de forma uniforme.</a:t>
-            </a:r>
-            <a:endParaRPr lang="en-US" sz="1350" dirty="0"/>
-          </a:p>
-          <a:p>
-            <a:pPr marL="177800" indent="-177800">
-              <a:spcAft>
-                <a:spcPts val="1100"/>
-              </a:spcAft>
-              <a:buSzPct val="100000"/>
-              <a:buChar char="•"/>
-            </a:pPr>
-            <a:r>
-              <a:rPr lang="en-US" sz="1350" dirty="0">
-                <a:solidFill>
-                  <a:srgbClr val="1A1A1A"/>
-                </a:solidFill>
-                <a:latin typeface="Times New Roman" pitchFamily="34" charset="0"/>
-                <a:ea typeface="Times New Roman" pitchFamily="34" charset="-122"/>
-                <a:cs typeface="Times New Roman" pitchFamily="34" charset="-120"/>
-              </a:rPr>
-              <a:t xml:space="preserve">Lo que queda firme en todas las composiciones: la imagen base sin operador es la peor de los seis brazos con las diecisiete métricas (4,359). El mérito no proviene de la base. Pero la dirección del aporte depende del criterio, exactamente como enuncia H2. Y r = 1 no desactiva el banco: los cinco elementos siguen activos en una vecindad de 3 × 3.</a:t>
-            </a:r>
-            <a:endParaRPr lang="en-US" sz="1350" dirty="0"/>
+              <a:t xml:space="preserve">Arriba (escena 00389): la fusión detecta 11 personas, frente a 3 del visible y 10 del infrarrojo. Abajo (escena 00231): conserva 7 luces y 8 personas, frente a 5 luces del visible y una sola del infrarrojo. El infrarrojo no es ciego a las luces; lo que la fusión aporta es sostener las dos clases a la vez.</a:t>
+            </a:r>
+            <a:endParaRPr lang="en-US" sz="1050" dirty="0"/>
           </a:p>
         </p:txBody>
       </p:sp>
@@ -10276,6 +10047,222 @@
 
 <file path=ppt/slides/slide4.xml><?xml version="1.0" encoding="utf-8"?>
 <p:sld xmlns:a="http://schemas.openxmlformats.org/drawingml/2006/main" xmlns:r="http://schemas.openxmlformats.org/officeDocument/2006/relationships" xmlns:p="http://schemas.openxmlformats.org/presentationml/2006/main">
+  <p:cSld name="Slide 17">
+    <p:bg>
+      <p:bgPr>
+        <a:solidFill>
+          <a:srgbClr val="FFFFFF"/>
+        </a:solidFill>
+      </p:bgPr>
+    </p:bg>
+    <p:spTree>
+      <p:nvGrpSpPr>
+        <p:cNvPr id="1" name=""/>
+        <p:cNvGrpSpPr/>
+        <p:nvPr/>
+      </p:nvGrpSpPr>
+      <p:grpSpPr>
+        <a:xfrm>
+          <a:off x="0" y="0"/>
+          <a:ext cx="0" cy="0"/>
+          <a:chOff x="0" y="0"/>
+          <a:chExt cx="0" cy="0"/>
+        </a:xfrm>
+      </p:grpSpPr>
+      <p:sp>
+        <p:nvSpPr>
+          <p:cNvPr id="2" name="Text 0"/>
+          <p:cNvSpPr/>
+          <p:nvPr/>
+        </p:nvSpPr>
+        <p:spPr>
+          <a:xfrm>
+            <a:off x="457200" y="256032"/>
+            <a:ext cx="8229600" cy="502920"/>
+          </a:xfrm>
+          <a:prstGeom prst="rect">
+            <a:avLst/>
+          </a:prstGeom>
+          <a:noFill/>
+          <a:ln/>
+        </p:spPr>
+        <p:txBody>
+          <a:bodyPr wrap="square" lIns="0" tIns="0" rIns="0" bIns="0" rtlCol="0" anchor="ctr"/>
+          <a:lstStyle/>
+          <a:p>
+            <a:pPr indent="0" marL="0">
+              <a:buNone/>
+            </a:pPr>
+            <a:r>
+              <a:rPr lang="en-US" sz="2300" b="1" dirty="0">
+                <a:solidFill>
+                  <a:srgbClr val="1A1A1A"/>
+                </a:solidFill>
+                <a:latin typeface="Times New Roman" pitchFamily="34" charset="0"/>
+                <a:ea typeface="Times New Roman" pitchFamily="34" charset="-122"/>
+                <a:cs typeface="Times New Roman" pitchFamily="34" charset="-120"/>
+              </a:rPr>
+              <a:t xml:space="preserve">2. Los dos aportes de la tesis</a:t>
+            </a:r>
+            <a:endParaRPr lang="en-US" sz="2300" dirty="0"/>
+          </a:p>
+        </p:txBody>
+      </p:sp>
+      <p:sp>
+        <p:nvSpPr>
+          <p:cNvPr id="3" name="Text 1"/>
+          <p:cNvSpPr/>
+          <p:nvPr/>
+        </p:nvSpPr>
+        <p:spPr>
+          <a:xfrm>
+            <a:off x="8229600" y="4828032"/>
+            <a:ext cx="685800" cy="274320"/>
+          </a:xfrm>
+          <a:prstGeom prst="rect">
+            <a:avLst/>
+          </a:prstGeom>
+          <a:noFill/>
+          <a:ln/>
+        </p:spPr>
+        <p:txBody>
+          <a:bodyPr wrap="square" lIns="0" tIns="0" rIns="0" bIns="0" rtlCol="0" anchor="ctr"/>
+          <a:lstStyle/>
+          <a:p>
+            <a:pPr algn="r" indent="0" marL="0">
+              <a:buNone/>
+            </a:pPr>
+            <a:r>
+              <a:rPr lang="en-US" sz="900" dirty="0">
+                <a:solidFill>
+                  <a:srgbClr val="666666"/>
+                </a:solidFill>
+                <a:latin typeface="Times New Roman" pitchFamily="34" charset="0"/>
+                <a:ea typeface="Times New Roman" pitchFamily="34" charset="-122"/>
+                <a:cs typeface="Times New Roman" pitchFamily="34" charset="-120"/>
+              </a:rPr>
+              <a:t xml:space="preserve">4 / 22</a:t>
+            </a:r>
+            <a:endParaRPr lang="en-US" sz="900" dirty="0"/>
+          </a:p>
+        </p:txBody>
+      </p:sp>
+      <p:sp>
+        <p:nvSpPr>
+          <p:cNvPr id="4" name="Text 2"/>
+          <p:cNvSpPr/>
+          <p:nvPr/>
+        </p:nvSpPr>
+        <p:spPr>
+          <a:xfrm>
+            <a:off x="457200" y="914400"/>
+            <a:ext cx="8229600" cy="3931920"/>
+          </a:xfrm>
+          <a:prstGeom prst="rect">
+            <a:avLst/>
+          </a:prstGeom>
+          <a:noFill/>
+          <a:ln/>
+        </p:spPr>
+        <p:txBody>
+          <a:bodyPr wrap="square" lIns="0" tIns="0" rIns="0" bIns="0" rtlCol="0" anchor="t"/>
+          <a:lstStyle/>
+          <a:p>
+            <a:pPr marL="177800" indent="-177800">
+              <a:spcAft>
+                <a:spcPts val="1100"/>
+              </a:spcAft>
+              <a:buSzPct val="100000"/>
+              <a:buChar char="•"/>
+            </a:pPr>
+            <a:r>
+              <a:rPr lang="en-US" sz="1350" dirty="0">
+                <a:solidFill>
+                  <a:srgbClr val="1A1A1A"/>
+                </a:solidFill>
+                <a:latin typeface="Times New Roman" pitchFamily="34" charset="0"/>
+                <a:ea typeface="Times New Roman" pitchFamily="34" charset="-122"/>
+                <a:cs typeface="Times New Roman" pitchFamily="34" charset="-120"/>
+              </a:rPr>
+              <a:t xml:space="preserve">Aporte 1 — El operador y su caracterización: un Top-Hat/Bottom-Hat de una sola escala con banco de cinco elementos estructurantes (un disco de radio r y cuatro segmentos lineales a 0°, 45°, 90° y 135°), y la determinación de en qué dirección desplaza el punto de operación de la fusión frente a la metodología clásica y a cinco configuraciones de referencia.</a:t>
+            </a:r>
+            <a:endParaRPr lang="en-US" sz="1350" dirty="0"/>
+          </a:p>
+          <a:p>
+            <a:pPr marL="177800" indent="-177800">
+              <a:spcAft>
+                <a:spcPts val="1100"/>
+              </a:spcAft>
+              <a:buSzPct val="100000"/>
+              <a:buChar char="•"/>
+            </a:pPr>
+            <a:r>
+              <a:rPr lang="en-US" sz="1350" dirty="0">
+                <a:solidFill>
+                  <a:srgbClr val="1A1A1A"/>
+                </a:solidFill>
+                <a:latin typeface="Times New Roman" pitchFamily="34" charset="0"/>
+                <a:ea typeface="Times New Roman" pitchFamily="34" charset="-122"/>
+                <a:cs typeface="Times New Roman" pitchFamily="34" charset="-120"/>
+              </a:rPr>
+              <a:t xml:space="preserve">Aporte 2 — La auditoría del protocolo de evaluación: ¿qué autoriza a concluir un criterio formado por nueve métricas sin referencia de tipo «mayor es mejor», con los hiperparámetros elegidos sobre esas mismas métricas y una validación en tarea posterior?</a:t>
+            </a:r>
+            <a:endParaRPr lang="en-US" sz="1350" dirty="0"/>
+          </a:p>
+          <a:p>
+            <a:pPr marL="177800" indent="-177800">
+              <a:spcAft>
+                <a:spcPts val="1100"/>
+              </a:spcAft>
+              <a:buSzPct val="100000"/>
+              <a:buChar char="•"/>
+            </a:pPr>
+            <a:r>
+              <a:rPr lang="en-US" sz="1350" dirty="0">
+                <a:solidFill>
+                  <a:srgbClr val="1A1A1A"/>
+                </a:solidFill>
+                <a:latin typeface="Times New Roman" pitchFamily="34" charset="0"/>
+                <a:ea typeface="Times New Roman" pitchFamily="34" charset="-122"/>
+                <a:cs typeface="Times New Roman" pitchFamily="34" charset="-120"/>
+              </a:rPr>
+              <a:t xml:space="preserve">Con el propio desarrollo como caso de estudio. Los tres controles —control negativo con degradaciones conocidas, ablación del banco con hiperparámetros igualados y ajuste simétrico de los comparativos— están corridos, versionados y son reproducibles.</a:t>
+            </a:r>
+            <a:endParaRPr lang="en-US" sz="1350" dirty="0"/>
+          </a:p>
+          <a:p>
+            <a:pPr marL="177800" indent="-177800">
+              <a:spcAft>
+                <a:spcPts val="1100"/>
+              </a:spcAft>
+              <a:buSzPct val="100000"/>
+              <a:buChar char="•"/>
+            </a:pPr>
+            <a:r>
+              <a:rPr lang="en-US" sz="1350" dirty="0">
+                <a:solidFill>
+                  <a:srgbClr val="1A1A1A"/>
+                </a:solidFill>
+                <a:latin typeface="Times New Roman" pitchFamily="34" charset="0"/>
+                <a:ea typeface="Times New Roman" pitchFamily="34" charset="-122"/>
+                <a:cs typeface="Times New Roman" pitchFamily="34" charset="-120"/>
+              </a:rPr>
+              <a:t xml:space="preserve">La tesis no sostiene que el método sea mejor. Sostiene que desplaza el punto de operación en una dirección determinada, y que el orden de mérito que lo corona es propiedad del criterio.</a:t>
+            </a:r>
+            <a:endParaRPr lang="en-US" sz="1350" dirty="0"/>
+          </a:p>
+        </p:txBody>
+      </p:sp>
+    </p:spTree>
+  </p:cSld>
+  <p:clrMapOvr>
+    <a:masterClrMapping/>
+  </p:clrMapOvr>
+</p:sld>
+</file>
+
+<file path=ppt/slides/slide5.xml><?xml version="1.0" encoding="utf-8"?>
+<p:sld xmlns:a="http://schemas.openxmlformats.org/drawingml/2006/main" xmlns:r="http://schemas.openxmlformats.org/officeDocument/2006/relationships" xmlns:p="http://schemas.openxmlformats.org/presentationml/2006/main">
   <p:cSld name="Slide 4">
     <p:bg>
       <p:bgPr>
@@ -10440,7 +10427,7 @@
               <a:buNone/>
             </a:pPr>
             <a:r>
-              <a:rPr lang="en-US" sz="1350" dirty="0">
+              <a:rPr lang="en-US" sz="1300" dirty="0">
                 <a:solidFill>
                   <a:srgbClr val="1A1A1A"/>
                 </a:solidFill>
@@ -10522,7 +10509,7 @@
               <a:buChar char="•"/>
             </a:pPr>
             <a:r>
-              <a:rPr lang="en-US" sz="1300" dirty="0">
+              <a:rPr lang="en-US" sz="1250" dirty="0">
                 <a:solidFill>
                   <a:srgbClr val="1A1A1A"/>
                 </a:solidFill>
@@ -10543,7 +10530,7 @@
               <a:buChar char="•"/>
             </a:pPr>
             <a:r>
-              <a:rPr lang="en-US" sz="1300" dirty="0">
+              <a:rPr lang="en-US" sz="1250" dirty="0">
                 <a:solidFill>
                   <a:srgbClr val="1A1A1A"/>
                 </a:solidFill>
@@ -10564,7 +10551,7 @@
               <a:buChar char="•"/>
             </a:pPr>
             <a:r>
-              <a:rPr lang="en-US" sz="1300" dirty="0">
+              <a:rPr lang="en-US" sz="1250" dirty="0">
                 <a:solidFill>
                   <a:srgbClr val="1A1A1A"/>
                 </a:solidFill>
@@ -10585,7 +10572,7 @@
               <a:buChar char="•"/>
             </a:pPr>
             <a:r>
-              <a:rPr lang="en-US" sz="1300" dirty="0">
+              <a:rPr lang="en-US" sz="1250" dirty="0">
                 <a:solidFill>
                   <a:srgbClr val="1A1A1A"/>
                 </a:solidFill>
@@ -10606,7 +10593,7 @@
               <a:buChar char="•"/>
             </a:pPr>
             <a:r>
-              <a:rPr lang="en-US" sz="1300" dirty="0">
+              <a:rPr lang="en-US" sz="1250" dirty="0">
                 <a:solidFill>
                   <a:srgbClr val="1A1A1A"/>
                 </a:solidFill>
@@ -10629,6 +10616,306 @@
 </file>
 
 <file path=ppt/slides/slide6.xml><?xml version="1.0" encoding="utf-8"?>
+<p:sld xmlns:a="http://schemas.openxmlformats.org/drawingml/2006/main" xmlns:r="http://schemas.openxmlformats.org/officeDocument/2006/relationships" xmlns:p="http://schemas.openxmlformats.org/presentationml/2006/main">
+  <p:cSld name="Slide 17">
+    <p:bg>
+      <p:bgPr>
+        <a:solidFill>
+          <a:srgbClr val="FFFFFF"/>
+        </a:solidFill>
+      </p:bgPr>
+    </p:bg>
+    <p:spTree>
+      <p:nvGrpSpPr>
+        <p:cNvPr id="1" name=""/>
+        <p:cNvGrpSpPr/>
+        <p:nvPr/>
+      </p:nvGrpSpPr>
+      <p:grpSpPr>
+        <a:xfrm>
+          <a:off x="0" y="0"/>
+          <a:ext cx="0" cy="0"/>
+          <a:chOff x="0" y="0"/>
+          <a:chExt cx="0" cy="0"/>
+        </a:xfrm>
+      </p:grpSpPr>
+      <p:sp>
+        <p:nvSpPr>
+          <p:cNvPr id="2" name="Text 0"/>
+          <p:cNvSpPr/>
+          <p:nvPr/>
+        </p:nvSpPr>
+        <p:spPr>
+          <a:xfrm>
+            <a:off x="457200" y="256032"/>
+            <a:ext cx="8229600" cy="502920"/>
+          </a:xfrm>
+          <a:prstGeom prst="rect">
+            <a:avLst/>
+          </a:prstGeom>
+          <a:noFill/>
+          <a:ln/>
+        </p:spPr>
+        <p:txBody>
+          <a:bodyPr wrap="square" lIns="0" tIns="0" rIns="0" bIns="0" rtlCol="0" anchor="ctr"/>
+          <a:lstStyle/>
+          <a:p>
+            <a:pPr indent="0" marL="0">
+              <a:buNone/>
+            </a:pPr>
+            <a:r>
+              <a:rPr lang="en-US" sz="2300" b="1" dirty="0">
+                <a:solidFill>
+                  <a:srgbClr val="1A1A1A"/>
+                </a:solidFill>
+                <a:latin typeface="Times New Roman" pitchFamily="34" charset="0"/>
+                <a:ea typeface="Times New Roman" pitchFamily="34" charset="-122"/>
+                <a:cs typeface="Times New Roman" pitchFamily="34" charset="-120"/>
+              </a:rPr>
+              <a:t xml:space="preserve">Siete hipótesis de trabajo</a:t>
+            </a:r>
+            <a:endParaRPr lang="en-US" sz="2300" dirty="0"/>
+          </a:p>
+        </p:txBody>
+      </p:sp>
+      <p:sp>
+        <p:nvSpPr>
+          <p:cNvPr id="3" name="Text 1"/>
+          <p:cNvSpPr/>
+          <p:nvPr/>
+        </p:nvSpPr>
+        <p:spPr>
+          <a:xfrm>
+            <a:off x="8229600" y="4828032"/>
+            <a:ext cx="685800" cy="274320"/>
+          </a:xfrm>
+          <a:prstGeom prst="rect">
+            <a:avLst/>
+          </a:prstGeom>
+          <a:noFill/>
+          <a:ln/>
+        </p:spPr>
+        <p:txBody>
+          <a:bodyPr wrap="square" lIns="0" tIns="0" rIns="0" bIns="0" rtlCol="0" anchor="ctr"/>
+          <a:lstStyle/>
+          <a:p>
+            <a:pPr algn="r" indent="0" marL="0">
+              <a:buNone/>
+            </a:pPr>
+            <a:r>
+              <a:rPr lang="en-US" sz="900" dirty="0">
+                <a:solidFill>
+                  <a:srgbClr val="666666"/>
+                </a:solidFill>
+                <a:latin typeface="Times New Roman" pitchFamily="34" charset="0"/>
+                <a:ea typeface="Times New Roman" pitchFamily="34" charset="-122"/>
+                <a:cs typeface="Times New Roman" pitchFamily="34" charset="-120"/>
+              </a:rPr>
+              <a:t xml:space="preserve">6 / 22</a:t>
+            </a:r>
+            <a:endParaRPr lang="en-US" sz="900" dirty="0"/>
+          </a:p>
+        </p:txBody>
+      </p:sp>
+      <p:sp>
+        <p:nvSpPr>
+          <p:cNvPr id="4" name="Text 2"/>
+          <p:cNvSpPr/>
+          <p:nvPr/>
+        </p:nvSpPr>
+        <p:spPr>
+          <a:xfrm>
+            <a:off x="457200" y="914400"/>
+            <a:ext cx="8229600" cy="3931920"/>
+          </a:xfrm>
+          <a:prstGeom prst="rect">
+            <a:avLst/>
+          </a:prstGeom>
+          <a:noFill/>
+          <a:ln/>
+        </p:spPr>
+        <p:txBody>
+          <a:bodyPr wrap="square" lIns="0" tIns="0" rIns="0" bIns="0" rtlCol="0" anchor="t"/>
+          <a:lstStyle/>
+          <a:p>
+            <a:pPr marL="177800" indent="-177800">
+              <a:spcAft>
+                <a:spcPts val="1100"/>
+              </a:spcAft>
+              <a:buSzPct val="100000"/>
+              <a:buChar char="•"/>
+            </a:pPr>
+            <a:r>
+              <a:rPr lang="en-US" sz="1350" dirty="0">
+                <a:solidFill>
+                  <a:srgbClr val="1A1A1A"/>
+                </a:solidFill>
+                <a:latin typeface="Times New Roman" pitchFamily="34" charset="0"/>
+                <a:ea typeface="Times New Roman" pitchFamily="34" charset="-122"/>
+                <a:cs typeface="Times New Roman" pitchFamily="34" charset="-120"/>
+              </a:rPr>
+              <a:t xml:space="preserve">H1 (operador) — El banco de cinco elementos estructurantes no mejora la fusión de manera uniforme: desplaza su punto de operación hacia el realce de la actividad espacial, en contra de la fidelidad a las fuentes.</a:t>
+            </a:r>
+            <a:endParaRPr lang="en-US" sz="1350" dirty="0"/>
+          </a:p>
+          <a:p>
+            <a:pPr marL="177800" indent="-177800">
+              <a:spcAft>
+                <a:spcPts val="1100"/>
+              </a:spcAft>
+              <a:buSzPct val="100000"/>
+              <a:buChar char="•"/>
+            </a:pPr>
+            <a:r>
+              <a:rPr lang="en-US" sz="1350" dirty="0">
+                <a:solidFill>
+                  <a:srgbClr val="1A1A1A"/>
+                </a:solidFill>
+                <a:latin typeface="Times New Roman" pitchFamily="34" charset="0"/>
+                <a:ea typeface="Times New Roman" pitchFamily="34" charset="-122"/>
+                <a:cs typeface="Times New Roman" pitchFamily="34" charset="-120"/>
+              </a:rPr>
+              <a:t xml:space="preserve">H2 (criterio) — El orden de mérito de los métodos no es una propiedad del operador, sino del criterio con que se lo evalúa.</a:t>
+            </a:r>
+            <a:endParaRPr lang="en-US" sz="1350" dirty="0"/>
+          </a:p>
+          <a:p>
+            <a:pPr marL="177800" indent="-177800">
+              <a:spcAft>
+                <a:spcPts val="1100"/>
+              </a:spcAft>
+              <a:buSzPct val="100000"/>
+              <a:buChar char="•"/>
+            </a:pPr>
+            <a:r>
+              <a:rPr lang="en-US" sz="1350" dirty="0">
+                <a:solidFill>
+                  <a:srgbClr val="1A1A1A"/>
+                </a:solidFill>
+                <a:latin typeface="Times New Roman" pitchFamily="34" charset="0"/>
+                <a:ea typeface="Times New Roman" pitchFamily="34" charset="-122"/>
+                <a:cs typeface="Times New Roman" pitchFamily="34" charset="-120"/>
+              </a:rPr>
+              <a:t xml:space="preserve">H3 (criterio) — La batería de nueve métricas de tipo «mayor es mejor» es insuficiente como criterio de calidad, porque sus métricas de actividad crecen monótonamente con la varianza inyectada.</a:t>
+            </a:r>
+            <a:endParaRPr lang="en-US" sz="1350" dirty="0"/>
+          </a:p>
+          <a:p>
+            <a:pPr marL="177800" indent="-177800">
+              <a:spcAft>
+                <a:spcPts val="1100"/>
+              </a:spcAft>
+              <a:buSzPct val="100000"/>
+              <a:buChar char="•"/>
+            </a:pPr>
+            <a:r>
+              <a:rPr lang="en-US" sz="1350" dirty="0">
+                <a:solidFill>
+                  <a:srgbClr val="1A1A1A"/>
+                </a:solidFill>
+                <a:latin typeface="Times New Roman" pitchFamily="34" charset="0"/>
+                <a:ea typeface="Times New Roman" pitchFamily="34" charset="-122"/>
+                <a:cs typeface="Times New Roman" pitchFamily="34" charset="-120"/>
+              </a:rPr>
+              <a:t xml:space="preserve">H4 (criterio) — La batería contiene al menos una métrica que no aporta información independiente de las demás.</a:t>
+            </a:r>
+            <a:endParaRPr lang="en-US" sz="1350" dirty="0"/>
+          </a:p>
+          <a:p>
+            <a:pPr marL="177800" indent="-177800">
+              <a:spcAft>
+                <a:spcPts val="1100"/>
+              </a:spcAft>
+              <a:buSzPct val="100000"/>
+              <a:buChar char="•"/>
+            </a:pPr>
+            <a:r>
+              <a:rPr lang="en-US" sz="1350" dirty="0">
+                <a:solidFill>
+                  <a:srgbClr val="1A1A1A"/>
+                </a:solidFill>
+                <a:latin typeface="Times New Roman" pitchFamily="34" charset="0"/>
+                <a:ea typeface="Times New Roman" pitchFamily="34" charset="-122"/>
+                <a:cs typeface="Times New Roman" pitchFamily="34" charset="-120"/>
+              </a:rPr>
+              <a:t xml:space="preserve">H5 (criterio) — La optimización no determina la configuración adoptada: ambos hiperparámetros son decisiones apoyadas en parte del mismo criterio con el que después se evalúa.</a:t>
+            </a:r>
+            <a:endParaRPr lang="en-US" sz="1350" dirty="0"/>
+          </a:p>
+          <a:p>
+            <a:pPr marL="177800" indent="-177800">
+              <a:spcAft>
+                <a:spcPts val="1100"/>
+              </a:spcAft>
+              <a:buSzPct val="100000"/>
+              <a:buChar char="•"/>
+            </a:pPr>
+            <a:r>
+              <a:rPr lang="en-US" sz="1350" dirty="0">
+                <a:solidFill>
+                  <a:srgbClr val="1A1A1A"/>
+                </a:solidFill>
+                <a:latin typeface="Times New Roman" pitchFamily="34" charset="0"/>
+                <a:ea typeface="Times New Roman" pitchFamily="34" charset="-122"/>
+                <a:cs typeface="Times New Roman" pitchFamily="34" charset="-120"/>
+              </a:rPr>
+              <a:t xml:space="preserve">H6 (criterio) — El orden de mérito de las métricas de imagen no predice el orden de utilidad en una tarea posterior, y ninguna fusión supera por un margen distinguible a la mejor modalidad individual.</a:t>
+            </a:r>
+            <a:endParaRPr lang="en-US" sz="1350" dirty="0"/>
+          </a:p>
+          <a:p>
+            <a:pPr marL="177800" indent="-177800">
+              <a:spcAft>
+                <a:spcPts val="1100"/>
+              </a:spcAft>
+              <a:buSzPct val="100000"/>
+              <a:buChar char="•"/>
+            </a:pPr>
+            <a:r>
+              <a:rPr lang="en-US" sz="1350" dirty="0">
+                <a:solidFill>
+                  <a:srgbClr val="1A1A1A"/>
+                </a:solidFill>
+                <a:latin typeface="Times New Roman" pitchFamily="34" charset="0"/>
+                <a:ea typeface="Times New Roman" pitchFamily="34" charset="-122"/>
+                <a:cs typeface="Times New Roman" pitchFamily="34" charset="-120"/>
+              </a:rPr>
+              <a:t xml:space="preserve">H7 (operador) — Con el radio y el peso igualados, el banco de cinco elementos produce un perfil distinto del disco único.</a:t>
+            </a:r>
+            <a:endParaRPr lang="en-US" sz="1350" dirty="0"/>
+          </a:p>
+          <a:p>
+            <a:pPr marL="177800" indent="-177800">
+              <a:spcAft>
+                <a:spcPts val="1100"/>
+              </a:spcAft>
+              <a:buSzPct val="100000"/>
+              <a:buChar char="•"/>
+            </a:pPr>
+            <a:r>
+              <a:rPr lang="en-US" sz="1350" dirty="0">
+                <a:solidFill>
+                  <a:srgbClr val="1A1A1A"/>
+                </a:solidFill>
+                <a:latin typeface="Times New Roman" pitchFamily="34" charset="0"/>
+                <a:ea typeface="Times New Roman" pitchFamily="34" charset="-122"/>
+                <a:cs typeface="Times New Roman" pitchFamily="34" charset="-120"/>
+              </a:rPr>
+              <a:t xml:space="preserve">H1 se contrasta en §5.4 y §5.6; H6 en §5.5; H2, H3, H4, H5 y H7 en §5.8. Las siete, con experimentos corridos y versionados.</a:t>
+            </a:r>
+            <a:endParaRPr lang="en-US" sz="1350" dirty="0"/>
+          </a:p>
+        </p:txBody>
+      </p:sp>
+    </p:spTree>
+  </p:cSld>
+  <p:clrMapOvr>
+    <a:masterClrMapping/>
+  </p:clrMapOvr>
+</p:sld>
+</file>
+
+<file path=ppt/slides/slide7.xml><?xml version="1.0" encoding="utf-8"?>
 <p:sld xmlns:a="http://schemas.openxmlformats.org/drawingml/2006/main" xmlns:r="http://schemas.openxmlformats.org/officeDocument/2006/relationships" xmlns:p="http://schemas.openxmlformats.org/presentationml/2006/main">
   <p:cSld name="Slide 6">
     <p:bg>
@@ -10949,7 +11236,7 @@
 </p:sld>
 </file>
 
-<file path=ppt/slides/slide7.xml><?xml version="1.0" encoding="utf-8"?>
+<file path=ppt/slides/slide8.xml><?xml version="1.0" encoding="utf-8"?>
 <p:sld xmlns:a="http://schemas.openxmlformats.org/drawingml/2006/main" xmlns:r="http://schemas.openxmlformats.org/officeDocument/2006/relationships" xmlns:p="http://schemas.openxmlformats.org/presentationml/2006/main">
   <p:cSld name="Slide 7">
     <p:bg>
@@ -11006,7 +11293,7 @@
                 <a:ea typeface="Times New Roman" pitchFamily="34" charset="-122"/>
                 <a:cs typeface="Times New Roman" pitchFamily="34" charset="-120"/>
               </a:rPr>
-              <a:t xml:space="preserve">5. El operador: banco de cinco elementos estructurantes y suma de ramas</a:t>
+              <a:t xml:space="preserve">5. El operador: banco de SE y suma de ramas</a:t>
             </a:r>
             <a:endParaRPr lang="en-US" sz="2300" dirty="0"/>
           </a:p>
@@ -11258,7 +11545,7 @@
 </p:sld>
 </file>
 
-<file path=ppt/slides/slide8.xml><?xml version="1.0" encoding="utf-8"?>
+<file path=ppt/slides/slide9.xml><?xml version="1.0" encoding="utf-8"?>
 <p:sld xmlns:a="http://schemas.openxmlformats.org/drawingml/2006/main" xmlns:r="http://schemas.openxmlformats.org/officeDocument/2006/relationships" xmlns:p="http://schemas.openxmlformats.org/presentationml/2006/main">
   <p:cSld name="Slide 8">
     <p:bg>
@@ -11369,7 +11656,7 @@
         <p:spPr>
           <a:xfrm>
             <a:off x="457200" y="868680"/>
-            <a:ext cx="4754880" cy="1371600"/>
+            <a:ext cx="4480560" cy="1371600"/>
           </a:xfrm>
           <a:prstGeom prst="rect">
             <a:avLst/>
@@ -11572,385 +11859,6 @@
               <a:t>ω: 0,9 → 0,4 · c₁ = c₂ = 1,5 · r ∈ [1, 25] · m ∈ [0,30; 2,00] (rango publicado)</a:t>
             </a:r>
             <a:endParaRPr lang="en-US" sz="1100" dirty="0"/>
-          </a:p>
-        </p:txBody>
-      </p:sp>
-    </p:spTree>
-  </p:cSld>
-  <p:clrMapOvr>
-    <a:masterClrMapping/>
-  </p:clrMapOvr>
-</p:sld>
-</file>
-
-<file path=ppt/slides/slide9.xml><?xml version="1.0" encoding="utf-8"?>
-<p:sld xmlns:a="http://schemas.openxmlformats.org/drawingml/2006/main" xmlns:r="http://schemas.openxmlformats.org/officeDocument/2006/relationships" xmlns:p="http://schemas.openxmlformats.org/presentationml/2006/main">
-  <p:cSld name="Slide 9">
-    <p:bg>
-      <p:bgPr>
-        <a:solidFill>
-          <a:srgbClr val="FFFFFF"/>
-        </a:solidFill>
-      </p:bgPr>
-    </p:bg>
-    <p:spTree>
-      <p:nvGrpSpPr>
-        <p:cNvPr id="1" name=""/>
-        <p:cNvGrpSpPr/>
-        <p:nvPr/>
-      </p:nvGrpSpPr>
-      <p:grpSpPr>
-        <a:xfrm>
-          <a:off x="0" y="0"/>
-          <a:ext cx="0" cy="0"/>
-          <a:chOff x="0" y="0"/>
-          <a:chExt cx="0" cy="0"/>
-        </a:xfrm>
-      </p:grpSpPr>
-      <p:sp>
-        <p:nvSpPr>
-          <p:cNvPr id="2" name="Text 0"/>
-          <p:cNvSpPr/>
-          <p:nvPr/>
-        </p:nvSpPr>
-        <p:spPr>
-          <a:xfrm>
-            <a:off x="457200" y="256032"/>
-            <a:ext cx="8229600" cy="502920"/>
-          </a:xfrm>
-          <a:prstGeom prst="rect">
-            <a:avLst/>
-          </a:prstGeom>
-          <a:noFill/>
-          <a:ln/>
-        </p:spPr>
-        <p:txBody>
-          <a:bodyPr wrap="square" lIns="0" tIns="0" rIns="0" bIns="0" rtlCol="0" anchor="ctr"/>
-          <a:lstStyle/>
-          <a:p>
-            <a:pPr indent="0" marL="0">
-              <a:buNone/>
-            </a:pPr>
-            <a:r>
-              <a:rPr lang="en-US" sz="2300" b="1" dirty="0">
-                <a:solidFill>
-                  <a:srgbClr val="1A1A1A"/>
-                </a:solidFill>
-                <a:latin typeface="Times New Roman" pitchFamily="34" charset="0"/>
-                <a:ea typeface="Times New Roman" pitchFamily="34" charset="-122"/>
-                <a:cs typeface="Times New Roman" pitchFamily="34" charset="-120"/>
-              </a:rPr>
-              <a:t xml:space="preserve">7. Diseño experimental</a:t>
-            </a:r>
-            <a:endParaRPr lang="en-US" sz="2300" dirty="0"/>
-          </a:p>
-        </p:txBody>
-      </p:sp>
-      <p:sp>
-        <p:nvSpPr>
-          <p:cNvPr id="3" name="Text 1"/>
-          <p:cNvSpPr/>
-          <p:nvPr/>
-        </p:nvSpPr>
-        <p:spPr>
-          <a:xfrm>
-            <a:off x="8229600" y="4828032"/>
-            <a:ext cx="685800" cy="274320"/>
-          </a:xfrm>
-          <a:prstGeom prst="rect">
-            <a:avLst/>
-          </a:prstGeom>
-          <a:noFill/>
-          <a:ln/>
-        </p:spPr>
-        <p:txBody>
-          <a:bodyPr wrap="square" lIns="0" tIns="0" rIns="0" bIns="0" rtlCol="0" anchor="ctr"/>
-          <a:lstStyle/>
-          <a:p>
-            <a:pPr algn="r" indent="0" marL="0">
-              <a:buNone/>
-            </a:pPr>
-            <a:r>
-              <a:rPr lang="en-US" sz="900" dirty="0">
-                <a:solidFill>
-                  <a:srgbClr val="666666"/>
-                </a:solidFill>
-                <a:latin typeface="Times New Roman" pitchFamily="34" charset="0"/>
-                <a:ea typeface="Times New Roman" pitchFamily="34" charset="-122"/>
-                <a:cs typeface="Times New Roman" pitchFamily="34" charset="-120"/>
-              </a:rPr>
-              <a:t xml:space="preserve">10 / 22</a:t>
-            </a:r>
-            <a:endParaRPr lang="en-US" sz="900" dirty="0"/>
-          </a:p>
-        </p:txBody>
-      </p:sp>
-      <p:sp>
-        <p:nvSpPr>
-          <p:cNvPr id="4" name="Text 2"/>
-          <p:cNvSpPr/>
-          <p:nvPr/>
-        </p:nvSpPr>
-        <p:spPr>
-          <a:xfrm>
-            <a:off x="457200" y="868680"/>
-            <a:ext cx="4023360" cy="274320"/>
-          </a:xfrm>
-          <a:prstGeom prst="rect">
-            <a:avLst/>
-          </a:prstGeom>
-          <a:noFill/>
-          <a:ln/>
-        </p:spPr>
-        <p:txBody>
-          <a:bodyPr wrap="square" lIns="0" tIns="0" rIns="0" bIns="0" rtlCol="0" anchor="ctr"/>
-          <a:lstStyle/>
-          <a:p>
-            <a:pPr indent="0" marL="0">
-              <a:buNone/>
-            </a:pPr>
-            <a:r>
-              <a:rPr lang="en-US" sz="1400" b="1" dirty="0">
-                <a:solidFill>
-                  <a:srgbClr val="8B1A1A"/>
-                </a:solidFill>
-                <a:latin typeface="Times New Roman" pitchFamily="34" charset="0"/>
-                <a:ea typeface="Times New Roman" pitchFamily="34" charset="-122"/>
-                <a:cs typeface="Times New Roman" pitchFamily="34" charset="-120"/>
-              </a:rPr>
-              <a:t>Benchmark de calidad</a:t>
-            </a:r>
-            <a:endParaRPr lang="en-US" sz="1400" dirty="0"/>
-          </a:p>
-        </p:txBody>
-      </p:sp>
-      <p:sp>
-        <p:nvSpPr>
-          <p:cNvPr id="5" name="Text 3"/>
-          <p:cNvSpPr/>
-          <p:nvPr/>
-        </p:nvSpPr>
-        <p:spPr>
-          <a:xfrm>
-            <a:off x="457200" y="1188720"/>
-            <a:ext cx="4023360" cy="3291840"/>
-          </a:xfrm>
-          <a:prstGeom prst="rect">
-            <a:avLst/>
-          </a:prstGeom>
-          <a:noFill/>
-          <a:ln/>
-        </p:spPr>
-        <p:txBody>
-          <a:bodyPr wrap="square" lIns="0" tIns="0" rIns="0" bIns="0" rtlCol="0" anchor="t"/>
-          <a:lstStyle/>
-          <a:p>
-            <a:pPr marL="177800" indent="-177800">
-              <a:spcAft>
-                <a:spcPts val="800"/>
-              </a:spcAft>
-              <a:buSzPct val="100000"/>
-              <a:buChar char="•"/>
-            </a:pPr>
-            <a:r>
-              <a:rPr lang="en-US" sz="1250" dirty="0">
-                <a:solidFill>
-                  <a:srgbClr val="1A1A1A"/>
-                </a:solidFill>
-                <a:latin typeface="Times New Roman" pitchFamily="34" charset="0"/>
-                <a:ea typeface="Times New Roman" pitchFamily="34" charset="-122"/>
-                <a:cs typeface="Times New Roman" pitchFamily="34" charset="-120"/>
-              </a:rPr>
-              <a:t>20 pares VIS/IR del dataset TNO (Toet, 2014).</a:t>
-            </a:r>
-            <a:endParaRPr lang="en-US" sz="1250" dirty="0"/>
-          </a:p>
-          <a:p>
-            <a:pPr marL="177800" indent="-177800">
-              <a:spcAft>
-                <a:spcPts val="800"/>
-              </a:spcAft>
-              <a:buSzPct val="100000"/>
-              <a:buChar char="•"/>
-            </a:pPr>
-            <a:r>
-              <a:rPr lang="en-US" sz="1250" dirty="0">
-                <a:solidFill>
-                  <a:srgbClr val="1A1A1A"/>
-                </a:solidFill>
-                <a:latin typeface="Times New Roman" pitchFamily="34" charset="0"/>
-                <a:ea typeface="Times New Roman" pitchFamily="34" charset="-122"/>
-                <a:cs typeface="Times New Roman" pitchFamily="34" charset="-120"/>
-              </a:rPr>
-              <a:t xml:space="preserve">7 métodos: LP, RP, DWT, DTCWT, CVT (aprox. wavelet db4), Top-Hat clásico y Propuesta → 140 fusiones.</a:t>
-            </a:r>
-            <a:endParaRPr lang="en-US" sz="1250" dirty="0"/>
-          </a:p>
-          <a:p>
-            <a:pPr marL="177800" indent="-177800">
-              <a:spcAft>
-                <a:spcPts val="800"/>
-              </a:spcAft>
-              <a:buSzPct val="100000"/>
-              <a:buChar char="•"/>
-            </a:pPr>
-            <a:r>
-              <a:rPr lang="en-US" sz="1250" dirty="0">
-                <a:solidFill>
-                  <a:srgbClr val="1A1A1A"/>
-                </a:solidFill>
-                <a:latin typeface="Times New Roman" pitchFamily="34" charset="0"/>
-                <a:ea typeface="Times New Roman" pitchFamily="34" charset="-122"/>
-                <a:cs typeface="Times New Roman" pitchFamily="34" charset="-120"/>
-              </a:rPr>
-              <a:t>Nueve métricas sin referencia (EN, SD, FE, MG, MI_vis, MI_ir, SF, SSIM, PSNR).</a:t>
-            </a:r>
-            <a:endParaRPr lang="en-US" sz="1250" dirty="0"/>
-          </a:p>
-          <a:p>
-            <a:pPr marL="177800" indent="-177800">
-              <a:spcAft>
-                <a:spcPts val="800"/>
-              </a:spcAft>
-              <a:buSzPct val="100000"/>
-              <a:buChar char="•"/>
-            </a:pPr>
-            <a:r>
-              <a:rPr lang="en-US" sz="1250" dirty="0">
-                <a:solidFill>
-                  <a:srgbClr val="1A1A1A"/>
-                </a:solidFill>
-                <a:latin typeface="Times New Roman" pitchFamily="34" charset="0"/>
-                <a:ea typeface="Times New Roman" pitchFamily="34" charset="-122"/>
-                <a:cs typeface="Times New Roman" pitchFamily="34" charset="-120"/>
-              </a:rPr>
-              <a:t>Friedman global + Wilcoxon pareado con corrección de Holm (α = 0,05).</a:t>
-            </a:r>
-            <a:endParaRPr lang="en-US" sz="1250" dirty="0"/>
-          </a:p>
-        </p:txBody>
-      </p:sp>
-      <p:sp>
-        <p:nvSpPr>
-          <p:cNvPr id="6" name="Text 4"/>
-          <p:cNvSpPr/>
-          <p:nvPr/>
-        </p:nvSpPr>
-        <p:spPr>
-          <a:xfrm>
-            <a:off x="4846320" y="868680"/>
-            <a:ext cx="3840480" cy="274320"/>
-          </a:xfrm>
-          <a:prstGeom prst="rect">
-            <a:avLst/>
-          </a:prstGeom>
-          <a:noFill/>
-          <a:ln/>
-        </p:spPr>
-        <p:txBody>
-          <a:bodyPr wrap="square" lIns="0" tIns="0" rIns="0" bIns="0" rtlCol="0" anchor="ctr"/>
-          <a:lstStyle/>
-          <a:p>
-            <a:pPr indent="0" marL="0">
-              <a:buNone/>
-            </a:pPr>
-            <a:r>
-              <a:rPr lang="en-US" sz="1400" b="1" dirty="0">
-                <a:solidFill>
-                  <a:srgbClr val="8B1A1A"/>
-                </a:solidFill>
-                <a:latin typeface="Times New Roman" pitchFamily="34" charset="0"/>
-                <a:ea typeface="Times New Roman" pitchFamily="34" charset="-122"/>
-                <a:cs typeface="Times New Roman" pitchFamily="34" charset="-120"/>
-              </a:rPr>
-              <a:t>Evaluación orientada a tarea</a:t>
-            </a:r>
-            <a:endParaRPr lang="en-US" sz="1400" dirty="0"/>
-          </a:p>
-        </p:txBody>
-      </p:sp>
-      <p:sp>
-        <p:nvSpPr>
-          <p:cNvPr id="7" name="Text 5"/>
-          <p:cNvSpPr/>
-          <p:nvPr/>
-        </p:nvSpPr>
-        <p:spPr>
-          <a:xfrm>
-            <a:off x="4846320" y="1188720"/>
-            <a:ext cx="3840480" cy="3291840"/>
-          </a:xfrm>
-          <a:prstGeom prst="rect">
-            <a:avLst/>
-          </a:prstGeom>
-          <a:noFill/>
-          <a:ln/>
-        </p:spPr>
-        <p:txBody>
-          <a:bodyPr wrap="square" lIns="0" tIns="0" rIns="0" bIns="0" rtlCol="0" anchor="t"/>
-          <a:lstStyle/>
-          <a:p>
-            <a:pPr marL="177800" indent="-177800">
-              <a:spcAft>
-                <a:spcPts val="800"/>
-              </a:spcAft>
-              <a:buSzPct val="100000"/>
-              <a:buChar char="•"/>
-            </a:pPr>
-            <a:r>
-              <a:rPr lang="en-US" sz="1250" dirty="0">
-                <a:solidFill>
-                  <a:srgbClr val="1A1A1A"/>
-                </a:solidFill>
-                <a:latin typeface="Times New Roman" pitchFamily="34" charset="0"/>
-                <a:ea typeface="Times New Roman" pitchFamily="34" charset="-122"/>
-                <a:cs typeface="Times New Roman" pitchFamily="34" charset="-120"/>
-              </a:rPr>
-              <a:t>Dataset etiquetado LLVIP (peatones nocturnos): 2.000 imágenes de entrenamiento y 500 de validación.</a:t>
-            </a:r>
-            <a:endParaRPr lang="en-US" sz="1250" dirty="0"/>
-          </a:p>
-          <a:p>
-            <a:pPr marL="177800" indent="-177800">
-              <a:spcAft>
-                <a:spcPts val="800"/>
-              </a:spcAft>
-              <a:buSzPct val="100000"/>
-              <a:buChar char="•"/>
-            </a:pPr>
-            <a:r>
-              <a:rPr lang="en-US" sz="1250" dirty="0">
-                <a:solidFill>
-                  <a:srgbClr val="1A1A1A"/>
-                </a:solidFill>
-                <a:latin typeface="Times New Roman" pitchFamily="34" charset="0"/>
-                <a:ea typeface="Times New Roman" pitchFamily="34" charset="-122"/>
-                <a:cs typeface="Times New Roman" pitchFamily="34" charset="-120"/>
-              </a:rPr>
-              <a:t>YOLOv8n reentrenado por modalidad (40 épocas), 9 entradas: VIS, IR y las 7 fusiones.</a:t>
-            </a:r>
-            <a:endParaRPr lang="en-US" sz="1250" dirty="0"/>
-          </a:p>
-          <a:p>
-            <a:pPr marL="177800" indent="-177800">
-              <a:spcAft>
-                <a:spcPts val="800"/>
-              </a:spcAft>
-              <a:buSzPct val="100000"/>
-              <a:buChar char="•"/>
-            </a:pPr>
-            <a:r>
-              <a:rPr lang="en-US" sz="1250" dirty="0">
-                <a:solidFill>
-                  <a:srgbClr val="1A1A1A"/>
-                </a:solidFill>
-                <a:latin typeface="Times New Roman" pitchFamily="34" charset="0"/>
-                <a:ea typeface="Times New Roman" pitchFamily="34" charset="-122"/>
-                <a:cs typeface="Times New Roman" pitchFamily="34" charset="-120"/>
-              </a:rPr>
-              <a:t>Etiquetas idénticas entre modalidades: la diferencia de mAP aísla el efecto del método de fusión.</a:t>
-            </a:r>
-            <a:endParaRPr lang="en-US" sz="1250" dirty="0"/>
           </a:p>
         </p:txBody>
       </p:sp>

--- a/docs/Tesis_Defensa_Presentacion.pptx
+++ b/docs/Tesis_Defensa_Presentacion.pptx
@@ -1927,10 +1927,8 @@
           <a:lstStyle/>
           <a:p>
             <a:r>
-              <a:rPr lang="en-US" dirty="0"/>
-              <a:t>r controla la escala de las estructuras que se extraen; m cuánto realce se reinyecta. La aptitud publicada F_o combina fidelidad estructural (SSIM), información (entropía) y baja distorsión (PSNR). El barrido replica el Cuadro 1 de la FPUNA: el óptimo global de F_o para este operador es r=25 con m pequeño (≈0,07), que extrae estructuras grandes pero las pondera suavemente.</a:t>
-            </a:r>
-            <a:endParaRPr lang="en-US" dirty="0"/>
+              <a:t>r controla la escala de las estructuras que se extraen; m cuánto realce se reinyecta. La aptitud publicada F_o combina fidelidad estructural (SSIM), información (entropía) y baja distorsión (PSNR), y el barrido replica el Cuadro 1 de la FPUNA. Corregir la versión anterior de esta nota: el óptimo de F_o NO es r = 25 con m ≈ 0,07 —ese es el óptimo de la aptitud paralela F_apt—. Con F_o el peso queda en m = 0,30 en las 25 configuraciones y el argmax del radio es r = 1 (1,7350) frente a r = 25 (1,7057). Si preguntan por qué m = 0,30 y no un valor mayor: el banco extrae 4,21 veces la energía de detalle del disco, así que m = 0,30 aquí equivale a m ≈ 1,26 sobre un disco único. El barrido de Ortega y Espinoza —mismo rango, misma aptitud, disco único— selecciona pesos de 0.300 a 2.000 con mediana 0.695 sobre sus 125 corridas: su óptimo cae en el INTERIOR y solo una de sus cinco escenas se ancla en el piso. El anclaje al piso es entonces del operador, no de la aptitud. Y a ellas lo que se les apoya en la cota es el radio: r = 25 en 104 de sus 125 corridas. No decir que el PSO halló r = 25.</a:t>
+            </a:r>
           </a:p>
         </p:txBody>
       </p:sp>

--- a/docs/Tesis_Defensa_Presentacion.pptx
+++ b/docs/Tesis_Defensa_Presentacion.pptx
@@ -1137,7 +1137,8 @@
           <a:lstStyle/>
           <a:p>
             <a:r>
-              <a:t>Las siete hipótesis se sostienen, y cinco de ellas son hallazgos sobre el criterio, no sobre el operador. No usar la etiqueta «parcial» para H6: con ρ = +0,214, p = 0,645 y 232 escenas, el rechazo de la hipótesis de traslación es limpio y es un aporte. No decir que el PSO halló r = 25: la búsqueda devuelve r = 1, y esa es exactamente H5.</a:t>
+              <a:rPr/>
+              <a:t>Las siete hipótesis se sostienen, y cinco de ellas son hallazgos sobre el criterio, no sobre el operador. No usar la etiqueta «parcial» para H6: con ρ = +0,214, p = 0,645 y 232 escenas, el rechazo de la hipótesis de traslación es limpio y es un aporte. Sobre H5, cuidado con el enunciado: la búsqueda NO fija el radio —r = 25 en el 51,4 % de las 500 corridas y r = 1 en el 45,6 %— y el máximo de la aptitud dentro del rango publicado está en r = 1. Eso es exactamente H5: el radio adoptado lo elige la batería de evaluación, no la optimización.</a:t>
             </a:r>
           </a:p>
         </p:txBody>
@@ -1927,7 +1928,8 @@
           <a:lstStyle/>
           <a:p>
             <a:r>
-              <a:t>r controla la escala de las estructuras que se extraen; m cuánto realce se reinyecta. La aptitud publicada F_o combina fidelidad estructural (SSIM), información (entropía) y baja distorsión (PSNR), y el barrido replica el Cuadro 1 de la FPUNA. Corregir la versión anterior de esta nota: el óptimo de F_o NO es r = 25 con m ≈ 0,07 —ese es el óptimo de la aptitud paralela F_apt—. Con F_o el peso queda en m = 0,30 en las 25 configuraciones y el argmax del radio es r = 1 (1,7350) frente a r = 25 (1,7057). Si preguntan por qué m = 0,30 y no un valor mayor: el banco extrae 4,21 veces la energía de detalle del disco, así que m = 0,30 aquí equivale a m ≈ 1,26 sobre un disco único. El barrido de Ortega y Espinoza —mismo rango, misma aptitud, disco único— selecciona pesos de 0.300 a 2.000 con mediana 0.695 sobre sus 125 corridas: su óptimo cae en el INTERIOR y solo una de sus cinco escenas se ancla en el piso. El anclaje al piso es entonces del operador, no de la aptitud. Y a ellas lo que se les apoya en la cota es el radio: r = 25 en 104 de sus 125 corridas. No decir que el PSO halló r = 25.</a:t>
+              <a:rPr/>
+              <a:t>r controla la escala de las estructuras que se extraen; m cuánto realce se reinyecta. La aptitud publicada F_o combina fidelidad estructural (SSIM), información (entropía) y baja distorsión (PSNR), y el barrido replica el Cuadro 1 de la FPUNA. Precisión sobre el óptimo, por si preguntan: dentro del rango publicado (m ≥ 0,30) el argmax de F_o es r = 1 con 1,7350 frente a 1,7057 en r = 25; sin esa restricción el óptimo de F_o es r = 25 con m = 0,07 y 1,7715 —el radio que esta tesis adopta—, y ahí coincide con el de la aptitud paralela F_apt, que también pica en m ≈ 0,0703. Con 500 corridas el peso queda en el piso en 499 y el radio se reparte 51,4 % en r = 25 contra 45,6 % en r = 1: la búsqueda no fija el radio. Si preguntan por qué m = 0,30 y no un valor mayor: el banco extrae 4,21 veces la energía de detalle del disco, así que m = 0,30 aquí equivale a m ≈ 1,26 sobre un disco único. El barrido de Ortega y Espinoza —mismo rango, misma aptitud, disco único— selecciona pesos de 0,300 a 2,000 con mediana 0,695 sobre sus 125 corridas: su óptimo cae en el INTERIOR y solo una de sus cinco escenas se ancla en el piso. El anclaje al piso es entonces del operador, no de la aptitud. Y a ellas lo que se les apoya en la cota es el radio: r = 25 en 104 de sus 125 corridas. No decir que el PSO «halló» r = 25 como óptimo: lo devuelve en el 51,4 % de las corridas, pero el máximo dentro del rango está en r = 1; el radio lo fija la batería de evaluación.</a:t>
             </a:r>
           </a:p>
         </p:txBody>
@@ -2875,7 +2877,7 @@
                 <a:ea typeface="Times New Roman" pitchFamily="34" charset="-122"/>
                 <a:cs typeface="Times New Roman" pitchFamily="34" charset="-120"/>
               </a:rPr>
-              <a:t>20 pares VIS/IR del dataset TNO (Toet, 2014).</a:t>
+              <a:t>20 pares VIS/IR del dataset TNO (Toet, 2017).</a:t>
             </a:r>
             <a:endParaRPr lang="en-US" sz="1250" dirty="0"/>
           </a:p>
@@ -8109,7 +8111,7 @@
                 <a:ea typeface="Times New Roman" pitchFamily="34" charset="-122"/>
                 <a:cs typeface="Times New Roman" pitchFamily="34" charset="-120"/>
               </a:rPr>
-              <a:t xml:space="preserve">Conteo por escena sobre 232 escenas con ambas clases: el mejor caso es la pirámide de Laplace (57,8 %) y cuatro de las siete fusiones quedan por debajo del visible solo (53,0 %). La propuesta recupera ambas en el 50,0 %, con 8 escenas ganadas y 15 perdidas frente al visible (McNemar exacto p = 0,2100), y resuelve 2 de las 90 escenas críticas.</a:t>
+              <a:t xml:space="preserve">Conteo por escena sobre 232 escenas con ambas clases: el mejor caso es la pirámide de Laplace (57,8 %) y cuatro de las siete fusiones quedan por debajo del visible solo (53,0 %). La propuesta recupera ambas en el 50,0 %, con 8 escenas ganadas y 15 perdidas frente al visible (McNemar exacto p = 0,2100), y resuelve 2 de las 90 escenas críticas.</a:t>
             </a:r>
             <a:endParaRPr lang="en-US" sz="1150" dirty="0"/>
           </a:p>
@@ -8453,7 +8455,7 @@
                 <a:ea typeface="Times New Roman" pitchFamily="34" charset="-122"/>
                 <a:cs typeface="Times New Roman" pitchFamily="34" charset="-120"/>
               </a:rPr>
-              <a:t xml:space="preserve">La optimización NO determina la configuración adoptada. El argmax de la aptitud publicada es r = 1 (Fo = 1,7350) en 16 de las 25 configuraciones, no r = 25 (1,7057); y m queda en 0,30 porque es el piso del rango. El radio lo elige la batería de evaluación y el peso se justifica por criterios independientes: equivalencia del realce y saturación del 0,73 % frente al 6,50 % que produciría m = 1.</a:t>
+              <a:t xml:space="preserve">La optimización NO determina la configuración adoptada. En 500 corridas la búsqueda no fija el radio: r = 25 en el 51,4 % y r = 1 en el 45,6 %; y el máximo de la aptitud publicada dentro del rango está en r = 1 (1,7350), no en r = 25 (1,7057). El peso queda en el piso 0,30 en 499 de 500. El radio lo elige la batería de evaluación y el peso, la saturación: 0,73 % contra el 6,50 % que produciría m = 1.</a:t>
             </a:r>
             <a:endParaRPr lang="en-US" sz="1250" dirty="0"/>
           </a:p>
@@ -8570,7 +8572,7 @@
                 <a:ea typeface="Times New Roman" pitchFamily="34" charset="-122"/>
                 <a:cs typeface="Times New Roman" pitchFamily="34" charset="-120"/>
               </a:rPr>
-              <a:t xml:space="preserve">SE SOSTIENE con muestra suficiente: lo que queda rechazado es la traslación de la calidad a la tarea, no la hipótesis. Ninguna fusión supera al infrarrojo solo en LLVIP (0,971 frente a 0,952 de la mejor fusión), el orden de calidad no predice el mAP (ρ = +0,214; p = 0,645) y en el conteo por escena de M3FD la propuesta queda por debajo del visible (50,0 % frente a 53,0 %; McNemar exacto p = 0,2100; n = 232).</a:t>
+              <a:t xml:space="preserve">SE SOSTIENE con muestra suficiente: lo que queda rechazado es la traslación de la calidad a la tarea, no la hipótesis. Ninguna fusión supera al infrarrojo solo en LLVIP (0,971 frente a 0,952 de la mejor fusión), el orden de calidad no predice el mAP (ρ = +0,214; p = 0,645) y en el conteo por escena de M3FD la propuesta queda por debajo del visible (50,0 % frente a 53,0 %; McNemar exacto p = 0,2100; n = 232).</a:t>
             </a:r>
             <a:endParaRPr lang="en-US" sz="1250" dirty="0"/>
           </a:p>
@@ -9107,7 +9109,7 @@
                 <a:ea typeface="Times New Roman" pitchFamily="34" charset="-122"/>
                 <a:cs typeface="Times New Roman" pitchFamily="34" charset="-120"/>
               </a:rPr>
-              <a:t xml:space="preserve">El barrido de 25 configuraciones con la aptitud y el rango publicados converge a m* = 0,30 en todas ellas, el piso del rango; el argmax del radio es r = 1 y se adopta r = 25 por el criterio de evaluación, no por la optimización.</a:t>
+              <a:t xml:space="preserve">El barrido con la aptitud y el rango publicados, repetido 20 veces por celda —500 corridas—, converge a m* = 0,30 en el 99,8 %, el piso del rango; el máximo de la aptitud está en r = 1 y se adopta r = 25 por el criterio de evaluación, no por la optimización.</a:t>
             </a:r>
             <a:endParaRPr lang="en-US" sz="1350" dirty="0"/>
           </a:p>
@@ -11770,7 +11772,7 @@
                 <a:ea typeface="Times New Roman" pitchFamily="34" charset="-122"/>
                 <a:cs typeface="Times New Roman" pitchFamily="34" charset="-120"/>
               </a:rPr>
-              <a:t>Barrido de 25 configuraciones del enjambre: partículas 2–10 × iteraciones 10–50 (réplica de Ortega y Espinoza, 2025).</a:t>
+              <a:t>Barrido de 25 configuraciones del enjambre: partículas 2–10 × iteraciones 10–50 (réplica de Ortega y Espinoza, 2025), repetido 20 veces cada una: 500 corridas.</a:t>
             </a:r>
             <a:endParaRPr lang="en-US" sz="1300" dirty="0"/>
           </a:p>
@@ -11791,7 +11793,7 @@
                 <a:ea typeface="Times New Roman" pitchFamily="34" charset="-122"/>
                 <a:cs typeface="Times New Roman" pitchFamily="34" charset="-120"/>
               </a:rPr>
-              <a:t xml:space="preserve">Las 25 configuraciones convergen al mismo peso, m* = 0,30, porque es el piso del rango publicado: la aptitud decrece de forma monótona en m. Y el argmax del radio dentro de ese rango es r = 1 (Fo = 1,7350) —en 16 de las 25 configuraciones— y no r = 25 (Fo = 1,7057), que aparece en 8. La configuración adoptada, r = 25, la selecciona el bloque de actividad de la batería de evaluación, no la optimización.</a:t>
+              <a:t xml:space="preserve">El peso converge a m* = 0,30 en 499 de las 500 corridas: es el piso del rango y la aptitud decrece de forma monótona en m. El radio no lo fija la búsqueda —r = 25 en el 51,4 % y r = 1 en el 45,6 %—, y el máximo de la aptitud dentro del rango está en r = 1 (1,7350) contra 1,7057 en r = 25. El r = 25 adoptado lo selecciona el bloque de actividad de la batería de evaluación, no la optimización.</a:t>
             </a:r>
             <a:endParaRPr lang="en-US" sz="1300" dirty="0"/>
           </a:p>

--- a/docs/Tesis_Defensa_Presentacion.pptx
+++ b/docs/Tesis_Defensa_Presentacion.pptx
@@ -524,7 +524,7 @@
           <a:p>
             <a:r>
               <a:rPr lang="en-US" dirty="0"/>
-              <a:t>Saludo a la mesa. Presentar el título y a los autores. Una frase: la tesis propone y valida un método de fusión de imágenes visibles e infrarrojas basado en morfología matemática de una sola escala, optimizado automáticamente.</a:t>
+              <a:t>Saludo a la mesa. Presentar el título y a los autores. Una frase de encuadre: la tesis tiene DOS aportes — un operador de fusión VIS/IR por morfología matemática de una sola escala, y una auditoría del protocolo de evaluación con que se lo juzga, usando el propio desarrollo como caso de estudio. No decir «valida»: la lámina 4 sostiene que el método desplaza el punto de operación, no que sea mejor.</a:t>
             </a:r>
             <a:endParaRPr lang="en-US" dirty="0"/>
           </a:p>
@@ -612,7 +612,7 @@
           <a:p>
             <a:r>
               <a:rPr lang="en-US" dirty="0"/>
-              <a:t>Escena representativa: la propuesta (recuadro rojo) integra la firma térmica de las personas con la textura de la casa y la vegetación, con menos halos y ruido que RP/DWT y más contraste local que el clásico.</a:t>
+              <a:t>Escena representativa: la propuesta (recuadro rojo) integra la firma térmica de las personas con la textura de la casa y la vegetación. NO decir «menos halos y ruido que RP/DWT»: es al revés. En la media de los 20 pares la propuesta realza más —SD 0,144 contra 0,127 de RP y 0,117 de DWT; entropía 6,986 contra 6,810 y 6,682— y ese realce se paga en artefactos: Nabf 0,374 contra 0,224 y 0,241. Frente al Top-Hat clásico sí es más limpia (Nabf 0,374 contra 0,586) y con más contraste (0,144 contra 0,135). Es un punto de operación desplazado, no dominancia. Nabf no está entre las nueve reportadas y el informe lo declara: conviene decirlo antes de que lo pregunten.</a:t>
             </a:r>
             <a:endParaRPr lang="en-US" dirty="0"/>
           </a:p>
@@ -700,7 +700,7 @@
           <a:p>
             <a:r>
               <a:rPr lang="en-US" dirty="0"/>
-              <a:t xml:space="preserve">Negritas = mejor por columna. No hay método universalmente dominante: la propuesta lidera la entropía y la eficiencia de fusión, LP el contraste (SD) y la información mutua, DTCWT la similitud estructural y el Top-Hat clásico la actividad bruta (MG y SF). El perfil de la propuesta es la actividad espacial, NO la fidelidad: su SSIM (0,658) es el penúltimo de los siete, solo por encima del Top-Hat clásico. Si se recuerda la versión anterior de esta nota, que decía lo contrario, corregirlo en voz alta.</a:t>
+              <a:t xml:space="preserve">Negritas = mejor por columna. No hay método universalmente dominante: la propuesta lidera la entropía y la eficiencia de fusión, LP el contraste (SD) y la información mutua, DTCWT la similitud estructural y el Top-Hat clásico la actividad bruta (MG y SF). El perfil de la propuesta es la actividad espacial, NO la fidelidad: su SSIM (0,658) es el penúltimo de los siete, solo por encima del Top-Hat clásico. Si preguntan por la caída del SSIM: es el precio del realce, y la lámina 13 lo cuantifica — el bloque de fidelidad da 17 de 20 contrastes adversos y significativos, mientras el de actividad espacial da 24 de 25 favorables.</a:t>
             </a:r>
             <a:endParaRPr lang="en-US" dirty="0"/>
           </a:p>
@@ -788,7 +788,7 @@
           <a:p>
             <a:r>
               <a:rPr lang="en-US" dirty="0"/>
-              <a:t>La evidencia estadística sostiene las ventajas donde la propuesta las reclama: limpieza y estructura, con significancia tras corregir por comparaciones múltiples. El ranking global es honesto: la propuesta no domina todo; domina su perfil.</a:t>
+              <a:t>Lo que la estadística respalda es la ACTIVIDAD ESPACIAL, no la fidelidad: cuidado con decir «limpieza y estructura», que es justo el bloque donde la propuesta pierde. El recuento por bloques es lo que sostiene H1: 24 de 25 contrastes a favor en actividad —el único que no alcanza significancia es SD frente a la pirámide de Laplace, p_Holm = 0,231— y 17 de 20 en contra en fidelidad. La propuesta pierde SSIM contra los cinco métodos de referencia: su rango medio en SSIM es 5,9 de 7. Nombrar las dos derrotas contra el Top-Hat clásico antes de que las nombre la mesa: el clásico realza más (MG 0,0478 contra 0,0355 y SF 23,10 contra 17,44) y la propuesta preserva más estructura e información (SSIM 0,658 contra 0,564, y las dos informaciones mutuas). El ranking sale de promediar los rangos por métrica (3,394), no de rankear los promedios (3,556); poder explicarlo si lo preguntan.</a:t>
             </a:r>
             <a:endParaRPr lang="en-US" dirty="0"/>
           </a:p>
@@ -876,7 +876,7 @@
           <a:p>
             <a:r>
               <a:rPr lang="en-US" dirty="0"/>
-              <a:t>El hallazgo más matizado: fusionar aporta muchísimo frente al VIS, pero ninguna fusión supera al IR puro en esta tarea nocturna. Entre fusiones, las diferencias son pequeñas: la calidad de imagen no se traslada automáticamente al mAP.</a:t>
+              <a:t>El hallazgo más matizado: fusionar aporta mucho frente al VIS —de 0,813 a la banda 0,906–0,952— pero ninguna fusión supera al IR puro (0,971) en esta tarea nocturna. NO decir que entre fusiones las diferencias son pequeñas: la propuesta queda 0,046 por debajo de la mejor fusión, la mitad de lo que la fusión le gana al visible. El instrumento que convierte la observación en resultado es la correlación de Spearman entre el rango de calidad y el mAP: sin asociación y con el signo contrario al esperado. Optimizar actividad y optimizar desempeño en tarea son objetivos distintos, y un protocolo de evaluación debe reportar los dos. Si preguntan por el orden entre fusiones: se usó el checkpoint final (last.pt) y una sola semilla, así que los 0,0001 que separan a la propuesta de la Ratio Pyramid no son distinguibles del ruido de entrenamiento.</a:t>
             </a:r>
             <a:endParaRPr lang="en-US" dirty="0"/>
           </a:p>
@@ -1050,7 +1050,7 @@
           <a:p>
             <a:r>
               <a:rPr lang="en-US" dirty="0"/>
-              <a:t>Cerrar M3FD con la evidencia visual: dos escenas reales de la validación. En la primera, las personas están bajo el puente a contraluz: invisibles para el detector en VIS, obvias en IR y recuperadas por la fusión. En la segunda, el semáforo y las luces no emiten calor: el IR no los ve, la fusión sí — junto con las personas. Una sola imagen, ambas clases: eso es lo que la fusión compra.</a:t>
+              <a:t>Diapositiva de RESERVA: no se expone en secuencia, mostrarla solo si la mesa pide el caso visual. Aclarar de entrada que es una ilustración y no la evidencia: lo que sostiene H6 es el conteo sobre las 232 escenas de la lámina 18. Los números son DETECCIONES sobre el umbral (conf ≥ 0,30), no aciertos emparejados con la verdad de campo. En la primera (00389), calle nocturna a contraluz: el visible detecta 3 personas, el infrarrojo 10 y la fusión 11, sobre 10 reales. Decir los tres números, no que el visible no ve nada. Y adelantarse al contraejemplo: en esa misma escena la fusión pierde una lámpara, 1 contra las 2 del visible, que son las 2 reales. En la segunda (00231) el infrarrojo NO es ciego a las luces: detecta 1 de las 5, se degrada en esa clase (AP@0,5 Lamp = 0,348), pero las ve. Lo que la fusión compra es sostener las dos clases a la vez: 8 personas y 7 lámparas, contra 10 y 1 del infrarrojo y 4 y 5 del visible —verdad de campo, 12 personas y 5 lámparas—. Ese es el punto: no ver lo que ninguna modalidad ve, sino no perder una clase para ganar la otra.</a:t>
             </a:r>
             <a:endParaRPr lang="en-US" dirty="0"/>
           </a:p>
@@ -1225,7 +1225,7 @@
           <a:p>
             <a:r>
               <a:rPr lang="en-US" dirty="0"/>
-              <a:t>Cinco conclusiones: método formulado, óptimo hallado, perfil de calidad validado, ventaja sobre el clásico demostrada, y la lección sobre calidad vs. tarea.</a:t>
+              <a:t>Cinco conclusiones: método formulado; punto de operación adoptado; perfil de calidad validado; ventaja sobre el clásico demostrada; y la lección sobre calidad vs. tarea. No decir «óptimo hallado»: la optimización no lo fija, y eso es H5. Dentro del rango publicado el máximo de la aptitud está en r = 1 (1,7350) contra 1,7057 en r = 25, y el peso queda en el piso, m = 0,30, en 499 de las 500 corridas. El r = 25 lo elige la batería de evaluación.</a:t>
             </a:r>
             <a:endParaRPr lang="en-US" dirty="0"/>
           </a:p>
@@ -1665,7 +1665,7 @@
           <a:p>
             <a:r>
               <a:rPr lang="en-US" dirty="0"/>
-              <a:t>Un objetivo general y cuatro específicos: formular, optimizar, comparar y evaluar en tarea. Cada específico se responde en una sección de resultados.</a:t>
+              <a:t>Un objetivo general y CINCO específicos: formular, delimitar el alcance del PSO, comparar, auditar la batería de métricas y evaluar en tarea. Son cinco, no cuatro: el que se olvida es OE4, la auditoría de la batería, que es la mitad del segundo aporte. El general también tiene dos mitades —el operador y la auditoría del protocolo con que se lo juzga—, y esa segunda se reparte entre OE2, OE4 y OE5. Cada específico se responde en una sección de resultados.</a:t>
             </a:r>
             <a:endParaRPr lang="en-US" dirty="0"/>
           </a:p>
@@ -1841,7 +1841,7 @@
           <a:p>
             <a:r>
               <a:rPr lang="en-US" dirty="0"/>
-              <a:t>El corazón de la tesis, leído sobre el flujograma: cinco elementos estructurantes (un disco + cuatro líneas de largo 2r+1) por fuente; las respuestas lineales se promedian y se SUMAN a la del disco — la suma acumula evidencia de ambas geometrías, el máximo solo elige una. Entre fuentes sí se toma el máximo, y la reconstrucción pondera con m. El PSO (caja punteada) calibra r y m.</a:t>
+              <a:t>El corazón del primer aporte, leído sobre el flujograma: cinco elementos estructurantes (un disco + cuatro líneas de largo 2r+1) por fuente; las respuestas lineales se promedian y se SUMAN a la del disco — la suma acumula evidencia de ambas geometrías, el máximo solo elige una. Entre fuentes sí se toma el máximo, y la reconstrucción pondera con m. La caja punteada: la búsqueda recorre (r, m), pero solo el peso sale de ahí, m = 0,30, el piso del rango publicado. No decir que el PSO calibra r y m — el propio flujograma dice «el radio es decisión de diseño»—: r = 25 lo elige la batería de evaluación, y el alcance real de la optimización es la lámina siguiente.</a:t>
             </a:r>
             <a:endParaRPr lang="en-US" dirty="0"/>
           </a:p>

--- a/docs/Tesis_Defensa_Presentacion.pptx
+++ b/docs/Tesis_Defensa_Presentacion.pptx
@@ -1531,6 +1531,311 @@
 </p:notes>
 </file>
 
+<file path=ppt/notesSlides/notesSlide20.xml><?xml version="1.0" encoding="utf-8"?>
+<p:notes xmlns:a="http://schemas.openxmlformats.org/drawingml/2006/main" xmlns:p="http://schemas.openxmlformats.org/presentationml/2006/main" xmlns:r="http://schemas.openxmlformats.org/officeDocument/2006/relationships">
+  <p:cSld>
+    <p:spTree>
+      <p:nvGrpSpPr>
+        <p:cNvPr id="1" name=""/>
+        <p:cNvGrpSpPr/>
+        <p:nvPr/>
+      </p:nvGrpSpPr>
+      <p:grpSpPr>
+        <a:xfrm>
+          <a:off x="0" y="0"/>
+          <a:ext cx="0" cy="0"/>
+          <a:chOff x="0" y="0"/>
+          <a:chExt cx="0" cy="0"/>
+        </a:xfrm>
+      </p:grpSpPr>
+      <p:sp>
+        <p:nvSpPr>
+          <p:cNvPr id="2" name="Slide Image Placeholder 1"/>
+          <p:cNvSpPr>
+            <a:spLocks noGrp="1"/>
+          </p:cNvSpPr>
+          <p:nvPr>
+            <p:ph type="sldImg" idx="2"/>
+          </p:nvPr>
+        </p:nvSpPr>
+        <p:spPr/>
+      </p:sp>
+      <p:sp>
+        <p:nvSpPr>
+          <p:cNvPr id="3" name="Notes Placeholder 2"/>
+          <p:cNvSpPr>
+            <a:spLocks noGrp="1"/>
+          </p:cNvSpPr>
+          <p:nvPr>
+            <p:ph type="body" idx="3" sz="quarter"/>
+          </p:nvPr>
+        </p:nvSpPr>
+        <p:spPr/>
+        <p:txBody>
+          <a:bodyPr/>
+          <a:lstStyle/>
+          <a:p>
+            <a:r>
+              <a:t>Siete hipótesis, dos familias: dos del operador (H1 y H7) y CINCO del criterio (H2 a H6) — cinco, no cuatro. Es el corte de la lámina 4: H1 y H7, primer aporte; H2 a H6, segundo. No leer las siete: leer H1, H2 y H6 y remitir al último párrafo, que es el mapa — H1 en §5.4 y §5.6, H6 en §5.5, las otras cinco en §5.8, la auditoría; ahí cae también H7, del operador, por la ablación con (r, m) igualados. H1 afirma desplazamiento del punto de operación, no mejora uniforme: la prueba por bloques está en la lámina 13. Sostener H6 equivale a rechazar que la calidad se traslade a la detección: es un resultado, no una limitación — 232 escenas de M3FD, 50,0 % contra 53,0 % del visible, y ρ = +0,214 con p = 0,645 en LLVIP. Si preguntan por H5: la búsqueda no fija el radio —r = 25 en el 51,4 % de las 500 corridas, r = 1 en el 45,6 %— y el máximo dentro del rango está en r = 1; no decir «el PSO halló r = 25». Anunciar que las siete se sostienen; el contraste, en la 19.</a:t>
+            </a:r>
+          </a:p>
+        </p:txBody>
+      </p:sp>
+      <p:sp>
+        <p:nvSpPr>
+          <p:cNvPr id="4" name="Slide Number Placeholder 3"/>
+          <p:cNvSpPr>
+            <a:spLocks noGrp="1"/>
+          </p:cNvSpPr>
+          <p:nvPr>
+            <p:ph type="sldNum" idx="5" sz="quarter"/>
+          </p:nvPr>
+        </p:nvSpPr>
+        <p:spPr/>
+      </p:sp>
+    </p:spTree>
+  </p:cSld>
+  <p:clrMapOvr>
+    <a:masterClrMapping/>
+  </p:clrMapOvr>
+</p:notes>
+</file>
+
+<file path=ppt/notesSlides/notesSlide21.xml><?xml version="1.0" encoding="utf-8"?>
+<p:notes xmlns:a="http://schemas.openxmlformats.org/drawingml/2006/main" xmlns:p="http://schemas.openxmlformats.org/presentationml/2006/main" xmlns:r="http://schemas.openxmlformats.org/officeDocument/2006/relationships">
+  <p:cSld>
+    <p:spTree>
+      <p:nvGrpSpPr>
+        <p:cNvPr id="1" name=""/>
+        <p:cNvGrpSpPr/>
+        <p:nvPr/>
+      </p:nvGrpSpPr>
+      <p:grpSpPr>
+        <a:xfrm>
+          <a:off x="0" y="0"/>
+          <a:ext cx="0" cy="0"/>
+          <a:chOff x="0" y="0"/>
+          <a:chExt cx="0" cy="0"/>
+        </a:xfrm>
+      </p:grpSpPr>
+      <p:sp>
+        <p:nvSpPr>
+          <p:cNvPr id="2" name="Slide Image Placeholder 1"/>
+          <p:cNvSpPr>
+            <a:spLocks noGrp="1"/>
+          </p:cNvSpPr>
+          <p:nvPr>
+            <p:ph type="sldImg" idx="2"/>
+          </p:nvPr>
+        </p:nvSpPr>
+        <p:spPr/>
+      </p:sp>
+      <p:sp>
+        <p:nvSpPr>
+          <p:cNvPr id="3" name="Notes Placeholder 2"/>
+          <p:cNvSpPr>
+            <a:spLocks noGrp="1"/>
+          </p:cNvSpPr>
+          <p:nvPr>
+            <p:ph type="body" idx="3" sz="quarter"/>
+          </p:nvPr>
+        </p:nvSpPr>
+        <p:spPr/>
+        <p:txBody>
+          <a:bodyPr/>
+          <a:lstStyle/>
+          <a:p>
+            <a:r>
+              <a:t>El resultado más fuerte del segundo aporte: presentarlo antes de que la mesa lo encuentre en el repositorio. No decir que la propuesta es ruido: con las nueve la propuesta es 1.ª de 14 (6,383) y el ruido 3.º (6,767). El mensaje es otro: la batería mide actividad espacial, no calidad de fusión — nueve métricas todas «mayor es mejor», ninguna que penalice artefactos. Una consecuencia metodológica por hallazgo: métrica de dirección inversa (H3) y declarar la redundancia (H4).</a:t>
+            </a:r>
+          </a:p>
+          <a:p>
+            <a:r>
+              <a:t>Scripts, si preguntan: el control negativo es run_control_negativo.py (control_negativo_ranking.csv); la redundancia de FE sale de run_stats_analysis.py —avg_rank_sin_FE de ranking_methods.csv y el χ² de friedman_results.csv—. NO decir que los dos salen de run_control_negativo.py.</a:t>
+            </a:r>
+          </a:p>
+          <a:p>
+            <a:r>
+              <a:t>Adelantarse a dos objeciones. Una: al sumar Nabf la imagen base pasa a la propuesta, 6,690 contra 6,760; es el punto de operación desplazado hacia el realce, y pasa solo en esa composición — con las diecisiete la propuesta vuelve a pasarla, 5,344 contra 6,521. Dos: sin FE la propuesta sigue 1.ª, pero solo cuatro de las siete posiciones se conservan y el Top-Hat clásico cae del 3.º al 6.º (3,944 → 4,131).</a:t>
+            </a:r>
+          </a:p>
+          <a:p>
+            <a:r>
+              <a:t>Libro: §5.8.2 el control negativo (H3), §5.8.1 la redundancia (H4, junto con H2).</a:t>
+            </a:r>
+          </a:p>
+        </p:txBody>
+      </p:sp>
+      <p:sp>
+        <p:nvSpPr>
+          <p:cNvPr id="4" name="Slide Number Placeholder 3"/>
+          <p:cNvSpPr>
+            <a:spLocks noGrp="1"/>
+          </p:cNvSpPr>
+          <p:nvPr>
+            <p:ph type="sldNum" idx="5" sz="quarter"/>
+          </p:nvPr>
+        </p:nvSpPr>
+        <p:spPr/>
+      </p:sp>
+    </p:spTree>
+  </p:cSld>
+  <p:clrMapOvr>
+    <a:masterClrMapping/>
+  </p:clrMapOvr>
+</p:notes>
+</file>
+
+<file path=ppt/notesSlides/notesSlide22.xml><?xml version="1.0" encoding="utf-8"?>
+<p:notes xmlns:a="http://schemas.openxmlformats.org/drawingml/2006/main" xmlns:p="http://schemas.openxmlformats.org/presentationml/2006/main" xmlns:r="http://schemas.openxmlformats.org/officeDocument/2006/relationships">
+  <p:cSld>
+    <p:spTree>
+      <p:nvGrpSpPr>
+        <p:cNvPr id="1" name=""/>
+        <p:cNvGrpSpPr/>
+        <p:nvPr/>
+      </p:nvGrpSpPr>
+      <p:grpSpPr>
+        <a:xfrm>
+          <a:off x="0" y="0"/>
+          <a:ext cx="0" cy="0"/>
+          <a:chOff x="0" y="0"/>
+          <a:chExt cx="0" cy="0"/>
+        </a:xfrm>
+      </p:grpSpPr>
+      <p:sp>
+        <p:nvSpPr>
+          <p:cNvPr id="2" name="Slide Image Placeholder 1"/>
+          <p:cNvSpPr>
+            <a:spLocks noGrp="1"/>
+          </p:cNvSpPr>
+          <p:nvPr>
+            <p:ph type="sldImg" idx="2"/>
+          </p:nvPr>
+        </p:nvSpPr>
+        <p:spPr/>
+      </p:sp>
+      <p:sp>
+        <p:nvSpPr>
+          <p:cNvPr id="3" name="Notes Placeholder 2"/>
+          <p:cNvSpPr>
+            <a:spLocks noGrp="1"/>
+          </p:cNvSpPr>
+          <p:nvPr>
+            <p:ph type="body" idx="3" sz="quarter"/>
+          </p:nvPr>
+        </p:nvSpPr>
+        <p:spPr/>
+        <p:txBody>
+          <a:bodyPr/>
+          <a:lstStyle/>
+          <a:p>
+            <a:r>
+              <a:t>Es el segundo aporte, no un resultado del operador: H2. Las dos mitades contestan por adelantado dos objeciones: «eligió las métricas que le convienen» y «ajustó sus hiperparámetros y dejó a los comparativos por defecto». Las dos versionadas, por vías distintas: la de las diecisiete métricas sale de all_metrics.csv —el mismo evaluador ya las calcula; el ranking lo arma make_avances_report.py—; la del ajuste simétrico, de run_ajuste_comparativos.py. Si preguntan por qué cae con las diecisiete: las ocho añadidas pesan bordes y artefactos —Nabf 0,374 contra 0,114 de la pirámide de Laplace, su peor rango de las diecisiete—. Adelantarse a «¿y si ajustaban también la propuesta?»: el mismo criterio le vuelve a elegir r = 25 entre once radios, así que ese escenario da lo mismo, 3,583. El matiz que lo salva es el peso: el clásico ajustado conserva m = 1; a peso igualado la propuesta gana por 0,166 —3,528 frente a 3,694—. Dar la cifra, no decir «con holgura». De reserva, no está en la lámina: las diecisiete CON comparativos ajustados dan 3,821, tercera, detrás de LP 3,141 y DTCWT 3,362 — el libro ya lo dice así, no hay errata que declarar.</a:t>
+            </a:r>
+          </a:p>
+        </p:txBody>
+      </p:sp>
+      <p:sp>
+        <p:nvSpPr>
+          <p:cNvPr id="4" name="Slide Number Placeholder 3"/>
+          <p:cNvSpPr>
+            <a:spLocks noGrp="1"/>
+          </p:cNvSpPr>
+          <p:nvPr>
+            <p:ph type="sldNum" idx="5" sz="quarter"/>
+          </p:nvPr>
+        </p:nvSpPr>
+        <p:spPr/>
+      </p:sp>
+    </p:spTree>
+  </p:cSld>
+  <p:clrMapOvr>
+    <a:masterClrMapping/>
+  </p:clrMapOvr>
+</p:notes>
+</file>
+
+<file path=ppt/notesSlides/notesSlide23.xml><?xml version="1.0" encoding="utf-8"?>
+<p:notes xmlns:a="http://schemas.openxmlformats.org/drawingml/2006/main" xmlns:p="http://schemas.openxmlformats.org/presentationml/2006/main" xmlns:r="http://schemas.openxmlformats.org/officeDocument/2006/relationships">
+  <p:cSld>
+    <p:spTree>
+      <p:nvGrpSpPr>
+        <p:cNvPr id="1" name=""/>
+        <p:cNvGrpSpPr/>
+        <p:nvPr/>
+      </p:nvGrpSpPr>
+      <p:grpSpPr>
+        <a:xfrm>
+          <a:off x="0" y="0"/>
+          <a:ext cx="0" cy="0"/>
+          <a:chOff x="0" y="0"/>
+          <a:chExt cx="0" cy="0"/>
+        </a:xfrm>
+      </p:grpSpPr>
+      <p:sp>
+        <p:nvSpPr>
+          <p:cNvPr id="2" name="Slide Image Placeholder 1"/>
+          <p:cNvSpPr>
+            <a:spLocks noGrp="1"/>
+          </p:cNvSpPr>
+          <p:nvPr>
+            <p:ph type="sldImg" idx="2"/>
+          </p:nvPr>
+        </p:nvSpPr>
+        <p:spPr/>
+      </p:sp>
+      <p:sp>
+        <p:nvSpPr>
+          <p:cNvPr id="3" name="Notes Placeholder 2"/>
+          <p:cNvSpPr>
+            <a:spLocks noGrp="1"/>
+          </p:cNvSpPr>
+          <p:nvPr>
+            <p:ph type="body" idx="3" sz="quarter"/>
+          </p:nvPr>
+        </p:nvSpPr>
+        <p:spPr/>
+        <p:txBody>
+          <a:bodyPr/>
+          <a:lstStyle/>
+          <a:p>
+            <a:r>
+              <a:t>La objeción previsible: «¿cuánto aporta el banco en sí?». No saltearla por tiempo: la lámina 4 prometió tres controles corridos y versionados, y este es uno — un control de la auditoría que contrasta una hipótesis del operador. Acá se cruzan los dos aportes.</a:t>
+            </a:r>
+          </a:p>
+          <a:p>
+            <a:r>
+              <a:t>No pedir disculpas por el 4.º sin FE (3,500) ni por el 4.º con las diecisiete (3,621). H7 dice «perfil distinto del disco único», no «mejor»: es el desplazamiento que enuncia H1. El dato duro, si lo piden (ablacion_banco_contrastes.csv): la suma contra el disco con los mismos (r, m) gana con significancia en seis métricas —EN, SD, FE, MG, SF y VIF—, pierde en nueve, todas de fidelidad o de artefactos, y empata en dos.</a:t>
+            </a:r>
+          </a:p>
+          <a:p>
+            <a:r>
+              <a:t>Si preguntan por r = 1: no leer la lámina, ya lo dice. La respuesta fuerte es otra — el argmax en r = 1 es artefacto del rango heredado del peso; con el peso libre el máximo de Fo es r = 25 (1,7715 con m = 0,07) y r = 1 pasa a ser el peor (1,7607).</a:t>
+            </a:r>
+          </a:p>
+        </p:txBody>
+      </p:sp>
+      <p:sp>
+        <p:nvSpPr>
+          <p:cNvPr id="4" name="Slide Number Placeholder 3"/>
+          <p:cNvSpPr>
+            <a:spLocks noGrp="1"/>
+          </p:cNvSpPr>
+          <p:nvPr>
+            <p:ph type="sldNum" idx="5" sz="quarter"/>
+          </p:nvPr>
+        </p:nvSpPr>
+        <p:spPr/>
+      </p:sp>
+    </p:spTree>
+  </p:cSld>
+  <p:clrMapOvr>
+    <a:masterClrMapping/>
+  </p:clrMapOvr>
+</p:notes>
+</file>
+
 <file path=ppt/notesSlides/notesSlide3.xml><?xml version="1.0" encoding="utf-8"?>
 <p:notes xmlns:a="http://schemas.openxmlformats.org/drawingml/2006/main" xmlns:r="http://schemas.openxmlformats.org/officeDocument/2006/relationships" xmlns:p="http://schemas.openxmlformats.org/presentationml/2006/main">
   <p:cSld>
@@ -1700,6 +2005,76 @@
         <p14:creationId xmlns:p14="http://schemas.microsoft.com/office/powerpoint/2010/main" val="1024086991"/>
       </p:ext>
     </p:extLst>
+  </p:cSld>
+  <p:clrMapOvr>
+    <a:masterClrMapping/>
+  </p:clrMapOvr>
+</p:notes>
+</file>
+
+<file path=ppt/notesSlides/notesSlide5.xml><?xml version="1.0" encoding="utf-8"?>
+<p:notes xmlns:a="http://schemas.openxmlformats.org/drawingml/2006/main" xmlns:p="http://schemas.openxmlformats.org/presentationml/2006/main" xmlns:r="http://schemas.openxmlformats.org/officeDocument/2006/relationships">
+  <p:cSld>
+    <p:spTree>
+      <p:nvGrpSpPr>
+        <p:cNvPr id="1" name=""/>
+        <p:cNvGrpSpPr/>
+        <p:nvPr/>
+      </p:nvGrpSpPr>
+      <p:grpSpPr>
+        <a:xfrm>
+          <a:off x="0" y="0"/>
+          <a:ext cx="0" cy="0"/>
+          <a:chOff x="0" y="0"/>
+          <a:chExt cx="0" cy="0"/>
+        </a:xfrm>
+      </p:grpSpPr>
+      <p:sp>
+        <p:nvSpPr>
+          <p:cNvPr id="2" name="Slide Image Placeholder 1"/>
+          <p:cNvSpPr>
+            <a:spLocks noGrp="1"/>
+          </p:cNvSpPr>
+          <p:nvPr>
+            <p:ph type="sldImg" idx="2"/>
+          </p:nvPr>
+        </p:nvSpPr>
+        <p:spPr/>
+      </p:sp>
+      <p:sp>
+        <p:nvSpPr>
+          <p:cNvPr id="3" name="Notes Placeholder 2"/>
+          <p:cNvSpPr>
+            <a:spLocks noGrp="1"/>
+          </p:cNvSpPr>
+          <p:nvPr>
+            <p:ph type="body" idx="3" sz="quarter"/>
+          </p:nvPr>
+        </p:nvSpPr>
+        <p:spPr/>
+        <p:txBody>
+          <a:bodyPr/>
+          <a:lstStyle/>
+          <a:p>
+            <a:r>
+              <a:t>La lámina que reencuadra la defensa. Declarar acá los dos aportes evita que la auditoría se lea después como autosabotaje: todo lo que sigue, resultados negativos incluidos, es parte del diseño. Adelantarse a la objeción —«¿son dos aportes o uno con los resultados malos rebautizados?»— con el reparto: de las siete hipótesis, dos son del operador (H1 y H7) y cinco del criterio (H2 a H6), y las siete se sostienen. Nombrar antes que la mesa las tres declaraciones que el propio libro ya hace, que son resultados y no concesiones: FE es la entropía reescalada dentro de cada par, así que la batería mide ocho dimensiones y no nueve (H4, §5.8.1); ninguna de las nueve penaliza artefactos, y la única que lo hace, Nabf, deja a la propuesta en 0,374 y al clásico en 0,586 contra 0,114 de la pirámide (conclusión 8); y la optimización no determina la configuración adoptada (H5, §5.8.5). No decir «circularidad del radio»: la palabra no está en el libro y H5 va sobre los DOS hiperparámetros. Lo que queda fijado por completo es el peso: m = 0,30 en 499 de las 500 corridas, el piso del rango heredado. El radio, a la lámina 9: no abrirlo acá ni adelantar el barrido con el peso libre.</a:t>
+            </a:r>
+          </a:p>
+        </p:txBody>
+      </p:sp>
+      <p:sp>
+        <p:nvSpPr>
+          <p:cNvPr id="4" name="Slide Number Placeholder 3"/>
+          <p:cNvSpPr>
+            <a:spLocks noGrp="1"/>
+          </p:cNvSpPr>
+          <p:nvPr>
+            <p:ph type="sldNum" idx="5" sz="quarter"/>
+          </p:nvPr>
+        </p:nvSpPr>
+        <p:spPr/>
+      </p:sp>
+    </p:spTree>
   </p:cSld>
   <p:clrMapOvr>
     <a:masterClrMapping/>

--- a/docs/Tesis_Defensa_Presentacion.pptx
+++ b/docs/Tesis_Defensa_Presentacion.pptx
@@ -612,7 +612,7 @@
           <a:p>
             <a:r>
               <a:rPr lang="en-US" dirty="0"/>
-              <a:t>Escena representativa: la propuesta (recuadro rojo) integra la firma térmica de las personas con la textura de la casa y la vegetación. NO decir «menos halos y ruido que RP/DWT»: es al revés. En la media de los 20 pares la propuesta realza más —SD 0,144 contra 0,127 de RP y 0,117 de DWT; entropía 6,986 contra 6,810 y 6,682— y ese realce se paga en artefactos: Nabf 0,374 contra 0,224 y 0,241. Frente al Top-Hat clásico sí es más limpia (Nabf 0,374 contra 0,586) y con más contraste (0,144 contra 0,135). Es un punto de operación desplazado, no dominancia. Nabf no está entre las nueve reportadas y el informe lo declara: conviene decirlo antes de que lo pregunten.</a:t>
+              <a:t>Escena representativa: la propuesta (recuadro rojo) integra la firma térmica de las personas con la textura de la casa y la vegetación. NO decir «menos halos y ruido que RP/DWT»: es al revés. En la media de los 20 pares la propuesta realza más —SD 0,144 contra 0,127 de RP y 0,117 de DWT; entropía 6,986 contra 6,810 y 6,682— y ese realce se paga en artefactos: Nabf 0,374 contra 0,224 y 0,241. Frente al Top-Hat clásico sí es más limpia (Nabf 0,374 contra 0,586) y con más contraste (0,144 contra 0,135). Es un punto de operación desplazado, no dominancia. El montaje trae ahora una décima entrada, la metodología de la referencia (recuadro azul): el mismo disco único con el (r, m) de su PSO, r = 25 y m = 0,30, los mismos que la propuesta. Los dos últimos paneles se diferencian solo en el operador, así que ahí se ve la ablación del banco a ojo. Nabf no está entre las nueve reportadas y el informe lo declara: conviene decirlo antes de que lo pregunten.</a:t>
             </a:r>
             <a:endParaRPr lang="en-US" dirty="0"/>
           </a:p>

--- a/docs/Tesis_Defensa_Presentacion.pptx
+++ b/docs/Tesis_Defensa_Presentacion.pptx
@@ -1137,8 +1137,25 @@
           <a:lstStyle/>
           <a:p>
             <a:r>
-              <a:rPr/>
-              <a:t>Las siete hipótesis se sostienen, y cinco de ellas son hallazgos sobre el criterio, no sobre el operador. No usar la etiqueta «parcial» para H6: con ρ = +0,214, p = 0,645 y 232 escenas, el rechazo de la hipótesis de traslación es limpio y es un aporte. Sobre H5, cuidado con el enunciado: la búsqueda NO fija el radio —r = 25 en el 51,4 % de las 500 corridas y r = 1 en el 45,6 %— y el máximo de la aptitud dentro del rango publicado está en r = 1. Eso es exactamente H5: el radio adoptado lo elige la batería de evaluación, no la optimización.</a:t>
+              <a:t>Las siete hipótesis se sostienen, y cinco de ellas son hallazgos sobre el criterio, no sobre el operador. Esta lámina proyectaba sólo tres: faltaban H2, H3, H4 y H7.</a:t>
+            </a:r>
+          </a:p>
+          <a:p/>
+          <a:p>
+            <a:r>
+              <a:t>No usar la etiqueta «parcial» para H6: con ρ = +0,214, p = 0,645 y 232 escenas, el rechazo de la hipótesis de traslación es limpio y es un aporte.</a:t>
+            </a:r>
+          </a:p>
+          <a:p/>
+          <a:p>
+            <a:r>
+              <a:t>Sobre H5, cuidado con el enunciado: la búsqueda NO fija el radio —r = 25 en el 51,4 % de las 500 corridas y r = 1 en el 45,6 %— y el máximo de la aptitud dentro del rango publicado está en r = 1. Eso es exactamente H5: el radio adoptado lo elige la batería de evaluación, no la optimización.</a:t>
+            </a:r>
+          </a:p>
+          <a:p/>
+          <a:p>
+            <a:r>
+              <a:t>SI PREGUNTAN POR LA CORRELACIÓN DE H6, hay una respuesta preparada y conviene darla antes de que la busquen. El ρ = +0,214 es con las nueve métricas reportadas sobre el mAP@0,5 de LLVIP, y ninguno de los cuatro contrastes con esas nueve alcanza significancia. Pero al repetir la correlación con el conjunto ampliado de diecisiete sobre el mAP@0,5:0,95 de M3FD, sí aparece asociación y en la dirección esperada: ρ = −0,8929 con p = 0,0068. Son doce contrastes sobre siete métodos, así que ese único hallazgo no sobrevive a la corrección por multiplicidad (Bonferroni 0,0816) y hay que presentarlo como una pista, no como un resultado. Lo que dice es lo mismo que el control negativo: la batería de nueve no predice la utilidad y la ampliada apunta a que sí. Lo calcula experiments/run_correlacion_calidad_deteccion.py.</a:t>
             </a:r>
           </a:p>
         </p:txBody>
@@ -1312,10 +1329,26 @@
           <a:lstStyle/>
           <a:p>
             <a:r>
-              <a:rPr lang="en-US" dirty="0"/>
-              <a:t>Cerrar con la recomendación práctica: qué método elegir según el criterio operativo. Dejar claro que el pipeline completo es reproducible desde el repositorio.</a:t>
-            </a:r>
-            <a:endParaRPr lang="en-US" dirty="0"/>
+              <a:t>Dos familias de recomendaciones, y la primera es la que trasciende el trabajo: cómo debería evaluarse la fusión VIS/IR. Antes esta lámina no mencionaba el protocolo en ninguna parte.</a:t>
+            </a:r>
+          </a:p>
+          <a:p/>
+          <a:p>
+            <a:r>
+              <a:t>Ojo con la primera recomendación, que es la que más se malinterpreta: Nabf NO arregla el control negativo por sí sola. Lo mejora —el brazo de ruido baja del 3.er al 7.º puesto de 14— pero sigue por delante de Curvelet y del Top-Hat clásico. Recién con las diecisiete métricas queda último. Ese es el argumento de la cuarta recomendación: el control negativo tiene que ser un requisito del benchmark, no se resuelve agregando una métrica.</a:t>
+            </a:r>
+          </a:p>
+          <a:p/>
+          <a:p>
+            <a:r>
+              <a:t>La recomendación de uso ya no dice «la propuesta es la opción recomendada» sin más: la acota al requisito de maximizar actividad y declara el costo, con el líder de cada métrica de fidelidad nombrado. Y agrega la advertencia que se desprende de los dos experimentos de detección: para alimentar un detector, ninguna fusión antes que la mejor modalidad sola.</a:t>
+            </a:r>
+          </a:p>
+          <a:p/>
+          <a:p>
+            <a:r>
+              <a:t>Cerrar recordando que el pipeline completo es reproducible desde el repositorio.</a:t>
+            </a:r>
           </a:p>
         </p:txBody>
       </p:sp>
@@ -8605,351 +8638,223 @@
       <p:sp>
         <p:nvSpPr>
           <p:cNvPr id="4" name="Text 2"/>
-          <p:cNvSpPr/>
+          <p:cNvSpPr txBox="1"/>
           <p:nvPr/>
         </p:nvSpPr>
         <p:spPr>
           <a:xfrm>
-            <a:off x="457200" y="960120"/>
-            <a:ext cx="640080" cy="411480"/>
+            <a:off x="457200" y="914400"/>
+            <a:ext cx="8229600" cy="3931920"/>
           </a:xfrm>
           <a:prstGeom prst="rect">
             <a:avLst/>
           </a:prstGeom>
           <a:noFill/>
-          <a:ln/>
         </p:spPr>
         <p:txBody>
-          <a:bodyPr wrap="square" lIns="0" tIns="0" rIns="0" bIns="0" rtlCol="0" anchor="ctr"/>
+          <a:bodyPr wrap="square" anchor="t" lIns="0" rIns="0" tIns="0" bIns="0">
+            <a:spAutoFit/>
+          </a:bodyPr>
           <a:lstStyle/>
           <a:p>
-            <a:pPr indent="0" marL="0">
-              <a:buNone/>
-            </a:pPr>
-            <a:r>
-              <a:rPr lang="en-US" sz="1900" b="1" dirty="0">
-                <a:solidFill>
-                  <a:srgbClr val="1A1A1A"/>
-                </a:solidFill>
-                <a:latin typeface="Times New Roman" pitchFamily="34" charset="0"/>
-                <a:ea typeface="Times New Roman" pitchFamily="34" charset="-122"/>
-                <a:cs typeface="Times New Roman" pitchFamily="34" charset="-120"/>
-              </a:rPr>
-              <a:t xml:space="preserve">H1</a:t>
-            </a:r>
-            <a:endParaRPr lang="en-US" sz="1900" dirty="0"/>
-          </a:p>
-        </p:txBody>
-      </p:sp>
-      <p:sp>
-        <p:nvSpPr>
-          <p:cNvPr id="5" name="Text 3"/>
-          <p:cNvSpPr/>
-          <p:nvPr/>
-        </p:nvSpPr>
-        <p:spPr>
-          <a:xfrm>
-            <a:off x="1143000" y="996696"/>
-            <a:ext cx="1417320" cy="365760"/>
-          </a:xfrm>
-          <a:prstGeom prst="rect">
-            <a:avLst/>
-          </a:prstGeom>
-          <a:noFill/>
-          <a:ln/>
-        </p:spPr>
-        <p:txBody>
-          <a:bodyPr wrap="square" lIns="0" tIns="0" rIns="0" bIns="0" rtlCol="0" anchor="ctr"/>
-          <a:lstStyle/>
-          <a:p>
-            <a:pPr indent="0" marL="0">
-              <a:buNone/>
-            </a:pPr>
-            <a:r>
-              <a:rPr lang="en-US" sz="1300" b="1" dirty="0">
-                <a:solidFill>
-                  <a:srgbClr val="1F5C2E"/>
-                </a:solidFill>
-                <a:latin typeface="Times New Roman" pitchFamily="34" charset="0"/>
-                <a:ea typeface="Times New Roman" pitchFamily="34" charset="-122"/>
-                <a:cs typeface="Times New Roman" pitchFamily="34" charset="-120"/>
-              </a:rPr>
-              <a:t xml:space="preserve">SE SOSTIENE</a:t>
-            </a:r>
-            <a:endParaRPr lang="en-US" sz="1300" dirty="0"/>
-          </a:p>
-        </p:txBody>
-      </p:sp>
-      <p:sp>
-        <p:nvSpPr>
-          <p:cNvPr id="6" name="Text 4"/>
-          <p:cNvSpPr/>
-          <p:nvPr/>
-        </p:nvSpPr>
-        <p:spPr>
-          <a:xfrm>
-            <a:off x="2697480" y="960120"/>
-            <a:ext cx="5989320" cy="1143000"/>
-          </a:xfrm>
-          <a:prstGeom prst="rect">
-            <a:avLst/>
-          </a:prstGeom>
-          <a:noFill/>
-          <a:ln/>
-        </p:spPr>
-        <p:txBody>
-          <a:bodyPr wrap="square" lIns="0" tIns="0" rIns="0" bIns="0" rtlCol="0" anchor="t"/>
-          <a:lstStyle/>
-          <a:p>
-            <a:pPr indent="0" marL="0">
-              <a:buNone/>
-            </a:pPr>
-            <a:r>
-              <a:rPr lang="en-US" sz="1250" dirty="0">
-                <a:solidFill>
-                  <a:srgbClr val="1A1A1A"/>
-                </a:solidFill>
-                <a:latin typeface="Times New Roman" pitchFamily="34" charset="0"/>
-                <a:ea typeface="Times New Roman" pitchFamily="34" charset="-122"/>
-                <a:cs typeface="Times New Roman" pitchFamily="34" charset="-120"/>
-              </a:rPr>
-              <a:t xml:space="preserve">El operador no mejora la fusión de manera uniforme: desplaza su punto de operación. En actividad espacial, 24 de 25 contrastes son favorables y significativos y ninguno es adverso con significancia; en fidelidad a las fuentes, 17 de 20 son adversos y significativos (Wilcoxon–Holm).</a:t>
-            </a:r>
-            <a:endParaRPr lang="en-US" sz="1250" dirty="0"/>
-          </a:p>
-        </p:txBody>
-      </p:sp>
-      <p:sp>
-        <p:nvSpPr>
-          <p:cNvPr id="7" name="Text 5"/>
-          <p:cNvSpPr/>
-          <p:nvPr/>
-        </p:nvSpPr>
-        <p:spPr>
-          <a:xfrm>
-            <a:off x="457200" y="2258568"/>
-            <a:ext cx="640080" cy="411480"/>
-          </a:xfrm>
-          <a:prstGeom prst="rect">
-            <a:avLst/>
-          </a:prstGeom>
-          <a:noFill/>
-          <a:ln/>
-        </p:spPr>
-        <p:txBody>
-          <a:bodyPr wrap="square" lIns="0" tIns="0" rIns="0" bIns="0" rtlCol="0" anchor="ctr"/>
-          <a:lstStyle/>
-          <a:p>
-            <a:pPr indent="0" marL="0">
-              <a:buNone/>
-            </a:pPr>
-            <a:r>
-              <a:rPr lang="en-US" sz="1900" b="1" dirty="0">
-                <a:solidFill>
-                  <a:srgbClr val="1A1A1A"/>
-                </a:solidFill>
-                <a:latin typeface="Times New Roman" pitchFamily="34" charset="0"/>
-                <a:ea typeface="Times New Roman" pitchFamily="34" charset="-122"/>
-                <a:cs typeface="Times New Roman" pitchFamily="34" charset="-120"/>
-              </a:rPr>
-              <a:t xml:space="preserve">H5</a:t>
-            </a:r>
-            <a:endParaRPr lang="en-US" sz="1900" dirty="0"/>
-          </a:p>
-        </p:txBody>
-      </p:sp>
-      <p:sp>
-        <p:nvSpPr>
-          <p:cNvPr id="8" name="Text 6"/>
-          <p:cNvSpPr/>
-          <p:nvPr/>
-        </p:nvSpPr>
-        <p:spPr>
-          <a:xfrm>
-            <a:off x="1143000" y="2295144"/>
-            <a:ext cx="1417320" cy="365760"/>
-          </a:xfrm>
-          <a:prstGeom prst="rect">
-            <a:avLst/>
-          </a:prstGeom>
-          <a:noFill/>
-          <a:ln/>
-        </p:spPr>
-        <p:txBody>
-          <a:bodyPr wrap="square" lIns="0" tIns="0" rIns="0" bIns="0" rtlCol="0" anchor="ctr"/>
-          <a:lstStyle/>
-          <a:p>
-            <a:pPr indent="0" marL="0">
-              <a:buNone/>
-            </a:pPr>
-            <a:r>
-              <a:rPr lang="en-US" sz="1300" b="1" dirty="0">
-                <a:solidFill>
-                  <a:srgbClr val="1F5C2E"/>
-                </a:solidFill>
-                <a:latin typeface="Times New Roman" pitchFamily="34" charset="0"/>
-                <a:ea typeface="Times New Roman" pitchFamily="34" charset="-122"/>
-                <a:cs typeface="Times New Roman" pitchFamily="34" charset="-120"/>
-              </a:rPr>
-              <a:t xml:space="preserve">SE SOSTIENE</a:t>
-            </a:r>
-            <a:endParaRPr lang="en-US" sz="1300" dirty="0"/>
-          </a:p>
-        </p:txBody>
-      </p:sp>
-      <p:sp>
-        <p:nvSpPr>
-          <p:cNvPr id="9" name="Text 7"/>
-          <p:cNvSpPr/>
-          <p:nvPr/>
-        </p:nvSpPr>
-        <p:spPr>
-          <a:xfrm>
-            <a:off x="2697480" y="2258568"/>
-            <a:ext cx="5989320" cy="1143000"/>
-          </a:xfrm>
-          <a:prstGeom prst="rect">
-            <a:avLst/>
-          </a:prstGeom>
-          <a:noFill/>
-          <a:ln/>
-        </p:spPr>
-        <p:txBody>
-          <a:bodyPr wrap="square" lIns="0" tIns="0" rIns="0" bIns="0" rtlCol="0" anchor="t"/>
-          <a:lstStyle/>
-          <a:p>
-            <a:pPr indent="0" marL="0">
-              <a:buNone/>
-            </a:pPr>
-            <a:r>
-              <a:rPr lang="en-US" sz="1250" dirty="0">
-                <a:solidFill>
-                  <a:srgbClr val="1A1A1A"/>
-                </a:solidFill>
-                <a:latin typeface="Times New Roman" pitchFamily="34" charset="0"/>
-                <a:ea typeface="Times New Roman" pitchFamily="34" charset="-122"/>
-                <a:cs typeface="Times New Roman" pitchFamily="34" charset="-120"/>
-              </a:rPr>
-              <a:t xml:space="preserve">La optimización NO determina la configuración adoptada. En 500 corridas la búsqueda no fija el radio: r = 25 en el 51,4 % y r = 1 en el 45,6 %; y el máximo de la aptitud publicada dentro del rango está en r = 1 (1,7350), no en r = 25 (1,7057). El peso queda en el piso 0,30 en 499 de 500. El radio lo elige la batería de evaluación y el peso, la saturación: 0,73 % contra el 6,50 % que produciría m = 1.</a:t>
-            </a:r>
-            <a:endParaRPr lang="en-US" sz="1250" dirty="0"/>
-          </a:p>
-        </p:txBody>
-      </p:sp>
-      <p:sp>
-        <p:nvSpPr>
-          <p:cNvPr id="10" name="Text 8"/>
-          <p:cNvSpPr/>
-          <p:nvPr/>
-        </p:nvSpPr>
-        <p:spPr>
-          <a:xfrm>
-            <a:off x="457200" y="3557016"/>
-            <a:ext cx="640080" cy="411480"/>
-          </a:xfrm>
-          <a:prstGeom prst="rect">
-            <a:avLst/>
-          </a:prstGeom>
-          <a:noFill/>
-          <a:ln/>
-        </p:spPr>
-        <p:txBody>
-          <a:bodyPr wrap="square" lIns="0" tIns="0" rIns="0" bIns="0" rtlCol="0" anchor="ctr"/>
-          <a:lstStyle/>
-          <a:p>
-            <a:pPr indent="0" marL="0">
-              <a:buNone/>
-            </a:pPr>
-            <a:r>
-              <a:rPr lang="en-US" sz="1900" b="1" dirty="0">
-                <a:solidFill>
-                  <a:srgbClr val="1A1A1A"/>
-                </a:solidFill>
-                <a:latin typeface="Times New Roman" pitchFamily="34" charset="0"/>
-                <a:ea typeface="Times New Roman" pitchFamily="34" charset="-122"/>
-                <a:cs typeface="Times New Roman" pitchFamily="34" charset="-120"/>
-              </a:rPr>
-              <a:t xml:space="preserve">H6</a:t>
-            </a:r>
-            <a:endParaRPr lang="en-US" sz="1900" dirty="0"/>
-          </a:p>
-        </p:txBody>
-      </p:sp>
-      <p:sp>
-        <p:nvSpPr>
-          <p:cNvPr id="11" name="Text 9"/>
-          <p:cNvSpPr/>
-          <p:nvPr/>
-        </p:nvSpPr>
-        <p:spPr>
-          <a:xfrm>
-            <a:off x="1143000" y="3593592"/>
-            <a:ext cx="1417320" cy="365760"/>
-          </a:xfrm>
-          <a:prstGeom prst="rect">
-            <a:avLst/>
-          </a:prstGeom>
-          <a:noFill/>
-          <a:ln/>
-        </p:spPr>
-        <p:txBody>
-          <a:bodyPr wrap="square" lIns="0" tIns="0" rIns="0" bIns="0" rtlCol="0" anchor="ctr"/>
-          <a:lstStyle/>
-          <a:p>
-            <a:pPr indent="0" marL="0">
-              <a:buNone/>
-            </a:pPr>
-            <a:r>
-              <a:rPr lang="en-US" sz="1300" b="1" dirty="0">
-                <a:solidFill>
-                  <a:srgbClr val="1F5C2E"/>
-                </a:solidFill>
-                <a:latin typeface="Times New Roman" pitchFamily="34" charset="0"/>
-                <a:ea typeface="Times New Roman" pitchFamily="34" charset="-122"/>
-                <a:cs typeface="Times New Roman" pitchFamily="34" charset="-120"/>
-              </a:rPr>
-              <a:t xml:space="preserve">SE SOSTIENE</a:t>
-            </a:r>
-            <a:endParaRPr lang="en-US" sz="1300" dirty="0"/>
-          </a:p>
-        </p:txBody>
-      </p:sp>
-      <p:sp>
-        <p:nvSpPr>
-          <p:cNvPr id="12" name="Text 10"/>
-          <p:cNvSpPr/>
-          <p:nvPr/>
-        </p:nvSpPr>
-        <p:spPr>
-          <a:xfrm>
-            <a:off x="2697480" y="3557016"/>
-            <a:ext cx="5989320" cy="1143000"/>
-          </a:xfrm>
-          <a:prstGeom prst="rect">
-            <a:avLst/>
-          </a:prstGeom>
-          <a:noFill/>
-          <a:ln/>
-        </p:spPr>
-        <p:txBody>
-          <a:bodyPr wrap="square" lIns="0" tIns="0" rIns="0" bIns="0" rtlCol="0" anchor="t"/>
-          <a:lstStyle/>
-          <a:p>
-            <a:pPr indent="0" marL="0">
-              <a:buNone/>
-            </a:pPr>
-            <a:r>
-              <a:rPr lang="en-US" sz="1250" dirty="0">
-                <a:solidFill>
-                  <a:srgbClr val="1A1A1A"/>
-                </a:solidFill>
-                <a:latin typeface="Times New Roman" pitchFamily="34" charset="0"/>
-                <a:ea typeface="Times New Roman" pitchFamily="34" charset="-122"/>
-                <a:cs typeface="Times New Roman" pitchFamily="34" charset="-120"/>
-              </a:rPr>
-              <a:t xml:space="preserve">SE SOSTIENE con muestra suficiente: lo que queda rechazado es la traslación de la calidad a la tarea, no la hipótesis. Ninguna fusión supera al infrarrojo solo en LLVIP (0,971 frente a 0,952 de la mejor fusión), el orden de calidad no predice el mAP (ρ = +0,214; p = 0,645) y en el conteo por escena de M3FD la propuesta queda por debajo del visible (50,0 % frente a 53,0 %; McNemar exacto p = 0,2100; n = 232).</a:t>
-            </a:r>
-            <a:endParaRPr lang="en-US" sz="1250" dirty="0"/>
+            <a:pPr>
+              <a:spcAft>
+                <a:spcPts val="500"/>
+              </a:spcAft>
+            </a:pPr>
+            <a:r>
+              <a:rPr sz="1150" b="1">
+                <a:solidFill>
+                  <a:srgbClr val="1A1A1A"/>
+                </a:solidFill>
+                <a:latin typeface="Times New Roman"/>
+              </a:rPr>
+              <a:t>H1 SE SOSTIENE — </a:t>
+            </a:r>
+            <a:r>
+              <a:rPr sz="1150" b="0">
+                <a:solidFill>
+                  <a:srgbClr val="1A1A1A"/>
+                </a:solidFill>
+                <a:latin typeface="Times New Roman"/>
+              </a:rPr>
+              <a:t>El operador desplaza el punto de operación y no mejora de forma uniforme: en actividad espacial, 24 de 25 contrastes favorables y significativos y ninguno adverso con significancia; en fidelidad a las fuentes, 17 de 20 adversos y significativos (Wilcoxon–Holm).</a:t>
+            </a:r>
+          </a:p>
+          <a:p>
+            <a:pPr>
+              <a:spcAft>
+                <a:spcPts val="500"/>
+              </a:spcAft>
+            </a:pPr>
+            <a:r>
+              <a:rPr sz="1150" b="1">
+                <a:solidFill>
+                  <a:srgbClr val="1A1A1A"/>
+                </a:solidFill>
+                <a:latin typeface="Times New Roman"/>
+              </a:rPr>
+              <a:t>H2 SE SOSTIENE — </a:t>
+            </a:r>
+            <a:r>
+              <a:rPr sz="1150" b="0">
+                <a:solidFill>
+                  <a:srgbClr val="1A1A1A"/>
+                </a:solidFill>
+                <a:latin typeface="Times New Roman"/>
+              </a:rPr>
+              <a:t>1.ª de 7 con las nueve métricas (3,394) y 3.ª con las diecisiete (3,459), donde el primer lugar pasa a la pirámide de Laplace (3,147). No cambió ninguna imagen fusionada; cambió el conjunto de métricas.</a:t>
+            </a:r>
+          </a:p>
+          <a:p>
+            <a:pPr>
+              <a:spcAft>
+                <a:spcPts val="500"/>
+              </a:spcAft>
+            </a:pPr>
+            <a:r>
+              <a:rPr sz="1150" b="1">
+                <a:solidFill>
+                  <a:srgbClr val="1A1A1A"/>
+                </a:solidFill>
+                <a:latin typeface="Times New Roman"/>
+              </a:rPr>
+              <a:t>H3 SE SOSTIENE — </a:t>
+            </a:r>
+            <a:r>
+              <a:rPr sz="1150" b="0">
+                <a:solidFill>
+                  <a:srgbClr val="1A1A1A"/>
+                </a:solidFill>
+                <a:latin typeface="Times New Roman"/>
+              </a:rPr>
+              <a:t>La fusión artificial de ruido gaussiano con σ = 0,20 queda 3.ª de 14 y su rango mejora al aumentar σ (8,917 → 6,767), por delante de cinco de los seis comparativos. Incorporando Nabf cae al 7.º puesto; con las diecisiete, al último (10,138).</a:t>
+            </a:r>
+          </a:p>
+          <a:p>
+            <a:pPr>
+              <a:spcAft>
+                <a:spcPts val="500"/>
+              </a:spcAft>
+            </a:pPr>
+            <a:r>
+              <a:rPr sz="1150" b="1">
+                <a:solidFill>
+                  <a:srgbClr val="1A1A1A"/>
+                </a:solidFill>
+                <a:latin typeface="Times New Roman"/>
+              </a:rPr>
+              <a:t>H4 SE SOSTIENE — </a:t>
+            </a:r>
+            <a:r>
+              <a:rPr sz="1150" b="0">
+                <a:solidFill>
+                  <a:srgbClr val="1A1A1A"/>
+                </a:solidFill>
+                <a:latin typeface="Times New Roman"/>
+              </a:rPr>
+              <a:t>FE es la entropía reescalada dentro de cada par: rangos idénticos en las 20 imágenes y el mismo χ² de Friedman (88,2857). Las dimensiones efectivas son ocho, no nueve.</a:t>
+            </a:r>
+          </a:p>
+          <a:p>
+            <a:pPr>
+              <a:spcAft>
+                <a:spcPts val="500"/>
+              </a:spcAft>
+            </a:pPr>
+            <a:r>
+              <a:rPr sz="1150" b="1">
+                <a:solidFill>
+                  <a:srgbClr val="1A1A1A"/>
+                </a:solidFill>
+                <a:latin typeface="Times New Roman"/>
+              </a:rPr>
+              <a:t>H5 SE SOSTIENE — </a:t>
+            </a:r>
+            <a:r>
+              <a:rPr sz="1150" b="0">
+                <a:solidFill>
+                  <a:srgbClr val="1A1A1A"/>
+                </a:solidFill>
+                <a:latin typeface="Times New Roman"/>
+              </a:rPr>
+              <a:t>La optimización no determina la configuración adoptada. En 500 corridas la búsqueda no fija el radio (r = 25 en el 51,4 % y r = 1 en el 45,6 %) y el máximo de la aptitud dentro del rango está en r = 1 (1,7350), no en r = 25 (1,7057). El peso queda en el piso, 0,30, en 499 de las 500.</a:t>
+            </a:r>
+          </a:p>
+          <a:p>
+            <a:pPr>
+              <a:spcAft>
+                <a:spcPts val="500"/>
+              </a:spcAft>
+            </a:pPr>
+            <a:r>
+              <a:rPr sz="1150" b="1">
+                <a:solidFill>
+                  <a:srgbClr val="1A1A1A"/>
+                </a:solidFill>
+                <a:latin typeface="Times New Roman"/>
+              </a:rPr>
+              <a:t>H6 SE SOSTIENE — </a:t>
+            </a:r>
+            <a:r>
+              <a:rPr sz="1150" b="0">
+                <a:solidFill>
+                  <a:srgbClr val="1A1A1A"/>
+                </a:solidFill>
+                <a:latin typeface="Times New Roman"/>
+              </a:rPr>
+              <a:t>Ninguna fusión supera al infrarrojo solo en LLVIP (0,971 frente a 0,952 de la mejor fusión), el orden de calidad no predice el mAP (ρ = +0,214; p = 0,645) y en el conteo por escena de M3FD la propuesta queda por debajo del visible (50,0 % frente a 53,0 %; McNemar exacto p = 0,2100; n = 232).</a:t>
+            </a:r>
+          </a:p>
+          <a:p>
+            <a:pPr>
+              <a:spcAft>
+                <a:spcPts val="500"/>
+              </a:spcAft>
+            </a:pPr>
+            <a:r>
+              <a:rPr sz="1150" b="1">
+                <a:solidFill>
+                  <a:srgbClr val="1A1A1A"/>
+                </a:solidFill>
+                <a:latin typeface="Times New Roman"/>
+              </a:rPr>
+              <a:t>H7 SE SOSTIENE — </a:t>
+            </a:r>
+            <a:r>
+              <a:rPr sz="1150" b="0">
+                <a:solidFill>
+                  <a:srgbClr val="1A1A1A"/>
+                </a:solidFill>
+                <a:latin typeface="Times New Roman"/>
+              </a:rPr>
+              <a:t>Con (r, m) = (25; 0,30) fijos, la suma de ramas es la mejor de los seis brazos con las nueve métricas (3,222 frente a 3,367 del disco único), y la imagen base queda última con las diecisiete (4,359).</a:t>
+            </a:r>
+          </a:p>
+          <a:p>
+            <a:pPr>
+              <a:spcAft>
+                <a:spcPts val="500"/>
+              </a:spcAft>
+            </a:pPr>
+            <a:r>
+              <a:rPr sz="1150" b="1">
+                <a:solidFill>
+                  <a:srgbClr val="1A1A1A"/>
+                </a:solidFill>
+                <a:latin typeface="Times New Roman"/>
+              </a:rPr>
+              <a:t>Las siete se sostienen. </a:t>
+            </a:r>
+            <a:r>
+              <a:rPr sz="1150" b="0">
+                <a:solidFill>
+                  <a:srgbClr val="1A1A1A"/>
+                </a:solidFill>
+                <a:latin typeface="Times New Roman"/>
+              </a:rPr>
+              <a:t>Dos son del operador (H1 y H7) y cinco del criterio (H2 a H6). Sostener H6 equivale a rechazar que la mejora de calidad se traslade a la detección: es un resultado del trabajo, no una limitación.</a:t>
+            </a:r>
           </a:p>
         </p:txBody>
       </p:sp>
@@ -9684,109 +9589,181 @@
           <a:bodyPr wrap="square" lIns="0" tIns="0" rIns="0" bIns="0" rtlCol="0" anchor="t"/>
           <a:lstStyle/>
           <a:p>
-            <a:pPr marL="177800" indent="-177800">
+            <a:pPr>
               <a:spcAft>
-                <a:spcPts val="1100"/>
+                <a:spcPts val="400"/>
               </a:spcAft>
-              <a:buSzPct val="100000"/>
-              <a:buChar char="•"/>
-            </a:pPr>
-            <a:r>
-              <a:rPr lang="en-US" sz="1350" dirty="0">
-                <a:solidFill>
-                  <a:srgbClr val="1A1A1A"/>
-                </a:solidFill>
-                <a:latin typeface="Times New Roman" pitchFamily="34" charset="0"/>
-                <a:ea typeface="Times New Roman" pitchFamily="34" charset="-122"/>
-                <a:cs typeface="Times New Roman" pitchFamily="34" charset="-120"/>
-              </a:rPr>
-              <a:t>Extender la evaluación de detección a otros detectores y al conjunto completo de LLVIP.</a:t>
+            </a:pPr>
+            <a:r>
+              <a:rPr sz="1100" b="1">
+                <a:solidFill>
+                  <a:srgbClr val="1A1A1A"/>
+                </a:solidFill>
+                <a:latin typeface="Times New Roman"/>
+              </a:rPr>
+              <a:t>Sobre el protocolo de evaluación (aporte transferible)</a:t>
             </a:r>
             <a:endParaRPr lang="en-US" sz="1350" dirty="0"/>
           </a:p>
           <a:p>
-            <a:pPr marL="177800" indent="-177800">
+            <a:pPr>
               <a:spcAft>
-                <a:spcPts val="1100"/>
+                <a:spcPts val="400"/>
               </a:spcAft>
-              <a:buSzPct val="100000"/>
-              <a:buChar char="•"/>
-            </a:pPr>
-            <a:r>
-              <a:rPr lang="en-US" sz="1350" dirty="0">
-                <a:solidFill>
-                  <a:srgbClr val="1A1A1A"/>
-                </a:solidFill>
-                <a:latin typeface="Times New Roman" pitchFamily="34" charset="0"/>
-                <a:ea typeface="Times New Roman" pitchFamily="34" charset="-122"/>
-                <a:cs typeface="Times New Roman" pitchFamily="34" charset="-120"/>
-              </a:rPr>
-              <a:t>Explorar reglas de fusión adaptativas para la rama Black Top-Hat.</a:t>
-            </a:r>
-            <a:endParaRPr lang="en-US" sz="1350" dirty="0"/>
-          </a:p>
-          <a:p>
-            <a:pPr marL="177800" indent="-177800">
+            </a:pPr>
+            <a:r>
+              <a:rPr sz="1100" b="0">
+                <a:solidFill>
+                  <a:srgbClr val="1A1A1A"/>
+                </a:solidFill>
+                <a:latin typeface="Times New Roman"/>
+              </a:rPr>
+              <a:t>Incluir al menos una métrica de dirección inversa que penalice artefactos. No alcanza con una: al sumar Nabf, el control negativo baja del 3.er al 7.º puesto de 14, pero todavía supera a Curvelet y al Top-Hat clásico. Con las diecisiete métricas queda último.</a:t>
+            </a:r>
+          </a:p>
+          <a:p>
+            <a:pPr>
               <a:spcAft>
-                <a:spcPts val="1100"/>
+                <a:spcPts val="400"/>
               </a:spcAft>
-              <a:buSzPct val="100000"/>
-              <a:buChar char="•"/>
-            </a:pPr>
-            <a:r>
-              <a:rPr lang="en-US" sz="1350" dirty="0">
-                <a:solidFill>
-                  <a:srgbClr val="1A1A1A"/>
-                </a:solidFill>
-                <a:latin typeface="Times New Roman" pitchFamily="34" charset="0"/>
-                <a:ea typeface="Times New Roman" pitchFamily="34" charset="-122"/>
-                <a:cs typeface="Times New Roman" pitchFamily="34" charset="-120"/>
-              </a:rPr>
-              <a:t>Complementar las métricas objetivas con una validación perceptual por observadores.</a:t>
-            </a:r>
-            <a:endParaRPr lang="en-US" sz="1350" dirty="0"/>
-          </a:p>
-          <a:p>
-            <a:pPr marL="177800" indent="-177800">
+            </a:pPr>
+            <a:r>
+              <a:rPr sz="1100" b="0">
+                <a:solidFill>
+                  <a:srgbClr val="1A1A1A"/>
+                </a:solidFill>
+                <a:latin typeface="Times New Roman"/>
+              </a:rPr>
+              <a:t>Declarar la redundancia entre las componentes de la batería y reportar el número efectivo de dimensiones, no el nominal.</a:t>
+            </a:r>
+          </a:p>
+          <a:p>
+            <a:pPr>
               <a:spcAft>
-                <a:spcPts val="1100"/>
+                <a:spcPts val="400"/>
               </a:spcAft>
-              <a:buSzPct val="100000"/>
-              <a:buChar char="•"/>
-            </a:pPr>
-            <a:r>
-              <a:rPr lang="en-US" sz="1350" dirty="0">
-                <a:solidFill>
-                  <a:srgbClr val="1A1A1A"/>
-                </a:solidFill>
-                <a:latin typeface="Times New Roman" pitchFamily="34" charset="0"/>
-                <a:ea typeface="Times New Roman" pitchFamily="34" charset="-122"/>
-                <a:cs typeface="Times New Roman" pitchFamily="34" charset="-120"/>
-              </a:rPr>
-              <a:t>Evaluar la transferencia a otros dominios (imágenes médicas, aéreas).</a:t>
-            </a:r>
-            <a:endParaRPr lang="en-US" sz="1350" dirty="0"/>
-          </a:p>
-          <a:p>
-            <a:pPr marL="177800" indent="-177800">
+            </a:pPr>
+            <a:r>
+              <a:rPr sz="1100" b="0">
+                <a:solidFill>
+                  <a:srgbClr val="1A1A1A"/>
+                </a:solidFill>
+                <a:latin typeface="Times New Roman"/>
+              </a:rPr>
+              <a:t>Separar el ajuste de hiperparámetros del criterio de evaluación, o declarar la circularidad y acotarla con un ajuste simétrico de los comparativos.</a:t>
+            </a:r>
+          </a:p>
+          <a:p>
+            <a:pPr>
               <a:spcAft>
-                <a:spcPts val="1100"/>
+                <a:spcPts val="400"/>
               </a:spcAft>
-              <a:buSzPct val="100000"/>
-              <a:buChar char="•"/>
-            </a:pPr>
-            <a:r>
-              <a:rPr lang="en-US" sz="1350" dirty="0">
-                <a:solidFill>
-                  <a:srgbClr val="1A1A1A"/>
-                </a:solidFill>
-                <a:latin typeface="Times New Roman" pitchFamily="34" charset="0"/>
-                <a:ea typeface="Times New Roman" pitchFamily="34" charset="-122"/>
-                <a:cs typeface="Times New Roman" pitchFamily="34" charset="-120"/>
-              </a:rPr>
-              <a:t>Para aplicaciones donde prima la riqueza informativa y el detalle, la propuesta es la opción recomendada; donde prima la fidelidad a las fuentes, los métodos multiescala (DTCWT, CVT) siguen siendo preferibles.</a:t>
-            </a:r>
-            <a:endParaRPr lang="en-US" sz="1350" dirty="0"/>
+            </a:pPr>
+            <a:r>
+              <a:rPr sz="1100" b="0">
+                <a:solidFill>
+                  <a:srgbClr val="1A1A1A"/>
+                </a:solidFill>
+                <a:latin typeface="Times New Roman"/>
+              </a:rPr>
+              <a:t>Incorporar un control negativo con degradaciones conocidas como requisito mínimo de cualquier benchmark de fusión, y reportar todo orden agregado junto a la composición del conjunto de métricas que lo produce.</a:t>
+            </a:r>
+          </a:p>
+          <a:p>
+            <a:pPr>
+              <a:spcAft>
+                <a:spcPts val="400"/>
+              </a:spcAft>
+            </a:pPr>
+            <a:r>
+              <a:rPr sz="1100" b="1">
+                <a:solidFill>
+                  <a:srgbClr val="1A1A1A"/>
+                </a:solidFill>
+                <a:latin typeface="Times New Roman"/>
+              </a:rPr>
+              <a:t>Sobre el operador</a:t>
+            </a:r>
+          </a:p>
+          <a:p>
+            <a:pPr>
+              <a:spcAft>
+                <a:spcPts val="400"/>
+              </a:spcAft>
+            </a:pPr>
+            <a:r>
+              <a:rPr sz="1100" b="0">
+                <a:solidFill>
+                  <a:srgbClr val="1A1A1A"/>
+                </a:solidFill>
+                <a:latin typeface="Times New Roman"/>
+              </a:rPr>
+              <a:t>Extender la evaluación de detección a otros detectores y al conjunto completo de LLVIP, con varias semillas: los experimentos actuales usan una sola.</a:t>
+            </a:r>
+          </a:p>
+          <a:p>
+            <a:pPr>
+              <a:spcAft>
+                <a:spcPts val="400"/>
+              </a:spcAft>
+            </a:pPr>
+            <a:r>
+              <a:rPr sz="1100" b="0">
+                <a:solidFill>
+                  <a:srgbClr val="1A1A1A"/>
+                </a:solidFill>
+                <a:latin typeface="Times New Roman"/>
+              </a:rPr>
+              <a:t>Explorar reglas de fusión adaptativas para la rama Black Top-Hat, que es donde se concentran los artefactos (Nabf 0,374 frente a 0,185 del disco único).</a:t>
+            </a:r>
+          </a:p>
+          <a:p>
+            <a:pPr>
+              <a:spcAft>
+                <a:spcPts val="400"/>
+              </a:spcAft>
+            </a:pPr>
+            <a:r>
+              <a:rPr sz="1100" b="0">
+                <a:solidFill>
+                  <a:srgbClr val="1A1A1A"/>
+                </a:solidFill>
+                <a:latin typeface="Times New Roman"/>
+              </a:rPr>
+              <a:t>Complementar las métricas objetivas con una validación perceptual por observadores: es el único criterio que el control negativo no puede engañar.</a:t>
+            </a:r>
+          </a:p>
+          <a:p>
+            <a:pPr>
+              <a:spcAft>
+                <a:spcPts val="400"/>
+              </a:spcAft>
+            </a:pPr>
+            <a:r>
+              <a:rPr sz="1100" b="0">
+                <a:solidFill>
+                  <a:srgbClr val="1A1A1A"/>
+                </a:solidFill>
+                <a:latin typeface="Times New Roman"/>
+              </a:rPr>
+              <a:t>Evaluar la transferencia a otros dominios; los resultados corresponden a escenas de vigilancia nocturna.</a:t>
+            </a:r>
+          </a:p>
+          <a:p>
+            <a:pPr>
+              <a:spcAft>
+                <a:spcPts val="400"/>
+              </a:spcAft>
+            </a:pPr>
+            <a:r>
+              <a:rPr sz="1100" b="0">
+                <a:solidFill>
+                  <a:srgbClr val="1A1A1A"/>
+                </a:solidFill>
+                <a:latin typeface="Times New Roman"/>
+              </a:rPr>
+              <a:t>Uso recomendado: el operador es recomendable cuando el requisito explícito es maximizar actividad espacial y contraste local, y se acepta el costo en fidelidad y artefactos. Donde prima la fidelidad a las fuentes, la pirámide de Laplace domina la información mutua (1,924 / 0,918) y la tasa de artefactos (Nabf 0,114), DTCWT el SSIM (0,725) y la aproximación CVT el PSNR (17,65). Para alimentar un detector, ninguna fusión de este estudio antes que la mejor modalidad individual.</a:t>
+            </a:r>
           </a:p>
         </p:txBody>
       </p:sp>

--- a/docs/Tesis_Defensa_Presentacion.pptx
+++ b/docs/Tesis_Defensa_Presentacion.pptx
@@ -1241,10 +1241,26 @@
           <a:lstStyle/>
           <a:p>
             <a:r>
-              <a:rPr lang="en-US" dirty="0"/>
-              <a:t>Cinco conclusiones: método formulado; punto de operación adoptado; perfil de calidad validado; ventaja sobre el clásico demostrada; y la lección sobre calidad vs. tarea. No decir «óptimo hallado»: la optimización no lo fija, y eso es H5. Dentro del rango publicado el máximo de la aptitud está en r = 1 (1,7350) contra 1,7057 en r = 25, y el peso queda en el piso, m = 0,30, en 499 de las 500 corridas. El r = 25 lo elige la batería de evaluación.</a:t>
-            </a:r>
-            <a:endParaRPr lang="en-US" dirty="0"/>
+              <a:t>Siete conclusiones: las tres primeras son el primer aporte —dirección del desplazamiento, primer lugar bajo el criterio de referencia y aporte del banco aislado— y las cuatro siguientes el segundo: el orden es del criterio, la batería no discrimina ruido, la optimización no determina la configuración y la calidad no predice la utilidad.</a:t>
+            </a:r>
+          </a:p>
+          <a:p/>
+          <a:p>
+            <a:r>
+              <a:t>No decir «óptimo hallado»: la optimización no lo fija, y eso es H5. Dentro del rango publicado el máximo de la aptitud está en r = 1 (1,7350) contra 1,7057 en r = 25, y el peso queda en el piso en 499 de las 500 corridas. El r = 25 lo elige la batería de evaluación.</a:t>
+            </a:r>
+          </a:p>
+          <a:p/>
+          <a:p>
+            <a:r>
+              <a:t>En la conclusión 2, cuidado con la cifra: a peso igualado son 3,528 frente a 3,694. El «gana por 0,683» que circuló en el plan del deck viene de un cálculo que metía al Top-Hat clásico dos veces en el pool y diluía los siete rangos. No usarlo.</a:t>
+            </a:r>
+          </a:p>
+          <a:p/>
+          <a:p>
+            <a:r>
+              <a:t>Cerrar con el aporte metodológico, que es lo único de esta tesis transferible a cualquier trabajo de fusión, y que es también el puente a la lámina siguiente.</a:t>
+            </a:r>
           </a:p>
         </p:txBody>
       </p:sp>
@@ -2423,10 +2439,26 @@
           <a:lstStyle/>
           <a:p>
             <a:r>
-              <a:rPr lang="en-US" dirty="0"/>
-              <a:t>Dos evaluaciones complementarias: calidad de imagen (TNO, sin referencia) y utilidad en tarea (LLVIP, con verdad de campo). En LLVIP solo cambian los píxeles de entrada; las etiquetas son las mismas, así el mAP aísla el efecto de la fusión.</a:t>
-            </a:r>
-            <a:endParaRPr lang="en-US" dirty="0"/>
+              <a:t>Tres bloques, no dos: el benchmark de calidad, los cuatro controles de la auditoría y los dos experimentos de detección. Antes esta lámina proyectaba sólo dos, así que el segundo aporte que la lámina 4 promete no tenía diseño experimental a la vista.</a:t>
+            </a:r>
+          </a:p>
+          <a:p/>
+          <a:p>
+            <a:r>
+              <a:t>En LLVIP sólo cambian los píxeles de entrada; las etiquetas son las mismas, así el mAP atribuye el efecto a la fusión.</a:t>
+            </a:r>
+          </a:p>
+          <a:p/>
+          <a:p>
+            <a:r>
+              <a:t>Declarar de entrada las limitaciones del pie —CVT como wavelet db4, las series de tomas de la misma escena, la ausencia de partición de prueba y la única semilla— porque son las cuatro primeras preguntas previsibles de la mesa. Es mejor decirlas antes de que las pregunten.</a:t>
+            </a:r>
+          </a:p>
+          <a:p/>
+          <a:p>
+            <a:r>
+              <a:t>Si preguntan cuántas escenas distintas son: hay series de hasta tres tomas de la misma escena (APC 1, APC 3 y soldier behind smoke, tres cada una), y las dos de soldier in trench son sesiones de medición distintas. Según se cuenten esas dos, son 13 o 14 escenas. No se proyecta un número porque el criterio de agrupamiento no está versionado; lo que sí está verificado es que las conclusiones se sostienen agregando por escena.</a:t>
+            </a:r>
           </a:p>
         </p:txBody>
       </p:sp>
@@ -3212,269 +3244,401 @@
       <p:sp>
         <p:nvSpPr>
           <p:cNvPr id="4" name="Text 2"/>
-          <p:cNvSpPr/>
+          <p:cNvSpPr txBox="1"/>
           <p:nvPr/>
         </p:nvSpPr>
         <p:spPr>
           <a:xfrm>
             <a:off x="457200" y="868680"/>
-            <a:ext cx="4023360" cy="274320"/>
+            <a:ext cx="2600000" cy="480000"/>
           </a:xfrm>
           <a:prstGeom prst="rect">
             <a:avLst/>
           </a:prstGeom>
           <a:noFill/>
-          <a:ln/>
         </p:spPr>
         <p:txBody>
-          <a:bodyPr wrap="square" lIns="0" tIns="0" rIns="0" bIns="0" rtlCol="0" anchor="ctr"/>
-          <a:lstStyle/>
-          <a:p>
-            <a:pPr indent="0" marL="0">
-              <a:buNone/>
-            </a:pPr>
-            <a:r>
-              <a:rPr lang="en-US" sz="1400" b="1" dirty="0">
-                <a:solidFill>
-                  <a:srgbClr val="8B1A1A"/>
-                </a:solidFill>
-                <a:latin typeface="Times New Roman" pitchFamily="34" charset="0"/>
-                <a:ea typeface="Times New Roman" pitchFamily="34" charset="-122"/>
-                <a:cs typeface="Times New Roman" pitchFamily="34" charset="-120"/>
+          <a:bodyPr wrap="square" anchor="t" lIns="0" rIns="0" tIns="0" bIns="0">
+            <a:spAutoFit/>
+          </a:bodyPr>
+          <a:lstStyle/>
+          <a:p>
+            <a:pPr>
+              <a:spcAft>
+                <a:spcPts val="400"/>
+              </a:spcAft>
+            </a:pPr>
+            <a:r>
+              <a:rPr sz="1300" b="1">
+                <a:solidFill>
+                  <a:srgbClr val="1A1A1A"/>
+                </a:solidFill>
+                <a:latin typeface="Times New Roman"/>
               </a:rPr>
               <a:t>Benchmark de calidad</a:t>
             </a:r>
-            <a:endParaRPr lang="en-US" sz="1400" dirty="0"/>
           </a:p>
         </p:txBody>
       </p:sp>
       <p:sp>
         <p:nvSpPr>
           <p:cNvPr id="5" name="Text 3"/>
-          <p:cNvSpPr/>
+          <p:cNvSpPr txBox="1"/>
           <p:nvPr/>
         </p:nvSpPr>
         <p:spPr>
           <a:xfrm>
-            <a:off x="457200" y="1188720"/>
-            <a:ext cx="4023360" cy="3291840"/>
+            <a:off x="457200" y="1420000"/>
+            <a:ext cx="2600000" cy="2670000"/>
           </a:xfrm>
           <a:prstGeom prst="rect">
             <a:avLst/>
           </a:prstGeom>
           <a:noFill/>
-          <a:ln/>
         </p:spPr>
         <p:txBody>
-          <a:bodyPr wrap="square" lIns="0" tIns="0" rIns="0" bIns="0" rtlCol="0" anchor="t"/>
-          <a:lstStyle/>
-          <a:p>
-            <a:pPr marL="177800" indent="-177800">
+          <a:bodyPr wrap="square" anchor="t" lIns="0" rIns="0" tIns="0" bIns="0">
+            <a:spAutoFit/>
+          </a:bodyPr>
+          <a:lstStyle/>
+          <a:p>
+            <a:pPr>
               <a:spcAft>
-                <a:spcPts val="800"/>
+                <a:spcPts val="400"/>
               </a:spcAft>
-              <a:buSzPct val="100000"/>
-              <a:buChar char="•"/>
-            </a:pPr>
-            <a:r>
-              <a:rPr lang="en-US" sz="1250" dirty="0">
-                <a:solidFill>
-                  <a:srgbClr val="1A1A1A"/>
-                </a:solidFill>
-                <a:latin typeface="Times New Roman" pitchFamily="34" charset="0"/>
-                <a:ea typeface="Times New Roman" pitchFamily="34" charset="-122"/>
-                <a:cs typeface="Times New Roman" pitchFamily="34" charset="-120"/>
-              </a:rPr>
-              <a:t>20 pares VIS/IR del dataset TNO (Toet, 2017).</a:t>
-            </a:r>
-            <a:endParaRPr lang="en-US" sz="1250" dirty="0"/>
-          </a:p>
-          <a:p>
-            <a:pPr marL="177800" indent="-177800">
+            </a:pPr>
+            <a:r>
+              <a:rPr sz="1050" b="0">
+                <a:solidFill>
+                  <a:srgbClr val="1A1A1A"/>
+                </a:solidFill>
+                <a:latin typeface="Times New Roman"/>
+              </a:rPr>
+              <a:t>20 pares VIS/IR del dataset TNO (Toet, 2017). No son 20 escenas independientes: hay series de hasta tres tomas de la misma escena.</a:t>
+            </a:r>
+          </a:p>
+          <a:p>
+            <a:pPr>
               <a:spcAft>
-                <a:spcPts val="800"/>
+                <a:spcPts val="400"/>
               </a:spcAft>
-              <a:buSzPct val="100000"/>
-              <a:buChar char="•"/>
-            </a:pPr>
-            <a:r>
-              <a:rPr lang="en-US" sz="1250" dirty="0">
-                <a:solidFill>
-                  <a:srgbClr val="1A1A1A"/>
-                </a:solidFill>
-                <a:latin typeface="Times New Roman" pitchFamily="34" charset="0"/>
-                <a:ea typeface="Times New Roman" pitchFamily="34" charset="-122"/>
-                <a:cs typeface="Times New Roman" pitchFamily="34" charset="-120"/>
-              </a:rPr>
-              <a:t xml:space="preserve">7 métodos: LP, RP, DWT, DTCWT, CVT (aprox. wavelet db4), Top-Hat clásico y Propuesta → 140 fusiones.</a:t>
-            </a:r>
-            <a:endParaRPr lang="en-US" sz="1250" dirty="0"/>
-          </a:p>
-          <a:p>
-            <a:pPr marL="177800" indent="-177800">
+            </a:pPr>
+            <a:r>
+              <a:rPr sz="1050" b="0">
+                <a:solidFill>
+                  <a:srgbClr val="1A1A1A"/>
+                </a:solidFill>
+                <a:latin typeface="Times New Roman"/>
+              </a:rPr>
+              <a:t>7 métodos: LP, RP, DWT, DTCWT, CVT (aprox. wavelet db4), Top-Hat clásico y Propuesta → 140 fusiones.</a:t>
+            </a:r>
+          </a:p>
+          <a:p>
+            <a:pPr>
               <a:spcAft>
-                <a:spcPts val="800"/>
+                <a:spcPts val="400"/>
               </a:spcAft>
-              <a:buSzPct val="100000"/>
-              <a:buChar char="•"/>
-            </a:pPr>
-            <a:r>
-              <a:rPr lang="en-US" sz="1250" dirty="0">
-                <a:solidFill>
-                  <a:srgbClr val="1A1A1A"/>
-                </a:solidFill>
-                <a:latin typeface="Times New Roman" pitchFamily="34" charset="0"/>
-                <a:ea typeface="Times New Roman" pitchFamily="34" charset="-122"/>
-                <a:cs typeface="Times New Roman" pitchFamily="34" charset="-120"/>
-              </a:rPr>
-              <a:t>Nueve métricas sin referencia (EN, SD, FE, MG, MI_vis, MI_ir, SF, SSIM, PSNR).</a:t>
-            </a:r>
-            <a:endParaRPr lang="en-US" sz="1250" dirty="0"/>
-          </a:p>
-          <a:p>
-            <a:pPr marL="177800" indent="-177800">
+            </a:pPr>
+            <a:r>
+              <a:rPr sz="1050" b="0">
+                <a:solidFill>
+                  <a:srgbClr val="1A1A1A"/>
+                </a:solidFill>
+                <a:latin typeface="Times New Roman"/>
+              </a:rPr>
+              <a:t>Nueve métricas sin imagen de referencia (EN, SD, FE, MG, MI_vis, MI_ir, SF, SSIM, PSNR). SSIM y PSNR se calculan contra las fuentes.</a:t>
+            </a:r>
+          </a:p>
+          <a:p>
+            <a:pPr>
               <a:spcAft>
-                <a:spcPts val="800"/>
+                <a:spcPts val="400"/>
               </a:spcAft>
-              <a:buSzPct val="100000"/>
-              <a:buChar char="•"/>
-            </a:pPr>
-            <a:r>
-              <a:rPr lang="en-US" sz="1250" dirty="0">
-                <a:solidFill>
-                  <a:srgbClr val="1A1A1A"/>
-                </a:solidFill>
-                <a:latin typeface="Times New Roman" pitchFamily="34" charset="0"/>
-                <a:ea typeface="Times New Roman" pitchFamily="34" charset="-122"/>
-                <a:cs typeface="Times New Roman" pitchFamily="34" charset="-120"/>
+            </a:pPr>
+            <a:r>
+              <a:rPr sz="1050" b="0">
+                <a:solidFill>
+                  <a:srgbClr val="1A1A1A"/>
+                </a:solidFill>
+                <a:latin typeface="Times New Roman"/>
               </a:rPr>
               <a:t>Friedman global + Wilcoxon pareado con corrección de Holm (α = 0,05).</a:t>
             </a:r>
-            <a:endParaRPr lang="en-US" sz="1250" dirty="0"/>
           </a:p>
         </p:txBody>
       </p:sp>
       <p:sp>
         <p:nvSpPr>
           <p:cNvPr id="6" name="Text 4"/>
-          <p:cNvSpPr/>
+          <p:cNvSpPr txBox="1"/>
           <p:nvPr/>
         </p:nvSpPr>
         <p:spPr>
           <a:xfrm>
-            <a:off x="4846320" y="868680"/>
-            <a:ext cx="3840480" cy="274320"/>
+            <a:off x="3272000" y="868680"/>
+            <a:ext cx="2600000" cy="480000"/>
           </a:xfrm>
           <a:prstGeom prst="rect">
             <a:avLst/>
           </a:prstGeom>
           <a:noFill/>
-          <a:ln/>
         </p:spPr>
         <p:txBody>
-          <a:bodyPr wrap="square" lIns="0" tIns="0" rIns="0" bIns="0" rtlCol="0" anchor="ctr"/>
-          <a:lstStyle/>
-          <a:p>
-            <a:pPr indent="0" marL="0">
-              <a:buNone/>
-            </a:pPr>
-            <a:r>
-              <a:rPr lang="en-US" sz="1400" b="1" dirty="0">
-                <a:solidFill>
-                  <a:srgbClr val="8B1A1A"/>
-                </a:solidFill>
-                <a:latin typeface="Times New Roman" pitchFamily="34" charset="0"/>
-                <a:ea typeface="Times New Roman" pitchFamily="34" charset="-122"/>
-                <a:cs typeface="Times New Roman" pitchFamily="34" charset="-120"/>
-              </a:rPr>
-              <a:t>Evaluación orientada a tarea</a:t>
-            </a:r>
-            <a:endParaRPr lang="en-US" sz="1400" dirty="0"/>
+          <a:bodyPr wrap="square" anchor="t" lIns="0" rIns="0" tIns="0" bIns="0">
+            <a:spAutoFit/>
+          </a:bodyPr>
+          <a:lstStyle/>
+          <a:p>
+            <a:pPr>
+              <a:spcAft>
+                <a:spcPts val="400"/>
+              </a:spcAft>
+            </a:pPr>
+            <a:r>
+              <a:rPr sz="1300" b="1">
+                <a:solidFill>
+                  <a:srgbClr val="1A1A1A"/>
+                </a:solidFill>
+                <a:latin typeface="Times New Roman"/>
+              </a:rPr>
+              <a:t>Controles de la auditoría</a:t>
+            </a:r>
           </a:p>
         </p:txBody>
       </p:sp>
       <p:sp>
         <p:nvSpPr>
           <p:cNvPr id="7" name="Text 5"/>
-          <p:cNvSpPr/>
+          <p:cNvSpPr txBox="1"/>
           <p:nvPr/>
         </p:nvSpPr>
         <p:spPr>
           <a:xfrm>
-            <a:off x="4846320" y="1188720"/>
-            <a:ext cx="3840480" cy="3291840"/>
+            <a:off x="3272000" y="1420000"/>
+            <a:ext cx="2600000" cy="2670000"/>
           </a:xfrm>
           <a:prstGeom prst="rect">
             <a:avLst/>
           </a:prstGeom>
           <a:noFill/>
-          <a:ln/>
         </p:spPr>
         <p:txBody>
-          <a:bodyPr wrap="square" lIns="0" tIns="0" rIns="0" bIns="0" rtlCol="0" anchor="t"/>
-          <a:lstStyle/>
-          <a:p>
-            <a:pPr marL="177800" indent="-177800">
+          <a:bodyPr wrap="square" anchor="t" lIns="0" rIns="0" tIns="0" bIns="0">
+            <a:spAutoFit/>
+          </a:bodyPr>
+          <a:lstStyle/>
+          <a:p>
+            <a:pPr>
               <a:spcAft>
-                <a:spcPts val="800"/>
+                <a:spcPts val="400"/>
               </a:spcAft>
-              <a:buSzPct val="100000"/>
-              <a:buChar char="•"/>
-            </a:pPr>
-            <a:r>
-              <a:rPr lang="en-US" sz="1250" dirty="0">
-                <a:solidFill>
-                  <a:srgbClr val="1A1A1A"/>
-                </a:solidFill>
-                <a:latin typeface="Times New Roman" pitchFamily="34" charset="0"/>
-                <a:ea typeface="Times New Roman" pitchFamily="34" charset="-122"/>
-                <a:cs typeface="Times New Roman" pitchFamily="34" charset="-120"/>
-              </a:rPr>
-              <a:t>Dataset etiquetado LLVIP (peatones nocturnos): 2.000 imágenes de entrenamiento y 500 de validación.</a:t>
-            </a:r>
-            <a:endParaRPr lang="en-US" sz="1250" dirty="0"/>
-          </a:p>
-          <a:p>
-            <a:pPr marL="177800" indent="-177800">
+            </a:pPr>
+            <a:r>
+              <a:rPr sz="1050" b="0">
+                <a:solidFill>
+                  <a:srgbClr val="1A1A1A"/>
+                </a:solidFill>
+                <a:latin typeface="Times New Roman"/>
+              </a:rPr>
+              <a:t>Control negativo: siete entradas degradadas añadidas al ranking —la imagen base sin operador, cuatro fusiones de ruido gaussiano (σ = 0,02 / 0,05 / 0,10 / 0,20) y dos desenfoques (5×5 y 11×11)—, con lo que el ranking pasa a 14 entradas.</a:t>
+            </a:r>
+          </a:p>
+          <a:p>
+            <a:pPr>
               <a:spcAft>
-                <a:spcPts val="800"/>
+                <a:spcPts val="400"/>
               </a:spcAft>
-              <a:buSzPct val="100000"/>
-              <a:buChar char="•"/>
-            </a:pPr>
-            <a:r>
-              <a:rPr lang="en-US" sz="1250" dirty="0">
-                <a:solidFill>
-                  <a:srgbClr val="1A1A1A"/>
-                </a:solidFill>
-                <a:latin typeface="Times New Roman" pitchFamily="34" charset="0"/>
-                <a:ea typeface="Times New Roman" pitchFamily="34" charset="-122"/>
-                <a:cs typeface="Times New Roman" pitchFamily="34" charset="-120"/>
-              </a:rPr>
-              <a:t>YOLOv8n reentrenado por modalidad (40 épocas), 9 entradas: VIS, IR y las 7 fusiones.</a:t>
-            </a:r>
-            <a:endParaRPr lang="en-US" sz="1250" dirty="0"/>
-          </a:p>
-          <a:p>
-            <a:pPr marL="177800" indent="-177800">
+            </a:pPr>
+            <a:r>
+              <a:rPr sz="1050" b="0">
+                <a:solidFill>
+                  <a:srgbClr val="1A1A1A"/>
+                </a:solidFill>
+                <a:latin typeface="Times New Roman"/>
+              </a:rPr>
+              <a:t>Ablación del banco con (r, m) = (25; 0,30) fijos en seis brazos que sólo difieren en cómo se combinan las respuestas morfológicas.</a:t>
+            </a:r>
+          </a:p>
+          <a:p>
+            <a:pPr>
               <a:spcAft>
-                <a:spcPts val="800"/>
+                <a:spcPts val="400"/>
               </a:spcAft>
-              <a:buSzPct val="100000"/>
-              <a:buChar char="•"/>
-            </a:pPr>
-            <a:r>
-              <a:rPr lang="en-US" sz="1250" dirty="0">
-                <a:solidFill>
-                  <a:srgbClr val="1A1A1A"/>
-                </a:solidFill>
-                <a:latin typeface="Times New Roman" pitchFamily="34" charset="0"/>
-                <a:ea typeface="Times New Roman" pitchFamily="34" charset="-122"/>
-                <a:cs typeface="Times New Roman" pitchFamily="34" charset="-120"/>
-              </a:rPr>
-              <a:t>Etiquetas idénticas entre modalidades: la diferencia de mAP aísla el efecto del método de fusión.</a:t>
-            </a:r>
-            <a:endParaRPr lang="en-US" sz="1250" dirty="0"/>
+            </a:pPr>
+            <a:r>
+              <a:rPr sz="1050" b="0">
+                <a:solidFill>
+                  <a:srgbClr val="1A1A1A"/>
+                </a:solidFill>
+                <a:latin typeface="Times New Roman"/>
+              </a:rPr>
+              <a:t>Ajuste simétrico: el mismo tipo de barrido concedido a los cinco comparativos y al Top-Hat clásico.</a:t>
+            </a:r>
+          </a:p>
+          <a:p>
+            <a:pPr>
+              <a:spcAft>
+                <a:spcPts val="400"/>
+              </a:spcAft>
+            </a:pPr>
+            <a:r>
+              <a:rPr sz="1050" b="0">
+                <a:solidFill>
+                  <a:srgbClr val="1A1A1A"/>
+                </a:solidFill>
+                <a:latin typeface="Times New Roman"/>
+              </a:rPr>
+              <a:t>Sensibilidad del criterio: el mismo ranking con las diecisiete métricas que el evaluador ya computa (nueve + Qabf, Nabf, SCD, VIF, FMI, Q0, QW, QE).</a:t>
+            </a:r>
+          </a:p>
+        </p:txBody>
+      </p:sp>
+      <p:sp>
+        <p:nvSpPr>
+          <p:cNvPr id="8" name="Text 6"/>
+          <p:cNvSpPr txBox="1"/>
+          <p:nvPr/>
+        </p:nvSpPr>
+        <p:spPr>
+          <a:xfrm>
+            <a:off x="6086800" y="868680"/>
+            <a:ext cx="2600000" cy="480000"/>
+          </a:xfrm>
+          <a:prstGeom prst="rect">
+            <a:avLst/>
+          </a:prstGeom>
+          <a:noFill/>
+        </p:spPr>
+        <p:txBody>
+          <a:bodyPr wrap="square" anchor="t" lIns="0" rIns="0" tIns="0" bIns="0">
+            <a:spAutoFit/>
+          </a:bodyPr>
+          <a:lstStyle/>
+          <a:p>
+            <a:pPr>
+              <a:spcAft>
+                <a:spcPts val="400"/>
+              </a:spcAft>
+            </a:pPr>
+            <a:r>
+              <a:rPr sz="1300" b="1">
+                <a:solidFill>
+                  <a:srgbClr val="1A1A1A"/>
+                </a:solidFill>
+                <a:latin typeface="Times New Roman"/>
+              </a:rPr>
+              <a:t>Evaluación en tarea (dos experimentos)</a:t>
+            </a:r>
+          </a:p>
+        </p:txBody>
+      </p:sp>
+      <p:sp>
+        <p:nvSpPr>
+          <p:cNvPr id="9" name="Text 7"/>
+          <p:cNvSpPr txBox="1"/>
+          <p:nvPr/>
+        </p:nvSpPr>
+        <p:spPr>
+          <a:xfrm>
+            <a:off x="6086800" y="1420000"/>
+            <a:ext cx="2600000" cy="2670000"/>
+          </a:xfrm>
+          <a:prstGeom prst="rect">
+            <a:avLst/>
+          </a:prstGeom>
+          <a:noFill/>
+        </p:spPr>
+        <p:txBody>
+          <a:bodyPr wrap="square" anchor="t" lIns="0" rIns="0" tIns="0" bIns="0">
+            <a:spAutoFit/>
+          </a:bodyPr>
+          <a:lstStyle/>
+          <a:p>
+            <a:pPr>
+              <a:spcAft>
+                <a:spcPts val="400"/>
+              </a:spcAft>
+            </a:pPr>
+            <a:r>
+              <a:rPr sz="1050" b="0">
+                <a:solidFill>
+                  <a:srgbClr val="1A1A1A"/>
+                </a:solidFill>
+                <a:latin typeface="Times New Roman"/>
+              </a:rPr>
+              <a:t>LLVIP (peatones nocturnos): 2.000 imágenes de entrenamiento y 500 de validación. YOLOv8n reentrenado por modalidad (40 épocas), 9 entradas: VIS, IR y las 7 fusiones.</a:t>
+            </a:r>
+          </a:p>
+          <a:p>
+            <a:pPr>
+              <a:spcAft>
+                <a:spcPts val="400"/>
+              </a:spcAft>
+            </a:pPr>
+            <a:r>
+              <a:rPr sz="1050" b="0">
+                <a:solidFill>
+                  <a:srgbClr val="1A1A1A"/>
+                </a:solidFill>
+                <a:latin typeface="Times New Roman"/>
+              </a:rPr>
+              <a:t>Etiquetas idénticas entre modalidades: la diferencia de mAP atribuye el efecto al método de fusión.</a:t>
+            </a:r>
+          </a:p>
+          <a:p>
+            <a:pPr>
+              <a:spcAft>
+                <a:spcPts val="400"/>
+              </a:spcAft>
+            </a:pPr>
+            <a:r>
+              <a:rPr sz="1050" b="0">
+                <a:solidFill>
+                  <a:srgbClr val="1A1A1A"/>
+                </a:solidFill>
+                <a:latin typeface="Times New Roman"/>
+              </a:rPr>
+              <a:t>M3FD (clases de visibilidad opuesta: personas/IR y luces/VIS): detector único VIS+IR y conteo por escena sobre 232 escenas con ambas clases, 90 de ellas críticas.</a:t>
+            </a:r>
+          </a:p>
+        </p:txBody>
+      </p:sp>
+      <p:sp>
+        <p:nvSpPr>
+          <p:cNvPr id="10" name="Text 8"/>
+          <p:cNvSpPr txBox="1"/>
+          <p:nvPr/>
+        </p:nvSpPr>
+        <p:spPr>
+          <a:xfrm>
+            <a:off x="457200" y="4320000"/>
+            <a:ext cx="8229600" cy="600000"/>
+          </a:xfrm>
+          <a:prstGeom prst="rect">
+            <a:avLst/>
+          </a:prstGeom>
+          <a:noFill/>
+        </p:spPr>
+        <p:txBody>
+          <a:bodyPr wrap="square" anchor="t" lIns="0" rIns="0" tIns="0" bIns="0">
+            <a:spAutoFit/>
+          </a:bodyPr>
+          <a:lstStyle/>
+          <a:p>
+            <a:pPr>
+              <a:spcAft>
+                <a:spcPts val="400"/>
+              </a:spcAft>
+            </a:pPr>
+            <a:r>
+              <a:rPr sz="900" b="0">
+                <a:solidFill>
+                  <a:srgbClr val="666666"/>
+                </a:solidFill>
+                <a:latin typeface="Times New Roman"/>
+              </a:rPr>
+              <a:t>Limitaciones declaradas: CVT es una aproximación de tipo curvelet con wavelet 2D db4, no la transformada curvelet, de modo que los cinco comparativos cubren cuatro familias; los 20 pares incluyen series de tomas de la misma escena, y las conclusiones se verificaron agregando por escena; LLVIP no tiene partición de prueba separada de la de selección, y se reporta el checkpoint final; y los experimentos de detección usan una sola semilla, por lo que diferencias de milésimas entre métodos no son distinguibles.</a:t>
+            </a:r>
           </a:p>
         </p:txBody>
       </p:sp>
@@ -9352,109 +9516,180 @@
           <a:bodyPr wrap="square" lIns="0" tIns="0" rIns="0" bIns="0" rtlCol="0" anchor="t"/>
           <a:lstStyle/>
           <a:p>
-            <a:pPr marL="177800" indent="-177800">
+            <a:pPr>
               <a:spcAft>
-                <a:spcPts val="1100"/>
+                <a:spcPts val="400"/>
               </a:spcAft>
-              <a:buSzPct val="100000"/>
-              <a:buChar char="•"/>
-            </a:pPr>
-            <a:r>
-              <a:rPr lang="en-US" sz="1350" dirty="0">
-                <a:solidFill>
-                  <a:srgbClr val="1A1A1A"/>
-                </a:solidFill>
-                <a:latin typeface="Times New Roman" pitchFamily="34" charset="0"/>
-                <a:ea typeface="Times New Roman" pitchFamily="34" charset="-122"/>
-                <a:cs typeface="Times New Roman" pitchFamily="34" charset="-120"/>
-              </a:rPr>
-              <a:t>Se formuló e implementó de forma reproducible un operador Top-Hat de una sola escala con banco de disco + líneas orientadas y suma de ramas.</a:t>
+            </a:pPr>
+            <a:r>
+              <a:rPr sz="1100" b="1">
+                <a:solidFill>
+                  <a:srgbClr val="1A1A1A"/>
+                </a:solidFill>
+                <a:latin typeface="Times New Roman"/>
+              </a:rPr>
+              <a:t>1. </a:t>
+            </a:r>
+            <a:r>
+              <a:rPr sz="1100" b="0">
+                <a:solidFill>
+                  <a:srgbClr val="1A1A1A"/>
+                </a:solidFill>
+                <a:latin typeface="Times New Roman"/>
+              </a:rPr>
+              <a:t>El operador desplaza el punto de operación de la fusión y no la mejora de manera uniforme: gana en actividad espacial (24 de 25 contrastes favorables, ninguno adverso con significancia) y cede en fidelidad a las fuentes (17 de 20 adversos).</a:t>
             </a:r>
             <a:endParaRPr lang="en-US" sz="1350" dirty="0"/>
           </a:p>
           <a:p>
-            <a:pPr marL="177800" indent="-177800">
+            <a:pPr>
               <a:spcAft>
-                <a:spcPts val="1100"/>
+                <a:spcPts val="400"/>
               </a:spcAft>
-              <a:buSzPct val="100000"/>
-              <a:buChar char="•"/>
-            </a:pPr>
-            <a:r>
-              <a:rPr lang="en-US" sz="1350" dirty="0">
-                <a:solidFill>
-                  <a:srgbClr val="1A1A1A"/>
-                </a:solidFill>
-                <a:latin typeface="Times New Roman" pitchFamily="34" charset="0"/>
-                <a:ea typeface="Times New Roman" pitchFamily="34" charset="-122"/>
-                <a:cs typeface="Times New Roman" pitchFamily="34" charset="-120"/>
-              </a:rPr>
-              <a:t xml:space="preserve">El barrido con la aptitud y el rango publicados, repetido 20 veces por celda —500 corridas—, converge a m* = 0,30 en el 99,8 %, el piso del rango; el máximo de la aptitud está en r = 1 y se adopta r = 25 por el criterio de evaluación, no por la optimización.</a:t>
-            </a:r>
-            <a:endParaRPr lang="en-US" sz="1350" dirty="0"/>
-          </a:p>
-          <a:p>
-            <a:pPr marL="177800" indent="-177800">
+            </a:pPr>
+            <a:r>
+              <a:rPr sz="1100" b="1">
+                <a:solidFill>
+                  <a:srgbClr val="1A1A1A"/>
+                </a:solidFill>
+                <a:latin typeface="Times New Roman"/>
+              </a:rPr>
+              <a:t>2. </a:t>
+            </a:r>
+            <a:r>
+              <a:rPr sz="1100" b="0">
+                <a:solidFill>
+                  <a:srgbClr val="1A1A1A"/>
+                </a:solidFill>
+                <a:latin typeface="Times New Roman"/>
+              </a:rPr>
+              <a:t>Bajo el criterio del trabajo de referencia encabeza el benchmark: 1.º de 7 con rango medio 3,394. Concediendo a los comparativos el mismo paso de ajuste, ninguna de las cinco configuraciones de referencia lo alcanza; el Top-Hat clásico lo supera por 0,061, pero con m = 1, y a peso igualado la propuesta vuelve al primer lugar: 3,528 frente a 3,694.</a:t>
+            </a:r>
+          </a:p>
+          <a:p>
+            <a:pPr>
               <a:spcAft>
-                <a:spcPts val="1100"/>
+                <a:spcPts val="400"/>
               </a:spcAft>
-              <a:buSzPct val="100000"/>
-              <a:buChar char="•"/>
-            </a:pPr>
-            <a:r>
-              <a:rPr lang="en-US" sz="1350" dirty="0">
-                <a:solidFill>
-                  <a:srgbClr val="1A1A1A"/>
-                </a:solidFill>
-                <a:latin typeface="Times New Roman" pitchFamily="34" charset="0"/>
-                <a:ea typeface="Times New Roman" pitchFamily="34" charset="-122"/>
-                <a:cs typeface="Times New Roman" pitchFamily="34" charset="-120"/>
-              </a:rPr>
-              <a:t xml:space="preserve">La propuesta lidera la entropía (6,986) y la eficiencia de fusión (1,105) del benchmark y encabeza el ranking agregado de rangos medios (3,394), por delante de la pirámide de Laplace (3,911) y del Top-Hat clásico (3,944).</a:t>
-            </a:r>
-            <a:endParaRPr lang="en-US" sz="1350" dirty="0"/>
-          </a:p>
-          <a:p>
-            <a:pPr marL="177800" indent="-177800">
+            </a:pPr>
+            <a:r>
+              <a:rPr sz="1100" b="1">
+                <a:solidFill>
+                  <a:srgbClr val="1A1A1A"/>
+                </a:solidFill>
+                <a:latin typeface="Times New Roman"/>
+              </a:rPr>
+              <a:t>3. </a:t>
+            </a:r>
+            <a:r>
+              <a:rPr sz="1100" b="0">
+                <a:solidFill>
+                  <a:srgbClr val="1A1A1A"/>
+                </a:solidFill>
+                <a:latin typeface="Times New Roman"/>
+              </a:rPr>
+              <a:t>El banco aporta sobre el disco único con hiperparámetros igualados (3,222 frente a 3,367 con las nueve métricas), y el mérito no proviene de la imagen base, que queda última con las diecisiete (4,359).</a:t>
+            </a:r>
+          </a:p>
+          <a:p>
+            <a:pPr>
               <a:spcAft>
-                <a:spcPts val="1100"/>
+                <a:spcPts val="400"/>
               </a:spcAft>
-              <a:buSzPct val="100000"/>
-              <a:buChar char="•"/>
-            </a:pPr>
-            <a:r>
-              <a:rPr lang="en-US" sz="1350" dirty="0">
-                <a:solidFill>
-                  <a:srgbClr val="1A1A1A"/>
-                </a:solidFill>
-                <a:latin typeface="Times New Roman" pitchFamily="34" charset="0"/>
-                <a:ea typeface="Times New Roman" pitchFamily="34" charset="-122"/>
-                <a:cs typeface="Times New Roman" pitchFamily="34" charset="-120"/>
-              </a:rPr>
-              <a:t>Frente al Top-Hat clásico (r = 5; m = 1) la propuesta mejora seis de las nueve métricas con significancia (p_Holm ≤ 0,0002), incluida la similitud estructural (0,658 frente a 0,564), y pierde en gradiente medio y frecuencia espacial. Esa diferencia mezcla banco, radio y peso; el aporte del banco aislado con (r, m) = (25; 0,30) es 3,222 frente a 3,367 del disco único con las nueve métricas, y se invierte con las diecisiete.</a:t>
-            </a:r>
-            <a:endParaRPr lang="en-US" sz="1350" dirty="0"/>
-          </a:p>
-          <a:p>
-            <a:pPr marL="177800" indent="-177800">
+            </a:pPr>
+            <a:r>
+              <a:rPr sz="1100" b="1">
+                <a:solidFill>
+                  <a:srgbClr val="1A1A1A"/>
+                </a:solidFill>
+                <a:latin typeface="Times New Roman"/>
+              </a:rPr>
+              <a:t>4. </a:t>
+            </a:r>
+            <a:r>
+              <a:rPr sz="1100" b="0">
+                <a:solidFill>
+                  <a:srgbClr val="1A1A1A"/>
+                </a:solidFill>
+                <a:latin typeface="Times New Roman"/>
+              </a:rPr>
+              <a:t>Ese orden es propiedad del criterio: con las diecisiete métricas que el mismo evaluador calcula la propuesta es 3.ª (3,459) y el primer lugar pasa a la pirámide de Laplace (3,147). Ninguna imagen fusionada cambió.</a:t>
+            </a:r>
+          </a:p>
+          <a:p>
+            <a:pPr>
               <a:spcAft>
-                <a:spcPts val="1100"/>
+                <a:spcPts val="400"/>
               </a:spcAft>
-              <a:buSzPct val="100000"/>
-              <a:buChar char="•"/>
-            </a:pPr>
-            <a:r>
-              <a:rPr lang="en-US" sz="1350" dirty="0">
-                <a:solidFill>
-                  <a:srgbClr val="1A1A1A"/>
-                </a:solidFill>
-                <a:latin typeface="Times New Roman" pitchFamily="34" charset="0"/>
-                <a:ea typeface="Times New Roman" pitchFamily="34" charset="-122"/>
-                <a:cs typeface="Times New Roman" pitchFamily="34" charset="-120"/>
-              </a:rPr>
-              <a:t xml:space="preserve">La evaluación orientada a tarea arroja el hallazgo metodológico central: la configuración que maximiza las métricas de actividad no es la que maximiza el desempeño de detección. En M3FD la mejor entrada del par complementario es la Ratio Pyramid (0,622) y la propuesta alcanza 0,564; en el conteo por escena queda por debajo del visible solo. Ambos criterios deben reportarse por separado.</a:t>
-            </a:r>
-            <a:endParaRPr lang="en-US" sz="1350" dirty="0"/>
+            </a:pPr>
+            <a:r>
+              <a:rPr sz="1100" b="1">
+                <a:solidFill>
+                  <a:srgbClr val="1A1A1A"/>
+                </a:solidFill>
+                <a:latin typeface="Times New Roman"/>
+              </a:rPr>
+              <a:t>5. </a:t>
+            </a:r>
+            <a:r>
+              <a:rPr sz="1100" b="0">
+                <a:solidFill>
+                  <a:srgbClr val="1A1A1A"/>
+                </a:solidFill>
+                <a:latin typeface="Times New Roman"/>
+              </a:rPr>
+              <a:t>La batería de nueve métricas no discrimina detalle útil de ruido —una fusión artificial de ruido queda 3.ª de 14 y su rango mejora al aumentar la varianza— y contiene redundancia: FE es la entropía reescalada, así que las dimensiones efectivas son ocho.</a:t>
+            </a:r>
+          </a:p>
+          <a:p>
+            <a:pPr>
+              <a:spcAft>
+                <a:spcPts val="400"/>
+              </a:spcAft>
+            </a:pPr>
+            <a:r>
+              <a:rPr sz="1100" b="1">
+                <a:solidFill>
+                  <a:srgbClr val="1A1A1A"/>
+                </a:solidFill>
+                <a:latin typeface="Times New Roman"/>
+              </a:rPr>
+              <a:t>6. </a:t>
+            </a:r>
+            <a:r>
+              <a:rPr sz="1100" b="0">
+                <a:solidFill>
+                  <a:srgbClr val="1A1A1A"/>
+                </a:solidFill>
+                <a:latin typeface="Times New Roman"/>
+              </a:rPr>
+              <a:t>La optimización no determina la configuración evaluada: el máximo de la aptitud dentro del rango publicado está en r = 1 y el peso queda en el piso, 0,30, en 499 de las 500 corridas. El peso sí tiene justificación independiente: con m = 0,30 el recorte satura el 0,73 % de los píxeles en promedio, contra el 6,50 % que produciría m = 1.</a:t>
+            </a:r>
+          </a:p>
+          <a:p>
+            <a:pPr>
+              <a:spcAft>
+                <a:spcPts val="400"/>
+              </a:spcAft>
+            </a:pPr>
+            <a:r>
+              <a:rPr sz="1100" b="1">
+                <a:solidFill>
+                  <a:srgbClr val="1A1A1A"/>
+                </a:solidFill>
+                <a:latin typeface="Times New Roman"/>
+              </a:rPr>
+              <a:t>7. </a:t>
+            </a:r>
+            <a:r>
+              <a:rPr sz="1100" b="0">
+                <a:solidFill>
+                  <a:srgbClr val="1A1A1A"/>
+                </a:solidFill>
+                <a:latin typeface="Times New Roman"/>
+              </a:rPr>
+              <a:t>El orden de calidad no predice la utilidad en detección (ρ = +0,214; p = 0,645) y ninguna fusión supera a la mejor modalidad individual por un margen distinguible: en LLVIP lidera el infrarrojo (0,971) y en el conteo por escena de M3FD la propuesta queda por debajo del visible (50,0 % frente a 53,0 %; n = 232). Aporte metodológico: un protocolo de evaluación de fusión debe incluir al menos una métrica que penalice artefactos, declarar la redundancia entre sus componentes y separar el ajuste de hiperparámetros del criterio de evaluación.</a:t>
+            </a:r>
           </a:p>
         </p:txBody>
       </p:sp>

--- a/docs/Tesis_Defensa_Presentacion.pptx
+++ b/docs/Tesis_Defensa_Presentacion.pptx
@@ -3925,35 +3925,94 @@
           </a:p>
         </p:txBody>
       </p:sp>
+      <p:sp>
+        <p:nvSpPr>
+          <p:cNvPr id="5" name="Text 2"/>
+          <p:cNvSpPr/>
+          <p:nvPr/>
+        </p:nvSpPr>
+        <p:spPr>
+          <a:xfrm>
+            <a:off x="457200" y="3620000"/>
+            <a:ext cx="8229600" cy="1097280"/>
+          </a:xfrm>
+          <a:prstGeom prst="rect">
+            <a:avLst/>
+          </a:prstGeom>
+          <a:noFill/>
+          <a:ln/>
+        </p:spPr>
+        <p:txBody>
+          <a:bodyPr wrap="square" lIns="0" tIns="0" rIns="0" bIns="0" rtlCol="0" anchor="t"/>
+          <a:lstStyle/>
+          <a:p>
+            <a:pPr marL="177800" indent="-177800">
+              <a:spcAft>
+                <a:spcPts val="500"/>
+              </a:spcAft>
+              <a:buSzPct val="100000"/>
+              <a:buChar char="•"/>
+            </a:pPr>
+            <a:r>
+              <a:rPr sz="1250">
+                <a:solidFill>
+                  <a:srgbClr val="1A1A1A"/>
+                </a:solidFill>
+                <a:latin typeface="Times New Roman"/>
+              </a:rPr>
+              <a:t>Ninguna fila domina. La propuesta lidera la entropía y con ella la eficiencia de fusión, que es esa misma entropía reescalada por una constante por escena y no una dimensión independiente; y queda segunda en contraste, gradiente medio y frecuencia espacial, detrás del Top-Hat clásico en las dos últimas.</a:t>
+            </a:r>
+            <a:endParaRPr lang="en-US" sz="1250" dirty="0"/>
+          </a:p>
+          <a:p>
+            <a:pPr marL="177800" indent="-177800">
+              <a:spcAft>
+                <a:spcPts val="500"/>
+              </a:spcAft>
+              <a:buSzPct val="100000"/>
+              <a:buChar char="•"/>
+            </a:pPr>
+            <a:r>
+              <a:rPr sz="1250">
+                <a:solidFill>
+                  <a:srgbClr val="1A1A1A"/>
+                </a:solidFill>
+                <a:latin typeface="Times New Roman"/>
+              </a:rPr>
+              <a:t>Cede las cuatro métricas de fidelidad, lideradas por los multiescala. No hay dominancia global: hay un punto de operación desplazado. En el ranking de rangos medios intra-bloque de las nueve métricas la propuesta es 1.ª de 7 (3,394), por delante de la pirámide de Laplace (3,911) y del Top-Hat clásico (3,944) — bajo este criterio.</a:t>
+            </a:r>
+          </a:p>
+        </p:txBody>
+      </p:sp>
       <p:graphicFrame>
         <p:nvGraphicFramePr>
-          <p:cNvPr id="12" name="Table 0"/>
+          <p:cNvPr id="6" name="Table 0"/>
           <p:cNvGraphicFramePr>
             <a:graphicFrameLocks noGrp="1"/>
           </p:cNvGraphicFramePr>
-          <p:nvPr>
-            <p:extLst>
-              <p:ext uri="{D42A27DB-BD31-4B8C-83A1-F6EECF244321}">
-                <p14:modId xmlns:p14="http://schemas.microsoft.com/office/powerpoint/2010/main" val="1579011935"/>
-              </p:ext>
-            </p:extLst>
-          </p:nvPr>
+          <p:nvPr/>
         </p:nvGraphicFramePr>
         <p:xfrm>
-          <a:off x="457200" y="914400"/>
-          <a:ext cx="8229600" cy="914400"/>
+          <a:off x="457200" y="1050000"/>
+          <a:ext cx="8229593" cy="2487168"/>
         </p:xfrm>
         <a:graphic>
           <a:graphicData uri="http://schemas.openxmlformats.org/drawingml/2006/table">
             <a:tbl>
-              <a:tblPr/>
+              <a:tblPr firstRow="1" bandRow="1">
+                <a:tableStyleId>{5C22544A-7EE6-4342-B048-85BDC9FD1C3A}</a:tableStyleId>
+              </a:tblPr>
               <a:tblGrid>
-                <a:gridCol w="3017520"/>
-                <a:gridCol w="1042416"/>
-                <a:gridCol w="1042416"/>
-                <a:gridCol w="1042416"/>
-                <a:gridCol w="1042416"/>
-                <a:gridCol w="1042416"/>
+                <a:gridCol w="2000000"/>
+                <a:gridCol w="692177"/>
+                <a:gridCol w="692177"/>
+                <a:gridCol w="692177"/>
+                <a:gridCol w="692177"/>
+                <a:gridCol w="692177"/>
+                <a:gridCol w="692177"/>
+                <a:gridCol w="692177"/>
+                <a:gridCol w="692177"/>
+                <a:gridCol w="692177"/>
               </a:tblGrid>
               <a:tr h="310896">
                 <a:tc>
@@ -3961,64 +4020,19 @@
                     <a:bodyPr/>
                     <a:lstStyle/>
                     <a:p>
-                      <a:pPr algn="l" indent="0" marL="0">
-                        <a:buNone/>
-                      </a:pPr>
+                      <a:pPr algn="l"/>
                       <a:r>
-                        <a:rPr lang="en-US" sz="1200" b="1" dirty="0">
+                        <a:rPr sz="1000" b="1">
                           <a:solidFill>
                             <a:srgbClr val="1A1A1A"/>
                           </a:solidFill>
-                          <a:latin typeface="Times New Roman" pitchFamily="34" charset="0"/>
-                          <a:ea typeface="Times New Roman" pitchFamily="34" charset="-122"/>
-                          <a:cs typeface="Times New Roman" pitchFamily="34" charset="-120"/>
+                          <a:latin typeface="Times New Roman"/>
                         </a:rPr>
                         <a:t>Método</a:t>
                       </a:r>
-                      <a:endParaRPr lang="en-US" sz="1200" dirty="0">
-                        <a:latin typeface="Times New Roman" charset="0"/>
-                        <a:ea typeface="Times New Roman" charset="0"/>
-                        <a:cs typeface="Times New Roman" charset="0"/>
-                      </a:endParaRPr>
                     </a:p>
                   </a:txBody>
-                  <a:tcPr marL="91440" marR="91440" marT="45720" marB="45720" anchor="ctr">
-                    <a:lnL w="6350" cap="flat" cmpd="sng" algn="ctr">
-                      <a:solidFill>
-                        <a:srgbClr val="BFBFBF"/>
-                      </a:solidFill>
-                      <a:prstDash val="solid"/>
-                      <a:round/>
-                      <a:headEnd type="none" w="med" len="med"/>
-                      <a:tailEnd type="none" w="med" len="med"/>
-                    </a:lnL>
-                    <a:lnR w="6350" cap="flat" cmpd="sng" algn="ctr">
-                      <a:solidFill>
-                        <a:srgbClr val="BFBFBF"/>
-                      </a:solidFill>
-                      <a:prstDash val="solid"/>
-                      <a:round/>
-                      <a:headEnd type="none" w="med" len="med"/>
-                      <a:tailEnd type="none" w="med" len="med"/>
-                    </a:lnR>
-                    <a:lnT w="6350" cap="flat" cmpd="sng" algn="ctr">
-                      <a:solidFill>
-                        <a:srgbClr val="BFBFBF"/>
-                      </a:solidFill>
-                      <a:prstDash val="solid"/>
-                      <a:round/>
-                      <a:headEnd type="none" w="med" len="med"/>
-                      <a:tailEnd type="none" w="med" len="med"/>
-                    </a:lnT>
-                    <a:lnB w="6350" cap="flat" cmpd="sng" algn="ctr">
-                      <a:solidFill>
-                        <a:srgbClr val="BFBFBF"/>
-                      </a:solidFill>
-                      <a:prstDash val="solid"/>
-                      <a:round/>
-                      <a:headEnd type="none" w="med" len="med"/>
-                      <a:tailEnd type="none" w="med" len="med"/>
-                    </a:lnB>
+                  <a:tcPr anchor="ctr" marL="45720" marR="45720" marT="45720" marB="45720">
                     <a:solidFill>
                       <a:srgbClr val="F2F2F2"/>
                     </a:solidFill>
@@ -4029,64 +4043,19 @@
                     <a:bodyPr/>
                     <a:lstStyle/>
                     <a:p>
-                      <a:pPr algn="ctr" indent="0" marL="0">
-                        <a:buNone/>
-                      </a:pPr>
+                      <a:pPr algn="ctr"/>
                       <a:r>
-                        <a:rPr lang="en-US" sz="1200" b="1" dirty="0">
+                        <a:rPr sz="1000" b="1">
                           <a:solidFill>
                             <a:srgbClr val="1A1A1A"/>
                           </a:solidFill>
-                          <a:latin typeface="Times New Roman" pitchFamily="34" charset="0"/>
-                          <a:ea typeface="Times New Roman" pitchFamily="34" charset="-122"/>
-                          <a:cs typeface="Times New Roman" pitchFamily="34" charset="-120"/>
+                          <a:latin typeface="Times New Roman"/>
                         </a:rPr>
                         <a:t>EN ↑</a:t>
                       </a:r>
-                      <a:endParaRPr lang="en-US" sz="1200" dirty="0">
-                        <a:latin typeface="Times New Roman" charset="0"/>
-                        <a:ea typeface="Times New Roman" charset="0"/>
-                        <a:cs typeface="Times New Roman" charset="0"/>
-                      </a:endParaRPr>
                     </a:p>
                   </a:txBody>
-                  <a:tcPr marL="91440" marR="91440" marT="45720" marB="45720" anchor="ctr">
-                    <a:lnL w="6350" cap="flat" cmpd="sng" algn="ctr">
-                      <a:solidFill>
-                        <a:srgbClr val="BFBFBF"/>
-                      </a:solidFill>
-                      <a:prstDash val="solid"/>
-                      <a:round/>
-                      <a:headEnd type="none" w="med" len="med"/>
-                      <a:tailEnd type="none" w="med" len="med"/>
-                    </a:lnL>
-                    <a:lnR w="6350" cap="flat" cmpd="sng" algn="ctr">
-                      <a:solidFill>
-                        <a:srgbClr val="BFBFBF"/>
-                      </a:solidFill>
-                      <a:prstDash val="solid"/>
-                      <a:round/>
-                      <a:headEnd type="none" w="med" len="med"/>
-                      <a:tailEnd type="none" w="med" len="med"/>
-                    </a:lnR>
-                    <a:lnT w="6350" cap="flat" cmpd="sng" algn="ctr">
-                      <a:solidFill>
-                        <a:srgbClr val="BFBFBF"/>
-                      </a:solidFill>
-                      <a:prstDash val="solid"/>
-                      <a:round/>
-                      <a:headEnd type="none" w="med" len="med"/>
-                      <a:tailEnd type="none" w="med" len="med"/>
-                    </a:lnT>
-                    <a:lnB w="6350" cap="flat" cmpd="sng" algn="ctr">
-                      <a:solidFill>
-                        <a:srgbClr val="BFBFBF"/>
-                      </a:solidFill>
-                      <a:prstDash val="solid"/>
-                      <a:round/>
-                      <a:headEnd type="none" w="med" len="med"/>
-                      <a:tailEnd type="none" w="med" len="med"/>
-                    </a:lnB>
+                  <a:tcPr anchor="ctr" marL="45720" marR="45720" marT="45720" marB="45720">
                     <a:solidFill>
                       <a:srgbClr val="F2F2F2"/>
                     </a:solidFill>
@@ -4097,64 +4066,19 @@
                     <a:bodyPr/>
                     <a:lstStyle/>
                     <a:p>
-                      <a:pPr algn="ctr" indent="0" marL="0">
-                        <a:buNone/>
-                      </a:pPr>
+                      <a:pPr algn="ctr"/>
                       <a:r>
-                        <a:rPr lang="en-US" sz="1200" b="1" dirty="0">
+                        <a:rPr sz="1000" b="1">
                           <a:solidFill>
                             <a:srgbClr val="1A1A1A"/>
                           </a:solidFill>
-                          <a:latin typeface="Times New Roman" pitchFamily="34" charset="0"/>
-                          <a:ea typeface="Times New Roman" pitchFamily="34" charset="-122"/>
-                          <a:cs typeface="Times New Roman" pitchFamily="34" charset="-120"/>
+                          <a:latin typeface="Times New Roman"/>
                         </a:rPr>
-                        <a:t>FE ↑</a:t>
+                        <a:t>SD ↑</a:t>
                       </a:r>
-                      <a:endParaRPr lang="en-US" sz="1200" dirty="0">
-                        <a:latin typeface="Times New Roman" charset="0"/>
-                        <a:ea typeface="Times New Roman" charset="0"/>
-                        <a:cs typeface="Times New Roman" charset="0"/>
-                      </a:endParaRPr>
                     </a:p>
                   </a:txBody>
-                  <a:tcPr marL="91440" marR="91440" marT="45720" marB="45720" anchor="ctr">
-                    <a:lnL w="6350" cap="flat" cmpd="sng" algn="ctr">
-                      <a:solidFill>
-                        <a:srgbClr val="BFBFBF"/>
-                      </a:solidFill>
-                      <a:prstDash val="solid"/>
-                      <a:round/>
-                      <a:headEnd type="none" w="med" len="med"/>
-                      <a:tailEnd type="none" w="med" len="med"/>
-                    </a:lnL>
-                    <a:lnR w="6350" cap="flat" cmpd="sng" algn="ctr">
-                      <a:solidFill>
-                        <a:srgbClr val="BFBFBF"/>
-                      </a:solidFill>
-                      <a:prstDash val="solid"/>
-                      <a:round/>
-                      <a:headEnd type="none" w="med" len="med"/>
-                      <a:tailEnd type="none" w="med" len="med"/>
-                    </a:lnR>
-                    <a:lnT w="6350" cap="flat" cmpd="sng" algn="ctr">
-                      <a:solidFill>
-                        <a:srgbClr val="BFBFBF"/>
-                      </a:solidFill>
-                      <a:prstDash val="solid"/>
-                      <a:round/>
-                      <a:headEnd type="none" w="med" len="med"/>
-                      <a:tailEnd type="none" w="med" len="med"/>
-                    </a:lnT>
-                    <a:lnB w="6350" cap="flat" cmpd="sng" algn="ctr">
-                      <a:solidFill>
-                        <a:srgbClr val="BFBFBF"/>
-                      </a:solidFill>
-                      <a:prstDash val="solid"/>
-                      <a:round/>
-                      <a:headEnd type="none" w="med" len="med"/>
-                      <a:tailEnd type="none" w="med" len="med"/>
-                    </a:lnB>
+                  <a:tcPr anchor="ctr" marL="45720" marR="45720" marT="45720" marB="45720">
                     <a:solidFill>
                       <a:srgbClr val="F2F2F2"/>
                     </a:solidFill>
@@ -4165,64 +4089,19 @@
                     <a:bodyPr/>
                     <a:lstStyle/>
                     <a:p>
-                      <a:pPr algn="ctr" indent="0" marL="0">
-                        <a:buNone/>
-                      </a:pPr>
+                      <a:pPr algn="ctr"/>
                       <a:r>
-                        <a:rPr lang="en-US" sz="1200" b="1" dirty="0">
+                        <a:rPr sz="1000" b="1">
                           <a:solidFill>
                             <a:srgbClr val="1A1A1A"/>
                           </a:solidFill>
-                          <a:latin typeface="Times New Roman" pitchFamily="34" charset="0"/>
-                          <a:ea typeface="Times New Roman" pitchFamily="34" charset="-122"/>
-                          <a:cs typeface="Times New Roman" pitchFamily="34" charset="-120"/>
+                          <a:latin typeface="Times New Roman"/>
                         </a:rPr>
-                        <a:t>SD ↑</a:t>
+                        <a:t>FE ↑</a:t>
                       </a:r>
-                      <a:endParaRPr lang="en-US" sz="1200" dirty="0">
-                        <a:latin typeface="Times New Roman" charset="0"/>
-                        <a:ea typeface="Times New Roman" charset="0"/>
-                        <a:cs typeface="Times New Roman" charset="0"/>
-                      </a:endParaRPr>
                     </a:p>
                   </a:txBody>
-                  <a:tcPr marL="91440" marR="91440" marT="45720" marB="45720" anchor="ctr">
-                    <a:lnL w="6350" cap="flat" cmpd="sng" algn="ctr">
-                      <a:solidFill>
-                        <a:srgbClr val="BFBFBF"/>
-                      </a:solidFill>
-                      <a:prstDash val="solid"/>
-                      <a:round/>
-                      <a:headEnd type="none" w="med" len="med"/>
-                      <a:tailEnd type="none" w="med" len="med"/>
-                    </a:lnL>
-                    <a:lnR w="6350" cap="flat" cmpd="sng" algn="ctr">
-                      <a:solidFill>
-                        <a:srgbClr val="BFBFBF"/>
-                      </a:solidFill>
-                      <a:prstDash val="solid"/>
-                      <a:round/>
-                      <a:headEnd type="none" w="med" len="med"/>
-                      <a:tailEnd type="none" w="med" len="med"/>
-                    </a:lnR>
-                    <a:lnT w="6350" cap="flat" cmpd="sng" algn="ctr">
-                      <a:solidFill>
-                        <a:srgbClr val="BFBFBF"/>
-                      </a:solidFill>
-                      <a:prstDash val="solid"/>
-                      <a:round/>
-                      <a:headEnd type="none" w="med" len="med"/>
-                      <a:tailEnd type="none" w="med" len="med"/>
-                    </a:lnT>
-                    <a:lnB w="6350" cap="flat" cmpd="sng" algn="ctr">
-                      <a:solidFill>
-                        <a:srgbClr val="BFBFBF"/>
-                      </a:solidFill>
-                      <a:prstDash val="solid"/>
-                      <a:round/>
-                      <a:headEnd type="none" w="med" len="med"/>
-                      <a:tailEnd type="none" w="med" len="med"/>
-                    </a:lnB>
+                  <a:tcPr anchor="ctr" marL="45720" marR="45720" marT="45720" marB="45720">
                     <a:solidFill>
                       <a:srgbClr val="F2F2F2"/>
                     </a:solidFill>
@@ -4233,64 +4112,19 @@
                     <a:bodyPr/>
                     <a:lstStyle/>
                     <a:p>
-                      <a:pPr algn="ctr" indent="0" marL="0">
-                        <a:buNone/>
-                      </a:pPr>
+                      <a:pPr algn="ctr"/>
                       <a:r>
-                        <a:rPr lang="en-US" sz="1200" b="1" dirty="0">
+                        <a:rPr sz="1000" b="1">
                           <a:solidFill>
                             <a:srgbClr val="1A1A1A"/>
                           </a:solidFill>
-                          <a:latin typeface="Times New Roman" pitchFamily="34" charset="0"/>
-                          <a:ea typeface="Times New Roman" pitchFamily="34" charset="-122"/>
-                          <a:cs typeface="Times New Roman" pitchFamily="34" charset="-120"/>
+                          <a:latin typeface="Times New Roman"/>
                         </a:rPr>
-                        <a:t>SF ↑</a:t>
+                        <a:t>MG ↑</a:t>
                       </a:r>
-                      <a:endParaRPr lang="en-US" sz="1200" dirty="0">
-                        <a:latin typeface="Times New Roman" charset="0"/>
-                        <a:ea typeface="Times New Roman" charset="0"/>
-                        <a:cs typeface="Times New Roman" charset="0"/>
-                      </a:endParaRPr>
                     </a:p>
                   </a:txBody>
-                  <a:tcPr marL="91440" marR="91440" marT="45720" marB="45720" anchor="ctr">
-                    <a:lnL w="6350" cap="flat" cmpd="sng" algn="ctr">
-                      <a:solidFill>
-                        <a:srgbClr val="BFBFBF"/>
-                      </a:solidFill>
-                      <a:prstDash val="solid"/>
-                      <a:round/>
-                      <a:headEnd type="none" w="med" len="med"/>
-                      <a:tailEnd type="none" w="med" len="med"/>
-                    </a:lnL>
-                    <a:lnR w="6350" cap="flat" cmpd="sng" algn="ctr">
-                      <a:solidFill>
-                        <a:srgbClr val="BFBFBF"/>
-                      </a:solidFill>
-                      <a:prstDash val="solid"/>
-                      <a:round/>
-                      <a:headEnd type="none" w="med" len="med"/>
-                      <a:tailEnd type="none" w="med" len="med"/>
-                    </a:lnR>
-                    <a:lnT w="6350" cap="flat" cmpd="sng" algn="ctr">
-                      <a:solidFill>
-                        <a:srgbClr val="BFBFBF"/>
-                      </a:solidFill>
-                      <a:prstDash val="solid"/>
-                      <a:round/>
-                      <a:headEnd type="none" w="med" len="med"/>
-                      <a:tailEnd type="none" w="med" len="med"/>
-                    </a:lnT>
-                    <a:lnB w="6350" cap="flat" cmpd="sng" algn="ctr">
-                      <a:solidFill>
-                        <a:srgbClr val="BFBFBF"/>
-                      </a:solidFill>
-                      <a:prstDash val="solid"/>
-                      <a:round/>
-                      <a:headEnd type="none" w="med" len="med"/>
-                      <a:tailEnd type="none" w="med" len="med"/>
-                    </a:lnB>
+                  <a:tcPr anchor="ctr" marL="45720" marR="45720" marT="45720" marB="45720">
                     <a:solidFill>
                       <a:srgbClr val="F2F2F2"/>
                     </a:solidFill>
@@ -4301,66 +4135,113 @@
                     <a:bodyPr/>
                     <a:lstStyle/>
                     <a:p>
-                      <a:pPr algn="ctr" indent="0" marL="0">
-                        <a:buNone/>
-                      </a:pPr>
+                      <a:pPr algn="ctr"/>
                       <a:r>
-                        <a:rPr lang="en-US" sz="1200" b="1" dirty="0">
+                        <a:rPr sz="1000" b="1">
                           <a:solidFill>
                             <a:srgbClr val="1A1A1A"/>
                           </a:solidFill>
-                          <a:latin typeface="Times New Roman" pitchFamily="34" charset="0"/>
-                          <a:ea typeface="Times New Roman" pitchFamily="34" charset="-122"/>
-                          <a:cs typeface="Times New Roman" pitchFamily="34" charset="-120"/>
+                          <a:latin typeface="Times New Roman"/>
+                        </a:rPr>
+                        <a:t>SF ↑</a:t>
+                      </a:r>
+                    </a:p>
+                  </a:txBody>
+                  <a:tcPr anchor="ctr" marL="45720" marR="45720" marT="45720" marB="45720">
+                    <a:solidFill>
+                      <a:srgbClr val="F2F2F2"/>
+                    </a:solidFill>
+                  </a:tcPr>
+                </a:tc>
+                <a:tc>
+                  <a:txBody>
+                    <a:bodyPr/>
+                    <a:lstStyle/>
+                    <a:p>
+                      <a:pPr algn="ctr"/>
+                      <a:r>
+                        <a:rPr sz="1000" b="1">
+                          <a:solidFill>
+                            <a:srgbClr val="1A1A1A"/>
+                          </a:solidFill>
+                          <a:latin typeface="Times New Roman"/>
+                        </a:rPr>
+                        <a:t>MI_vis ↑</a:t>
+                      </a:r>
+                    </a:p>
+                  </a:txBody>
+                  <a:tcPr anchor="ctr" marL="45720" marR="45720" marT="45720" marB="45720">
+                    <a:solidFill>
+                      <a:srgbClr val="E2E2E2"/>
+                    </a:solidFill>
+                  </a:tcPr>
+                </a:tc>
+                <a:tc>
+                  <a:txBody>
+                    <a:bodyPr/>
+                    <a:lstStyle/>
+                    <a:p>
+                      <a:pPr algn="ctr"/>
+                      <a:r>
+                        <a:rPr sz="1000" b="1">
+                          <a:solidFill>
+                            <a:srgbClr val="1A1A1A"/>
+                          </a:solidFill>
+                          <a:latin typeface="Times New Roman"/>
+                        </a:rPr>
+                        <a:t>MI_ir ↑</a:t>
+                      </a:r>
+                    </a:p>
+                  </a:txBody>
+                  <a:tcPr anchor="ctr" marL="45720" marR="45720" marT="45720" marB="45720">
+                    <a:solidFill>
+                      <a:srgbClr val="E2E2E2"/>
+                    </a:solidFill>
+                  </a:tcPr>
+                </a:tc>
+                <a:tc>
+                  <a:txBody>
+                    <a:bodyPr/>
+                    <a:lstStyle/>
+                    <a:p>
+                      <a:pPr algn="ctr"/>
+                      <a:r>
+                        <a:rPr sz="1000" b="1">
+                          <a:solidFill>
+                            <a:srgbClr val="1A1A1A"/>
+                          </a:solidFill>
+                          <a:latin typeface="Times New Roman"/>
                         </a:rPr>
                         <a:t>SSIM ↑</a:t>
                       </a:r>
-                      <a:endParaRPr lang="en-US" sz="1200" dirty="0">
-                        <a:latin typeface="Times New Roman" charset="0"/>
-                        <a:ea typeface="Times New Roman" charset="0"/>
-                        <a:cs typeface="Times New Roman" charset="0"/>
-                      </a:endParaRPr>
                     </a:p>
                   </a:txBody>
-                  <a:tcPr marL="91440" marR="91440" marT="45720" marB="45720" anchor="ctr">
-                    <a:lnL w="6350" cap="flat" cmpd="sng" algn="ctr">
-                      <a:solidFill>
-                        <a:srgbClr val="BFBFBF"/>
-                      </a:solidFill>
-                      <a:prstDash val="solid"/>
-                      <a:round/>
-                      <a:headEnd type="none" w="med" len="med"/>
-                      <a:tailEnd type="none" w="med" len="med"/>
-                    </a:lnL>
-                    <a:lnR w="6350" cap="flat" cmpd="sng" algn="ctr">
-                      <a:solidFill>
-                        <a:srgbClr val="BFBFBF"/>
-                      </a:solidFill>
-                      <a:prstDash val="solid"/>
-                      <a:round/>
-                      <a:headEnd type="none" w="med" len="med"/>
-                      <a:tailEnd type="none" w="med" len="med"/>
-                    </a:lnR>
-                    <a:lnT w="6350" cap="flat" cmpd="sng" algn="ctr">
-                      <a:solidFill>
-                        <a:srgbClr val="BFBFBF"/>
-                      </a:solidFill>
-                      <a:prstDash val="solid"/>
-                      <a:round/>
-                      <a:headEnd type="none" w="med" len="med"/>
-                      <a:tailEnd type="none" w="med" len="med"/>
-                    </a:lnT>
-                    <a:lnB w="6350" cap="flat" cmpd="sng" algn="ctr">
-                      <a:solidFill>
-                        <a:srgbClr val="BFBFBF"/>
-                      </a:solidFill>
-                      <a:prstDash val="solid"/>
-                      <a:round/>
-                      <a:headEnd type="none" w="med" len="med"/>
-                      <a:tailEnd type="none" w="med" len="med"/>
-                    </a:lnB>
+                  <a:tcPr anchor="ctr" marL="45720" marR="45720" marT="45720" marB="45720">
                     <a:solidFill>
-                      <a:srgbClr val="F2F2F2"/>
+                      <a:srgbClr val="E2E2E2"/>
+                    </a:solidFill>
+                  </a:tcPr>
+                </a:tc>
+                <a:tc>
+                  <a:txBody>
+                    <a:bodyPr/>
+                    <a:lstStyle/>
+                    <a:p>
+                      <a:pPr algn="ctr"/>
+                      <a:r>
+                        <a:rPr sz="1000" b="1">
+                          <a:solidFill>
+                            <a:srgbClr val="1A1A1A"/>
+                          </a:solidFill>
+                          <a:latin typeface="Times New Roman"/>
+                        </a:rPr>
+                        <a:t>PSNR ↑</a:t>
+                      </a:r>
+                    </a:p>
+                  </a:txBody>
+                  <a:tcPr anchor="ctr" marL="45720" marR="45720" marT="45720" marB="45720">
+                    <a:solidFill>
+                      <a:srgbClr val="E2E2E2"/>
                     </a:solidFill>
                   </a:tcPr>
                 </a:tc>
@@ -4371,64 +4252,20 @@
                     <a:bodyPr/>
                     <a:lstStyle/>
                     <a:p>
-                      <a:pPr algn="l" indent="0" marL="0">
-                        <a:buNone/>
-                      </a:pPr>
+                      <a:pPr algn="l"/>
                       <a:r>
-                        <a:rPr lang="en-US" sz="1200" dirty="0">
+                        <a:rPr sz="1000" b="0">
                           <a:solidFill>
                             <a:srgbClr val="1A1A1A"/>
                           </a:solidFill>
-                          <a:latin typeface="Times New Roman" pitchFamily="34" charset="0"/>
-                          <a:ea typeface="Times New Roman" pitchFamily="34" charset="-122"/>
-                          <a:cs typeface="Times New Roman" pitchFamily="34" charset="-120"/>
+                          <a:latin typeface="Times New Roman"/>
                         </a:rPr>
                         <a:t>Pirámide de Laplace (LP)</a:t>
                       </a:r>
-                      <a:endParaRPr lang="en-US" sz="1200" dirty="0">
-                        <a:latin typeface="Times New Roman" charset="0"/>
-                        <a:ea typeface="Times New Roman" charset="0"/>
-                        <a:cs typeface="Times New Roman" charset="0"/>
-                      </a:endParaRPr>
                     </a:p>
                   </a:txBody>
-                  <a:tcPr marL="91440" marR="91440" marT="45720" marB="45720" anchor="ctr">
-                    <a:lnL w="6350" cap="flat" cmpd="sng" algn="ctr">
-                      <a:solidFill>
-                        <a:srgbClr val="BFBFBF"/>
-                      </a:solidFill>
-                      <a:prstDash val="solid"/>
-                      <a:round/>
-                      <a:headEnd type="none" w="med" len="med"/>
-                      <a:tailEnd type="none" w="med" len="med"/>
-                    </a:lnL>
-                    <a:lnR w="6350" cap="flat" cmpd="sng" algn="ctr">
-                      <a:solidFill>
-                        <a:srgbClr val="BFBFBF"/>
-                      </a:solidFill>
-                      <a:prstDash val="solid"/>
-                      <a:round/>
-                      <a:headEnd type="none" w="med" len="med"/>
-                      <a:tailEnd type="none" w="med" len="med"/>
-                    </a:lnR>
-                    <a:lnT w="6350" cap="flat" cmpd="sng" algn="ctr">
-                      <a:solidFill>
-                        <a:srgbClr val="BFBFBF"/>
-                      </a:solidFill>
-                      <a:prstDash val="solid"/>
-                      <a:round/>
-                      <a:headEnd type="none" w="med" len="med"/>
-                      <a:tailEnd type="none" w="med" len="med"/>
-                    </a:lnT>
-                    <a:lnB w="6350" cap="flat" cmpd="sng" algn="ctr">
-                      <a:solidFill>
-                        <a:srgbClr val="BFBFBF"/>
-                      </a:solidFill>
-                      <a:prstDash val="solid"/>
-                      <a:round/>
-                      <a:headEnd type="none" w="med" len="med"/>
-                      <a:tailEnd type="none" w="med" len="med"/>
-                    </a:lnB>
+                  <a:tcPr anchor="ctr" marL="45720" marR="45720" marT="45720" marB="45720">
+                    <a:noFill/>
                   </a:tcPr>
                 </a:tc>
                 <a:tc>
@@ -4436,64 +4273,20 @@
                     <a:bodyPr/>
                     <a:lstStyle/>
                     <a:p>
-                      <a:pPr algn="ctr" indent="0" marL="0">
-                        <a:buNone/>
-                      </a:pPr>
+                      <a:pPr algn="ctr"/>
                       <a:r>
-                        <a:rPr lang="en-US" sz="1200" dirty="0">
+                        <a:rPr sz="1000" b="0">
                           <a:solidFill>
                             <a:srgbClr val="1A1A1A"/>
                           </a:solidFill>
-                          <a:latin typeface="Times New Roman" pitchFamily="34" charset="0"/>
-                          <a:ea typeface="Times New Roman" pitchFamily="34" charset="-122"/>
-                          <a:cs typeface="Times New Roman" pitchFamily="34" charset="-120"/>
+                          <a:latin typeface="Times New Roman"/>
                         </a:rPr>
-                        <a:t xml:space="preserve">6,840</a:t>
+                        <a:t>6,840</a:t>
                       </a:r>
-                      <a:endParaRPr lang="en-US" sz="1200" dirty="0">
-                        <a:latin typeface="Times New Roman" charset="0"/>
-                        <a:ea typeface="Times New Roman" charset="0"/>
-                        <a:cs typeface="Times New Roman" charset="0"/>
-                      </a:endParaRPr>
                     </a:p>
                   </a:txBody>
-                  <a:tcPr marL="91440" marR="91440" marT="45720" marB="45720" anchor="ctr">
-                    <a:lnL w="6350" cap="flat" cmpd="sng" algn="ctr">
-                      <a:solidFill>
-                        <a:srgbClr val="BFBFBF"/>
-                      </a:solidFill>
-                      <a:prstDash val="solid"/>
-                      <a:round/>
-                      <a:headEnd type="none" w="med" len="med"/>
-                      <a:tailEnd type="none" w="med" len="med"/>
-                    </a:lnL>
-                    <a:lnR w="6350" cap="flat" cmpd="sng" algn="ctr">
-                      <a:solidFill>
-                        <a:srgbClr val="BFBFBF"/>
-                      </a:solidFill>
-                      <a:prstDash val="solid"/>
-                      <a:round/>
-                      <a:headEnd type="none" w="med" len="med"/>
-                      <a:tailEnd type="none" w="med" len="med"/>
-                    </a:lnR>
-                    <a:lnT w="6350" cap="flat" cmpd="sng" algn="ctr">
-                      <a:solidFill>
-                        <a:srgbClr val="BFBFBF"/>
-                      </a:solidFill>
-                      <a:prstDash val="solid"/>
-                      <a:round/>
-                      <a:headEnd type="none" w="med" len="med"/>
-                      <a:tailEnd type="none" w="med" len="med"/>
-                    </a:lnT>
-                    <a:lnB w="6350" cap="flat" cmpd="sng" algn="ctr">
-                      <a:solidFill>
-                        <a:srgbClr val="BFBFBF"/>
-                      </a:solidFill>
-                      <a:prstDash val="solid"/>
-                      <a:round/>
-                      <a:headEnd type="none" w="med" len="med"/>
-                      <a:tailEnd type="none" w="med" len="med"/>
-                    </a:lnB>
+                  <a:tcPr anchor="ctr" marL="45720" marR="45720" marT="45720" marB="45720">
+                    <a:noFill/>
                   </a:tcPr>
                 </a:tc>
                 <a:tc>
@@ -4501,64 +4294,20 @@
                     <a:bodyPr/>
                     <a:lstStyle/>
                     <a:p>
-                      <a:pPr algn="ctr" indent="0" marL="0">
-                        <a:buNone/>
-                      </a:pPr>
+                      <a:pPr algn="ctr"/>
                       <a:r>
-                        <a:rPr lang="en-US" sz="1200" dirty="0">
+                        <a:rPr sz="1000" b="1">
                           <a:solidFill>
                             <a:srgbClr val="1A1A1A"/>
                           </a:solidFill>
-                          <a:latin typeface="Times New Roman" pitchFamily="34" charset="0"/>
-                          <a:ea typeface="Times New Roman" pitchFamily="34" charset="-122"/>
-                          <a:cs typeface="Times New Roman" pitchFamily="34" charset="-120"/>
+                          <a:latin typeface="Times New Roman"/>
                         </a:rPr>
-                        <a:t xml:space="preserve">1,081</a:t>
+                        <a:t>0,155</a:t>
                       </a:r>
-                      <a:endParaRPr lang="en-US" sz="1200" dirty="0">
-                        <a:latin typeface="Times New Roman" charset="0"/>
-                        <a:ea typeface="Times New Roman" charset="0"/>
-                        <a:cs typeface="Times New Roman" charset="0"/>
-                      </a:endParaRPr>
                     </a:p>
                   </a:txBody>
-                  <a:tcPr marL="91440" marR="91440" marT="45720" marB="45720" anchor="ctr">
-                    <a:lnL w="6350" cap="flat" cmpd="sng" algn="ctr">
-                      <a:solidFill>
-                        <a:srgbClr val="BFBFBF"/>
-                      </a:solidFill>
-                      <a:prstDash val="solid"/>
-                      <a:round/>
-                      <a:headEnd type="none" w="med" len="med"/>
-                      <a:tailEnd type="none" w="med" len="med"/>
-                    </a:lnL>
-                    <a:lnR w="6350" cap="flat" cmpd="sng" algn="ctr">
-                      <a:solidFill>
-                        <a:srgbClr val="BFBFBF"/>
-                      </a:solidFill>
-                      <a:prstDash val="solid"/>
-                      <a:round/>
-                      <a:headEnd type="none" w="med" len="med"/>
-                      <a:tailEnd type="none" w="med" len="med"/>
-                    </a:lnR>
-                    <a:lnT w="6350" cap="flat" cmpd="sng" algn="ctr">
-                      <a:solidFill>
-                        <a:srgbClr val="BFBFBF"/>
-                      </a:solidFill>
-                      <a:prstDash val="solid"/>
-                      <a:round/>
-                      <a:headEnd type="none" w="med" len="med"/>
-                      <a:tailEnd type="none" w="med" len="med"/>
-                    </a:lnT>
-                    <a:lnB w="6350" cap="flat" cmpd="sng" algn="ctr">
-                      <a:solidFill>
-                        <a:srgbClr val="BFBFBF"/>
-                      </a:solidFill>
-                      <a:prstDash val="solid"/>
-                      <a:round/>
-                      <a:headEnd type="none" w="med" len="med"/>
-                      <a:tailEnd type="none" w="med" len="med"/>
-                    </a:lnB>
+                  <a:tcPr anchor="ctr" marL="45720" marR="45720" marT="45720" marB="45720">
+                    <a:noFill/>
                   </a:tcPr>
                 </a:tc>
                 <a:tc>
@@ -4566,64 +4315,20 @@
                     <a:bodyPr/>
                     <a:lstStyle/>
                     <a:p>
-                      <a:pPr algn="ctr" indent="0" marL="0">
-                        <a:buNone/>
-                      </a:pPr>
+                      <a:pPr algn="ctr"/>
                       <a:r>
-                        <a:rPr lang="en-US" sz="1200" b="1" dirty="0">
+                        <a:rPr sz="1000" b="0">
                           <a:solidFill>
                             <a:srgbClr val="1A1A1A"/>
                           </a:solidFill>
-                          <a:latin typeface="Times New Roman" pitchFamily="34" charset="0"/>
-                          <a:ea typeface="Times New Roman" pitchFamily="34" charset="-122"/>
-                          <a:cs typeface="Times New Roman" pitchFamily="34" charset="-120"/>
+                          <a:latin typeface="Times New Roman"/>
                         </a:rPr>
-                        <a:t>0,155</a:t>
+                        <a:t>1,081</a:t>
                       </a:r>
-                      <a:endParaRPr lang="en-US" sz="1200" dirty="0">
-                        <a:latin typeface="Times New Roman" charset="0"/>
-                        <a:ea typeface="Times New Roman" charset="0"/>
-                        <a:cs typeface="Times New Roman" charset="0"/>
-                      </a:endParaRPr>
                     </a:p>
                   </a:txBody>
-                  <a:tcPr marL="91440" marR="91440" marT="45720" marB="45720" anchor="ctr">
-                    <a:lnL w="6350" cap="flat" cmpd="sng" algn="ctr">
-                      <a:solidFill>
-                        <a:srgbClr val="BFBFBF"/>
-                      </a:solidFill>
-                      <a:prstDash val="solid"/>
-                      <a:round/>
-                      <a:headEnd type="none" w="med" len="med"/>
-                      <a:tailEnd type="none" w="med" len="med"/>
-                    </a:lnL>
-                    <a:lnR w="6350" cap="flat" cmpd="sng" algn="ctr">
-                      <a:solidFill>
-                        <a:srgbClr val="BFBFBF"/>
-                      </a:solidFill>
-                      <a:prstDash val="solid"/>
-                      <a:round/>
-                      <a:headEnd type="none" w="med" len="med"/>
-                      <a:tailEnd type="none" w="med" len="med"/>
-                    </a:lnR>
-                    <a:lnT w="6350" cap="flat" cmpd="sng" algn="ctr">
-                      <a:solidFill>
-                        <a:srgbClr val="BFBFBF"/>
-                      </a:solidFill>
-                      <a:prstDash val="solid"/>
-                      <a:round/>
-                      <a:headEnd type="none" w="med" len="med"/>
-                      <a:tailEnd type="none" w="med" len="med"/>
-                    </a:lnT>
-                    <a:lnB w="6350" cap="flat" cmpd="sng" algn="ctr">
-                      <a:solidFill>
-                        <a:srgbClr val="BFBFBF"/>
-                      </a:solidFill>
-                      <a:prstDash val="solid"/>
-                      <a:round/>
-                      <a:headEnd type="none" w="med" len="med"/>
-                      <a:tailEnd type="none" w="med" len="med"/>
-                    </a:lnB>
+                  <a:tcPr anchor="ctr" marL="45720" marR="45720" marT="45720" marB="45720">
+                    <a:noFill/>
                   </a:tcPr>
                 </a:tc>
                 <a:tc>
@@ -4631,64 +4336,20 @@
                     <a:bodyPr/>
                     <a:lstStyle/>
                     <a:p>
-                      <a:pPr algn="ctr" indent="0" marL="0">
-                        <a:buNone/>
-                      </a:pPr>
+                      <a:pPr algn="ctr"/>
                       <a:r>
-                        <a:rPr lang="en-US" sz="1200" dirty="0">
+                        <a:rPr sz="1000" b="0">
                           <a:solidFill>
                             <a:srgbClr val="1A1A1A"/>
                           </a:solidFill>
-                          <a:latin typeface="Times New Roman" pitchFamily="34" charset="0"/>
-                          <a:ea typeface="Times New Roman" pitchFamily="34" charset="-122"/>
-                          <a:cs typeface="Times New Roman" pitchFamily="34" charset="-120"/>
+                          <a:latin typeface="Times New Roman"/>
                         </a:rPr>
-                        <a:t xml:space="preserve">13,22</a:t>
+                        <a:t>0,0252</a:t>
                       </a:r>
-                      <a:endParaRPr lang="en-US" sz="1200" dirty="0">
-                        <a:latin typeface="Times New Roman" charset="0"/>
-                        <a:ea typeface="Times New Roman" charset="0"/>
-                        <a:cs typeface="Times New Roman" charset="0"/>
-                      </a:endParaRPr>
                     </a:p>
                   </a:txBody>
-                  <a:tcPr marL="91440" marR="91440" marT="45720" marB="45720" anchor="ctr">
-                    <a:lnL w="6350" cap="flat" cmpd="sng" algn="ctr">
-                      <a:solidFill>
-                        <a:srgbClr val="BFBFBF"/>
-                      </a:solidFill>
-                      <a:prstDash val="solid"/>
-                      <a:round/>
-                      <a:headEnd type="none" w="med" len="med"/>
-                      <a:tailEnd type="none" w="med" len="med"/>
-                    </a:lnL>
-                    <a:lnR w="6350" cap="flat" cmpd="sng" algn="ctr">
-                      <a:solidFill>
-                        <a:srgbClr val="BFBFBF"/>
-                      </a:solidFill>
-                      <a:prstDash val="solid"/>
-                      <a:round/>
-                      <a:headEnd type="none" w="med" len="med"/>
-                      <a:tailEnd type="none" w="med" len="med"/>
-                    </a:lnR>
-                    <a:lnT w="6350" cap="flat" cmpd="sng" algn="ctr">
-                      <a:solidFill>
-                        <a:srgbClr val="BFBFBF"/>
-                      </a:solidFill>
-                      <a:prstDash val="solid"/>
-                      <a:round/>
-                      <a:headEnd type="none" w="med" len="med"/>
-                      <a:tailEnd type="none" w="med" len="med"/>
-                    </a:lnT>
-                    <a:lnB w="6350" cap="flat" cmpd="sng" algn="ctr">
-                      <a:solidFill>
-                        <a:srgbClr val="BFBFBF"/>
-                      </a:solidFill>
-                      <a:prstDash val="solid"/>
-                      <a:round/>
-                      <a:headEnd type="none" w="med" len="med"/>
-                      <a:tailEnd type="none" w="med" len="med"/>
-                    </a:lnB>
+                  <a:tcPr anchor="ctr" marL="45720" marR="45720" marT="45720" marB="45720">
+                    <a:noFill/>
                   </a:tcPr>
                 </a:tc>
                 <a:tc>
@@ -4696,64 +4357,104 @@
                     <a:bodyPr/>
                     <a:lstStyle/>
                     <a:p>
-                      <a:pPr algn="ctr" indent="0" marL="0">
-                        <a:buNone/>
-                      </a:pPr>
+                      <a:pPr algn="ctr"/>
                       <a:r>
-                        <a:rPr lang="en-US" sz="1200" dirty="0">
+                        <a:rPr sz="1000" b="0">
                           <a:solidFill>
                             <a:srgbClr val="1A1A1A"/>
                           </a:solidFill>
-                          <a:latin typeface="Times New Roman" pitchFamily="34" charset="0"/>
-                          <a:ea typeface="Times New Roman" pitchFamily="34" charset="-122"/>
-                          <a:cs typeface="Times New Roman" pitchFamily="34" charset="-120"/>
+                          <a:latin typeface="Times New Roman"/>
                         </a:rPr>
-                        <a:t xml:space="preserve">0,706</a:t>
+                        <a:t>13,22</a:t>
                       </a:r>
-                      <a:endParaRPr lang="en-US" sz="1200" dirty="0">
-                        <a:latin typeface="Times New Roman" charset="0"/>
-                        <a:ea typeface="Times New Roman" charset="0"/>
-                        <a:cs typeface="Times New Roman" charset="0"/>
-                      </a:endParaRPr>
                     </a:p>
                   </a:txBody>
-                  <a:tcPr marL="91440" marR="91440" marT="45720" marB="45720" anchor="ctr">
-                    <a:lnL w="6350" cap="flat" cmpd="sng" algn="ctr">
-                      <a:solidFill>
-                        <a:srgbClr val="BFBFBF"/>
-                      </a:solidFill>
-                      <a:prstDash val="solid"/>
-                      <a:round/>
-                      <a:headEnd type="none" w="med" len="med"/>
-                      <a:tailEnd type="none" w="med" len="med"/>
-                    </a:lnL>
-                    <a:lnR w="6350" cap="flat" cmpd="sng" algn="ctr">
-                      <a:solidFill>
-                        <a:srgbClr val="BFBFBF"/>
-                      </a:solidFill>
-                      <a:prstDash val="solid"/>
-                      <a:round/>
-                      <a:headEnd type="none" w="med" len="med"/>
-                      <a:tailEnd type="none" w="med" len="med"/>
-                    </a:lnR>
-                    <a:lnT w="6350" cap="flat" cmpd="sng" algn="ctr">
-                      <a:solidFill>
-                        <a:srgbClr val="BFBFBF"/>
-                      </a:solidFill>
-                      <a:prstDash val="solid"/>
-                      <a:round/>
-                      <a:headEnd type="none" w="med" len="med"/>
-                      <a:tailEnd type="none" w="med" len="med"/>
-                    </a:lnT>
-                    <a:lnB w="6350" cap="flat" cmpd="sng" algn="ctr">
-                      <a:solidFill>
-                        <a:srgbClr val="BFBFBF"/>
-                      </a:solidFill>
-                      <a:prstDash val="solid"/>
-                      <a:round/>
-                      <a:headEnd type="none" w="med" len="med"/>
-                      <a:tailEnd type="none" w="med" len="med"/>
-                    </a:lnB>
+                  <a:tcPr anchor="ctr" marL="45720" marR="45720" marT="45720" marB="45720">
+                    <a:noFill/>
+                  </a:tcPr>
+                </a:tc>
+                <a:tc>
+                  <a:txBody>
+                    <a:bodyPr/>
+                    <a:lstStyle/>
+                    <a:p>
+                      <a:pPr algn="ctr"/>
+                      <a:r>
+                        <a:rPr sz="1000" b="1">
+                          <a:solidFill>
+                            <a:srgbClr val="1A1A1A"/>
+                          </a:solidFill>
+                          <a:latin typeface="Times New Roman"/>
+                        </a:rPr>
+                        <a:t>1,924</a:t>
+                      </a:r>
+                    </a:p>
+                  </a:txBody>
+                  <a:tcPr anchor="ctr" marL="45720" marR="45720" marT="45720" marB="45720">
+                    <a:noFill/>
+                  </a:tcPr>
+                </a:tc>
+                <a:tc>
+                  <a:txBody>
+                    <a:bodyPr/>
+                    <a:lstStyle/>
+                    <a:p>
+                      <a:pPr algn="ctr"/>
+                      <a:r>
+                        <a:rPr sz="1000" b="1">
+                          <a:solidFill>
+                            <a:srgbClr val="1A1A1A"/>
+                          </a:solidFill>
+                          <a:latin typeface="Times New Roman"/>
+                        </a:rPr>
+                        <a:t>0,918</a:t>
+                      </a:r>
+                    </a:p>
+                  </a:txBody>
+                  <a:tcPr anchor="ctr" marL="45720" marR="45720" marT="45720" marB="45720">
+                    <a:noFill/>
+                  </a:tcPr>
+                </a:tc>
+                <a:tc>
+                  <a:txBody>
+                    <a:bodyPr/>
+                    <a:lstStyle/>
+                    <a:p>
+                      <a:pPr algn="ctr"/>
+                      <a:r>
+                        <a:rPr sz="1000" b="0">
+                          <a:solidFill>
+                            <a:srgbClr val="1A1A1A"/>
+                          </a:solidFill>
+                          <a:latin typeface="Times New Roman"/>
+                        </a:rPr>
+                        <a:t>0,706</a:t>
+                      </a:r>
+                    </a:p>
+                  </a:txBody>
+                  <a:tcPr anchor="ctr" marL="45720" marR="45720" marT="45720" marB="45720">
+                    <a:noFill/>
+                  </a:tcPr>
+                </a:tc>
+                <a:tc>
+                  <a:txBody>
+                    <a:bodyPr/>
+                    <a:lstStyle/>
+                    <a:p>
+                      <a:pPr algn="ctr"/>
+                      <a:r>
+                        <a:rPr sz="1000" b="0">
+                          <a:solidFill>
+                            <a:srgbClr val="1A1A1A"/>
+                          </a:solidFill>
+                          <a:latin typeface="Times New Roman"/>
+                        </a:rPr>
+                        <a:t>14,94</a:t>
+                      </a:r>
+                    </a:p>
+                  </a:txBody>
+                  <a:tcPr anchor="ctr" marL="45720" marR="45720" marT="45720" marB="45720">
+                    <a:noFill/>
                   </a:tcPr>
                 </a:tc>
               </a:tr>
@@ -4763,64 +4464,20 @@
                     <a:bodyPr/>
                     <a:lstStyle/>
                     <a:p>
-                      <a:pPr algn="l" indent="0" marL="0">
-                        <a:buNone/>
-                      </a:pPr>
+                      <a:pPr algn="l"/>
                       <a:r>
-                        <a:rPr lang="en-US" sz="1200" dirty="0">
+                        <a:rPr sz="1000" b="0">
                           <a:solidFill>
                             <a:srgbClr val="1A1A1A"/>
                           </a:solidFill>
-                          <a:latin typeface="Times New Roman" pitchFamily="34" charset="0"/>
-                          <a:ea typeface="Times New Roman" pitchFamily="34" charset="-122"/>
-                          <a:cs typeface="Times New Roman" pitchFamily="34" charset="-120"/>
+                          <a:latin typeface="Times New Roman"/>
                         </a:rPr>
                         <a:t>Ratio Pyramid (RP)</a:t>
                       </a:r>
-                      <a:endParaRPr lang="en-US" sz="1200" dirty="0">
-                        <a:latin typeface="Times New Roman" charset="0"/>
-                        <a:ea typeface="Times New Roman" charset="0"/>
-                        <a:cs typeface="Times New Roman" charset="0"/>
-                      </a:endParaRPr>
                     </a:p>
                   </a:txBody>
-                  <a:tcPr marL="91440" marR="91440" marT="45720" marB="45720" anchor="ctr">
-                    <a:lnL w="6350" cap="flat" cmpd="sng" algn="ctr">
-                      <a:solidFill>
-                        <a:srgbClr val="BFBFBF"/>
-                      </a:solidFill>
-                      <a:prstDash val="solid"/>
-                      <a:round/>
-                      <a:headEnd type="none" w="med" len="med"/>
-                      <a:tailEnd type="none" w="med" len="med"/>
-                    </a:lnL>
-                    <a:lnR w="6350" cap="flat" cmpd="sng" algn="ctr">
-                      <a:solidFill>
-                        <a:srgbClr val="BFBFBF"/>
-                      </a:solidFill>
-                      <a:prstDash val="solid"/>
-                      <a:round/>
-                      <a:headEnd type="none" w="med" len="med"/>
-                      <a:tailEnd type="none" w="med" len="med"/>
-                    </a:lnR>
-                    <a:lnT w="6350" cap="flat" cmpd="sng" algn="ctr">
-                      <a:solidFill>
-                        <a:srgbClr val="BFBFBF"/>
-                      </a:solidFill>
-                      <a:prstDash val="solid"/>
-                      <a:round/>
-                      <a:headEnd type="none" w="med" len="med"/>
-                      <a:tailEnd type="none" w="med" len="med"/>
-                    </a:lnT>
-                    <a:lnB w="6350" cap="flat" cmpd="sng" algn="ctr">
-                      <a:solidFill>
-                        <a:srgbClr val="BFBFBF"/>
-                      </a:solidFill>
-                      <a:prstDash val="solid"/>
-                      <a:round/>
-                      <a:headEnd type="none" w="med" len="med"/>
-                      <a:tailEnd type="none" w="med" len="med"/>
-                    </a:lnB>
+                  <a:tcPr anchor="ctr" marL="45720" marR="45720" marT="45720" marB="45720">
+                    <a:noFill/>
                   </a:tcPr>
                 </a:tc>
                 <a:tc>
@@ -4828,64 +4485,20 @@
                     <a:bodyPr/>
                     <a:lstStyle/>
                     <a:p>
-                      <a:pPr algn="ctr" indent="0" marL="0">
-                        <a:buNone/>
-                      </a:pPr>
+                      <a:pPr algn="ctr"/>
                       <a:r>
-                        <a:rPr lang="en-US" sz="1200" dirty="0">
+                        <a:rPr sz="1000" b="0">
                           <a:solidFill>
                             <a:srgbClr val="1A1A1A"/>
                           </a:solidFill>
-                          <a:latin typeface="Times New Roman" pitchFamily="34" charset="0"/>
-                          <a:ea typeface="Times New Roman" pitchFamily="34" charset="-122"/>
-                          <a:cs typeface="Times New Roman" pitchFamily="34" charset="-120"/>
+                          <a:latin typeface="Times New Roman"/>
                         </a:rPr>
-                        <a:t xml:space="preserve">6,810</a:t>
+                        <a:t>6,810</a:t>
                       </a:r>
-                      <a:endParaRPr lang="en-US" sz="1200" dirty="0">
-                        <a:latin typeface="Times New Roman" charset="0"/>
-                        <a:ea typeface="Times New Roman" charset="0"/>
-                        <a:cs typeface="Times New Roman" charset="0"/>
-                      </a:endParaRPr>
                     </a:p>
                   </a:txBody>
-                  <a:tcPr marL="91440" marR="91440" marT="45720" marB="45720" anchor="ctr">
-                    <a:lnL w="6350" cap="flat" cmpd="sng" algn="ctr">
-                      <a:solidFill>
-                        <a:srgbClr val="BFBFBF"/>
-                      </a:solidFill>
-                      <a:prstDash val="solid"/>
-                      <a:round/>
-                      <a:headEnd type="none" w="med" len="med"/>
-                      <a:tailEnd type="none" w="med" len="med"/>
-                    </a:lnL>
-                    <a:lnR w="6350" cap="flat" cmpd="sng" algn="ctr">
-                      <a:solidFill>
-                        <a:srgbClr val="BFBFBF"/>
-                      </a:solidFill>
-                      <a:prstDash val="solid"/>
-                      <a:round/>
-                      <a:headEnd type="none" w="med" len="med"/>
-                      <a:tailEnd type="none" w="med" len="med"/>
-                    </a:lnR>
-                    <a:lnT w="6350" cap="flat" cmpd="sng" algn="ctr">
-                      <a:solidFill>
-                        <a:srgbClr val="BFBFBF"/>
-                      </a:solidFill>
-                      <a:prstDash val="solid"/>
-                      <a:round/>
-                      <a:headEnd type="none" w="med" len="med"/>
-                      <a:tailEnd type="none" w="med" len="med"/>
-                    </a:lnT>
-                    <a:lnB w="6350" cap="flat" cmpd="sng" algn="ctr">
-                      <a:solidFill>
-                        <a:srgbClr val="BFBFBF"/>
-                      </a:solidFill>
-                      <a:prstDash val="solid"/>
-                      <a:round/>
-                      <a:headEnd type="none" w="med" len="med"/>
-                      <a:tailEnd type="none" w="med" len="med"/>
-                    </a:lnB>
+                  <a:tcPr anchor="ctr" marL="45720" marR="45720" marT="45720" marB="45720">
+                    <a:noFill/>
                   </a:tcPr>
                 </a:tc>
                 <a:tc>
@@ -4893,64 +4506,20 @@
                     <a:bodyPr/>
                     <a:lstStyle/>
                     <a:p>
-                      <a:pPr algn="ctr" indent="0" marL="0">
-                        <a:buNone/>
-                      </a:pPr>
+                      <a:pPr algn="ctr"/>
                       <a:r>
-                        <a:rPr lang="en-US" sz="1200" dirty="0">
+                        <a:rPr sz="1000" b="0">
                           <a:solidFill>
                             <a:srgbClr val="1A1A1A"/>
                           </a:solidFill>
-                          <a:latin typeface="Times New Roman" pitchFamily="34" charset="0"/>
-                          <a:ea typeface="Times New Roman" pitchFamily="34" charset="-122"/>
-                          <a:cs typeface="Times New Roman" pitchFamily="34" charset="-120"/>
+                          <a:latin typeface="Times New Roman"/>
                         </a:rPr>
-                        <a:t xml:space="preserve">1,077</a:t>
+                        <a:t>0,127</a:t>
                       </a:r>
-                      <a:endParaRPr lang="en-US" sz="1200" dirty="0">
-                        <a:latin typeface="Times New Roman" charset="0"/>
-                        <a:ea typeface="Times New Roman" charset="0"/>
-                        <a:cs typeface="Times New Roman" charset="0"/>
-                      </a:endParaRPr>
                     </a:p>
                   </a:txBody>
-                  <a:tcPr marL="91440" marR="91440" marT="45720" marB="45720" anchor="ctr">
-                    <a:lnL w="6350" cap="flat" cmpd="sng" algn="ctr">
-                      <a:solidFill>
-                        <a:srgbClr val="BFBFBF"/>
-                      </a:solidFill>
-                      <a:prstDash val="solid"/>
-                      <a:round/>
-                      <a:headEnd type="none" w="med" len="med"/>
-                      <a:tailEnd type="none" w="med" len="med"/>
-                    </a:lnL>
-                    <a:lnR w="6350" cap="flat" cmpd="sng" algn="ctr">
-                      <a:solidFill>
-                        <a:srgbClr val="BFBFBF"/>
-                      </a:solidFill>
-                      <a:prstDash val="solid"/>
-                      <a:round/>
-                      <a:headEnd type="none" w="med" len="med"/>
-                      <a:tailEnd type="none" w="med" len="med"/>
-                    </a:lnR>
-                    <a:lnT w="6350" cap="flat" cmpd="sng" algn="ctr">
-                      <a:solidFill>
-                        <a:srgbClr val="BFBFBF"/>
-                      </a:solidFill>
-                      <a:prstDash val="solid"/>
-                      <a:round/>
-                      <a:headEnd type="none" w="med" len="med"/>
-                      <a:tailEnd type="none" w="med" len="med"/>
-                    </a:lnT>
-                    <a:lnB w="6350" cap="flat" cmpd="sng" algn="ctr">
-                      <a:solidFill>
-                        <a:srgbClr val="BFBFBF"/>
-                      </a:solidFill>
-                      <a:prstDash val="solid"/>
-                      <a:round/>
-                      <a:headEnd type="none" w="med" len="med"/>
-                      <a:tailEnd type="none" w="med" len="med"/>
-                    </a:lnB>
+                  <a:tcPr anchor="ctr" marL="45720" marR="45720" marT="45720" marB="45720">
+                    <a:noFill/>
                   </a:tcPr>
                 </a:tc>
                 <a:tc>
@@ -4958,64 +4527,20 @@
                     <a:bodyPr/>
                     <a:lstStyle/>
                     <a:p>
-                      <a:pPr algn="ctr" indent="0" marL="0">
-                        <a:buNone/>
-                      </a:pPr>
+                      <a:pPr algn="ctr"/>
                       <a:r>
-                        <a:rPr lang="en-US" sz="1200" dirty="0">
+                        <a:rPr sz="1000" b="0">
                           <a:solidFill>
                             <a:srgbClr val="1A1A1A"/>
                           </a:solidFill>
-                          <a:latin typeface="Times New Roman" pitchFamily="34" charset="0"/>
-                          <a:ea typeface="Times New Roman" pitchFamily="34" charset="-122"/>
-                          <a:cs typeface="Times New Roman" pitchFamily="34" charset="-120"/>
+                          <a:latin typeface="Times New Roman"/>
                         </a:rPr>
-                        <a:t xml:space="preserve">0,127</a:t>
+                        <a:t>1,077</a:t>
                       </a:r>
-                      <a:endParaRPr lang="en-US" sz="1200" dirty="0">
-                        <a:latin typeface="Times New Roman" charset="0"/>
-                        <a:ea typeface="Times New Roman" charset="0"/>
-                        <a:cs typeface="Times New Roman" charset="0"/>
-                      </a:endParaRPr>
                     </a:p>
                   </a:txBody>
-                  <a:tcPr marL="91440" marR="91440" marT="45720" marB="45720" anchor="ctr">
-                    <a:lnL w="6350" cap="flat" cmpd="sng" algn="ctr">
-                      <a:solidFill>
-                        <a:srgbClr val="BFBFBF"/>
-                      </a:solidFill>
-                      <a:prstDash val="solid"/>
-                      <a:round/>
-                      <a:headEnd type="none" w="med" len="med"/>
-                      <a:tailEnd type="none" w="med" len="med"/>
-                    </a:lnL>
-                    <a:lnR w="6350" cap="flat" cmpd="sng" algn="ctr">
-                      <a:solidFill>
-                        <a:srgbClr val="BFBFBF"/>
-                      </a:solidFill>
-                      <a:prstDash val="solid"/>
-                      <a:round/>
-                      <a:headEnd type="none" w="med" len="med"/>
-                      <a:tailEnd type="none" w="med" len="med"/>
-                    </a:lnR>
-                    <a:lnT w="6350" cap="flat" cmpd="sng" algn="ctr">
-                      <a:solidFill>
-                        <a:srgbClr val="BFBFBF"/>
-                      </a:solidFill>
-                      <a:prstDash val="solid"/>
-                      <a:round/>
-                      <a:headEnd type="none" w="med" len="med"/>
-                      <a:tailEnd type="none" w="med" len="med"/>
-                    </a:lnT>
-                    <a:lnB w="6350" cap="flat" cmpd="sng" algn="ctr">
-                      <a:solidFill>
-                        <a:srgbClr val="BFBFBF"/>
-                      </a:solidFill>
-                      <a:prstDash val="solid"/>
-                      <a:round/>
-                      <a:headEnd type="none" w="med" len="med"/>
-                      <a:tailEnd type="none" w="med" len="med"/>
-                    </a:lnB>
+                  <a:tcPr anchor="ctr" marL="45720" marR="45720" marT="45720" marB="45720">
+                    <a:noFill/>
                   </a:tcPr>
                 </a:tc>
                 <a:tc>
@@ -5023,64 +4548,20 @@
                     <a:bodyPr/>
                     <a:lstStyle/>
                     <a:p>
-                      <a:pPr algn="ctr" indent="0" marL="0">
-                        <a:buNone/>
-                      </a:pPr>
+                      <a:pPr algn="ctr"/>
                       <a:r>
-                        <a:rPr lang="en-US" sz="1200" dirty="0">
+                        <a:rPr sz="1000" b="0">
                           <a:solidFill>
                             <a:srgbClr val="1A1A1A"/>
                           </a:solidFill>
-                          <a:latin typeface="Times New Roman" pitchFamily="34" charset="0"/>
-                          <a:ea typeface="Times New Roman" pitchFamily="34" charset="-122"/>
-                          <a:cs typeface="Times New Roman" pitchFamily="34" charset="-120"/>
+                          <a:latin typeface="Times New Roman"/>
                         </a:rPr>
-                        <a:t xml:space="preserve">13,62</a:t>
+                        <a:t>0,0275</a:t>
                       </a:r>
-                      <a:endParaRPr lang="en-US" sz="1200" dirty="0">
-                        <a:latin typeface="Times New Roman" charset="0"/>
-                        <a:ea typeface="Times New Roman" charset="0"/>
-                        <a:cs typeface="Times New Roman" charset="0"/>
-                      </a:endParaRPr>
                     </a:p>
                   </a:txBody>
-                  <a:tcPr marL="91440" marR="91440" marT="45720" marB="45720" anchor="ctr">
-                    <a:lnL w="6350" cap="flat" cmpd="sng" algn="ctr">
-                      <a:solidFill>
-                        <a:srgbClr val="BFBFBF"/>
-                      </a:solidFill>
-                      <a:prstDash val="solid"/>
-                      <a:round/>
-                      <a:headEnd type="none" w="med" len="med"/>
-                      <a:tailEnd type="none" w="med" len="med"/>
-                    </a:lnL>
-                    <a:lnR w="6350" cap="flat" cmpd="sng" algn="ctr">
-                      <a:solidFill>
-                        <a:srgbClr val="BFBFBF"/>
-                      </a:solidFill>
-                      <a:prstDash val="solid"/>
-                      <a:round/>
-                      <a:headEnd type="none" w="med" len="med"/>
-                      <a:tailEnd type="none" w="med" len="med"/>
-                    </a:lnR>
-                    <a:lnT w="6350" cap="flat" cmpd="sng" algn="ctr">
-                      <a:solidFill>
-                        <a:srgbClr val="BFBFBF"/>
-                      </a:solidFill>
-                      <a:prstDash val="solid"/>
-                      <a:round/>
-                      <a:headEnd type="none" w="med" len="med"/>
-                      <a:tailEnd type="none" w="med" len="med"/>
-                    </a:lnT>
-                    <a:lnB w="6350" cap="flat" cmpd="sng" algn="ctr">
-                      <a:solidFill>
-                        <a:srgbClr val="BFBFBF"/>
-                      </a:solidFill>
-                      <a:prstDash val="solid"/>
-                      <a:round/>
-                      <a:headEnd type="none" w="med" len="med"/>
-                      <a:tailEnd type="none" w="med" len="med"/>
-                    </a:lnB>
+                  <a:tcPr anchor="ctr" marL="45720" marR="45720" marT="45720" marB="45720">
+                    <a:noFill/>
                   </a:tcPr>
                 </a:tc>
                 <a:tc>
@@ -5088,64 +4569,104 @@
                     <a:bodyPr/>
                     <a:lstStyle/>
                     <a:p>
-                      <a:pPr algn="ctr" indent="0" marL="0">
-                        <a:buNone/>
-                      </a:pPr>
+                      <a:pPr algn="ctr"/>
                       <a:r>
-                        <a:rPr lang="en-US" sz="1200" dirty="0">
+                        <a:rPr sz="1000" b="0">
                           <a:solidFill>
                             <a:srgbClr val="1A1A1A"/>
                           </a:solidFill>
-                          <a:latin typeface="Times New Roman" pitchFamily="34" charset="0"/>
-                          <a:ea typeface="Times New Roman" pitchFamily="34" charset="-122"/>
-                          <a:cs typeface="Times New Roman" pitchFamily="34" charset="-120"/>
+                          <a:latin typeface="Times New Roman"/>
                         </a:rPr>
-                        <a:t xml:space="preserve">0,705</a:t>
+                        <a:t>13,62</a:t>
                       </a:r>
-                      <a:endParaRPr lang="en-US" sz="1200" dirty="0">
-                        <a:latin typeface="Times New Roman" charset="0"/>
-                        <a:ea typeface="Times New Roman" charset="0"/>
-                        <a:cs typeface="Times New Roman" charset="0"/>
-                      </a:endParaRPr>
                     </a:p>
                   </a:txBody>
-                  <a:tcPr marL="91440" marR="91440" marT="45720" marB="45720" anchor="ctr">
-                    <a:lnL w="6350" cap="flat" cmpd="sng" algn="ctr">
-                      <a:solidFill>
-                        <a:srgbClr val="BFBFBF"/>
-                      </a:solidFill>
-                      <a:prstDash val="solid"/>
-                      <a:round/>
-                      <a:headEnd type="none" w="med" len="med"/>
-                      <a:tailEnd type="none" w="med" len="med"/>
-                    </a:lnL>
-                    <a:lnR w="6350" cap="flat" cmpd="sng" algn="ctr">
-                      <a:solidFill>
-                        <a:srgbClr val="BFBFBF"/>
-                      </a:solidFill>
-                      <a:prstDash val="solid"/>
-                      <a:round/>
-                      <a:headEnd type="none" w="med" len="med"/>
-                      <a:tailEnd type="none" w="med" len="med"/>
-                    </a:lnR>
-                    <a:lnT w="6350" cap="flat" cmpd="sng" algn="ctr">
-                      <a:solidFill>
-                        <a:srgbClr val="BFBFBF"/>
-                      </a:solidFill>
-                      <a:prstDash val="solid"/>
-                      <a:round/>
-                      <a:headEnd type="none" w="med" len="med"/>
-                      <a:tailEnd type="none" w="med" len="med"/>
-                    </a:lnT>
-                    <a:lnB w="6350" cap="flat" cmpd="sng" algn="ctr">
-                      <a:solidFill>
-                        <a:srgbClr val="BFBFBF"/>
-                      </a:solidFill>
-                      <a:prstDash val="solid"/>
-                      <a:round/>
-                      <a:headEnd type="none" w="med" len="med"/>
-                      <a:tailEnd type="none" w="med" len="med"/>
-                    </a:lnB>
+                  <a:tcPr anchor="ctr" marL="45720" marR="45720" marT="45720" marB="45720">
+                    <a:noFill/>
+                  </a:tcPr>
+                </a:tc>
+                <a:tc>
+                  <a:txBody>
+                    <a:bodyPr/>
+                    <a:lstStyle/>
+                    <a:p>
+                      <a:pPr algn="ctr"/>
+                      <a:r>
+                        <a:rPr sz="1000" b="0">
+                          <a:solidFill>
+                            <a:srgbClr val="1A1A1A"/>
+                          </a:solidFill>
+                          <a:latin typeface="Times New Roman"/>
+                        </a:rPr>
+                        <a:t>0,949</a:t>
+                      </a:r>
+                    </a:p>
+                  </a:txBody>
+                  <a:tcPr anchor="ctr" marL="45720" marR="45720" marT="45720" marB="45720">
+                    <a:noFill/>
+                  </a:tcPr>
+                </a:tc>
+                <a:tc>
+                  <a:txBody>
+                    <a:bodyPr/>
+                    <a:lstStyle/>
+                    <a:p>
+                      <a:pPr algn="ctr"/>
+                      <a:r>
+                        <a:rPr sz="1000" b="0">
+                          <a:solidFill>
+                            <a:srgbClr val="1A1A1A"/>
+                          </a:solidFill>
+                          <a:latin typeface="Times New Roman"/>
+                        </a:rPr>
+                        <a:t>0,650</a:t>
+                      </a:r>
+                    </a:p>
+                  </a:txBody>
+                  <a:tcPr anchor="ctr" marL="45720" marR="45720" marT="45720" marB="45720">
+                    <a:noFill/>
+                  </a:tcPr>
+                </a:tc>
+                <a:tc>
+                  <a:txBody>
+                    <a:bodyPr/>
+                    <a:lstStyle/>
+                    <a:p>
+                      <a:pPr algn="ctr"/>
+                      <a:r>
+                        <a:rPr sz="1000" b="0">
+                          <a:solidFill>
+                            <a:srgbClr val="1A1A1A"/>
+                          </a:solidFill>
+                          <a:latin typeface="Times New Roman"/>
+                        </a:rPr>
+                        <a:t>0,705</a:t>
+                      </a:r>
+                    </a:p>
+                  </a:txBody>
+                  <a:tcPr anchor="ctr" marL="45720" marR="45720" marT="45720" marB="45720">
+                    <a:noFill/>
+                  </a:tcPr>
+                </a:tc>
+                <a:tc>
+                  <a:txBody>
+                    <a:bodyPr/>
+                    <a:lstStyle/>
+                    <a:p>
+                      <a:pPr algn="ctr"/>
+                      <a:r>
+                        <a:rPr sz="1000" b="0">
+                          <a:solidFill>
+                            <a:srgbClr val="1A1A1A"/>
+                          </a:solidFill>
+                          <a:latin typeface="Times New Roman"/>
+                        </a:rPr>
+                        <a:t>17,37</a:t>
+                      </a:r>
+                    </a:p>
+                  </a:txBody>
+                  <a:tcPr anchor="ctr" marL="45720" marR="45720" marT="45720" marB="45720">
+                    <a:noFill/>
                   </a:tcPr>
                 </a:tc>
               </a:tr>
@@ -5155,64 +4676,20 @@
                     <a:bodyPr/>
                     <a:lstStyle/>
                     <a:p>
-                      <a:pPr algn="l" indent="0" marL="0">
-                        <a:buNone/>
-                      </a:pPr>
+                      <a:pPr algn="l"/>
                       <a:r>
-                        <a:rPr lang="en-US" sz="1200" dirty="0">
+                        <a:rPr sz="1000" b="0">
                           <a:solidFill>
                             <a:srgbClr val="1A1A1A"/>
                           </a:solidFill>
-                          <a:latin typeface="Times New Roman" pitchFamily="34" charset="0"/>
-                          <a:ea typeface="Times New Roman" pitchFamily="34" charset="-122"/>
-                          <a:cs typeface="Times New Roman" pitchFamily="34" charset="-120"/>
+                          <a:latin typeface="Times New Roman"/>
                         </a:rPr>
                         <a:t>Wavelet discreta (DWT)</a:t>
                       </a:r>
-                      <a:endParaRPr lang="en-US" sz="1200" dirty="0">
-                        <a:latin typeface="Times New Roman" charset="0"/>
-                        <a:ea typeface="Times New Roman" charset="0"/>
-                        <a:cs typeface="Times New Roman" charset="0"/>
-                      </a:endParaRPr>
                     </a:p>
                   </a:txBody>
-                  <a:tcPr marL="91440" marR="91440" marT="45720" marB="45720" anchor="ctr">
-                    <a:lnL w="6350" cap="flat" cmpd="sng" algn="ctr">
-                      <a:solidFill>
-                        <a:srgbClr val="BFBFBF"/>
-                      </a:solidFill>
-                      <a:prstDash val="solid"/>
-                      <a:round/>
-                      <a:headEnd type="none" w="med" len="med"/>
-                      <a:tailEnd type="none" w="med" len="med"/>
-                    </a:lnL>
-                    <a:lnR w="6350" cap="flat" cmpd="sng" algn="ctr">
-                      <a:solidFill>
-                        <a:srgbClr val="BFBFBF"/>
-                      </a:solidFill>
-                      <a:prstDash val="solid"/>
-                      <a:round/>
-                      <a:headEnd type="none" w="med" len="med"/>
-                      <a:tailEnd type="none" w="med" len="med"/>
-                    </a:lnR>
-                    <a:lnT w="6350" cap="flat" cmpd="sng" algn="ctr">
-                      <a:solidFill>
-                        <a:srgbClr val="BFBFBF"/>
-                      </a:solidFill>
-                      <a:prstDash val="solid"/>
-                      <a:round/>
-                      <a:headEnd type="none" w="med" len="med"/>
-                      <a:tailEnd type="none" w="med" len="med"/>
-                    </a:lnT>
-                    <a:lnB w="6350" cap="flat" cmpd="sng" algn="ctr">
-                      <a:solidFill>
-                        <a:srgbClr val="BFBFBF"/>
-                      </a:solidFill>
-                      <a:prstDash val="solid"/>
-                      <a:round/>
-                      <a:headEnd type="none" w="med" len="med"/>
-                      <a:tailEnd type="none" w="med" len="med"/>
-                    </a:lnB>
+                  <a:tcPr anchor="ctr" marL="45720" marR="45720" marT="45720" marB="45720">
+                    <a:noFill/>
                   </a:tcPr>
                 </a:tc>
                 <a:tc>
@@ -5220,64 +4697,20 @@
                     <a:bodyPr/>
                     <a:lstStyle/>
                     <a:p>
-                      <a:pPr algn="ctr" indent="0" marL="0">
-                        <a:buNone/>
-                      </a:pPr>
+                      <a:pPr algn="ctr"/>
                       <a:r>
-                        <a:rPr lang="en-US" sz="1200" dirty="0">
+                        <a:rPr sz="1000" b="0">
                           <a:solidFill>
                             <a:srgbClr val="1A1A1A"/>
                           </a:solidFill>
-                          <a:latin typeface="Times New Roman" pitchFamily="34" charset="0"/>
-                          <a:ea typeface="Times New Roman" pitchFamily="34" charset="-122"/>
-                          <a:cs typeface="Times New Roman" pitchFamily="34" charset="-120"/>
+                          <a:latin typeface="Times New Roman"/>
                         </a:rPr>
-                        <a:t xml:space="preserve">6,682</a:t>
+                        <a:t>6,682</a:t>
                       </a:r>
-                      <a:endParaRPr lang="en-US" sz="1200" dirty="0">
-                        <a:latin typeface="Times New Roman" charset="0"/>
-                        <a:ea typeface="Times New Roman" charset="0"/>
-                        <a:cs typeface="Times New Roman" charset="0"/>
-                      </a:endParaRPr>
                     </a:p>
                   </a:txBody>
-                  <a:tcPr marL="91440" marR="91440" marT="45720" marB="45720" anchor="ctr">
-                    <a:lnL w="6350" cap="flat" cmpd="sng" algn="ctr">
-                      <a:solidFill>
-                        <a:srgbClr val="BFBFBF"/>
-                      </a:solidFill>
-                      <a:prstDash val="solid"/>
-                      <a:round/>
-                      <a:headEnd type="none" w="med" len="med"/>
-                      <a:tailEnd type="none" w="med" len="med"/>
-                    </a:lnL>
-                    <a:lnR w="6350" cap="flat" cmpd="sng" algn="ctr">
-                      <a:solidFill>
-                        <a:srgbClr val="BFBFBF"/>
-                      </a:solidFill>
-                      <a:prstDash val="solid"/>
-                      <a:round/>
-                      <a:headEnd type="none" w="med" len="med"/>
-                      <a:tailEnd type="none" w="med" len="med"/>
-                    </a:lnR>
-                    <a:lnT w="6350" cap="flat" cmpd="sng" algn="ctr">
-                      <a:solidFill>
-                        <a:srgbClr val="BFBFBF"/>
-                      </a:solidFill>
-                      <a:prstDash val="solid"/>
-                      <a:round/>
-                      <a:headEnd type="none" w="med" len="med"/>
-                      <a:tailEnd type="none" w="med" len="med"/>
-                    </a:lnT>
-                    <a:lnB w="6350" cap="flat" cmpd="sng" algn="ctr">
-                      <a:solidFill>
-                        <a:srgbClr val="BFBFBF"/>
-                      </a:solidFill>
-                      <a:prstDash val="solid"/>
-                      <a:round/>
-                      <a:headEnd type="none" w="med" len="med"/>
-                      <a:tailEnd type="none" w="med" len="med"/>
-                    </a:lnB>
+                  <a:tcPr anchor="ctr" marL="45720" marR="45720" marT="45720" marB="45720">
+                    <a:noFill/>
                   </a:tcPr>
                 </a:tc>
                 <a:tc>
@@ -5285,64 +4718,20 @@
                     <a:bodyPr/>
                     <a:lstStyle/>
                     <a:p>
-                      <a:pPr algn="ctr" indent="0" marL="0">
-                        <a:buNone/>
-                      </a:pPr>
+                      <a:pPr algn="ctr"/>
                       <a:r>
-                        <a:rPr lang="en-US" sz="1200" dirty="0">
+                        <a:rPr sz="1000" b="0">
                           <a:solidFill>
                             <a:srgbClr val="1A1A1A"/>
                           </a:solidFill>
-                          <a:latin typeface="Times New Roman" pitchFamily="34" charset="0"/>
-                          <a:ea typeface="Times New Roman" pitchFamily="34" charset="-122"/>
-                          <a:cs typeface="Times New Roman" pitchFamily="34" charset="-120"/>
+                          <a:latin typeface="Times New Roman"/>
                         </a:rPr>
-                        <a:t xml:space="preserve">1,057</a:t>
+                        <a:t>0,117</a:t>
                       </a:r>
-                      <a:endParaRPr lang="en-US" sz="1200" dirty="0">
-                        <a:latin typeface="Times New Roman" charset="0"/>
-                        <a:ea typeface="Times New Roman" charset="0"/>
-                        <a:cs typeface="Times New Roman" charset="0"/>
-                      </a:endParaRPr>
                     </a:p>
                   </a:txBody>
-                  <a:tcPr marL="91440" marR="91440" marT="45720" marB="45720" anchor="ctr">
-                    <a:lnL w="6350" cap="flat" cmpd="sng" algn="ctr">
-                      <a:solidFill>
-                        <a:srgbClr val="BFBFBF"/>
-                      </a:solidFill>
-                      <a:prstDash val="solid"/>
-                      <a:round/>
-                      <a:headEnd type="none" w="med" len="med"/>
-                      <a:tailEnd type="none" w="med" len="med"/>
-                    </a:lnL>
-                    <a:lnR w="6350" cap="flat" cmpd="sng" algn="ctr">
-                      <a:solidFill>
-                        <a:srgbClr val="BFBFBF"/>
-                      </a:solidFill>
-                      <a:prstDash val="solid"/>
-                      <a:round/>
-                      <a:headEnd type="none" w="med" len="med"/>
-                      <a:tailEnd type="none" w="med" len="med"/>
-                    </a:lnR>
-                    <a:lnT w="6350" cap="flat" cmpd="sng" algn="ctr">
-                      <a:solidFill>
-                        <a:srgbClr val="BFBFBF"/>
-                      </a:solidFill>
-                      <a:prstDash val="solid"/>
-                      <a:round/>
-                      <a:headEnd type="none" w="med" len="med"/>
-                      <a:tailEnd type="none" w="med" len="med"/>
-                    </a:lnT>
-                    <a:lnB w="6350" cap="flat" cmpd="sng" algn="ctr">
-                      <a:solidFill>
-                        <a:srgbClr val="BFBFBF"/>
-                      </a:solidFill>
-                      <a:prstDash val="solid"/>
-                      <a:round/>
-                      <a:headEnd type="none" w="med" len="med"/>
-                      <a:tailEnd type="none" w="med" len="med"/>
-                    </a:lnB>
+                  <a:tcPr anchor="ctr" marL="45720" marR="45720" marT="45720" marB="45720">
+                    <a:noFill/>
                   </a:tcPr>
                 </a:tc>
                 <a:tc>
@@ -5350,64 +4739,20 @@
                     <a:bodyPr/>
                     <a:lstStyle/>
                     <a:p>
-                      <a:pPr algn="ctr" indent="0" marL="0">
-                        <a:buNone/>
-                      </a:pPr>
+                      <a:pPr algn="ctr"/>
                       <a:r>
-                        <a:rPr lang="en-US" sz="1200" dirty="0">
+                        <a:rPr sz="1000" b="0">
                           <a:solidFill>
                             <a:srgbClr val="1A1A1A"/>
                           </a:solidFill>
-                          <a:latin typeface="Times New Roman" pitchFamily="34" charset="0"/>
-                          <a:ea typeface="Times New Roman" pitchFamily="34" charset="-122"/>
-                          <a:cs typeface="Times New Roman" pitchFamily="34" charset="-120"/>
+                          <a:latin typeface="Times New Roman"/>
                         </a:rPr>
-                        <a:t xml:space="preserve">0,117</a:t>
+                        <a:t>1,057</a:t>
                       </a:r>
-                      <a:endParaRPr lang="en-US" sz="1200" dirty="0">
-                        <a:latin typeface="Times New Roman" charset="0"/>
-                        <a:ea typeface="Times New Roman" charset="0"/>
-                        <a:cs typeface="Times New Roman" charset="0"/>
-                      </a:endParaRPr>
                     </a:p>
                   </a:txBody>
-                  <a:tcPr marL="91440" marR="91440" marT="45720" marB="45720" anchor="ctr">
-                    <a:lnL w="6350" cap="flat" cmpd="sng" algn="ctr">
-                      <a:solidFill>
-                        <a:srgbClr val="BFBFBF"/>
-                      </a:solidFill>
-                      <a:prstDash val="solid"/>
-                      <a:round/>
-                      <a:headEnd type="none" w="med" len="med"/>
-                      <a:tailEnd type="none" w="med" len="med"/>
-                    </a:lnL>
-                    <a:lnR w="6350" cap="flat" cmpd="sng" algn="ctr">
-                      <a:solidFill>
-                        <a:srgbClr val="BFBFBF"/>
-                      </a:solidFill>
-                      <a:prstDash val="solid"/>
-                      <a:round/>
-                      <a:headEnd type="none" w="med" len="med"/>
-                      <a:tailEnd type="none" w="med" len="med"/>
-                    </a:lnR>
-                    <a:lnT w="6350" cap="flat" cmpd="sng" algn="ctr">
-                      <a:solidFill>
-                        <a:srgbClr val="BFBFBF"/>
-                      </a:solidFill>
-                      <a:prstDash val="solid"/>
-                      <a:round/>
-                      <a:headEnd type="none" w="med" len="med"/>
-                      <a:tailEnd type="none" w="med" len="med"/>
-                    </a:lnT>
-                    <a:lnB w="6350" cap="flat" cmpd="sng" algn="ctr">
-                      <a:solidFill>
-                        <a:srgbClr val="BFBFBF"/>
-                      </a:solidFill>
-                      <a:prstDash val="solid"/>
-                      <a:round/>
-                      <a:headEnd type="none" w="med" len="med"/>
-                      <a:tailEnd type="none" w="med" len="med"/>
-                    </a:lnB>
+                  <a:tcPr anchor="ctr" marL="45720" marR="45720" marT="45720" marB="45720">
+                    <a:noFill/>
                   </a:tcPr>
                 </a:tc>
                 <a:tc>
@@ -5415,64 +4760,20 @@
                     <a:bodyPr/>
                     <a:lstStyle/>
                     <a:p>
-                      <a:pPr algn="ctr" indent="0" marL="0">
-                        <a:buNone/>
-                      </a:pPr>
+                      <a:pPr algn="ctr"/>
                       <a:r>
-                        <a:rPr lang="en-US" sz="1200" dirty="0">
+                        <a:rPr sz="1000" b="0">
                           <a:solidFill>
                             <a:srgbClr val="1A1A1A"/>
                           </a:solidFill>
-                          <a:latin typeface="Times New Roman" pitchFamily="34" charset="0"/>
-                          <a:ea typeface="Times New Roman" pitchFamily="34" charset="-122"/>
-                          <a:cs typeface="Times New Roman" pitchFamily="34" charset="-120"/>
+                          <a:latin typeface="Times New Roman"/>
                         </a:rPr>
-                        <a:t xml:space="preserve">14,19</a:t>
+                        <a:t>0,0275</a:t>
                       </a:r>
-                      <a:endParaRPr lang="en-US" sz="1200" dirty="0">
-                        <a:latin typeface="Times New Roman" charset="0"/>
-                        <a:ea typeface="Times New Roman" charset="0"/>
-                        <a:cs typeface="Times New Roman" charset="0"/>
-                      </a:endParaRPr>
                     </a:p>
                   </a:txBody>
-                  <a:tcPr marL="91440" marR="91440" marT="45720" marB="45720" anchor="ctr">
-                    <a:lnL w="6350" cap="flat" cmpd="sng" algn="ctr">
-                      <a:solidFill>
-                        <a:srgbClr val="BFBFBF"/>
-                      </a:solidFill>
-                      <a:prstDash val="solid"/>
-                      <a:round/>
-                      <a:headEnd type="none" w="med" len="med"/>
-                      <a:tailEnd type="none" w="med" len="med"/>
-                    </a:lnL>
-                    <a:lnR w="6350" cap="flat" cmpd="sng" algn="ctr">
-                      <a:solidFill>
-                        <a:srgbClr val="BFBFBF"/>
-                      </a:solidFill>
-                      <a:prstDash val="solid"/>
-                      <a:round/>
-                      <a:headEnd type="none" w="med" len="med"/>
-                      <a:tailEnd type="none" w="med" len="med"/>
-                    </a:lnR>
-                    <a:lnT w="6350" cap="flat" cmpd="sng" algn="ctr">
-                      <a:solidFill>
-                        <a:srgbClr val="BFBFBF"/>
-                      </a:solidFill>
-                      <a:prstDash val="solid"/>
-                      <a:round/>
-                      <a:headEnd type="none" w="med" len="med"/>
-                      <a:tailEnd type="none" w="med" len="med"/>
-                    </a:lnT>
-                    <a:lnB w="6350" cap="flat" cmpd="sng" algn="ctr">
-                      <a:solidFill>
-                        <a:srgbClr val="BFBFBF"/>
-                      </a:solidFill>
-                      <a:prstDash val="solid"/>
-                      <a:round/>
-                      <a:headEnd type="none" w="med" len="med"/>
-                      <a:tailEnd type="none" w="med" len="med"/>
-                    </a:lnB>
+                  <a:tcPr anchor="ctr" marL="45720" marR="45720" marT="45720" marB="45720">
+                    <a:noFill/>
                   </a:tcPr>
                 </a:tc>
                 <a:tc>
@@ -5480,64 +4781,104 @@
                     <a:bodyPr/>
                     <a:lstStyle/>
                     <a:p>
-                      <a:pPr algn="ctr" indent="0" marL="0">
-                        <a:buNone/>
-                      </a:pPr>
+                      <a:pPr algn="ctr"/>
                       <a:r>
-                        <a:rPr lang="en-US" sz="1200" dirty="0">
+                        <a:rPr sz="1000" b="0">
                           <a:solidFill>
                             <a:srgbClr val="1A1A1A"/>
                           </a:solidFill>
-                          <a:latin typeface="Times New Roman" pitchFamily="34" charset="0"/>
-                          <a:ea typeface="Times New Roman" pitchFamily="34" charset="-122"/>
-                          <a:cs typeface="Times New Roman" pitchFamily="34" charset="-120"/>
+                          <a:latin typeface="Times New Roman"/>
                         </a:rPr>
-                        <a:t xml:space="preserve">0,701</a:t>
+                        <a:t>14,19</a:t>
                       </a:r>
-                      <a:endParaRPr lang="en-US" sz="1200" dirty="0">
-                        <a:latin typeface="Times New Roman" charset="0"/>
-                        <a:ea typeface="Times New Roman" charset="0"/>
-                        <a:cs typeface="Times New Roman" charset="0"/>
-                      </a:endParaRPr>
                     </a:p>
                   </a:txBody>
-                  <a:tcPr marL="91440" marR="91440" marT="45720" marB="45720" anchor="ctr">
-                    <a:lnL w="6350" cap="flat" cmpd="sng" algn="ctr">
-                      <a:solidFill>
-                        <a:srgbClr val="BFBFBF"/>
-                      </a:solidFill>
-                      <a:prstDash val="solid"/>
-                      <a:round/>
-                      <a:headEnd type="none" w="med" len="med"/>
-                      <a:tailEnd type="none" w="med" len="med"/>
-                    </a:lnL>
-                    <a:lnR w="6350" cap="flat" cmpd="sng" algn="ctr">
-                      <a:solidFill>
-                        <a:srgbClr val="BFBFBF"/>
-                      </a:solidFill>
-                      <a:prstDash val="solid"/>
-                      <a:round/>
-                      <a:headEnd type="none" w="med" len="med"/>
-                      <a:tailEnd type="none" w="med" len="med"/>
-                    </a:lnR>
-                    <a:lnT w="6350" cap="flat" cmpd="sng" algn="ctr">
-                      <a:solidFill>
-                        <a:srgbClr val="BFBFBF"/>
-                      </a:solidFill>
-                      <a:prstDash val="solid"/>
-                      <a:round/>
-                      <a:headEnd type="none" w="med" len="med"/>
-                      <a:tailEnd type="none" w="med" len="med"/>
-                    </a:lnT>
-                    <a:lnB w="6350" cap="flat" cmpd="sng" algn="ctr">
-                      <a:solidFill>
-                        <a:srgbClr val="BFBFBF"/>
-                      </a:solidFill>
-                      <a:prstDash val="solid"/>
-                      <a:round/>
-                      <a:headEnd type="none" w="med" len="med"/>
-                      <a:tailEnd type="none" w="med" len="med"/>
-                    </a:lnB>
+                  <a:tcPr anchor="ctr" marL="45720" marR="45720" marT="45720" marB="45720">
+                    <a:noFill/>
+                  </a:tcPr>
+                </a:tc>
+                <a:tc>
+                  <a:txBody>
+                    <a:bodyPr/>
+                    <a:lstStyle/>
+                    <a:p>
+                      <a:pPr algn="ctr"/>
+                      <a:r>
+                        <a:rPr sz="1000" b="0">
+                          <a:solidFill>
+                            <a:srgbClr val="1A1A1A"/>
+                          </a:solidFill>
+                          <a:latin typeface="Times New Roman"/>
+                        </a:rPr>
+                        <a:t>1,076</a:t>
+                      </a:r>
+                    </a:p>
+                  </a:txBody>
+                  <a:tcPr anchor="ctr" marL="45720" marR="45720" marT="45720" marB="45720">
+                    <a:noFill/>
+                  </a:tcPr>
+                </a:tc>
+                <a:tc>
+                  <a:txBody>
+                    <a:bodyPr/>
+                    <a:lstStyle/>
+                    <a:p>
+                      <a:pPr algn="ctr"/>
+                      <a:r>
+                        <a:rPr sz="1000" b="0">
+                          <a:solidFill>
+                            <a:srgbClr val="1A1A1A"/>
+                          </a:solidFill>
+                          <a:latin typeface="Times New Roman"/>
+                        </a:rPr>
+                        <a:t>0,666</a:t>
+                      </a:r>
+                    </a:p>
+                  </a:txBody>
+                  <a:tcPr anchor="ctr" marL="45720" marR="45720" marT="45720" marB="45720">
+                    <a:noFill/>
+                  </a:tcPr>
+                </a:tc>
+                <a:tc>
+                  <a:txBody>
+                    <a:bodyPr/>
+                    <a:lstStyle/>
+                    <a:p>
+                      <a:pPr algn="ctr"/>
+                      <a:r>
+                        <a:rPr sz="1000" b="0">
+                          <a:solidFill>
+                            <a:srgbClr val="1A1A1A"/>
+                          </a:solidFill>
+                          <a:latin typeface="Times New Roman"/>
+                        </a:rPr>
+                        <a:t>0,701</a:t>
+                      </a:r>
+                    </a:p>
+                  </a:txBody>
+                  <a:tcPr anchor="ctr" marL="45720" marR="45720" marT="45720" marB="45720">
+                    <a:noFill/>
+                  </a:tcPr>
+                </a:tc>
+                <a:tc>
+                  <a:txBody>
+                    <a:bodyPr/>
+                    <a:lstStyle/>
+                    <a:p>
+                      <a:pPr algn="ctr"/>
+                      <a:r>
+                        <a:rPr sz="1000" b="0">
+                          <a:solidFill>
+                            <a:srgbClr val="1A1A1A"/>
+                          </a:solidFill>
+                          <a:latin typeface="Times New Roman"/>
+                        </a:rPr>
+                        <a:t>17,59</a:t>
+                      </a:r>
+                    </a:p>
+                  </a:txBody>
+                  <a:tcPr anchor="ctr" marL="45720" marR="45720" marT="45720" marB="45720">
+                    <a:noFill/>
                   </a:tcPr>
                 </a:tc>
               </a:tr>
@@ -5547,64 +4888,20 @@
                     <a:bodyPr/>
                     <a:lstStyle/>
                     <a:p>
-                      <a:pPr algn="l" indent="0" marL="0">
-                        <a:buNone/>
-                      </a:pPr>
+                      <a:pPr algn="l"/>
                       <a:r>
-                        <a:rPr lang="en-US" sz="1200" dirty="0">
+                        <a:rPr sz="1000" b="0">
                           <a:solidFill>
                             <a:srgbClr val="1A1A1A"/>
                           </a:solidFill>
-                          <a:latin typeface="Times New Roman" pitchFamily="34" charset="0"/>
-                          <a:ea typeface="Times New Roman" pitchFamily="34" charset="-122"/>
-                          <a:cs typeface="Times New Roman" pitchFamily="34" charset="-120"/>
+                          <a:latin typeface="Times New Roman"/>
                         </a:rPr>
                         <a:t>DTCWT</a:t>
                       </a:r>
-                      <a:endParaRPr lang="en-US" sz="1200" dirty="0">
-                        <a:latin typeface="Times New Roman" charset="0"/>
-                        <a:ea typeface="Times New Roman" charset="0"/>
-                        <a:cs typeface="Times New Roman" charset="0"/>
-                      </a:endParaRPr>
                     </a:p>
                   </a:txBody>
-                  <a:tcPr marL="91440" marR="91440" marT="45720" marB="45720" anchor="ctr">
-                    <a:lnL w="6350" cap="flat" cmpd="sng" algn="ctr">
-                      <a:solidFill>
-                        <a:srgbClr val="BFBFBF"/>
-                      </a:solidFill>
-                      <a:prstDash val="solid"/>
-                      <a:round/>
-                      <a:headEnd type="none" w="med" len="med"/>
-                      <a:tailEnd type="none" w="med" len="med"/>
-                    </a:lnL>
-                    <a:lnR w="6350" cap="flat" cmpd="sng" algn="ctr">
-                      <a:solidFill>
-                        <a:srgbClr val="BFBFBF"/>
-                      </a:solidFill>
-                      <a:prstDash val="solid"/>
-                      <a:round/>
-                      <a:headEnd type="none" w="med" len="med"/>
-                      <a:tailEnd type="none" w="med" len="med"/>
-                    </a:lnR>
-                    <a:lnT w="6350" cap="flat" cmpd="sng" algn="ctr">
-                      <a:solidFill>
-                        <a:srgbClr val="BFBFBF"/>
-                      </a:solidFill>
-                      <a:prstDash val="solid"/>
-                      <a:round/>
-                      <a:headEnd type="none" w="med" len="med"/>
-                      <a:tailEnd type="none" w="med" len="med"/>
-                    </a:lnT>
-                    <a:lnB w="6350" cap="flat" cmpd="sng" algn="ctr">
-                      <a:solidFill>
-                        <a:srgbClr val="BFBFBF"/>
-                      </a:solidFill>
-                      <a:prstDash val="solid"/>
-                      <a:round/>
-                      <a:headEnd type="none" w="med" len="med"/>
-                      <a:tailEnd type="none" w="med" len="med"/>
-                    </a:lnB>
+                  <a:tcPr anchor="ctr" marL="45720" marR="45720" marT="45720" marB="45720">
+                    <a:noFill/>
                   </a:tcPr>
                 </a:tc>
                 <a:tc>
@@ -5612,64 +4909,20 @@
                     <a:bodyPr/>
                     <a:lstStyle/>
                     <a:p>
-                      <a:pPr algn="ctr" indent="0" marL="0">
-                        <a:buNone/>
-                      </a:pPr>
+                      <a:pPr algn="ctr"/>
                       <a:r>
-                        <a:rPr lang="en-US" sz="1200" dirty="0">
+                        <a:rPr sz="1000" b="0">
                           <a:solidFill>
                             <a:srgbClr val="1A1A1A"/>
                           </a:solidFill>
-                          <a:latin typeface="Times New Roman" pitchFamily="34" charset="0"/>
-                          <a:ea typeface="Times New Roman" pitchFamily="34" charset="-122"/>
-                          <a:cs typeface="Times New Roman" pitchFamily="34" charset="-120"/>
+                          <a:latin typeface="Times New Roman"/>
                         </a:rPr>
-                        <a:t xml:space="preserve">6,688</a:t>
+                        <a:t>6,688</a:t>
                       </a:r>
-                      <a:endParaRPr lang="en-US" sz="1200" dirty="0">
-                        <a:latin typeface="Times New Roman" charset="0"/>
-                        <a:ea typeface="Times New Roman" charset="0"/>
-                        <a:cs typeface="Times New Roman" charset="0"/>
-                      </a:endParaRPr>
                     </a:p>
                   </a:txBody>
-                  <a:tcPr marL="91440" marR="91440" marT="45720" marB="45720" anchor="ctr">
-                    <a:lnL w="6350" cap="flat" cmpd="sng" algn="ctr">
-                      <a:solidFill>
-                        <a:srgbClr val="BFBFBF"/>
-                      </a:solidFill>
-                      <a:prstDash val="solid"/>
-                      <a:round/>
-                      <a:headEnd type="none" w="med" len="med"/>
-                      <a:tailEnd type="none" w="med" len="med"/>
-                    </a:lnL>
-                    <a:lnR w="6350" cap="flat" cmpd="sng" algn="ctr">
-                      <a:solidFill>
-                        <a:srgbClr val="BFBFBF"/>
-                      </a:solidFill>
-                      <a:prstDash val="solid"/>
-                      <a:round/>
-                      <a:headEnd type="none" w="med" len="med"/>
-                      <a:tailEnd type="none" w="med" len="med"/>
-                    </a:lnR>
-                    <a:lnT w="6350" cap="flat" cmpd="sng" algn="ctr">
-                      <a:solidFill>
-                        <a:srgbClr val="BFBFBF"/>
-                      </a:solidFill>
-                      <a:prstDash val="solid"/>
-                      <a:round/>
-                      <a:headEnd type="none" w="med" len="med"/>
-                      <a:tailEnd type="none" w="med" len="med"/>
-                    </a:lnT>
-                    <a:lnB w="6350" cap="flat" cmpd="sng" algn="ctr">
-                      <a:solidFill>
-                        <a:srgbClr val="BFBFBF"/>
-                      </a:solidFill>
-                      <a:prstDash val="solid"/>
-                      <a:round/>
-                      <a:headEnd type="none" w="med" len="med"/>
-                      <a:tailEnd type="none" w="med" len="med"/>
-                    </a:lnB>
+                  <a:tcPr anchor="ctr" marL="45720" marR="45720" marT="45720" marB="45720">
+                    <a:noFill/>
                   </a:tcPr>
                 </a:tc>
                 <a:tc>
@@ -5677,64 +4930,20 @@
                     <a:bodyPr/>
                     <a:lstStyle/>
                     <a:p>
-                      <a:pPr algn="ctr" indent="0" marL="0">
-                        <a:buNone/>
-                      </a:pPr>
+                      <a:pPr algn="ctr"/>
                       <a:r>
-                        <a:rPr lang="en-US" sz="1200" dirty="0">
+                        <a:rPr sz="1000" b="0">
                           <a:solidFill>
                             <a:srgbClr val="1A1A1A"/>
                           </a:solidFill>
-                          <a:latin typeface="Times New Roman" pitchFamily="34" charset="0"/>
-                          <a:ea typeface="Times New Roman" pitchFamily="34" charset="-122"/>
-                          <a:cs typeface="Times New Roman" pitchFamily="34" charset="-120"/>
+                          <a:latin typeface="Times New Roman"/>
                         </a:rPr>
-                        <a:t xml:space="preserve">1,058</a:t>
+                        <a:t>0,117</a:t>
                       </a:r>
-                      <a:endParaRPr lang="en-US" sz="1200" dirty="0">
-                        <a:latin typeface="Times New Roman" charset="0"/>
-                        <a:ea typeface="Times New Roman" charset="0"/>
-                        <a:cs typeface="Times New Roman" charset="0"/>
-                      </a:endParaRPr>
                     </a:p>
                   </a:txBody>
-                  <a:tcPr marL="91440" marR="91440" marT="45720" marB="45720" anchor="ctr">
-                    <a:lnL w="6350" cap="flat" cmpd="sng" algn="ctr">
-                      <a:solidFill>
-                        <a:srgbClr val="BFBFBF"/>
-                      </a:solidFill>
-                      <a:prstDash val="solid"/>
-                      <a:round/>
-                      <a:headEnd type="none" w="med" len="med"/>
-                      <a:tailEnd type="none" w="med" len="med"/>
-                    </a:lnL>
-                    <a:lnR w="6350" cap="flat" cmpd="sng" algn="ctr">
-                      <a:solidFill>
-                        <a:srgbClr val="BFBFBF"/>
-                      </a:solidFill>
-                      <a:prstDash val="solid"/>
-                      <a:round/>
-                      <a:headEnd type="none" w="med" len="med"/>
-                      <a:tailEnd type="none" w="med" len="med"/>
-                    </a:lnR>
-                    <a:lnT w="6350" cap="flat" cmpd="sng" algn="ctr">
-                      <a:solidFill>
-                        <a:srgbClr val="BFBFBF"/>
-                      </a:solidFill>
-                      <a:prstDash val="solid"/>
-                      <a:round/>
-                      <a:headEnd type="none" w="med" len="med"/>
-                      <a:tailEnd type="none" w="med" len="med"/>
-                    </a:lnT>
-                    <a:lnB w="6350" cap="flat" cmpd="sng" algn="ctr">
-                      <a:solidFill>
-                        <a:srgbClr val="BFBFBF"/>
-                      </a:solidFill>
-                      <a:prstDash val="solid"/>
-                      <a:round/>
-                      <a:headEnd type="none" w="med" len="med"/>
-                      <a:tailEnd type="none" w="med" len="med"/>
-                    </a:lnB>
+                  <a:tcPr anchor="ctr" marL="45720" marR="45720" marT="45720" marB="45720">
+                    <a:noFill/>
                   </a:tcPr>
                 </a:tc>
                 <a:tc>
@@ -5742,64 +4951,20 @@
                     <a:bodyPr/>
                     <a:lstStyle/>
                     <a:p>
-                      <a:pPr algn="ctr" indent="0" marL="0">
-                        <a:buNone/>
-                      </a:pPr>
+                      <a:pPr algn="ctr"/>
                       <a:r>
-                        <a:rPr lang="en-US" sz="1200" dirty="0">
+                        <a:rPr sz="1000" b="0">
                           <a:solidFill>
                             <a:srgbClr val="1A1A1A"/>
                           </a:solidFill>
-                          <a:latin typeface="Times New Roman" pitchFamily="34" charset="0"/>
-                          <a:ea typeface="Times New Roman" pitchFamily="34" charset="-122"/>
-                          <a:cs typeface="Times New Roman" pitchFamily="34" charset="-120"/>
+                          <a:latin typeface="Times New Roman"/>
                         </a:rPr>
-                        <a:t xml:space="preserve">0,117</a:t>
+                        <a:t>1,058</a:t>
                       </a:r>
-                      <a:endParaRPr lang="en-US" sz="1200" dirty="0">
-                        <a:latin typeface="Times New Roman" charset="0"/>
-                        <a:ea typeface="Times New Roman" charset="0"/>
-                        <a:cs typeface="Times New Roman" charset="0"/>
-                      </a:endParaRPr>
                     </a:p>
                   </a:txBody>
-                  <a:tcPr marL="91440" marR="91440" marT="45720" marB="45720" anchor="ctr">
-                    <a:lnL w="6350" cap="flat" cmpd="sng" algn="ctr">
-                      <a:solidFill>
-                        <a:srgbClr val="BFBFBF"/>
-                      </a:solidFill>
-                      <a:prstDash val="solid"/>
-                      <a:round/>
-                      <a:headEnd type="none" w="med" len="med"/>
-                      <a:tailEnd type="none" w="med" len="med"/>
-                    </a:lnL>
-                    <a:lnR w="6350" cap="flat" cmpd="sng" algn="ctr">
-                      <a:solidFill>
-                        <a:srgbClr val="BFBFBF"/>
-                      </a:solidFill>
-                      <a:prstDash val="solid"/>
-                      <a:round/>
-                      <a:headEnd type="none" w="med" len="med"/>
-                      <a:tailEnd type="none" w="med" len="med"/>
-                    </a:lnR>
-                    <a:lnT w="6350" cap="flat" cmpd="sng" algn="ctr">
-                      <a:solidFill>
-                        <a:srgbClr val="BFBFBF"/>
-                      </a:solidFill>
-                      <a:prstDash val="solid"/>
-                      <a:round/>
-                      <a:headEnd type="none" w="med" len="med"/>
-                      <a:tailEnd type="none" w="med" len="med"/>
-                    </a:lnT>
-                    <a:lnB w="6350" cap="flat" cmpd="sng" algn="ctr">
-                      <a:solidFill>
-                        <a:srgbClr val="BFBFBF"/>
-                      </a:solidFill>
-                      <a:prstDash val="solid"/>
-                      <a:round/>
-                      <a:headEnd type="none" w="med" len="med"/>
-                      <a:tailEnd type="none" w="med" len="med"/>
-                    </a:lnB>
+                  <a:tcPr anchor="ctr" marL="45720" marR="45720" marT="45720" marB="45720">
+                    <a:noFill/>
                   </a:tcPr>
                 </a:tc>
                 <a:tc>
@@ -5807,64 +4972,20 @@
                     <a:bodyPr/>
                     <a:lstStyle/>
                     <a:p>
-                      <a:pPr algn="ctr" indent="0" marL="0">
-                        <a:buNone/>
-                      </a:pPr>
+                      <a:pPr algn="ctr"/>
                       <a:r>
-                        <a:rPr lang="en-US" sz="1200" dirty="0">
+                        <a:rPr sz="1000" b="0">
                           <a:solidFill>
                             <a:srgbClr val="1A1A1A"/>
                           </a:solidFill>
-                          <a:latin typeface="Times New Roman" pitchFamily="34" charset="0"/>
-                          <a:ea typeface="Times New Roman" pitchFamily="34" charset="-122"/>
-                          <a:cs typeface="Times New Roman" pitchFamily="34" charset="-120"/>
+                          <a:latin typeface="Times New Roman"/>
                         </a:rPr>
-                        <a:t xml:space="preserve">13,20</a:t>
+                        <a:t>0,0255</a:t>
                       </a:r>
-                      <a:endParaRPr lang="en-US" sz="1200" dirty="0">
-                        <a:latin typeface="Times New Roman" charset="0"/>
-                        <a:ea typeface="Times New Roman" charset="0"/>
-                        <a:cs typeface="Times New Roman" charset="0"/>
-                      </a:endParaRPr>
                     </a:p>
                   </a:txBody>
-                  <a:tcPr marL="91440" marR="91440" marT="45720" marB="45720" anchor="ctr">
-                    <a:lnL w="6350" cap="flat" cmpd="sng" algn="ctr">
-                      <a:solidFill>
-                        <a:srgbClr val="BFBFBF"/>
-                      </a:solidFill>
-                      <a:prstDash val="solid"/>
-                      <a:round/>
-                      <a:headEnd type="none" w="med" len="med"/>
-                      <a:tailEnd type="none" w="med" len="med"/>
-                    </a:lnL>
-                    <a:lnR w="6350" cap="flat" cmpd="sng" algn="ctr">
-                      <a:solidFill>
-                        <a:srgbClr val="BFBFBF"/>
-                      </a:solidFill>
-                      <a:prstDash val="solid"/>
-                      <a:round/>
-                      <a:headEnd type="none" w="med" len="med"/>
-                      <a:tailEnd type="none" w="med" len="med"/>
-                    </a:lnR>
-                    <a:lnT w="6350" cap="flat" cmpd="sng" algn="ctr">
-                      <a:solidFill>
-                        <a:srgbClr val="BFBFBF"/>
-                      </a:solidFill>
-                      <a:prstDash val="solid"/>
-                      <a:round/>
-                      <a:headEnd type="none" w="med" len="med"/>
-                      <a:tailEnd type="none" w="med" len="med"/>
-                    </a:lnT>
-                    <a:lnB w="6350" cap="flat" cmpd="sng" algn="ctr">
-                      <a:solidFill>
-                        <a:srgbClr val="BFBFBF"/>
-                      </a:solidFill>
-                      <a:prstDash val="solid"/>
-                      <a:round/>
-                      <a:headEnd type="none" w="med" len="med"/>
-                      <a:tailEnd type="none" w="med" len="med"/>
-                    </a:lnB>
+                  <a:tcPr anchor="ctr" marL="45720" marR="45720" marT="45720" marB="45720">
+                    <a:noFill/>
                   </a:tcPr>
                 </a:tc>
                 <a:tc>
@@ -5872,64 +4993,104 @@
                     <a:bodyPr/>
                     <a:lstStyle/>
                     <a:p>
-                      <a:pPr algn="ctr" indent="0" marL="0">
-                        <a:buNone/>
-                      </a:pPr>
+                      <a:pPr algn="ctr"/>
                       <a:r>
-                        <a:rPr lang="en-US" sz="1200" b="1" dirty="0">
+                        <a:rPr sz="1000" b="0">
                           <a:solidFill>
                             <a:srgbClr val="1A1A1A"/>
                           </a:solidFill>
-                          <a:latin typeface="Times New Roman" pitchFamily="34" charset="0"/>
-                          <a:ea typeface="Times New Roman" pitchFamily="34" charset="-122"/>
-                          <a:cs typeface="Times New Roman" pitchFamily="34" charset="-120"/>
+                          <a:latin typeface="Times New Roman"/>
                         </a:rPr>
-                        <a:t xml:space="preserve">0,725</a:t>
+                        <a:t>13,20</a:t>
                       </a:r>
-                      <a:endParaRPr lang="en-US" sz="1200" dirty="0">
-                        <a:latin typeface="Times New Roman" charset="0"/>
-                        <a:ea typeface="Times New Roman" charset="0"/>
-                        <a:cs typeface="Times New Roman" charset="0"/>
-                      </a:endParaRPr>
                     </a:p>
                   </a:txBody>
-                  <a:tcPr marL="91440" marR="91440" marT="45720" marB="45720" anchor="ctr">
-                    <a:lnL w="6350" cap="flat" cmpd="sng" algn="ctr">
-                      <a:solidFill>
-                        <a:srgbClr val="BFBFBF"/>
-                      </a:solidFill>
-                      <a:prstDash val="solid"/>
-                      <a:round/>
-                      <a:headEnd type="none" w="med" len="med"/>
-                      <a:tailEnd type="none" w="med" len="med"/>
-                    </a:lnL>
-                    <a:lnR w="6350" cap="flat" cmpd="sng" algn="ctr">
-                      <a:solidFill>
-                        <a:srgbClr val="BFBFBF"/>
-                      </a:solidFill>
-                      <a:prstDash val="solid"/>
-                      <a:round/>
-                      <a:headEnd type="none" w="med" len="med"/>
-                      <a:tailEnd type="none" w="med" len="med"/>
-                    </a:lnR>
-                    <a:lnT w="6350" cap="flat" cmpd="sng" algn="ctr">
-                      <a:solidFill>
-                        <a:srgbClr val="BFBFBF"/>
-                      </a:solidFill>
-                      <a:prstDash val="solid"/>
-                      <a:round/>
-                      <a:headEnd type="none" w="med" len="med"/>
-                      <a:tailEnd type="none" w="med" len="med"/>
-                    </a:lnT>
-                    <a:lnB w="6350" cap="flat" cmpd="sng" algn="ctr">
-                      <a:solidFill>
-                        <a:srgbClr val="BFBFBF"/>
-                      </a:solidFill>
-                      <a:prstDash val="solid"/>
-                      <a:round/>
-                      <a:headEnd type="none" w="med" len="med"/>
-                      <a:tailEnd type="none" w="med" len="med"/>
-                    </a:lnB>
+                  <a:tcPr anchor="ctr" marL="45720" marR="45720" marT="45720" marB="45720">
+                    <a:noFill/>
+                  </a:tcPr>
+                </a:tc>
+                <a:tc>
+                  <a:txBody>
+                    <a:bodyPr/>
+                    <a:lstStyle/>
+                    <a:p>
+                      <a:pPr algn="ctr"/>
+                      <a:r>
+                        <a:rPr sz="1000" b="0">
+                          <a:solidFill>
+                            <a:srgbClr val="1A1A1A"/>
+                          </a:solidFill>
+                          <a:latin typeface="Times New Roman"/>
+                        </a:rPr>
+                        <a:t>1,078</a:t>
+                      </a:r>
+                    </a:p>
+                  </a:txBody>
+                  <a:tcPr anchor="ctr" marL="45720" marR="45720" marT="45720" marB="45720">
+                    <a:noFill/>
+                  </a:tcPr>
+                </a:tc>
+                <a:tc>
+                  <a:txBody>
+                    <a:bodyPr/>
+                    <a:lstStyle/>
+                    <a:p>
+                      <a:pPr algn="ctr"/>
+                      <a:r>
+                        <a:rPr sz="1000" b="0">
+                          <a:solidFill>
+                            <a:srgbClr val="1A1A1A"/>
+                          </a:solidFill>
+                          <a:latin typeface="Times New Roman"/>
+                        </a:rPr>
+                        <a:t>0,673</a:t>
+                      </a:r>
+                    </a:p>
+                  </a:txBody>
+                  <a:tcPr anchor="ctr" marL="45720" marR="45720" marT="45720" marB="45720">
+                    <a:noFill/>
+                  </a:tcPr>
+                </a:tc>
+                <a:tc>
+                  <a:txBody>
+                    <a:bodyPr/>
+                    <a:lstStyle/>
+                    <a:p>
+                      <a:pPr algn="ctr"/>
+                      <a:r>
+                        <a:rPr sz="1000" b="1">
+                          <a:solidFill>
+                            <a:srgbClr val="1A1A1A"/>
+                          </a:solidFill>
+                          <a:latin typeface="Times New Roman"/>
+                        </a:rPr>
+                        <a:t>0,725</a:t>
+                      </a:r>
+                    </a:p>
+                  </a:txBody>
+                  <a:tcPr anchor="ctr" marL="45720" marR="45720" marT="45720" marB="45720">
+                    <a:noFill/>
+                  </a:tcPr>
+                </a:tc>
+                <a:tc>
+                  <a:txBody>
+                    <a:bodyPr/>
+                    <a:lstStyle/>
+                    <a:p>
+                      <a:pPr algn="ctr"/>
+                      <a:r>
+                        <a:rPr sz="1000" b="0">
+                          <a:solidFill>
+                            <a:srgbClr val="1A1A1A"/>
+                          </a:solidFill>
+                          <a:latin typeface="Times New Roman"/>
+                        </a:rPr>
+                        <a:t>17,60</a:t>
+                      </a:r>
+                    </a:p>
+                  </a:txBody>
+                  <a:tcPr anchor="ctr" marL="45720" marR="45720" marT="45720" marB="45720">
+                    <a:noFill/>
                   </a:tcPr>
                 </a:tc>
               </a:tr>
@@ -5939,64 +5100,20 @@
                     <a:bodyPr/>
                     <a:lstStyle/>
                     <a:p>
-                      <a:pPr algn="l" indent="0" marL="0">
-                        <a:buNone/>
-                      </a:pPr>
+                      <a:pPr algn="l"/>
                       <a:r>
-                        <a:rPr lang="en-US" sz="1200" dirty="0">
+                        <a:rPr sz="1000" b="0">
                           <a:solidFill>
                             <a:srgbClr val="1A1A1A"/>
                           </a:solidFill>
-                          <a:latin typeface="Times New Roman" pitchFamily="34" charset="0"/>
-                          <a:ea typeface="Times New Roman" pitchFamily="34" charset="-122"/>
-                          <a:cs typeface="Times New Roman" pitchFamily="34" charset="-120"/>
+                          <a:latin typeface="Times New Roman"/>
                         </a:rPr>
-                        <a:t xml:space="preserve">CVT (aprox. wavelet db4)</a:t>
+                        <a:t>CVT (aprox. wavelet db4)</a:t>
                       </a:r>
-                      <a:endParaRPr lang="en-US" sz="1200" dirty="0">
-                        <a:latin typeface="Times New Roman" charset="0"/>
-                        <a:ea typeface="Times New Roman" charset="0"/>
-                        <a:cs typeface="Times New Roman" charset="0"/>
-                      </a:endParaRPr>
                     </a:p>
                   </a:txBody>
-                  <a:tcPr marL="91440" marR="91440" marT="45720" marB="45720" anchor="ctr">
-                    <a:lnL w="6350" cap="flat" cmpd="sng" algn="ctr">
-                      <a:solidFill>
-                        <a:srgbClr val="BFBFBF"/>
-                      </a:solidFill>
-                      <a:prstDash val="solid"/>
-                      <a:round/>
-                      <a:headEnd type="none" w="med" len="med"/>
-                      <a:tailEnd type="none" w="med" len="med"/>
-                    </a:lnL>
-                    <a:lnR w="6350" cap="flat" cmpd="sng" algn="ctr">
-                      <a:solidFill>
-                        <a:srgbClr val="BFBFBF"/>
-                      </a:solidFill>
-                      <a:prstDash val="solid"/>
-                      <a:round/>
-                      <a:headEnd type="none" w="med" len="med"/>
-                      <a:tailEnd type="none" w="med" len="med"/>
-                    </a:lnR>
-                    <a:lnT w="6350" cap="flat" cmpd="sng" algn="ctr">
-                      <a:solidFill>
-                        <a:srgbClr val="BFBFBF"/>
-                      </a:solidFill>
-                      <a:prstDash val="solid"/>
-                      <a:round/>
-                      <a:headEnd type="none" w="med" len="med"/>
-                      <a:tailEnd type="none" w="med" len="med"/>
-                    </a:lnT>
-                    <a:lnB w="6350" cap="flat" cmpd="sng" algn="ctr">
-                      <a:solidFill>
-                        <a:srgbClr val="BFBFBF"/>
-                      </a:solidFill>
-                      <a:prstDash val="solid"/>
-                      <a:round/>
-                      <a:headEnd type="none" w="med" len="med"/>
-                      <a:tailEnd type="none" w="med" len="med"/>
-                    </a:lnB>
+                  <a:tcPr anchor="ctr" marL="45720" marR="45720" marT="45720" marB="45720">
+                    <a:noFill/>
                   </a:tcPr>
                 </a:tc>
                 <a:tc>
@@ -6004,64 +5121,20 @@
                     <a:bodyPr/>
                     <a:lstStyle/>
                     <a:p>
-                      <a:pPr algn="ctr" indent="0" marL="0">
-                        <a:buNone/>
-                      </a:pPr>
+                      <a:pPr algn="ctr"/>
                       <a:r>
-                        <a:rPr lang="en-US" sz="1200" dirty="0">
+                        <a:rPr sz="1000" b="0">
                           <a:solidFill>
                             <a:srgbClr val="1A1A1A"/>
                           </a:solidFill>
-                          <a:latin typeface="Times New Roman" pitchFamily="34" charset="0"/>
-                          <a:ea typeface="Times New Roman" pitchFamily="34" charset="-122"/>
-                          <a:cs typeface="Times New Roman" pitchFamily="34" charset="-120"/>
+                          <a:latin typeface="Times New Roman"/>
                         </a:rPr>
-                        <a:t xml:space="preserve">6,644</a:t>
+                        <a:t>6,644</a:t>
                       </a:r>
-                      <a:endParaRPr lang="en-US" sz="1200" dirty="0">
-                        <a:latin typeface="Times New Roman" charset="0"/>
-                        <a:ea typeface="Times New Roman" charset="0"/>
-                        <a:cs typeface="Times New Roman" charset="0"/>
-                      </a:endParaRPr>
                     </a:p>
                   </a:txBody>
-                  <a:tcPr marL="91440" marR="91440" marT="45720" marB="45720" anchor="ctr">
-                    <a:lnL w="6350" cap="flat" cmpd="sng" algn="ctr">
-                      <a:solidFill>
-                        <a:srgbClr val="BFBFBF"/>
-                      </a:solidFill>
-                      <a:prstDash val="solid"/>
-                      <a:round/>
-                      <a:headEnd type="none" w="med" len="med"/>
-                      <a:tailEnd type="none" w="med" len="med"/>
-                    </a:lnL>
-                    <a:lnR w="6350" cap="flat" cmpd="sng" algn="ctr">
-                      <a:solidFill>
-                        <a:srgbClr val="BFBFBF"/>
-                      </a:solidFill>
-                      <a:prstDash val="solid"/>
-                      <a:round/>
-                      <a:headEnd type="none" w="med" len="med"/>
-                      <a:tailEnd type="none" w="med" len="med"/>
-                    </a:lnR>
-                    <a:lnT w="6350" cap="flat" cmpd="sng" algn="ctr">
-                      <a:solidFill>
-                        <a:srgbClr val="BFBFBF"/>
-                      </a:solidFill>
-                      <a:prstDash val="solid"/>
-                      <a:round/>
-                      <a:headEnd type="none" w="med" len="med"/>
-                      <a:tailEnd type="none" w="med" len="med"/>
-                    </a:lnT>
-                    <a:lnB w="6350" cap="flat" cmpd="sng" algn="ctr">
-                      <a:solidFill>
-                        <a:srgbClr val="BFBFBF"/>
-                      </a:solidFill>
-                      <a:prstDash val="solid"/>
-                      <a:round/>
-                      <a:headEnd type="none" w="med" len="med"/>
-                      <a:tailEnd type="none" w="med" len="med"/>
-                    </a:lnB>
+                  <a:tcPr anchor="ctr" marL="45720" marR="45720" marT="45720" marB="45720">
+                    <a:noFill/>
                   </a:tcPr>
                 </a:tc>
                 <a:tc>
@@ -6069,64 +5142,20 @@
                     <a:bodyPr/>
                     <a:lstStyle/>
                     <a:p>
-                      <a:pPr algn="ctr" indent="0" marL="0">
-                        <a:buNone/>
-                      </a:pPr>
+                      <a:pPr algn="ctr"/>
                       <a:r>
-                        <a:rPr lang="en-US" sz="1200" dirty="0">
+                        <a:rPr sz="1000" b="0">
                           <a:solidFill>
                             <a:srgbClr val="1A1A1A"/>
                           </a:solidFill>
-                          <a:latin typeface="Times New Roman" pitchFamily="34" charset="0"/>
-                          <a:ea typeface="Times New Roman" pitchFamily="34" charset="-122"/>
-                          <a:cs typeface="Times New Roman" pitchFamily="34" charset="-120"/>
+                          <a:latin typeface="Times New Roman"/>
                         </a:rPr>
-                        <a:t xml:space="preserve">1,051</a:t>
+                        <a:t>0,113</a:t>
                       </a:r>
-                      <a:endParaRPr lang="en-US" sz="1200" dirty="0">
-                        <a:latin typeface="Times New Roman" charset="0"/>
-                        <a:ea typeface="Times New Roman" charset="0"/>
-                        <a:cs typeface="Times New Roman" charset="0"/>
-                      </a:endParaRPr>
                     </a:p>
                   </a:txBody>
-                  <a:tcPr marL="91440" marR="91440" marT="45720" marB="45720" anchor="ctr">
-                    <a:lnL w="6350" cap="flat" cmpd="sng" algn="ctr">
-                      <a:solidFill>
-                        <a:srgbClr val="BFBFBF"/>
-                      </a:solidFill>
-                      <a:prstDash val="solid"/>
-                      <a:round/>
-                      <a:headEnd type="none" w="med" len="med"/>
-                      <a:tailEnd type="none" w="med" len="med"/>
-                    </a:lnL>
-                    <a:lnR w="6350" cap="flat" cmpd="sng" algn="ctr">
-                      <a:solidFill>
-                        <a:srgbClr val="BFBFBF"/>
-                      </a:solidFill>
-                      <a:prstDash val="solid"/>
-                      <a:round/>
-                      <a:headEnd type="none" w="med" len="med"/>
-                      <a:tailEnd type="none" w="med" len="med"/>
-                    </a:lnR>
-                    <a:lnT w="6350" cap="flat" cmpd="sng" algn="ctr">
-                      <a:solidFill>
-                        <a:srgbClr val="BFBFBF"/>
-                      </a:solidFill>
-                      <a:prstDash val="solid"/>
-                      <a:round/>
-                      <a:headEnd type="none" w="med" len="med"/>
-                      <a:tailEnd type="none" w="med" len="med"/>
-                    </a:lnT>
-                    <a:lnB w="6350" cap="flat" cmpd="sng" algn="ctr">
-                      <a:solidFill>
-                        <a:srgbClr val="BFBFBF"/>
-                      </a:solidFill>
-                      <a:prstDash val="solid"/>
-                      <a:round/>
-                      <a:headEnd type="none" w="med" len="med"/>
-                      <a:tailEnd type="none" w="med" len="med"/>
-                    </a:lnB>
+                  <a:tcPr anchor="ctr" marL="45720" marR="45720" marT="45720" marB="45720">
+                    <a:noFill/>
                   </a:tcPr>
                 </a:tc>
                 <a:tc>
@@ -6134,64 +5163,20 @@
                     <a:bodyPr/>
                     <a:lstStyle/>
                     <a:p>
-                      <a:pPr algn="ctr" indent="0" marL="0">
-                        <a:buNone/>
-                      </a:pPr>
+                      <a:pPr algn="ctr"/>
                       <a:r>
-                        <a:rPr lang="en-US" sz="1200" dirty="0">
+                        <a:rPr sz="1000" b="0">
                           <a:solidFill>
                             <a:srgbClr val="1A1A1A"/>
                           </a:solidFill>
-                          <a:latin typeface="Times New Roman" pitchFamily="34" charset="0"/>
-                          <a:ea typeface="Times New Roman" pitchFamily="34" charset="-122"/>
-                          <a:cs typeface="Times New Roman" pitchFamily="34" charset="-120"/>
+                          <a:latin typeface="Times New Roman"/>
                         </a:rPr>
-                        <a:t xml:space="preserve">0,113</a:t>
+                        <a:t>1,051</a:t>
                       </a:r>
-                      <a:endParaRPr lang="en-US" sz="1200" dirty="0">
-                        <a:latin typeface="Times New Roman" charset="0"/>
-                        <a:ea typeface="Times New Roman" charset="0"/>
-                        <a:cs typeface="Times New Roman" charset="0"/>
-                      </a:endParaRPr>
                     </a:p>
                   </a:txBody>
-                  <a:tcPr marL="91440" marR="91440" marT="45720" marB="45720" anchor="ctr">
-                    <a:lnL w="6350" cap="flat" cmpd="sng" algn="ctr">
-                      <a:solidFill>
-                        <a:srgbClr val="BFBFBF"/>
-                      </a:solidFill>
-                      <a:prstDash val="solid"/>
-                      <a:round/>
-                      <a:headEnd type="none" w="med" len="med"/>
-                      <a:tailEnd type="none" w="med" len="med"/>
-                    </a:lnL>
-                    <a:lnR w="6350" cap="flat" cmpd="sng" algn="ctr">
-                      <a:solidFill>
-                        <a:srgbClr val="BFBFBF"/>
-                      </a:solidFill>
-                      <a:prstDash val="solid"/>
-                      <a:round/>
-                      <a:headEnd type="none" w="med" len="med"/>
-                      <a:tailEnd type="none" w="med" len="med"/>
-                    </a:lnR>
-                    <a:lnT w="6350" cap="flat" cmpd="sng" algn="ctr">
-                      <a:solidFill>
-                        <a:srgbClr val="BFBFBF"/>
-                      </a:solidFill>
-                      <a:prstDash val="solid"/>
-                      <a:round/>
-                      <a:headEnd type="none" w="med" len="med"/>
-                      <a:tailEnd type="none" w="med" len="med"/>
-                    </a:lnT>
-                    <a:lnB w="6350" cap="flat" cmpd="sng" algn="ctr">
-                      <a:solidFill>
-                        <a:srgbClr val="BFBFBF"/>
-                      </a:solidFill>
-                      <a:prstDash val="solid"/>
-                      <a:round/>
-                      <a:headEnd type="none" w="med" len="med"/>
-                      <a:tailEnd type="none" w="med" len="med"/>
-                    </a:lnB>
+                  <a:tcPr anchor="ctr" marL="45720" marR="45720" marT="45720" marB="45720">
+                    <a:noFill/>
                   </a:tcPr>
                 </a:tc>
                 <a:tc>
@@ -6199,64 +5184,20 @@
                     <a:bodyPr/>
                     <a:lstStyle/>
                     <a:p>
-                      <a:pPr algn="ctr" indent="0" marL="0">
-                        <a:buNone/>
-                      </a:pPr>
+                      <a:pPr algn="ctr"/>
                       <a:r>
-                        <a:rPr lang="en-US" sz="1200" dirty="0">
+                        <a:rPr sz="1000" b="0">
                           <a:solidFill>
                             <a:srgbClr val="1A1A1A"/>
                           </a:solidFill>
-                          <a:latin typeface="Times New Roman" pitchFamily="34" charset="0"/>
-                          <a:ea typeface="Times New Roman" pitchFamily="34" charset="-122"/>
-                          <a:cs typeface="Times New Roman" pitchFamily="34" charset="-120"/>
+                          <a:latin typeface="Times New Roman"/>
                         </a:rPr>
-                        <a:t xml:space="preserve">13,34</a:t>
+                        <a:t>0,0260</a:t>
                       </a:r>
-                      <a:endParaRPr lang="en-US" sz="1200" dirty="0">
-                        <a:latin typeface="Times New Roman" charset="0"/>
-                        <a:ea typeface="Times New Roman" charset="0"/>
-                        <a:cs typeface="Times New Roman" charset="0"/>
-                      </a:endParaRPr>
                     </a:p>
                   </a:txBody>
-                  <a:tcPr marL="91440" marR="91440" marT="45720" marB="45720" anchor="ctr">
-                    <a:lnL w="6350" cap="flat" cmpd="sng" algn="ctr">
-                      <a:solidFill>
-                        <a:srgbClr val="BFBFBF"/>
-                      </a:solidFill>
-                      <a:prstDash val="solid"/>
-                      <a:round/>
-                      <a:headEnd type="none" w="med" len="med"/>
-                      <a:tailEnd type="none" w="med" len="med"/>
-                    </a:lnL>
-                    <a:lnR w="6350" cap="flat" cmpd="sng" algn="ctr">
-                      <a:solidFill>
-                        <a:srgbClr val="BFBFBF"/>
-                      </a:solidFill>
-                      <a:prstDash val="solid"/>
-                      <a:round/>
-                      <a:headEnd type="none" w="med" len="med"/>
-                      <a:tailEnd type="none" w="med" len="med"/>
-                    </a:lnR>
-                    <a:lnT w="6350" cap="flat" cmpd="sng" algn="ctr">
-                      <a:solidFill>
-                        <a:srgbClr val="BFBFBF"/>
-                      </a:solidFill>
-                      <a:prstDash val="solid"/>
-                      <a:round/>
-                      <a:headEnd type="none" w="med" len="med"/>
-                      <a:tailEnd type="none" w="med" len="med"/>
-                    </a:lnT>
-                    <a:lnB w="6350" cap="flat" cmpd="sng" algn="ctr">
-                      <a:solidFill>
-                        <a:srgbClr val="BFBFBF"/>
-                      </a:solidFill>
-                      <a:prstDash val="solid"/>
-                      <a:round/>
-                      <a:headEnd type="none" w="med" len="med"/>
-                      <a:tailEnd type="none" w="med" len="med"/>
-                    </a:lnB>
+                  <a:tcPr anchor="ctr" marL="45720" marR="45720" marT="45720" marB="45720">
+                    <a:noFill/>
                   </a:tcPr>
                 </a:tc>
                 <a:tc>
@@ -6264,64 +5205,104 @@
                     <a:bodyPr/>
                     <a:lstStyle/>
                     <a:p>
-                      <a:pPr algn="ctr" indent="0" marL="0">
-                        <a:buNone/>
-                      </a:pPr>
+                      <a:pPr algn="ctr"/>
                       <a:r>
-                        <a:rPr lang="en-US" sz="1200" dirty="0">
+                        <a:rPr sz="1000" b="0">
                           <a:solidFill>
                             <a:srgbClr val="1A1A1A"/>
                           </a:solidFill>
-                          <a:latin typeface="Times New Roman" pitchFamily="34" charset="0"/>
-                          <a:ea typeface="Times New Roman" pitchFamily="34" charset="-122"/>
-                          <a:cs typeface="Times New Roman" pitchFamily="34" charset="-120"/>
+                          <a:latin typeface="Times New Roman"/>
                         </a:rPr>
-                        <a:t xml:space="preserve">0,716</a:t>
+                        <a:t>13,34</a:t>
                       </a:r>
-                      <a:endParaRPr lang="en-US" sz="1200" dirty="0">
-                        <a:latin typeface="Times New Roman" charset="0"/>
-                        <a:ea typeface="Times New Roman" charset="0"/>
-                        <a:cs typeface="Times New Roman" charset="0"/>
-                      </a:endParaRPr>
                     </a:p>
                   </a:txBody>
-                  <a:tcPr marL="91440" marR="91440" marT="45720" marB="45720" anchor="ctr">
-                    <a:lnL w="6350" cap="flat" cmpd="sng" algn="ctr">
-                      <a:solidFill>
-                        <a:srgbClr val="BFBFBF"/>
-                      </a:solidFill>
-                      <a:prstDash val="solid"/>
-                      <a:round/>
-                      <a:headEnd type="none" w="med" len="med"/>
-                      <a:tailEnd type="none" w="med" len="med"/>
-                    </a:lnL>
-                    <a:lnR w="6350" cap="flat" cmpd="sng" algn="ctr">
-                      <a:solidFill>
-                        <a:srgbClr val="BFBFBF"/>
-                      </a:solidFill>
-                      <a:prstDash val="solid"/>
-                      <a:round/>
-                      <a:headEnd type="none" w="med" len="med"/>
-                      <a:tailEnd type="none" w="med" len="med"/>
-                    </a:lnR>
-                    <a:lnT w="6350" cap="flat" cmpd="sng" algn="ctr">
-                      <a:solidFill>
-                        <a:srgbClr val="BFBFBF"/>
-                      </a:solidFill>
-                      <a:prstDash val="solid"/>
-                      <a:round/>
-                      <a:headEnd type="none" w="med" len="med"/>
-                      <a:tailEnd type="none" w="med" len="med"/>
-                    </a:lnT>
-                    <a:lnB w="6350" cap="flat" cmpd="sng" algn="ctr">
-                      <a:solidFill>
-                        <a:srgbClr val="BFBFBF"/>
-                      </a:solidFill>
-                      <a:prstDash val="solid"/>
-                      <a:round/>
-                      <a:headEnd type="none" w="med" len="med"/>
-                      <a:tailEnd type="none" w="med" len="med"/>
-                    </a:lnB>
+                  <a:tcPr anchor="ctr" marL="45720" marR="45720" marT="45720" marB="45720">
+                    <a:noFill/>
+                  </a:tcPr>
+                </a:tc>
+                <a:tc>
+                  <a:txBody>
+                    <a:bodyPr/>
+                    <a:lstStyle/>
+                    <a:p>
+                      <a:pPr algn="ctr"/>
+                      <a:r>
+                        <a:rPr sz="1000" b="0">
+                          <a:solidFill>
+                            <a:srgbClr val="1A1A1A"/>
+                          </a:solidFill>
+                          <a:latin typeface="Times New Roman"/>
+                        </a:rPr>
+                        <a:t>1,096</a:t>
+                      </a:r>
+                    </a:p>
+                  </a:txBody>
+                  <a:tcPr anchor="ctr" marL="45720" marR="45720" marT="45720" marB="45720">
+                    <a:noFill/>
+                  </a:tcPr>
+                </a:tc>
+                <a:tc>
+                  <a:txBody>
+                    <a:bodyPr/>
+                    <a:lstStyle/>
+                    <a:p>
+                      <a:pPr algn="ctr"/>
+                      <a:r>
+                        <a:rPr sz="1000" b="0">
+                          <a:solidFill>
+                            <a:srgbClr val="1A1A1A"/>
+                          </a:solidFill>
+                          <a:latin typeface="Times New Roman"/>
+                        </a:rPr>
+                        <a:t>0,669</a:t>
+                      </a:r>
+                    </a:p>
+                  </a:txBody>
+                  <a:tcPr anchor="ctr" marL="45720" marR="45720" marT="45720" marB="45720">
+                    <a:noFill/>
+                  </a:tcPr>
+                </a:tc>
+                <a:tc>
+                  <a:txBody>
+                    <a:bodyPr/>
+                    <a:lstStyle/>
+                    <a:p>
+                      <a:pPr algn="ctr"/>
+                      <a:r>
+                        <a:rPr sz="1000" b="0">
+                          <a:solidFill>
+                            <a:srgbClr val="1A1A1A"/>
+                          </a:solidFill>
+                          <a:latin typeface="Times New Roman"/>
+                        </a:rPr>
+                        <a:t>0,716</a:t>
+                      </a:r>
+                    </a:p>
+                  </a:txBody>
+                  <a:tcPr anchor="ctr" marL="45720" marR="45720" marT="45720" marB="45720">
+                    <a:noFill/>
+                  </a:tcPr>
+                </a:tc>
+                <a:tc>
+                  <a:txBody>
+                    <a:bodyPr/>
+                    <a:lstStyle/>
+                    <a:p>
+                      <a:pPr algn="ctr"/>
+                      <a:r>
+                        <a:rPr sz="1000" b="1">
+                          <a:solidFill>
+                            <a:srgbClr val="1A1A1A"/>
+                          </a:solidFill>
+                          <a:latin typeface="Times New Roman"/>
+                        </a:rPr>
+                        <a:t>17,65</a:t>
+                      </a:r>
+                    </a:p>
+                  </a:txBody>
+                  <a:tcPr anchor="ctr" marL="45720" marR="45720" marT="45720" marB="45720">
+                    <a:noFill/>
                   </a:tcPr>
                 </a:tc>
               </a:tr>
@@ -6331,64 +5312,20 @@
                     <a:bodyPr/>
                     <a:lstStyle/>
                     <a:p>
-                      <a:pPr algn="l" indent="0" marL="0">
-                        <a:buNone/>
-                      </a:pPr>
+                      <a:pPr algn="l"/>
                       <a:r>
-                        <a:rPr lang="en-US" sz="1200" dirty="0">
+                        <a:rPr sz="1000" b="0">
                           <a:solidFill>
                             <a:srgbClr val="1A1A1A"/>
                           </a:solidFill>
-                          <a:latin typeface="Times New Roman" pitchFamily="34" charset="0"/>
-                          <a:ea typeface="Times New Roman" pitchFamily="34" charset="-122"/>
-                          <a:cs typeface="Times New Roman" pitchFamily="34" charset="-120"/>
+                          <a:latin typeface="Times New Roman"/>
                         </a:rPr>
-                        <a:t>Top-Hat clásico</a:t>
+                        <a:t>Top-Hat clásico (r=5; m=1)</a:t>
                       </a:r>
-                      <a:endParaRPr lang="en-US" sz="1200" dirty="0">
-                        <a:latin typeface="Times New Roman" charset="0"/>
-                        <a:ea typeface="Times New Roman" charset="0"/>
-                        <a:cs typeface="Times New Roman" charset="0"/>
-                      </a:endParaRPr>
                     </a:p>
                   </a:txBody>
-                  <a:tcPr marL="91440" marR="91440" marT="45720" marB="45720" anchor="ctr">
-                    <a:lnL w="6350" cap="flat" cmpd="sng" algn="ctr">
-                      <a:solidFill>
-                        <a:srgbClr val="BFBFBF"/>
-                      </a:solidFill>
-                      <a:prstDash val="solid"/>
-                      <a:round/>
-                      <a:headEnd type="none" w="med" len="med"/>
-                      <a:tailEnd type="none" w="med" len="med"/>
-                    </a:lnL>
-                    <a:lnR w="6350" cap="flat" cmpd="sng" algn="ctr">
-                      <a:solidFill>
-                        <a:srgbClr val="BFBFBF"/>
-                      </a:solidFill>
-                      <a:prstDash val="solid"/>
-                      <a:round/>
-                      <a:headEnd type="none" w="med" len="med"/>
-                      <a:tailEnd type="none" w="med" len="med"/>
-                    </a:lnR>
-                    <a:lnT w="6350" cap="flat" cmpd="sng" algn="ctr">
-                      <a:solidFill>
-                        <a:srgbClr val="BFBFBF"/>
-                      </a:solidFill>
-                      <a:prstDash val="solid"/>
-                      <a:round/>
-                      <a:headEnd type="none" w="med" len="med"/>
-                      <a:tailEnd type="none" w="med" len="med"/>
-                    </a:lnT>
-                    <a:lnB w="6350" cap="flat" cmpd="sng" algn="ctr">
-                      <a:solidFill>
-                        <a:srgbClr val="BFBFBF"/>
-                      </a:solidFill>
-                      <a:prstDash val="solid"/>
-                      <a:round/>
-                      <a:headEnd type="none" w="med" len="med"/>
-                      <a:tailEnd type="none" w="med" len="med"/>
-                    </a:lnB>
+                  <a:tcPr anchor="ctr" marL="45720" marR="45720" marT="45720" marB="45720">
+                    <a:noFill/>
                   </a:tcPr>
                 </a:tc>
                 <a:tc>
@@ -6396,64 +5333,20 @@
                     <a:bodyPr/>
                     <a:lstStyle/>
                     <a:p>
-                      <a:pPr algn="ctr" indent="0" marL="0">
-                        <a:buNone/>
-                      </a:pPr>
+                      <a:pPr algn="ctr"/>
                       <a:r>
-                        <a:rPr lang="en-US" sz="1200" dirty="0">
+                        <a:rPr sz="1000" b="0">
                           <a:solidFill>
                             <a:srgbClr val="1A1A1A"/>
                           </a:solidFill>
-                          <a:latin typeface="Times New Roman" pitchFamily="34" charset="0"/>
-                          <a:ea typeface="Times New Roman" pitchFamily="34" charset="-122"/>
-                          <a:cs typeface="Times New Roman" pitchFamily="34" charset="-120"/>
+                          <a:latin typeface="Times New Roman"/>
                         </a:rPr>
-                        <a:t xml:space="preserve">6,922</a:t>
+                        <a:t>6,922</a:t>
                       </a:r>
-                      <a:endParaRPr lang="en-US" sz="1200" dirty="0">
-                        <a:latin typeface="Times New Roman" charset="0"/>
-                        <a:ea typeface="Times New Roman" charset="0"/>
-                        <a:cs typeface="Times New Roman" charset="0"/>
-                      </a:endParaRPr>
                     </a:p>
                   </a:txBody>
-                  <a:tcPr marL="91440" marR="91440" marT="45720" marB="45720" anchor="ctr">
-                    <a:lnL w="6350" cap="flat" cmpd="sng" algn="ctr">
-                      <a:solidFill>
-                        <a:srgbClr val="BFBFBF"/>
-                      </a:solidFill>
-                      <a:prstDash val="solid"/>
-                      <a:round/>
-                      <a:headEnd type="none" w="med" len="med"/>
-                      <a:tailEnd type="none" w="med" len="med"/>
-                    </a:lnL>
-                    <a:lnR w="6350" cap="flat" cmpd="sng" algn="ctr">
-                      <a:solidFill>
-                        <a:srgbClr val="BFBFBF"/>
-                      </a:solidFill>
-                      <a:prstDash val="solid"/>
-                      <a:round/>
-                      <a:headEnd type="none" w="med" len="med"/>
-                      <a:tailEnd type="none" w="med" len="med"/>
-                    </a:lnR>
-                    <a:lnT w="6350" cap="flat" cmpd="sng" algn="ctr">
-                      <a:solidFill>
-                        <a:srgbClr val="BFBFBF"/>
-                      </a:solidFill>
-                      <a:prstDash val="solid"/>
-                      <a:round/>
-                      <a:headEnd type="none" w="med" len="med"/>
-                      <a:tailEnd type="none" w="med" len="med"/>
-                    </a:lnT>
-                    <a:lnB w="6350" cap="flat" cmpd="sng" algn="ctr">
-                      <a:solidFill>
-                        <a:srgbClr val="BFBFBF"/>
-                      </a:solidFill>
-                      <a:prstDash val="solid"/>
-                      <a:round/>
-                      <a:headEnd type="none" w="med" len="med"/>
-                      <a:tailEnd type="none" w="med" len="med"/>
-                    </a:lnB>
+                  <a:tcPr anchor="ctr" marL="45720" marR="45720" marT="45720" marB="45720">
+                    <a:noFill/>
                   </a:tcPr>
                 </a:tc>
                 <a:tc>
@@ -6461,64 +5354,20 @@
                     <a:bodyPr/>
                     <a:lstStyle/>
                     <a:p>
-                      <a:pPr algn="ctr" indent="0" marL="0">
-                        <a:buNone/>
-                      </a:pPr>
+                      <a:pPr algn="ctr"/>
                       <a:r>
-                        <a:rPr lang="en-US" sz="1200" dirty="0">
+                        <a:rPr sz="1000" b="0">
                           <a:solidFill>
                             <a:srgbClr val="1A1A1A"/>
                           </a:solidFill>
-                          <a:latin typeface="Times New Roman" pitchFamily="34" charset="0"/>
-                          <a:ea typeface="Times New Roman" pitchFamily="34" charset="-122"/>
-                          <a:cs typeface="Times New Roman" pitchFamily="34" charset="-120"/>
+                          <a:latin typeface="Times New Roman"/>
                         </a:rPr>
-                        <a:t xml:space="preserve">1,095</a:t>
+                        <a:t>0,135</a:t>
                       </a:r>
-                      <a:endParaRPr lang="en-US" sz="1200" dirty="0">
-                        <a:latin typeface="Times New Roman" charset="0"/>
-                        <a:ea typeface="Times New Roman" charset="0"/>
-                        <a:cs typeface="Times New Roman" charset="0"/>
-                      </a:endParaRPr>
                     </a:p>
                   </a:txBody>
-                  <a:tcPr marL="91440" marR="91440" marT="45720" marB="45720" anchor="ctr">
-                    <a:lnL w="6350" cap="flat" cmpd="sng" algn="ctr">
-                      <a:solidFill>
-                        <a:srgbClr val="BFBFBF"/>
-                      </a:solidFill>
-                      <a:prstDash val="solid"/>
-                      <a:round/>
-                      <a:headEnd type="none" w="med" len="med"/>
-                      <a:tailEnd type="none" w="med" len="med"/>
-                    </a:lnL>
-                    <a:lnR w="6350" cap="flat" cmpd="sng" algn="ctr">
-                      <a:solidFill>
-                        <a:srgbClr val="BFBFBF"/>
-                      </a:solidFill>
-                      <a:prstDash val="solid"/>
-                      <a:round/>
-                      <a:headEnd type="none" w="med" len="med"/>
-                      <a:tailEnd type="none" w="med" len="med"/>
-                    </a:lnR>
-                    <a:lnT w="6350" cap="flat" cmpd="sng" algn="ctr">
-                      <a:solidFill>
-                        <a:srgbClr val="BFBFBF"/>
-                      </a:solidFill>
-                      <a:prstDash val="solid"/>
-                      <a:round/>
-                      <a:headEnd type="none" w="med" len="med"/>
-                      <a:tailEnd type="none" w="med" len="med"/>
-                    </a:lnT>
-                    <a:lnB w="6350" cap="flat" cmpd="sng" algn="ctr">
-                      <a:solidFill>
-                        <a:srgbClr val="BFBFBF"/>
-                      </a:solidFill>
-                      <a:prstDash val="solid"/>
-                      <a:round/>
-                      <a:headEnd type="none" w="med" len="med"/>
-                      <a:tailEnd type="none" w="med" len="med"/>
-                    </a:lnB>
+                  <a:tcPr anchor="ctr" marL="45720" marR="45720" marT="45720" marB="45720">
+                    <a:noFill/>
                   </a:tcPr>
                 </a:tc>
                 <a:tc>
@@ -6526,64 +5375,20 @@
                     <a:bodyPr/>
                     <a:lstStyle/>
                     <a:p>
-                      <a:pPr algn="ctr" indent="0" marL="0">
-                        <a:buNone/>
-                      </a:pPr>
+                      <a:pPr algn="ctr"/>
                       <a:r>
-                        <a:rPr lang="en-US" sz="1200" dirty="0">
+                        <a:rPr sz="1000" b="0">
                           <a:solidFill>
                             <a:srgbClr val="1A1A1A"/>
                           </a:solidFill>
-                          <a:latin typeface="Times New Roman" pitchFamily="34" charset="0"/>
-                          <a:ea typeface="Times New Roman" pitchFamily="34" charset="-122"/>
-                          <a:cs typeface="Times New Roman" pitchFamily="34" charset="-120"/>
+                          <a:latin typeface="Times New Roman"/>
                         </a:rPr>
-                        <a:t xml:space="preserve">0,135</a:t>
+                        <a:t>1,095</a:t>
                       </a:r>
-                      <a:endParaRPr lang="en-US" sz="1200" dirty="0">
-                        <a:latin typeface="Times New Roman" charset="0"/>
-                        <a:ea typeface="Times New Roman" charset="0"/>
-                        <a:cs typeface="Times New Roman" charset="0"/>
-                      </a:endParaRPr>
                     </a:p>
                   </a:txBody>
-                  <a:tcPr marL="91440" marR="91440" marT="45720" marB="45720" anchor="ctr">
-                    <a:lnL w="6350" cap="flat" cmpd="sng" algn="ctr">
-                      <a:solidFill>
-                        <a:srgbClr val="BFBFBF"/>
-                      </a:solidFill>
-                      <a:prstDash val="solid"/>
-                      <a:round/>
-                      <a:headEnd type="none" w="med" len="med"/>
-                      <a:tailEnd type="none" w="med" len="med"/>
-                    </a:lnL>
-                    <a:lnR w="6350" cap="flat" cmpd="sng" algn="ctr">
-                      <a:solidFill>
-                        <a:srgbClr val="BFBFBF"/>
-                      </a:solidFill>
-                      <a:prstDash val="solid"/>
-                      <a:round/>
-                      <a:headEnd type="none" w="med" len="med"/>
-                      <a:tailEnd type="none" w="med" len="med"/>
-                    </a:lnR>
-                    <a:lnT w="6350" cap="flat" cmpd="sng" algn="ctr">
-                      <a:solidFill>
-                        <a:srgbClr val="BFBFBF"/>
-                      </a:solidFill>
-                      <a:prstDash val="solid"/>
-                      <a:round/>
-                      <a:headEnd type="none" w="med" len="med"/>
-                      <a:tailEnd type="none" w="med" len="med"/>
-                    </a:lnT>
-                    <a:lnB w="6350" cap="flat" cmpd="sng" algn="ctr">
-                      <a:solidFill>
-                        <a:srgbClr val="BFBFBF"/>
-                      </a:solidFill>
-                      <a:prstDash val="solid"/>
-                      <a:round/>
-                      <a:headEnd type="none" w="med" len="med"/>
-                      <a:tailEnd type="none" w="med" len="med"/>
-                    </a:lnB>
+                  <a:tcPr anchor="ctr" marL="45720" marR="45720" marT="45720" marB="45720">
+                    <a:noFill/>
                   </a:tcPr>
                 </a:tc>
                 <a:tc>
@@ -6591,64 +5396,20 @@
                     <a:bodyPr/>
                     <a:lstStyle/>
                     <a:p>
-                      <a:pPr algn="ctr" indent="0" marL="0">
-                        <a:buNone/>
-                      </a:pPr>
+                      <a:pPr algn="ctr"/>
                       <a:r>
-                        <a:rPr lang="en-US" sz="1200" b="1" dirty="0">
+                        <a:rPr sz="1000" b="1">
                           <a:solidFill>
                             <a:srgbClr val="1A1A1A"/>
                           </a:solidFill>
-                          <a:latin typeface="Times New Roman" pitchFamily="34" charset="0"/>
-                          <a:ea typeface="Times New Roman" pitchFamily="34" charset="-122"/>
-                          <a:cs typeface="Times New Roman" pitchFamily="34" charset="-120"/>
+                          <a:latin typeface="Times New Roman"/>
                         </a:rPr>
-                        <a:t xml:space="preserve">23,10</a:t>
+                        <a:t>0,0478</a:t>
                       </a:r>
-                      <a:endParaRPr lang="en-US" sz="1200" dirty="0">
-                        <a:latin typeface="Times New Roman" charset="0"/>
-                        <a:ea typeface="Times New Roman" charset="0"/>
-                        <a:cs typeface="Times New Roman" charset="0"/>
-                      </a:endParaRPr>
                     </a:p>
                   </a:txBody>
-                  <a:tcPr marL="91440" marR="91440" marT="45720" marB="45720" anchor="ctr">
-                    <a:lnL w="6350" cap="flat" cmpd="sng" algn="ctr">
-                      <a:solidFill>
-                        <a:srgbClr val="BFBFBF"/>
-                      </a:solidFill>
-                      <a:prstDash val="solid"/>
-                      <a:round/>
-                      <a:headEnd type="none" w="med" len="med"/>
-                      <a:tailEnd type="none" w="med" len="med"/>
-                    </a:lnL>
-                    <a:lnR w="6350" cap="flat" cmpd="sng" algn="ctr">
-                      <a:solidFill>
-                        <a:srgbClr val="BFBFBF"/>
-                      </a:solidFill>
-                      <a:prstDash val="solid"/>
-                      <a:round/>
-                      <a:headEnd type="none" w="med" len="med"/>
-                      <a:tailEnd type="none" w="med" len="med"/>
-                    </a:lnR>
-                    <a:lnT w="6350" cap="flat" cmpd="sng" algn="ctr">
-                      <a:solidFill>
-                        <a:srgbClr val="BFBFBF"/>
-                      </a:solidFill>
-                      <a:prstDash val="solid"/>
-                      <a:round/>
-                      <a:headEnd type="none" w="med" len="med"/>
-                      <a:tailEnd type="none" w="med" len="med"/>
-                    </a:lnT>
-                    <a:lnB w="6350" cap="flat" cmpd="sng" algn="ctr">
-                      <a:solidFill>
-                        <a:srgbClr val="BFBFBF"/>
-                      </a:solidFill>
-                      <a:prstDash val="solid"/>
-                      <a:round/>
-                      <a:headEnd type="none" w="med" len="med"/>
-                      <a:tailEnd type="none" w="med" len="med"/>
-                    </a:lnB>
+                  <a:tcPr anchor="ctr" marL="45720" marR="45720" marT="45720" marB="45720">
+                    <a:noFill/>
                   </a:tcPr>
                 </a:tc>
                 <a:tc>
@@ -6656,64 +5417,104 @@
                     <a:bodyPr/>
                     <a:lstStyle/>
                     <a:p>
-                      <a:pPr algn="ctr" indent="0" marL="0">
-                        <a:buNone/>
-                      </a:pPr>
+                      <a:pPr algn="ctr"/>
                       <a:r>
-                        <a:rPr lang="en-US" sz="1200" dirty="0">
+                        <a:rPr sz="1000" b="1">
                           <a:solidFill>
                             <a:srgbClr val="1A1A1A"/>
                           </a:solidFill>
-                          <a:latin typeface="Times New Roman" pitchFamily="34" charset="0"/>
-                          <a:ea typeface="Times New Roman" pitchFamily="34" charset="-122"/>
-                          <a:cs typeface="Times New Roman" pitchFamily="34" charset="-120"/>
+                          <a:latin typeface="Times New Roman"/>
                         </a:rPr>
-                        <a:t xml:space="preserve">0,564</a:t>
+                        <a:t>23,10</a:t>
                       </a:r>
-                      <a:endParaRPr lang="en-US" sz="1200" dirty="0">
-                        <a:latin typeface="Times New Roman" charset="0"/>
-                        <a:ea typeface="Times New Roman" charset="0"/>
-                        <a:cs typeface="Times New Roman" charset="0"/>
-                      </a:endParaRPr>
                     </a:p>
                   </a:txBody>
-                  <a:tcPr marL="91440" marR="91440" marT="45720" marB="45720" anchor="ctr">
-                    <a:lnL w="6350" cap="flat" cmpd="sng" algn="ctr">
-                      <a:solidFill>
-                        <a:srgbClr val="BFBFBF"/>
-                      </a:solidFill>
-                      <a:prstDash val="solid"/>
-                      <a:round/>
-                      <a:headEnd type="none" w="med" len="med"/>
-                      <a:tailEnd type="none" w="med" len="med"/>
-                    </a:lnL>
-                    <a:lnR w="6350" cap="flat" cmpd="sng" algn="ctr">
-                      <a:solidFill>
-                        <a:srgbClr val="BFBFBF"/>
-                      </a:solidFill>
-                      <a:prstDash val="solid"/>
-                      <a:round/>
-                      <a:headEnd type="none" w="med" len="med"/>
-                      <a:tailEnd type="none" w="med" len="med"/>
-                    </a:lnR>
-                    <a:lnT w="6350" cap="flat" cmpd="sng" algn="ctr">
-                      <a:solidFill>
-                        <a:srgbClr val="BFBFBF"/>
-                      </a:solidFill>
-                      <a:prstDash val="solid"/>
-                      <a:round/>
-                      <a:headEnd type="none" w="med" len="med"/>
-                      <a:tailEnd type="none" w="med" len="med"/>
-                    </a:lnT>
-                    <a:lnB w="6350" cap="flat" cmpd="sng" algn="ctr">
-                      <a:solidFill>
-                        <a:srgbClr val="BFBFBF"/>
-                      </a:solidFill>
-                      <a:prstDash val="solid"/>
-                      <a:round/>
-                      <a:headEnd type="none" w="med" len="med"/>
-                      <a:tailEnd type="none" w="med" len="med"/>
-                    </a:lnB>
+                  <a:tcPr anchor="ctr" marL="45720" marR="45720" marT="45720" marB="45720">
+                    <a:noFill/>
+                  </a:tcPr>
+                </a:tc>
+                <a:tc>
+                  <a:txBody>
+                    <a:bodyPr/>
+                    <a:lstStyle/>
+                    <a:p>
+                      <a:pPr algn="ctr"/>
+                      <a:r>
+                        <a:rPr sz="1000" b="0">
+                          <a:solidFill>
+                            <a:srgbClr val="1A1A1A"/>
+                          </a:solidFill>
+                          <a:latin typeface="Times New Roman"/>
+                        </a:rPr>
+                        <a:t>0,787</a:t>
+                      </a:r>
+                    </a:p>
+                  </a:txBody>
+                  <a:tcPr anchor="ctr" marL="45720" marR="45720" marT="45720" marB="45720">
+                    <a:noFill/>
+                  </a:tcPr>
+                </a:tc>
+                <a:tc>
+                  <a:txBody>
+                    <a:bodyPr/>
+                    <a:lstStyle/>
+                    <a:p>
+                      <a:pPr algn="ctr"/>
+                      <a:r>
+                        <a:rPr sz="1000" b="0">
+                          <a:solidFill>
+                            <a:srgbClr val="1A1A1A"/>
+                          </a:solidFill>
+                          <a:latin typeface="Times New Roman"/>
+                        </a:rPr>
+                        <a:t>0,493</a:t>
+                      </a:r>
+                    </a:p>
+                  </a:txBody>
+                  <a:tcPr anchor="ctr" marL="45720" marR="45720" marT="45720" marB="45720">
+                    <a:noFill/>
+                  </a:tcPr>
+                </a:tc>
+                <a:tc>
+                  <a:txBody>
+                    <a:bodyPr/>
+                    <a:lstStyle/>
+                    <a:p>
+                      <a:pPr algn="ctr"/>
+                      <a:r>
+                        <a:rPr sz="1000" b="0">
+                          <a:solidFill>
+                            <a:srgbClr val="1A1A1A"/>
+                          </a:solidFill>
+                          <a:latin typeface="Times New Roman"/>
+                        </a:rPr>
+                        <a:t>0,564</a:t>
+                      </a:r>
+                    </a:p>
+                  </a:txBody>
+                  <a:tcPr anchor="ctr" marL="45720" marR="45720" marT="45720" marB="45720">
+                    <a:noFill/>
+                  </a:tcPr>
+                </a:tc>
+                <a:tc>
+                  <a:txBody>
+                    <a:bodyPr/>
+                    <a:lstStyle/>
+                    <a:p>
+                      <a:pPr algn="ctr"/>
+                      <a:r>
+                        <a:rPr sz="1000" b="0">
+                          <a:solidFill>
+                            <a:srgbClr val="1A1A1A"/>
+                          </a:solidFill>
+                          <a:latin typeface="Times New Roman"/>
+                        </a:rPr>
+                        <a:t>16,87</a:t>
+                      </a:r>
+                    </a:p>
+                  </a:txBody>
+                  <a:tcPr anchor="ctr" marL="45720" marR="45720" marT="45720" marB="45720">
+                    <a:noFill/>
                   </a:tcPr>
                 </a:tc>
               </a:tr>
@@ -6723,64 +5524,20 @@
                     <a:bodyPr/>
                     <a:lstStyle/>
                     <a:p>
-                      <a:pPr algn="l" indent="0" marL="0">
-                        <a:buNone/>
-                      </a:pPr>
+                      <a:pPr algn="l"/>
                       <a:r>
-                        <a:rPr lang="en-US" sz="1200" b="1" dirty="0">
+                        <a:rPr sz="1000" b="1">
                           <a:solidFill>
-                            <a:srgbClr val="8B1A1A"/>
+                            <a:srgbClr val="1A1A1A"/>
                           </a:solidFill>
-                          <a:latin typeface="Times New Roman" pitchFamily="34" charset="0"/>
-                          <a:ea typeface="Times New Roman" pitchFamily="34" charset="-122"/>
-                          <a:cs typeface="Times New Roman" pitchFamily="34" charset="-120"/>
+                          <a:latin typeface="Times New Roman"/>
                         </a:rPr>
-                        <a:t>Propuesta Novedosa (r=25; m=0,30)</a:t>
+                        <a:t>Propuesta (r=25; m=0,30)</a:t>
                       </a:r>
-                      <a:endParaRPr lang="en-US" sz="1200" dirty="0">
-                        <a:latin typeface="Times New Roman" charset="0"/>
-                        <a:ea typeface="Times New Roman" charset="0"/>
-                        <a:cs typeface="Times New Roman" charset="0"/>
-                      </a:endParaRPr>
                     </a:p>
                   </a:txBody>
-                  <a:tcPr marL="91440" marR="91440" marT="45720" marB="45720" anchor="ctr">
-                    <a:lnL w="6350" cap="flat" cmpd="sng" algn="ctr">
-                      <a:solidFill>
-                        <a:srgbClr val="BFBFBF"/>
-                      </a:solidFill>
-                      <a:prstDash val="solid"/>
-                      <a:round/>
-                      <a:headEnd type="none" w="med" len="med"/>
-                      <a:tailEnd type="none" w="med" len="med"/>
-                    </a:lnL>
-                    <a:lnR w="6350" cap="flat" cmpd="sng" algn="ctr">
-                      <a:solidFill>
-                        <a:srgbClr val="BFBFBF"/>
-                      </a:solidFill>
-                      <a:prstDash val="solid"/>
-                      <a:round/>
-                      <a:headEnd type="none" w="med" len="med"/>
-                      <a:tailEnd type="none" w="med" len="med"/>
-                    </a:lnR>
-                    <a:lnT w="6350" cap="flat" cmpd="sng" algn="ctr">
-                      <a:solidFill>
-                        <a:srgbClr val="BFBFBF"/>
-                      </a:solidFill>
-                      <a:prstDash val="solid"/>
-                      <a:round/>
-                      <a:headEnd type="none" w="med" len="med"/>
-                      <a:tailEnd type="none" w="med" len="med"/>
-                    </a:lnT>
-                    <a:lnB w="6350" cap="flat" cmpd="sng" algn="ctr">
-                      <a:solidFill>
-                        <a:srgbClr val="BFBFBF"/>
-                      </a:solidFill>
-                      <a:prstDash val="solid"/>
-                      <a:round/>
-                      <a:headEnd type="none" w="med" len="med"/>
-                      <a:tailEnd type="none" w="med" len="med"/>
-                    </a:lnB>
+                  <a:tcPr anchor="ctr" marL="45720" marR="45720" marT="45720" marB="45720">
+                    <a:noFill/>
                   </a:tcPr>
                 </a:tc>
                 <a:tc>
@@ -6788,64 +5545,20 @@
                     <a:bodyPr/>
                     <a:lstStyle/>
                     <a:p>
-                      <a:pPr algn="ctr" indent="0" marL="0">
-                        <a:buNone/>
-                      </a:pPr>
+                      <a:pPr algn="ctr"/>
                       <a:r>
-                        <a:rPr lang="en-US" sz="1200" b="1" dirty="0">
+                        <a:rPr sz="1000" b="1">
                           <a:solidFill>
-                            <a:srgbClr val="8B1A1A"/>
+                            <a:srgbClr val="1A1A1A"/>
                           </a:solidFill>
-                          <a:latin typeface="Times New Roman" pitchFamily="34" charset="0"/>
-                          <a:ea typeface="Times New Roman" pitchFamily="34" charset="-122"/>
-                          <a:cs typeface="Times New Roman" pitchFamily="34" charset="-120"/>
+                          <a:latin typeface="Times New Roman"/>
                         </a:rPr>
-                        <a:t xml:space="preserve">6,986</a:t>
+                        <a:t>6,986</a:t>
                       </a:r>
-                      <a:endParaRPr lang="en-US" sz="1200" dirty="0">
-                        <a:latin typeface="Times New Roman" charset="0"/>
-                        <a:ea typeface="Times New Roman" charset="0"/>
-                        <a:cs typeface="Times New Roman" charset="0"/>
-                      </a:endParaRPr>
                     </a:p>
                   </a:txBody>
-                  <a:tcPr marL="91440" marR="91440" marT="45720" marB="45720" anchor="ctr">
-                    <a:lnL w="6350" cap="flat" cmpd="sng" algn="ctr">
-                      <a:solidFill>
-                        <a:srgbClr val="BFBFBF"/>
-                      </a:solidFill>
-                      <a:prstDash val="solid"/>
-                      <a:round/>
-                      <a:headEnd type="none" w="med" len="med"/>
-                      <a:tailEnd type="none" w="med" len="med"/>
-                    </a:lnL>
-                    <a:lnR w="6350" cap="flat" cmpd="sng" algn="ctr">
-                      <a:solidFill>
-                        <a:srgbClr val="BFBFBF"/>
-                      </a:solidFill>
-                      <a:prstDash val="solid"/>
-                      <a:round/>
-                      <a:headEnd type="none" w="med" len="med"/>
-                      <a:tailEnd type="none" w="med" len="med"/>
-                    </a:lnR>
-                    <a:lnT w="6350" cap="flat" cmpd="sng" algn="ctr">
-                      <a:solidFill>
-                        <a:srgbClr val="BFBFBF"/>
-                      </a:solidFill>
-                      <a:prstDash val="solid"/>
-                      <a:round/>
-                      <a:headEnd type="none" w="med" len="med"/>
-                      <a:tailEnd type="none" w="med" len="med"/>
-                    </a:lnT>
-                    <a:lnB w="6350" cap="flat" cmpd="sng" algn="ctr">
-                      <a:solidFill>
-                        <a:srgbClr val="BFBFBF"/>
-                      </a:solidFill>
-                      <a:prstDash val="solid"/>
-                      <a:round/>
-                      <a:headEnd type="none" w="med" len="med"/>
-                      <a:tailEnd type="none" w="med" len="med"/>
-                    </a:lnB>
+                  <a:tcPr anchor="ctr" marL="45720" marR="45720" marT="45720" marB="45720">
+                    <a:noFill/>
                   </a:tcPr>
                 </a:tc>
                 <a:tc>
@@ -6853,64 +5566,20 @@
                     <a:bodyPr/>
                     <a:lstStyle/>
                     <a:p>
-                      <a:pPr algn="ctr" indent="0" marL="0">
-                        <a:buNone/>
-                      </a:pPr>
+                      <a:pPr algn="ctr"/>
                       <a:r>
-                        <a:rPr lang="en-US" sz="1200" b="1" dirty="0">
+                        <a:rPr sz="1000" b="0">
                           <a:solidFill>
-                            <a:srgbClr val="8B1A1A"/>
+                            <a:srgbClr val="1A1A1A"/>
                           </a:solidFill>
-                          <a:latin typeface="Times New Roman" pitchFamily="34" charset="0"/>
-                          <a:ea typeface="Times New Roman" pitchFamily="34" charset="-122"/>
-                          <a:cs typeface="Times New Roman" pitchFamily="34" charset="-120"/>
+                          <a:latin typeface="Times New Roman"/>
                         </a:rPr>
-                        <a:t>1,105</a:t>
+                        <a:t>0,144</a:t>
                       </a:r>
-                      <a:endParaRPr lang="en-US" sz="1200" dirty="0">
-                        <a:latin typeface="Times New Roman" charset="0"/>
-                        <a:ea typeface="Times New Roman" charset="0"/>
-                        <a:cs typeface="Times New Roman" charset="0"/>
-                      </a:endParaRPr>
                     </a:p>
                   </a:txBody>
-                  <a:tcPr marL="91440" marR="91440" marT="45720" marB="45720" anchor="ctr">
-                    <a:lnL w="6350" cap="flat" cmpd="sng" algn="ctr">
-                      <a:solidFill>
-                        <a:srgbClr val="BFBFBF"/>
-                      </a:solidFill>
-                      <a:prstDash val="solid"/>
-                      <a:round/>
-                      <a:headEnd type="none" w="med" len="med"/>
-                      <a:tailEnd type="none" w="med" len="med"/>
-                    </a:lnL>
-                    <a:lnR w="6350" cap="flat" cmpd="sng" algn="ctr">
-                      <a:solidFill>
-                        <a:srgbClr val="BFBFBF"/>
-                      </a:solidFill>
-                      <a:prstDash val="solid"/>
-                      <a:round/>
-                      <a:headEnd type="none" w="med" len="med"/>
-                      <a:tailEnd type="none" w="med" len="med"/>
-                    </a:lnR>
-                    <a:lnT w="6350" cap="flat" cmpd="sng" algn="ctr">
-                      <a:solidFill>
-                        <a:srgbClr val="BFBFBF"/>
-                      </a:solidFill>
-                      <a:prstDash val="solid"/>
-                      <a:round/>
-                      <a:headEnd type="none" w="med" len="med"/>
-                      <a:tailEnd type="none" w="med" len="med"/>
-                    </a:lnT>
-                    <a:lnB w="6350" cap="flat" cmpd="sng" algn="ctr">
-                      <a:solidFill>
-                        <a:srgbClr val="BFBFBF"/>
-                      </a:solidFill>
-                      <a:prstDash val="solid"/>
-                      <a:round/>
-                      <a:headEnd type="none" w="med" len="med"/>
-                      <a:tailEnd type="none" w="med" len="med"/>
-                    </a:lnB>
+                  <a:tcPr anchor="ctr" marL="45720" marR="45720" marT="45720" marB="45720">
+                    <a:noFill/>
                   </a:tcPr>
                 </a:tc>
                 <a:tc>
@@ -6918,64 +5587,20 @@
                     <a:bodyPr/>
                     <a:lstStyle/>
                     <a:p>
-                      <a:pPr algn="ctr" indent="0" marL="0">
-                        <a:buNone/>
-                      </a:pPr>
+                      <a:pPr algn="ctr"/>
                       <a:r>
-                        <a:rPr lang="en-US" sz="1200" dirty="0">
+                        <a:rPr sz="1000" b="1">
                           <a:solidFill>
                             <a:srgbClr val="1A1A1A"/>
                           </a:solidFill>
-                          <a:latin typeface="Times New Roman" pitchFamily="34" charset="0"/>
-                          <a:ea typeface="Times New Roman" pitchFamily="34" charset="-122"/>
-                          <a:cs typeface="Times New Roman" pitchFamily="34" charset="-120"/>
+                          <a:latin typeface="Times New Roman"/>
                         </a:rPr>
-                        <a:t xml:space="preserve">0,144</a:t>
+                        <a:t>1,105</a:t>
                       </a:r>
-                      <a:endParaRPr lang="en-US" sz="1200" dirty="0">
-                        <a:latin typeface="Times New Roman" charset="0"/>
-                        <a:ea typeface="Times New Roman" charset="0"/>
-                        <a:cs typeface="Times New Roman" charset="0"/>
-                      </a:endParaRPr>
                     </a:p>
                   </a:txBody>
-                  <a:tcPr marL="91440" marR="91440" marT="45720" marB="45720" anchor="ctr">
-                    <a:lnL w="6350" cap="flat" cmpd="sng" algn="ctr">
-                      <a:solidFill>
-                        <a:srgbClr val="BFBFBF"/>
-                      </a:solidFill>
-                      <a:prstDash val="solid"/>
-                      <a:round/>
-                      <a:headEnd type="none" w="med" len="med"/>
-                      <a:tailEnd type="none" w="med" len="med"/>
-                    </a:lnL>
-                    <a:lnR w="6350" cap="flat" cmpd="sng" algn="ctr">
-                      <a:solidFill>
-                        <a:srgbClr val="BFBFBF"/>
-                      </a:solidFill>
-                      <a:prstDash val="solid"/>
-                      <a:round/>
-                      <a:headEnd type="none" w="med" len="med"/>
-                      <a:tailEnd type="none" w="med" len="med"/>
-                    </a:lnR>
-                    <a:lnT w="6350" cap="flat" cmpd="sng" algn="ctr">
-                      <a:solidFill>
-                        <a:srgbClr val="BFBFBF"/>
-                      </a:solidFill>
-                      <a:prstDash val="solid"/>
-                      <a:round/>
-                      <a:headEnd type="none" w="med" len="med"/>
-                      <a:tailEnd type="none" w="med" len="med"/>
-                    </a:lnT>
-                    <a:lnB w="6350" cap="flat" cmpd="sng" algn="ctr">
-                      <a:solidFill>
-                        <a:srgbClr val="BFBFBF"/>
-                      </a:solidFill>
-                      <a:prstDash val="solid"/>
-                      <a:round/>
-                      <a:headEnd type="none" w="med" len="med"/>
-                      <a:tailEnd type="none" w="med" len="med"/>
-                    </a:lnB>
+                  <a:tcPr anchor="ctr" marL="45720" marR="45720" marT="45720" marB="45720">
+                    <a:noFill/>
                   </a:tcPr>
                 </a:tc>
                 <a:tc>
@@ -6983,64 +5608,20 @@
                     <a:bodyPr/>
                     <a:lstStyle/>
                     <a:p>
-                      <a:pPr algn="ctr" indent="0" marL="0">
-                        <a:buNone/>
-                      </a:pPr>
+                      <a:pPr algn="ctr"/>
                       <a:r>
-                        <a:rPr lang="en-US" sz="1200" dirty="0">
+                        <a:rPr sz="1000" b="0">
                           <a:solidFill>
                             <a:srgbClr val="1A1A1A"/>
                           </a:solidFill>
-                          <a:latin typeface="Times New Roman" pitchFamily="34" charset="0"/>
-                          <a:ea typeface="Times New Roman" pitchFamily="34" charset="-122"/>
-                          <a:cs typeface="Times New Roman" pitchFamily="34" charset="-120"/>
+                          <a:latin typeface="Times New Roman"/>
                         </a:rPr>
-                        <a:t xml:space="preserve">17,44</a:t>
+                        <a:t>0,0355</a:t>
                       </a:r>
-                      <a:endParaRPr lang="en-US" sz="1200" dirty="0">
-                        <a:latin typeface="Times New Roman" charset="0"/>
-                        <a:ea typeface="Times New Roman" charset="0"/>
-                        <a:cs typeface="Times New Roman" charset="0"/>
-                      </a:endParaRPr>
                     </a:p>
                   </a:txBody>
-                  <a:tcPr marL="91440" marR="91440" marT="45720" marB="45720" anchor="ctr">
-                    <a:lnL w="6350" cap="flat" cmpd="sng" algn="ctr">
-                      <a:solidFill>
-                        <a:srgbClr val="BFBFBF"/>
-                      </a:solidFill>
-                      <a:prstDash val="solid"/>
-                      <a:round/>
-                      <a:headEnd type="none" w="med" len="med"/>
-                      <a:tailEnd type="none" w="med" len="med"/>
-                    </a:lnL>
-                    <a:lnR w="6350" cap="flat" cmpd="sng" algn="ctr">
-                      <a:solidFill>
-                        <a:srgbClr val="BFBFBF"/>
-                      </a:solidFill>
-                      <a:prstDash val="solid"/>
-                      <a:round/>
-                      <a:headEnd type="none" w="med" len="med"/>
-                      <a:tailEnd type="none" w="med" len="med"/>
-                    </a:lnR>
-                    <a:lnT w="6350" cap="flat" cmpd="sng" algn="ctr">
-                      <a:solidFill>
-                        <a:srgbClr val="BFBFBF"/>
-                      </a:solidFill>
-                      <a:prstDash val="solid"/>
-                      <a:round/>
-                      <a:headEnd type="none" w="med" len="med"/>
-                      <a:tailEnd type="none" w="med" len="med"/>
-                    </a:lnT>
-                    <a:lnB w="6350" cap="flat" cmpd="sng" algn="ctr">
-                      <a:solidFill>
-                        <a:srgbClr val="BFBFBF"/>
-                      </a:solidFill>
-                      <a:prstDash val="solid"/>
-                      <a:round/>
-                      <a:headEnd type="none" w="med" len="med"/>
-                      <a:tailEnd type="none" w="med" len="med"/>
-                    </a:lnB>
+                  <a:tcPr anchor="ctr" marL="45720" marR="45720" marT="45720" marB="45720">
+                    <a:noFill/>
                   </a:tcPr>
                 </a:tc>
                 <a:tc>
@@ -7048,64 +5629,104 @@
                     <a:bodyPr/>
                     <a:lstStyle/>
                     <a:p>
-                      <a:pPr algn="ctr" indent="0" marL="0">
-                        <a:buNone/>
-                      </a:pPr>
+                      <a:pPr algn="ctr"/>
                       <a:r>
-                        <a:rPr lang="en-US" sz="1200" dirty="0">
+                        <a:rPr sz="1000" b="0">
                           <a:solidFill>
                             <a:srgbClr val="1A1A1A"/>
                           </a:solidFill>
-                          <a:latin typeface="Times New Roman" pitchFamily="34" charset="0"/>
-                          <a:ea typeface="Times New Roman" pitchFamily="34" charset="-122"/>
-                          <a:cs typeface="Times New Roman" pitchFamily="34" charset="-120"/>
+                          <a:latin typeface="Times New Roman"/>
                         </a:rPr>
-                        <a:t xml:space="preserve">0,658</a:t>
+                        <a:t>17,44</a:t>
                       </a:r>
-                      <a:endParaRPr lang="en-US" sz="1200" dirty="0">
-                        <a:latin typeface="Times New Roman" charset="0"/>
-                        <a:ea typeface="Times New Roman" charset="0"/>
-                        <a:cs typeface="Times New Roman" charset="0"/>
-                      </a:endParaRPr>
                     </a:p>
                   </a:txBody>
-                  <a:tcPr marL="91440" marR="91440" marT="45720" marB="45720" anchor="ctr">
-                    <a:lnL w="6350" cap="flat" cmpd="sng" algn="ctr">
-                      <a:solidFill>
-                        <a:srgbClr val="BFBFBF"/>
-                      </a:solidFill>
-                      <a:prstDash val="solid"/>
-                      <a:round/>
-                      <a:headEnd type="none" w="med" len="med"/>
-                      <a:tailEnd type="none" w="med" len="med"/>
-                    </a:lnL>
-                    <a:lnR w="6350" cap="flat" cmpd="sng" algn="ctr">
-                      <a:solidFill>
-                        <a:srgbClr val="BFBFBF"/>
-                      </a:solidFill>
-                      <a:prstDash val="solid"/>
-                      <a:round/>
-                      <a:headEnd type="none" w="med" len="med"/>
-                      <a:tailEnd type="none" w="med" len="med"/>
-                    </a:lnR>
-                    <a:lnT w="6350" cap="flat" cmpd="sng" algn="ctr">
-                      <a:solidFill>
-                        <a:srgbClr val="BFBFBF"/>
-                      </a:solidFill>
-                      <a:prstDash val="solid"/>
-                      <a:round/>
-                      <a:headEnd type="none" w="med" len="med"/>
-                      <a:tailEnd type="none" w="med" len="med"/>
-                    </a:lnT>
-                    <a:lnB w="6350" cap="flat" cmpd="sng" algn="ctr">
-                      <a:solidFill>
-                        <a:srgbClr val="BFBFBF"/>
-                      </a:solidFill>
-                      <a:prstDash val="solid"/>
-                      <a:round/>
-                      <a:headEnd type="none" w="med" len="med"/>
-                      <a:tailEnd type="none" w="med" len="med"/>
-                    </a:lnB>
+                  <a:tcPr anchor="ctr" marL="45720" marR="45720" marT="45720" marB="45720">
+                    <a:noFill/>
+                  </a:tcPr>
+                </a:tc>
+                <a:tc>
+                  <a:txBody>
+                    <a:bodyPr/>
+                    <a:lstStyle/>
+                    <a:p>
+                      <a:pPr algn="ctr"/>
+                      <a:r>
+                        <a:rPr sz="1000" b="0">
+                          <a:solidFill>
+                            <a:srgbClr val="1A1A1A"/>
+                          </a:solidFill>
+                          <a:latin typeface="Times New Roman"/>
+                        </a:rPr>
+                        <a:t>0,897</a:t>
+                      </a:r>
+                    </a:p>
+                  </a:txBody>
+                  <a:tcPr anchor="ctr" marL="45720" marR="45720" marT="45720" marB="45720">
+                    <a:noFill/>
+                  </a:tcPr>
+                </a:tc>
+                <a:tc>
+                  <a:txBody>
+                    <a:bodyPr/>
+                    <a:lstStyle/>
+                    <a:p>
+                      <a:pPr algn="ctr"/>
+                      <a:r>
+                        <a:rPr sz="1000" b="0">
+                          <a:solidFill>
+                            <a:srgbClr val="1A1A1A"/>
+                          </a:solidFill>
+                          <a:latin typeface="Times New Roman"/>
+                        </a:rPr>
+                        <a:t>0,600</a:t>
+                      </a:r>
+                    </a:p>
+                  </a:txBody>
+                  <a:tcPr anchor="ctr" marL="45720" marR="45720" marT="45720" marB="45720">
+                    <a:noFill/>
+                  </a:tcPr>
+                </a:tc>
+                <a:tc>
+                  <a:txBody>
+                    <a:bodyPr/>
+                    <a:lstStyle/>
+                    <a:p>
+                      <a:pPr algn="ctr"/>
+                      <a:r>
+                        <a:rPr sz="1000" b="0">
+                          <a:solidFill>
+                            <a:srgbClr val="1A1A1A"/>
+                          </a:solidFill>
+                          <a:latin typeface="Times New Roman"/>
+                        </a:rPr>
+                        <a:t>0,658</a:t>
+                      </a:r>
+                    </a:p>
+                  </a:txBody>
+                  <a:tcPr anchor="ctr" marL="45720" marR="45720" marT="45720" marB="45720">
+                    <a:noFill/>
+                  </a:tcPr>
+                </a:tc>
+                <a:tc>
+                  <a:txBody>
+                    <a:bodyPr/>
+                    <a:lstStyle/>
+                    <a:p>
+                      <a:pPr algn="ctr"/>
+                      <a:r>
+                        <a:rPr sz="1000" b="0">
+                          <a:solidFill>
+                            <a:srgbClr val="1A1A1A"/>
+                          </a:solidFill>
+                          <a:latin typeface="Times New Roman"/>
+                        </a:rPr>
+                        <a:t>16,84</a:t>
+                      </a:r>
+                    </a:p>
+                  </a:txBody>
+                  <a:tcPr anchor="ctr" marL="45720" marR="45720" marT="45720" marB="45720">
+                    <a:noFill/>
                   </a:tcPr>
                 </a:tc>
               </a:tr>
@@ -7115,65 +5736,71 @@
       </p:graphicFrame>
       <p:sp>
         <p:nvSpPr>
-          <p:cNvPr id="5" name="Text 2"/>
-          <p:cNvSpPr/>
+          <p:cNvPr id="7" name="Text 3"/>
+          <p:cNvSpPr txBox="1"/>
           <p:nvPr/>
         </p:nvSpPr>
         <p:spPr>
           <a:xfrm>
-            <a:off x="457200" y="3794760"/>
-            <a:ext cx="8229600" cy="1097280"/>
+            <a:off x="2457200" y="800100"/>
+            <a:ext cx="3460885" cy="228600"/>
           </a:xfrm>
           <a:prstGeom prst="rect">
             <a:avLst/>
           </a:prstGeom>
           <a:noFill/>
-          <a:ln/>
         </p:spPr>
         <p:txBody>
-          <a:bodyPr wrap="square" lIns="0" tIns="0" rIns="0" bIns="0" rtlCol="0" anchor="t"/>
-          <a:lstStyle/>
-          <a:p>
-            <a:pPr marL="177800" indent="-177800">
-              <a:spcAft>
-                <a:spcPts val="500"/>
-              </a:spcAft>
-              <a:buSzPct val="100000"/>
-              <a:buChar char="•"/>
-            </a:pPr>
-            <a:r>
-              <a:rPr lang="en-US" sz="1250" dirty="0">
-                <a:solidFill>
-                  <a:srgbClr val="1A1A1A"/>
-                </a:solidFill>
-                <a:latin typeface="Times New Roman" pitchFamily="34" charset="0"/>
-                <a:ea typeface="Times New Roman" pitchFamily="34" charset="-122"/>
-                <a:cs typeface="Times New Roman" pitchFamily="34" charset="-120"/>
-              </a:rPr>
-              <a:t xml:space="preserve">La propuesta lidera la entropía (6,986) y con ella la eficiencia de fusión (1,105), que es esa misma entropía reescalada por una constante por escena y no una dimensión independiente; queda segunda en contraste (0,144), gradiente medio (0,0355) y frecuencia espacial (17,44), detrás del Top-Hat clásico en las dos últimas.</a:t>
-            </a:r>
-            <a:endParaRPr lang="en-US" sz="1250" dirty="0"/>
-          </a:p>
-          <a:p>
-            <a:pPr marL="177800" indent="-177800">
-              <a:spcAft>
-                <a:spcPts val="500"/>
-              </a:spcAft>
-              <a:buSzPct val="100000"/>
-              <a:buChar char="•"/>
-            </a:pPr>
-            <a:r>
-              <a:rPr lang="en-US" sz="1250" dirty="0">
-                <a:solidFill>
-                  <a:srgbClr val="1A1A1A"/>
-                </a:solidFill>
-                <a:latin typeface="Times New Roman" pitchFamily="34" charset="0"/>
-                <a:ea typeface="Times New Roman" pitchFamily="34" charset="-122"/>
-                <a:cs typeface="Times New Roman" pitchFamily="34" charset="-120"/>
-              </a:rPr>
-              <a:t xml:space="preserve">Cede las cuatro métricas de fidelidad, lideradas por los multiescala: MI_vis y MI_ir por la pirámide de Laplace, SSIM (0,658) por DTCWT y PSNR por la aproximación CVT. No hay dominancia global: hay un punto de operación desplazado. En el ranking de rangos medios intra-bloque de las nueve métricas la propuesta es 1.ª de 7 (3,394), por delante de la pirámide de Laplace (3,911) y del Top-Hat clásico (3,944) — bajo este criterio.</a:t>
-            </a:r>
-            <a:endParaRPr lang="en-US" sz="1250" dirty="0"/>
+          <a:bodyPr wrap="square" lIns="0" rIns="0" tIns="0" bIns="0" anchor="b">
+            <a:spAutoFit/>
+          </a:bodyPr>
+          <a:lstStyle/>
+          <a:p>
+            <a:pPr algn="ctr"/>
+            <a:r>
+              <a:rPr sz="950" b="1">
+                <a:solidFill>
+                  <a:srgbClr val="1A1A1A"/>
+                </a:solidFill>
+                <a:latin typeface="Times New Roman"/>
+              </a:rPr>
+              <a:t>Bloque de ACTIVIDAD ESPACIAL</a:t>
+            </a:r>
+          </a:p>
+        </p:txBody>
+      </p:sp>
+      <p:sp>
+        <p:nvSpPr>
+          <p:cNvPr id="8" name="Text 4"/>
+          <p:cNvSpPr txBox="1"/>
+          <p:nvPr/>
+        </p:nvSpPr>
+        <p:spPr>
+          <a:xfrm>
+            <a:off x="5918085" y="800100"/>
+            <a:ext cx="2768708" cy="228600"/>
+          </a:xfrm>
+          <a:prstGeom prst="rect">
+            <a:avLst/>
+          </a:prstGeom>
+          <a:noFill/>
+        </p:spPr>
+        <p:txBody>
+          <a:bodyPr wrap="square" lIns="0" rIns="0" tIns="0" bIns="0" anchor="b">
+            <a:spAutoFit/>
+          </a:bodyPr>
+          <a:lstStyle/>
+          <a:p>
+            <a:pPr algn="ctr"/>
+            <a:r>
+              <a:rPr sz="950" b="1">
+                <a:solidFill>
+                  <a:srgbClr val="1A1A1A"/>
+                </a:solidFill>
+                <a:latin typeface="Times New Roman"/>
+              </a:rPr>
+              <a:t>Bloque de FIDELIDAD A LAS FUENTES</a:t>
+            </a:r>
           </a:p>
         </p:txBody>
       </p:sp>
@@ -12001,8 +10628,9 @@
               <a:buSzPct val="100000"/>
               <a:buChar char="•"/>
             </a:pPr>
-            <a:r>
-              <a:rPr lang="en-US" sz="1200" dirty="0">
+            <a:endParaRPr lang="en-US" sz="1200" dirty="0"/>
+            <a:r>
+              <a:rPr lang="en-US" sz="1100" dirty="0">
                 <a:solidFill>
                   <a:srgbClr val="1A1A1A"/>
                 </a:solidFill>
@@ -12012,7 +10640,6 @@
               </a:rPr>
               <a:t>Una sola escala (sin cascada multiescala).</a:t>
             </a:r>
-            <a:endParaRPr lang="en-US" sz="1200" dirty="0"/>
           </a:p>
           <a:p>
             <a:pPr marL="177800" indent="-177800">
@@ -12023,7 +10650,7 @@
               <a:buChar char="•"/>
             </a:pPr>
             <a:r>
-              <a:rPr lang="en-US" sz="1200" dirty="0">
+              <a:rPr lang="en-US" sz="1100" dirty="0">
                 <a:solidFill>
                   <a:srgbClr val="1A1A1A"/>
                 </a:solidFill>
@@ -12033,7 +10660,6 @@
               </a:rPr>
               <a:t>Promedio de las 4 orientaciones lineales (ec. 7) + respuesta del disco (ec. 8).</a:t>
             </a:r>
-            <a:endParaRPr lang="en-US" sz="1200" dirty="0"/>
           </a:p>
           <a:p>
             <a:pPr marL="177800" indent="-177800">
@@ -12044,17 +10670,16 @@
               <a:buChar char="•"/>
             </a:pPr>
             <a:r>
-              <a:rPr lang="en-US" sz="1200" b="1" dirty="0">
-                <a:solidFill>
-                  <a:srgbClr val="1A1A1A"/>
-                </a:solidFill>
-                <a:latin typeface="Times New Roman" pitchFamily="34" charset="0"/>
-                <a:ea typeface="Times New Roman" pitchFamily="34" charset="-122"/>
-                <a:cs typeface="Times New Roman" pitchFamily="34" charset="-120"/>
-              </a:rPr>
-              <a:t>Novedad: suma de la rama lineal y la del disco (en lugar del máximo).</a:t>
-            </a:r>
-            <a:endParaRPr lang="en-US" sz="1200" dirty="0"/>
+              <a:rPr lang="en-US" sz="1100" dirty="0">
+                <a:solidFill>
+                  <a:srgbClr val="1A1A1A"/>
+                </a:solidFill>
+                <a:latin typeface="Times New Roman" pitchFamily="34" charset="0"/>
+                <a:ea typeface="Times New Roman" pitchFamily="34" charset="-122"/>
+                <a:cs typeface="Times New Roman" pitchFamily="34" charset="-120"/>
+              </a:rPr>
+              <a:t>Novedad: suma de la rama lineal y la del disco, en lugar del máximo (esquema de Bala et al., 2024, trasladado del realce de fondo de ojo a la fusión VIS/IR).</a:t>
+            </a:r>
           </a:p>
           <a:p>
             <a:pPr marL="177800" indent="-177800">
@@ -12065,17 +10690,16 @@
               <a:buChar char="•"/>
             </a:pPr>
             <a:r>
-              <a:rPr lang="en-US" sz="1200" dirty="0">
-                <a:solidFill>
-                  <a:srgbClr val="1A1A1A"/>
-                </a:solidFill>
-                <a:latin typeface="Times New Roman" pitchFamily="34" charset="0"/>
-                <a:ea typeface="Times New Roman" pitchFamily="34" charset="-122"/>
-                <a:cs typeface="Times New Roman" pitchFamily="34" charset="-120"/>
-              </a:rPr>
-              <a:t>Máximo entre fuentes (ec. 10) y reconstrucción ponderada con m (ec. 11).</a:t>
-            </a:r>
-            <a:endParaRPr lang="en-US" sz="1200" dirty="0"/>
+              <a:rPr lang="en-US" sz="1100" dirty="0">
+                <a:solidFill>
+                  <a:srgbClr val="1A1A1A"/>
+                </a:solidFill>
+                <a:latin typeface="Times New Roman" pitchFamily="34" charset="0"/>
+                <a:ea typeface="Times New Roman" pitchFamily="34" charset="-122"/>
+                <a:cs typeface="Times New Roman" pitchFamily="34" charset="-120"/>
+              </a:rPr>
+              <a:t>Máximo entre fuentes (ec. 10) —no entre las ramas del banco— y reconstrucción ponderada con m sobre I_base = (VIS + IR)/2 (ec. 11).</a:t>
+            </a:r>
           </a:p>
           <a:p>
             <a:pPr marL="177800" indent="-177800">
@@ -12086,17 +10710,16 @@
               <a:buChar char="•"/>
             </a:pPr>
             <a:r>
-              <a:rPr lang="en-US" sz="1200" dirty="0">
-                <a:solidFill>
-                  <a:srgbClr val="1A1A1A"/>
-                </a:solidFill>
-                <a:latin typeface="Times New Roman" pitchFamily="34" charset="0"/>
-                <a:ea typeface="Times New Roman" pitchFamily="34" charset="-122"/>
-                <a:cs typeface="Times New Roman" pitchFamily="34" charset="-120"/>
-              </a:rPr>
-              <a:t>Esquema de Bala et al. (2024), trasladado del realce de fondo de ojo a la fusión VIS/IR.</a:t>
-            </a:r>
-            <a:endParaRPr lang="en-US" sz="1200" dirty="0"/>
+              <a:rPr lang="en-US" sz="1100" dirty="0">
+                <a:solidFill>
+                  <a:srgbClr val="1A1A1A"/>
+                </a:solidFill>
+                <a:latin typeface="Times New Roman" pitchFamily="34" charset="0"/>
+                <a:ea typeface="Times New Roman" pitchFamily="34" charset="-122"/>
+                <a:cs typeface="Times New Roman" pitchFamily="34" charset="-120"/>
+              </a:rPr>
+              <a:t>El aporte de la suma se aísla en la ablación con (r, m) igualados: es el mejor de los seis brazos con las nueve métricas y el cuarto con las diecisiete, y duplica la tasa de artefactos del disco único (Nabf 0,374 frente a 0,185). Lámina 16.</a:t>
+            </a:r>
           </a:p>
         </p:txBody>
       </p:sp>
@@ -12189,7 +10812,7 @@
                 <a:ea typeface="Times New Roman" pitchFamily="34" charset="-122"/>
                 <a:cs typeface="Times New Roman" pitchFamily="34" charset="-120"/>
               </a:rPr>
-              <a:t xml:space="preserve">6. Alcance real de la optimización por PSO</a:t>
+              <a:t xml:space="preserve">6. Alcance real de la optimización por PSO (OE2 / H5)</a:t>
             </a:r>
             <a:endParaRPr lang="en-US" sz="2300" dirty="0"/>
           </a:p>
@@ -12330,8 +10953,8 @@
         </p:nvSpPr>
         <p:spPr>
           <a:xfrm>
-            <a:off x="457200" y="2880360"/>
-            <a:ext cx="4572000" cy="2011680"/>
+            <a:off x="457200" y="2620000"/>
+            <a:ext cx="4350000" cy="2011680"/>
           </a:xfrm>
           <a:prstGeom prst="rect">
             <a:avLst/>
@@ -12351,15 +10974,15 @@
               <a:buChar char="•"/>
             </a:pPr>
             <a:r>
-              <a:rPr lang="en-US" sz="1300" dirty="0">
-                <a:solidFill>
-                  <a:srgbClr val="1A1A1A"/>
-                </a:solidFill>
-                <a:latin typeface="Times New Roman" pitchFamily="34" charset="0"/>
-                <a:ea typeface="Times New Roman" pitchFamily="34" charset="-122"/>
-                <a:cs typeface="Times New Roman" pitchFamily="34" charset="-120"/>
-              </a:rPr>
-              <a:t>Barrido de 25 configuraciones del enjambre: partículas 2–10 × iteraciones 10–50 (réplica de Ortega y Espinoza, 2025), repetido 20 veces cada una: 500 corridas.</a:t>
+              <a:rPr lang="en-US" sz="1250" dirty="0">
+                <a:solidFill>
+                  <a:srgbClr val="1A1A1A"/>
+                </a:solidFill>
+                <a:latin typeface="Times New Roman" pitchFamily="34" charset="0"/>
+                <a:ea typeface="Times New Roman" pitchFamily="34" charset="-122"/>
+                <a:cs typeface="Times New Roman" pitchFamily="34" charset="-120"/>
+              </a:rPr>
+              <a:t>Barrido de 25 configuraciones del enjambre: partículas 2–10 × iteraciones 10–50 (réplica de Ortega y Espinoza, 2025), repetido 20 veces cada una: 500 corridas. La aptitud se promedia sobre 3 de las 20 escenas, que también integran el conjunto de evaluación: no hay partición separada para el ajuste.</a:t>
             </a:r>
             <a:endParaRPr lang="en-US" sz="1300" dirty="0"/>
           </a:p>
@@ -12372,15 +10995,15 @@
               <a:buChar char="•"/>
             </a:pPr>
             <a:r>
-              <a:rPr lang="en-US" sz="1300" b="1" dirty="0">
-                <a:solidFill>
-                  <a:srgbClr val="1A1A1A"/>
-                </a:solidFill>
-                <a:latin typeface="Times New Roman" pitchFamily="34" charset="0"/>
-                <a:ea typeface="Times New Roman" pitchFamily="34" charset="-122"/>
-                <a:cs typeface="Times New Roman" pitchFamily="34" charset="-120"/>
-              </a:rPr>
-              <a:t xml:space="preserve">El peso converge a m* = 0,30 en 499 de las 500 corridas: es el piso del rango y la aptitud decrece de forma monótona en m. El radio no lo fija la búsqueda —r = 25 en el 51,4 % y r = 1 en el 45,6 %—, y el máximo de la aptitud dentro del rango está en r = 1 (1,7350) contra 1,7057 en r = 25. El r = 25 adoptado lo selecciona el bloque de actividad de la batería de evaluación, no la optimización.</a:t>
+              <a:rPr lang="en-US" sz="1250" b="1" dirty="0">
+                <a:solidFill>
+                  <a:srgbClr val="1A1A1A"/>
+                </a:solidFill>
+                <a:latin typeface="Times New Roman" pitchFamily="34" charset="0"/>
+                <a:ea typeface="Times New Roman" pitchFamily="34" charset="-122"/>
+                <a:cs typeface="Times New Roman" pitchFamily="34" charset="-120"/>
+              </a:rPr>
+              <a:t xml:space="preserve">El peso converge a m* = 0,30 en 499 de las 500 corridas: es el piso del rango y la aptitud decrece de forma monótona en m. El radio no lo fija la búsqueda —r = 25 en el 51,4 % y r = 1 en el 45,6 %—, y dentro del rango el máximo de la aptitud está en r = 1. El r = 25 adoptado lo selecciona el bloque de actividad de la batería de evaluación, no la optimización.</a:t>
             </a:r>
             <a:endParaRPr lang="en-US" sz="1300" dirty="0"/>
           </a:p>
@@ -12419,7 +11042,7 @@
         <p:spPr>
           <a:xfrm>
             <a:off x="5029200" y="3749040"/>
-            <a:ext cx="3657600" cy="320040"/>
+            <a:ext cx="3657600" cy="685800"/>
           </a:xfrm>
           <a:prstGeom prst="rect">
             <a:avLst/>
@@ -12434,6 +11057,7 @@
             <a:pPr algn="ctr" indent="0" marL="0">
               <a:buNone/>
             </a:pPr>
+            <a:endParaRPr lang="en-US" sz="1100" dirty="0"/>
             <a:r>
               <a:rPr lang="en-US" sz="1100" i="1" dirty="0">
                 <a:solidFill>
@@ -12445,7 +11069,22 @@
               </a:rPr>
               <a:t>ω: 0,9 → 0,4 · c₁ = c₂ = 1,5 · r ∈ [1, 25] · m ∈ [0,30; 2,00] (rango publicado)</a:t>
             </a:r>
-            <a:endParaRPr lang="en-US" sz="1100" dirty="0"/>
+          </a:p>
+          <a:p>
+            <a:pPr algn="ctr" indent="0" marL="0">
+              <a:buNone/>
+            </a:pPr>
+            <a:r>
+              <a:rPr lang="en-US" sz="1100" i="1" dirty="0">
+                <a:solidFill>
+                  <a:srgbClr val="666666"/>
+                </a:solidFill>
+                <a:latin typeface="Times New Roman" pitchFamily="34" charset="0"/>
+                <a:ea typeface="Times New Roman" pitchFamily="34" charset="-122"/>
+                <a:cs typeface="Times New Roman" pitchFamily="34" charset="-120"/>
+              </a:rPr>
+              <a:t>Dentro del rango publicado, no aplicar el operador puntúa mejor que aplicarlo: la base (VIS + IR)/2 obtiene F_o = 1,7583, por encima de 1,7350 y de 1,7057. Con el peso libre la relación se invierte (1,7715 con m = 0,07).</a:t>
+            </a:r>
           </a:p>
         </p:txBody>
       </p:sp>

--- a/docs/Tesis_Defensa_Presentacion.pptx
+++ b/docs/Tesis_Defensa_Presentacion.pptx
@@ -1537,10 +1537,8 @@
           <a:lstStyle/>
           <a:p>
             <a:r>
-              <a:rPr lang="en-US" dirty="0"/>
-              <a:t>Recorrido de 20 minutos: del problema al método, del método a la evidencia (calidad de imagen, estadística y detección), y de la evidencia a las conclusiones.</a:t>
-            </a:r>
-            <a:endParaRPr lang="en-US" dirty="0"/>
+              <a:t>Recorrido de 20 minutos. Señalar el corte: los puntos 1 a 8 son el primer aporte —el operador y su caracterización— y el punto 9 es el segundo, la auditoría del criterio con que se lo evaluó; el punto 10 alimenta a los dos. Los resultados negativos de los puntos 9 y 10 son parte del diseño del trabajo, no una concesión.</a:t>
+            </a:r>
           </a:p>
         </p:txBody>
       </p:sp>
@@ -1930,10 +1928,20 @@
           <a:lstStyle/>
           <a:p>
             <a:r>
-              <a:rPr lang="en-US" dirty="0"/>
-              <a:t>Motivar con la imagen: la misma escena en VIS, IR y fusionada. El problema práctico es la vigilancia nocturna: ni VIS ni IR bastan por separado.</a:t>
-            </a:r>
-            <a:endParaRPr lang="en-US" dirty="0"/>
+              <a:t>Motivar con la imagen: la misma escena en VIS, IR y fusionada. Ni VIS ni IR bastan por separado.</a:t>
+            </a:r>
+          </a:p>
+          <a:p/>
+          <a:p>
+            <a:r>
+              <a:t>Retirar acá la promesa de «pocos artefactos»: el trabajo no puede sostenerla. Ninguna de las nueve métricas reportadas penaliza artefactos, y la única que sí lo hace, Nabf, deja a los dos operadores morfológicos como los dos peores del benchmark: 0,374 la propuesta y 0,586 el clásico contra 0,114 de la pirámide de Laplace.</a:t>
+            </a:r>
+          </a:p>
+          <a:p/>
+          <a:p>
+            <a:r>
+              <a:t>Esa constatación es el arranque del segundo aporte, y el último párrafo la anuncia: son dos preguntas, no una.</a:t>
+            </a:r>
           </a:p>
         </p:txBody>
       </p:sp>
@@ -2974,7 +2982,7 @@
                 <a:ea typeface="Times New Roman" pitchFamily="34" charset="-122"/>
                 <a:cs typeface="Times New Roman" pitchFamily="34" charset="-120"/>
               </a:rPr>
-              <a:t>Una propuesta de Top-Hat/Bottom-Hat de una sola escala con elementos estructurantes</a:t>
+              <a:t>Un operador Top-Hat/Bottom-Hat de una sola escala con un banco de cinco elementos</a:t>
             </a:r>
             <a:endParaRPr lang="en-US" sz="1400" dirty="0"/>
           </a:p>
@@ -2991,7 +2999,7 @@
                 <a:ea typeface="Times New Roman" pitchFamily="34" charset="-122"/>
                 <a:cs typeface="Times New Roman" pitchFamily="34" charset="-120"/>
               </a:rPr>
-              <a:t>de disco y lineales, optimizada por PSO</a:t>
+              <a:t>estructurantes — y una auditoría del protocolo con que se lo evalúa</a:t>
             </a:r>
             <a:endParaRPr lang="en-US" sz="1400" dirty="0"/>
           </a:p>
@@ -3769,7 +3777,7 @@
         <p:spPr>
           <a:xfrm>
             <a:off x="1764792" y="777240"/>
-            <a:ext cx="5623560" cy="4005072"/>
+            <a:ext cx="5623560" cy="3800000"/>
           </a:xfrm>
           <a:prstGeom prst="rect">
             <a:avLst/>
@@ -3784,8 +3792,8 @@
         </p:nvSpPr>
         <p:spPr>
           <a:xfrm>
-            <a:off x="457200" y="4828032"/>
-            <a:ext cx="7680960" cy="274320"/>
+            <a:off x="457200" y="4660000"/>
+            <a:ext cx="7680960" cy="411480"/>
           </a:xfrm>
           <a:prstGeom prst="rect">
             <a:avLst/>
@@ -3809,7 +3817,7 @@
                 <a:ea typeface="Times New Roman" pitchFamily="34" charset="-122"/>
                 <a:cs typeface="Times New Roman" pitchFamily="34" charset="-120"/>
               </a:rPr>
-              <a:t>Los 20 montajes por escena están disponibles en el repositorio (docs/figures/cualitativas/).</a:t>
+              <a:t>Los 20 montajes están en el repositorio (docs/figures/cualitativas/). El patrón es el del análisis cuantitativo: más realce de bordes y textura que los multiescala, a costa de fidelidad y con más artefactos que el disco único.</a:t>
             </a:r>
             <a:endParaRPr lang="en-US" sz="1000" dirty="0"/>
           </a:p>
@@ -5943,7 +5951,7 @@
               <a:buChar char="•"/>
             </a:pPr>
             <a:r>
-              <a:rPr lang="en-US" sz="1300" b="1" dirty="0">
+              <a:rPr lang="en-US" sz="1250" b="1" dirty="0">
                 <a:solidFill>
                   <a:srgbClr val="1A1A1A"/>
                 </a:solidFill>
@@ -5964,7 +5972,7 @@
               <a:buChar char="•"/>
             </a:pPr>
             <a:r>
-              <a:rPr lang="en-US" sz="1300" dirty="0">
+              <a:rPr lang="en-US" sz="1250" dirty="0">
                 <a:solidFill>
                   <a:srgbClr val="1A1A1A"/>
                 </a:solidFill>
@@ -5985,7 +5993,7 @@
               <a:buChar char="–"/>
             </a:pPr>
             <a:r>
-              <a:rPr lang="en-US" sz="1300" dirty="0">
+              <a:rPr lang="en-US" sz="1250" dirty="0">
                 <a:solidFill>
                   <a:srgbClr val="1A1A1A"/>
                 </a:solidFill>
@@ -6006,15 +6014,15 @@
               <a:buChar char="–"/>
             </a:pPr>
             <a:r>
-              <a:rPr lang="en-US" sz="1300" dirty="0">
-                <a:solidFill>
-                  <a:srgbClr val="1A1A1A"/>
-                </a:solidFill>
-                <a:latin typeface="Times New Roman" pitchFamily="34" charset="0"/>
-                <a:ea typeface="Times New Roman" pitchFamily="34" charset="-122"/>
-                <a:cs typeface="Times New Roman" pitchFamily="34" charset="-120"/>
-              </a:rPr>
-              <a:t xml:space="preserve">Bloque de FIDELIDAD A LAS FUENTES (MI_vis, MI_ir, SSIM, PSNR): 17 de 20 adversos y significativos, uno solo favorable.</a:t>
+              <a:rPr lang="en-US" sz="1250" dirty="0">
+                <a:solidFill>
+                  <a:srgbClr val="1A1A1A"/>
+                </a:solidFill>
+                <a:latin typeface="Times New Roman" pitchFamily="34" charset="0"/>
+                <a:ea typeface="Times New Roman" pitchFamily="34" charset="-122"/>
+                <a:cs typeface="Times New Roman" pitchFamily="34" charset="-120"/>
+              </a:rPr>
+              <a:t xml:space="preserve">Bloque de FIDELIDAD A LAS FUENTES (MI_vis, MI_ir, SSIM, PSNR): 17 de 20 adversos y significativos, uno solo favorable y dos no significativos.</a:t>
             </a:r>
             <a:endParaRPr lang="en-US" sz="1300" dirty="0"/>
           </a:p>
@@ -6027,7 +6035,7 @@
               <a:buChar char="–"/>
             </a:pPr>
             <a:r>
-              <a:rPr lang="en-US" sz="1300" dirty="0">
+              <a:rPr lang="en-US" sz="1250" dirty="0">
                 <a:solidFill>
                   <a:srgbClr val="1A1A1A"/>
                 </a:solidFill>
@@ -6048,15 +6056,15 @@
               <a:buChar char="•"/>
             </a:pPr>
             <a:r>
-              <a:rPr lang="en-US" sz="1300" dirty="0">
-                <a:solidFill>
-                  <a:srgbClr val="1A1A1A"/>
-                </a:solidFill>
-                <a:latin typeface="Times New Roman" pitchFamily="34" charset="0"/>
-                <a:ea typeface="Times New Roman" pitchFamily="34" charset="-122"/>
-                <a:cs typeface="Times New Roman" pitchFamily="34" charset="-120"/>
-              </a:rPr>
-              <a:t xml:space="preserve">Frente al Top-Hat clásico gana en 6 de las 9 métricas —entropía (6,986 frente a 6,922), contraste (0,144 frente a 0,135), eficiencia de fusión, ambas informaciones mutuas y SSIM (0,658 frente a 0,564)— con p_Holm ≤ 0,0002; pierde con significancia en gradiente medio (0,0355 frente a 0,0478) y frecuencia espacial (17,44 frente a 23,10); y empata en PSNR (p_Holm = 0,674).</a:t>
+              <a:rPr lang="en-US" sz="1250" dirty="0">
+                <a:solidFill>
+                  <a:srgbClr val="1A1A1A"/>
+                </a:solidFill>
+                <a:latin typeface="Times New Roman" pitchFamily="34" charset="0"/>
+                <a:ea typeface="Times New Roman" pitchFamily="34" charset="-122"/>
+                <a:cs typeface="Times New Roman" pitchFamily="34" charset="-120"/>
+              </a:rPr>
+              <a:t xml:space="preserve">Frente al Top-Hat clásico gana en 6 de las 9 métricas —entropía (6,986 frente a 6,922), contraste (0,144 frente a 0,135), eficiencia de fusión, ambas informaciones mutuas y SSIM (0,658 frente a 0,564)— con p_Holm ≤ 0,0002; pierde con significancia en gradiente medio (0,0355 frente a 0,0478) y frecuencia espacial (17,44 frente a 23,10); y empata en PSNR (p_Holm = 0,674). Como FE es la entropía reescalada, las dimensiones independientes ganadas son cinco de ocho.</a:t>
             </a:r>
             <a:endParaRPr lang="en-US" sz="1300" dirty="0"/>
           </a:p>
@@ -6069,7 +6077,7 @@
               <a:buChar char="•"/>
             </a:pPr>
             <a:r>
-              <a:rPr lang="en-US" sz="1300" dirty="0">
+              <a:rPr lang="en-US" sz="1250" dirty="0">
                 <a:solidFill>
                   <a:srgbClr val="1A1A1A"/>
                 </a:solidFill>
@@ -7223,8 +7231,8 @@
         </p:blipFill>
         <p:spPr>
           <a:xfrm>
-            <a:off x="1366630" y="868680"/>
-            <a:ext cx="6410739" cy="2400300"/>
+            <a:off x="1847435" y="868680"/>
+            <a:ext cx="5449128" cy="2040255"/>
           </a:xfrm>
           <a:prstGeom prst="rect">
             <a:avLst/>
@@ -7239,7 +7247,7 @@
         </p:nvSpPr>
         <p:spPr>
           <a:xfrm>
-            <a:off x="457200" y="3369600"/>
+            <a:off x="457200" y="2950000"/>
             <a:ext cx="7772400" cy="1670000"/>
           </a:xfrm>
           <a:prstGeom prst="rect">
@@ -7260,15 +7268,15 @@
               <a:buChar char="•"/>
             </a:pPr>
             <a:r>
-              <a:rPr lang="en-US" sz="1150" dirty="0">
-                <a:solidFill>
-                  <a:srgbClr val="1A1A1A"/>
-                </a:solidFill>
-                <a:latin typeface="Times New Roman" pitchFamily="34" charset="0"/>
-                <a:ea typeface="Times New Roman" pitchFamily="34" charset="-122"/>
-                <a:cs typeface="Times New Roman" pitchFamily="34" charset="-120"/>
-              </a:rPr>
-              <a:t xml:space="preserve">Complementariedad real pero asimétrica: el infrarrojo domina en personas (AP@0,5 = 0,779 frente a 0,621 del visible) y se degrada en luces (0,348), mientras el visible sostiene ambas clases en un nivel parejo (0,621 y 0,616). No hay patrón espejo: ninguna modalidad es ciega, y el argumento a favor de fusionar es que ninguna es la mejor en las dos clases a la vez.</a:t>
+              <a:rPr lang="en-US" sz="1100" dirty="0">
+                <a:solidFill>
+                  <a:srgbClr val="1A1A1A"/>
+                </a:solidFill>
+                <a:latin typeface="Times New Roman" pitchFamily="34" charset="0"/>
+                <a:ea typeface="Times New Roman" pitchFamily="34" charset="-122"/>
+                <a:cs typeface="Times New Roman" pitchFamily="34" charset="-120"/>
+              </a:rPr>
+              <a:t xml:space="preserve">Complementariedad real pero asimétrica: el infrarrojo domina en personas (AP@0,5 = 0,779 frente a 0,621 del visible) y se degrada en luces (0,348), mientras el visible sostiene ambas clases en un nivel parejo (0,621 y 0,616). Ninguna modalidad es ciega, pero ninguna es la mejor en las dos clases a la vez: ese es el argumento a favor de fusionar.</a:t>
             </a:r>
             <a:endParaRPr lang="en-US" sz="1150" dirty="0"/>
           </a:p>
@@ -7281,7 +7289,7 @@
               <a:buChar char="•"/>
             </a:pPr>
             <a:r>
-              <a:rPr lang="en-US" sz="1150" b="1" dirty="0">
+              <a:rPr lang="en-US" sz="1100" b="1" dirty="0">
                 <a:solidFill>
                   <a:srgbClr val="1A1A1A"/>
                 </a:solidFill>
@@ -7302,7 +7310,7 @@
               <a:buChar char="•"/>
             </a:pPr>
             <a:r>
-              <a:rPr lang="en-US" sz="1150" dirty="0">
+              <a:rPr lang="en-US" sz="1100" dirty="0">
                 <a:solidFill>
                   <a:srgbClr val="1A1A1A"/>
                 </a:solidFill>
@@ -7313,6 +7321,26 @@
               <a:t xml:space="preserve">Conteo por escena sobre 232 escenas con ambas clases: el mejor caso es la pirámide de Laplace (57,8 %) y cuatro de las siete fusiones quedan por debajo del visible solo (53,0 %). La propuesta recupera ambas en el 50,0 %, con 8 escenas ganadas y 15 perdidas frente al visible (McNemar exacto p = 0,2100), y resuelve 2 de las 90 escenas críticas.</a:t>
             </a:r>
             <a:endParaRPr lang="en-US" sz="1150" dirty="0"/>
+          </a:p>
+          <a:p>
+            <a:pPr marL="177800" indent="-177800">
+              <a:spcAft>
+                <a:spcPts val="400"/>
+              </a:spcAft>
+              <a:buSzPct val="100000"/>
+              <a:buChar char="•"/>
+            </a:pPr>
+            <a:r>
+              <a:rPr lang="en-US" sz="1100" dirty="0">
+                <a:solidFill>
+                  <a:srgbClr val="1A1A1A"/>
+                </a:solidFill>
+                <a:latin typeface="Times New Roman" pitchFamily="34" charset="0"/>
+                <a:ea typeface="Times New Roman" pitchFamily="34" charset="-122"/>
+                <a:cs typeface="Times New Roman" pitchFamily="34" charset="-120"/>
+              </a:rPr>
+              <a:t xml:space="preserve">Se sostiene H6, y con muestra suficiente: lo que queda rechazado es que la mejora de calidad de imagen se traslade a la tarea, no la hipótesis. Es un resultado del trabajo, no una limitación.</a:t>
+            </a:r>
           </a:p>
         </p:txBody>
       </p:sp>
@@ -7922,7 +7950,7 @@
                 <a:ea typeface="Times New Roman" pitchFamily="34" charset="-122"/>
                 <a:cs typeface="Times New Roman" pitchFamily="34" charset="-120"/>
               </a:rPr>
-              <a:t xml:space="preserve">7.  Diseño experimental</a:t>
+              <a:t xml:space="preserve">7.  Diseño experimental: el benchmark y los controles de la auditoría</a:t>
             </a:r>
             <a:endParaRPr lang="en-US" sz="1500" dirty="0"/>
           </a:p>
@@ -8882,7 +8910,7 @@
                 <a:ea typeface="Times New Roman" pitchFamily="34" charset="-122"/>
                 <a:cs typeface="Times New Roman" pitchFamily="34" charset="-120"/>
               </a:rPr>
-              <a:t>La prueba visual: ambas clases en una sola imagen</a:t>
+              <a:t>Reserva — M3FD: dos escenas de la validación (conf ≥ 0,30)</a:t>
             </a:r>
             <a:endParaRPr lang="en-US" sz="2300" dirty="0"/>
           </a:p>
@@ -9129,7 +9157,7 @@
               <a:buChar char="•"/>
             </a:pPr>
             <a:r>
-              <a:rPr lang="en-US" sz="1350" dirty="0">
+              <a:rPr lang="en-US" sz="1150" dirty="0">
                 <a:solidFill>
                   <a:srgbClr val="1A1A1A"/>
                 </a:solidFill>
@@ -9150,7 +9178,7 @@
               <a:buChar char="•"/>
             </a:pPr>
             <a:r>
-              <a:rPr lang="en-US" sz="1350" dirty="0">
+              <a:rPr lang="en-US" sz="1150" dirty="0">
                 <a:solidFill>
                   <a:srgbClr val="1A1A1A"/>
                 </a:solidFill>
@@ -9171,7 +9199,7 @@
               <a:buChar char="•"/>
             </a:pPr>
             <a:r>
-              <a:rPr lang="en-US" sz="1350" dirty="0">
+              <a:rPr lang="en-US" sz="1150" dirty="0">
                 <a:solidFill>
                   <a:srgbClr val="1A1A1A"/>
                 </a:solidFill>
@@ -9192,7 +9220,7 @@
               <a:buChar char="•"/>
             </a:pPr>
             <a:r>
-              <a:rPr lang="en-US" sz="1350" dirty="0">
+              <a:rPr lang="en-US" sz="1150" dirty="0">
                 <a:solidFill>
                   <a:srgbClr val="1A1A1A"/>
                 </a:solidFill>
@@ -9213,17 +9241,37 @@
               <a:buChar char="•"/>
             </a:pPr>
             <a:r>
-              <a:rPr lang="en-US" sz="1350" b="1" dirty="0">
-                <a:solidFill>
-                  <a:srgbClr val="1A1A1A"/>
-                </a:solidFill>
-                <a:latin typeface="Times New Roman" pitchFamily="34" charset="0"/>
-                <a:ea typeface="Times New Roman" pitchFamily="34" charset="-122"/>
-                <a:cs typeface="Times New Roman" pitchFamily="34" charset="-120"/>
-              </a:rPr>
-              <a:t xml:space="preserve">La morfología matemática ofrece un marco alternativo de una sola escala: interpretable, de bajo costo y con un realce direccional gobernado por un solo peso. El compromiso que introduce es actividad espacial contra fidelidad a las fuentes, no una ventaja en artefactos: en la única métrica del estudio que los mide (Nabf, menor es mejor) los dos operadores morfológicos son los más agresivos del benchmark —0,374 la propuesta y 0,586 el Top-Hat clásico, frente a 0,114 de la pirámide de Laplace—.</a:t>
+              <a:rPr lang="en-US" sz="1150" b="1" dirty="0">
+                <a:solidFill>
+                  <a:srgbClr val="1A1A1A"/>
+                </a:solidFill>
+                <a:latin typeface="Times New Roman" pitchFamily="34" charset="0"/>
+                <a:ea typeface="Times New Roman" pitchFamily="34" charset="-122"/>
+                <a:cs typeface="Times New Roman" pitchFamily="34" charset="-120"/>
+              </a:rPr>
+              <a:t xml:space="preserve">La morfología matemática ofrece un marco alternativo de una sola escala: interpretable, de bajo costo y con un realce direccional gobernado por un solo peso. El compromiso es actividad espacial contra fidelidad, no una ventaja en artefactos: en la única métrica que los mide (Nabf, menor es mejor) los dos operadores morfológicos son los más agresivos del benchmark —0,374 la propuesta y 0,586 el clásico, frente a 0,114 de la pirámide de Laplace—.</a:t>
             </a:r>
             <a:endParaRPr lang="en-US" sz="1350" dirty="0"/>
+          </a:p>
+          <a:p>
+            <a:pPr marL="177800" indent="-177800">
+              <a:spcAft>
+                <a:spcPts val="600"/>
+              </a:spcAft>
+              <a:buSzPct val="100000"/>
+              <a:buChar char="•"/>
+            </a:pPr>
+            <a:r>
+              <a:rPr lang="en-US" sz="1150" b="1" dirty="0">
+                <a:solidFill>
+                  <a:srgbClr val="1A1A1A"/>
+                </a:solidFill>
+                <a:latin typeface="Times New Roman" pitchFamily="34" charset="0"/>
+                <a:ea typeface="Times New Roman" pitchFamily="34" charset="-122"/>
+                <a:cs typeface="Times New Roman" pitchFamily="34" charset="-120"/>
+              </a:rPr>
+              <a:t xml:space="preserve">Y hay un segundo problema, previo al primero: la fusión VIS/IR no tiene imagen de referencia, y se evalúa con baterías de métricas sin referencia leídas todas como «mayor es mejor», con los hiperparámetros elegidos sobre esas mismas métricas.</a:t>
+            </a:r>
           </a:p>
         </p:txBody>
       </p:sp>
@@ -9390,7 +9438,7 @@
               <a:buChar char="•"/>
             </a:pPr>
             <a:r>
-              <a:rPr lang="en-US" sz="1350" dirty="0">
+              <a:rPr lang="en-US" sz="1250" dirty="0">
                 <a:solidFill>
                   <a:srgbClr val="1A1A1A"/>
                 </a:solidFill>
@@ -9411,7 +9459,7 @@
               <a:buChar char="•"/>
             </a:pPr>
             <a:r>
-              <a:rPr lang="en-US" sz="1350" dirty="0">
+              <a:rPr lang="en-US" sz="1250" dirty="0">
                 <a:solidFill>
                   <a:srgbClr val="1A1A1A"/>
                 </a:solidFill>
@@ -9432,7 +9480,7 @@
               <a:buChar char="•"/>
             </a:pPr>
             <a:r>
-              <a:rPr lang="en-US" sz="1350" dirty="0">
+              <a:rPr lang="en-US" sz="1250" dirty="0">
                 <a:solidFill>
                   <a:srgbClr val="1A1A1A"/>
                 </a:solidFill>
@@ -9453,7 +9501,7 @@
               <a:buChar char="•"/>
             </a:pPr>
             <a:r>
-              <a:rPr lang="en-US" sz="1350" dirty="0">
+              <a:rPr lang="en-US" sz="1250" dirty="0">
                 <a:solidFill>
                   <a:srgbClr val="1A1A1A"/>
                 </a:solidFill>
@@ -9464,6 +9512,26 @@
               <a:t xml:space="preserve">La tesis no sostiene que el método sea mejor. Sostiene que desplaza el punto de operación en una dirección determinada, y que el orden de mérito que lo corona es propiedad del criterio.</a:t>
             </a:r>
             <a:endParaRPr lang="en-US" sz="1350" dirty="0"/>
+          </a:p>
+          <a:p>
+            <a:pPr marL="177800" indent="-177800">
+              <a:spcAft>
+                <a:spcPts val="1100"/>
+              </a:spcAft>
+              <a:buSzPct val="100000"/>
+              <a:buChar char="•"/>
+            </a:pPr>
+            <a:r>
+              <a:rPr lang="en-US" sz="1250" dirty="0">
+                <a:solidFill>
+                  <a:srgbClr val="1A1A1A"/>
+                </a:solidFill>
+                <a:latin typeface="Times New Roman" pitchFamily="34" charset="0"/>
+                <a:ea typeface="Times New Roman" pitchFamily="34" charset="-122"/>
+                <a:cs typeface="Times New Roman" pitchFamily="34" charset="-120"/>
+              </a:rPr>
+              <a:t xml:space="preserve">Pregunta central: ¿en qué dirección desplaza el punto de operación de la fusión un Top-Hat con banco de cinco elementos estructurantes, y en qué medida el protocolo con que se lo juzga autoriza conclusiones sobre la calidad de la imagen y sobre su utilidad práctica?</a:t>
+            </a:r>
           </a:p>
         </p:txBody>
       </p:sp>

--- a/docs/Tesis_Defensa_Presentacion.pptx
+++ b/docs/Tesis_Defensa_Presentacion.pptx
@@ -3817,7 +3817,7 @@
                 <a:ea typeface="Times New Roman" pitchFamily="34" charset="-122"/>
                 <a:cs typeface="Times New Roman" pitchFamily="34" charset="-120"/>
               </a:rPr>
-              <a:t>Los 20 montajes están en el repositorio (docs/figures/cualitativas/). El patrón es el del análisis cuantitativo: más realce de bordes y textura que los multiescala, a costa de fidelidad y con más artefactos que el disco único.</a:t>
+              <a:t>Los 20 montajes —uno por par, correspondientes a 13 escenas distintas— están en el repositorio (docs/figures/cualitativas/). El patrón es el del análisis cuantitativo: más realce de bordes y textura que los multiescala, a costa de fidelidad y con más artefactos que el disco único.</a:t>
             </a:r>
             <a:endParaRPr lang="en-US" sz="1000" dirty="0"/>
           </a:p>

--- a/docs/Tesis_Defensa_Presentacion.pptx
+++ b/docs/Tesis_Defensa_Presentacion.pptx
@@ -1143,7 +1143,7 @@
           <a:p/>
           <a:p>
             <a:r>
-              <a:t>No usar la etiqueta «parcial» para H6: con ρ = +0,214, p = 0,645 y 232 escenas, el rechazo de la hipótesis de traslación es limpio y es un aporte.</a:t>
+              <a:t>No usar la etiqueta «parcial» para H6: con ρ = -0,357 y p = 0,432 sobre 5 semillas, y 232 escenas, el rechazo de la hipótesis de traslación es limpio y es un aporte.</a:t>
             </a:r>
           </a:p>
           <a:p/>
@@ -1155,7 +1155,7 @@
           <a:p/>
           <a:p>
             <a:r>
-              <a:t>SI PREGUNTAN POR LA CORRELACIÓN DE H6, hay una respuesta preparada y conviene darla antes de que la busquen. El ρ = +0,214 es con las nueve métricas reportadas sobre el mAP@0,5 de LLVIP, y ninguno de los cuatro contrastes con esas nueve alcanza significancia. Pero al repetir la correlación con el conjunto ampliado de diecisiete sobre el mAP@0,5:0,95 de M3FD, sí aparece asociación y en la dirección esperada: ρ = −0,8929 con p = 0,0068. Son doce contrastes sobre siete métodos, así que ese único hallazgo no sobrevive a la corrección por multiplicidad (Bonferroni 0,0816) y hay que presentarlo como una pista, no como un resultado. Lo que dice es lo mismo que el control negativo: la batería de nueve no predice la utilidad y la ampliada apunta a que sí. Lo calcula experiments/run_correlacion_calidad_deteccion.py.</a:t>
+              <a:t>SI PREGUNTAN POR LA CORRELACIÓN DE H6, hay una respuesta preparada y conviene darla antes de que la busquen. El ρ es -0,357 con las nueve métricas sobre el mAP@0,5 de LLVIP promediado en 5 semillas, con p = 0,432, y ninguno de los contrastes con esas nueve alcanza significancia. Sobre la corrida de una sola semilla ese coeficiente daba +0,214, positivo: el signo contrario al esperado que se comentaba antes era un artefacto de esa única tirada, y conviene no repetirlo. Pero al repetir la correlación con el conjunto ampliado de diecisiete sobre el mAP@0,5:0,95 de M3FD, sí aparece asociación y en la dirección esperada: ρ = −0,8929 con p = 0,0068. Son doce contrastes sobre siete métodos, así que ese único hallazgo no sobrevive a la corrección por multiplicidad (Bonferroni 0,0816) y hay que presentarlo como una pista, no como un resultado. Lo que dice es lo mismo que el control negativo: la batería de nueve no predice la utilidad y la ampliada apunta a que sí. Lo calcula experiments/run_correlacion_calidad_deteccion.py.</a:t>
             </a:r>
           </a:p>
         </p:txBody>
@@ -3645,7 +3645,7 @@
                 </a:solidFill>
                 <a:latin typeface="Times New Roman"/>
               </a:rPr>
-              <a:t>Limitaciones declaradas: CVT es una aproximación de tipo curvelet con wavelet 2D db4, no la transformada curvelet, de modo que los cinco comparativos cubren cuatro familias; los 20 pares incluyen series de tomas de la misma escena, y las conclusiones se verificaron agregando por escena; LLVIP no tiene partición de prueba separada de la de selección, y se reporta el checkpoint final; y los experimentos de detección usan una sola semilla, por lo que diferencias de milésimas entre métodos no son distinguibles.</a:t>
+              <a:t>Limitaciones declaradas: CVT es una aproximación de tipo curvelet con wavelet 2D db4, no la transformada curvelet, de modo que los cinco comparativos cubren cuatro familias; los 20 pares incluyen series de tomas de la misma escena, y las conclusiones se verificaron agregando por escena; LLVIP no tiene partición de prueba separada de la de selección, y se reporta el checkpoint final; LLVIP se repitió con 5 semillas de entrenamiento por entrada y el desvío de una misma entrada es 0,0128 de mAP@0,5, de modo que las diferencias menores que eso entre fusiones no son distinguibles; M3FD conserva un único entrenamiento.</a:t>
             </a:r>
           </a:p>
         </p:txBody>
@@ -7622,7 +7622,7 @@
                 </a:solidFill>
                 <a:latin typeface="Times New Roman"/>
               </a:rPr>
-              <a:t>Ninguna fusión supera al infrarrojo solo en LLVIP (0,971 frente a 0,952 de la mejor fusión), el orden de calidad no predice el mAP (ρ = +0,214; p = 0,645) y en el conteo por escena de M3FD la propuesta queda por debajo del visible (50,0 % frente a 53,0 %; McNemar exacto p = 0,2100; n = 232).</a:t>
+              <a:t>El infrarrojo solo supera a 6 de las siete fusiones en LLVIP y de la séptima no se distingue (0,961 frente a 0,952, sobre 5 semillas), el orden de calidad no predice el mAP (ρ = -0,357; p = 0,432, sobre la media de 5 semillas) y en el conteo por escena de M3FD la propuesta queda por debajo del visible (50,0 % frente a 53,0 %; McNemar exacto p = 0,2100; n = 232).</a:t>
             </a:r>
           </a:p>
           <a:p>

--- a/docs/Tesis_Defensa_Presentacion.pptx
+++ b/docs/Tesis_Defensa_Presentacion.pptx
@@ -6998,7 +6998,7 @@
       </p:sp>
       <p:pic>
         <p:nvPicPr>
-          <p:cNvPr id="4" name="Image 0" descr="C:\Users\Usuario\AppData\Local\Temp\claude\C--Users-Usuario-Documents-unv-mastertesis\fa0a2acc-a0da-4701-a920-18b20c70d3b2\scratchpad\pptx_build/assets/map_llvip.png">    </p:cNvPr>
+          <p:cNvPr id="4" name="Image 0" descr="10. Contraste externo I — detección en LLVIP (H6)">    </p:cNvPr>
           <p:cNvPicPr>
             <a:picLocks noChangeAspect="1"/>
           </p:cNvPicPr>
@@ -7217,7 +7217,7 @@
       </p:sp>
       <p:pic>
         <p:nvPicPr>
-          <p:cNvPr id="4" name="Image 0" descr="C:\Users\Usuario\AppData\Local\Temp\claude\C--Users-Usuario-Documents-unv-mastertesis\fa0a2acc-a0da-4701-a920-18b20c70d3b2\scratchpad\pptx_build/assets/m3fd_par.png">    </p:cNvPr>
+          <p:cNvPr id="4" name="Image 0" descr="Contraste externo II — M3FD: el conteo por escena (H6)">    </p:cNvPr>
           <p:cNvPicPr>
             <a:picLocks noChangeAspect="1"/>
           </p:cNvPicPr>
@@ -10410,7 +10410,7 @@
       </p:pic>
       <p:pic>
         <p:nvPicPr>
-          <p:cNvPr id="6" name="Image 1" descr="C:\Users\Usuario\AppData\Local\Temp\claude\C--Users-Usuario-Documents-unv-mastertesis\fa0a2acc-a0da-4701-a920-18b20c70d3b2\scratchpad\pptx_build/assets/f_tophat.png">    </p:cNvPr>
+          <p:cNvPr id="6" name="Image 1" descr="4. Marco: la transformada Top-Hat y la fusión clásica">    </p:cNvPr>
           <p:cNvPicPr>
             <a:picLocks noChangeAspect="1"/>
           </p:cNvPicPr>
@@ -10793,7 +10793,7 @@
       </p:sp>
       <p:pic>
         <p:nvPicPr>
-          <p:cNvPr id="7" name="Image 2" descr="C:\Users\Usuario\AppData\Local\Temp\claude\C--Users-Usuario-Documents-unv-mastertesis\fa0a2acc-a0da-4701-a920-18b20c70d3b2\scratchpad\pptx_build/assets/f_suma.png">    </p:cNvPr>
+          <p:cNvPr id="7" name="Image 2" descr="5. El operador: banco de SE y suma de ramas">    </p:cNvPr>
           <p:cNvPicPr>
             <a:picLocks noChangeAspect="1"/>
           </p:cNvPicPr>
@@ -10991,7 +10991,7 @@
       </p:sp>
       <p:pic>
         <p:nvPicPr>
-          <p:cNvPr id="5" name="Image 0" descr="C:\Users\Usuario\AppData\Local\Temp\claude\C--Users-Usuario-Documents-unv-mastertesis\fa0a2acc-a0da-4701-a920-18b20c70d3b2\scratchpad\pptx_build/assets/f_aptitud.png">    </p:cNvPr>
+          <p:cNvPr id="5" name="Image 0" descr="6. Alcance real de la optimización por PSO (OE2 / H5)">    </p:cNvPr>
           <p:cNvPicPr>
             <a:picLocks noChangeAspect="1"/>
           </p:cNvPicPr>
@@ -11079,7 +11079,7 @@
       </p:sp>
       <p:pic>
         <p:nvPicPr>
-          <p:cNvPr id="7" name="Image 1" descr="C:\Users\Usuario\AppData\Local\Temp\claude\C--Users-Usuario-Documents-unv-mastertesis\fa0a2acc-a0da-4701-a920-18b20c70d3b2\scratchpad\pptx_build/assets/pso_barrido.png">    </p:cNvPr>
+          <p:cNvPr id="7" name="Image 1" descr="6. Alcance real de la optimización por PSO (OE2 / H5)">    </p:cNvPr>
           <p:cNvPicPr>
             <a:picLocks noChangeAspect="1"/>
           </p:cNvPicPr>

--- a/docs/Tesis_Defensa_Presentacion.pptx
+++ b/docs/Tesis_Defensa_Presentacion.pptx
@@ -3762,7 +3762,7 @@
       </p:sp>
       <p:pic>
         <p:nvPicPr>
-          <p:cNvPr id="4" name="Image 0" descr="C:/Users/Usuario/Documents/unv/mastertesis/tesis_mciencias_datos/docs/figures/cualitativas/montaje_07.png">    </p:cNvPr>
+          <p:cNvPr id="4" name="Image 0" descr="8. Resultados cualitativos">    </p:cNvPr>
           <p:cNvPicPr>
             <a:picLocks noChangeAspect="1"/>
           </p:cNvPicPr>
@@ -8957,7 +8957,7 @@
       </p:sp>
       <p:pic>
         <p:nvPicPr>
-          <p:cNvPr id="4" name="Image 0" descr="C:/Users/Usuario/Documents/unv/mastertesis/tesis_mciencias_datos/docs/figures/fig_m3fd_detecciones.png">    </p:cNvPr>
+          <p:cNvPr id="4" name="Image 0" descr="Reserva — M3FD: dos escenas de la validación (conf ≥ 0,30)">    </p:cNvPr>
           <p:cNvPicPr>
             <a:picLocks noChangeAspect="1"/>
           </p:cNvPicPr>
@@ -9277,7 +9277,7 @@
       </p:sp>
       <p:pic>
         <p:nvPicPr>
-          <p:cNvPr id="5" name="Image 0" descr="C:/Users/Usuario/Documents/unv/mastertesis/tesis_mciencias_datos/docs/figures/ejemplo_modalidades.png">    </p:cNvPr>
+          <p:cNvPr id="5" name="Image 0" descr="1. Problema: dos preguntas, no una">    </p:cNvPr>
           <p:cNvPicPr>
             <a:picLocks noChangeAspect="1"/>
           </p:cNvPicPr>
@@ -10386,7 +10386,7 @@
       </p:sp>
       <p:pic>
         <p:nvPicPr>
-          <p:cNvPr id="5" name="Image 0" descr="C:/Users/Usuario/Documents/unv/mastertesis/tesis_mciencias_datos/docs/figures/fig_morfologia_tophat.png">    </p:cNvPr>
+          <p:cNvPr id="5" name="Image 0" descr="4. Marco: la transformada Top-Hat y la fusión clásica">    </p:cNvPr>
           <p:cNvPicPr>
             <a:picLocks noChangeAspect="1"/>
           </p:cNvPicPr>
@@ -10622,7 +10622,7 @@
       </p:sp>
       <p:pic>
         <p:nvPicPr>
-          <p:cNvPr id="4" name="Image 0" descr="C:/Users/Usuario/Documents/unv/mastertesis/tesis_mciencias_datos/docs/figures/fig_flujo_propuesta.png">    </p:cNvPr>
+          <p:cNvPr id="4" name="Image 0" descr="5. El operador: banco de SE y suma de ramas">    </p:cNvPr>
           <p:cNvPicPr>
             <a:picLocks noChangeAspect="1"/>
           </p:cNvPicPr>
@@ -10646,7 +10646,7 @@
       </p:pic>
       <p:pic>
         <p:nvPicPr>
-          <p:cNvPr id="5" name="Image 1" descr="C:/Users/Usuario/Documents/unv/mastertesis/tesis_mciencias_datos/docs/figures/fig_cinco_se.png">    </p:cNvPr>
+          <p:cNvPr id="5" name="Image 1" descr="5. El operador: banco de SE y suma de ramas">    </p:cNvPr>
           <p:cNvPicPr>
             <a:picLocks noChangeAspect="1"/>
           </p:cNvPicPr>
